--- a/Gsasrec.pptx
+++ b/Gsasrec.pptx
@@ -15,6 +15,9 @@
     <p:sldId id="262" r:id="rId9"/>
     <p:sldId id="264" r:id="rId10"/>
     <p:sldId id="265" r:id="rId11"/>
+    <p:sldId id="266" r:id="rId12"/>
+    <p:sldId id="267" r:id="rId13"/>
+    <p:sldId id="268" r:id="rId14"/>
   </p:sldIdLst>
   <p:sldSz cx="12192000" cy="6858000"/>
   <p:notesSz cx="6858000" cy="9144000"/>
@@ -6143,7 +6146,7 @@
           <a:p>
             <a:fld id="{842CECD3-3569-4D6E-AA1B-67789CA6B4B3}" type="datetimeFigureOut">
               <a:rPr lang="en-GB" smtClean="0"/>
-              <a:t>25/04/2026</a:t>
+              <a:t>30/04/2026</a:t>
             </a:fld>
             <a:endParaRPr lang="en-GB"/>
           </a:p>
@@ -6579,7 +6582,7 @@
           <a:p>
             <a:fld id="{842CECD3-3569-4D6E-AA1B-67789CA6B4B3}" type="datetimeFigureOut">
               <a:rPr lang="en-GB" smtClean="0"/>
-              <a:t>25/04/2026</a:t>
+              <a:t>30/04/2026</a:t>
             </a:fld>
             <a:endParaRPr lang="en-GB"/>
           </a:p>
@@ -6829,7 +6832,7 @@
           <a:p>
             <a:fld id="{842CECD3-3569-4D6E-AA1B-67789CA6B4B3}" type="datetimeFigureOut">
               <a:rPr lang="en-GB" smtClean="0"/>
-              <a:t>25/04/2026</a:t>
+              <a:t>30/04/2026</a:t>
             </a:fld>
             <a:endParaRPr lang="en-GB"/>
           </a:p>
@@ -7137,7 +7140,7 @@
           <a:p>
             <a:fld id="{842CECD3-3569-4D6E-AA1B-67789CA6B4B3}" type="datetimeFigureOut">
               <a:rPr lang="en-GB" smtClean="0"/>
-              <a:t>25/04/2026</a:t>
+              <a:t>30/04/2026</a:t>
             </a:fld>
             <a:endParaRPr lang="en-GB"/>
           </a:p>
@@ -7455,7 +7458,7 @@
           <a:p>
             <a:fld id="{842CECD3-3569-4D6E-AA1B-67789CA6B4B3}" type="datetimeFigureOut">
               <a:rPr lang="en-GB" smtClean="0"/>
-              <a:t>25/04/2026</a:t>
+              <a:t>30/04/2026</a:t>
             </a:fld>
             <a:endParaRPr lang="en-GB"/>
           </a:p>
@@ -7757,7 +7760,7 @@
           <a:p>
             <a:fld id="{842CECD3-3569-4D6E-AA1B-67789CA6B4B3}" type="datetimeFigureOut">
               <a:rPr lang="en-GB" smtClean="0"/>
-              <a:t>25/04/2026</a:t>
+              <a:t>30/04/2026</a:t>
             </a:fld>
             <a:endParaRPr lang="en-GB"/>
           </a:p>
@@ -8124,7 +8127,7 @@
           <a:p>
             <a:fld id="{842CECD3-3569-4D6E-AA1B-67789CA6B4B3}" type="datetimeFigureOut">
               <a:rPr lang="en-GB" smtClean="0"/>
-              <a:t>25/04/2026</a:t>
+              <a:t>30/04/2026</a:t>
             </a:fld>
             <a:endParaRPr lang="en-GB"/>
           </a:p>
@@ -8298,7 +8301,7 @@
           <a:p>
             <a:fld id="{842CECD3-3569-4D6E-AA1B-67789CA6B4B3}" type="datetimeFigureOut">
               <a:rPr lang="en-GB" smtClean="0"/>
-              <a:t>25/04/2026</a:t>
+              <a:t>30/04/2026</a:t>
             </a:fld>
             <a:endParaRPr lang="en-GB"/>
           </a:p>
@@ -8478,7 +8481,7 @@
           <a:p>
             <a:fld id="{842CECD3-3569-4D6E-AA1B-67789CA6B4B3}" type="datetimeFigureOut">
               <a:rPr lang="en-GB" smtClean="0"/>
-              <a:t>25/04/2026</a:t>
+              <a:t>30/04/2026</a:t>
             </a:fld>
             <a:endParaRPr lang="en-GB"/>
           </a:p>
@@ -8648,7 +8651,7 @@
           <a:p>
             <a:fld id="{842CECD3-3569-4D6E-AA1B-67789CA6B4B3}" type="datetimeFigureOut">
               <a:rPr lang="en-GB" smtClean="0"/>
-              <a:t>25/04/2026</a:t>
+              <a:t>30/04/2026</a:t>
             </a:fld>
             <a:endParaRPr lang="en-GB"/>
           </a:p>
@@ -8898,7 +8901,7 @@
           <a:p>
             <a:fld id="{842CECD3-3569-4D6E-AA1B-67789CA6B4B3}" type="datetimeFigureOut">
               <a:rPr lang="en-GB" smtClean="0"/>
-              <a:t>25/04/2026</a:t>
+              <a:t>30/04/2026</a:t>
             </a:fld>
             <a:endParaRPr lang="en-GB"/>
           </a:p>
@@ -9134,7 +9137,7 @@
           <a:p>
             <a:fld id="{842CECD3-3569-4D6E-AA1B-67789CA6B4B3}" type="datetimeFigureOut">
               <a:rPr lang="en-GB" smtClean="0"/>
-              <a:t>25/04/2026</a:t>
+              <a:t>30/04/2026</a:t>
             </a:fld>
             <a:endParaRPr lang="en-GB"/>
           </a:p>
@@ -9516,7 +9519,7 @@
           <a:p>
             <a:fld id="{842CECD3-3569-4D6E-AA1B-67789CA6B4B3}" type="datetimeFigureOut">
               <a:rPr lang="en-GB" smtClean="0"/>
-              <a:t>25/04/2026</a:t>
+              <a:t>30/04/2026</a:t>
             </a:fld>
             <a:endParaRPr lang="en-GB"/>
           </a:p>
@@ -9634,7 +9637,7 @@
           <a:p>
             <a:fld id="{842CECD3-3569-4D6E-AA1B-67789CA6B4B3}" type="datetimeFigureOut">
               <a:rPr lang="en-GB" smtClean="0"/>
-              <a:t>25/04/2026</a:t>
+              <a:t>30/04/2026</a:t>
             </a:fld>
             <a:endParaRPr lang="en-GB"/>
           </a:p>
@@ -9729,7 +9732,7 @@
           <a:p>
             <a:fld id="{842CECD3-3569-4D6E-AA1B-67789CA6B4B3}" type="datetimeFigureOut">
               <a:rPr lang="en-GB" smtClean="0"/>
-              <a:t>25/04/2026</a:t>
+              <a:t>30/04/2026</a:t>
             </a:fld>
             <a:endParaRPr lang="en-GB"/>
           </a:p>
@@ -9984,7 +9987,7 @@
           <a:p>
             <a:fld id="{842CECD3-3569-4D6E-AA1B-67789CA6B4B3}" type="datetimeFigureOut">
               <a:rPr lang="en-GB" smtClean="0"/>
-              <a:t>25/04/2026</a:t>
+              <a:t>30/04/2026</a:t>
             </a:fld>
             <a:endParaRPr lang="en-GB"/>
           </a:p>
@@ -10267,7 +10270,7 @@
           <a:p>
             <a:fld id="{842CECD3-3569-4D6E-AA1B-67789CA6B4B3}" type="datetimeFigureOut">
               <a:rPr lang="en-GB" smtClean="0"/>
-              <a:t>25/04/2026</a:t>
+              <a:t>30/04/2026</a:t>
             </a:fld>
             <a:endParaRPr lang="en-GB"/>
           </a:p>
@@ -10673,7 +10676,7 @@
           <a:p>
             <a:fld id="{842CECD3-3569-4D6E-AA1B-67789CA6B4B3}" type="datetimeFigureOut">
               <a:rPr lang="en-GB" smtClean="0"/>
-              <a:t>25/04/2026</a:t>
+              <a:t>30/04/2026</a:t>
             </a:fld>
             <a:endParaRPr lang="en-GB"/>
           </a:p>
@@ -11581,6 +11584,459 @@
 </p:sld>
 </file>
 
+<file path=ppt/slides/slide11.xml><?xml version="1.0" encoding="utf-8"?>
+<p:sld xmlns:a="http://schemas.openxmlformats.org/drawingml/2006/main" xmlns:r="http://schemas.openxmlformats.org/officeDocument/2006/relationships" xmlns:p="http://schemas.openxmlformats.org/presentationml/2006/main">
+  <p:cSld>
+    <p:spTree>
+      <p:nvGrpSpPr>
+        <p:cNvPr id="1" name=""/>
+        <p:cNvGrpSpPr/>
+        <p:nvPr/>
+      </p:nvGrpSpPr>
+      <p:grpSpPr>
+        <a:xfrm>
+          <a:off x="0" y="0"/>
+          <a:ext cx="0" cy="0"/>
+          <a:chOff x="0" y="0"/>
+          <a:chExt cx="0" cy="0"/>
+        </a:xfrm>
+      </p:grpSpPr>
+      <p:sp>
+        <p:nvSpPr>
+          <p:cNvPr id="2" name="Title 1">
+            <a:extLst>
+              <a:ext uri="{FF2B5EF4-FFF2-40B4-BE49-F238E27FC236}">
+                <a16:creationId xmlns:a16="http://schemas.microsoft.com/office/drawing/2014/main" id="{BCC950C5-BD42-D313-9BBD-40EBD1243637}"/>
+              </a:ext>
+            </a:extLst>
+          </p:cNvPr>
+          <p:cNvSpPr>
+            <a:spLocks noGrp="1"/>
+          </p:cNvSpPr>
+          <p:nvPr>
+            <p:ph type="title"/>
+          </p:nvPr>
+        </p:nvSpPr>
+        <p:spPr/>
+        <p:txBody>
+          <a:bodyPr/>
+          <a:lstStyle/>
+          <a:p>
+            <a:r>
+              <a:rPr lang="it-IT" dirty="0"/>
+              <a:t>OTTIMIZZAZIONE DEGLI IPERPARAMETRI</a:t>
+            </a:r>
+            <a:endParaRPr lang="en-GB" dirty="0"/>
+          </a:p>
+        </p:txBody>
+      </p:sp>
+      <p:sp>
+        <p:nvSpPr>
+          <p:cNvPr id="3" name="Content Placeholder 2">
+            <a:extLst>
+              <a:ext uri="{FF2B5EF4-FFF2-40B4-BE49-F238E27FC236}">
+                <a16:creationId xmlns:a16="http://schemas.microsoft.com/office/drawing/2014/main" id="{F83D878F-729D-FE9B-1482-69E151CB938C}"/>
+              </a:ext>
+            </a:extLst>
+          </p:cNvPr>
+          <p:cNvSpPr>
+            <a:spLocks noGrp="1"/>
+          </p:cNvSpPr>
+          <p:nvPr>
+            <p:ph idx="1"/>
+          </p:nvPr>
+        </p:nvSpPr>
+        <p:spPr/>
+        <p:txBody>
+          <a:bodyPr/>
+          <a:lstStyle/>
+          <a:p>
+            <a:pPr marL="0" indent="0">
+              <a:buNone/>
+            </a:pPr>
+            <a:r>
+              <a:rPr lang="it-IT" dirty="0">
+                <a:solidFill>
+                  <a:schemeClr val="tx1"/>
+                </a:solidFill>
+              </a:rPr>
+              <a:t>Per poter verificare quale sia la miglior combinazione di </a:t>
+            </a:r>
+            <a:r>
+              <a:rPr lang="it-IT" dirty="0" err="1">
+                <a:solidFill>
+                  <a:schemeClr val="tx1"/>
+                </a:solidFill>
+              </a:rPr>
+              <a:t>iperparametri</a:t>
+            </a:r>
+            <a:r>
+              <a:rPr lang="it-IT" dirty="0">
+                <a:solidFill>
+                  <a:schemeClr val="tx1"/>
+                </a:solidFill>
+              </a:rPr>
+              <a:t>:</a:t>
+            </a:r>
+          </a:p>
+          <a:p>
+            <a:r>
+              <a:rPr lang="it-IT" dirty="0">
+                <a:solidFill>
+                  <a:schemeClr val="tx1"/>
+                </a:solidFill>
+              </a:rPr>
+              <a:t>È stata utilizzata NDCG@10 come metrica di valutazione.</a:t>
+            </a:r>
+          </a:p>
+          <a:p>
+            <a:r>
+              <a:rPr lang="it-IT" dirty="0">
+                <a:solidFill>
+                  <a:schemeClr val="tx1"/>
+                </a:solidFill>
+              </a:rPr>
+              <a:t>È stato creato fine_tuning.py che si appoggia a </a:t>
+            </a:r>
+            <a:r>
+              <a:rPr lang="it-IT" dirty="0" err="1">
+                <a:solidFill>
+                  <a:schemeClr val="tx1"/>
+                </a:solidFill>
+              </a:rPr>
+              <a:t>optuna</a:t>
+            </a:r>
+            <a:r>
+              <a:rPr lang="it-IT" dirty="0">
+                <a:solidFill>
+                  <a:schemeClr val="tx1"/>
+                </a:solidFill>
+              </a:rPr>
+              <a:t>.</a:t>
+            </a:r>
+          </a:p>
+          <a:p>
+            <a:r>
+              <a:rPr lang="it-IT" dirty="0">
+                <a:solidFill>
+                  <a:schemeClr val="tx1"/>
+                </a:solidFill>
+              </a:rPr>
+              <a:t>È stato modificato </a:t>
+            </a:r>
+            <a:r>
+              <a:rPr lang="it-IT" dirty="0" err="1">
+                <a:solidFill>
+                  <a:schemeClr val="tx1"/>
+                </a:solidFill>
+              </a:rPr>
+              <a:t>train_gsasrec</a:t>
+            </a:r>
+            <a:r>
+              <a:rPr lang="it-IT" dirty="0">
+                <a:solidFill>
+                  <a:schemeClr val="tx1"/>
+                </a:solidFill>
+              </a:rPr>
+              <a:t> per poter esser richiamato ogni volta fosse necessario provare una combinazione.</a:t>
+            </a:r>
+          </a:p>
+        </p:txBody>
+      </p:sp>
+    </p:spTree>
+    <p:extLst>
+      <p:ext uri="{BB962C8B-B14F-4D97-AF65-F5344CB8AC3E}">
+        <p14:creationId xmlns:p14="http://schemas.microsoft.com/office/powerpoint/2010/main" val="777409367"/>
+      </p:ext>
+    </p:extLst>
+  </p:cSld>
+  <p:clrMapOvr>
+    <a:masterClrMapping/>
+  </p:clrMapOvr>
+</p:sld>
+</file>
+
+<file path=ppt/slides/slide12.xml><?xml version="1.0" encoding="utf-8"?>
+<p:sld xmlns:a="http://schemas.openxmlformats.org/drawingml/2006/main" xmlns:r="http://schemas.openxmlformats.org/officeDocument/2006/relationships" xmlns:p="http://schemas.openxmlformats.org/presentationml/2006/main">
+  <p:cSld>
+    <p:spTree>
+      <p:nvGrpSpPr>
+        <p:cNvPr id="1" name=""/>
+        <p:cNvGrpSpPr/>
+        <p:nvPr/>
+      </p:nvGrpSpPr>
+      <p:grpSpPr>
+        <a:xfrm>
+          <a:off x="0" y="0"/>
+          <a:ext cx="0" cy="0"/>
+          <a:chOff x="0" y="0"/>
+          <a:chExt cx="0" cy="0"/>
+        </a:xfrm>
+      </p:grpSpPr>
+      <p:sp>
+        <p:nvSpPr>
+          <p:cNvPr id="2" name="Title 1">
+            <a:extLst>
+              <a:ext uri="{FF2B5EF4-FFF2-40B4-BE49-F238E27FC236}">
+                <a16:creationId xmlns:a16="http://schemas.microsoft.com/office/drawing/2014/main" id="{F17F82B6-D018-2AD1-80FD-CD347D5659C8}"/>
+              </a:ext>
+            </a:extLst>
+          </p:cNvPr>
+          <p:cNvSpPr>
+            <a:spLocks noGrp="1"/>
+          </p:cNvSpPr>
+          <p:nvPr>
+            <p:ph type="title"/>
+          </p:nvPr>
+        </p:nvSpPr>
+        <p:spPr/>
+        <p:txBody>
+          <a:bodyPr/>
+          <a:lstStyle/>
+          <a:p>
+            <a:r>
+              <a:rPr lang="it-IT" dirty="0"/>
+              <a:t>Fine_tuning.py</a:t>
+            </a:r>
+            <a:endParaRPr lang="en-GB" dirty="0"/>
+          </a:p>
+        </p:txBody>
+      </p:sp>
+      <p:sp>
+        <p:nvSpPr>
+          <p:cNvPr id="3" name="Content Placeholder 2">
+            <a:extLst>
+              <a:ext uri="{FF2B5EF4-FFF2-40B4-BE49-F238E27FC236}">
+                <a16:creationId xmlns:a16="http://schemas.microsoft.com/office/drawing/2014/main" id="{CF576F9B-23DA-306F-F2F1-63A1205B3C6B}"/>
+              </a:ext>
+            </a:extLst>
+          </p:cNvPr>
+          <p:cNvSpPr>
+            <a:spLocks noGrp="1"/>
+          </p:cNvSpPr>
+          <p:nvPr>
+            <p:ph idx="1"/>
+          </p:nvPr>
+        </p:nvSpPr>
+        <p:spPr/>
+        <p:txBody>
+          <a:bodyPr/>
+          <a:lstStyle/>
+          <a:p>
+            <a:pPr marL="0" indent="0">
+              <a:buNone/>
+            </a:pPr>
+            <a:r>
+              <a:rPr lang="it-IT" dirty="0">
+                <a:solidFill>
+                  <a:schemeClr val="tx1"/>
+                </a:solidFill>
+              </a:rPr>
+              <a:t>Questo file va a creare e poi ogni volta modificare config_optuna.py da passare tramite linea di comando per poter specificare ogni volta i parametri. </a:t>
+            </a:r>
+            <a:r>
+              <a:rPr lang="it-IT" dirty="0" err="1">
+                <a:solidFill>
+                  <a:schemeClr val="tx1"/>
+                </a:solidFill>
+              </a:rPr>
+              <a:t>Optuna</a:t>
+            </a:r>
+            <a:r>
+              <a:rPr lang="it-IT" dirty="0">
+                <a:solidFill>
+                  <a:schemeClr val="tx1"/>
+                </a:solidFill>
+              </a:rPr>
+              <a:t> si basa sull’ottimizzazione </a:t>
+            </a:r>
+            <a:r>
+              <a:rPr lang="it-IT" dirty="0" err="1">
+                <a:solidFill>
+                  <a:schemeClr val="tx1"/>
+                </a:solidFill>
+              </a:rPr>
+              <a:t>Bayesiana</a:t>
+            </a:r>
+            <a:r>
+              <a:rPr lang="it-IT" dirty="0">
+                <a:solidFill>
+                  <a:schemeClr val="tx1"/>
+                </a:solidFill>
+              </a:rPr>
+              <a:t>, per ogni tentativo prevede quali potrebbero essere i parametri migliori per il tentativo successivo. Scelto perché:</a:t>
+            </a:r>
+          </a:p>
+          <a:p>
+            <a:r>
+              <a:rPr lang="it-IT" dirty="0">
+                <a:solidFill>
+                  <a:schemeClr val="tx1"/>
+                </a:solidFill>
+              </a:rPr>
+              <a:t>Impara dal passato.</a:t>
+            </a:r>
+          </a:p>
+          <a:p>
+            <a:r>
+              <a:rPr lang="it-IT" dirty="0">
+                <a:solidFill>
+                  <a:schemeClr val="tx1"/>
+                </a:solidFill>
+              </a:rPr>
+              <a:t>Fa risparmiare tempo, utile soprattutto in contesti di training lunghi.</a:t>
+            </a:r>
+          </a:p>
+          <a:p>
+            <a:r>
+              <a:rPr lang="it-IT" dirty="0">
+                <a:solidFill>
+                  <a:schemeClr val="tx1"/>
+                </a:solidFill>
+              </a:rPr>
+              <a:t>Framework </a:t>
+            </a:r>
+            <a:r>
+              <a:rPr lang="it-IT" dirty="0" err="1">
+                <a:solidFill>
+                  <a:schemeClr val="tx1"/>
+                </a:solidFill>
+              </a:rPr>
+              <a:t>agnostic</a:t>
+            </a:r>
+            <a:r>
+              <a:rPr lang="it-IT" dirty="0">
+                <a:solidFill>
+                  <a:schemeClr val="tx1"/>
+                </a:solidFill>
+              </a:rPr>
+              <a:t> (a differenza di </a:t>
+            </a:r>
+            <a:r>
+              <a:rPr lang="it-IT" dirty="0" err="1">
+                <a:solidFill>
+                  <a:schemeClr val="tx1"/>
+                </a:solidFill>
+              </a:rPr>
+              <a:t>GridSearchCV</a:t>
+            </a:r>
+            <a:r>
+              <a:rPr lang="it-IT" dirty="0">
+                <a:solidFill>
+                  <a:schemeClr val="tx1"/>
+                </a:solidFill>
+              </a:rPr>
+              <a:t>)</a:t>
+            </a:r>
+            <a:endParaRPr lang="en-GB" dirty="0">
+              <a:solidFill>
+                <a:schemeClr val="tx1"/>
+              </a:solidFill>
+            </a:endParaRPr>
+          </a:p>
+        </p:txBody>
+      </p:sp>
+    </p:spTree>
+    <p:extLst>
+      <p:ext uri="{BB962C8B-B14F-4D97-AF65-F5344CB8AC3E}">
+        <p14:creationId xmlns:p14="http://schemas.microsoft.com/office/powerpoint/2010/main" val="1553646564"/>
+      </p:ext>
+    </p:extLst>
+  </p:cSld>
+  <p:clrMapOvr>
+    <a:masterClrMapping/>
+  </p:clrMapOvr>
+</p:sld>
+</file>
+
+<file path=ppt/slides/slide13.xml><?xml version="1.0" encoding="utf-8"?>
+<p:sld xmlns:a="http://schemas.openxmlformats.org/drawingml/2006/main" xmlns:r="http://schemas.openxmlformats.org/officeDocument/2006/relationships" xmlns:p="http://schemas.openxmlformats.org/presentationml/2006/main">
+  <p:cSld>
+    <p:spTree>
+      <p:nvGrpSpPr>
+        <p:cNvPr id="1" name=""/>
+        <p:cNvGrpSpPr/>
+        <p:nvPr/>
+      </p:nvGrpSpPr>
+      <p:grpSpPr>
+        <a:xfrm>
+          <a:off x="0" y="0"/>
+          <a:ext cx="0" cy="0"/>
+          <a:chOff x="0" y="0"/>
+          <a:chExt cx="0" cy="0"/>
+        </a:xfrm>
+      </p:grpSpPr>
+      <p:sp>
+        <p:nvSpPr>
+          <p:cNvPr id="2" name="Title 1">
+            <a:extLst>
+              <a:ext uri="{FF2B5EF4-FFF2-40B4-BE49-F238E27FC236}">
+                <a16:creationId xmlns:a16="http://schemas.microsoft.com/office/drawing/2014/main" id="{D106D4DC-3F3E-33DC-2BDE-8023342EDA8A}"/>
+              </a:ext>
+            </a:extLst>
+          </p:cNvPr>
+          <p:cNvSpPr>
+            <a:spLocks noGrp="1"/>
+          </p:cNvSpPr>
+          <p:nvPr>
+            <p:ph type="title"/>
+          </p:nvPr>
+        </p:nvSpPr>
+        <p:spPr/>
+        <p:txBody>
+          <a:bodyPr/>
+          <a:lstStyle/>
+          <a:p>
+            <a:r>
+              <a:rPr lang="it-IT" dirty="0"/>
+              <a:t>Range degli </a:t>
+            </a:r>
+            <a:r>
+              <a:rPr lang="it-IT" dirty="0" err="1"/>
+              <a:t>iperparametri</a:t>
+            </a:r>
+            <a:endParaRPr lang="en-GB" dirty="0"/>
+          </a:p>
+        </p:txBody>
+      </p:sp>
+      <p:sp>
+        <p:nvSpPr>
+          <p:cNvPr id="3" name="Content Placeholder 2">
+            <a:extLst>
+              <a:ext uri="{FF2B5EF4-FFF2-40B4-BE49-F238E27FC236}">
+                <a16:creationId xmlns:a16="http://schemas.microsoft.com/office/drawing/2014/main" id="{346D75B8-7ECB-AD6F-8118-0610B93CBFD6}"/>
+              </a:ext>
+            </a:extLst>
+          </p:cNvPr>
+          <p:cNvSpPr>
+            <a:spLocks noGrp="1"/>
+          </p:cNvSpPr>
+          <p:nvPr>
+            <p:ph idx="1"/>
+          </p:nvPr>
+        </p:nvSpPr>
+        <p:spPr/>
+        <p:txBody>
+          <a:bodyPr/>
+          <a:lstStyle/>
+          <a:p>
+            <a:endParaRPr lang="en-GB"/>
+          </a:p>
+        </p:txBody>
+      </p:sp>
+    </p:spTree>
+    <p:extLst>
+      <p:ext uri="{BB962C8B-B14F-4D97-AF65-F5344CB8AC3E}">
+        <p14:creationId xmlns:p14="http://schemas.microsoft.com/office/powerpoint/2010/main" val="1824266746"/>
+      </p:ext>
+    </p:extLst>
+  </p:cSld>
+  <p:clrMapOvr>
+    <a:masterClrMapping/>
+  </p:clrMapOvr>
+</p:sld>
+</file>
+
 <file path=ppt/slides/slide2.xml><?xml version="1.0" encoding="utf-8"?>
 <p:sld xmlns:a="http://schemas.openxmlformats.org/drawingml/2006/main" xmlns:r="http://schemas.openxmlformats.org/officeDocument/2006/relationships" xmlns:p="http://schemas.openxmlformats.org/presentationml/2006/main">
   <p:cSld>

--- a/Gsasrec.pptx
+++ b/Gsasrec.pptx
@@ -18,6 +18,8 @@
     <p:sldId id="266" r:id="rId12"/>
     <p:sldId id="267" r:id="rId13"/>
     <p:sldId id="268" r:id="rId14"/>
+    <p:sldId id="269" r:id="rId15"/>
+    <p:sldId id="270" r:id="rId16"/>
   </p:sldIdLst>
   <p:sldSz cx="12192000" cy="6858000"/>
   <p:notesSz cx="6858000" cy="9144000"/>
@@ -6146,7 +6148,7 @@
           <a:p>
             <a:fld id="{842CECD3-3569-4D6E-AA1B-67789CA6B4B3}" type="datetimeFigureOut">
               <a:rPr lang="en-GB" smtClean="0"/>
-              <a:t>30/04/2026</a:t>
+              <a:t>04/05/2026</a:t>
             </a:fld>
             <a:endParaRPr lang="en-GB"/>
           </a:p>
@@ -6582,7 +6584,7 @@
           <a:p>
             <a:fld id="{842CECD3-3569-4D6E-AA1B-67789CA6B4B3}" type="datetimeFigureOut">
               <a:rPr lang="en-GB" smtClean="0"/>
-              <a:t>30/04/2026</a:t>
+              <a:t>04/05/2026</a:t>
             </a:fld>
             <a:endParaRPr lang="en-GB"/>
           </a:p>
@@ -6832,7 +6834,7 @@
           <a:p>
             <a:fld id="{842CECD3-3569-4D6E-AA1B-67789CA6B4B3}" type="datetimeFigureOut">
               <a:rPr lang="en-GB" smtClean="0"/>
-              <a:t>30/04/2026</a:t>
+              <a:t>04/05/2026</a:t>
             </a:fld>
             <a:endParaRPr lang="en-GB"/>
           </a:p>
@@ -7140,7 +7142,7 @@
           <a:p>
             <a:fld id="{842CECD3-3569-4D6E-AA1B-67789CA6B4B3}" type="datetimeFigureOut">
               <a:rPr lang="en-GB" smtClean="0"/>
-              <a:t>30/04/2026</a:t>
+              <a:t>04/05/2026</a:t>
             </a:fld>
             <a:endParaRPr lang="en-GB"/>
           </a:p>
@@ -7458,7 +7460,7 @@
           <a:p>
             <a:fld id="{842CECD3-3569-4D6E-AA1B-67789CA6B4B3}" type="datetimeFigureOut">
               <a:rPr lang="en-GB" smtClean="0"/>
-              <a:t>30/04/2026</a:t>
+              <a:t>04/05/2026</a:t>
             </a:fld>
             <a:endParaRPr lang="en-GB"/>
           </a:p>
@@ -7760,7 +7762,7 @@
           <a:p>
             <a:fld id="{842CECD3-3569-4D6E-AA1B-67789CA6B4B3}" type="datetimeFigureOut">
               <a:rPr lang="en-GB" smtClean="0"/>
-              <a:t>30/04/2026</a:t>
+              <a:t>04/05/2026</a:t>
             </a:fld>
             <a:endParaRPr lang="en-GB"/>
           </a:p>
@@ -8127,7 +8129,7 @@
           <a:p>
             <a:fld id="{842CECD3-3569-4D6E-AA1B-67789CA6B4B3}" type="datetimeFigureOut">
               <a:rPr lang="en-GB" smtClean="0"/>
-              <a:t>30/04/2026</a:t>
+              <a:t>04/05/2026</a:t>
             </a:fld>
             <a:endParaRPr lang="en-GB"/>
           </a:p>
@@ -8301,7 +8303,7 @@
           <a:p>
             <a:fld id="{842CECD3-3569-4D6E-AA1B-67789CA6B4B3}" type="datetimeFigureOut">
               <a:rPr lang="en-GB" smtClean="0"/>
-              <a:t>30/04/2026</a:t>
+              <a:t>04/05/2026</a:t>
             </a:fld>
             <a:endParaRPr lang="en-GB"/>
           </a:p>
@@ -8481,7 +8483,7 @@
           <a:p>
             <a:fld id="{842CECD3-3569-4D6E-AA1B-67789CA6B4B3}" type="datetimeFigureOut">
               <a:rPr lang="en-GB" smtClean="0"/>
-              <a:t>30/04/2026</a:t>
+              <a:t>04/05/2026</a:t>
             </a:fld>
             <a:endParaRPr lang="en-GB"/>
           </a:p>
@@ -8651,7 +8653,7 @@
           <a:p>
             <a:fld id="{842CECD3-3569-4D6E-AA1B-67789CA6B4B3}" type="datetimeFigureOut">
               <a:rPr lang="en-GB" smtClean="0"/>
-              <a:t>30/04/2026</a:t>
+              <a:t>04/05/2026</a:t>
             </a:fld>
             <a:endParaRPr lang="en-GB"/>
           </a:p>
@@ -8901,7 +8903,7 @@
           <a:p>
             <a:fld id="{842CECD3-3569-4D6E-AA1B-67789CA6B4B3}" type="datetimeFigureOut">
               <a:rPr lang="en-GB" smtClean="0"/>
-              <a:t>30/04/2026</a:t>
+              <a:t>04/05/2026</a:t>
             </a:fld>
             <a:endParaRPr lang="en-GB"/>
           </a:p>
@@ -9137,7 +9139,7 @@
           <a:p>
             <a:fld id="{842CECD3-3569-4D6E-AA1B-67789CA6B4B3}" type="datetimeFigureOut">
               <a:rPr lang="en-GB" smtClean="0"/>
-              <a:t>30/04/2026</a:t>
+              <a:t>04/05/2026</a:t>
             </a:fld>
             <a:endParaRPr lang="en-GB"/>
           </a:p>
@@ -9519,7 +9521,7 @@
           <a:p>
             <a:fld id="{842CECD3-3569-4D6E-AA1B-67789CA6B4B3}" type="datetimeFigureOut">
               <a:rPr lang="en-GB" smtClean="0"/>
-              <a:t>30/04/2026</a:t>
+              <a:t>04/05/2026</a:t>
             </a:fld>
             <a:endParaRPr lang="en-GB"/>
           </a:p>
@@ -9637,7 +9639,7 @@
           <a:p>
             <a:fld id="{842CECD3-3569-4D6E-AA1B-67789CA6B4B3}" type="datetimeFigureOut">
               <a:rPr lang="en-GB" smtClean="0"/>
-              <a:t>30/04/2026</a:t>
+              <a:t>04/05/2026</a:t>
             </a:fld>
             <a:endParaRPr lang="en-GB"/>
           </a:p>
@@ -9732,7 +9734,7 @@
           <a:p>
             <a:fld id="{842CECD3-3569-4D6E-AA1B-67789CA6B4B3}" type="datetimeFigureOut">
               <a:rPr lang="en-GB" smtClean="0"/>
-              <a:t>30/04/2026</a:t>
+              <a:t>04/05/2026</a:t>
             </a:fld>
             <a:endParaRPr lang="en-GB"/>
           </a:p>
@@ -9987,7 +9989,7 @@
           <a:p>
             <a:fld id="{842CECD3-3569-4D6E-AA1B-67789CA6B4B3}" type="datetimeFigureOut">
               <a:rPr lang="en-GB" smtClean="0"/>
-              <a:t>30/04/2026</a:t>
+              <a:t>04/05/2026</a:t>
             </a:fld>
             <a:endParaRPr lang="en-GB"/>
           </a:p>
@@ -10270,7 +10272,7 @@
           <a:p>
             <a:fld id="{842CECD3-3569-4D6E-AA1B-67789CA6B4B3}" type="datetimeFigureOut">
               <a:rPr lang="en-GB" smtClean="0"/>
-              <a:t>30/04/2026</a:t>
+              <a:t>04/05/2026</a:t>
             </a:fld>
             <a:endParaRPr lang="en-GB"/>
           </a:p>
@@ -10676,7 +10678,7 @@
           <a:p>
             <a:fld id="{842CECD3-3569-4D6E-AA1B-67789CA6B4B3}" type="datetimeFigureOut">
               <a:rPr lang="en-GB" smtClean="0"/>
-              <a:t>30/04/2026</a:t>
+              <a:t>04/05/2026</a:t>
             </a:fld>
             <a:endParaRPr lang="en-GB"/>
           </a:p>
@@ -11741,6 +11743,29 @@
               <a:t> per poter esser richiamato ogni volta fosse necessario provare una combinazione.</a:t>
             </a:r>
           </a:p>
+          <a:p>
+            <a:r>
+              <a:rPr lang="it-IT" dirty="0">
+                <a:solidFill>
+                  <a:schemeClr val="tx1"/>
+                </a:solidFill>
+              </a:rPr>
+              <a:t>Si è </a:t>
+            </a:r>
+            <a:r>
+              <a:rPr lang="it-IT">
+                <a:solidFill>
+                  <a:schemeClr val="tx1"/>
+                </a:solidFill>
+              </a:rPr>
+              <a:t>fatto affidamento su una GPU RTX 2000 Ada (16 GB VRAM)</a:t>
+            </a:r>
+            <a:endParaRPr lang="it-IT" dirty="0">
+              <a:solidFill>
+                <a:schemeClr val="tx1"/>
+              </a:solidFill>
+            </a:endParaRPr>
+          </a:p>
         </p:txBody>
       </p:sp>
     </p:spTree>
@@ -12020,7 +12045,166 @@
           <a:bodyPr/>
           <a:lstStyle/>
           <a:p>
-            <a:endParaRPr lang="en-GB"/>
+            <a:r>
+              <a:rPr lang="it-IT" dirty="0" err="1">
+                <a:solidFill>
+                  <a:schemeClr val="tx1"/>
+                </a:solidFill>
+              </a:rPr>
+              <a:t>Gbce_t</a:t>
+            </a:r>
+            <a:r>
+              <a:rPr lang="it-IT" dirty="0">
+                <a:solidFill>
+                  <a:schemeClr val="tx1"/>
+                </a:solidFill>
+              </a:rPr>
+              <a:t>: [0.0, 0.5, 0.75, 1.0]*</a:t>
+            </a:r>
+          </a:p>
+          <a:p>
+            <a:r>
+              <a:rPr lang="it-IT" dirty="0" err="1">
+                <a:solidFill>
+                  <a:schemeClr val="tx1"/>
+                </a:solidFill>
+              </a:rPr>
+              <a:t>Num_blocks</a:t>
+            </a:r>
+            <a:r>
+              <a:rPr lang="it-IT" dirty="0">
+                <a:solidFill>
+                  <a:schemeClr val="tx1"/>
+                </a:solidFill>
+              </a:rPr>
+              <a:t>: [1, 3]</a:t>
+            </a:r>
+          </a:p>
+          <a:p>
+            <a:r>
+              <a:rPr lang="it-IT" dirty="0" err="1">
+                <a:solidFill>
+                  <a:schemeClr val="tx1"/>
+                </a:solidFill>
+              </a:rPr>
+              <a:t>Embedding_dim</a:t>
+            </a:r>
+            <a:r>
+              <a:rPr lang="it-IT" dirty="0">
+                <a:solidFill>
+                  <a:schemeClr val="tx1"/>
+                </a:solidFill>
+              </a:rPr>
+              <a:t>: [128, 256]*</a:t>
+            </a:r>
+          </a:p>
+          <a:p>
+            <a:r>
+              <a:rPr lang="it-IT" dirty="0" err="1">
+                <a:solidFill>
+                  <a:schemeClr val="tx1"/>
+                </a:solidFill>
+              </a:rPr>
+              <a:t>Num_heads</a:t>
+            </a:r>
+            <a:r>
+              <a:rPr lang="it-IT" dirty="0">
+                <a:solidFill>
+                  <a:schemeClr val="tx1"/>
+                </a:solidFill>
+              </a:rPr>
+              <a:t>: [2, 4]*</a:t>
+            </a:r>
+          </a:p>
+          <a:p>
+            <a:r>
+              <a:rPr lang="it-IT" dirty="0" err="1">
+                <a:solidFill>
+                  <a:schemeClr val="tx1"/>
+                </a:solidFill>
+              </a:rPr>
+              <a:t>Dropout_rate</a:t>
+            </a:r>
+            <a:r>
+              <a:rPr lang="it-IT" dirty="0">
+                <a:solidFill>
+                  <a:schemeClr val="tx1"/>
+                </a:solidFill>
+              </a:rPr>
+              <a:t>: [0.1, 0.5]</a:t>
+            </a:r>
+          </a:p>
+          <a:p>
+            <a:r>
+              <a:rPr lang="it-IT" dirty="0" err="1">
+                <a:solidFill>
+                  <a:schemeClr val="tx1"/>
+                </a:solidFill>
+              </a:rPr>
+              <a:t>Train_batch_size</a:t>
+            </a:r>
+            <a:r>
+              <a:rPr lang="it-IT" dirty="0">
+                <a:solidFill>
+                  <a:schemeClr val="tx1"/>
+                </a:solidFill>
+              </a:rPr>
+              <a:t>: [64, 128]*</a:t>
+            </a:r>
+          </a:p>
+          <a:p>
+            <a:r>
+              <a:rPr lang="it-IT" dirty="0" err="1">
+                <a:solidFill>
+                  <a:schemeClr val="tx1"/>
+                </a:solidFill>
+              </a:rPr>
+              <a:t>Sequence_length</a:t>
+            </a:r>
+            <a:r>
+              <a:rPr lang="it-IT" dirty="0">
+                <a:solidFill>
+                  <a:schemeClr val="tx1"/>
+                </a:solidFill>
+              </a:rPr>
+              <a:t>: [50, 100, 200]*</a:t>
+            </a:r>
+          </a:p>
+        </p:txBody>
+      </p:sp>
+      <p:sp>
+        <p:nvSpPr>
+          <p:cNvPr id="4" name="TextBox 3">
+            <a:extLst>
+              <a:ext uri="{FF2B5EF4-FFF2-40B4-BE49-F238E27FC236}">
+                <a16:creationId xmlns:a16="http://schemas.microsoft.com/office/drawing/2014/main" id="{A830D6F5-3392-1923-6944-A4BA6AB756FB}"/>
+              </a:ext>
+            </a:extLst>
+          </p:cNvPr>
+          <p:cNvSpPr txBox="1"/>
+          <p:nvPr/>
+        </p:nvSpPr>
+        <p:spPr>
+          <a:xfrm>
+            <a:off x="186812" y="6361470"/>
+            <a:ext cx="2172390" cy="369332"/>
+          </a:xfrm>
+          <a:prstGeom prst="rect">
+            <a:avLst/>
+          </a:prstGeom>
+          <a:noFill/>
+        </p:spPr>
+        <p:txBody>
+          <a:bodyPr wrap="none" rtlCol="0">
+            <a:spAutoFit/>
+          </a:bodyPr>
+          <a:lstStyle/>
+          <a:p>
+            <a:r>
+              <a:rPr lang="it-IT" dirty="0"/>
+              <a:t>*range categorici</a:t>
+            </a:r>
+            <a:endParaRPr lang="en-GB" dirty="0"/>
           </a:p>
         </p:txBody>
       </p:sp>
@@ -12028,6 +12212,398 @@
     <p:extLst>
       <p:ext uri="{BB962C8B-B14F-4D97-AF65-F5344CB8AC3E}">
         <p14:creationId xmlns:p14="http://schemas.microsoft.com/office/powerpoint/2010/main" val="1824266746"/>
+      </p:ext>
+    </p:extLst>
+  </p:cSld>
+  <p:clrMapOvr>
+    <a:masterClrMapping/>
+  </p:clrMapOvr>
+</p:sld>
+</file>
+
+<file path=ppt/slides/slide14.xml><?xml version="1.0" encoding="utf-8"?>
+<p:sld xmlns:a="http://schemas.openxmlformats.org/drawingml/2006/main" xmlns:r="http://schemas.openxmlformats.org/officeDocument/2006/relationships" xmlns:p="http://schemas.openxmlformats.org/presentationml/2006/main">
+  <p:cSld>
+    <p:spTree>
+      <p:nvGrpSpPr>
+        <p:cNvPr id="1" name=""/>
+        <p:cNvGrpSpPr/>
+        <p:nvPr/>
+      </p:nvGrpSpPr>
+      <p:grpSpPr>
+        <a:xfrm>
+          <a:off x="0" y="0"/>
+          <a:ext cx="0" cy="0"/>
+          <a:chOff x="0" y="0"/>
+          <a:chExt cx="0" cy="0"/>
+        </a:xfrm>
+      </p:grpSpPr>
+      <p:sp>
+        <p:nvSpPr>
+          <p:cNvPr id="2" name="Title 1">
+            <a:extLst>
+              <a:ext uri="{FF2B5EF4-FFF2-40B4-BE49-F238E27FC236}">
+                <a16:creationId xmlns:a16="http://schemas.microsoft.com/office/drawing/2014/main" id="{B95B4631-4F9F-3FD6-4B56-D870AD8F3EAE}"/>
+              </a:ext>
+            </a:extLst>
+          </p:cNvPr>
+          <p:cNvSpPr>
+            <a:spLocks noGrp="1"/>
+          </p:cNvSpPr>
+          <p:nvPr>
+            <p:ph type="title"/>
+          </p:nvPr>
+        </p:nvSpPr>
+        <p:spPr/>
+        <p:txBody>
+          <a:bodyPr/>
+          <a:lstStyle/>
+          <a:p>
+            <a:r>
+              <a:rPr lang="it-IT" dirty="0"/>
+              <a:t>MIGLIOR CONFIGURAZIONE</a:t>
+            </a:r>
+            <a:endParaRPr lang="en-GB" dirty="0"/>
+          </a:p>
+        </p:txBody>
+      </p:sp>
+      <p:sp>
+        <p:nvSpPr>
+          <p:cNvPr id="3" name="Content Placeholder 2">
+            <a:extLst>
+              <a:ext uri="{FF2B5EF4-FFF2-40B4-BE49-F238E27FC236}">
+                <a16:creationId xmlns:a16="http://schemas.microsoft.com/office/drawing/2014/main" id="{C6763A6F-58BE-4F86-3846-CEA3F0DF2B91}"/>
+              </a:ext>
+            </a:extLst>
+          </p:cNvPr>
+          <p:cNvSpPr>
+            <a:spLocks noGrp="1"/>
+          </p:cNvSpPr>
+          <p:nvPr>
+            <p:ph idx="1"/>
+          </p:nvPr>
+        </p:nvSpPr>
+        <p:spPr/>
+        <p:txBody>
+          <a:bodyPr>
+            <a:normAutofit fontScale="85000" lnSpcReduction="10000"/>
+          </a:bodyPr>
+          <a:lstStyle/>
+          <a:p>
+            <a:pPr marL="0" indent="0">
+              <a:buNone/>
+            </a:pPr>
+            <a:r>
+              <a:rPr lang="it-IT" dirty="0">
+                <a:solidFill>
+                  <a:schemeClr val="tx1"/>
+                </a:solidFill>
+              </a:rPr>
+              <a:t>La miglior configurazione dopo 20 trials, ha presentato i seguenti parametri (messi a confronto con quelli usati dagli autori del modello): </a:t>
+            </a:r>
+          </a:p>
+          <a:p>
+            <a:r>
+              <a:rPr lang="it-IT" dirty="0" err="1">
+                <a:solidFill>
+                  <a:schemeClr val="tx1"/>
+                </a:solidFill>
+              </a:rPr>
+              <a:t>gbce_t</a:t>
+            </a:r>
+            <a:r>
+              <a:rPr lang="it-IT" dirty="0">
+                <a:solidFill>
+                  <a:schemeClr val="tx1"/>
+                </a:solidFill>
+              </a:rPr>
+              <a:t>: 0.5 (0.75)</a:t>
+            </a:r>
+          </a:p>
+          <a:p>
+            <a:r>
+              <a:rPr lang="it-IT" dirty="0" err="1">
+                <a:solidFill>
+                  <a:schemeClr val="tx1"/>
+                </a:solidFill>
+              </a:rPr>
+              <a:t>num_blocks</a:t>
+            </a:r>
+            <a:r>
+              <a:rPr lang="it-IT" dirty="0">
+                <a:solidFill>
+                  <a:schemeClr val="tx1"/>
+                </a:solidFill>
+              </a:rPr>
+              <a:t>: 1 (2)</a:t>
+            </a:r>
+          </a:p>
+          <a:p>
+            <a:r>
+              <a:rPr lang="it-IT" dirty="0" err="1">
+                <a:solidFill>
+                  <a:schemeClr val="tx1"/>
+                </a:solidFill>
+              </a:rPr>
+              <a:t>embedding_dim</a:t>
+            </a:r>
+            <a:r>
+              <a:rPr lang="it-IT" dirty="0">
+                <a:solidFill>
+                  <a:schemeClr val="tx1"/>
+                </a:solidFill>
+              </a:rPr>
+              <a:t>: 256 (128)</a:t>
+            </a:r>
+          </a:p>
+          <a:p>
+            <a:r>
+              <a:rPr lang="it-IT" dirty="0" err="1">
+                <a:solidFill>
+                  <a:schemeClr val="tx1"/>
+                </a:solidFill>
+              </a:rPr>
+              <a:t>num_heads</a:t>
+            </a:r>
+            <a:r>
+              <a:rPr lang="it-IT" dirty="0">
+                <a:solidFill>
+                  <a:schemeClr val="tx1"/>
+                </a:solidFill>
+              </a:rPr>
+              <a:t>: 4 (1)</a:t>
+            </a:r>
+          </a:p>
+          <a:p>
+            <a:r>
+              <a:rPr lang="it-IT" dirty="0" err="1">
+                <a:solidFill>
+                  <a:schemeClr val="tx1"/>
+                </a:solidFill>
+              </a:rPr>
+              <a:t>dropout_rate</a:t>
+            </a:r>
+            <a:r>
+              <a:rPr lang="it-IT" dirty="0">
+                <a:solidFill>
+                  <a:schemeClr val="tx1"/>
+                </a:solidFill>
+              </a:rPr>
+              <a:t>: 0.16519583830077267 (0.5)</a:t>
+            </a:r>
+          </a:p>
+          <a:p>
+            <a:r>
+              <a:rPr lang="it-IT" dirty="0" err="1">
+                <a:solidFill>
+                  <a:schemeClr val="tx1"/>
+                </a:solidFill>
+              </a:rPr>
+              <a:t>train_batch_size</a:t>
+            </a:r>
+            <a:r>
+              <a:rPr lang="it-IT" dirty="0">
+                <a:solidFill>
+                  <a:schemeClr val="tx1"/>
+                </a:solidFill>
+              </a:rPr>
+              <a:t>: 64 (128)</a:t>
+            </a:r>
+          </a:p>
+          <a:p>
+            <a:r>
+              <a:rPr lang="it-IT" dirty="0" err="1">
+                <a:solidFill>
+                  <a:schemeClr val="tx1"/>
+                </a:solidFill>
+              </a:rPr>
+              <a:t>sequence_length</a:t>
+            </a:r>
+            <a:r>
+              <a:rPr lang="it-IT" dirty="0">
+                <a:solidFill>
+                  <a:schemeClr val="tx1"/>
+                </a:solidFill>
+              </a:rPr>
+              <a:t>: 200 (200)</a:t>
+            </a:r>
+          </a:p>
+          <a:p>
+            <a:pPr marL="0" indent="0">
+              <a:buNone/>
+            </a:pPr>
+            <a:r>
+              <a:rPr lang="it-IT" dirty="0">
+                <a:solidFill>
+                  <a:schemeClr val="tx1"/>
+                </a:solidFill>
+              </a:rPr>
+              <a:t>Con NDGC@10 pari a 0.1349321142424068 (0.197) dopo 3910 (47520) step.</a:t>
+            </a:r>
+            <a:endParaRPr lang="en-GB" dirty="0">
+              <a:solidFill>
+                <a:schemeClr val="tx1"/>
+              </a:solidFill>
+            </a:endParaRPr>
+          </a:p>
+        </p:txBody>
+      </p:sp>
+    </p:spTree>
+    <p:extLst>
+      <p:ext uri="{BB962C8B-B14F-4D97-AF65-F5344CB8AC3E}">
+        <p14:creationId xmlns:p14="http://schemas.microsoft.com/office/powerpoint/2010/main" val="699051150"/>
+      </p:ext>
+    </p:extLst>
+  </p:cSld>
+  <p:clrMapOvr>
+    <a:masterClrMapping/>
+  </p:clrMapOvr>
+</p:sld>
+</file>
+
+<file path=ppt/slides/slide15.xml><?xml version="1.0" encoding="utf-8"?>
+<p:sld xmlns:a="http://schemas.openxmlformats.org/drawingml/2006/main" xmlns:r="http://schemas.openxmlformats.org/officeDocument/2006/relationships" xmlns:p="http://schemas.openxmlformats.org/presentationml/2006/main">
+  <p:cSld>
+    <p:spTree>
+      <p:nvGrpSpPr>
+        <p:cNvPr id="1" name=""/>
+        <p:cNvGrpSpPr/>
+        <p:nvPr/>
+      </p:nvGrpSpPr>
+      <p:grpSpPr>
+        <a:xfrm>
+          <a:off x="0" y="0"/>
+          <a:ext cx="0" cy="0"/>
+          <a:chOff x="0" y="0"/>
+          <a:chExt cx="0" cy="0"/>
+        </a:xfrm>
+      </p:grpSpPr>
+      <p:sp>
+        <p:nvSpPr>
+          <p:cNvPr id="2" name="Title 1">
+            <a:extLst>
+              <a:ext uri="{FF2B5EF4-FFF2-40B4-BE49-F238E27FC236}">
+                <a16:creationId xmlns:a16="http://schemas.microsoft.com/office/drawing/2014/main" id="{77C8BED9-814F-5653-73A0-116D66833313}"/>
+              </a:ext>
+            </a:extLst>
+          </p:cNvPr>
+          <p:cNvSpPr>
+            <a:spLocks noGrp="1"/>
+          </p:cNvSpPr>
+          <p:nvPr>
+            <p:ph type="title"/>
+          </p:nvPr>
+        </p:nvSpPr>
+        <p:spPr/>
+        <p:txBody>
+          <a:bodyPr/>
+          <a:lstStyle/>
+          <a:p>
+            <a:r>
+              <a:rPr lang="it-IT" dirty="0" err="1"/>
+              <a:t>CONFronto</a:t>
+            </a:r>
+            <a:r>
+              <a:rPr lang="it-IT" dirty="0"/>
+              <a:t> </a:t>
+            </a:r>
+            <a:r>
+              <a:rPr lang="it-IT" dirty="0" err="1"/>
+              <a:t>evaluation</a:t>
+            </a:r>
+            <a:r>
+              <a:rPr lang="it-IT" dirty="0"/>
+              <a:t> test</a:t>
+            </a:r>
+            <a:endParaRPr lang="en-GB" dirty="0"/>
+          </a:p>
+        </p:txBody>
+      </p:sp>
+      <p:sp>
+        <p:nvSpPr>
+          <p:cNvPr id="3" name="Content Placeholder 2">
+            <a:extLst>
+              <a:ext uri="{FF2B5EF4-FFF2-40B4-BE49-F238E27FC236}">
+                <a16:creationId xmlns:a16="http://schemas.microsoft.com/office/drawing/2014/main" id="{9E2E907B-C619-80AB-4390-B2B94F2F8EE7}"/>
+              </a:ext>
+            </a:extLst>
+          </p:cNvPr>
+          <p:cNvSpPr>
+            <a:spLocks noGrp="1"/>
+          </p:cNvSpPr>
+          <p:nvPr>
+            <p:ph idx="1"/>
+          </p:nvPr>
+        </p:nvSpPr>
+        <p:spPr/>
+        <p:txBody>
+          <a:bodyPr/>
+          <a:lstStyle/>
+          <a:p>
+            <a:pPr marL="0" indent="0">
+              <a:buNone/>
+            </a:pPr>
+            <a:r>
+              <a:rPr lang="it-IT" dirty="0">
+                <a:solidFill>
+                  <a:schemeClr val="tx1"/>
+                </a:solidFill>
+              </a:rPr>
+              <a:t>Qui di seguito i risultati differenti </a:t>
+            </a:r>
+            <a:r>
+              <a:rPr lang="it-IT" dirty="0" err="1">
+                <a:solidFill>
+                  <a:schemeClr val="tx1"/>
+                </a:solidFill>
+              </a:rPr>
+              <a:t>sull’evaluation</a:t>
+            </a:r>
+            <a:r>
+              <a:rPr lang="it-IT" dirty="0">
+                <a:solidFill>
+                  <a:schemeClr val="tx1"/>
+                </a:solidFill>
+              </a:rPr>
+              <a:t> set per il miglior modello e l’originale del paper:</a:t>
+            </a:r>
+          </a:p>
+          <a:p>
+            <a:r>
+              <a:rPr lang="it-IT">
+                <a:solidFill>
+                  <a:schemeClr val="tx1"/>
+                </a:solidFill>
+              </a:rPr>
+              <a:t>Miglior modello: {R@1: 0.05099337748344371, R@10: 0.2052980132450331, nDCG@10: 0.11809304395337882}</a:t>
+            </a:r>
+            <a:endParaRPr lang="it-IT" dirty="0">
+              <a:solidFill>
+                <a:schemeClr val="tx1"/>
+              </a:solidFill>
+            </a:endParaRPr>
+          </a:p>
+          <a:p>
+            <a:r>
+              <a:rPr lang="it-IT" dirty="0">
+                <a:solidFill>
+                  <a:schemeClr val="tx1"/>
+                </a:solidFill>
+              </a:rPr>
+              <a:t>Originale: {R@1: 0.07549668874172186, nDCG@10: 0.17261420098894456, R@10: 0.30033112582781457}</a:t>
+            </a:r>
+            <a:endParaRPr lang="en-GB" dirty="0">
+              <a:solidFill>
+                <a:schemeClr val="tx1"/>
+              </a:solidFill>
+            </a:endParaRPr>
+          </a:p>
+        </p:txBody>
+      </p:sp>
+    </p:spTree>
+    <p:extLst>
+      <p:ext uri="{BB962C8B-B14F-4D97-AF65-F5344CB8AC3E}">
+        <p14:creationId xmlns:p14="http://schemas.microsoft.com/office/powerpoint/2010/main" val="238369433"/>
       </p:ext>
     </p:extLst>
   </p:cSld>

--- a/Gsasrec.pptx
+++ b/Gsasrec.pptx
@@ -20,6 +20,11 @@
     <p:sldId id="268" r:id="rId14"/>
     <p:sldId id="269" r:id="rId15"/>
     <p:sldId id="270" r:id="rId16"/>
+    <p:sldId id="271" r:id="rId17"/>
+    <p:sldId id="272" r:id="rId18"/>
+    <p:sldId id="273" r:id="rId19"/>
+    <p:sldId id="274" r:id="rId20"/>
+    <p:sldId id="275" r:id="rId21"/>
   </p:sldIdLst>
   <p:sldSz cx="12192000" cy="6858000"/>
   <p:notesSz cx="6858000" cy="9144000"/>
@@ -6148,7 +6153,7 @@
           <a:p>
             <a:fld id="{842CECD3-3569-4D6E-AA1B-67789CA6B4B3}" type="datetimeFigureOut">
               <a:rPr lang="en-GB" smtClean="0"/>
-              <a:t>04/05/2026</a:t>
+              <a:t>05/05/2026</a:t>
             </a:fld>
             <a:endParaRPr lang="en-GB"/>
           </a:p>
@@ -6584,7 +6589,7 @@
           <a:p>
             <a:fld id="{842CECD3-3569-4D6E-AA1B-67789CA6B4B3}" type="datetimeFigureOut">
               <a:rPr lang="en-GB" smtClean="0"/>
-              <a:t>04/05/2026</a:t>
+              <a:t>05/05/2026</a:t>
             </a:fld>
             <a:endParaRPr lang="en-GB"/>
           </a:p>
@@ -6834,7 +6839,7 @@
           <a:p>
             <a:fld id="{842CECD3-3569-4D6E-AA1B-67789CA6B4B3}" type="datetimeFigureOut">
               <a:rPr lang="en-GB" smtClean="0"/>
-              <a:t>04/05/2026</a:t>
+              <a:t>05/05/2026</a:t>
             </a:fld>
             <a:endParaRPr lang="en-GB"/>
           </a:p>
@@ -7142,7 +7147,7 @@
           <a:p>
             <a:fld id="{842CECD3-3569-4D6E-AA1B-67789CA6B4B3}" type="datetimeFigureOut">
               <a:rPr lang="en-GB" smtClean="0"/>
-              <a:t>04/05/2026</a:t>
+              <a:t>05/05/2026</a:t>
             </a:fld>
             <a:endParaRPr lang="en-GB"/>
           </a:p>
@@ -7460,7 +7465,7 @@
           <a:p>
             <a:fld id="{842CECD3-3569-4D6E-AA1B-67789CA6B4B3}" type="datetimeFigureOut">
               <a:rPr lang="en-GB" smtClean="0"/>
-              <a:t>04/05/2026</a:t>
+              <a:t>05/05/2026</a:t>
             </a:fld>
             <a:endParaRPr lang="en-GB"/>
           </a:p>
@@ -7762,7 +7767,7 @@
           <a:p>
             <a:fld id="{842CECD3-3569-4D6E-AA1B-67789CA6B4B3}" type="datetimeFigureOut">
               <a:rPr lang="en-GB" smtClean="0"/>
-              <a:t>04/05/2026</a:t>
+              <a:t>05/05/2026</a:t>
             </a:fld>
             <a:endParaRPr lang="en-GB"/>
           </a:p>
@@ -8129,7 +8134,7 @@
           <a:p>
             <a:fld id="{842CECD3-3569-4D6E-AA1B-67789CA6B4B3}" type="datetimeFigureOut">
               <a:rPr lang="en-GB" smtClean="0"/>
-              <a:t>04/05/2026</a:t>
+              <a:t>05/05/2026</a:t>
             </a:fld>
             <a:endParaRPr lang="en-GB"/>
           </a:p>
@@ -8303,7 +8308,7 @@
           <a:p>
             <a:fld id="{842CECD3-3569-4D6E-AA1B-67789CA6B4B3}" type="datetimeFigureOut">
               <a:rPr lang="en-GB" smtClean="0"/>
-              <a:t>04/05/2026</a:t>
+              <a:t>05/05/2026</a:t>
             </a:fld>
             <a:endParaRPr lang="en-GB"/>
           </a:p>
@@ -8483,7 +8488,7 @@
           <a:p>
             <a:fld id="{842CECD3-3569-4D6E-AA1B-67789CA6B4B3}" type="datetimeFigureOut">
               <a:rPr lang="en-GB" smtClean="0"/>
-              <a:t>04/05/2026</a:t>
+              <a:t>05/05/2026</a:t>
             </a:fld>
             <a:endParaRPr lang="en-GB"/>
           </a:p>
@@ -8653,7 +8658,7 @@
           <a:p>
             <a:fld id="{842CECD3-3569-4D6E-AA1B-67789CA6B4B3}" type="datetimeFigureOut">
               <a:rPr lang="en-GB" smtClean="0"/>
-              <a:t>04/05/2026</a:t>
+              <a:t>05/05/2026</a:t>
             </a:fld>
             <a:endParaRPr lang="en-GB"/>
           </a:p>
@@ -8903,7 +8908,7 @@
           <a:p>
             <a:fld id="{842CECD3-3569-4D6E-AA1B-67789CA6B4B3}" type="datetimeFigureOut">
               <a:rPr lang="en-GB" smtClean="0"/>
-              <a:t>04/05/2026</a:t>
+              <a:t>05/05/2026</a:t>
             </a:fld>
             <a:endParaRPr lang="en-GB"/>
           </a:p>
@@ -9139,7 +9144,7 @@
           <a:p>
             <a:fld id="{842CECD3-3569-4D6E-AA1B-67789CA6B4B3}" type="datetimeFigureOut">
               <a:rPr lang="en-GB" smtClean="0"/>
-              <a:t>04/05/2026</a:t>
+              <a:t>05/05/2026</a:t>
             </a:fld>
             <a:endParaRPr lang="en-GB"/>
           </a:p>
@@ -9521,7 +9526,7 @@
           <a:p>
             <a:fld id="{842CECD3-3569-4D6E-AA1B-67789CA6B4B3}" type="datetimeFigureOut">
               <a:rPr lang="en-GB" smtClean="0"/>
-              <a:t>04/05/2026</a:t>
+              <a:t>05/05/2026</a:t>
             </a:fld>
             <a:endParaRPr lang="en-GB"/>
           </a:p>
@@ -9639,7 +9644,7 @@
           <a:p>
             <a:fld id="{842CECD3-3569-4D6E-AA1B-67789CA6B4B3}" type="datetimeFigureOut">
               <a:rPr lang="en-GB" smtClean="0"/>
-              <a:t>04/05/2026</a:t>
+              <a:t>05/05/2026</a:t>
             </a:fld>
             <a:endParaRPr lang="en-GB"/>
           </a:p>
@@ -9734,7 +9739,7 @@
           <a:p>
             <a:fld id="{842CECD3-3569-4D6E-AA1B-67789CA6B4B3}" type="datetimeFigureOut">
               <a:rPr lang="en-GB" smtClean="0"/>
-              <a:t>04/05/2026</a:t>
+              <a:t>05/05/2026</a:t>
             </a:fld>
             <a:endParaRPr lang="en-GB"/>
           </a:p>
@@ -9989,7 +9994,7 @@
           <a:p>
             <a:fld id="{842CECD3-3569-4D6E-AA1B-67789CA6B4B3}" type="datetimeFigureOut">
               <a:rPr lang="en-GB" smtClean="0"/>
-              <a:t>04/05/2026</a:t>
+              <a:t>05/05/2026</a:t>
             </a:fld>
             <a:endParaRPr lang="en-GB"/>
           </a:p>
@@ -10272,7 +10277,7 @@
           <a:p>
             <a:fld id="{842CECD3-3569-4D6E-AA1B-67789CA6B4B3}" type="datetimeFigureOut">
               <a:rPr lang="en-GB" smtClean="0"/>
-              <a:t>04/05/2026</a:t>
+              <a:t>05/05/2026</a:t>
             </a:fld>
             <a:endParaRPr lang="en-GB"/>
           </a:p>
@@ -10678,7 +10683,7 @@
           <a:p>
             <a:fld id="{842CECD3-3569-4D6E-AA1B-67789CA6B4B3}" type="datetimeFigureOut">
               <a:rPr lang="en-GB" smtClean="0"/>
-              <a:t>04/05/2026</a:t>
+              <a:t>05/05/2026</a:t>
             </a:fld>
             <a:endParaRPr lang="en-GB"/>
           </a:p>
@@ -12438,7 +12443,7 @@
                   <a:schemeClr val="tx1"/>
                 </a:solidFill>
               </a:rPr>
-              <a:t>Con NDGC@10 pari a 0.1349321142424068 (0.197) dopo 3910 (47520) step.</a:t>
+              <a:t>Con NDCG@10 pari a 0.1349321142424068 (0.197) dopo 3910 (47520) step.</a:t>
             </a:r>
             <a:endParaRPr lang="en-GB" dirty="0">
               <a:solidFill>
@@ -12570,18 +12575,13 @@
           </a:p>
           <a:p>
             <a:r>
-              <a:rPr lang="it-IT">
+              <a:rPr lang="it-IT" dirty="0">
                 <a:solidFill>
                   <a:schemeClr val="tx1"/>
                 </a:solidFill>
               </a:rPr>
               <a:t>Miglior modello: {R@1: 0.05099337748344371, R@10: 0.2052980132450331, nDCG@10: 0.11809304395337882}</a:t>
             </a:r>
-            <a:endParaRPr lang="it-IT" dirty="0">
-              <a:solidFill>
-                <a:schemeClr val="tx1"/>
-              </a:solidFill>
-            </a:endParaRPr>
           </a:p>
           <a:p>
             <a:r>
@@ -12604,6 +12604,604 @@
     <p:extLst>
       <p:ext uri="{BB962C8B-B14F-4D97-AF65-F5344CB8AC3E}">
         <p14:creationId xmlns:p14="http://schemas.microsoft.com/office/powerpoint/2010/main" val="238369433"/>
+      </p:ext>
+    </p:extLst>
+  </p:cSld>
+  <p:clrMapOvr>
+    <a:masterClrMapping/>
+  </p:clrMapOvr>
+</p:sld>
+</file>
+
+<file path=ppt/slides/slide16.xml><?xml version="1.0" encoding="utf-8"?>
+<p:sld xmlns:a="http://schemas.openxmlformats.org/drawingml/2006/main" xmlns:r="http://schemas.openxmlformats.org/officeDocument/2006/relationships" xmlns:p="http://schemas.openxmlformats.org/presentationml/2006/main">
+  <p:cSld>
+    <p:spTree>
+      <p:nvGrpSpPr>
+        <p:cNvPr id="1" name=""/>
+        <p:cNvGrpSpPr/>
+        <p:nvPr/>
+      </p:nvGrpSpPr>
+      <p:grpSpPr>
+        <a:xfrm>
+          <a:off x="0" y="0"/>
+          <a:ext cx="0" cy="0"/>
+          <a:chOff x="0" y="0"/>
+          <a:chExt cx="0" cy="0"/>
+        </a:xfrm>
+      </p:grpSpPr>
+      <p:sp>
+        <p:nvSpPr>
+          <p:cNvPr id="2" name="Title 1">
+            <a:extLst>
+              <a:ext uri="{FF2B5EF4-FFF2-40B4-BE49-F238E27FC236}">
+                <a16:creationId xmlns:a16="http://schemas.microsoft.com/office/drawing/2014/main" id="{864BB684-58E5-DF5B-0C8D-284EEEA5AA31}"/>
+              </a:ext>
+            </a:extLst>
+          </p:cNvPr>
+          <p:cNvSpPr>
+            <a:spLocks noGrp="1"/>
+          </p:cNvSpPr>
+          <p:nvPr>
+            <p:ph type="title"/>
+          </p:nvPr>
+        </p:nvSpPr>
+        <p:spPr/>
+        <p:txBody>
+          <a:bodyPr/>
+          <a:lstStyle/>
+          <a:p>
+            <a:r>
+              <a:rPr lang="it-IT" dirty="0"/>
+              <a:t>DIFFERENZE DOPO IL TRAINING</a:t>
+            </a:r>
+            <a:endParaRPr lang="en-GB" dirty="0"/>
+          </a:p>
+        </p:txBody>
+      </p:sp>
+      <p:sp>
+        <p:nvSpPr>
+          <p:cNvPr id="3" name="Content Placeholder 2">
+            <a:extLst>
+              <a:ext uri="{FF2B5EF4-FFF2-40B4-BE49-F238E27FC236}">
+                <a16:creationId xmlns:a16="http://schemas.microsoft.com/office/drawing/2014/main" id="{FB2C392E-B43F-50FE-F1BE-1537598A1C3E}"/>
+              </a:ext>
+            </a:extLst>
+          </p:cNvPr>
+          <p:cNvSpPr>
+            <a:spLocks noGrp="1"/>
+          </p:cNvSpPr>
+          <p:nvPr>
+            <p:ph idx="1"/>
+          </p:nvPr>
+        </p:nvSpPr>
+        <p:spPr/>
+        <p:txBody>
+          <a:bodyPr/>
+          <a:lstStyle/>
+          <a:p>
+            <a:pPr marL="0" indent="0">
+              <a:buNone/>
+            </a:pPr>
+            <a:r>
+              <a:rPr lang="it-IT" dirty="0">
+                <a:solidFill>
+                  <a:schemeClr val="tx1"/>
+                </a:solidFill>
+              </a:rPr>
+              <a:t>Per poter fare una valutazione migliore si è eseguito il training con gli </a:t>
+            </a:r>
+            <a:r>
+              <a:rPr lang="it-IT" dirty="0" err="1">
+                <a:solidFill>
+                  <a:schemeClr val="tx1"/>
+                </a:solidFill>
+              </a:rPr>
+              <a:t>iperparametri</a:t>
+            </a:r>
+            <a:r>
+              <a:rPr lang="it-IT" dirty="0">
+                <a:solidFill>
+                  <a:schemeClr val="tx1"/>
+                </a:solidFill>
+              </a:rPr>
+              <a:t> forniti dagli autori del modello originale e quelli trovati con l’</a:t>
+            </a:r>
+            <a:r>
+              <a:rPr lang="it-IT" dirty="0" err="1">
+                <a:solidFill>
+                  <a:schemeClr val="tx1"/>
+                </a:solidFill>
+              </a:rPr>
+              <a:t>optimization</a:t>
+            </a:r>
+            <a:r>
+              <a:rPr lang="it-IT" dirty="0">
+                <a:solidFill>
+                  <a:schemeClr val="tx1"/>
+                </a:solidFill>
+              </a:rPr>
+              <a:t>, portando il numero massimo di epoche a 10000 e di epoche senza miglioramenti a 200, ottenendo rispettivamente:</a:t>
+            </a:r>
+          </a:p>
+          <a:p>
+            <a:r>
+              <a:rPr lang="en-GB" dirty="0">
+                <a:solidFill>
+                  <a:schemeClr val="tx1"/>
+                </a:solidFill>
+              </a:rPr>
+              <a:t>NDCG@10: 0.18758218569025115 e 0.1801849853504413</a:t>
+            </a:r>
+          </a:p>
+          <a:p>
+            <a:r>
+              <a:rPr lang="en-GB" dirty="0" err="1">
+                <a:solidFill>
+                  <a:schemeClr val="tx1"/>
+                </a:solidFill>
+              </a:rPr>
+              <a:t>Numero</a:t>
+            </a:r>
+            <a:r>
+              <a:rPr lang="en-GB" dirty="0">
+                <a:solidFill>
+                  <a:schemeClr val="tx1"/>
+                </a:solidFill>
+              </a:rPr>
+              <a:t> di step: 57984 e 24225</a:t>
+            </a:r>
+          </a:p>
+        </p:txBody>
+      </p:sp>
+    </p:spTree>
+    <p:extLst>
+      <p:ext uri="{BB962C8B-B14F-4D97-AF65-F5344CB8AC3E}">
+        <p14:creationId xmlns:p14="http://schemas.microsoft.com/office/powerpoint/2010/main" val="2289592401"/>
+      </p:ext>
+    </p:extLst>
+  </p:cSld>
+  <p:clrMapOvr>
+    <a:masterClrMapping/>
+  </p:clrMapOvr>
+</p:sld>
+</file>
+
+<file path=ppt/slides/slide17.xml><?xml version="1.0" encoding="utf-8"?>
+<p:sld xmlns:a="http://schemas.openxmlformats.org/drawingml/2006/main" xmlns:r="http://schemas.openxmlformats.org/officeDocument/2006/relationships" xmlns:p="http://schemas.openxmlformats.org/presentationml/2006/main">
+  <p:cSld>
+    <p:spTree>
+      <p:nvGrpSpPr>
+        <p:cNvPr id="1" name=""/>
+        <p:cNvGrpSpPr/>
+        <p:nvPr/>
+      </p:nvGrpSpPr>
+      <p:grpSpPr>
+        <a:xfrm>
+          <a:off x="0" y="0"/>
+          <a:ext cx="0" cy="0"/>
+          <a:chOff x="0" y="0"/>
+          <a:chExt cx="0" cy="0"/>
+        </a:xfrm>
+      </p:grpSpPr>
+      <p:sp>
+        <p:nvSpPr>
+          <p:cNvPr id="2" name="Title 1">
+            <a:extLst>
+              <a:ext uri="{FF2B5EF4-FFF2-40B4-BE49-F238E27FC236}">
+                <a16:creationId xmlns:a16="http://schemas.microsoft.com/office/drawing/2014/main" id="{C9F74094-A1ED-5C9A-8BBB-897F5AD1014A}"/>
+              </a:ext>
+            </a:extLst>
+          </p:cNvPr>
+          <p:cNvSpPr>
+            <a:spLocks noGrp="1"/>
+          </p:cNvSpPr>
+          <p:nvPr>
+            <p:ph type="title"/>
+          </p:nvPr>
+        </p:nvSpPr>
+        <p:spPr/>
+        <p:txBody>
+          <a:bodyPr/>
+          <a:lstStyle/>
+          <a:p>
+            <a:r>
+              <a:rPr lang="it-IT" dirty="0"/>
+              <a:t>CONFRONTO EVALUATION TEST</a:t>
+            </a:r>
+            <a:endParaRPr lang="en-GB" dirty="0"/>
+          </a:p>
+        </p:txBody>
+      </p:sp>
+      <p:sp>
+        <p:nvSpPr>
+          <p:cNvPr id="3" name="Content Placeholder 2">
+            <a:extLst>
+              <a:ext uri="{FF2B5EF4-FFF2-40B4-BE49-F238E27FC236}">
+                <a16:creationId xmlns:a16="http://schemas.microsoft.com/office/drawing/2014/main" id="{FC389E17-40AA-D96A-C0CB-D311F8B4DE54}"/>
+              </a:ext>
+            </a:extLst>
+          </p:cNvPr>
+          <p:cNvSpPr>
+            <a:spLocks noGrp="1"/>
+          </p:cNvSpPr>
+          <p:nvPr>
+            <p:ph idx="1"/>
+          </p:nvPr>
+        </p:nvSpPr>
+        <p:spPr/>
+        <p:txBody>
+          <a:bodyPr/>
+          <a:lstStyle/>
+          <a:p>
+            <a:pPr marL="0" indent="0">
+              <a:buNone/>
+            </a:pPr>
+            <a:r>
+              <a:rPr lang="it-IT" dirty="0">
+                <a:solidFill>
+                  <a:schemeClr val="tx1"/>
+                </a:solidFill>
+              </a:rPr>
+              <a:t>Qui di seguito i risultati differenti </a:t>
+            </a:r>
+            <a:r>
+              <a:rPr lang="it-IT" dirty="0" err="1">
+                <a:solidFill>
+                  <a:schemeClr val="tx1"/>
+                </a:solidFill>
+              </a:rPr>
+              <a:t>sull’evaluation</a:t>
+            </a:r>
+            <a:r>
+              <a:rPr lang="it-IT" dirty="0">
+                <a:solidFill>
+                  <a:schemeClr val="tx1"/>
+                </a:solidFill>
+              </a:rPr>
+              <a:t> set per il modello originale del paper e il migliore ottenuto con l’</a:t>
+            </a:r>
+            <a:r>
+              <a:rPr lang="it-IT" dirty="0" err="1">
+                <a:solidFill>
+                  <a:schemeClr val="tx1"/>
+                </a:solidFill>
+              </a:rPr>
+              <a:t>optimization</a:t>
+            </a:r>
+            <a:r>
+              <a:rPr lang="it-IT" dirty="0">
+                <a:solidFill>
+                  <a:schemeClr val="tx1"/>
+                </a:solidFill>
+              </a:rPr>
+              <a:t>:</a:t>
+            </a:r>
+            <a:endParaRPr lang="en-GB" dirty="0">
+              <a:solidFill>
+                <a:schemeClr val="tx1"/>
+              </a:solidFill>
+            </a:endParaRPr>
+          </a:p>
+          <a:p>
+            <a:r>
+              <a:rPr lang="it-IT" dirty="0">
+                <a:solidFill>
+                  <a:schemeClr val="tx1"/>
+                </a:solidFill>
+              </a:rPr>
+              <a:t>{nDCG@10: 0.1722703304771199, R@1: 0.07980132450331126, R@10: 0.2950331125827815}</a:t>
+            </a:r>
+          </a:p>
+          <a:p>
+            <a:r>
+              <a:rPr lang="it-IT" dirty="0">
+                <a:solidFill>
+                  <a:schemeClr val="tx1"/>
+                </a:solidFill>
+              </a:rPr>
+              <a:t>{R@1: 0.07102649006622516, R@10: 0.2766556291390728, nDCG@10: 0.16060628260624635}</a:t>
+            </a:r>
+          </a:p>
+        </p:txBody>
+      </p:sp>
+    </p:spTree>
+    <p:extLst>
+      <p:ext uri="{BB962C8B-B14F-4D97-AF65-F5344CB8AC3E}">
+        <p14:creationId xmlns:p14="http://schemas.microsoft.com/office/powerpoint/2010/main" val="361879204"/>
+      </p:ext>
+    </p:extLst>
+  </p:cSld>
+  <p:clrMapOvr>
+    <a:masterClrMapping/>
+  </p:clrMapOvr>
+</p:sld>
+</file>
+
+<file path=ppt/slides/slide18.xml><?xml version="1.0" encoding="utf-8"?>
+<p:sld xmlns:a="http://schemas.openxmlformats.org/drawingml/2006/main" xmlns:r="http://schemas.openxmlformats.org/officeDocument/2006/relationships" xmlns:p="http://schemas.openxmlformats.org/presentationml/2006/main">
+  <p:cSld>
+    <p:spTree>
+      <p:nvGrpSpPr>
+        <p:cNvPr id="1" name=""/>
+        <p:cNvGrpSpPr/>
+        <p:nvPr/>
+      </p:nvGrpSpPr>
+      <p:grpSpPr>
+        <a:xfrm>
+          <a:off x="0" y="0"/>
+          <a:ext cx="0" cy="0"/>
+          <a:chOff x="0" y="0"/>
+          <a:chExt cx="0" cy="0"/>
+        </a:xfrm>
+      </p:grpSpPr>
+      <p:sp>
+        <p:nvSpPr>
+          <p:cNvPr id="2" name="Title 1">
+            <a:extLst>
+              <a:ext uri="{FF2B5EF4-FFF2-40B4-BE49-F238E27FC236}">
+                <a16:creationId xmlns:a16="http://schemas.microsoft.com/office/drawing/2014/main" id="{12AFFDF8-5E3F-9581-5FF9-5EB5596A513E}"/>
+              </a:ext>
+            </a:extLst>
+          </p:cNvPr>
+          <p:cNvSpPr>
+            <a:spLocks noGrp="1"/>
+          </p:cNvSpPr>
+          <p:nvPr>
+            <p:ph type="title"/>
+          </p:nvPr>
+        </p:nvSpPr>
+        <p:spPr/>
+        <p:txBody>
+          <a:bodyPr/>
+          <a:lstStyle/>
+          <a:p>
+            <a:r>
+              <a:rPr lang="it-IT" dirty="0" err="1"/>
+              <a:t>LOAd</a:t>
+            </a:r>
+            <a:r>
+              <a:rPr lang="it-IT" dirty="0"/>
+              <a:t> test con endpoint </a:t>
+            </a:r>
+            <a:r>
+              <a:rPr lang="it-IT" dirty="0" err="1"/>
+              <a:t>fastapi</a:t>
+            </a:r>
+            <a:endParaRPr lang="en-GB" dirty="0"/>
+          </a:p>
+        </p:txBody>
+      </p:sp>
+      <p:sp>
+        <p:nvSpPr>
+          <p:cNvPr id="3" name="Content Placeholder 2">
+            <a:extLst>
+              <a:ext uri="{FF2B5EF4-FFF2-40B4-BE49-F238E27FC236}">
+                <a16:creationId xmlns:a16="http://schemas.microsoft.com/office/drawing/2014/main" id="{AF63E86A-01D2-7699-8636-267948E8D747}"/>
+              </a:ext>
+            </a:extLst>
+          </p:cNvPr>
+          <p:cNvSpPr>
+            <a:spLocks noGrp="1"/>
+          </p:cNvSpPr>
+          <p:nvPr>
+            <p:ph idx="1"/>
+          </p:nvPr>
+        </p:nvSpPr>
+        <p:spPr/>
+        <p:txBody>
+          <a:bodyPr/>
+          <a:lstStyle/>
+          <a:p>
+            <a:pPr marL="0" indent="0">
+              <a:buNone/>
+            </a:pPr>
+            <a:r>
+              <a:rPr lang="it-IT" dirty="0">
+                <a:solidFill>
+                  <a:schemeClr val="tx1"/>
+                </a:solidFill>
+              </a:rPr>
+              <a:t>Per poter testare il modello sottoposto a un carico crescente di richieste bisogna creare un endpoint che possa esporlo e renderlo accessibile. Si è proceduto inizialmente utilizzando un percorso in locale e specificando la porta 8081, consentendo di inviare richieste HTTP al miglior modello preso in considerazione (l’originale). </a:t>
+            </a:r>
+            <a:endParaRPr lang="en-GB" dirty="0">
+              <a:solidFill>
+                <a:schemeClr val="tx1"/>
+              </a:solidFill>
+            </a:endParaRPr>
+          </a:p>
+        </p:txBody>
+      </p:sp>
+    </p:spTree>
+    <p:extLst>
+      <p:ext uri="{BB962C8B-B14F-4D97-AF65-F5344CB8AC3E}">
+        <p14:creationId xmlns:p14="http://schemas.microsoft.com/office/powerpoint/2010/main" val="1107276542"/>
+      </p:ext>
+    </p:extLst>
+  </p:cSld>
+  <p:clrMapOvr>
+    <a:masterClrMapping/>
+  </p:clrMapOvr>
+</p:sld>
+</file>
+
+<file path=ppt/slides/slide19.xml><?xml version="1.0" encoding="utf-8"?>
+<p:sld xmlns:a="http://schemas.openxmlformats.org/drawingml/2006/main" xmlns:r="http://schemas.openxmlformats.org/officeDocument/2006/relationships" xmlns:p="http://schemas.openxmlformats.org/presentationml/2006/main">
+  <p:cSld>
+    <p:spTree>
+      <p:nvGrpSpPr>
+        <p:cNvPr id="1" name=""/>
+        <p:cNvGrpSpPr/>
+        <p:nvPr/>
+      </p:nvGrpSpPr>
+      <p:grpSpPr>
+        <a:xfrm>
+          <a:off x="0" y="0"/>
+          <a:ext cx="0" cy="0"/>
+          <a:chOff x="0" y="0"/>
+          <a:chExt cx="0" cy="0"/>
+        </a:xfrm>
+      </p:grpSpPr>
+      <p:sp>
+        <p:nvSpPr>
+          <p:cNvPr id="2" name="Title 1">
+            <a:extLst>
+              <a:ext uri="{FF2B5EF4-FFF2-40B4-BE49-F238E27FC236}">
+                <a16:creationId xmlns:a16="http://schemas.microsoft.com/office/drawing/2014/main" id="{E9ED1417-4A6D-96DC-281C-E055652AD41B}"/>
+              </a:ext>
+            </a:extLst>
+          </p:cNvPr>
+          <p:cNvSpPr>
+            <a:spLocks noGrp="1"/>
+          </p:cNvSpPr>
+          <p:nvPr>
+            <p:ph type="title"/>
+          </p:nvPr>
+        </p:nvSpPr>
+        <p:spPr/>
+        <p:txBody>
+          <a:bodyPr/>
+          <a:lstStyle/>
+          <a:p>
+            <a:r>
+              <a:rPr lang="it-IT" dirty="0"/>
+              <a:t>SCRIPT PYTHON E </a:t>
+            </a:r>
+            <a:r>
+              <a:rPr lang="it-IT" dirty="0" err="1"/>
+              <a:t>UTILITà</a:t>
+            </a:r>
+            <a:endParaRPr lang="en-GB" dirty="0"/>
+          </a:p>
+        </p:txBody>
+      </p:sp>
+      <p:sp>
+        <p:nvSpPr>
+          <p:cNvPr id="3" name="Content Placeholder 2">
+            <a:extLst>
+              <a:ext uri="{FF2B5EF4-FFF2-40B4-BE49-F238E27FC236}">
+                <a16:creationId xmlns:a16="http://schemas.microsoft.com/office/drawing/2014/main" id="{EB9EB5B8-5019-6FBA-FA89-BC68A452F445}"/>
+              </a:ext>
+            </a:extLst>
+          </p:cNvPr>
+          <p:cNvSpPr>
+            <a:spLocks noGrp="1"/>
+          </p:cNvSpPr>
+          <p:nvPr>
+            <p:ph idx="1"/>
+          </p:nvPr>
+        </p:nvSpPr>
+        <p:spPr/>
+        <p:txBody>
+          <a:bodyPr>
+            <a:normAutofit lnSpcReduction="10000"/>
+          </a:bodyPr>
+          <a:lstStyle/>
+          <a:p>
+            <a:pPr marL="0" indent="0">
+              <a:buNone/>
+            </a:pPr>
+            <a:r>
+              <a:rPr lang="it-IT" dirty="0">
+                <a:solidFill>
+                  <a:schemeClr val="tx1"/>
+                </a:solidFill>
+              </a:rPr>
+              <a:t>Di seguito i file utili allo scopo e la loro funzione:</a:t>
+            </a:r>
+          </a:p>
+          <a:p>
+            <a:r>
+              <a:rPr lang="it-IT" dirty="0">
+                <a:solidFill>
+                  <a:schemeClr val="tx1"/>
+                </a:solidFill>
+              </a:rPr>
+              <a:t>engine.py: logica dietro il load testing</a:t>
+            </a:r>
+          </a:p>
+          <a:p>
+            <a:r>
+              <a:rPr lang="it-IT" dirty="0">
+                <a:solidFill>
+                  <a:schemeClr val="tx1"/>
+                </a:solidFill>
+              </a:rPr>
+              <a:t>http_transport.py: creazione del client http, si appoggia a </a:t>
+            </a:r>
+            <a:r>
+              <a:rPr lang="it-IT" dirty="0" err="1">
+                <a:solidFill>
+                  <a:schemeClr val="tx1"/>
+                </a:solidFill>
+              </a:rPr>
+              <a:t>aiohttp</a:t>
+            </a:r>
+            <a:endParaRPr lang="it-IT" dirty="0">
+              <a:solidFill>
+                <a:schemeClr val="tx1"/>
+              </a:solidFill>
+            </a:endParaRPr>
+          </a:p>
+          <a:p>
+            <a:r>
+              <a:rPr lang="it-IT" dirty="0">
+                <a:solidFill>
+                  <a:schemeClr val="tx1"/>
+                </a:solidFill>
+              </a:rPr>
+              <a:t>request_builder.py: creazione del client tramite quello generato da http_transport.py e del payload da inviare al modello</a:t>
+            </a:r>
+          </a:p>
+          <a:p>
+            <a:r>
+              <a:rPr lang="it-IT" dirty="0">
+                <a:solidFill>
+                  <a:schemeClr val="tx1"/>
+                </a:solidFill>
+              </a:rPr>
+              <a:t>endpoint.py: creazione dell’endpoint per il modello</a:t>
+            </a:r>
+          </a:p>
+          <a:p>
+            <a:r>
+              <a:rPr lang="it-IT" dirty="0">
+                <a:solidFill>
+                  <a:schemeClr val="tx1"/>
+                </a:solidFill>
+              </a:rPr>
+              <a:t>load_test.py: esecuzione del test di carico verso l’endpoint specificato</a:t>
+            </a:r>
+          </a:p>
+          <a:p>
+            <a:r>
+              <a:rPr lang="it-IT" dirty="0" err="1">
+                <a:solidFill>
+                  <a:schemeClr val="tx1"/>
+                </a:solidFill>
+              </a:rPr>
+              <a:t>config.yaml</a:t>
+            </a:r>
+            <a:r>
+              <a:rPr lang="it-IT" dirty="0">
+                <a:solidFill>
+                  <a:schemeClr val="tx1"/>
+                </a:solidFill>
+              </a:rPr>
+              <a:t>: dettagli sul test di carico</a:t>
+            </a:r>
+            <a:endParaRPr lang="en-GB" dirty="0">
+              <a:solidFill>
+                <a:schemeClr val="tx1"/>
+              </a:solidFill>
+            </a:endParaRPr>
+          </a:p>
+        </p:txBody>
+      </p:sp>
+    </p:spTree>
+    <p:extLst>
+      <p:ext uri="{BB962C8B-B14F-4D97-AF65-F5344CB8AC3E}">
+        <p14:creationId xmlns:p14="http://schemas.microsoft.com/office/powerpoint/2010/main" val="1425410748"/>
       </p:ext>
     </p:extLst>
   </p:cSld>
@@ -12917,6 +13515,105 @@
     <p:extLst>
       <p:ext uri="{BB962C8B-B14F-4D97-AF65-F5344CB8AC3E}">
         <p14:creationId xmlns:p14="http://schemas.microsoft.com/office/powerpoint/2010/main" val="2110771667"/>
+      </p:ext>
+    </p:extLst>
+  </p:cSld>
+  <p:clrMapOvr>
+    <a:masterClrMapping/>
+  </p:clrMapOvr>
+</p:sld>
+</file>
+
+<file path=ppt/slides/slide20.xml><?xml version="1.0" encoding="utf-8"?>
+<p:sld xmlns:a="http://schemas.openxmlformats.org/drawingml/2006/main" xmlns:r="http://schemas.openxmlformats.org/officeDocument/2006/relationships" xmlns:p="http://schemas.openxmlformats.org/presentationml/2006/main">
+  <p:cSld>
+    <p:spTree>
+      <p:nvGrpSpPr>
+        <p:cNvPr id="1" name=""/>
+        <p:cNvGrpSpPr/>
+        <p:nvPr/>
+      </p:nvGrpSpPr>
+      <p:grpSpPr>
+        <a:xfrm>
+          <a:off x="0" y="0"/>
+          <a:ext cx="0" cy="0"/>
+          <a:chOff x="0" y="0"/>
+          <a:chExt cx="0" cy="0"/>
+        </a:xfrm>
+      </p:grpSpPr>
+      <p:sp>
+        <p:nvSpPr>
+          <p:cNvPr id="2" name="Title 1">
+            <a:extLst>
+              <a:ext uri="{FF2B5EF4-FFF2-40B4-BE49-F238E27FC236}">
+                <a16:creationId xmlns:a16="http://schemas.microsoft.com/office/drawing/2014/main" id="{505858B3-1DCA-C160-3137-DE588E63DCDD}"/>
+              </a:ext>
+            </a:extLst>
+          </p:cNvPr>
+          <p:cNvSpPr>
+            <a:spLocks noGrp="1"/>
+          </p:cNvSpPr>
+          <p:nvPr>
+            <p:ph type="title"/>
+          </p:nvPr>
+        </p:nvSpPr>
+        <p:spPr/>
+        <p:txBody>
+          <a:bodyPr/>
+          <a:lstStyle/>
+          <a:p>
+            <a:r>
+              <a:rPr lang="it-IT" dirty="0"/>
+              <a:t>RISULTATI</a:t>
+            </a:r>
+            <a:endParaRPr lang="en-GB" dirty="0"/>
+          </a:p>
+        </p:txBody>
+      </p:sp>
+      <p:sp>
+        <p:nvSpPr>
+          <p:cNvPr id="3" name="Content Placeholder 2">
+            <a:extLst>
+              <a:ext uri="{FF2B5EF4-FFF2-40B4-BE49-F238E27FC236}">
+                <a16:creationId xmlns:a16="http://schemas.microsoft.com/office/drawing/2014/main" id="{63E42B70-9C7B-0387-D125-C963B866DCE4}"/>
+              </a:ext>
+            </a:extLst>
+          </p:cNvPr>
+          <p:cNvSpPr>
+            <a:spLocks noGrp="1"/>
+          </p:cNvSpPr>
+          <p:nvPr>
+            <p:ph idx="1"/>
+          </p:nvPr>
+        </p:nvSpPr>
+        <p:spPr/>
+        <p:txBody>
+          <a:bodyPr/>
+          <a:lstStyle/>
+          <a:p>
+            <a:pPr marL="0" indent="0">
+              <a:buNone/>
+            </a:pPr>
+            <a:r>
+              <a:rPr lang="it-IT" dirty="0">
+                <a:solidFill>
+                  <a:schemeClr val="tx1"/>
+                </a:solidFill>
+              </a:rPr>
+              <a:t>Di seguito i risultati ottenuti </a:t>
+            </a:r>
+            <a:endParaRPr lang="en-GB" dirty="0">
+              <a:solidFill>
+                <a:schemeClr val="tx1"/>
+              </a:solidFill>
+            </a:endParaRPr>
+          </a:p>
+        </p:txBody>
+      </p:sp>
+    </p:spTree>
+    <p:extLst>
+      <p:ext uri="{BB962C8B-B14F-4D97-AF65-F5344CB8AC3E}">
+        <p14:creationId xmlns:p14="http://schemas.microsoft.com/office/powerpoint/2010/main" val="328842838"/>
       </p:ext>
     </p:extLst>
   </p:cSld>

--- a/Gsasrec.pptx
+++ b/Gsasrec.pptx
@@ -13600,8 +13600,13 @@
                   <a:schemeClr val="tx1"/>
                 </a:solidFill>
               </a:rPr>
-              <a:t>Di seguito i risultati ottenuti </a:t>
-            </a:r>
+              <a:t>Di seguito i risultati ottenuti:</a:t>
+            </a:r>
+          </a:p>
+          <a:p>
+            <a:pPr marL="0" indent="0">
+              <a:buNone/>
+            </a:pPr>
             <a:endParaRPr lang="en-GB" dirty="0">
               <a:solidFill>
                 <a:schemeClr val="tx1"/>

--- a/Gsasrec.pptx
+++ b/Gsasrec.pptx
@@ -6153,7 +6153,7 @@
           <a:p>
             <a:fld id="{842CECD3-3569-4D6E-AA1B-67789CA6B4B3}" type="datetimeFigureOut">
               <a:rPr lang="en-GB" smtClean="0"/>
-              <a:t>05/05/2026</a:t>
+              <a:t>08/05/2026</a:t>
             </a:fld>
             <a:endParaRPr lang="en-GB"/>
           </a:p>
@@ -6589,7 +6589,7 @@
           <a:p>
             <a:fld id="{842CECD3-3569-4D6E-AA1B-67789CA6B4B3}" type="datetimeFigureOut">
               <a:rPr lang="en-GB" smtClean="0"/>
-              <a:t>05/05/2026</a:t>
+              <a:t>08/05/2026</a:t>
             </a:fld>
             <a:endParaRPr lang="en-GB"/>
           </a:p>
@@ -6839,7 +6839,7 @@
           <a:p>
             <a:fld id="{842CECD3-3569-4D6E-AA1B-67789CA6B4B3}" type="datetimeFigureOut">
               <a:rPr lang="en-GB" smtClean="0"/>
-              <a:t>05/05/2026</a:t>
+              <a:t>08/05/2026</a:t>
             </a:fld>
             <a:endParaRPr lang="en-GB"/>
           </a:p>
@@ -7147,7 +7147,7 @@
           <a:p>
             <a:fld id="{842CECD3-3569-4D6E-AA1B-67789CA6B4B3}" type="datetimeFigureOut">
               <a:rPr lang="en-GB" smtClean="0"/>
-              <a:t>05/05/2026</a:t>
+              <a:t>08/05/2026</a:t>
             </a:fld>
             <a:endParaRPr lang="en-GB"/>
           </a:p>
@@ -7465,7 +7465,7 @@
           <a:p>
             <a:fld id="{842CECD3-3569-4D6E-AA1B-67789CA6B4B3}" type="datetimeFigureOut">
               <a:rPr lang="en-GB" smtClean="0"/>
-              <a:t>05/05/2026</a:t>
+              <a:t>08/05/2026</a:t>
             </a:fld>
             <a:endParaRPr lang="en-GB"/>
           </a:p>
@@ -7767,7 +7767,7 @@
           <a:p>
             <a:fld id="{842CECD3-3569-4D6E-AA1B-67789CA6B4B3}" type="datetimeFigureOut">
               <a:rPr lang="en-GB" smtClean="0"/>
-              <a:t>05/05/2026</a:t>
+              <a:t>08/05/2026</a:t>
             </a:fld>
             <a:endParaRPr lang="en-GB"/>
           </a:p>
@@ -8134,7 +8134,7 @@
           <a:p>
             <a:fld id="{842CECD3-3569-4D6E-AA1B-67789CA6B4B3}" type="datetimeFigureOut">
               <a:rPr lang="en-GB" smtClean="0"/>
-              <a:t>05/05/2026</a:t>
+              <a:t>08/05/2026</a:t>
             </a:fld>
             <a:endParaRPr lang="en-GB"/>
           </a:p>
@@ -8308,7 +8308,7 @@
           <a:p>
             <a:fld id="{842CECD3-3569-4D6E-AA1B-67789CA6B4B3}" type="datetimeFigureOut">
               <a:rPr lang="en-GB" smtClean="0"/>
-              <a:t>05/05/2026</a:t>
+              <a:t>08/05/2026</a:t>
             </a:fld>
             <a:endParaRPr lang="en-GB"/>
           </a:p>
@@ -8488,7 +8488,7 @@
           <a:p>
             <a:fld id="{842CECD3-3569-4D6E-AA1B-67789CA6B4B3}" type="datetimeFigureOut">
               <a:rPr lang="en-GB" smtClean="0"/>
-              <a:t>05/05/2026</a:t>
+              <a:t>08/05/2026</a:t>
             </a:fld>
             <a:endParaRPr lang="en-GB"/>
           </a:p>
@@ -8658,7 +8658,7 @@
           <a:p>
             <a:fld id="{842CECD3-3569-4D6E-AA1B-67789CA6B4B3}" type="datetimeFigureOut">
               <a:rPr lang="en-GB" smtClean="0"/>
-              <a:t>05/05/2026</a:t>
+              <a:t>08/05/2026</a:t>
             </a:fld>
             <a:endParaRPr lang="en-GB"/>
           </a:p>
@@ -8908,7 +8908,7 @@
           <a:p>
             <a:fld id="{842CECD3-3569-4D6E-AA1B-67789CA6B4B3}" type="datetimeFigureOut">
               <a:rPr lang="en-GB" smtClean="0"/>
-              <a:t>05/05/2026</a:t>
+              <a:t>08/05/2026</a:t>
             </a:fld>
             <a:endParaRPr lang="en-GB"/>
           </a:p>
@@ -9144,7 +9144,7 @@
           <a:p>
             <a:fld id="{842CECD3-3569-4D6E-AA1B-67789CA6B4B3}" type="datetimeFigureOut">
               <a:rPr lang="en-GB" smtClean="0"/>
-              <a:t>05/05/2026</a:t>
+              <a:t>08/05/2026</a:t>
             </a:fld>
             <a:endParaRPr lang="en-GB"/>
           </a:p>
@@ -9526,7 +9526,7 @@
           <a:p>
             <a:fld id="{842CECD3-3569-4D6E-AA1B-67789CA6B4B3}" type="datetimeFigureOut">
               <a:rPr lang="en-GB" smtClean="0"/>
-              <a:t>05/05/2026</a:t>
+              <a:t>08/05/2026</a:t>
             </a:fld>
             <a:endParaRPr lang="en-GB"/>
           </a:p>
@@ -9644,7 +9644,7 @@
           <a:p>
             <a:fld id="{842CECD3-3569-4D6E-AA1B-67789CA6B4B3}" type="datetimeFigureOut">
               <a:rPr lang="en-GB" smtClean="0"/>
-              <a:t>05/05/2026</a:t>
+              <a:t>08/05/2026</a:t>
             </a:fld>
             <a:endParaRPr lang="en-GB"/>
           </a:p>
@@ -9739,7 +9739,7 @@
           <a:p>
             <a:fld id="{842CECD3-3569-4D6E-AA1B-67789CA6B4B3}" type="datetimeFigureOut">
               <a:rPr lang="en-GB" smtClean="0"/>
-              <a:t>05/05/2026</a:t>
+              <a:t>08/05/2026</a:t>
             </a:fld>
             <a:endParaRPr lang="en-GB"/>
           </a:p>
@@ -9994,7 +9994,7 @@
           <a:p>
             <a:fld id="{842CECD3-3569-4D6E-AA1B-67789CA6B4B3}" type="datetimeFigureOut">
               <a:rPr lang="en-GB" smtClean="0"/>
-              <a:t>05/05/2026</a:t>
+              <a:t>08/05/2026</a:t>
             </a:fld>
             <a:endParaRPr lang="en-GB"/>
           </a:p>
@@ -10277,7 +10277,7 @@
           <a:p>
             <a:fld id="{842CECD3-3569-4D6E-AA1B-67789CA6B4B3}" type="datetimeFigureOut">
               <a:rPr lang="en-GB" smtClean="0"/>
-              <a:t>05/05/2026</a:t>
+              <a:t>08/05/2026</a:t>
             </a:fld>
             <a:endParaRPr lang="en-GB"/>
           </a:p>
@@ -10683,7 +10683,7 @@
           <a:p>
             <a:fld id="{842CECD3-3569-4D6E-AA1B-67789CA6B4B3}" type="datetimeFigureOut">
               <a:rPr lang="en-GB" smtClean="0"/>
-              <a:t>05/05/2026</a:t>
+              <a:t>08/05/2026</a:t>
             </a:fld>
             <a:endParaRPr lang="en-GB"/>
           </a:p>
@@ -13002,7 +13002,23 @@
                   <a:schemeClr val="tx1"/>
                 </a:solidFill>
               </a:rPr>
-              <a:t>Per poter testare il modello sottoposto a un carico crescente di richieste bisogna creare un endpoint che possa esporlo e renderlo accessibile. Si è proceduto inizialmente utilizzando un percorso in locale e specificando la porta 8081, consentendo di inviare richieste HTTP al miglior modello preso in considerazione (l’originale). </a:t>
+              <a:t>Per poter testare il modello sottoposto a un carico crescente di richieste bisogna creare un endpoint che possa esporlo e renderlo accessibile. Si è proceduto inizialmente utilizzando un percorso in locale e specificando la porta 8081, consentendo di inviare richieste HTTP al miglior modello preso in considerazione (l’originale). Successivamente si è deciso di creare un secondo endpoint per sfruttare il modello </a:t>
+            </a:r>
+            <a:r>
+              <a:rPr lang="it-IT" dirty="0" err="1">
+                <a:solidFill>
+                  <a:schemeClr val="tx1"/>
+                </a:solidFill>
+              </a:rPr>
+              <a:t>onnx</a:t>
+            </a:r>
+            <a:r>
+              <a:rPr lang="it-IT" dirty="0">
+                <a:solidFill>
+                  <a:schemeClr val="tx1"/>
+                </a:solidFill>
+              </a:rPr>
+              <a:t> e testarlo.</a:t>
             </a:r>
             <a:endParaRPr lang="en-GB" dirty="0">
               <a:solidFill>
@@ -13564,7 +13580,7 @@
           <a:p>
             <a:r>
               <a:rPr lang="it-IT" dirty="0"/>
-              <a:t>RISULTATI</a:t>
+              <a:t>VALORI DI CONFIGURAZIONE</a:t>
             </a:r>
             <a:endParaRPr lang="en-GB" dirty="0"/>
           </a:p>
@@ -13591,22 +13607,77 @@
           <a:bodyPr/>
           <a:lstStyle/>
           <a:p>
-            <a:pPr marL="0" indent="0">
-              <a:buNone/>
-            </a:pPr>
+            <a:r>
+              <a:rPr lang="it-IT" dirty="0" err="1">
+                <a:solidFill>
+                  <a:schemeClr val="tx1"/>
+                </a:solidFill>
+              </a:rPr>
+              <a:t>target_rps</a:t>
+            </a:r>
             <a:r>
               <a:rPr lang="it-IT" dirty="0">
                 <a:solidFill>
                   <a:schemeClr val="tx1"/>
                 </a:solidFill>
               </a:rPr>
-              <a:t>Di seguito i risultati ottenuti:</a:t>
-            </a:r>
-          </a:p>
-          <a:p>
-            <a:pPr marL="0" indent="0">
-              <a:buNone/>
-            </a:pPr>
+              <a:t>: [10, 50, 150, 300, 600, 1000]</a:t>
+            </a:r>
+          </a:p>
+          <a:p>
+            <a:r>
+              <a:rPr lang="it-IT" dirty="0" err="1">
+                <a:solidFill>
+                  <a:schemeClr val="tx1"/>
+                </a:solidFill>
+              </a:rPr>
+              <a:t>duration_seconds</a:t>
+            </a:r>
+            <a:r>
+              <a:rPr lang="it-IT" dirty="0">
+                <a:solidFill>
+                  <a:schemeClr val="tx1"/>
+                </a:solidFill>
+              </a:rPr>
+              <a:t>: 60</a:t>
+            </a:r>
+          </a:p>
+          <a:p>
+            <a:r>
+              <a:rPr lang="it-IT" dirty="0" err="1">
+                <a:solidFill>
+                  <a:schemeClr val="tx1"/>
+                </a:solidFill>
+              </a:rPr>
+              <a:t>num_clients</a:t>
+            </a:r>
+            <a:r>
+              <a:rPr lang="it-IT" dirty="0">
+                <a:solidFill>
+                  <a:schemeClr val="tx1"/>
+                </a:solidFill>
+              </a:rPr>
+              <a:t>: 32</a:t>
+            </a:r>
+          </a:p>
+          <a:p>
+            <a:r>
+              <a:rPr lang="it-IT" dirty="0">
+                <a:solidFill>
+                  <a:schemeClr val="tx1"/>
+                </a:solidFill>
+              </a:rPr>
+              <a:t>Macchina utilizzata:</a:t>
+            </a:r>
+          </a:p>
+          <a:p>
+            <a:endParaRPr lang="it-IT" dirty="0">
+              <a:solidFill>
+                <a:schemeClr val="tx1"/>
+              </a:solidFill>
+            </a:endParaRPr>
+          </a:p>
+          <a:p>
             <a:endParaRPr lang="en-GB" dirty="0">
               <a:solidFill>
                 <a:schemeClr val="tx1"/>

--- a/Gsasrec.pptx
+++ b/Gsasrec.pptx
@@ -25,6 +25,8 @@
     <p:sldId id="273" r:id="rId19"/>
     <p:sldId id="274" r:id="rId20"/>
     <p:sldId id="275" r:id="rId21"/>
+    <p:sldId id="276" r:id="rId22"/>
+    <p:sldId id="277" r:id="rId23"/>
   </p:sldIdLst>
   <p:sldSz cx="12192000" cy="6858000"/>
   <p:notesSz cx="6858000" cy="9144000"/>
@@ -6153,7 +6155,7 @@
           <a:p>
             <a:fld id="{842CECD3-3569-4D6E-AA1B-67789CA6B4B3}" type="datetimeFigureOut">
               <a:rPr lang="en-GB" smtClean="0"/>
-              <a:t>08/05/2026</a:t>
+              <a:t>11/05/2026</a:t>
             </a:fld>
             <a:endParaRPr lang="en-GB"/>
           </a:p>
@@ -6589,7 +6591,7 @@
           <a:p>
             <a:fld id="{842CECD3-3569-4D6E-AA1B-67789CA6B4B3}" type="datetimeFigureOut">
               <a:rPr lang="en-GB" smtClean="0"/>
-              <a:t>08/05/2026</a:t>
+              <a:t>11/05/2026</a:t>
             </a:fld>
             <a:endParaRPr lang="en-GB"/>
           </a:p>
@@ -6839,7 +6841,7 @@
           <a:p>
             <a:fld id="{842CECD3-3569-4D6E-AA1B-67789CA6B4B3}" type="datetimeFigureOut">
               <a:rPr lang="en-GB" smtClean="0"/>
-              <a:t>08/05/2026</a:t>
+              <a:t>11/05/2026</a:t>
             </a:fld>
             <a:endParaRPr lang="en-GB"/>
           </a:p>
@@ -7147,7 +7149,7 @@
           <a:p>
             <a:fld id="{842CECD3-3569-4D6E-AA1B-67789CA6B4B3}" type="datetimeFigureOut">
               <a:rPr lang="en-GB" smtClean="0"/>
-              <a:t>08/05/2026</a:t>
+              <a:t>11/05/2026</a:t>
             </a:fld>
             <a:endParaRPr lang="en-GB"/>
           </a:p>
@@ -7465,7 +7467,7 @@
           <a:p>
             <a:fld id="{842CECD3-3569-4D6E-AA1B-67789CA6B4B3}" type="datetimeFigureOut">
               <a:rPr lang="en-GB" smtClean="0"/>
-              <a:t>08/05/2026</a:t>
+              <a:t>11/05/2026</a:t>
             </a:fld>
             <a:endParaRPr lang="en-GB"/>
           </a:p>
@@ -7767,7 +7769,7 @@
           <a:p>
             <a:fld id="{842CECD3-3569-4D6E-AA1B-67789CA6B4B3}" type="datetimeFigureOut">
               <a:rPr lang="en-GB" smtClean="0"/>
-              <a:t>08/05/2026</a:t>
+              <a:t>11/05/2026</a:t>
             </a:fld>
             <a:endParaRPr lang="en-GB"/>
           </a:p>
@@ -8134,7 +8136,7 @@
           <a:p>
             <a:fld id="{842CECD3-3569-4D6E-AA1B-67789CA6B4B3}" type="datetimeFigureOut">
               <a:rPr lang="en-GB" smtClean="0"/>
-              <a:t>08/05/2026</a:t>
+              <a:t>11/05/2026</a:t>
             </a:fld>
             <a:endParaRPr lang="en-GB"/>
           </a:p>
@@ -8308,7 +8310,7 @@
           <a:p>
             <a:fld id="{842CECD3-3569-4D6E-AA1B-67789CA6B4B3}" type="datetimeFigureOut">
               <a:rPr lang="en-GB" smtClean="0"/>
-              <a:t>08/05/2026</a:t>
+              <a:t>11/05/2026</a:t>
             </a:fld>
             <a:endParaRPr lang="en-GB"/>
           </a:p>
@@ -8488,7 +8490,7 @@
           <a:p>
             <a:fld id="{842CECD3-3569-4D6E-AA1B-67789CA6B4B3}" type="datetimeFigureOut">
               <a:rPr lang="en-GB" smtClean="0"/>
-              <a:t>08/05/2026</a:t>
+              <a:t>11/05/2026</a:t>
             </a:fld>
             <a:endParaRPr lang="en-GB"/>
           </a:p>
@@ -8658,7 +8660,7 @@
           <a:p>
             <a:fld id="{842CECD3-3569-4D6E-AA1B-67789CA6B4B3}" type="datetimeFigureOut">
               <a:rPr lang="en-GB" smtClean="0"/>
-              <a:t>08/05/2026</a:t>
+              <a:t>11/05/2026</a:t>
             </a:fld>
             <a:endParaRPr lang="en-GB"/>
           </a:p>
@@ -8908,7 +8910,7 @@
           <a:p>
             <a:fld id="{842CECD3-3569-4D6E-AA1B-67789CA6B4B3}" type="datetimeFigureOut">
               <a:rPr lang="en-GB" smtClean="0"/>
-              <a:t>08/05/2026</a:t>
+              <a:t>11/05/2026</a:t>
             </a:fld>
             <a:endParaRPr lang="en-GB"/>
           </a:p>
@@ -9144,7 +9146,7 @@
           <a:p>
             <a:fld id="{842CECD3-3569-4D6E-AA1B-67789CA6B4B3}" type="datetimeFigureOut">
               <a:rPr lang="en-GB" smtClean="0"/>
-              <a:t>08/05/2026</a:t>
+              <a:t>11/05/2026</a:t>
             </a:fld>
             <a:endParaRPr lang="en-GB"/>
           </a:p>
@@ -9526,7 +9528,7 @@
           <a:p>
             <a:fld id="{842CECD3-3569-4D6E-AA1B-67789CA6B4B3}" type="datetimeFigureOut">
               <a:rPr lang="en-GB" smtClean="0"/>
-              <a:t>08/05/2026</a:t>
+              <a:t>11/05/2026</a:t>
             </a:fld>
             <a:endParaRPr lang="en-GB"/>
           </a:p>
@@ -9644,7 +9646,7 @@
           <a:p>
             <a:fld id="{842CECD3-3569-4D6E-AA1B-67789CA6B4B3}" type="datetimeFigureOut">
               <a:rPr lang="en-GB" smtClean="0"/>
-              <a:t>08/05/2026</a:t>
+              <a:t>11/05/2026</a:t>
             </a:fld>
             <a:endParaRPr lang="en-GB"/>
           </a:p>
@@ -9739,7 +9741,7 @@
           <a:p>
             <a:fld id="{842CECD3-3569-4D6E-AA1B-67789CA6B4B3}" type="datetimeFigureOut">
               <a:rPr lang="en-GB" smtClean="0"/>
-              <a:t>08/05/2026</a:t>
+              <a:t>11/05/2026</a:t>
             </a:fld>
             <a:endParaRPr lang="en-GB"/>
           </a:p>
@@ -9994,7 +9996,7 @@
           <a:p>
             <a:fld id="{842CECD3-3569-4D6E-AA1B-67789CA6B4B3}" type="datetimeFigureOut">
               <a:rPr lang="en-GB" smtClean="0"/>
-              <a:t>08/05/2026</a:t>
+              <a:t>11/05/2026</a:t>
             </a:fld>
             <a:endParaRPr lang="en-GB"/>
           </a:p>
@@ -10277,7 +10279,7 @@
           <a:p>
             <a:fld id="{842CECD3-3569-4D6E-AA1B-67789CA6B4B3}" type="datetimeFigureOut">
               <a:rPr lang="en-GB" smtClean="0"/>
-              <a:t>08/05/2026</a:t>
+              <a:t>11/05/2026</a:t>
             </a:fld>
             <a:endParaRPr lang="en-GB"/>
           </a:p>
@@ -10683,7 +10685,7 @@
           <a:p>
             <a:fld id="{842CECD3-3569-4D6E-AA1B-67789CA6B4B3}" type="datetimeFigureOut">
               <a:rPr lang="en-GB" smtClean="0"/>
-              <a:t>08/05/2026</a:t>
+              <a:t>11/05/2026</a:t>
             </a:fld>
             <a:endParaRPr lang="en-GB"/>
           </a:p>
@@ -13667,8 +13669,43 @@
                   <a:schemeClr val="tx1"/>
                 </a:solidFill>
               </a:rPr>
-              <a:t>Macchina utilizzata:</a:t>
-            </a:r>
+              <a:t>GPU: RTX A4500</a:t>
+            </a:r>
+          </a:p>
+          <a:p>
+            <a:r>
+              <a:rPr lang="it-IT" dirty="0" err="1">
+                <a:solidFill>
+                  <a:schemeClr val="tx1"/>
+                </a:solidFill>
+              </a:rPr>
+              <a:t>vCPU</a:t>
+            </a:r>
+            <a:r>
+              <a:rPr lang="it-IT" dirty="0">
+                <a:solidFill>
+                  <a:schemeClr val="tx1"/>
+                </a:solidFill>
+              </a:rPr>
+              <a:t>: 12 (AMD EPYC 7352 24-Core Processor)</a:t>
+            </a:r>
+          </a:p>
+          <a:p>
+            <a:r>
+              <a:rPr lang="it-IT" dirty="0">
+                <a:solidFill>
+                  <a:schemeClr val="tx1"/>
+                </a:solidFill>
+              </a:rPr>
+              <a:t>Memoria: 62 GB</a:t>
+            </a:r>
+          </a:p>
+          <a:p>
+            <a:endParaRPr lang="it-IT" dirty="0">
+              <a:solidFill>
+                <a:schemeClr val="tx1"/>
+              </a:solidFill>
+            </a:endParaRPr>
           </a:p>
           <a:p>
             <a:endParaRPr lang="it-IT" dirty="0">
@@ -13690,6 +13727,1780 @@
     <p:extLst>
       <p:ext uri="{BB962C8B-B14F-4D97-AF65-F5344CB8AC3E}">
         <p14:creationId xmlns:p14="http://schemas.microsoft.com/office/powerpoint/2010/main" val="328842838"/>
+      </p:ext>
+    </p:extLst>
+  </p:cSld>
+  <p:clrMapOvr>
+    <a:masterClrMapping/>
+  </p:clrMapOvr>
+</p:sld>
+</file>
+
+<file path=ppt/slides/slide21.xml><?xml version="1.0" encoding="utf-8"?>
+<p:sld xmlns:a="http://schemas.openxmlformats.org/drawingml/2006/main" xmlns:r="http://schemas.openxmlformats.org/officeDocument/2006/relationships" xmlns:p="http://schemas.openxmlformats.org/presentationml/2006/main">
+  <p:cSld>
+    <p:spTree>
+      <p:nvGrpSpPr>
+        <p:cNvPr id="1" name=""/>
+        <p:cNvGrpSpPr/>
+        <p:nvPr/>
+      </p:nvGrpSpPr>
+      <p:grpSpPr>
+        <a:xfrm>
+          <a:off x="0" y="0"/>
+          <a:ext cx="0" cy="0"/>
+          <a:chOff x="0" y="0"/>
+          <a:chExt cx="0" cy="0"/>
+        </a:xfrm>
+      </p:grpSpPr>
+      <p:sp>
+        <p:nvSpPr>
+          <p:cNvPr id="2" name="Title 1">
+            <a:extLst>
+              <a:ext uri="{FF2B5EF4-FFF2-40B4-BE49-F238E27FC236}">
+                <a16:creationId xmlns:a16="http://schemas.microsoft.com/office/drawing/2014/main" id="{0E71EC63-FDBE-551E-E3D3-7C6632604FA9}"/>
+              </a:ext>
+            </a:extLst>
+          </p:cNvPr>
+          <p:cNvSpPr>
+            <a:spLocks noGrp="1"/>
+          </p:cNvSpPr>
+          <p:nvPr>
+            <p:ph type="title"/>
+          </p:nvPr>
+        </p:nvSpPr>
+        <p:spPr/>
+        <p:txBody>
+          <a:bodyPr/>
+          <a:lstStyle/>
+          <a:p>
+            <a:r>
+              <a:rPr lang="it-IT" dirty="0"/>
+              <a:t>Risultati modello </a:t>
+            </a:r>
+            <a:r>
+              <a:rPr lang="it-IT" dirty="0" err="1"/>
+              <a:t>python</a:t>
+            </a:r>
+            <a:r>
+              <a:rPr lang="it-IT" dirty="0"/>
+              <a:t> nativo</a:t>
+            </a:r>
+            <a:endParaRPr lang="en-GB" dirty="0"/>
+          </a:p>
+        </p:txBody>
+      </p:sp>
+      <p:graphicFrame>
+        <p:nvGraphicFramePr>
+          <p:cNvPr id="4" name="Content Placeholder 3">
+            <a:extLst>
+              <a:ext uri="{FF2B5EF4-FFF2-40B4-BE49-F238E27FC236}">
+                <a16:creationId xmlns:a16="http://schemas.microsoft.com/office/drawing/2014/main" id="{EAF7EEBD-2FFC-53BA-16B5-7BB2B45EFB68}"/>
+              </a:ext>
+            </a:extLst>
+          </p:cNvPr>
+          <p:cNvGraphicFramePr>
+            <a:graphicFrameLocks noGrp="1"/>
+          </p:cNvGraphicFramePr>
+          <p:nvPr>
+            <p:ph idx="1"/>
+            <p:extLst>
+              <p:ext uri="{D42A27DB-BD31-4B8C-83A1-F6EECF244321}">
+                <p14:modId xmlns:p14="http://schemas.microsoft.com/office/powerpoint/2010/main" val="4204520424"/>
+              </p:ext>
+            </p:extLst>
+          </p:nvPr>
+        </p:nvGraphicFramePr>
+        <p:xfrm>
+          <a:off x="684211" y="685800"/>
+          <a:ext cx="9639658" cy="2865120"/>
+        </p:xfrm>
+        <a:graphic>
+          <a:graphicData uri="http://schemas.openxmlformats.org/drawingml/2006/table">
+            <a:tbl>
+              <a:tblPr firstRow="1" bandRow="1">
+                <a:tableStyleId>{5C22544A-7EE6-4342-B048-85BDC9FD1C3A}</a:tableStyleId>
+              </a:tblPr>
+              <a:tblGrid>
+                <a:gridCol w="1377094">
+                  <a:extLst>
+                    <a:ext uri="{9D8B030D-6E8A-4147-A177-3AD203B41FA5}">
+                      <a16:colId xmlns:a16="http://schemas.microsoft.com/office/drawing/2014/main" val="4131664428"/>
+                    </a:ext>
+                  </a:extLst>
+                </a:gridCol>
+                <a:gridCol w="1377094">
+                  <a:extLst>
+                    <a:ext uri="{9D8B030D-6E8A-4147-A177-3AD203B41FA5}">
+                      <a16:colId xmlns:a16="http://schemas.microsoft.com/office/drawing/2014/main" val="2682047389"/>
+                    </a:ext>
+                  </a:extLst>
+                </a:gridCol>
+                <a:gridCol w="1377094">
+                  <a:extLst>
+                    <a:ext uri="{9D8B030D-6E8A-4147-A177-3AD203B41FA5}">
+                      <a16:colId xmlns:a16="http://schemas.microsoft.com/office/drawing/2014/main" val="560020995"/>
+                    </a:ext>
+                  </a:extLst>
+                </a:gridCol>
+                <a:gridCol w="1377094">
+                  <a:extLst>
+                    <a:ext uri="{9D8B030D-6E8A-4147-A177-3AD203B41FA5}">
+                      <a16:colId xmlns:a16="http://schemas.microsoft.com/office/drawing/2014/main" val="2200272610"/>
+                    </a:ext>
+                  </a:extLst>
+                </a:gridCol>
+                <a:gridCol w="1377094">
+                  <a:extLst>
+                    <a:ext uri="{9D8B030D-6E8A-4147-A177-3AD203B41FA5}">
+                      <a16:colId xmlns:a16="http://schemas.microsoft.com/office/drawing/2014/main" val="1594005505"/>
+                    </a:ext>
+                  </a:extLst>
+                </a:gridCol>
+                <a:gridCol w="1377094">
+                  <a:extLst>
+                    <a:ext uri="{9D8B030D-6E8A-4147-A177-3AD203B41FA5}">
+                      <a16:colId xmlns:a16="http://schemas.microsoft.com/office/drawing/2014/main" val="748764634"/>
+                    </a:ext>
+                  </a:extLst>
+                </a:gridCol>
+                <a:gridCol w="1377094">
+                  <a:extLst>
+                    <a:ext uri="{9D8B030D-6E8A-4147-A177-3AD203B41FA5}">
+                      <a16:colId xmlns:a16="http://schemas.microsoft.com/office/drawing/2014/main" val="3172487590"/>
+                    </a:ext>
+                  </a:extLst>
+                </a:gridCol>
+              </a:tblGrid>
+              <a:tr h="370840">
+                <a:tc>
+                  <a:txBody>
+                    <a:bodyPr/>
+                    <a:lstStyle/>
+                    <a:p>
+                      <a:r>
+                        <a:rPr lang="it-IT" dirty="0"/>
+                        <a:t>Target RPS</a:t>
+                      </a:r>
+                      <a:endParaRPr lang="en-GB" dirty="0"/>
+                    </a:p>
+                  </a:txBody>
+                  <a:tcPr/>
+                </a:tc>
+                <a:tc>
+                  <a:txBody>
+                    <a:bodyPr/>
+                    <a:lstStyle/>
+                    <a:p>
+                      <a:r>
+                        <a:rPr lang="it-IT" dirty="0"/>
+                        <a:t>RPS effettivi</a:t>
+                      </a:r>
+                      <a:endParaRPr lang="en-GB" dirty="0"/>
+                    </a:p>
+                  </a:txBody>
+                  <a:tcPr/>
+                </a:tc>
+                <a:tc>
+                  <a:txBody>
+                    <a:bodyPr/>
+                    <a:lstStyle/>
+                    <a:p>
+                      <a:r>
+                        <a:rPr lang="it-IT" dirty="0"/>
+                        <a:t>Media latenze (s)</a:t>
+                      </a:r>
+                      <a:endParaRPr lang="en-GB" dirty="0"/>
+                    </a:p>
+                  </a:txBody>
+                  <a:tcPr/>
+                </a:tc>
+                <a:tc>
+                  <a:txBody>
+                    <a:bodyPr/>
+                    <a:lstStyle/>
+                    <a:p>
+                      <a:r>
+                        <a:rPr lang="it-IT" dirty="0"/>
+                        <a:t>P50 (s)</a:t>
+                      </a:r>
+                      <a:endParaRPr lang="en-GB" dirty="0"/>
+                    </a:p>
+                  </a:txBody>
+                  <a:tcPr/>
+                </a:tc>
+                <a:tc>
+                  <a:txBody>
+                    <a:bodyPr/>
+                    <a:lstStyle/>
+                    <a:p>
+                      <a:r>
+                        <a:rPr lang="it-IT" dirty="0"/>
+                        <a:t>P(90) (s)</a:t>
+                      </a:r>
+                      <a:endParaRPr lang="en-GB" dirty="0"/>
+                    </a:p>
+                  </a:txBody>
+                  <a:tcPr/>
+                </a:tc>
+                <a:tc>
+                  <a:txBody>
+                    <a:bodyPr/>
+                    <a:lstStyle/>
+                    <a:p>
+                      <a:r>
+                        <a:rPr lang="it-IT" dirty="0"/>
+                        <a:t>P(95) (s)</a:t>
+                      </a:r>
+                      <a:endParaRPr lang="en-GB" dirty="0"/>
+                    </a:p>
+                  </a:txBody>
+                  <a:tcPr/>
+                </a:tc>
+                <a:tc>
+                  <a:txBody>
+                    <a:bodyPr/>
+                    <a:lstStyle/>
+                    <a:p>
+                      <a:r>
+                        <a:rPr lang="it-IT" dirty="0"/>
+                        <a:t>P(99) (s)</a:t>
+                      </a:r>
+                      <a:endParaRPr lang="en-GB" dirty="0"/>
+                    </a:p>
+                  </a:txBody>
+                  <a:tcPr/>
+                </a:tc>
+                <a:extLst>
+                  <a:ext uri="{0D108BD9-81ED-4DB2-BD59-A6C34878D82A}">
+                    <a16:rowId xmlns:a16="http://schemas.microsoft.com/office/drawing/2014/main" val="1019616449"/>
+                  </a:ext>
+                </a:extLst>
+              </a:tr>
+              <a:tr h="370840">
+                <a:tc>
+                  <a:txBody>
+                    <a:bodyPr/>
+                    <a:lstStyle/>
+                    <a:p>
+                      <a:r>
+                        <a:rPr lang="it-IT" dirty="0"/>
+                        <a:t>10</a:t>
+                      </a:r>
+                      <a:endParaRPr lang="en-GB" dirty="0"/>
+                    </a:p>
+                  </a:txBody>
+                  <a:tcPr/>
+                </a:tc>
+                <a:tc>
+                  <a:txBody>
+                    <a:bodyPr/>
+                    <a:lstStyle/>
+                    <a:p>
+                      <a:r>
+                        <a:rPr lang="it-IT" dirty="0"/>
+                        <a:t>10,1</a:t>
+                      </a:r>
+                      <a:endParaRPr lang="en-GB" dirty="0"/>
+                    </a:p>
+                  </a:txBody>
+                  <a:tcPr/>
+                </a:tc>
+                <a:tc>
+                  <a:txBody>
+                    <a:bodyPr/>
+                    <a:lstStyle/>
+                    <a:p>
+                      <a:r>
+                        <a:rPr lang="it-IT" dirty="0"/>
+                        <a:t>1,5</a:t>
+                      </a:r>
+                      <a:endParaRPr lang="en-GB" dirty="0"/>
+                    </a:p>
+                  </a:txBody>
+                  <a:tcPr/>
+                </a:tc>
+                <a:tc>
+                  <a:txBody>
+                    <a:bodyPr/>
+                    <a:lstStyle/>
+                    <a:p>
+                      <a:r>
+                        <a:rPr lang="it-IT" dirty="0"/>
+                        <a:t>1,5</a:t>
+                      </a:r>
+                      <a:endParaRPr lang="en-GB" dirty="0"/>
+                    </a:p>
+                  </a:txBody>
+                  <a:tcPr/>
+                </a:tc>
+                <a:tc>
+                  <a:txBody>
+                    <a:bodyPr/>
+                    <a:lstStyle/>
+                    <a:p>
+                      <a:r>
+                        <a:rPr lang="it-IT" dirty="0"/>
+                        <a:t>1,8</a:t>
+                      </a:r>
+                      <a:endParaRPr lang="en-GB" dirty="0"/>
+                    </a:p>
+                  </a:txBody>
+                  <a:tcPr/>
+                </a:tc>
+                <a:tc>
+                  <a:txBody>
+                    <a:bodyPr/>
+                    <a:lstStyle/>
+                    <a:p>
+                      <a:r>
+                        <a:rPr lang="it-IT" dirty="0"/>
+                        <a:t>1,9</a:t>
+                      </a:r>
+                      <a:endParaRPr lang="en-GB" dirty="0"/>
+                    </a:p>
+                  </a:txBody>
+                  <a:tcPr/>
+                </a:tc>
+                <a:tc>
+                  <a:txBody>
+                    <a:bodyPr/>
+                    <a:lstStyle/>
+                    <a:p>
+                      <a:r>
+                        <a:rPr lang="it-IT" dirty="0"/>
+                        <a:t>2,5</a:t>
+                      </a:r>
+                      <a:endParaRPr lang="en-GB" dirty="0"/>
+                    </a:p>
+                  </a:txBody>
+                  <a:tcPr/>
+                </a:tc>
+                <a:extLst>
+                  <a:ext uri="{0D108BD9-81ED-4DB2-BD59-A6C34878D82A}">
+                    <a16:rowId xmlns:a16="http://schemas.microsoft.com/office/drawing/2014/main" val="3033522304"/>
+                  </a:ext>
+                </a:extLst>
+              </a:tr>
+              <a:tr h="370840">
+                <a:tc>
+                  <a:txBody>
+                    <a:bodyPr/>
+                    <a:lstStyle/>
+                    <a:p>
+                      <a:r>
+                        <a:rPr lang="it-IT" dirty="0"/>
+                        <a:t>50</a:t>
+                      </a:r>
+                      <a:endParaRPr lang="en-GB" dirty="0"/>
+                    </a:p>
+                  </a:txBody>
+                  <a:tcPr/>
+                </a:tc>
+                <a:tc>
+                  <a:txBody>
+                    <a:bodyPr/>
+                    <a:lstStyle/>
+                    <a:p>
+                      <a:r>
+                        <a:rPr lang="it-IT" dirty="0"/>
+                        <a:t>49</a:t>
+                      </a:r>
+                      <a:endParaRPr lang="en-GB" dirty="0"/>
+                    </a:p>
+                  </a:txBody>
+                  <a:tcPr/>
+                </a:tc>
+                <a:tc>
+                  <a:txBody>
+                    <a:bodyPr/>
+                    <a:lstStyle/>
+                    <a:p>
+                      <a:r>
+                        <a:rPr lang="it-IT" dirty="0"/>
+                        <a:t>1,4</a:t>
+                      </a:r>
+                      <a:endParaRPr lang="en-GB" dirty="0"/>
+                    </a:p>
+                  </a:txBody>
+                  <a:tcPr/>
+                </a:tc>
+                <a:tc>
+                  <a:txBody>
+                    <a:bodyPr/>
+                    <a:lstStyle/>
+                    <a:p>
+                      <a:r>
+                        <a:rPr lang="it-IT" dirty="0"/>
+                        <a:t>1,2</a:t>
+                      </a:r>
+                      <a:endParaRPr lang="en-GB" dirty="0"/>
+                    </a:p>
+                  </a:txBody>
+                  <a:tcPr/>
+                </a:tc>
+                <a:tc>
+                  <a:txBody>
+                    <a:bodyPr/>
+                    <a:lstStyle/>
+                    <a:p>
+                      <a:r>
+                        <a:rPr lang="it-IT" dirty="0"/>
+                        <a:t>1,7</a:t>
+                      </a:r>
+                      <a:endParaRPr lang="en-GB" dirty="0"/>
+                    </a:p>
+                  </a:txBody>
+                  <a:tcPr/>
+                </a:tc>
+                <a:tc>
+                  <a:txBody>
+                    <a:bodyPr/>
+                    <a:lstStyle/>
+                    <a:p>
+                      <a:r>
+                        <a:rPr lang="it-IT" dirty="0"/>
+                        <a:t>2,1</a:t>
+                      </a:r>
+                      <a:endParaRPr lang="en-GB" dirty="0"/>
+                    </a:p>
+                  </a:txBody>
+                  <a:tcPr/>
+                </a:tc>
+                <a:tc>
+                  <a:txBody>
+                    <a:bodyPr/>
+                    <a:lstStyle/>
+                    <a:p>
+                      <a:r>
+                        <a:rPr lang="it-IT" dirty="0"/>
+                        <a:t>3,2</a:t>
+                      </a:r>
+                      <a:endParaRPr lang="en-GB" dirty="0"/>
+                    </a:p>
+                  </a:txBody>
+                  <a:tcPr/>
+                </a:tc>
+                <a:extLst>
+                  <a:ext uri="{0D108BD9-81ED-4DB2-BD59-A6C34878D82A}">
+                    <a16:rowId xmlns:a16="http://schemas.microsoft.com/office/drawing/2014/main" val="774249562"/>
+                  </a:ext>
+                </a:extLst>
+              </a:tr>
+              <a:tr h="370840">
+                <a:tc>
+                  <a:txBody>
+                    <a:bodyPr/>
+                    <a:lstStyle/>
+                    <a:p>
+                      <a:r>
+                        <a:rPr lang="it-IT" dirty="0"/>
+                        <a:t>150</a:t>
+                      </a:r>
+                      <a:endParaRPr lang="en-GB" dirty="0"/>
+                    </a:p>
+                  </a:txBody>
+                  <a:tcPr/>
+                </a:tc>
+                <a:tc>
+                  <a:txBody>
+                    <a:bodyPr/>
+                    <a:lstStyle/>
+                    <a:p>
+                      <a:r>
+                        <a:rPr lang="it-IT" dirty="0"/>
+                        <a:t>148</a:t>
+                      </a:r>
+                      <a:endParaRPr lang="en-GB" dirty="0"/>
+                    </a:p>
+                  </a:txBody>
+                  <a:tcPr/>
+                </a:tc>
+                <a:tc>
+                  <a:txBody>
+                    <a:bodyPr/>
+                    <a:lstStyle/>
+                    <a:p>
+                      <a:r>
+                        <a:rPr lang="it-IT" dirty="0"/>
+                        <a:t>1,3</a:t>
+                      </a:r>
+                      <a:endParaRPr lang="en-GB" dirty="0"/>
+                    </a:p>
+                  </a:txBody>
+                  <a:tcPr/>
+                </a:tc>
+                <a:tc>
+                  <a:txBody>
+                    <a:bodyPr/>
+                    <a:lstStyle/>
+                    <a:p>
+                      <a:r>
+                        <a:rPr lang="it-IT" dirty="0"/>
+                        <a:t>1,2</a:t>
+                      </a:r>
+                      <a:endParaRPr lang="en-GB" dirty="0"/>
+                    </a:p>
+                  </a:txBody>
+                  <a:tcPr/>
+                </a:tc>
+                <a:tc>
+                  <a:txBody>
+                    <a:bodyPr/>
+                    <a:lstStyle/>
+                    <a:p>
+                      <a:r>
+                        <a:rPr lang="it-IT" dirty="0"/>
+                        <a:t>1,9</a:t>
+                      </a:r>
+                      <a:endParaRPr lang="en-GB" dirty="0"/>
+                    </a:p>
+                  </a:txBody>
+                  <a:tcPr/>
+                </a:tc>
+                <a:tc>
+                  <a:txBody>
+                    <a:bodyPr/>
+                    <a:lstStyle/>
+                    <a:p>
+                      <a:r>
+                        <a:rPr lang="it-IT" dirty="0"/>
+                        <a:t>2,2</a:t>
+                      </a:r>
+                      <a:endParaRPr lang="en-GB" dirty="0"/>
+                    </a:p>
+                  </a:txBody>
+                  <a:tcPr/>
+                </a:tc>
+                <a:tc>
+                  <a:txBody>
+                    <a:bodyPr/>
+                    <a:lstStyle/>
+                    <a:p>
+                      <a:r>
+                        <a:rPr lang="it-IT" dirty="0"/>
+                        <a:t>3,1</a:t>
+                      </a:r>
+                      <a:endParaRPr lang="en-GB" dirty="0"/>
+                    </a:p>
+                  </a:txBody>
+                  <a:tcPr/>
+                </a:tc>
+                <a:extLst>
+                  <a:ext uri="{0D108BD9-81ED-4DB2-BD59-A6C34878D82A}">
+                    <a16:rowId xmlns:a16="http://schemas.microsoft.com/office/drawing/2014/main" val="3093664536"/>
+                  </a:ext>
+                </a:extLst>
+              </a:tr>
+              <a:tr h="370840">
+                <a:tc>
+                  <a:txBody>
+                    <a:bodyPr/>
+                    <a:lstStyle/>
+                    <a:p>
+                      <a:r>
+                        <a:rPr lang="it-IT" dirty="0"/>
+                        <a:t>300</a:t>
+                      </a:r>
+                      <a:endParaRPr lang="en-GB" dirty="0"/>
+                    </a:p>
+                  </a:txBody>
+                  <a:tcPr/>
+                </a:tc>
+                <a:tc>
+                  <a:txBody>
+                    <a:bodyPr/>
+                    <a:lstStyle/>
+                    <a:p>
+                      <a:r>
+                        <a:rPr lang="it-IT" dirty="0"/>
+                        <a:t>292,7</a:t>
+                      </a:r>
+                      <a:endParaRPr lang="en-GB" dirty="0"/>
+                    </a:p>
+                  </a:txBody>
+                  <a:tcPr/>
+                </a:tc>
+                <a:tc>
+                  <a:txBody>
+                    <a:bodyPr/>
+                    <a:lstStyle/>
+                    <a:p>
+                      <a:r>
+                        <a:rPr lang="it-IT" dirty="0"/>
+                        <a:t>1,5</a:t>
+                      </a:r>
+                      <a:endParaRPr lang="en-GB" dirty="0"/>
+                    </a:p>
+                  </a:txBody>
+                  <a:tcPr/>
+                </a:tc>
+                <a:tc>
+                  <a:txBody>
+                    <a:bodyPr/>
+                    <a:lstStyle/>
+                    <a:p>
+                      <a:r>
+                        <a:rPr lang="it-IT" dirty="0"/>
+                        <a:t>1,3</a:t>
+                      </a:r>
+                      <a:endParaRPr lang="en-GB" dirty="0"/>
+                    </a:p>
+                  </a:txBody>
+                  <a:tcPr/>
+                </a:tc>
+                <a:tc>
+                  <a:txBody>
+                    <a:bodyPr/>
+                    <a:lstStyle/>
+                    <a:p>
+                      <a:r>
+                        <a:rPr lang="it-IT" dirty="0"/>
+                        <a:t>2,2</a:t>
+                      </a:r>
+                      <a:endParaRPr lang="en-GB" dirty="0"/>
+                    </a:p>
+                  </a:txBody>
+                  <a:tcPr/>
+                </a:tc>
+                <a:tc>
+                  <a:txBody>
+                    <a:bodyPr/>
+                    <a:lstStyle/>
+                    <a:p>
+                      <a:r>
+                        <a:rPr lang="it-IT" dirty="0"/>
+                        <a:t>2,6</a:t>
+                      </a:r>
+                      <a:endParaRPr lang="en-GB" dirty="0"/>
+                    </a:p>
+                  </a:txBody>
+                  <a:tcPr/>
+                </a:tc>
+                <a:tc>
+                  <a:txBody>
+                    <a:bodyPr/>
+                    <a:lstStyle/>
+                    <a:p>
+                      <a:r>
+                        <a:rPr lang="it-IT" dirty="0"/>
+                        <a:t>3,7</a:t>
+                      </a:r>
+                      <a:endParaRPr lang="en-GB" dirty="0"/>
+                    </a:p>
+                  </a:txBody>
+                  <a:tcPr/>
+                </a:tc>
+                <a:extLst>
+                  <a:ext uri="{0D108BD9-81ED-4DB2-BD59-A6C34878D82A}">
+                    <a16:rowId xmlns:a16="http://schemas.microsoft.com/office/drawing/2014/main" val="369788681"/>
+                  </a:ext>
+                </a:extLst>
+              </a:tr>
+              <a:tr h="370840">
+                <a:tc>
+                  <a:txBody>
+                    <a:bodyPr/>
+                    <a:lstStyle/>
+                    <a:p>
+                      <a:r>
+                        <a:rPr lang="it-IT" dirty="0"/>
+                        <a:t>600</a:t>
+                      </a:r>
+                      <a:endParaRPr lang="en-GB" dirty="0"/>
+                    </a:p>
+                  </a:txBody>
+                  <a:tcPr/>
+                </a:tc>
+                <a:tc>
+                  <a:txBody>
+                    <a:bodyPr/>
+                    <a:lstStyle/>
+                    <a:p>
+                      <a:r>
+                        <a:rPr lang="it-IT" dirty="0"/>
+                        <a:t>558,3</a:t>
+                      </a:r>
+                      <a:endParaRPr lang="en-GB" dirty="0"/>
+                    </a:p>
+                  </a:txBody>
+                  <a:tcPr/>
+                </a:tc>
+                <a:tc>
+                  <a:txBody>
+                    <a:bodyPr/>
+                    <a:lstStyle/>
+                    <a:p>
+                      <a:r>
+                        <a:rPr lang="it-IT" dirty="0"/>
+                        <a:t>1,6</a:t>
+                      </a:r>
+                      <a:endParaRPr lang="en-GB" dirty="0"/>
+                    </a:p>
+                  </a:txBody>
+                  <a:tcPr/>
+                </a:tc>
+                <a:tc>
+                  <a:txBody>
+                    <a:bodyPr/>
+                    <a:lstStyle/>
+                    <a:p>
+                      <a:r>
+                        <a:rPr lang="it-IT" dirty="0"/>
+                        <a:t>1,5</a:t>
+                      </a:r>
+                      <a:endParaRPr lang="en-GB" dirty="0"/>
+                    </a:p>
+                  </a:txBody>
+                  <a:tcPr/>
+                </a:tc>
+                <a:tc>
+                  <a:txBody>
+                    <a:bodyPr/>
+                    <a:lstStyle/>
+                    <a:p>
+                      <a:r>
+                        <a:rPr lang="it-IT" dirty="0"/>
+                        <a:t>2,6</a:t>
+                      </a:r>
+                      <a:endParaRPr lang="en-GB" dirty="0"/>
+                    </a:p>
+                  </a:txBody>
+                  <a:tcPr/>
+                </a:tc>
+                <a:tc>
+                  <a:txBody>
+                    <a:bodyPr/>
+                    <a:lstStyle/>
+                    <a:p>
+                      <a:r>
+                        <a:rPr lang="it-IT" dirty="0"/>
+                        <a:t>2,8</a:t>
+                      </a:r>
+                      <a:endParaRPr lang="en-GB" dirty="0"/>
+                    </a:p>
+                  </a:txBody>
+                  <a:tcPr/>
+                </a:tc>
+                <a:tc>
+                  <a:txBody>
+                    <a:bodyPr/>
+                    <a:lstStyle/>
+                    <a:p>
+                      <a:r>
+                        <a:rPr lang="it-IT" dirty="0"/>
+                        <a:t>3,7</a:t>
+                      </a:r>
+                      <a:endParaRPr lang="en-GB" dirty="0"/>
+                    </a:p>
+                  </a:txBody>
+                  <a:tcPr/>
+                </a:tc>
+                <a:extLst>
+                  <a:ext uri="{0D108BD9-81ED-4DB2-BD59-A6C34878D82A}">
+                    <a16:rowId xmlns:a16="http://schemas.microsoft.com/office/drawing/2014/main" val="15991862"/>
+                  </a:ext>
+                </a:extLst>
+              </a:tr>
+              <a:tr h="370840">
+                <a:tc>
+                  <a:txBody>
+                    <a:bodyPr/>
+                    <a:lstStyle/>
+                    <a:p>
+                      <a:r>
+                        <a:rPr lang="it-IT" dirty="0"/>
+                        <a:t>1000</a:t>
+                      </a:r>
+                      <a:endParaRPr lang="en-GB" dirty="0"/>
+                    </a:p>
+                  </a:txBody>
+                  <a:tcPr/>
+                </a:tc>
+                <a:tc>
+                  <a:txBody>
+                    <a:bodyPr/>
+                    <a:lstStyle/>
+                    <a:p>
+                      <a:r>
+                        <a:rPr lang="it-IT" dirty="0"/>
+                        <a:t>866</a:t>
+                      </a:r>
+                      <a:endParaRPr lang="en-GB" dirty="0"/>
+                    </a:p>
+                  </a:txBody>
+                  <a:tcPr/>
+                </a:tc>
+                <a:tc>
+                  <a:txBody>
+                    <a:bodyPr/>
+                    <a:lstStyle/>
+                    <a:p>
+                      <a:r>
+                        <a:rPr lang="it-IT" dirty="0"/>
+                        <a:t>1,4</a:t>
+                      </a:r>
+                      <a:endParaRPr lang="en-GB" dirty="0"/>
+                    </a:p>
+                  </a:txBody>
+                  <a:tcPr/>
+                </a:tc>
+                <a:tc>
+                  <a:txBody>
+                    <a:bodyPr/>
+                    <a:lstStyle/>
+                    <a:p>
+                      <a:r>
+                        <a:rPr lang="it-IT" dirty="0"/>
+                        <a:t>1,2</a:t>
+                      </a:r>
+                      <a:endParaRPr lang="en-GB" dirty="0"/>
+                    </a:p>
+                  </a:txBody>
+                  <a:tcPr/>
+                </a:tc>
+                <a:tc>
+                  <a:txBody>
+                    <a:bodyPr/>
+                    <a:lstStyle/>
+                    <a:p>
+                      <a:r>
+                        <a:rPr lang="it-IT" dirty="0"/>
+                        <a:t>2,0</a:t>
+                      </a:r>
+                      <a:endParaRPr lang="en-GB" dirty="0"/>
+                    </a:p>
+                  </a:txBody>
+                  <a:tcPr/>
+                </a:tc>
+                <a:tc>
+                  <a:txBody>
+                    <a:bodyPr/>
+                    <a:lstStyle/>
+                    <a:p>
+                      <a:r>
+                        <a:rPr lang="it-IT" dirty="0"/>
+                        <a:t>2,3</a:t>
+                      </a:r>
+                      <a:endParaRPr lang="en-GB" dirty="0"/>
+                    </a:p>
+                  </a:txBody>
+                  <a:tcPr/>
+                </a:tc>
+                <a:tc>
+                  <a:txBody>
+                    <a:bodyPr/>
+                    <a:lstStyle/>
+                    <a:p>
+                      <a:r>
+                        <a:rPr lang="it-IT" dirty="0"/>
+                        <a:t>3,4</a:t>
+                      </a:r>
+                      <a:endParaRPr lang="en-GB" dirty="0"/>
+                    </a:p>
+                  </a:txBody>
+                  <a:tcPr/>
+                </a:tc>
+                <a:extLst>
+                  <a:ext uri="{0D108BD9-81ED-4DB2-BD59-A6C34878D82A}">
+                    <a16:rowId xmlns:a16="http://schemas.microsoft.com/office/drawing/2014/main" val="3095448716"/>
+                  </a:ext>
+                </a:extLst>
+              </a:tr>
+            </a:tbl>
+          </a:graphicData>
+        </a:graphic>
+      </p:graphicFrame>
+    </p:spTree>
+    <p:extLst>
+      <p:ext uri="{BB962C8B-B14F-4D97-AF65-F5344CB8AC3E}">
+        <p14:creationId xmlns:p14="http://schemas.microsoft.com/office/powerpoint/2010/main" val="3284269687"/>
+      </p:ext>
+    </p:extLst>
+  </p:cSld>
+  <p:clrMapOvr>
+    <a:masterClrMapping/>
+  </p:clrMapOvr>
+</p:sld>
+</file>
+
+<file path=ppt/slides/slide22.xml><?xml version="1.0" encoding="utf-8"?>
+<p:sld xmlns:a="http://schemas.openxmlformats.org/drawingml/2006/main" xmlns:r="http://schemas.openxmlformats.org/officeDocument/2006/relationships" xmlns:p="http://schemas.openxmlformats.org/presentationml/2006/main">
+  <p:cSld>
+    <p:spTree>
+      <p:nvGrpSpPr>
+        <p:cNvPr id="1" name="">
+          <a:extLst>
+            <a:ext uri="{FF2B5EF4-FFF2-40B4-BE49-F238E27FC236}">
+              <a16:creationId xmlns:a16="http://schemas.microsoft.com/office/drawing/2014/main" id="{DB1BD3F6-3E3A-31AF-0DB3-4FFFDBFF2059}"/>
+            </a:ext>
+          </a:extLst>
+        </p:cNvPr>
+        <p:cNvGrpSpPr/>
+        <p:nvPr/>
+      </p:nvGrpSpPr>
+      <p:grpSpPr>
+        <a:xfrm>
+          <a:off x="0" y="0"/>
+          <a:ext cx="0" cy="0"/>
+          <a:chOff x="0" y="0"/>
+          <a:chExt cx="0" cy="0"/>
+        </a:xfrm>
+      </p:grpSpPr>
+      <p:sp>
+        <p:nvSpPr>
+          <p:cNvPr id="2" name="Title 1">
+            <a:extLst>
+              <a:ext uri="{FF2B5EF4-FFF2-40B4-BE49-F238E27FC236}">
+                <a16:creationId xmlns:a16="http://schemas.microsoft.com/office/drawing/2014/main" id="{EBB0CC12-4353-9F7F-1210-571911191668}"/>
+              </a:ext>
+            </a:extLst>
+          </p:cNvPr>
+          <p:cNvSpPr>
+            <a:spLocks noGrp="1"/>
+          </p:cNvSpPr>
+          <p:nvPr>
+            <p:ph type="title"/>
+          </p:nvPr>
+        </p:nvSpPr>
+        <p:spPr/>
+        <p:txBody>
+          <a:bodyPr/>
+          <a:lstStyle/>
+          <a:p>
+            <a:r>
+              <a:rPr lang="it-IT" dirty="0"/>
+              <a:t>Risultati modello ONNX IN PYTHON</a:t>
+            </a:r>
+            <a:endParaRPr lang="en-GB" dirty="0"/>
+          </a:p>
+        </p:txBody>
+      </p:sp>
+      <p:graphicFrame>
+        <p:nvGraphicFramePr>
+          <p:cNvPr id="4" name="Content Placeholder 3">
+            <a:extLst>
+              <a:ext uri="{FF2B5EF4-FFF2-40B4-BE49-F238E27FC236}">
+                <a16:creationId xmlns:a16="http://schemas.microsoft.com/office/drawing/2014/main" id="{401D8BCD-4EE5-A96E-9908-C8D03930E924}"/>
+              </a:ext>
+            </a:extLst>
+          </p:cNvPr>
+          <p:cNvGraphicFramePr>
+            <a:graphicFrameLocks noGrp="1"/>
+          </p:cNvGraphicFramePr>
+          <p:nvPr>
+            <p:ph idx="1"/>
+            <p:extLst>
+              <p:ext uri="{D42A27DB-BD31-4B8C-83A1-F6EECF244321}">
+                <p14:modId xmlns:p14="http://schemas.microsoft.com/office/powerpoint/2010/main" val="1480696726"/>
+              </p:ext>
+            </p:extLst>
+          </p:nvPr>
+        </p:nvGraphicFramePr>
+        <p:xfrm>
+          <a:off x="684211" y="685800"/>
+          <a:ext cx="9639658" cy="2865120"/>
+        </p:xfrm>
+        <a:graphic>
+          <a:graphicData uri="http://schemas.openxmlformats.org/drawingml/2006/table">
+            <a:tbl>
+              <a:tblPr firstRow="1" bandRow="1">
+                <a:tableStyleId>{5C22544A-7EE6-4342-B048-85BDC9FD1C3A}</a:tableStyleId>
+              </a:tblPr>
+              <a:tblGrid>
+                <a:gridCol w="1377094">
+                  <a:extLst>
+                    <a:ext uri="{9D8B030D-6E8A-4147-A177-3AD203B41FA5}">
+                      <a16:colId xmlns:a16="http://schemas.microsoft.com/office/drawing/2014/main" val="4131664428"/>
+                    </a:ext>
+                  </a:extLst>
+                </a:gridCol>
+                <a:gridCol w="1377094">
+                  <a:extLst>
+                    <a:ext uri="{9D8B030D-6E8A-4147-A177-3AD203B41FA5}">
+                      <a16:colId xmlns:a16="http://schemas.microsoft.com/office/drawing/2014/main" val="2682047389"/>
+                    </a:ext>
+                  </a:extLst>
+                </a:gridCol>
+                <a:gridCol w="1377094">
+                  <a:extLst>
+                    <a:ext uri="{9D8B030D-6E8A-4147-A177-3AD203B41FA5}">
+                      <a16:colId xmlns:a16="http://schemas.microsoft.com/office/drawing/2014/main" val="560020995"/>
+                    </a:ext>
+                  </a:extLst>
+                </a:gridCol>
+                <a:gridCol w="1377094">
+                  <a:extLst>
+                    <a:ext uri="{9D8B030D-6E8A-4147-A177-3AD203B41FA5}">
+                      <a16:colId xmlns:a16="http://schemas.microsoft.com/office/drawing/2014/main" val="2200272610"/>
+                    </a:ext>
+                  </a:extLst>
+                </a:gridCol>
+                <a:gridCol w="1377094">
+                  <a:extLst>
+                    <a:ext uri="{9D8B030D-6E8A-4147-A177-3AD203B41FA5}">
+                      <a16:colId xmlns:a16="http://schemas.microsoft.com/office/drawing/2014/main" val="1594005505"/>
+                    </a:ext>
+                  </a:extLst>
+                </a:gridCol>
+                <a:gridCol w="1377094">
+                  <a:extLst>
+                    <a:ext uri="{9D8B030D-6E8A-4147-A177-3AD203B41FA5}">
+                      <a16:colId xmlns:a16="http://schemas.microsoft.com/office/drawing/2014/main" val="748764634"/>
+                    </a:ext>
+                  </a:extLst>
+                </a:gridCol>
+                <a:gridCol w="1377094">
+                  <a:extLst>
+                    <a:ext uri="{9D8B030D-6E8A-4147-A177-3AD203B41FA5}">
+                      <a16:colId xmlns:a16="http://schemas.microsoft.com/office/drawing/2014/main" val="3172487590"/>
+                    </a:ext>
+                  </a:extLst>
+                </a:gridCol>
+              </a:tblGrid>
+              <a:tr h="370840">
+                <a:tc>
+                  <a:txBody>
+                    <a:bodyPr/>
+                    <a:lstStyle/>
+                    <a:p>
+                      <a:r>
+                        <a:rPr lang="it-IT" dirty="0"/>
+                        <a:t>Target RPS</a:t>
+                      </a:r>
+                      <a:endParaRPr lang="en-GB" dirty="0"/>
+                    </a:p>
+                  </a:txBody>
+                  <a:tcPr/>
+                </a:tc>
+                <a:tc>
+                  <a:txBody>
+                    <a:bodyPr/>
+                    <a:lstStyle/>
+                    <a:p>
+                      <a:r>
+                        <a:rPr lang="it-IT" dirty="0"/>
+                        <a:t>RPS effettivi</a:t>
+                      </a:r>
+                      <a:endParaRPr lang="en-GB" dirty="0"/>
+                    </a:p>
+                  </a:txBody>
+                  <a:tcPr/>
+                </a:tc>
+                <a:tc>
+                  <a:txBody>
+                    <a:bodyPr/>
+                    <a:lstStyle/>
+                    <a:p>
+                      <a:r>
+                        <a:rPr lang="it-IT" dirty="0"/>
+                        <a:t>Media latenze (s)</a:t>
+                      </a:r>
+                      <a:endParaRPr lang="en-GB" dirty="0"/>
+                    </a:p>
+                  </a:txBody>
+                  <a:tcPr/>
+                </a:tc>
+                <a:tc>
+                  <a:txBody>
+                    <a:bodyPr/>
+                    <a:lstStyle/>
+                    <a:p>
+                      <a:r>
+                        <a:rPr lang="it-IT" dirty="0"/>
+                        <a:t>P50 (s)</a:t>
+                      </a:r>
+                      <a:endParaRPr lang="en-GB" dirty="0"/>
+                    </a:p>
+                  </a:txBody>
+                  <a:tcPr/>
+                </a:tc>
+                <a:tc>
+                  <a:txBody>
+                    <a:bodyPr/>
+                    <a:lstStyle/>
+                    <a:p>
+                      <a:r>
+                        <a:rPr lang="it-IT" dirty="0"/>
+                        <a:t>P(90) (s)</a:t>
+                      </a:r>
+                      <a:endParaRPr lang="en-GB" dirty="0"/>
+                    </a:p>
+                  </a:txBody>
+                  <a:tcPr/>
+                </a:tc>
+                <a:tc>
+                  <a:txBody>
+                    <a:bodyPr/>
+                    <a:lstStyle/>
+                    <a:p>
+                      <a:r>
+                        <a:rPr lang="it-IT" dirty="0"/>
+                        <a:t>P(95) (s)</a:t>
+                      </a:r>
+                      <a:endParaRPr lang="en-GB" dirty="0"/>
+                    </a:p>
+                  </a:txBody>
+                  <a:tcPr/>
+                </a:tc>
+                <a:tc>
+                  <a:txBody>
+                    <a:bodyPr/>
+                    <a:lstStyle/>
+                    <a:p>
+                      <a:r>
+                        <a:rPr lang="it-IT" dirty="0"/>
+                        <a:t>P(99) (s)</a:t>
+                      </a:r>
+                      <a:endParaRPr lang="en-GB" dirty="0"/>
+                    </a:p>
+                  </a:txBody>
+                  <a:tcPr/>
+                </a:tc>
+                <a:extLst>
+                  <a:ext uri="{0D108BD9-81ED-4DB2-BD59-A6C34878D82A}">
+                    <a16:rowId xmlns:a16="http://schemas.microsoft.com/office/drawing/2014/main" val="1019616449"/>
+                  </a:ext>
+                </a:extLst>
+              </a:tr>
+              <a:tr h="370840">
+                <a:tc>
+                  <a:txBody>
+                    <a:bodyPr/>
+                    <a:lstStyle/>
+                    <a:p>
+                      <a:r>
+                        <a:rPr lang="it-IT" dirty="0"/>
+                        <a:t>10</a:t>
+                      </a:r>
+                      <a:endParaRPr lang="en-GB" dirty="0"/>
+                    </a:p>
+                  </a:txBody>
+                  <a:tcPr/>
+                </a:tc>
+                <a:tc>
+                  <a:txBody>
+                    <a:bodyPr/>
+                    <a:lstStyle/>
+                    <a:p>
+                      <a:r>
+                        <a:rPr lang="it-IT" dirty="0"/>
+                        <a:t>9,9</a:t>
+                      </a:r>
+                      <a:endParaRPr lang="en-GB" dirty="0"/>
+                    </a:p>
+                  </a:txBody>
+                  <a:tcPr/>
+                </a:tc>
+                <a:tc>
+                  <a:txBody>
+                    <a:bodyPr/>
+                    <a:lstStyle/>
+                    <a:p>
+                      <a:r>
+                        <a:rPr lang="it-IT" dirty="0"/>
+                        <a:t>1,5</a:t>
+                      </a:r>
+                      <a:endParaRPr lang="en-GB" dirty="0"/>
+                    </a:p>
+                  </a:txBody>
+                  <a:tcPr/>
+                </a:tc>
+                <a:tc>
+                  <a:txBody>
+                    <a:bodyPr/>
+                    <a:lstStyle/>
+                    <a:p>
+                      <a:r>
+                        <a:rPr lang="it-IT" dirty="0"/>
+                        <a:t>1,5</a:t>
+                      </a:r>
+                      <a:endParaRPr lang="en-GB" dirty="0"/>
+                    </a:p>
+                  </a:txBody>
+                  <a:tcPr/>
+                </a:tc>
+                <a:tc>
+                  <a:txBody>
+                    <a:bodyPr/>
+                    <a:lstStyle/>
+                    <a:p>
+                      <a:r>
+                        <a:rPr lang="it-IT" dirty="0"/>
+                        <a:t>1,9</a:t>
+                      </a:r>
+                      <a:endParaRPr lang="en-GB" dirty="0"/>
+                    </a:p>
+                  </a:txBody>
+                  <a:tcPr/>
+                </a:tc>
+                <a:tc>
+                  <a:txBody>
+                    <a:bodyPr/>
+                    <a:lstStyle/>
+                    <a:p>
+                      <a:r>
+                        <a:rPr lang="it-IT" dirty="0"/>
+                        <a:t>2,1</a:t>
+                      </a:r>
+                      <a:endParaRPr lang="en-GB" dirty="0"/>
+                    </a:p>
+                  </a:txBody>
+                  <a:tcPr/>
+                </a:tc>
+                <a:tc>
+                  <a:txBody>
+                    <a:bodyPr/>
+                    <a:lstStyle/>
+                    <a:p>
+                      <a:r>
+                        <a:rPr lang="it-IT" dirty="0"/>
+                        <a:t>2,9</a:t>
+                      </a:r>
+                      <a:endParaRPr lang="en-GB" dirty="0"/>
+                    </a:p>
+                  </a:txBody>
+                  <a:tcPr/>
+                </a:tc>
+                <a:extLst>
+                  <a:ext uri="{0D108BD9-81ED-4DB2-BD59-A6C34878D82A}">
+                    <a16:rowId xmlns:a16="http://schemas.microsoft.com/office/drawing/2014/main" val="3033522304"/>
+                  </a:ext>
+                </a:extLst>
+              </a:tr>
+              <a:tr h="370840">
+                <a:tc>
+                  <a:txBody>
+                    <a:bodyPr/>
+                    <a:lstStyle/>
+                    <a:p>
+                      <a:r>
+                        <a:rPr lang="it-IT" dirty="0"/>
+                        <a:t>50</a:t>
+                      </a:r>
+                      <a:endParaRPr lang="en-GB" dirty="0"/>
+                    </a:p>
+                  </a:txBody>
+                  <a:tcPr/>
+                </a:tc>
+                <a:tc>
+                  <a:txBody>
+                    <a:bodyPr/>
+                    <a:lstStyle/>
+                    <a:p>
+                      <a:r>
+                        <a:rPr lang="it-IT" dirty="0"/>
+                        <a:t>49,9</a:t>
+                      </a:r>
+                      <a:endParaRPr lang="en-GB" dirty="0"/>
+                    </a:p>
+                  </a:txBody>
+                  <a:tcPr/>
+                </a:tc>
+                <a:tc>
+                  <a:txBody>
+                    <a:bodyPr/>
+                    <a:lstStyle/>
+                    <a:p>
+                      <a:r>
+                        <a:rPr lang="it-IT" dirty="0"/>
+                        <a:t>1,3</a:t>
+                      </a:r>
+                      <a:endParaRPr lang="en-GB" dirty="0"/>
+                    </a:p>
+                  </a:txBody>
+                  <a:tcPr/>
+                </a:tc>
+                <a:tc>
+                  <a:txBody>
+                    <a:bodyPr/>
+                    <a:lstStyle/>
+                    <a:p>
+                      <a:r>
+                        <a:rPr lang="it-IT" dirty="0"/>
+                        <a:t>1,2</a:t>
+                      </a:r>
+                      <a:endParaRPr lang="en-GB" dirty="0"/>
+                    </a:p>
+                  </a:txBody>
+                  <a:tcPr/>
+                </a:tc>
+                <a:tc>
+                  <a:txBody>
+                    <a:bodyPr/>
+                    <a:lstStyle/>
+                    <a:p>
+                      <a:r>
+                        <a:rPr lang="it-IT" dirty="0"/>
+                        <a:t>1,8</a:t>
+                      </a:r>
+                      <a:endParaRPr lang="en-GB" dirty="0"/>
+                    </a:p>
+                  </a:txBody>
+                  <a:tcPr/>
+                </a:tc>
+                <a:tc>
+                  <a:txBody>
+                    <a:bodyPr/>
+                    <a:lstStyle/>
+                    <a:p>
+                      <a:r>
+                        <a:rPr lang="it-IT" dirty="0"/>
+                        <a:t>2,0</a:t>
+                      </a:r>
+                      <a:endParaRPr lang="en-GB" dirty="0"/>
+                    </a:p>
+                  </a:txBody>
+                  <a:tcPr/>
+                </a:tc>
+                <a:tc>
+                  <a:txBody>
+                    <a:bodyPr/>
+                    <a:lstStyle/>
+                    <a:p>
+                      <a:r>
+                        <a:rPr lang="it-IT" dirty="0"/>
+                        <a:t>2,9</a:t>
+                      </a:r>
+                      <a:endParaRPr lang="en-GB" dirty="0"/>
+                    </a:p>
+                  </a:txBody>
+                  <a:tcPr/>
+                </a:tc>
+                <a:extLst>
+                  <a:ext uri="{0D108BD9-81ED-4DB2-BD59-A6C34878D82A}">
+                    <a16:rowId xmlns:a16="http://schemas.microsoft.com/office/drawing/2014/main" val="774249562"/>
+                  </a:ext>
+                </a:extLst>
+              </a:tr>
+              <a:tr h="370840">
+                <a:tc>
+                  <a:txBody>
+                    <a:bodyPr/>
+                    <a:lstStyle/>
+                    <a:p>
+                      <a:r>
+                        <a:rPr lang="it-IT" dirty="0"/>
+                        <a:t>150</a:t>
+                      </a:r>
+                      <a:endParaRPr lang="en-GB" dirty="0"/>
+                    </a:p>
+                  </a:txBody>
+                  <a:tcPr/>
+                </a:tc>
+                <a:tc>
+                  <a:txBody>
+                    <a:bodyPr/>
+                    <a:lstStyle/>
+                    <a:p>
+                      <a:r>
+                        <a:rPr lang="it-IT" dirty="0"/>
+                        <a:t>148,7</a:t>
+                      </a:r>
+                      <a:endParaRPr lang="en-GB" dirty="0"/>
+                    </a:p>
+                  </a:txBody>
+                  <a:tcPr/>
+                </a:tc>
+                <a:tc>
+                  <a:txBody>
+                    <a:bodyPr/>
+                    <a:lstStyle/>
+                    <a:p>
+                      <a:r>
+                        <a:rPr lang="it-IT" dirty="0"/>
+                        <a:t>1,2</a:t>
+                      </a:r>
+                      <a:endParaRPr lang="en-GB" dirty="0"/>
+                    </a:p>
+                  </a:txBody>
+                  <a:tcPr/>
+                </a:tc>
+                <a:tc>
+                  <a:txBody>
+                    <a:bodyPr/>
+                    <a:lstStyle/>
+                    <a:p>
+                      <a:r>
+                        <a:rPr lang="it-IT" dirty="0"/>
+                        <a:t>1,1</a:t>
+                      </a:r>
+                      <a:endParaRPr lang="en-GB" dirty="0"/>
+                    </a:p>
+                  </a:txBody>
+                  <a:tcPr/>
+                </a:tc>
+                <a:tc>
+                  <a:txBody>
+                    <a:bodyPr/>
+                    <a:lstStyle/>
+                    <a:p>
+                      <a:r>
+                        <a:rPr lang="it-IT" dirty="0"/>
+                        <a:t>1,9</a:t>
+                      </a:r>
+                      <a:endParaRPr lang="en-GB" dirty="0"/>
+                    </a:p>
+                  </a:txBody>
+                  <a:tcPr/>
+                </a:tc>
+                <a:tc>
+                  <a:txBody>
+                    <a:bodyPr/>
+                    <a:lstStyle/>
+                    <a:p>
+                      <a:r>
+                        <a:rPr lang="it-IT" dirty="0"/>
+                        <a:t>2,3</a:t>
+                      </a:r>
+                      <a:endParaRPr lang="en-GB" dirty="0"/>
+                    </a:p>
+                  </a:txBody>
+                  <a:tcPr/>
+                </a:tc>
+                <a:tc>
+                  <a:txBody>
+                    <a:bodyPr/>
+                    <a:lstStyle/>
+                    <a:p>
+                      <a:r>
+                        <a:rPr lang="it-IT" dirty="0"/>
+                        <a:t>3,6</a:t>
+                      </a:r>
+                      <a:endParaRPr lang="en-GB" dirty="0"/>
+                    </a:p>
+                  </a:txBody>
+                  <a:tcPr/>
+                </a:tc>
+                <a:extLst>
+                  <a:ext uri="{0D108BD9-81ED-4DB2-BD59-A6C34878D82A}">
+                    <a16:rowId xmlns:a16="http://schemas.microsoft.com/office/drawing/2014/main" val="3093664536"/>
+                  </a:ext>
+                </a:extLst>
+              </a:tr>
+              <a:tr h="370840">
+                <a:tc>
+                  <a:txBody>
+                    <a:bodyPr/>
+                    <a:lstStyle/>
+                    <a:p>
+                      <a:r>
+                        <a:rPr lang="it-IT" dirty="0"/>
+                        <a:t>300</a:t>
+                      </a:r>
+                      <a:endParaRPr lang="en-GB" dirty="0"/>
+                    </a:p>
+                  </a:txBody>
+                  <a:tcPr/>
+                </a:tc>
+                <a:tc>
+                  <a:txBody>
+                    <a:bodyPr/>
+                    <a:lstStyle/>
+                    <a:p>
+                      <a:r>
+                        <a:rPr lang="it-IT" dirty="0"/>
+                        <a:t>292,9</a:t>
+                      </a:r>
+                      <a:endParaRPr lang="en-GB" dirty="0"/>
+                    </a:p>
+                  </a:txBody>
+                  <a:tcPr/>
+                </a:tc>
+                <a:tc>
+                  <a:txBody>
+                    <a:bodyPr/>
+                    <a:lstStyle/>
+                    <a:p>
+                      <a:r>
+                        <a:rPr lang="it-IT" dirty="0"/>
+                        <a:t>1,4</a:t>
+                      </a:r>
+                      <a:endParaRPr lang="en-GB" dirty="0"/>
+                    </a:p>
+                  </a:txBody>
+                  <a:tcPr/>
+                </a:tc>
+                <a:tc>
+                  <a:txBody>
+                    <a:bodyPr/>
+                    <a:lstStyle/>
+                    <a:p>
+                      <a:r>
+                        <a:rPr lang="it-IT" dirty="0"/>
+                        <a:t>1,2</a:t>
+                      </a:r>
+                      <a:endParaRPr lang="en-GB" dirty="0"/>
+                    </a:p>
+                  </a:txBody>
+                  <a:tcPr/>
+                </a:tc>
+                <a:tc>
+                  <a:txBody>
+                    <a:bodyPr/>
+                    <a:lstStyle/>
+                    <a:p>
+                      <a:r>
+                        <a:rPr lang="it-IT" dirty="0"/>
+                        <a:t>2,1</a:t>
+                      </a:r>
+                      <a:endParaRPr lang="en-GB" dirty="0"/>
+                    </a:p>
+                  </a:txBody>
+                  <a:tcPr/>
+                </a:tc>
+                <a:tc>
+                  <a:txBody>
+                    <a:bodyPr/>
+                    <a:lstStyle/>
+                    <a:p>
+                      <a:r>
+                        <a:rPr lang="it-IT" dirty="0"/>
+                        <a:t>2,5</a:t>
+                      </a:r>
+                      <a:endParaRPr lang="en-GB" dirty="0"/>
+                    </a:p>
+                  </a:txBody>
+                  <a:tcPr/>
+                </a:tc>
+                <a:tc>
+                  <a:txBody>
+                    <a:bodyPr/>
+                    <a:lstStyle/>
+                    <a:p>
+                      <a:r>
+                        <a:rPr lang="it-IT" dirty="0"/>
+                        <a:t>3,5</a:t>
+                      </a:r>
+                      <a:endParaRPr lang="en-GB" dirty="0"/>
+                    </a:p>
+                  </a:txBody>
+                  <a:tcPr/>
+                </a:tc>
+                <a:extLst>
+                  <a:ext uri="{0D108BD9-81ED-4DB2-BD59-A6C34878D82A}">
+                    <a16:rowId xmlns:a16="http://schemas.microsoft.com/office/drawing/2014/main" val="369788681"/>
+                  </a:ext>
+                </a:extLst>
+              </a:tr>
+              <a:tr h="370840">
+                <a:tc>
+                  <a:txBody>
+                    <a:bodyPr/>
+                    <a:lstStyle/>
+                    <a:p>
+                      <a:r>
+                        <a:rPr lang="it-IT" dirty="0"/>
+                        <a:t>600</a:t>
+                      </a:r>
+                      <a:endParaRPr lang="en-GB" dirty="0"/>
+                    </a:p>
+                  </a:txBody>
+                  <a:tcPr/>
+                </a:tc>
+                <a:tc>
+                  <a:txBody>
+                    <a:bodyPr/>
+                    <a:lstStyle/>
+                    <a:p>
+                      <a:r>
+                        <a:rPr lang="it-IT" dirty="0"/>
+                        <a:t>553,6</a:t>
+                      </a:r>
+                      <a:endParaRPr lang="en-GB" dirty="0"/>
+                    </a:p>
+                  </a:txBody>
+                  <a:tcPr/>
+                </a:tc>
+                <a:tc>
+                  <a:txBody>
+                    <a:bodyPr/>
+                    <a:lstStyle/>
+                    <a:p>
+                      <a:r>
+                        <a:rPr lang="it-IT" dirty="0"/>
+                        <a:t>1,6</a:t>
+                      </a:r>
+                      <a:endParaRPr lang="en-GB" dirty="0"/>
+                    </a:p>
+                  </a:txBody>
+                  <a:tcPr/>
+                </a:tc>
+                <a:tc>
+                  <a:txBody>
+                    <a:bodyPr/>
+                    <a:lstStyle/>
+                    <a:p>
+                      <a:r>
+                        <a:rPr lang="it-IT" dirty="0"/>
+                        <a:t>1,5</a:t>
+                      </a:r>
+                      <a:endParaRPr lang="en-GB" dirty="0"/>
+                    </a:p>
+                  </a:txBody>
+                  <a:tcPr/>
+                </a:tc>
+                <a:tc>
+                  <a:txBody>
+                    <a:bodyPr/>
+                    <a:lstStyle/>
+                    <a:p>
+                      <a:r>
+                        <a:rPr lang="it-IT" dirty="0"/>
+                        <a:t>2,6</a:t>
+                      </a:r>
+                      <a:endParaRPr lang="en-GB" dirty="0"/>
+                    </a:p>
+                  </a:txBody>
+                  <a:tcPr/>
+                </a:tc>
+                <a:tc>
+                  <a:txBody>
+                    <a:bodyPr/>
+                    <a:lstStyle/>
+                    <a:p>
+                      <a:r>
+                        <a:rPr lang="it-IT" dirty="0"/>
+                        <a:t>2,8</a:t>
+                      </a:r>
+                      <a:endParaRPr lang="en-GB" dirty="0"/>
+                    </a:p>
+                  </a:txBody>
+                  <a:tcPr/>
+                </a:tc>
+                <a:tc>
+                  <a:txBody>
+                    <a:bodyPr/>
+                    <a:lstStyle/>
+                    <a:p>
+                      <a:r>
+                        <a:rPr lang="it-IT" dirty="0"/>
+                        <a:t>3,6</a:t>
+                      </a:r>
+                      <a:endParaRPr lang="en-GB" dirty="0"/>
+                    </a:p>
+                  </a:txBody>
+                  <a:tcPr/>
+                </a:tc>
+                <a:extLst>
+                  <a:ext uri="{0D108BD9-81ED-4DB2-BD59-A6C34878D82A}">
+                    <a16:rowId xmlns:a16="http://schemas.microsoft.com/office/drawing/2014/main" val="15991862"/>
+                  </a:ext>
+                </a:extLst>
+              </a:tr>
+              <a:tr h="370840">
+                <a:tc>
+                  <a:txBody>
+                    <a:bodyPr/>
+                    <a:lstStyle/>
+                    <a:p>
+                      <a:r>
+                        <a:rPr lang="it-IT" dirty="0"/>
+                        <a:t>1000</a:t>
+                      </a:r>
+                      <a:endParaRPr lang="en-GB" dirty="0"/>
+                    </a:p>
+                  </a:txBody>
+                  <a:tcPr/>
+                </a:tc>
+                <a:tc>
+                  <a:txBody>
+                    <a:bodyPr/>
+                    <a:lstStyle/>
+                    <a:p>
+                      <a:r>
+                        <a:rPr lang="it-IT" dirty="0"/>
+                        <a:t>866,8</a:t>
+                      </a:r>
+                      <a:endParaRPr lang="en-GB" dirty="0"/>
+                    </a:p>
+                  </a:txBody>
+                  <a:tcPr/>
+                </a:tc>
+                <a:tc>
+                  <a:txBody>
+                    <a:bodyPr/>
+                    <a:lstStyle/>
+                    <a:p>
+                      <a:r>
+                        <a:rPr lang="it-IT" dirty="0"/>
+                        <a:t>1,4</a:t>
+                      </a:r>
+                      <a:endParaRPr lang="en-GB" dirty="0"/>
+                    </a:p>
+                  </a:txBody>
+                  <a:tcPr/>
+                </a:tc>
+                <a:tc>
+                  <a:txBody>
+                    <a:bodyPr/>
+                    <a:lstStyle/>
+                    <a:p>
+                      <a:r>
+                        <a:rPr lang="it-IT" dirty="0"/>
+                        <a:t>1,1</a:t>
+                      </a:r>
+                      <a:endParaRPr lang="en-GB" dirty="0"/>
+                    </a:p>
+                  </a:txBody>
+                  <a:tcPr/>
+                </a:tc>
+                <a:tc>
+                  <a:txBody>
+                    <a:bodyPr/>
+                    <a:lstStyle/>
+                    <a:p>
+                      <a:r>
+                        <a:rPr lang="it-IT" dirty="0"/>
+                        <a:t>2,0</a:t>
+                      </a:r>
+                      <a:endParaRPr lang="en-GB" dirty="0"/>
+                    </a:p>
+                  </a:txBody>
+                  <a:tcPr/>
+                </a:tc>
+                <a:tc>
+                  <a:txBody>
+                    <a:bodyPr/>
+                    <a:lstStyle/>
+                    <a:p>
+                      <a:r>
+                        <a:rPr lang="it-IT" dirty="0"/>
+                        <a:t>2,3</a:t>
+                      </a:r>
+                      <a:endParaRPr lang="en-GB" dirty="0"/>
+                    </a:p>
+                  </a:txBody>
+                  <a:tcPr/>
+                </a:tc>
+                <a:tc>
+                  <a:txBody>
+                    <a:bodyPr/>
+                    <a:lstStyle/>
+                    <a:p>
+                      <a:r>
+                        <a:rPr lang="it-IT" dirty="0"/>
+                        <a:t>2,9</a:t>
+                      </a:r>
+                      <a:endParaRPr lang="en-GB" dirty="0"/>
+                    </a:p>
+                  </a:txBody>
+                  <a:tcPr/>
+                </a:tc>
+                <a:extLst>
+                  <a:ext uri="{0D108BD9-81ED-4DB2-BD59-A6C34878D82A}">
+                    <a16:rowId xmlns:a16="http://schemas.microsoft.com/office/drawing/2014/main" val="3095448716"/>
+                  </a:ext>
+                </a:extLst>
+              </a:tr>
+            </a:tbl>
+          </a:graphicData>
+        </a:graphic>
+      </p:graphicFrame>
+    </p:spTree>
+    <p:extLst>
+      <p:ext uri="{BB962C8B-B14F-4D97-AF65-F5344CB8AC3E}">
+        <p14:creationId xmlns:p14="http://schemas.microsoft.com/office/powerpoint/2010/main" val="2092261046"/>
       </p:ext>
     </p:extLst>
   </p:cSld>

--- a/Gsasrec.pptx
+++ b/Gsasrec.pptx
@@ -27,6 +27,9 @@
     <p:sldId id="275" r:id="rId21"/>
     <p:sldId id="276" r:id="rId22"/>
     <p:sldId id="277" r:id="rId23"/>
+    <p:sldId id="278" r:id="rId24"/>
+    <p:sldId id="279" r:id="rId25"/>
+    <p:sldId id="280" r:id="rId26"/>
   </p:sldIdLst>
   <p:sldSz cx="12192000" cy="6858000"/>
   <p:notesSz cx="6858000" cy="9144000"/>
@@ -131,6 +134,5998 @@
     </p:ext>
   </p:extLst>
 </p:presentation>
+</file>
+
+<file path=ppt/charts/chart1.xml><?xml version="1.0" encoding="utf-8"?>
+<c:chartSpace xmlns:c="http://schemas.openxmlformats.org/drawingml/2006/chart" xmlns:a="http://schemas.openxmlformats.org/drawingml/2006/main" xmlns:r="http://schemas.openxmlformats.org/officeDocument/2006/relationships" xmlns:c16r2="http://schemas.microsoft.com/office/drawing/2015/06/chart">
+  <c:date1904 val="0"/>
+  <c:lang val="en-GB"/>
+  <c:roundedCorners val="0"/>
+  <mc:AlternateContent xmlns:mc="http://schemas.openxmlformats.org/markup-compatibility/2006">
+    <mc:Choice xmlns:c14="http://schemas.microsoft.com/office/drawing/2007/8/2/chart" Requires="c14">
+      <c14:style val="102"/>
+    </mc:Choice>
+    <mc:Fallback>
+      <c:style val="2"/>
+    </mc:Fallback>
+  </mc:AlternateContent>
+  <c:chart>
+    <c:title>
+      <c:tx>
+        <c:rich>
+          <a:bodyPr rot="0" spcFirstLastPara="1" vertOverflow="ellipsis" vert="horz" wrap="square" anchor="ctr" anchorCtr="1"/>
+          <a:lstStyle/>
+          <a:p>
+            <a:pPr>
+              <a:defRPr sz="1862" b="0" i="0" u="none" strike="noStrike" kern="1200" spc="0" baseline="0">
+                <a:solidFill>
+                  <a:schemeClr val="tx1">
+                    <a:lumMod val="65000"/>
+                    <a:lumOff val="35000"/>
+                  </a:schemeClr>
+                </a:solidFill>
+                <a:latin typeface="+mn-lt"/>
+                <a:ea typeface="+mn-ea"/>
+                <a:cs typeface="+mn-cs"/>
+              </a:defRPr>
+            </a:pPr>
+            <a:r>
+              <a:rPr lang="it-IT" dirty="0"/>
+              <a:t>Media</a:t>
+            </a:r>
+            <a:endParaRPr lang="en-GB" dirty="0"/>
+          </a:p>
+        </c:rich>
+      </c:tx>
+      <c:overlay val="0"/>
+      <c:spPr>
+        <a:noFill/>
+        <a:ln>
+          <a:noFill/>
+        </a:ln>
+        <a:effectLst/>
+      </c:spPr>
+      <c:txPr>
+        <a:bodyPr rot="0" spcFirstLastPara="1" vertOverflow="ellipsis" vert="horz" wrap="square" anchor="ctr" anchorCtr="1"/>
+        <a:lstStyle/>
+        <a:p>
+          <a:pPr>
+            <a:defRPr sz="1862" b="0" i="0" u="none" strike="noStrike" kern="1200" spc="0" baseline="0">
+              <a:solidFill>
+                <a:schemeClr val="tx1">
+                  <a:lumMod val="65000"/>
+                  <a:lumOff val="35000"/>
+                </a:schemeClr>
+              </a:solidFill>
+              <a:latin typeface="+mn-lt"/>
+              <a:ea typeface="+mn-ea"/>
+              <a:cs typeface="+mn-cs"/>
+            </a:defRPr>
+          </a:pPr>
+          <a:endParaRPr lang="en-US"/>
+        </a:p>
+      </c:txPr>
+    </c:title>
+    <c:autoTitleDeleted val="0"/>
+    <c:plotArea>
+      <c:layout/>
+      <c:lineChart>
+        <c:grouping val="standard"/>
+        <c:varyColors val="0"/>
+        <c:ser>
+          <c:idx val="0"/>
+          <c:order val="0"/>
+          <c:tx>
+            <c:strRef>
+              <c:f>Sheet1!$B$1</c:f>
+              <c:strCache>
+                <c:ptCount val="1"/>
+                <c:pt idx="0">
+                  <c:v>Python nativo</c:v>
+                </c:pt>
+              </c:strCache>
+            </c:strRef>
+          </c:tx>
+          <c:spPr>
+            <a:ln w="28575" cap="rnd">
+              <a:solidFill>
+                <a:schemeClr val="accent1"/>
+              </a:solidFill>
+              <a:round/>
+            </a:ln>
+            <a:effectLst/>
+          </c:spPr>
+          <c:marker>
+            <c:symbol val="none"/>
+          </c:marker>
+          <c:cat>
+            <c:numRef>
+              <c:f>Sheet1!$A$2:$A$7</c:f>
+              <c:numCache>
+                <c:formatCode>General</c:formatCode>
+                <c:ptCount val="6"/>
+                <c:pt idx="0">
+                  <c:v>10</c:v>
+                </c:pt>
+                <c:pt idx="1">
+                  <c:v>50</c:v>
+                </c:pt>
+                <c:pt idx="2">
+                  <c:v>150</c:v>
+                </c:pt>
+                <c:pt idx="3">
+                  <c:v>300</c:v>
+                </c:pt>
+                <c:pt idx="4">
+                  <c:v>600</c:v>
+                </c:pt>
+                <c:pt idx="5">
+                  <c:v>1000</c:v>
+                </c:pt>
+              </c:numCache>
+            </c:numRef>
+          </c:cat>
+          <c:val>
+            <c:numRef>
+              <c:f>Sheet1!$B$2:$B$7</c:f>
+              <c:numCache>
+                <c:formatCode>General</c:formatCode>
+                <c:ptCount val="6"/>
+                <c:pt idx="0">
+                  <c:v>1.4</c:v>
+                </c:pt>
+                <c:pt idx="1">
+                  <c:v>1.3</c:v>
+                </c:pt>
+                <c:pt idx="2">
+                  <c:v>1.2</c:v>
+                </c:pt>
+                <c:pt idx="3">
+                  <c:v>1.3</c:v>
+                </c:pt>
+                <c:pt idx="4">
+                  <c:v>1.6</c:v>
+                </c:pt>
+                <c:pt idx="5">
+                  <c:v>1.3</c:v>
+                </c:pt>
+              </c:numCache>
+            </c:numRef>
+          </c:val>
+          <c:smooth val="0"/>
+          <c:extLst>
+            <c:ext xmlns:c16="http://schemas.microsoft.com/office/drawing/2014/chart" uri="{C3380CC4-5D6E-409C-BE32-E72D297353CC}">
+              <c16:uniqueId val="{00000000-46C6-4863-AEA5-AB7B71DEA308}"/>
+            </c:ext>
+          </c:extLst>
+        </c:ser>
+        <c:ser>
+          <c:idx val="1"/>
+          <c:order val="1"/>
+          <c:tx>
+            <c:strRef>
+              <c:f>Sheet1!$C$1</c:f>
+              <c:strCache>
+                <c:ptCount val="1"/>
+                <c:pt idx="0">
+                  <c:v>Onnx</c:v>
+                </c:pt>
+              </c:strCache>
+            </c:strRef>
+          </c:tx>
+          <c:spPr>
+            <a:ln w="28575" cap="rnd">
+              <a:solidFill>
+                <a:schemeClr val="accent2"/>
+              </a:solidFill>
+              <a:round/>
+            </a:ln>
+            <a:effectLst/>
+          </c:spPr>
+          <c:marker>
+            <c:symbol val="none"/>
+          </c:marker>
+          <c:cat>
+            <c:numRef>
+              <c:f>Sheet1!$A$2:$A$7</c:f>
+              <c:numCache>
+                <c:formatCode>General</c:formatCode>
+                <c:ptCount val="6"/>
+                <c:pt idx="0">
+                  <c:v>10</c:v>
+                </c:pt>
+                <c:pt idx="1">
+                  <c:v>50</c:v>
+                </c:pt>
+                <c:pt idx="2">
+                  <c:v>150</c:v>
+                </c:pt>
+                <c:pt idx="3">
+                  <c:v>300</c:v>
+                </c:pt>
+                <c:pt idx="4">
+                  <c:v>600</c:v>
+                </c:pt>
+                <c:pt idx="5">
+                  <c:v>1000</c:v>
+                </c:pt>
+              </c:numCache>
+            </c:numRef>
+          </c:cat>
+          <c:val>
+            <c:numRef>
+              <c:f>Sheet1!$C$2:$C$7</c:f>
+              <c:numCache>
+                <c:formatCode>General</c:formatCode>
+                <c:ptCount val="6"/>
+                <c:pt idx="0">
+                  <c:v>1.4</c:v>
+                </c:pt>
+                <c:pt idx="1">
+                  <c:v>1.3</c:v>
+                </c:pt>
+                <c:pt idx="2">
+                  <c:v>1.2</c:v>
+                </c:pt>
+                <c:pt idx="3">
+                  <c:v>1.3</c:v>
+                </c:pt>
+                <c:pt idx="4">
+                  <c:v>1.5</c:v>
+                </c:pt>
+                <c:pt idx="5">
+                  <c:v>1.3</c:v>
+                </c:pt>
+              </c:numCache>
+            </c:numRef>
+          </c:val>
+          <c:smooth val="0"/>
+          <c:extLst>
+            <c:ext xmlns:c16="http://schemas.microsoft.com/office/drawing/2014/chart" uri="{C3380CC4-5D6E-409C-BE32-E72D297353CC}">
+              <c16:uniqueId val="{00000001-46C6-4863-AEA5-AB7B71DEA308}"/>
+            </c:ext>
+          </c:extLst>
+        </c:ser>
+        <c:dLbls>
+          <c:showLegendKey val="0"/>
+          <c:showVal val="0"/>
+          <c:showCatName val="0"/>
+          <c:showSerName val="0"/>
+          <c:showPercent val="0"/>
+          <c:showBubbleSize val="0"/>
+        </c:dLbls>
+        <c:smooth val="0"/>
+        <c:axId val="1142654127"/>
+        <c:axId val="1142671407"/>
+      </c:lineChart>
+      <c:catAx>
+        <c:axId val="1142654127"/>
+        <c:scaling>
+          <c:orientation val="minMax"/>
+        </c:scaling>
+        <c:delete val="0"/>
+        <c:axPos val="b"/>
+        <c:numFmt formatCode="General" sourceLinked="1"/>
+        <c:majorTickMark val="none"/>
+        <c:minorTickMark val="none"/>
+        <c:tickLblPos val="nextTo"/>
+        <c:spPr>
+          <a:noFill/>
+          <a:ln w="9525" cap="flat" cmpd="sng" algn="ctr">
+            <a:solidFill>
+              <a:schemeClr val="tx1">
+                <a:lumMod val="15000"/>
+                <a:lumOff val="85000"/>
+              </a:schemeClr>
+            </a:solidFill>
+            <a:round/>
+          </a:ln>
+          <a:effectLst/>
+        </c:spPr>
+        <c:txPr>
+          <a:bodyPr rot="-60000000" spcFirstLastPara="1" vertOverflow="ellipsis" vert="horz" wrap="square" anchor="ctr" anchorCtr="1"/>
+          <a:lstStyle/>
+          <a:p>
+            <a:pPr>
+              <a:defRPr sz="1197" b="0" i="0" u="none" strike="noStrike" kern="1200" baseline="0">
+                <a:solidFill>
+                  <a:schemeClr val="tx1">
+                    <a:lumMod val="65000"/>
+                    <a:lumOff val="35000"/>
+                  </a:schemeClr>
+                </a:solidFill>
+                <a:latin typeface="+mn-lt"/>
+                <a:ea typeface="+mn-ea"/>
+                <a:cs typeface="+mn-cs"/>
+              </a:defRPr>
+            </a:pPr>
+            <a:endParaRPr lang="en-US"/>
+          </a:p>
+        </c:txPr>
+        <c:crossAx val="1142671407"/>
+        <c:crosses val="autoZero"/>
+        <c:auto val="1"/>
+        <c:lblAlgn val="ctr"/>
+        <c:lblOffset val="100"/>
+        <c:noMultiLvlLbl val="0"/>
+      </c:catAx>
+      <c:valAx>
+        <c:axId val="1142671407"/>
+        <c:scaling>
+          <c:orientation val="minMax"/>
+        </c:scaling>
+        <c:delete val="0"/>
+        <c:axPos val="l"/>
+        <c:majorGridlines>
+          <c:spPr>
+            <a:ln w="9525" cap="flat" cmpd="sng" algn="ctr">
+              <a:solidFill>
+                <a:schemeClr val="tx1">
+                  <a:lumMod val="15000"/>
+                  <a:lumOff val="85000"/>
+                </a:schemeClr>
+              </a:solidFill>
+              <a:round/>
+            </a:ln>
+            <a:effectLst/>
+          </c:spPr>
+        </c:majorGridlines>
+        <c:numFmt formatCode="General" sourceLinked="1"/>
+        <c:majorTickMark val="none"/>
+        <c:minorTickMark val="none"/>
+        <c:tickLblPos val="nextTo"/>
+        <c:spPr>
+          <a:noFill/>
+          <a:ln>
+            <a:noFill/>
+          </a:ln>
+          <a:effectLst/>
+        </c:spPr>
+        <c:txPr>
+          <a:bodyPr rot="-60000000" spcFirstLastPara="1" vertOverflow="ellipsis" vert="horz" wrap="square" anchor="ctr" anchorCtr="1"/>
+          <a:lstStyle/>
+          <a:p>
+            <a:pPr>
+              <a:defRPr sz="1197" b="0" i="0" u="none" strike="noStrike" kern="1200" baseline="0">
+                <a:solidFill>
+                  <a:schemeClr val="tx1">
+                    <a:lumMod val="65000"/>
+                    <a:lumOff val="35000"/>
+                  </a:schemeClr>
+                </a:solidFill>
+                <a:latin typeface="+mn-lt"/>
+                <a:ea typeface="+mn-ea"/>
+                <a:cs typeface="+mn-cs"/>
+              </a:defRPr>
+            </a:pPr>
+            <a:endParaRPr lang="en-US"/>
+          </a:p>
+        </c:txPr>
+        <c:crossAx val="1142654127"/>
+        <c:crosses val="autoZero"/>
+        <c:crossBetween val="between"/>
+      </c:valAx>
+      <c:spPr>
+        <a:noFill/>
+        <a:ln>
+          <a:noFill/>
+        </a:ln>
+        <a:effectLst/>
+      </c:spPr>
+    </c:plotArea>
+    <c:legend>
+      <c:legendPos val="b"/>
+      <c:overlay val="0"/>
+      <c:spPr>
+        <a:noFill/>
+        <a:ln>
+          <a:noFill/>
+        </a:ln>
+        <a:effectLst/>
+      </c:spPr>
+      <c:txPr>
+        <a:bodyPr rot="0" spcFirstLastPara="1" vertOverflow="ellipsis" vert="horz" wrap="square" anchor="ctr" anchorCtr="1"/>
+        <a:lstStyle/>
+        <a:p>
+          <a:pPr>
+            <a:defRPr sz="1197" b="0" i="0" u="none" strike="noStrike" kern="1200" baseline="0">
+              <a:solidFill>
+                <a:schemeClr val="tx1">
+                  <a:lumMod val="65000"/>
+                  <a:lumOff val="35000"/>
+                </a:schemeClr>
+              </a:solidFill>
+              <a:latin typeface="+mn-lt"/>
+              <a:ea typeface="+mn-ea"/>
+              <a:cs typeface="+mn-cs"/>
+            </a:defRPr>
+          </a:pPr>
+          <a:endParaRPr lang="en-US"/>
+        </a:p>
+      </c:txPr>
+    </c:legend>
+    <c:plotVisOnly val="1"/>
+    <c:dispBlanksAs val="gap"/>
+    <c:showDLblsOverMax val="0"/>
+    <c:extLst>
+      <c:ext xmlns:c16r3="http://schemas.microsoft.com/office/drawing/2017/03/chart" uri="{56B9EC1D-385E-4148-901F-78D8002777C0}">
+        <c16r3:dataDisplayOptions16>
+          <c16r3:dispNaAsBlank val="1"/>
+        </c16r3:dataDisplayOptions16>
+      </c:ext>
+    </c:extLst>
+  </c:chart>
+  <c:spPr>
+    <a:noFill/>
+    <a:ln>
+      <a:noFill/>
+    </a:ln>
+    <a:effectLst/>
+  </c:spPr>
+  <c:txPr>
+    <a:bodyPr/>
+    <a:lstStyle/>
+    <a:p>
+      <a:pPr>
+        <a:defRPr/>
+      </a:pPr>
+      <a:endParaRPr lang="en-US"/>
+    </a:p>
+  </c:txPr>
+  <c:externalData r:id="rId3">
+    <c:autoUpdate val="0"/>
+  </c:externalData>
+</c:chartSpace>
+</file>
+
+<file path=ppt/charts/chart2.xml><?xml version="1.0" encoding="utf-8"?>
+<c:chartSpace xmlns:c="http://schemas.openxmlformats.org/drawingml/2006/chart" xmlns:a="http://schemas.openxmlformats.org/drawingml/2006/main" xmlns:r="http://schemas.openxmlformats.org/officeDocument/2006/relationships" xmlns:c16r2="http://schemas.microsoft.com/office/drawing/2015/06/chart">
+  <c:date1904 val="0"/>
+  <c:lang val="en-GB"/>
+  <c:roundedCorners val="0"/>
+  <mc:AlternateContent xmlns:mc="http://schemas.openxmlformats.org/markup-compatibility/2006">
+    <mc:Choice xmlns:c14="http://schemas.microsoft.com/office/drawing/2007/8/2/chart" Requires="c14">
+      <c14:style val="102"/>
+    </mc:Choice>
+    <mc:Fallback>
+      <c:style val="2"/>
+    </mc:Fallback>
+  </mc:AlternateContent>
+  <c:chart>
+    <c:title>
+      <c:tx>
+        <c:rich>
+          <a:bodyPr rot="0" spcFirstLastPara="1" vertOverflow="ellipsis" vert="horz" wrap="square" anchor="ctr" anchorCtr="1"/>
+          <a:lstStyle/>
+          <a:p>
+            <a:pPr>
+              <a:defRPr sz="1862" b="0" i="0" u="none" strike="noStrike" kern="1200" spc="0" baseline="0">
+                <a:solidFill>
+                  <a:schemeClr val="tx1">
+                    <a:lumMod val="65000"/>
+                    <a:lumOff val="35000"/>
+                  </a:schemeClr>
+                </a:solidFill>
+                <a:latin typeface="+mn-lt"/>
+                <a:ea typeface="+mn-ea"/>
+                <a:cs typeface="+mn-cs"/>
+              </a:defRPr>
+            </a:pPr>
+            <a:r>
+              <a:rPr lang="it-IT" dirty="0"/>
+              <a:t>p50</a:t>
+            </a:r>
+            <a:endParaRPr lang="en-GB" dirty="0"/>
+          </a:p>
+        </c:rich>
+      </c:tx>
+      <c:overlay val="0"/>
+      <c:spPr>
+        <a:noFill/>
+        <a:ln>
+          <a:noFill/>
+        </a:ln>
+        <a:effectLst/>
+      </c:spPr>
+      <c:txPr>
+        <a:bodyPr rot="0" spcFirstLastPara="1" vertOverflow="ellipsis" vert="horz" wrap="square" anchor="ctr" anchorCtr="1"/>
+        <a:lstStyle/>
+        <a:p>
+          <a:pPr>
+            <a:defRPr sz="1862" b="0" i="0" u="none" strike="noStrike" kern="1200" spc="0" baseline="0">
+              <a:solidFill>
+                <a:schemeClr val="tx1">
+                  <a:lumMod val="65000"/>
+                  <a:lumOff val="35000"/>
+                </a:schemeClr>
+              </a:solidFill>
+              <a:latin typeface="+mn-lt"/>
+              <a:ea typeface="+mn-ea"/>
+              <a:cs typeface="+mn-cs"/>
+            </a:defRPr>
+          </a:pPr>
+          <a:endParaRPr lang="en-GB"/>
+        </a:p>
+      </c:txPr>
+    </c:title>
+    <c:autoTitleDeleted val="0"/>
+    <c:plotArea>
+      <c:layout/>
+      <c:lineChart>
+        <c:grouping val="standard"/>
+        <c:varyColors val="0"/>
+        <c:ser>
+          <c:idx val="0"/>
+          <c:order val="0"/>
+          <c:tx>
+            <c:strRef>
+              <c:f>Sheet1!$B$1</c:f>
+              <c:strCache>
+                <c:ptCount val="1"/>
+                <c:pt idx="0">
+                  <c:v>Python nativo</c:v>
+                </c:pt>
+              </c:strCache>
+            </c:strRef>
+          </c:tx>
+          <c:spPr>
+            <a:ln w="28575" cap="rnd">
+              <a:solidFill>
+                <a:schemeClr val="accent1"/>
+              </a:solidFill>
+              <a:round/>
+            </a:ln>
+            <a:effectLst/>
+          </c:spPr>
+          <c:marker>
+            <c:symbol val="none"/>
+          </c:marker>
+          <c:cat>
+            <c:numRef>
+              <c:f>Sheet1!$A$2:$A$7</c:f>
+              <c:numCache>
+                <c:formatCode>General</c:formatCode>
+                <c:ptCount val="6"/>
+                <c:pt idx="0">
+                  <c:v>10</c:v>
+                </c:pt>
+                <c:pt idx="1">
+                  <c:v>50</c:v>
+                </c:pt>
+                <c:pt idx="2">
+                  <c:v>150</c:v>
+                </c:pt>
+                <c:pt idx="3">
+                  <c:v>300</c:v>
+                </c:pt>
+                <c:pt idx="4">
+                  <c:v>600</c:v>
+                </c:pt>
+                <c:pt idx="5">
+                  <c:v>1000</c:v>
+                </c:pt>
+              </c:numCache>
+            </c:numRef>
+          </c:cat>
+          <c:val>
+            <c:numRef>
+              <c:f>Sheet1!$B$2:$B$7</c:f>
+              <c:numCache>
+                <c:formatCode>General</c:formatCode>
+                <c:ptCount val="6"/>
+                <c:pt idx="0">
+                  <c:v>1.4</c:v>
+                </c:pt>
+                <c:pt idx="1">
+                  <c:v>1.3</c:v>
+                </c:pt>
+                <c:pt idx="2">
+                  <c:v>1.1000000000000001</c:v>
+                </c:pt>
+                <c:pt idx="3">
+                  <c:v>1.1000000000000001</c:v>
+                </c:pt>
+                <c:pt idx="4">
+                  <c:v>1.4</c:v>
+                </c:pt>
+                <c:pt idx="5">
+                  <c:v>1.1000000000000001</c:v>
+                </c:pt>
+              </c:numCache>
+            </c:numRef>
+          </c:val>
+          <c:smooth val="0"/>
+          <c:extLst>
+            <c:ext xmlns:c16="http://schemas.microsoft.com/office/drawing/2014/chart" uri="{C3380CC4-5D6E-409C-BE32-E72D297353CC}">
+              <c16:uniqueId val="{00000000-8F0B-45EC-AC48-BEA415DE511E}"/>
+            </c:ext>
+          </c:extLst>
+        </c:ser>
+        <c:ser>
+          <c:idx val="1"/>
+          <c:order val="1"/>
+          <c:tx>
+            <c:strRef>
+              <c:f>Sheet1!$C$1</c:f>
+              <c:strCache>
+                <c:ptCount val="1"/>
+                <c:pt idx="0">
+                  <c:v>Onnx</c:v>
+                </c:pt>
+              </c:strCache>
+            </c:strRef>
+          </c:tx>
+          <c:spPr>
+            <a:ln w="28575" cap="rnd">
+              <a:solidFill>
+                <a:schemeClr val="accent2"/>
+              </a:solidFill>
+              <a:round/>
+            </a:ln>
+            <a:effectLst/>
+          </c:spPr>
+          <c:marker>
+            <c:symbol val="none"/>
+          </c:marker>
+          <c:cat>
+            <c:numRef>
+              <c:f>Sheet1!$A$2:$A$7</c:f>
+              <c:numCache>
+                <c:formatCode>General</c:formatCode>
+                <c:ptCount val="6"/>
+                <c:pt idx="0">
+                  <c:v>10</c:v>
+                </c:pt>
+                <c:pt idx="1">
+                  <c:v>50</c:v>
+                </c:pt>
+                <c:pt idx="2">
+                  <c:v>150</c:v>
+                </c:pt>
+                <c:pt idx="3">
+                  <c:v>300</c:v>
+                </c:pt>
+                <c:pt idx="4">
+                  <c:v>600</c:v>
+                </c:pt>
+                <c:pt idx="5">
+                  <c:v>1000</c:v>
+                </c:pt>
+              </c:numCache>
+            </c:numRef>
+          </c:cat>
+          <c:val>
+            <c:numRef>
+              <c:f>Sheet1!$C$2:$C$7</c:f>
+              <c:numCache>
+                <c:formatCode>General</c:formatCode>
+                <c:ptCount val="6"/>
+                <c:pt idx="0">
+                  <c:v>1.4</c:v>
+                </c:pt>
+                <c:pt idx="1">
+                  <c:v>1.3</c:v>
+                </c:pt>
+                <c:pt idx="2">
+                  <c:v>1</c:v>
+                </c:pt>
+                <c:pt idx="3">
+                  <c:v>1.1000000000000001</c:v>
+                </c:pt>
+                <c:pt idx="4">
+                  <c:v>1.4</c:v>
+                </c:pt>
+                <c:pt idx="5">
+                  <c:v>1.1000000000000001</c:v>
+                </c:pt>
+              </c:numCache>
+            </c:numRef>
+          </c:val>
+          <c:smooth val="0"/>
+          <c:extLst>
+            <c:ext xmlns:c16="http://schemas.microsoft.com/office/drawing/2014/chart" uri="{C3380CC4-5D6E-409C-BE32-E72D297353CC}">
+              <c16:uniqueId val="{00000001-8F0B-45EC-AC48-BEA415DE511E}"/>
+            </c:ext>
+          </c:extLst>
+        </c:ser>
+        <c:dLbls>
+          <c:showLegendKey val="0"/>
+          <c:showVal val="0"/>
+          <c:showCatName val="0"/>
+          <c:showSerName val="0"/>
+          <c:showPercent val="0"/>
+          <c:showBubbleSize val="0"/>
+        </c:dLbls>
+        <c:smooth val="0"/>
+        <c:axId val="1142654127"/>
+        <c:axId val="1142671407"/>
+      </c:lineChart>
+      <c:catAx>
+        <c:axId val="1142654127"/>
+        <c:scaling>
+          <c:orientation val="minMax"/>
+        </c:scaling>
+        <c:delete val="0"/>
+        <c:axPos val="b"/>
+        <c:numFmt formatCode="General" sourceLinked="1"/>
+        <c:majorTickMark val="none"/>
+        <c:minorTickMark val="none"/>
+        <c:tickLblPos val="nextTo"/>
+        <c:spPr>
+          <a:noFill/>
+          <a:ln w="9525" cap="flat" cmpd="sng" algn="ctr">
+            <a:solidFill>
+              <a:schemeClr val="tx1">
+                <a:lumMod val="15000"/>
+                <a:lumOff val="85000"/>
+              </a:schemeClr>
+            </a:solidFill>
+            <a:round/>
+          </a:ln>
+          <a:effectLst/>
+        </c:spPr>
+        <c:txPr>
+          <a:bodyPr rot="-60000000" spcFirstLastPara="1" vertOverflow="ellipsis" vert="horz" wrap="square" anchor="ctr" anchorCtr="1"/>
+          <a:lstStyle/>
+          <a:p>
+            <a:pPr>
+              <a:defRPr sz="1197" b="0" i="0" u="none" strike="noStrike" kern="1200" baseline="0">
+                <a:solidFill>
+                  <a:schemeClr val="tx1">
+                    <a:lumMod val="65000"/>
+                    <a:lumOff val="35000"/>
+                  </a:schemeClr>
+                </a:solidFill>
+                <a:latin typeface="+mn-lt"/>
+                <a:ea typeface="+mn-ea"/>
+                <a:cs typeface="+mn-cs"/>
+              </a:defRPr>
+            </a:pPr>
+            <a:endParaRPr lang="en-US"/>
+          </a:p>
+        </c:txPr>
+        <c:crossAx val="1142671407"/>
+        <c:crosses val="autoZero"/>
+        <c:auto val="1"/>
+        <c:lblAlgn val="ctr"/>
+        <c:lblOffset val="100"/>
+        <c:noMultiLvlLbl val="0"/>
+      </c:catAx>
+      <c:valAx>
+        <c:axId val="1142671407"/>
+        <c:scaling>
+          <c:orientation val="minMax"/>
+        </c:scaling>
+        <c:delete val="0"/>
+        <c:axPos val="l"/>
+        <c:majorGridlines>
+          <c:spPr>
+            <a:ln w="9525" cap="flat" cmpd="sng" algn="ctr">
+              <a:solidFill>
+                <a:schemeClr val="tx1">
+                  <a:lumMod val="15000"/>
+                  <a:lumOff val="85000"/>
+                </a:schemeClr>
+              </a:solidFill>
+              <a:round/>
+            </a:ln>
+            <a:effectLst/>
+          </c:spPr>
+        </c:majorGridlines>
+        <c:numFmt formatCode="General" sourceLinked="1"/>
+        <c:majorTickMark val="none"/>
+        <c:minorTickMark val="none"/>
+        <c:tickLblPos val="nextTo"/>
+        <c:spPr>
+          <a:noFill/>
+          <a:ln>
+            <a:noFill/>
+          </a:ln>
+          <a:effectLst/>
+        </c:spPr>
+        <c:txPr>
+          <a:bodyPr rot="-60000000" spcFirstLastPara="1" vertOverflow="ellipsis" vert="horz" wrap="square" anchor="ctr" anchorCtr="1"/>
+          <a:lstStyle/>
+          <a:p>
+            <a:pPr>
+              <a:defRPr sz="1197" b="0" i="0" u="none" strike="noStrike" kern="1200" baseline="0">
+                <a:solidFill>
+                  <a:schemeClr val="tx1">
+                    <a:lumMod val="65000"/>
+                    <a:lumOff val="35000"/>
+                  </a:schemeClr>
+                </a:solidFill>
+                <a:latin typeface="+mn-lt"/>
+                <a:ea typeface="+mn-ea"/>
+                <a:cs typeface="+mn-cs"/>
+              </a:defRPr>
+            </a:pPr>
+            <a:endParaRPr lang="en-US"/>
+          </a:p>
+        </c:txPr>
+        <c:crossAx val="1142654127"/>
+        <c:crosses val="autoZero"/>
+        <c:crossBetween val="between"/>
+      </c:valAx>
+      <c:spPr>
+        <a:noFill/>
+        <a:ln>
+          <a:noFill/>
+        </a:ln>
+        <a:effectLst/>
+      </c:spPr>
+    </c:plotArea>
+    <c:legend>
+      <c:legendPos val="b"/>
+      <c:overlay val="0"/>
+      <c:spPr>
+        <a:noFill/>
+        <a:ln>
+          <a:noFill/>
+        </a:ln>
+        <a:effectLst/>
+      </c:spPr>
+      <c:txPr>
+        <a:bodyPr rot="0" spcFirstLastPara="1" vertOverflow="ellipsis" vert="horz" wrap="square" anchor="ctr" anchorCtr="1"/>
+        <a:lstStyle/>
+        <a:p>
+          <a:pPr>
+            <a:defRPr sz="1197" b="0" i="0" u="none" strike="noStrike" kern="1200" baseline="0">
+              <a:solidFill>
+                <a:schemeClr val="tx1">
+                  <a:lumMod val="65000"/>
+                  <a:lumOff val="35000"/>
+                </a:schemeClr>
+              </a:solidFill>
+              <a:latin typeface="+mn-lt"/>
+              <a:ea typeface="+mn-ea"/>
+              <a:cs typeface="+mn-cs"/>
+            </a:defRPr>
+          </a:pPr>
+          <a:endParaRPr lang="en-US"/>
+        </a:p>
+      </c:txPr>
+    </c:legend>
+    <c:plotVisOnly val="1"/>
+    <c:dispBlanksAs val="gap"/>
+    <c:showDLblsOverMax val="0"/>
+    <c:extLst>
+      <c:ext xmlns:c16r3="http://schemas.microsoft.com/office/drawing/2017/03/chart" uri="{56B9EC1D-385E-4148-901F-78D8002777C0}">
+        <c16r3:dataDisplayOptions16>
+          <c16r3:dispNaAsBlank val="1"/>
+        </c16r3:dataDisplayOptions16>
+      </c:ext>
+    </c:extLst>
+  </c:chart>
+  <c:spPr>
+    <a:noFill/>
+    <a:ln>
+      <a:noFill/>
+    </a:ln>
+    <a:effectLst/>
+  </c:spPr>
+  <c:txPr>
+    <a:bodyPr/>
+    <a:lstStyle/>
+    <a:p>
+      <a:pPr>
+        <a:defRPr/>
+      </a:pPr>
+      <a:endParaRPr lang="en-US"/>
+    </a:p>
+  </c:txPr>
+  <c:externalData r:id="rId3">
+    <c:autoUpdate val="0"/>
+  </c:externalData>
+</c:chartSpace>
+</file>
+
+<file path=ppt/charts/chart3.xml><?xml version="1.0" encoding="utf-8"?>
+<c:chartSpace xmlns:c="http://schemas.openxmlformats.org/drawingml/2006/chart" xmlns:a="http://schemas.openxmlformats.org/drawingml/2006/main" xmlns:r="http://schemas.openxmlformats.org/officeDocument/2006/relationships" xmlns:c16r2="http://schemas.microsoft.com/office/drawing/2015/06/chart">
+  <c:date1904 val="0"/>
+  <c:lang val="en-GB"/>
+  <c:roundedCorners val="0"/>
+  <mc:AlternateContent xmlns:mc="http://schemas.openxmlformats.org/markup-compatibility/2006">
+    <mc:Choice xmlns:c14="http://schemas.microsoft.com/office/drawing/2007/8/2/chart" Requires="c14">
+      <c14:style val="102"/>
+    </mc:Choice>
+    <mc:Fallback>
+      <c:style val="2"/>
+    </mc:Fallback>
+  </mc:AlternateContent>
+  <c:chart>
+    <c:title>
+      <c:tx>
+        <c:rich>
+          <a:bodyPr rot="0" spcFirstLastPara="1" vertOverflow="ellipsis" vert="horz" wrap="square" anchor="ctr" anchorCtr="1"/>
+          <a:lstStyle/>
+          <a:p>
+            <a:pPr>
+              <a:defRPr sz="1862" b="0" i="0" u="none" strike="noStrike" kern="1200" spc="0" baseline="0">
+                <a:solidFill>
+                  <a:schemeClr val="tx1">
+                    <a:lumMod val="65000"/>
+                    <a:lumOff val="35000"/>
+                  </a:schemeClr>
+                </a:solidFill>
+                <a:latin typeface="+mn-lt"/>
+                <a:ea typeface="+mn-ea"/>
+                <a:cs typeface="+mn-cs"/>
+              </a:defRPr>
+            </a:pPr>
+            <a:r>
+              <a:rPr lang="it-IT" dirty="0"/>
+              <a:t>p90</a:t>
+            </a:r>
+            <a:endParaRPr lang="en-GB" dirty="0"/>
+          </a:p>
+        </c:rich>
+      </c:tx>
+      <c:overlay val="0"/>
+      <c:spPr>
+        <a:noFill/>
+        <a:ln>
+          <a:noFill/>
+        </a:ln>
+        <a:effectLst/>
+      </c:spPr>
+      <c:txPr>
+        <a:bodyPr rot="0" spcFirstLastPara="1" vertOverflow="ellipsis" vert="horz" wrap="square" anchor="ctr" anchorCtr="1"/>
+        <a:lstStyle/>
+        <a:p>
+          <a:pPr>
+            <a:defRPr sz="1862" b="0" i="0" u="none" strike="noStrike" kern="1200" spc="0" baseline="0">
+              <a:solidFill>
+                <a:schemeClr val="tx1">
+                  <a:lumMod val="65000"/>
+                  <a:lumOff val="35000"/>
+                </a:schemeClr>
+              </a:solidFill>
+              <a:latin typeface="+mn-lt"/>
+              <a:ea typeface="+mn-ea"/>
+              <a:cs typeface="+mn-cs"/>
+            </a:defRPr>
+          </a:pPr>
+          <a:endParaRPr lang="en-GB"/>
+        </a:p>
+      </c:txPr>
+    </c:title>
+    <c:autoTitleDeleted val="0"/>
+    <c:plotArea>
+      <c:layout/>
+      <c:lineChart>
+        <c:grouping val="standard"/>
+        <c:varyColors val="0"/>
+        <c:ser>
+          <c:idx val="0"/>
+          <c:order val="0"/>
+          <c:tx>
+            <c:strRef>
+              <c:f>Sheet1!$B$1</c:f>
+              <c:strCache>
+                <c:ptCount val="1"/>
+                <c:pt idx="0">
+                  <c:v>Python nativo</c:v>
+                </c:pt>
+              </c:strCache>
+            </c:strRef>
+          </c:tx>
+          <c:spPr>
+            <a:ln w="28575" cap="rnd">
+              <a:solidFill>
+                <a:schemeClr val="accent1"/>
+              </a:solidFill>
+              <a:round/>
+            </a:ln>
+            <a:effectLst/>
+          </c:spPr>
+          <c:marker>
+            <c:symbol val="none"/>
+          </c:marker>
+          <c:cat>
+            <c:numRef>
+              <c:f>Sheet1!$A$2:$A$7</c:f>
+              <c:numCache>
+                <c:formatCode>General</c:formatCode>
+                <c:ptCount val="6"/>
+                <c:pt idx="0">
+                  <c:v>10</c:v>
+                </c:pt>
+                <c:pt idx="1">
+                  <c:v>50</c:v>
+                </c:pt>
+                <c:pt idx="2">
+                  <c:v>150</c:v>
+                </c:pt>
+                <c:pt idx="3">
+                  <c:v>300</c:v>
+                </c:pt>
+                <c:pt idx="4">
+                  <c:v>600</c:v>
+                </c:pt>
+                <c:pt idx="5">
+                  <c:v>1000</c:v>
+                </c:pt>
+              </c:numCache>
+            </c:numRef>
+          </c:cat>
+          <c:val>
+            <c:numRef>
+              <c:f>Sheet1!$B$2:$B$7</c:f>
+              <c:numCache>
+                <c:formatCode>General</c:formatCode>
+                <c:ptCount val="6"/>
+                <c:pt idx="0">
+                  <c:v>1.6</c:v>
+                </c:pt>
+                <c:pt idx="1">
+                  <c:v>1.5</c:v>
+                </c:pt>
+                <c:pt idx="2">
+                  <c:v>1.9</c:v>
+                </c:pt>
+                <c:pt idx="3">
+                  <c:v>2</c:v>
+                </c:pt>
+                <c:pt idx="4">
+                  <c:v>2.5</c:v>
+                </c:pt>
+                <c:pt idx="5">
+                  <c:v>1.8</c:v>
+                </c:pt>
+              </c:numCache>
+            </c:numRef>
+          </c:val>
+          <c:smooth val="0"/>
+          <c:extLst>
+            <c:ext xmlns:c16="http://schemas.microsoft.com/office/drawing/2014/chart" uri="{C3380CC4-5D6E-409C-BE32-E72D297353CC}">
+              <c16:uniqueId val="{00000000-8765-4F86-8417-648054571C15}"/>
+            </c:ext>
+          </c:extLst>
+        </c:ser>
+        <c:ser>
+          <c:idx val="1"/>
+          <c:order val="1"/>
+          <c:tx>
+            <c:strRef>
+              <c:f>Sheet1!$C$1</c:f>
+              <c:strCache>
+                <c:ptCount val="1"/>
+                <c:pt idx="0">
+                  <c:v>Onnx</c:v>
+                </c:pt>
+              </c:strCache>
+            </c:strRef>
+          </c:tx>
+          <c:spPr>
+            <a:ln w="28575" cap="rnd">
+              <a:solidFill>
+                <a:schemeClr val="accent2"/>
+              </a:solidFill>
+              <a:round/>
+            </a:ln>
+            <a:effectLst/>
+          </c:spPr>
+          <c:marker>
+            <c:symbol val="none"/>
+          </c:marker>
+          <c:cat>
+            <c:numRef>
+              <c:f>Sheet1!$A$2:$A$7</c:f>
+              <c:numCache>
+                <c:formatCode>General</c:formatCode>
+                <c:ptCount val="6"/>
+                <c:pt idx="0">
+                  <c:v>10</c:v>
+                </c:pt>
+                <c:pt idx="1">
+                  <c:v>50</c:v>
+                </c:pt>
+                <c:pt idx="2">
+                  <c:v>150</c:v>
+                </c:pt>
+                <c:pt idx="3">
+                  <c:v>300</c:v>
+                </c:pt>
+                <c:pt idx="4">
+                  <c:v>600</c:v>
+                </c:pt>
+                <c:pt idx="5">
+                  <c:v>1000</c:v>
+                </c:pt>
+              </c:numCache>
+            </c:numRef>
+          </c:cat>
+          <c:val>
+            <c:numRef>
+              <c:f>Sheet1!$C$2:$C$7</c:f>
+              <c:numCache>
+                <c:formatCode>General</c:formatCode>
+                <c:ptCount val="6"/>
+                <c:pt idx="0">
+                  <c:v>1.6</c:v>
+                </c:pt>
+                <c:pt idx="1">
+                  <c:v>1.5</c:v>
+                </c:pt>
+                <c:pt idx="2">
+                  <c:v>1.5</c:v>
+                </c:pt>
+                <c:pt idx="3">
+                  <c:v>2</c:v>
+                </c:pt>
+                <c:pt idx="4">
+                  <c:v>2.5</c:v>
+                </c:pt>
+                <c:pt idx="5">
+                  <c:v>1.8</c:v>
+                </c:pt>
+              </c:numCache>
+            </c:numRef>
+          </c:val>
+          <c:smooth val="0"/>
+          <c:extLst>
+            <c:ext xmlns:c16="http://schemas.microsoft.com/office/drawing/2014/chart" uri="{C3380CC4-5D6E-409C-BE32-E72D297353CC}">
+              <c16:uniqueId val="{00000001-8765-4F86-8417-648054571C15}"/>
+            </c:ext>
+          </c:extLst>
+        </c:ser>
+        <c:dLbls>
+          <c:showLegendKey val="0"/>
+          <c:showVal val="0"/>
+          <c:showCatName val="0"/>
+          <c:showSerName val="0"/>
+          <c:showPercent val="0"/>
+          <c:showBubbleSize val="0"/>
+        </c:dLbls>
+        <c:smooth val="0"/>
+        <c:axId val="1142654127"/>
+        <c:axId val="1142671407"/>
+      </c:lineChart>
+      <c:catAx>
+        <c:axId val="1142654127"/>
+        <c:scaling>
+          <c:orientation val="minMax"/>
+        </c:scaling>
+        <c:delete val="0"/>
+        <c:axPos val="b"/>
+        <c:numFmt formatCode="General" sourceLinked="1"/>
+        <c:majorTickMark val="none"/>
+        <c:minorTickMark val="none"/>
+        <c:tickLblPos val="nextTo"/>
+        <c:spPr>
+          <a:noFill/>
+          <a:ln w="9525" cap="flat" cmpd="sng" algn="ctr">
+            <a:solidFill>
+              <a:schemeClr val="tx1">
+                <a:lumMod val="15000"/>
+                <a:lumOff val="85000"/>
+              </a:schemeClr>
+            </a:solidFill>
+            <a:round/>
+          </a:ln>
+          <a:effectLst/>
+        </c:spPr>
+        <c:txPr>
+          <a:bodyPr rot="-60000000" spcFirstLastPara="1" vertOverflow="ellipsis" vert="horz" wrap="square" anchor="ctr" anchorCtr="1"/>
+          <a:lstStyle/>
+          <a:p>
+            <a:pPr>
+              <a:defRPr sz="1197" b="0" i="0" u="none" strike="noStrike" kern="1200" baseline="0">
+                <a:solidFill>
+                  <a:schemeClr val="tx1">
+                    <a:lumMod val="65000"/>
+                    <a:lumOff val="35000"/>
+                  </a:schemeClr>
+                </a:solidFill>
+                <a:latin typeface="+mn-lt"/>
+                <a:ea typeface="+mn-ea"/>
+                <a:cs typeface="+mn-cs"/>
+              </a:defRPr>
+            </a:pPr>
+            <a:endParaRPr lang="en-US"/>
+          </a:p>
+        </c:txPr>
+        <c:crossAx val="1142671407"/>
+        <c:crosses val="autoZero"/>
+        <c:auto val="1"/>
+        <c:lblAlgn val="ctr"/>
+        <c:lblOffset val="100"/>
+        <c:noMultiLvlLbl val="0"/>
+      </c:catAx>
+      <c:valAx>
+        <c:axId val="1142671407"/>
+        <c:scaling>
+          <c:orientation val="minMax"/>
+        </c:scaling>
+        <c:delete val="0"/>
+        <c:axPos val="l"/>
+        <c:majorGridlines>
+          <c:spPr>
+            <a:ln w="9525" cap="flat" cmpd="sng" algn="ctr">
+              <a:solidFill>
+                <a:schemeClr val="tx1">
+                  <a:lumMod val="15000"/>
+                  <a:lumOff val="85000"/>
+                </a:schemeClr>
+              </a:solidFill>
+              <a:round/>
+            </a:ln>
+            <a:effectLst/>
+          </c:spPr>
+        </c:majorGridlines>
+        <c:numFmt formatCode="General" sourceLinked="1"/>
+        <c:majorTickMark val="none"/>
+        <c:minorTickMark val="none"/>
+        <c:tickLblPos val="nextTo"/>
+        <c:spPr>
+          <a:noFill/>
+          <a:ln>
+            <a:noFill/>
+          </a:ln>
+          <a:effectLst/>
+        </c:spPr>
+        <c:txPr>
+          <a:bodyPr rot="-60000000" spcFirstLastPara="1" vertOverflow="ellipsis" vert="horz" wrap="square" anchor="ctr" anchorCtr="1"/>
+          <a:lstStyle/>
+          <a:p>
+            <a:pPr>
+              <a:defRPr sz="1197" b="0" i="0" u="none" strike="noStrike" kern="1200" baseline="0">
+                <a:solidFill>
+                  <a:schemeClr val="tx1">
+                    <a:lumMod val="65000"/>
+                    <a:lumOff val="35000"/>
+                  </a:schemeClr>
+                </a:solidFill>
+                <a:latin typeface="+mn-lt"/>
+                <a:ea typeface="+mn-ea"/>
+                <a:cs typeface="+mn-cs"/>
+              </a:defRPr>
+            </a:pPr>
+            <a:endParaRPr lang="en-US"/>
+          </a:p>
+        </c:txPr>
+        <c:crossAx val="1142654127"/>
+        <c:crosses val="autoZero"/>
+        <c:crossBetween val="between"/>
+      </c:valAx>
+      <c:spPr>
+        <a:noFill/>
+        <a:ln>
+          <a:noFill/>
+        </a:ln>
+        <a:effectLst/>
+      </c:spPr>
+    </c:plotArea>
+    <c:legend>
+      <c:legendPos val="b"/>
+      <c:overlay val="0"/>
+      <c:spPr>
+        <a:noFill/>
+        <a:ln>
+          <a:noFill/>
+        </a:ln>
+        <a:effectLst/>
+      </c:spPr>
+      <c:txPr>
+        <a:bodyPr rot="0" spcFirstLastPara="1" vertOverflow="ellipsis" vert="horz" wrap="square" anchor="ctr" anchorCtr="1"/>
+        <a:lstStyle/>
+        <a:p>
+          <a:pPr>
+            <a:defRPr sz="1197" b="0" i="0" u="none" strike="noStrike" kern="1200" baseline="0">
+              <a:solidFill>
+                <a:schemeClr val="tx1">
+                  <a:lumMod val="65000"/>
+                  <a:lumOff val="35000"/>
+                </a:schemeClr>
+              </a:solidFill>
+              <a:latin typeface="+mn-lt"/>
+              <a:ea typeface="+mn-ea"/>
+              <a:cs typeface="+mn-cs"/>
+            </a:defRPr>
+          </a:pPr>
+          <a:endParaRPr lang="en-US"/>
+        </a:p>
+      </c:txPr>
+    </c:legend>
+    <c:plotVisOnly val="1"/>
+    <c:dispBlanksAs val="gap"/>
+    <c:showDLblsOverMax val="0"/>
+    <c:extLst>
+      <c:ext xmlns:c16r3="http://schemas.microsoft.com/office/drawing/2017/03/chart" uri="{56B9EC1D-385E-4148-901F-78D8002777C0}">
+        <c16r3:dataDisplayOptions16>
+          <c16r3:dispNaAsBlank val="1"/>
+        </c16r3:dataDisplayOptions16>
+      </c:ext>
+    </c:extLst>
+  </c:chart>
+  <c:spPr>
+    <a:noFill/>
+    <a:ln>
+      <a:noFill/>
+    </a:ln>
+    <a:effectLst/>
+  </c:spPr>
+  <c:txPr>
+    <a:bodyPr/>
+    <a:lstStyle/>
+    <a:p>
+      <a:pPr>
+        <a:defRPr/>
+      </a:pPr>
+      <a:endParaRPr lang="en-US"/>
+    </a:p>
+  </c:txPr>
+  <c:externalData r:id="rId3">
+    <c:autoUpdate val="0"/>
+  </c:externalData>
+</c:chartSpace>
+</file>
+
+<file path=ppt/charts/chart4.xml><?xml version="1.0" encoding="utf-8"?>
+<c:chartSpace xmlns:c="http://schemas.openxmlformats.org/drawingml/2006/chart" xmlns:a="http://schemas.openxmlformats.org/drawingml/2006/main" xmlns:r="http://schemas.openxmlformats.org/officeDocument/2006/relationships" xmlns:c16r2="http://schemas.microsoft.com/office/drawing/2015/06/chart">
+  <c:date1904 val="0"/>
+  <c:lang val="en-GB"/>
+  <c:roundedCorners val="0"/>
+  <mc:AlternateContent xmlns:mc="http://schemas.openxmlformats.org/markup-compatibility/2006">
+    <mc:Choice xmlns:c14="http://schemas.microsoft.com/office/drawing/2007/8/2/chart" Requires="c14">
+      <c14:style val="102"/>
+    </mc:Choice>
+    <mc:Fallback>
+      <c:style val="2"/>
+    </mc:Fallback>
+  </mc:AlternateContent>
+  <c:chart>
+    <c:title>
+      <c:tx>
+        <c:rich>
+          <a:bodyPr rot="0" spcFirstLastPara="1" vertOverflow="ellipsis" vert="horz" wrap="square" anchor="ctr" anchorCtr="1"/>
+          <a:lstStyle/>
+          <a:p>
+            <a:pPr>
+              <a:defRPr sz="1862" b="0" i="0" u="none" strike="noStrike" kern="1200" spc="0" baseline="0">
+                <a:solidFill>
+                  <a:schemeClr val="tx1">
+                    <a:lumMod val="65000"/>
+                    <a:lumOff val="35000"/>
+                  </a:schemeClr>
+                </a:solidFill>
+                <a:latin typeface="+mn-lt"/>
+                <a:ea typeface="+mn-ea"/>
+                <a:cs typeface="+mn-cs"/>
+              </a:defRPr>
+            </a:pPr>
+            <a:r>
+              <a:rPr lang="it-IT" dirty="0"/>
+              <a:t>p95</a:t>
+            </a:r>
+            <a:endParaRPr lang="en-GB" dirty="0"/>
+          </a:p>
+        </c:rich>
+      </c:tx>
+      <c:overlay val="0"/>
+      <c:spPr>
+        <a:noFill/>
+        <a:ln>
+          <a:noFill/>
+        </a:ln>
+        <a:effectLst/>
+      </c:spPr>
+      <c:txPr>
+        <a:bodyPr rot="0" spcFirstLastPara="1" vertOverflow="ellipsis" vert="horz" wrap="square" anchor="ctr" anchorCtr="1"/>
+        <a:lstStyle/>
+        <a:p>
+          <a:pPr>
+            <a:defRPr sz="1862" b="0" i="0" u="none" strike="noStrike" kern="1200" spc="0" baseline="0">
+              <a:solidFill>
+                <a:schemeClr val="tx1">
+                  <a:lumMod val="65000"/>
+                  <a:lumOff val="35000"/>
+                </a:schemeClr>
+              </a:solidFill>
+              <a:latin typeface="+mn-lt"/>
+              <a:ea typeface="+mn-ea"/>
+              <a:cs typeface="+mn-cs"/>
+            </a:defRPr>
+          </a:pPr>
+          <a:endParaRPr lang="en-GB"/>
+        </a:p>
+      </c:txPr>
+    </c:title>
+    <c:autoTitleDeleted val="0"/>
+    <c:plotArea>
+      <c:layout/>
+      <c:lineChart>
+        <c:grouping val="standard"/>
+        <c:varyColors val="0"/>
+        <c:ser>
+          <c:idx val="0"/>
+          <c:order val="0"/>
+          <c:tx>
+            <c:strRef>
+              <c:f>Sheet1!$B$1</c:f>
+              <c:strCache>
+                <c:ptCount val="1"/>
+                <c:pt idx="0">
+                  <c:v>Python nativo</c:v>
+                </c:pt>
+              </c:strCache>
+            </c:strRef>
+          </c:tx>
+          <c:spPr>
+            <a:ln w="28575" cap="rnd">
+              <a:solidFill>
+                <a:schemeClr val="accent1"/>
+              </a:solidFill>
+              <a:round/>
+            </a:ln>
+            <a:effectLst/>
+          </c:spPr>
+          <c:marker>
+            <c:symbol val="none"/>
+          </c:marker>
+          <c:cat>
+            <c:numRef>
+              <c:f>Sheet1!$A$2:$A$7</c:f>
+              <c:numCache>
+                <c:formatCode>General</c:formatCode>
+                <c:ptCount val="6"/>
+                <c:pt idx="0">
+                  <c:v>10</c:v>
+                </c:pt>
+                <c:pt idx="1">
+                  <c:v>50</c:v>
+                </c:pt>
+                <c:pt idx="2">
+                  <c:v>150</c:v>
+                </c:pt>
+                <c:pt idx="3">
+                  <c:v>300</c:v>
+                </c:pt>
+                <c:pt idx="4">
+                  <c:v>600</c:v>
+                </c:pt>
+                <c:pt idx="5">
+                  <c:v>1000</c:v>
+                </c:pt>
+              </c:numCache>
+            </c:numRef>
+          </c:cat>
+          <c:val>
+            <c:numRef>
+              <c:f>Sheet1!$B$2:$B$7</c:f>
+              <c:numCache>
+                <c:formatCode>General</c:formatCode>
+                <c:ptCount val="6"/>
+                <c:pt idx="0">
+                  <c:v>1.7</c:v>
+                </c:pt>
+                <c:pt idx="1">
+                  <c:v>1.9</c:v>
+                </c:pt>
+                <c:pt idx="2">
+                  <c:v>2</c:v>
+                </c:pt>
+                <c:pt idx="3">
+                  <c:v>2.4</c:v>
+                </c:pt>
+                <c:pt idx="4">
+                  <c:v>2.6</c:v>
+                </c:pt>
+                <c:pt idx="5">
+                  <c:v>2</c:v>
+                </c:pt>
+              </c:numCache>
+            </c:numRef>
+          </c:val>
+          <c:smooth val="0"/>
+          <c:extLst>
+            <c:ext xmlns:c16="http://schemas.microsoft.com/office/drawing/2014/chart" uri="{C3380CC4-5D6E-409C-BE32-E72D297353CC}">
+              <c16:uniqueId val="{00000000-7ABB-4CA5-9790-7F86EC874CFA}"/>
+            </c:ext>
+          </c:extLst>
+        </c:ser>
+        <c:ser>
+          <c:idx val="1"/>
+          <c:order val="1"/>
+          <c:tx>
+            <c:strRef>
+              <c:f>Sheet1!$C$1</c:f>
+              <c:strCache>
+                <c:ptCount val="1"/>
+                <c:pt idx="0">
+                  <c:v>Onnx</c:v>
+                </c:pt>
+              </c:strCache>
+            </c:strRef>
+          </c:tx>
+          <c:spPr>
+            <a:ln w="28575" cap="rnd">
+              <a:solidFill>
+                <a:schemeClr val="accent2"/>
+              </a:solidFill>
+              <a:round/>
+            </a:ln>
+            <a:effectLst/>
+          </c:spPr>
+          <c:marker>
+            <c:symbol val="none"/>
+          </c:marker>
+          <c:cat>
+            <c:numRef>
+              <c:f>Sheet1!$A$2:$A$7</c:f>
+              <c:numCache>
+                <c:formatCode>General</c:formatCode>
+                <c:ptCount val="6"/>
+                <c:pt idx="0">
+                  <c:v>10</c:v>
+                </c:pt>
+                <c:pt idx="1">
+                  <c:v>50</c:v>
+                </c:pt>
+                <c:pt idx="2">
+                  <c:v>150</c:v>
+                </c:pt>
+                <c:pt idx="3">
+                  <c:v>300</c:v>
+                </c:pt>
+                <c:pt idx="4">
+                  <c:v>600</c:v>
+                </c:pt>
+                <c:pt idx="5">
+                  <c:v>1000</c:v>
+                </c:pt>
+              </c:numCache>
+            </c:numRef>
+          </c:cat>
+          <c:val>
+            <c:numRef>
+              <c:f>Sheet1!$C$2:$C$7</c:f>
+              <c:numCache>
+                <c:formatCode>General</c:formatCode>
+                <c:ptCount val="6"/>
+                <c:pt idx="0">
+                  <c:v>1.7</c:v>
+                </c:pt>
+                <c:pt idx="1">
+                  <c:v>1.6</c:v>
+                </c:pt>
+                <c:pt idx="2">
+                  <c:v>2</c:v>
+                </c:pt>
+                <c:pt idx="3">
+                  <c:v>2.4</c:v>
+                </c:pt>
+                <c:pt idx="4">
+                  <c:v>2.6</c:v>
+                </c:pt>
+                <c:pt idx="5">
+                  <c:v>2</c:v>
+                </c:pt>
+              </c:numCache>
+            </c:numRef>
+          </c:val>
+          <c:smooth val="0"/>
+          <c:extLst>
+            <c:ext xmlns:c16="http://schemas.microsoft.com/office/drawing/2014/chart" uri="{C3380CC4-5D6E-409C-BE32-E72D297353CC}">
+              <c16:uniqueId val="{00000001-7ABB-4CA5-9790-7F86EC874CFA}"/>
+            </c:ext>
+          </c:extLst>
+        </c:ser>
+        <c:dLbls>
+          <c:showLegendKey val="0"/>
+          <c:showVal val="0"/>
+          <c:showCatName val="0"/>
+          <c:showSerName val="0"/>
+          <c:showPercent val="0"/>
+          <c:showBubbleSize val="0"/>
+        </c:dLbls>
+        <c:smooth val="0"/>
+        <c:axId val="1142654127"/>
+        <c:axId val="1142671407"/>
+      </c:lineChart>
+      <c:catAx>
+        <c:axId val="1142654127"/>
+        <c:scaling>
+          <c:orientation val="minMax"/>
+        </c:scaling>
+        <c:delete val="0"/>
+        <c:axPos val="b"/>
+        <c:numFmt formatCode="General" sourceLinked="1"/>
+        <c:majorTickMark val="none"/>
+        <c:minorTickMark val="none"/>
+        <c:tickLblPos val="nextTo"/>
+        <c:spPr>
+          <a:noFill/>
+          <a:ln w="9525" cap="flat" cmpd="sng" algn="ctr">
+            <a:solidFill>
+              <a:schemeClr val="tx1">
+                <a:lumMod val="15000"/>
+                <a:lumOff val="85000"/>
+              </a:schemeClr>
+            </a:solidFill>
+            <a:round/>
+          </a:ln>
+          <a:effectLst/>
+        </c:spPr>
+        <c:txPr>
+          <a:bodyPr rot="-60000000" spcFirstLastPara="1" vertOverflow="ellipsis" vert="horz" wrap="square" anchor="ctr" anchorCtr="1"/>
+          <a:lstStyle/>
+          <a:p>
+            <a:pPr>
+              <a:defRPr sz="1197" b="0" i="0" u="none" strike="noStrike" kern="1200" baseline="0">
+                <a:solidFill>
+                  <a:schemeClr val="tx1">
+                    <a:lumMod val="65000"/>
+                    <a:lumOff val="35000"/>
+                  </a:schemeClr>
+                </a:solidFill>
+                <a:latin typeface="+mn-lt"/>
+                <a:ea typeface="+mn-ea"/>
+                <a:cs typeface="+mn-cs"/>
+              </a:defRPr>
+            </a:pPr>
+            <a:endParaRPr lang="en-US"/>
+          </a:p>
+        </c:txPr>
+        <c:crossAx val="1142671407"/>
+        <c:crosses val="autoZero"/>
+        <c:auto val="1"/>
+        <c:lblAlgn val="ctr"/>
+        <c:lblOffset val="100"/>
+        <c:noMultiLvlLbl val="0"/>
+      </c:catAx>
+      <c:valAx>
+        <c:axId val="1142671407"/>
+        <c:scaling>
+          <c:orientation val="minMax"/>
+        </c:scaling>
+        <c:delete val="0"/>
+        <c:axPos val="l"/>
+        <c:majorGridlines>
+          <c:spPr>
+            <a:ln w="9525" cap="flat" cmpd="sng" algn="ctr">
+              <a:solidFill>
+                <a:schemeClr val="tx1">
+                  <a:lumMod val="15000"/>
+                  <a:lumOff val="85000"/>
+                </a:schemeClr>
+              </a:solidFill>
+              <a:round/>
+            </a:ln>
+            <a:effectLst/>
+          </c:spPr>
+        </c:majorGridlines>
+        <c:numFmt formatCode="General" sourceLinked="1"/>
+        <c:majorTickMark val="none"/>
+        <c:minorTickMark val="none"/>
+        <c:tickLblPos val="nextTo"/>
+        <c:spPr>
+          <a:noFill/>
+          <a:ln>
+            <a:noFill/>
+          </a:ln>
+          <a:effectLst/>
+        </c:spPr>
+        <c:txPr>
+          <a:bodyPr rot="-60000000" spcFirstLastPara="1" vertOverflow="ellipsis" vert="horz" wrap="square" anchor="ctr" anchorCtr="1"/>
+          <a:lstStyle/>
+          <a:p>
+            <a:pPr>
+              <a:defRPr sz="1197" b="0" i="0" u="none" strike="noStrike" kern="1200" baseline="0">
+                <a:solidFill>
+                  <a:schemeClr val="tx1">
+                    <a:lumMod val="65000"/>
+                    <a:lumOff val="35000"/>
+                  </a:schemeClr>
+                </a:solidFill>
+                <a:latin typeface="+mn-lt"/>
+                <a:ea typeface="+mn-ea"/>
+                <a:cs typeface="+mn-cs"/>
+              </a:defRPr>
+            </a:pPr>
+            <a:endParaRPr lang="en-US"/>
+          </a:p>
+        </c:txPr>
+        <c:crossAx val="1142654127"/>
+        <c:crosses val="autoZero"/>
+        <c:crossBetween val="between"/>
+      </c:valAx>
+      <c:spPr>
+        <a:noFill/>
+        <a:ln>
+          <a:noFill/>
+        </a:ln>
+        <a:effectLst/>
+      </c:spPr>
+    </c:plotArea>
+    <c:legend>
+      <c:legendPos val="b"/>
+      <c:overlay val="0"/>
+      <c:spPr>
+        <a:noFill/>
+        <a:ln>
+          <a:noFill/>
+        </a:ln>
+        <a:effectLst/>
+      </c:spPr>
+      <c:txPr>
+        <a:bodyPr rot="0" spcFirstLastPara="1" vertOverflow="ellipsis" vert="horz" wrap="square" anchor="ctr" anchorCtr="1"/>
+        <a:lstStyle/>
+        <a:p>
+          <a:pPr>
+            <a:defRPr sz="1197" b="0" i="0" u="none" strike="noStrike" kern="1200" baseline="0">
+              <a:solidFill>
+                <a:schemeClr val="tx1">
+                  <a:lumMod val="65000"/>
+                  <a:lumOff val="35000"/>
+                </a:schemeClr>
+              </a:solidFill>
+              <a:latin typeface="+mn-lt"/>
+              <a:ea typeface="+mn-ea"/>
+              <a:cs typeface="+mn-cs"/>
+            </a:defRPr>
+          </a:pPr>
+          <a:endParaRPr lang="en-US"/>
+        </a:p>
+      </c:txPr>
+    </c:legend>
+    <c:plotVisOnly val="1"/>
+    <c:dispBlanksAs val="gap"/>
+    <c:showDLblsOverMax val="0"/>
+    <c:extLst>
+      <c:ext xmlns:c16r3="http://schemas.microsoft.com/office/drawing/2017/03/chart" uri="{56B9EC1D-385E-4148-901F-78D8002777C0}">
+        <c16r3:dataDisplayOptions16>
+          <c16r3:dispNaAsBlank val="1"/>
+        </c16r3:dataDisplayOptions16>
+      </c:ext>
+    </c:extLst>
+  </c:chart>
+  <c:spPr>
+    <a:noFill/>
+    <a:ln>
+      <a:noFill/>
+    </a:ln>
+    <a:effectLst/>
+  </c:spPr>
+  <c:txPr>
+    <a:bodyPr/>
+    <a:lstStyle/>
+    <a:p>
+      <a:pPr>
+        <a:defRPr/>
+      </a:pPr>
+      <a:endParaRPr lang="en-US"/>
+    </a:p>
+  </c:txPr>
+  <c:externalData r:id="rId3">
+    <c:autoUpdate val="0"/>
+  </c:externalData>
+</c:chartSpace>
+</file>
+
+<file path=ppt/charts/chart5.xml><?xml version="1.0" encoding="utf-8"?>
+<c:chartSpace xmlns:c="http://schemas.openxmlformats.org/drawingml/2006/chart" xmlns:a="http://schemas.openxmlformats.org/drawingml/2006/main" xmlns:r="http://schemas.openxmlformats.org/officeDocument/2006/relationships" xmlns:c16r2="http://schemas.microsoft.com/office/drawing/2015/06/chart">
+  <c:date1904 val="0"/>
+  <c:lang val="en-GB"/>
+  <c:roundedCorners val="0"/>
+  <mc:AlternateContent xmlns:mc="http://schemas.openxmlformats.org/markup-compatibility/2006">
+    <mc:Choice xmlns:c14="http://schemas.microsoft.com/office/drawing/2007/8/2/chart" Requires="c14">
+      <c14:style val="102"/>
+    </mc:Choice>
+    <mc:Fallback>
+      <c:style val="2"/>
+    </mc:Fallback>
+  </mc:AlternateContent>
+  <c:chart>
+    <c:title>
+      <c:tx>
+        <c:rich>
+          <a:bodyPr rot="0" spcFirstLastPara="1" vertOverflow="ellipsis" vert="horz" wrap="square" anchor="ctr" anchorCtr="1"/>
+          <a:lstStyle/>
+          <a:p>
+            <a:pPr>
+              <a:defRPr sz="1862" b="0" i="0" u="none" strike="noStrike" kern="1200" spc="0" baseline="0">
+                <a:solidFill>
+                  <a:schemeClr val="tx1">
+                    <a:lumMod val="65000"/>
+                    <a:lumOff val="35000"/>
+                  </a:schemeClr>
+                </a:solidFill>
+                <a:latin typeface="+mn-lt"/>
+                <a:ea typeface="+mn-ea"/>
+                <a:cs typeface="+mn-cs"/>
+              </a:defRPr>
+            </a:pPr>
+            <a:r>
+              <a:rPr lang="it-IT" dirty="0"/>
+              <a:t>p99</a:t>
+            </a:r>
+            <a:endParaRPr lang="en-GB" dirty="0"/>
+          </a:p>
+        </c:rich>
+      </c:tx>
+      <c:overlay val="0"/>
+      <c:spPr>
+        <a:noFill/>
+        <a:ln>
+          <a:noFill/>
+        </a:ln>
+        <a:effectLst/>
+      </c:spPr>
+      <c:txPr>
+        <a:bodyPr rot="0" spcFirstLastPara="1" vertOverflow="ellipsis" vert="horz" wrap="square" anchor="ctr" anchorCtr="1"/>
+        <a:lstStyle/>
+        <a:p>
+          <a:pPr>
+            <a:defRPr sz="1862" b="0" i="0" u="none" strike="noStrike" kern="1200" spc="0" baseline="0">
+              <a:solidFill>
+                <a:schemeClr val="tx1">
+                  <a:lumMod val="65000"/>
+                  <a:lumOff val="35000"/>
+                </a:schemeClr>
+              </a:solidFill>
+              <a:latin typeface="+mn-lt"/>
+              <a:ea typeface="+mn-ea"/>
+              <a:cs typeface="+mn-cs"/>
+            </a:defRPr>
+          </a:pPr>
+          <a:endParaRPr lang="en-GB"/>
+        </a:p>
+      </c:txPr>
+    </c:title>
+    <c:autoTitleDeleted val="0"/>
+    <c:plotArea>
+      <c:layout/>
+      <c:lineChart>
+        <c:grouping val="standard"/>
+        <c:varyColors val="0"/>
+        <c:ser>
+          <c:idx val="0"/>
+          <c:order val="0"/>
+          <c:tx>
+            <c:strRef>
+              <c:f>Sheet1!$B$1</c:f>
+              <c:strCache>
+                <c:ptCount val="1"/>
+                <c:pt idx="0">
+                  <c:v>Python nativo</c:v>
+                </c:pt>
+              </c:strCache>
+            </c:strRef>
+          </c:tx>
+          <c:spPr>
+            <a:ln w="28575" cap="rnd">
+              <a:solidFill>
+                <a:schemeClr val="accent1"/>
+              </a:solidFill>
+              <a:round/>
+            </a:ln>
+            <a:effectLst/>
+          </c:spPr>
+          <c:marker>
+            <c:symbol val="none"/>
+          </c:marker>
+          <c:cat>
+            <c:numRef>
+              <c:f>Sheet1!$A$2:$A$7</c:f>
+              <c:numCache>
+                <c:formatCode>General</c:formatCode>
+                <c:ptCount val="6"/>
+                <c:pt idx="0">
+                  <c:v>10</c:v>
+                </c:pt>
+                <c:pt idx="1">
+                  <c:v>50</c:v>
+                </c:pt>
+                <c:pt idx="2">
+                  <c:v>150</c:v>
+                </c:pt>
+                <c:pt idx="3">
+                  <c:v>300</c:v>
+                </c:pt>
+                <c:pt idx="4">
+                  <c:v>600</c:v>
+                </c:pt>
+                <c:pt idx="5">
+                  <c:v>1000</c:v>
+                </c:pt>
+              </c:numCache>
+            </c:numRef>
+          </c:cat>
+          <c:val>
+            <c:numRef>
+              <c:f>Sheet1!$B$2:$B$7</c:f>
+              <c:numCache>
+                <c:formatCode>General</c:formatCode>
+                <c:ptCount val="6"/>
+                <c:pt idx="0">
+                  <c:v>2</c:v>
+                </c:pt>
+                <c:pt idx="1">
+                  <c:v>2.4</c:v>
+                </c:pt>
+                <c:pt idx="2">
+                  <c:v>2.6</c:v>
+                </c:pt>
+                <c:pt idx="3">
+                  <c:v>2.8</c:v>
+                </c:pt>
+                <c:pt idx="4">
+                  <c:v>3.1</c:v>
+                </c:pt>
+                <c:pt idx="5">
+                  <c:v>2.4</c:v>
+                </c:pt>
+              </c:numCache>
+            </c:numRef>
+          </c:val>
+          <c:smooth val="0"/>
+          <c:extLst>
+            <c:ext xmlns:c16="http://schemas.microsoft.com/office/drawing/2014/chart" uri="{C3380CC4-5D6E-409C-BE32-E72D297353CC}">
+              <c16:uniqueId val="{00000000-DD6B-4CD1-AD19-DAEE2883984C}"/>
+            </c:ext>
+          </c:extLst>
+        </c:ser>
+        <c:ser>
+          <c:idx val="1"/>
+          <c:order val="1"/>
+          <c:tx>
+            <c:strRef>
+              <c:f>Sheet1!$C$1</c:f>
+              <c:strCache>
+                <c:ptCount val="1"/>
+                <c:pt idx="0">
+                  <c:v>Onnx</c:v>
+                </c:pt>
+              </c:strCache>
+            </c:strRef>
+          </c:tx>
+          <c:spPr>
+            <a:ln w="28575" cap="rnd">
+              <a:solidFill>
+                <a:schemeClr val="accent2"/>
+              </a:solidFill>
+              <a:round/>
+            </a:ln>
+            <a:effectLst/>
+          </c:spPr>
+          <c:marker>
+            <c:symbol val="none"/>
+          </c:marker>
+          <c:cat>
+            <c:numRef>
+              <c:f>Sheet1!$A$2:$A$7</c:f>
+              <c:numCache>
+                <c:formatCode>General</c:formatCode>
+                <c:ptCount val="6"/>
+                <c:pt idx="0">
+                  <c:v>10</c:v>
+                </c:pt>
+                <c:pt idx="1">
+                  <c:v>50</c:v>
+                </c:pt>
+                <c:pt idx="2">
+                  <c:v>150</c:v>
+                </c:pt>
+                <c:pt idx="3">
+                  <c:v>300</c:v>
+                </c:pt>
+                <c:pt idx="4">
+                  <c:v>600</c:v>
+                </c:pt>
+                <c:pt idx="5">
+                  <c:v>1000</c:v>
+                </c:pt>
+              </c:numCache>
+            </c:numRef>
+          </c:cat>
+          <c:val>
+            <c:numRef>
+              <c:f>Sheet1!$C$2:$C$7</c:f>
+              <c:numCache>
+                <c:formatCode>General</c:formatCode>
+                <c:ptCount val="6"/>
+                <c:pt idx="0">
+                  <c:v>2</c:v>
+                </c:pt>
+                <c:pt idx="1">
+                  <c:v>2.2999999999999998</c:v>
+                </c:pt>
+                <c:pt idx="2">
+                  <c:v>2.5</c:v>
+                </c:pt>
+                <c:pt idx="3">
+                  <c:v>2.9</c:v>
+                </c:pt>
+                <c:pt idx="4">
+                  <c:v>3</c:v>
+                </c:pt>
+                <c:pt idx="5">
+                  <c:v>2.5</c:v>
+                </c:pt>
+              </c:numCache>
+            </c:numRef>
+          </c:val>
+          <c:smooth val="0"/>
+          <c:extLst>
+            <c:ext xmlns:c16="http://schemas.microsoft.com/office/drawing/2014/chart" uri="{C3380CC4-5D6E-409C-BE32-E72D297353CC}">
+              <c16:uniqueId val="{00000001-DD6B-4CD1-AD19-DAEE2883984C}"/>
+            </c:ext>
+          </c:extLst>
+        </c:ser>
+        <c:dLbls>
+          <c:showLegendKey val="0"/>
+          <c:showVal val="0"/>
+          <c:showCatName val="0"/>
+          <c:showSerName val="0"/>
+          <c:showPercent val="0"/>
+          <c:showBubbleSize val="0"/>
+        </c:dLbls>
+        <c:smooth val="0"/>
+        <c:axId val="1142654127"/>
+        <c:axId val="1142671407"/>
+      </c:lineChart>
+      <c:catAx>
+        <c:axId val="1142654127"/>
+        <c:scaling>
+          <c:orientation val="minMax"/>
+        </c:scaling>
+        <c:delete val="0"/>
+        <c:axPos val="b"/>
+        <c:numFmt formatCode="General" sourceLinked="1"/>
+        <c:majorTickMark val="none"/>
+        <c:minorTickMark val="none"/>
+        <c:tickLblPos val="nextTo"/>
+        <c:spPr>
+          <a:noFill/>
+          <a:ln w="9525" cap="flat" cmpd="sng" algn="ctr">
+            <a:solidFill>
+              <a:schemeClr val="tx1">
+                <a:lumMod val="15000"/>
+                <a:lumOff val="85000"/>
+              </a:schemeClr>
+            </a:solidFill>
+            <a:round/>
+          </a:ln>
+          <a:effectLst/>
+        </c:spPr>
+        <c:txPr>
+          <a:bodyPr rot="-60000000" spcFirstLastPara="1" vertOverflow="ellipsis" vert="horz" wrap="square" anchor="ctr" anchorCtr="1"/>
+          <a:lstStyle/>
+          <a:p>
+            <a:pPr>
+              <a:defRPr sz="1197" b="0" i="0" u="none" strike="noStrike" kern="1200" baseline="0">
+                <a:solidFill>
+                  <a:schemeClr val="tx1">
+                    <a:lumMod val="65000"/>
+                    <a:lumOff val="35000"/>
+                  </a:schemeClr>
+                </a:solidFill>
+                <a:latin typeface="+mn-lt"/>
+                <a:ea typeface="+mn-ea"/>
+                <a:cs typeface="+mn-cs"/>
+              </a:defRPr>
+            </a:pPr>
+            <a:endParaRPr lang="en-US"/>
+          </a:p>
+        </c:txPr>
+        <c:crossAx val="1142671407"/>
+        <c:crosses val="autoZero"/>
+        <c:auto val="1"/>
+        <c:lblAlgn val="ctr"/>
+        <c:lblOffset val="100"/>
+        <c:noMultiLvlLbl val="0"/>
+      </c:catAx>
+      <c:valAx>
+        <c:axId val="1142671407"/>
+        <c:scaling>
+          <c:orientation val="minMax"/>
+        </c:scaling>
+        <c:delete val="0"/>
+        <c:axPos val="l"/>
+        <c:majorGridlines>
+          <c:spPr>
+            <a:ln w="9525" cap="flat" cmpd="sng" algn="ctr">
+              <a:solidFill>
+                <a:schemeClr val="tx1">
+                  <a:lumMod val="15000"/>
+                  <a:lumOff val="85000"/>
+                </a:schemeClr>
+              </a:solidFill>
+              <a:round/>
+            </a:ln>
+            <a:effectLst/>
+          </c:spPr>
+        </c:majorGridlines>
+        <c:numFmt formatCode="General" sourceLinked="1"/>
+        <c:majorTickMark val="none"/>
+        <c:minorTickMark val="none"/>
+        <c:tickLblPos val="nextTo"/>
+        <c:spPr>
+          <a:noFill/>
+          <a:ln>
+            <a:noFill/>
+          </a:ln>
+          <a:effectLst/>
+        </c:spPr>
+        <c:txPr>
+          <a:bodyPr rot="-60000000" spcFirstLastPara="1" vertOverflow="ellipsis" vert="horz" wrap="square" anchor="ctr" anchorCtr="1"/>
+          <a:lstStyle/>
+          <a:p>
+            <a:pPr>
+              <a:defRPr sz="1197" b="0" i="0" u="none" strike="noStrike" kern="1200" baseline="0">
+                <a:solidFill>
+                  <a:schemeClr val="tx1">
+                    <a:lumMod val="65000"/>
+                    <a:lumOff val="35000"/>
+                  </a:schemeClr>
+                </a:solidFill>
+                <a:latin typeface="+mn-lt"/>
+                <a:ea typeface="+mn-ea"/>
+                <a:cs typeface="+mn-cs"/>
+              </a:defRPr>
+            </a:pPr>
+            <a:endParaRPr lang="en-US"/>
+          </a:p>
+        </c:txPr>
+        <c:crossAx val="1142654127"/>
+        <c:crosses val="autoZero"/>
+        <c:crossBetween val="between"/>
+      </c:valAx>
+      <c:spPr>
+        <a:noFill/>
+        <a:ln>
+          <a:noFill/>
+        </a:ln>
+        <a:effectLst/>
+      </c:spPr>
+    </c:plotArea>
+    <c:legend>
+      <c:legendPos val="b"/>
+      <c:overlay val="0"/>
+      <c:spPr>
+        <a:noFill/>
+        <a:ln>
+          <a:noFill/>
+        </a:ln>
+        <a:effectLst/>
+      </c:spPr>
+      <c:txPr>
+        <a:bodyPr rot="0" spcFirstLastPara="1" vertOverflow="ellipsis" vert="horz" wrap="square" anchor="ctr" anchorCtr="1"/>
+        <a:lstStyle/>
+        <a:p>
+          <a:pPr>
+            <a:defRPr sz="1197" b="0" i="0" u="none" strike="noStrike" kern="1200" baseline="0">
+              <a:solidFill>
+                <a:schemeClr val="tx1">
+                  <a:lumMod val="65000"/>
+                  <a:lumOff val="35000"/>
+                </a:schemeClr>
+              </a:solidFill>
+              <a:latin typeface="+mn-lt"/>
+              <a:ea typeface="+mn-ea"/>
+              <a:cs typeface="+mn-cs"/>
+            </a:defRPr>
+          </a:pPr>
+          <a:endParaRPr lang="en-US"/>
+        </a:p>
+      </c:txPr>
+    </c:legend>
+    <c:plotVisOnly val="1"/>
+    <c:dispBlanksAs val="gap"/>
+    <c:showDLblsOverMax val="0"/>
+    <c:extLst>
+      <c:ext xmlns:c16r3="http://schemas.microsoft.com/office/drawing/2017/03/chart" uri="{56B9EC1D-385E-4148-901F-78D8002777C0}">
+        <c16r3:dataDisplayOptions16>
+          <c16r3:dispNaAsBlank val="1"/>
+        </c16r3:dataDisplayOptions16>
+      </c:ext>
+    </c:extLst>
+  </c:chart>
+  <c:spPr>
+    <a:noFill/>
+    <a:ln>
+      <a:noFill/>
+    </a:ln>
+    <a:effectLst/>
+  </c:spPr>
+  <c:txPr>
+    <a:bodyPr/>
+    <a:lstStyle/>
+    <a:p>
+      <a:pPr>
+        <a:defRPr/>
+      </a:pPr>
+      <a:endParaRPr lang="en-US"/>
+    </a:p>
+  </c:txPr>
+  <c:externalData r:id="rId3">
+    <c:autoUpdate val="0"/>
+  </c:externalData>
+</c:chartSpace>
+</file>
+
+<file path=ppt/charts/chart6.xml><?xml version="1.0" encoding="utf-8"?>
+<c:chartSpace xmlns:c="http://schemas.openxmlformats.org/drawingml/2006/chart" xmlns:a="http://schemas.openxmlformats.org/drawingml/2006/main" xmlns:r="http://schemas.openxmlformats.org/officeDocument/2006/relationships" xmlns:c16r2="http://schemas.microsoft.com/office/drawing/2015/06/chart">
+  <c:date1904 val="0"/>
+  <c:lang val="en-GB"/>
+  <c:roundedCorners val="0"/>
+  <mc:AlternateContent xmlns:mc="http://schemas.openxmlformats.org/markup-compatibility/2006">
+    <mc:Choice xmlns:c14="http://schemas.microsoft.com/office/drawing/2007/8/2/chart" Requires="c14">
+      <c14:style val="102"/>
+    </mc:Choice>
+    <mc:Fallback>
+      <c:style val="2"/>
+    </mc:Fallback>
+  </mc:AlternateContent>
+  <c:chart>
+    <c:title>
+      <c:tx>
+        <c:rich>
+          <a:bodyPr rot="0" spcFirstLastPara="1" vertOverflow="ellipsis" vert="horz" wrap="square" anchor="ctr" anchorCtr="1"/>
+          <a:lstStyle/>
+          <a:p>
+            <a:pPr>
+              <a:defRPr sz="1862" b="0" i="0" u="none" strike="noStrike" kern="1200" spc="0" baseline="0">
+                <a:solidFill>
+                  <a:schemeClr val="tx1">
+                    <a:lumMod val="65000"/>
+                    <a:lumOff val="35000"/>
+                  </a:schemeClr>
+                </a:solidFill>
+                <a:latin typeface="+mn-lt"/>
+                <a:ea typeface="+mn-ea"/>
+                <a:cs typeface="+mn-cs"/>
+              </a:defRPr>
+            </a:pPr>
+            <a:r>
+              <a:rPr lang="en-GB" dirty="0"/>
+              <a:t>RPS </a:t>
+            </a:r>
+            <a:r>
+              <a:rPr lang="en-GB" dirty="0" err="1"/>
+              <a:t>effettivi</a:t>
+            </a:r>
+            <a:endParaRPr lang="en-GB" dirty="0"/>
+          </a:p>
+        </c:rich>
+      </c:tx>
+      <c:overlay val="0"/>
+      <c:spPr>
+        <a:noFill/>
+        <a:ln>
+          <a:noFill/>
+        </a:ln>
+        <a:effectLst/>
+      </c:spPr>
+      <c:txPr>
+        <a:bodyPr rot="0" spcFirstLastPara="1" vertOverflow="ellipsis" vert="horz" wrap="square" anchor="ctr" anchorCtr="1"/>
+        <a:lstStyle/>
+        <a:p>
+          <a:pPr>
+            <a:defRPr sz="1862" b="0" i="0" u="none" strike="noStrike" kern="1200" spc="0" baseline="0">
+              <a:solidFill>
+                <a:schemeClr val="tx1">
+                  <a:lumMod val="65000"/>
+                  <a:lumOff val="35000"/>
+                </a:schemeClr>
+              </a:solidFill>
+              <a:latin typeface="+mn-lt"/>
+              <a:ea typeface="+mn-ea"/>
+              <a:cs typeface="+mn-cs"/>
+            </a:defRPr>
+          </a:pPr>
+          <a:endParaRPr lang="en-US"/>
+        </a:p>
+      </c:txPr>
+    </c:title>
+    <c:autoTitleDeleted val="0"/>
+    <c:plotArea>
+      <c:layout/>
+      <c:lineChart>
+        <c:grouping val="standard"/>
+        <c:varyColors val="0"/>
+        <c:ser>
+          <c:idx val="0"/>
+          <c:order val="0"/>
+          <c:tx>
+            <c:strRef>
+              <c:f>Sheet1!$B$1</c:f>
+              <c:strCache>
+                <c:ptCount val="1"/>
+                <c:pt idx="0">
+                  <c:v>Python nativo</c:v>
+                </c:pt>
+              </c:strCache>
+            </c:strRef>
+          </c:tx>
+          <c:spPr>
+            <a:ln w="28575" cap="rnd">
+              <a:solidFill>
+                <a:schemeClr val="accent1"/>
+              </a:solidFill>
+              <a:round/>
+            </a:ln>
+            <a:effectLst/>
+          </c:spPr>
+          <c:marker>
+            <c:symbol val="none"/>
+          </c:marker>
+          <c:cat>
+            <c:numRef>
+              <c:f>Sheet1!$A$2:$A$7</c:f>
+              <c:numCache>
+                <c:formatCode>General</c:formatCode>
+                <c:ptCount val="6"/>
+                <c:pt idx="0">
+                  <c:v>10</c:v>
+                </c:pt>
+                <c:pt idx="1">
+                  <c:v>50</c:v>
+                </c:pt>
+                <c:pt idx="2">
+                  <c:v>150</c:v>
+                </c:pt>
+                <c:pt idx="3">
+                  <c:v>300</c:v>
+                </c:pt>
+                <c:pt idx="4">
+                  <c:v>600</c:v>
+                </c:pt>
+                <c:pt idx="5">
+                  <c:v>1000</c:v>
+                </c:pt>
+              </c:numCache>
+            </c:numRef>
+          </c:cat>
+          <c:val>
+            <c:numRef>
+              <c:f>Sheet1!$B$2:$B$7</c:f>
+              <c:numCache>
+                <c:formatCode>General</c:formatCode>
+                <c:ptCount val="6"/>
+                <c:pt idx="0">
+                  <c:v>0.98000000000000009</c:v>
+                </c:pt>
+                <c:pt idx="1">
+                  <c:v>1.018</c:v>
+                </c:pt>
+                <c:pt idx="2">
+                  <c:v>0.99466666666666659</c:v>
+                </c:pt>
+                <c:pt idx="3">
+                  <c:v>0.98033333333333339</c:v>
+                </c:pt>
+                <c:pt idx="4">
+                  <c:v>0.92383333333333328</c:v>
+                </c:pt>
+                <c:pt idx="5">
+                  <c:v>0.8657999999999999</c:v>
+                </c:pt>
+              </c:numCache>
+            </c:numRef>
+          </c:val>
+          <c:smooth val="0"/>
+          <c:extLst>
+            <c:ext xmlns:c16="http://schemas.microsoft.com/office/drawing/2014/chart" uri="{C3380CC4-5D6E-409C-BE32-E72D297353CC}">
+              <c16:uniqueId val="{00000000-827A-4ACC-866C-B6913B47DB8D}"/>
+            </c:ext>
+          </c:extLst>
+        </c:ser>
+        <c:ser>
+          <c:idx val="1"/>
+          <c:order val="1"/>
+          <c:tx>
+            <c:strRef>
+              <c:f>Sheet1!$C$1</c:f>
+              <c:strCache>
+                <c:ptCount val="1"/>
+                <c:pt idx="0">
+                  <c:v>Onnx</c:v>
+                </c:pt>
+              </c:strCache>
+            </c:strRef>
+          </c:tx>
+          <c:spPr>
+            <a:ln w="28575" cap="rnd">
+              <a:solidFill>
+                <a:schemeClr val="accent2"/>
+              </a:solidFill>
+              <a:round/>
+            </a:ln>
+            <a:effectLst/>
+          </c:spPr>
+          <c:marker>
+            <c:symbol val="none"/>
+          </c:marker>
+          <c:cat>
+            <c:numRef>
+              <c:f>Sheet1!$A$2:$A$7</c:f>
+              <c:numCache>
+                <c:formatCode>General</c:formatCode>
+                <c:ptCount val="6"/>
+                <c:pt idx="0">
+                  <c:v>10</c:v>
+                </c:pt>
+                <c:pt idx="1">
+                  <c:v>50</c:v>
+                </c:pt>
+                <c:pt idx="2">
+                  <c:v>150</c:v>
+                </c:pt>
+                <c:pt idx="3">
+                  <c:v>300</c:v>
+                </c:pt>
+                <c:pt idx="4">
+                  <c:v>600</c:v>
+                </c:pt>
+                <c:pt idx="5">
+                  <c:v>1000</c:v>
+                </c:pt>
+              </c:numCache>
+            </c:numRef>
+          </c:cat>
+          <c:val>
+            <c:numRef>
+              <c:f>Sheet1!$C$2:$C$7</c:f>
+              <c:numCache>
+                <c:formatCode>General</c:formatCode>
+                <c:ptCount val="6"/>
+                <c:pt idx="0">
+                  <c:v>0.97</c:v>
+                </c:pt>
+                <c:pt idx="1">
+                  <c:v>1.002</c:v>
+                </c:pt>
+                <c:pt idx="2">
+                  <c:v>0.97729999999999995</c:v>
+                </c:pt>
+                <c:pt idx="3">
+                  <c:v>0.97267000000000003</c:v>
+                </c:pt>
+                <c:pt idx="4">
+                  <c:v>0.92849999999999999</c:v>
+                </c:pt>
+                <c:pt idx="5">
+                  <c:v>0.86890000000000001</c:v>
+                </c:pt>
+              </c:numCache>
+            </c:numRef>
+          </c:val>
+          <c:smooth val="0"/>
+          <c:extLst>
+            <c:ext xmlns:c16="http://schemas.microsoft.com/office/drawing/2014/chart" uri="{C3380CC4-5D6E-409C-BE32-E72D297353CC}">
+              <c16:uniqueId val="{00000001-827A-4ACC-866C-B6913B47DB8D}"/>
+            </c:ext>
+          </c:extLst>
+        </c:ser>
+        <c:dLbls>
+          <c:showLegendKey val="0"/>
+          <c:showVal val="0"/>
+          <c:showCatName val="0"/>
+          <c:showSerName val="0"/>
+          <c:showPercent val="0"/>
+          <c:showBubbleSize val="0"/>
+        </c:dLbls>
+        <c:smooth val="0"/>
+        <c:axId val="1139414975"/>
+        <c:axId val="1139414015"/>
+      </c:lineChart>
+      <c:catAx>
+        <c:axId val="1139414975"/>
+        <c:scaling>
+          <c:orientation val="minMax"/>
+        </c:scaling>
+        <c:delete val="0"/>
+        <c:axPos val="b"/>
+        <c:numFmt formatCode="General" sourceLinked="1"/>
+        <c:majorTickMark val="none"/>
+        <c:minorTickMark val="none"/>
+        <c:tickLblPos val="nextTo"/>
+        <c:spPr>
+          <a:noFill/>
+          <a:ln w="9525" cap="flat" cmpd="sng" algn="ctr">
+            <a:solidFill>
+              <a:schemeClr val="tx1">
+                <a:lumMod val="15000"/>
+                <a:lumOff val="85000"/>
+              </a:schemeClr>
+            </a:solidFill>
+            <a:round/>
+          </a:ln>
+          <a:effectLst/>
+        </c:spPr>
+        <c:txPr>
+          <a:bodyPr rot="-60000000" spcFirstLastPara="1" vertOverflow="ellipsis" vert="horz" wrap="square" anchor="ctr" anchorCtr="1"/>
+          <a:lstStyle/>
+          <a:p>
+            <a:pPr>
+              <a:defRPr sz="1197" b="0" i="0" u="none" strike="noStrike" kern="1200" baseline="0">
+                <a:solidFill>
+                  <a:schemeClr val="tx1">
+                    <a:lumMod val="65000"/>
+                    <a:lumOff val="35000"/>
+                  </a:schemeClr>
+                </a:solidFill>
+                <a:latin typeface="+mn-lt"/>
+                <a:ea typeface="+mn-ea"/>
+                <a:cs typeface="+mn-cs"/>
+              </a:defRPr>
+            </a:pPr>
+            <a:endParaRPr lang="en-US"/>
+          </a:p>
+        </c:txPr>
+        <c:crossAx val="1139414015"/>
+        <c:crosses val="autoZero"/>
+        <c:auto val="1"/>
+        <c:lblAlgn val="ctr"/>
+        <c:lblOffset val="100"/>
+        <c:noMultiLvlLbl val="0"/>
+      </c:catAx>
+      <c:valAx>
+        <c:axId val="1139414015"/>
+        <c:scaling>
+          <c:orientation val="minMax"/>
+        </c:scaling>
+        <c:delete val="0"/>
+        <c:axPos val="l"/>
+        <c:majorGridlines>
+          <c:spPr>
+            <a:ln w="9525" cap="flat" cmpd="sng" algn="ctr">
+              <a:solidFill>
+                <a:schemeClr val="tx1">
+                  <a:lumMod val="15000"/>
+                  <a:lumOff val="85000"/>
+                </a:schemeClr>
+              </a:solidFill>
+              <a:round/>
+            </a:ln>
+            <a:effectLst/>
+          </c:spPr>
+        </c:majorGridlines>
+        <c:numFmt formatCode="General" sourceLinked="1"/>
+        <c:majorTickMark val="none"/>
+        <c:minorTickMark val="none"/>
+        <c:tickLblPos val="nextTo"/>
+        <c:spPr>
+          <a:noFill/>
+          <a:ln>
+            <a:noFill/>
+          </a:ln>
+          <a:effectLst/>
+        </c:spPr>
+        <c:txPr>
+          <a:bodyPr rot="-60000000" spcFirstLastPara="1" vertOverflow="ellipsis" vert="horz" wrap="square" anchor="ctr" anchorCtr="1"/>
+          <a:lstStyle/>
+          <a:p>
+            <a:pPr>
+              <a:defRPr sz="1197" b="0" i="0" u="none" strike="noStrike" kern="1200" baseline="0">
+                <a:solidFill>
+                  <a:schemeClr val="tx1">
+                    <a:lumMod val="65000"/>
+                    <a:lumOff val="35000"/>
+                  </a:schemeClr>
+                </a:solidFill>
+                <a:latin typeface="+mn-lt"/>
+                <a:ea typeface="+mn-ea"/>
+                <a:cs typeface="+mn-cs"/>
+              </a:defRPr>
+            </a:pPr>
+            <a:endParaRPr lang="en-US"/>
+          </a:p>
+        </c:txPr>
+        <c:crossAx val="1139414975"/>
+        <c:crosses val="autoZero"/>
+        <c:crossBetween val="between"/>
+      </c:valAx>
+      <c:spPr>
+        <a:noFill/>
+        <a:ln>
+          <a:noFill/>
+        </a:ln>
+        <a:effectLst/>
+      </c:spPr>
+    </c:plotArea>
+    <c:legend>
+      <c:legendPos val="b"/>
+      <c:overlay val="0"/>
+      <c:spPr>
+        <a:noFill/>
+        <a:ln>
+          <a:noFill/>
+        </a:ln>
+        <a:effectLst/>
+      </c:spPr>
+      <c:txPr>
+        <a:bodyPr rot="0" spcFirstLastPara="1" vertOverflow="ellipsis" vert="horz" wrap="square" anchor="ctr" anchorCtr="1"/>
+        <a:lstStyle/>
+        <a:p>
+          <a:pPr>
+            <a:defRPr sz="1197" b="0" i="0" u="none" strike="noStrike" kern="1200" baseline="0">
+              <a:solidFill>
+                <a:schemeClr val="tx1">
+                  <a:lumMod val="65000"/>
+                  <a:lumOff val="35000"/>
+                </a:schemeClr>
+              </a:solidFill>
+              <a:latin typeface="+mn-lt"/>
+              <a:ea typeface="+mn-ea"/>
+              <a:cs typeface="+mn-cs"/>
+            </a:defRPr>
+          </a:pPr>
+          <a:endParaRPr lang="en-US"/>
+        </a:p>
+      </c:txPr>
+    </c:legend>
+    <c:plotVisOnly val="1"/>
+    <c:dispBlanksAs val="zero"/>
+    <c:showDLblsOverMax val="0"/>
+    <c:extLst>
+      <c:ext xmlns:c16r3="http://schemas.microsoft.com/office/drawing/2017/03/chart" uri="{56B9EC1D-385E-4148-901F-78D8002777C0}">
+        <c16r3:dataDisplayOptions16>
+          <c16r3:dispNaAsBlank val="1"/>
+        </c16r3:dataDisplayOptions16>
+      </c:ext>
+    </c:extLst>
+  </c:chart>
+  <c:spPr>
+    <a:noFill/>
+    <a:ln>
+      <a:noFill/>
+    </a:ln>
+    <a:effectLst/>
+  </c:spPr>
+  <c:txPr>
+    <a:bodyPr/>
+    <a:lstStyle/>
+    <a:p>
+      <a:pPr>
+        <a:defRPr/>
+      </a:pPr>
+      <a:endParaRPr lang="en-US"/>
+    </a:p>
+  </c:txPr>
+  <c:externalData r:id="rId3">
+    <c:autoUpdate val="0"/>
+  </c:externalData>
+</c:chartSpace>
+</file>
+
+<file path=ppt/charts/colors1.xml><?xml version="1.0" encoding="utf-8"?>
+<cs:colorStyle xmlns:cs="http://schemas.microsoft.com/office/drawing/2012/chartStyle" xmlns:a="http://schemas.openxmlformats.org/drawingml/2006/main" meth="cycle" id="10">
+  <a:schemeClr val="accent1"/>
+  <a:schemeClr val="accent2"/>
+  <a:schemeClr val="accent3"/>
+  <a:schemeClr val="accent4"/>
+  <a:schemeClr val="accent5"/>
+  <a:schemeClr val="accent6"/>
+  <cs:variation/>
+  <cs:variation>
+    <a:lumMod val="60000"/>
+  </cs:variation>
+  <cs:variation>
+    <a:lumMod val="80000"/>
+    <a:lumOff val="20000"/>
+  </cs:variation>
+  <cs:variation>
+    <a:lumMod val="80000"/>
+  </cs:variation>
+  <cs:variation>
+    <a:lumMod val="60000"/>
+    <a:lumOff val="40000"/>
+  </cs:variation>
+  <cs:variation>
+    <a:lumMod val="50000"/>
+  </cs:variation>
+  <cs:variation>
+    <a:lumMod val="70000"/>
+    <a:lumOff val="30000"/>
+  </cs:variation>
+  <cs:variation>
+    <a:lumMod val="70000"/>
+  </cs:variation>
+  <cs:variation>
+    <a:lumMod val="50000"/>
+    <a:lumOff val="50000"/>
+  </cs:variation>
+</cs:colorStyle>
+</file>
+
+<file path=ppt/charts/colors2.xml><?xml version="1.0" encoding="utf-8"?>
+<cs:colorStyle xmlns:cs="http://schemas.microsoft.com/office/drawing/2012/chartStyle" xmlns:a="http://schemas.openxmlformats.org/drawingml/2006/main" meth="cycle" id="10">
+  <a:schemeClr val="accent1"/>
+  <a:schemeClr val="accent2"/>
+  <a:schemeClr val="accent3"/>
+  <a:schemeClr val="accent4"/>
+  <a:schemeClr val="accent5"/>
+  <a:schemeClr val="accent6"/>
+  <cs:variation/>
+  <cs:variation>
+    <a:lumMod val="60000"/>
+  </cs:variation>
+  <cs:variation>
+    <a:lumMod val="80000"/>
+    <a:lumOff val="20000"/>
+  </cs:variation>
+  <cs:variation>
+    <a:lumMod val="80000"/>
+  </cs:variation>
+  <cs:variation>
+    <a:lumMod val="60000"/>
+    <a:lumOff val="40000"/>
+  </cs:variation>
+  <cs:variation>
+    <a:lumMod val="50000"/>
+  </cs:variation>
+  <cs:variation>
+    <a:lumMod val="70000"/>
+    <a:lumOff val="30000"/>
+  </cs:variation>
+  <cs:variation>
+    <a:lumMod val="70000"/>
+  </cs:variation>
+  <cs:variation>
+    <a:lumMod val="50000"/>
+    <a:lumOff val="50000"/>
+  </cs:variation>
+</cs:colorStyle>
+</file>
+
+<file path=ppt/charts/colors3.xml><?xml version="1.0" encoding="utf-8"?>
+<cs:colorStyle xmlns:cs="http://schemas.microsoft.com/office/drawing/2012/chartStyle" xmlns:a="http://schemas.openxmlformats.org/drawingml/2006/main" meth="cycle" id="10">
+  <a:schemeClr val="accent1"/>
+  <a:schemeClr val="accent2"/>
+  <a:schemeClr val="accent3"/>
+  <a:schemeClr val="accent4"/>
+  <a:schemeClr val="accent5"/>
+  <a:schemeClr val="accent6"/>
+  <cs:variation/>
+  <cs:variation>
+    <a:lumMod val="60000"/>
+  </cs:variation>
+  <cs:variation>
+    <a:lumMod val="80000"/>
+    <a:lumOff val="20000"/>
+  </cs:variation>
+  <cs:variation>
+    <a:lumMod val="80000"/>
+  </cs:variation>
+  <cs:variation>
+    <a:lumMod val="60000"/>
+    <a:lumOff val="40000"/>
+  </cs:variation>
+  <cs:variation>
+    <a:lumMod val="50000"/>
+  </cs:variation>
+  <cs:variation>
+    <a:lumMod val="70000"/>
+    <a:lumOff val="30000"/>
+  </cs:variation>
+  <cs:variation>
+    <a:lumMod val="70000"/>
+  </cs:variation>
+  <cs:variation>
+    <a:lumMod val="50000"/>
+    <a:lumOff val="50000"/>
+  </cs:variation>
+</cs:colorStyle>
+</file>
+
+<file path=ppt/charts/colors4.xml><?xml version="1.0" encoding="utf-8"?>
+<cs:colorStyle xmlns:cs="http://schemas.microsoft.com/office/drawing/2012/chartStyle" xmlns:a="http://schemas.openxmlformats.org/drawingml/2006/main" meth="cycle" id="10">
+  <a:schemeClr val="accent1"/>
+  <a:schemeClr val="accent2"/>
+  <a:schemeClr val="accent3"/>
+  <a:schemeClr val="accent4"/>
+  <a:schemeClr val="accent5"/>
+  <a:schemeClr val="accent6"/>
+  <cs:variation/>
+  <cs:variation>
+    <a:lumMod val="60000"/>
+  </cs:variation>
+  <cs:variation>
+    <a:lumMod val="80000"/>
+    <a:lumOff val="20000"/>
+  </cs:variation>
+  <cs:variation>
+    <a:lumMod val="80000"/>
+  </cs:variation>
+  <cs:variation>
+    <a:lumMod val="60000"/>
+    <a:lumOff val="40000"/>
+  </cs:variation>
+  <cs:variation>
+    <a:lumMod val="50000"/>
+  </cs:variation>
+  <cs:variation>
+    <a:lumMod val="70000"/>
+    <a:lumOff val="30000"/>
+  </cs:variation>
+  <cs:variation>
+    <a:lumMod val="70000"/>
+  </cs:variation>
+  <cs:variation>
+    <a:lumMod val="50000"/>
+    <a:lumOff val="50000"/>
+  </cs:variation>
+</cs:colorStyle>
+</file>
+
+<file path=ppt/charts/colors5.xml><?xml version="1.0" encoding="utf-8"?>
+<cs:colorStyle xmlns:cs="http://schemas.microsoft.com/office/drawing/2012/chartStyle" xmlns:a="http://schemas.openxmlformats.org/drawingml/2006/main" meth="cycle" id="10">
+  <a:schemeClr val="accent1"/>
+  <a:schemeClr val="accent2"/>
+  <a:schemeClr val="accent3"/>
+  <a:schemeClr val="accent4"/>
+  <a:schemeClr val="accent5"/>
+  <a:schemeClr val="accent6"/>
+  <cs:variation/>
+  <cs:variation>
+    <a:lumMod val="60000"/>
+  </cs:variation>
+  <cs:variation>
+    <a:lumMod val="80000"/>
+    <a:lumOff val="20000"/>
+  </cs:variation>
+  <cs:variation>
+    <a:lumMod val="80000"/>
+  </cs:variation>
+  <cs:variation>
+    <a:lumMod val="60000"/>
+    <a:lumOff val="40000"/>
+  </cs:variation>
+  <cs:variation>
+    <a:lumMod val="50000"/>
+  </cs:variation>
+  <cs:variation>
+    <a:lumMod val="70000"/>
+    <a:lumOff val="30000"/>
+  </cs:variation>
+  <cs:variation>
+    <a:lumMod val="70000"/>
+  </cs:variation>
+  <cs:variation>
+    <a:lumMod val="50000"/>
+    <a:lumOff val="50000"/>
+  </cs:variation>
+</cs:colorStyle>
+</file>
+
+<file path=ppt/charts/colors6.xml><?xml version="1.0" encoding="utf-8"?>
+<cs:colorStyle xmlns:cs="http://schemas.microsoft.com/office/drawing/2012/chartStyle" xmlns:a="http://schemas.openxmlformats.org/drawingml/2006/main" meth="cycle" id="10">
+  <a:schemeClr val="accent1"/>
+  <a:schemeClr val="accent2"/>
+  <a:schemeClr val="accent3"/>
+  <a:schemeClr val="accent4"/>
+  <a:schemeClr val="accent5"/>
+  <a:schemeClr val="accent6"/>
+  <cs:variation/>
+  <cs:variation>
+    <a:lumMod val="60000"/>
+  </cs:variation>
+  <cs:variation>
+    <a:lumMod val="80000"/>
+    <a:lumOff val="20000"/>
+  </cs:variation>
+  <cs:variation>
+    <a:lumMod val="80000"/>
+  </cs:variation>
+  <cs:variation>
+    <a:lumMod val="60000"/>
+    <a:lumOff val="40000"/>
+  </cs:variation>
+  <cs:variation>
+    <a:lumMod val="50000"/>
+  </cs:variation>
+  <cs:variation>
+    <a:lumMod val="70000"/>
+    <a:lumOff val="30000"/>
+  </cs:variation>
+  <cs:variation>
+    <a:lumMod val="70000"/>
+  </cs:variation>
+  <cs:variation>
+    <a:lumMod val="50000"/>
+    <a:lumOff val="50000"/>
+  </cs:variation>
+</cs:colorStyle>
+</file>
+
+<file path=ppt/charts/style1.xml><?xml version="1.0" encoding="utf-8"?>
+<cs:chartStyle xmlns:cs="http://schemas.microsoft.com/office/drawing/2012/chartStyle" xmlns:a="http://schemas.openxmlformats.org/drawingml/2006/main" id="227">
+  <cs:axisTitle>
+    <cs:lnRef idx="0"/>
+    <cs:fillRef idx="0"/>
+    <cs:effectRef idx="0"/>
+    <cs:fontRef idx="minor">
+      <a:schemeClr val="tx1">
+        <a:lumMod val="65000"/>
+        <a:lumOff val="35000"/>
+      </a:schemeClr>
+    </cs:fontRef>
+    <cs:defRPr sz="1330" kern="1200"/>
+  </cs:axisTitle>
+  <cs:categoryAxis>
+    <cs:lnRef idx="0"/>
+    <cs:fillRef idx="0"/>
+    <cs:effectRef idx="0"/>
+    <cs:fontRef idx="minor">
+      <a:schemeClr val="tx1">
+        <a:lumMod val="65000"/>
+        <a:lumOff val="35000"/>
+      </a:schemeClr>
+    </cs:fontRef>
+    <cs:spPr>
+      <a:ln w="9525" cap="flat" cmpd="sng" algn="ctr">
+        <a:solidFill>
+          <a:schemeClr val="tx1">
+            <a:lumMod val="15000"/>
+            <a:lumOff val="85000"/>
+          </a:schemeClr>
+        </a:solidFill>
+        <a:round/>
+      </a:ln>
+    </cs:spPr>
+    <cs:defRPr sz="1197" kern="1200"/>
+  </cs:categoryAxis>
+  <cs:chartArea mods="allowNoFillOverride allowNoLineOverride">
+    <cs:lnRef idx="0"/>
+    <cs:fillRef idx="0"/>
+    <cs:effectRef idx="0"/>
+    <cs:fontRef idx="minor">
+      <a:schemeClr val="tx1"/>
+    </cs:fontRef>
+    <cs:spPr>
+      <a:solidFill>
+        <a:schemeClr val="bg1"/>
+      </a:solidFill>
+      <a:ln w="9525" cap="flat" cmpd="sng" algn="ctr">
+        <a:solidFill>
+          <a:schemeClr val="tx1">
+            <a:lumMod val="15000"/>
+            <a:lumOff val="85000"/>
+          </a:schemeClr>
+        </a:solidFill>
+        <a:round/>
+      </a:ln>
+    </cs:spPr>
+    <cs:defRPr sz="1330" kern="1200"/>
+  </cs:chartArea>
+  <cs:dataLabel>
+    <cs:lnRef idx="0"/>
+    <cs:fillRef idx="0"/>
+    <cs:effectRef idx="0"/>
+    <cs:fontRef idx="minor">
+      <a:schemeClr val="tx1">
+        <a:lumMod val="75000"/>
+        <a:lumOff val="25000"/>
+      </a:schemeClr>
+    </cs:fontRef>
+    <cs:defRPr sz="1197" kern="1200"/>
+  </cs:dataLabel>
+  <cs:dataLabelCallout>
+    <cs:lnRef idx="0"/>
+    <cs:fillRef idx="0"/>
+    <cs:effectRef idx="0"/>
+    <cs:fontRef idx="minor">
+      <a:schemeClr val="dk1">
+        <a:lumMod val="65000"/>
+        <a:lumOff val="35000"/>
+      </a:schemeClr>
+    </cs:fontRef>
+    <cs:spPr>
+      <a:solidFill>
+        <a:schemeClr val="lt1"/>
+      </a:solidFill>
+      <a:ln>
+        <a:solidFill>
+          <a:schemeClr val="dk1">
+            <a:lumMod val="25000"/>
+            <a:lumOff val="75000"/>
+          </a:schemeClr>
+        </a:solidFill>
+      </a:ln>
+    </cs:spPr>
+    <cs:defRPr sz="1197" kern="1200"/>
+    <cs:bodyPr rot="0" spcFirstLastPara="1" vertOverflow="clip" horzOverflow="clip" vert="horz" wrap="square" lIns="36576" tIns="18288" rIns="36576" bIns="18288" anchor="ctr" anchorCtr="1">
+      <a:spAutoFit/>
+    </cs:bodyPr>
+  </cs:dataLabelCallout>
+  <cs:dataPoint>
+    <cs:lnRef idx="0"/>
+    <cs:fillRef idx="1">
+      <cs:styleClr val="auto"/>
+    </cs:fillRef>
+    <cs:effectRef idx="0"/>
+    <cs:fontRef idx="minor">
+      <a:schemeClr val="tx1"/>
+    </cs:fontRef>
+    <cs:spPr>
+      <a:solidFill>
+        <a:schemeClr val="phClr"/>
+      </a:solidFill>
+    </cs:spPr>
+  </cs:dataPoint>
+  <cs:dataPoint3D>
+    <cs:lnRef idx="0"/>
+    <cs:fillRef idx="1">
+      <cs:styleClr val="auto"/>
+    </cs:fillRef>
+    <cs:effectRef idx="0"/>
+    <cs:fontRef idx="minor">
+      <a:schemeClr val="tx1"/>
+    </cs:fontRef>
+    <cs:spPr>
+      <a:solidFill>
+        <a:schemeClr val="phClr"/>
+      </a:solidFill>
+    </cs:spPr>
+  </cs:dataPoint3D>
+  <cs:dataPointLine>
+    <cs:lnRef idx="0">
+      <cs:styleClr val="auto"/>
+    </cs:lnRef>
+    <cs:fillRef idx="1"/>
+    <cs:effectRef idx="0"/>
+    <cs:fontRef idx="minor">
+      <a:schemeClr val="tx1"/>
+    </cs:fontRef>
+    <cs:spPr>
+      <a:ln w="28575" cap="rnd">
+        <a:solidFill>
+          <a:schemeClr val="phClr"/>
+        </a:solidFill>
+        <a:round/>
+      </a:ln>
+    </cs:spPr>
+  </cs:dataPointLine>
+  <cs:dataPointMarker>
+    <cs:lnRef idx="0">
+      <cs:styleClr val="auto"/>
+    </cs:lnRef>
+    <cs:fillRef idx="1">
+      <cs:styleClr val="auto"/>
+    </cs:fillRef>
+    <cs:effectRef idx="0"/>
+    <cs:fontRef idx="minor">
+      <a:schemeClr val="tx1"/>
+    </cs:fontRef>
+    <cs:spPr>
+      <a:solidFill>
+        <a:schemeClr val="phClr"/>
+      </a:solidFill>
+      <a:ln w="9525">
+        <a:solidFill>
+          <a:schemeClr val="phClr"/>
+        </a:solidFill>
+      </a:ln>
+    </cs:spPr>
+  </cs:dataPointMarker>
+  <cs:dataPointMarkerLayout symbol="circle" size="5"/>
+  <cs:dataPointWireframe>
+    <cs:lnRef idx="0">
+      <cs:styleClr val="auto"/>
+    </cs:lnRef>
+    <cs:fillRef idx="1"/>
+    <cs:effectRef idx="0"/>
+    <cs:fontRef idx="minor">
+      <a:schemeClr val="tx1"/>
+    </cs:fontRef>
+    <cs:spPr>
+      <a:ln w="9525" cap="rnd">
+        <a:solidFill>
+          <a:schemeClr val="phClr"/>
+        </a:solidFill>
+        <a:round/>
+      </a:ln>
+    </cs:spPr>
+  </cs:dataPointWireframe>
+  <cs:dataTable>
+    <cs:lnRef idx="0"/>
+    <cs:fillRef idx="0"/>
+    <cs:effectRef idx="0"/>
+    <cs:fontRef idx="minor">
+      <a:schemeClr val="tx1">
+        <a:lumMod val="65000"/>
+        <a:lumOff val="35000"/>
+      </a:schemeClr>
+    </cs:fontRef>
+    <cs:spPr>
+      <a:noFill/>
+      <a:ln w="9525" cap="flat" cmpd="sng" algn="ctr">
+        <a:solidFill>
+          <a:schemeClr val="tx1">
+            <a:lumMod val="15000"/>
+            <a:lumOff val="85000"/>
+          </a:schemeClr>
+        </a:solidFill>
+        <a:round/>
+      </a:ln>
+    </cs:spPr>
+    <cs:defRPr sz="1197" kern="1200"/>
+  </cs:dataTable>
+  <cs:downBar>
+    <cs:lnRef idx="0"/>
+    <cs:fillRef idx="0"/>
+    <cs:effectRef idx="0"/>
+    <cs:fontRef idx="minor">
+      <a:schemeClr val="dk1"/>
+    </cs:fontRef>
+    <cs:spPr>
+      <a:solidFill>
+        <a:schemeClr val="dk1">
+          <a:lumMod val="65000"/>
+          <a:lumOff val="35000"/>
+        </a:schemeClr>
+      </a:solidFill>
+      <a:ln w="9525">
+        <a:solidFill>
+          <a:schemeClr val="tx1">
+            <a:lumMod val="65000"/>
+            <a:lumOff val="35000"/>
+          </a:schemeClr>
+        </a:solidFill>
+      </a:ln>
+    </cs:spPr>
+  </cs:downBar>
+  <cs:dropLine>
+    <cs:lnRef idx="0"/>
+    <cs:fillRef idx="0"/>
+    <cs:effectRef idx="0"/>
+    <cs:fontRef idx="minor">
+      <a:schemeClr val="tx1"/>
+    </cs:fontRef>
+    <cs:spPr>
+      <a:ln w="9525" cap="flat" cmpd="sng" algn="ctr">
+        <a:solidFill>
+          <a:schemeClr val="tx1">
+            <a:lumMod val="35000"/>
+            <a:lumOff val="65000"/>
+          </a:schemeClr>
+        </a:solidFill>
+        <a:round/>
+      </a:ln>
+    </cs:spPr>
+  </cs:dropLine>
+  <cs:errorBar>
+    <cs:lnRef idx="0"/>
+    <cs:fillRef idx="0"/>
+    <cs:effectRef idx="0"/>
+    <cs:fontRef idx="minor">
+      <a:schemeClr val="tx1"/>
+    </cs:fontRef>
+    <cs:spPr>
+      <a:ln w="9525" cap="flat" cmpd="sng" algn="ctr">
+        <a:solidFill>
+          <a:schemeClr val="tx1">
+            <a:lumMod val="65000"/>
+            <a:lumOff val="35000"/>
+          </a:schemeClr>
+        </a:solidFill>
+        <a:round/>
+      </a:ln>
+    </cs:spPr>
+  </cs:errorBar>
+  <cs:floor>
+    <cs:lnRef idx="0"/>
+    <cs:fillRef idx="0"/>
+    <cs:effectRef idx="0"/>
+    <cs:fontRef idx="minor">
+      <a:schemeClr val="tx1"/>
+    </cs:fontRef>
+    <cs:spPr>
+      <a:noFill/>
+      <a:ln>
+        <a:noFill/>
+      </a:ln>
+    </cs:spPr>
+  </cs:floor>
+  <cs:gridlineMajor>
+    <cs:lnRef idx="0"/>
+    <cs:fillRef idx="0"/>
+    <cs:effectRef idx="0"/>
+    <cs:fontRef idx="minor">
+      <a:schemeClr val="tx1"/>
+    </cs:fontRef>
+    <cs:spPr>
+      <a:ln w="9525" cap="flat" cmpd="sng" algn="ctr">
+        <a:solidFill>
+          <a:schemeClr val="tx1">
+            <a:lumMod val="15000"/>
+            <a:lumOff val="85000"/>
+          </a:schemeClr>
+        </a:solidFill>
+        <a:round/>
+      </a:ln>
+    </cs:spPr>
+  </cs:gridlineMajor>
+  <cs:gridlineMinor>
+    <cs:lnRef idx="0"/>
+    <cs:fillRef idx="0"/>
+    <cs:effectRef idx="0"/>
+    <cs:fontRef idx="minor">
+      <a:schemeClr val="tx1"/>
+    </cs:fontRef>
+    <cs:spPr>
+      <a:ln w="9525" cap="flat" cmpd="sng" algn="ctr">
+        <a:solidFill>
+          <a:schemeClr val="tx1">
+            <a:lumMod val="5000"/>
+            <a:lumOff val="95000"/>
+          </a:schemeClr>
+        </a:solidFill>
+        <a:round/>
+      </a:ln>
+    </cs:spPr>
+  </cs:gridlineMinor>
+  <cs:hiLoLine>
+    <cs:lnRef idx="0"/>
+    <cs:fillRef idx="0"/>
+    <cs:effectRef idx="0"/>
+    <cs:fontRef idx="minor">
+      <a:schemeClr val="tx1"/>
+    </cs:fontRef>
+    <cs:spPr>
+      <a:ln w="9525" cap="flat" cmpd="sng" algn="ctr">
+        <a:solidFill>
+          <a:schemeClr val="tx1">
+            <a:lumMod val="75000"/>
+            <a:lumOff val="25000"/>
+          </a:schemeClr>
+        </a:solidFill>
+        <a:round/>
+      </a:ln>
+    </cs:spPr>
+  </cs:hiLoLine>
+  <cs:leaderLine>
+    <cs:lnRef idx="0"/>
+    <cs:fillRef idx="0"/>
+    <cs:effectRef idx="0"/>
+    <cs:fontRef idx="minor">
+      <a:schemeClr val="tx1"/>
+    </cs:fontRef>
+    <cs:spPr>
+      <a:ln w="9525" cap="flat" cmpd="sng" algn="ctr">
+        <a:solidFill>
+          <a:schemeClr val="tx1">
+            <a:lumMod val="35000"/>
+            <a:lumOff val="65000"/>
+          </a:schemeClr>
+        </a:solidFill>
+        <a:round/>
+      </a:ln>
+    </cs:spPr>
+  </cs:leaderLine>
+  <cs:legend>
+    <cs:lnRef idx="0"/>
+    <cs:fillRef idx="0"/>
+    <cs:effectRef idx="0"/>
+    <cs:fontRef idx="minor">
+      <a:schemeClr val="tx1">
+        <a:lumMod val="65000"/>
+        <a:lumOff val="35000"/>
+      </a:schemeClr>
+    </cs:fontRef>
+    <cs:defRPr sz="1197" kern="1200"/>
+  </cs:legend>
+  <cs:plotArea mods="allowNoFillOverride allowNoLineOverride">
+    <cs:lnRef idx="0"/>
+    <cs:fillRef idx="0"/>
+    <cs:effectRef idx="0"/>
+    <cs:fontRef idx="minor">
+      <a:schemeClr val="tx1"/>
+    </cs:fontRef>
+  </cs:plotArea>
+  <cs:plotArea3D mods="allowNoFillOverride allowNoLineOverride">
+    <cs:lnRef idx="0"/>
+    <cs:fillRef idx="0"/>
+    <cs:effectRef idx="0"/>
+    <cs:fontRef idx="minor">
+      <a:schemeClr val="tx1"/>
+    </cs:fontRef>
+  </cs:plotArea3D>
+  <cs:seriesAxis>
+    <cs:lnRef idx="0"/>
+    <cs:fillRef idx="0"/>
+    <cs:effectRef idx="0"/>
+    <cs:fontRef idx="minor">
+      <a:schemeClr val="tx1">
+        <a:lumMod val="65000"/>
+        <a:lumOff val="35000"/>
+      </a:schemeClr>
+    </cs:fontRef>
+    <cs:defRPr sz="1197" kern="1200"/>
+  </cs:seriesAxis>
+  <cs:seriesLine>
+    <cs:lnRef idx="0"/>
+    <cs:fillRef idx="0"/>
+    <cs:effectRef idx="0"/>
+    <cs:fontRef idx="minor">
+      <a:schemeClr val="tx1"/>
+    </cs:fontRef>
+    <cs:spPr>
+      <a:ln w="9525" cap="flat" cmpd="sng" algn="ctr">
+        <a:solidFill>
+          <a:schemeClr val="tx1">
+            <a:lumMod val="35000"/>
+            <a:lumOff val="65000"/>
+          </a:schemeClr>
+        </a:solidFill>
+        <a:round/>
+      </a:ln>
+    </cs:spPr>
+  </cs:seriesLine>
+  <cs:title>
+    <cs:lnRef idx="0"/>
+    <cs:fillRef idx="0"/>
+    <cs:effectRef idx="0"/>
+    <cs:fontRef idx="minor">
+      <a:schemeClr val="tx1">
+        <a:lumMod val="65000"/>
+        <a:lumOff val="35000"/>
+      </a:schemeClr>
+    </cs:fontRef>
+    <cs:defRPr sz="1862" b="0" kern="1200" spc="0" baseline="0"/>
+  </cs:title>
+  <cs:trendline>
+    <cs:lnRef idx="0">
+      <cs:styleClr val="auto"/>
+    </cs:lnRef>
+    <cs:fillRef idx="0"/>
+    <cs:effectRef idx="0"/>
+    <cs:fontRef idx="minor">
+      <a:schemeClr val="tx1"/>
+    </cs:fontRef>
+    <cs:spPr>
+      <a:ln w="19050" cap="rnd">
+        <a:solidFill>
+          <a:schemeClr val="phClr"/>
+        </a:solidFill>
+        <a:prstDash val="sysDot"/>
+      </a:ln>
+    </cs:spPr>
+  </cs:trendline>
+  <cs:trendlineLabel>
+    <cs:lnRef idx="0"/>
+    <cs:fillRef idx="0"/>
+    <cs:effectRef idx="0"/>
+    <cs:fontRef idx="minor">
+      <a:schemeClr val="tx1">
+        <a:lumMod val="65000"/>
+        <a:lumOff val="35000"/>
+      </a:schemeClr>
+    </cs:fontRef>
+    <cs:defRPr sz="1197" kern="1200"/>
+  </cs:trendlineLabel>
+  <cs:upBar>
+    <cs:lnRef idx="0"/>
+    <cs:fillRef idx="0"/>
+    <cs:effectRef idx="0"/>
+    <cs:fontRef idx="minor">
+      <a:schemeClr val="dk1"/>
+    </cs:fontRef>
+    <cs:spPr>
+      <a:solidFill>
+        <a:schemeClr val="lt1"/>
+      </a:solidFill>
+      <a:ln w="9525">
+        <a:solidFill>
+          <a:schemeClr val="tx1">
+            <a:lumMod val="15000"/>
+            <a:lumOff val="85000"/>
+          </a:schemeClr>
+        </a:solidFill>
+      </a:ln>
+    </cs:spPr>
+  </cs:upBar>
+  <cs:valueAxis>
+    <cs:lnRef idx="0"/>
+    <cs:fillRef idx="0"/>
+    <cs:effectRef idx="0"/>
+    <cs:fontRef idx="minor">
+      <a:schemeClr val="tx1">
+        <a:lumMod val="65000"/>
+        <a:lumOff val="35000"/>
+      </a:schemeClr>
+    </cs:fontRef>
+    <cs:defRPr sz="1197" kern="1200"/>
+  </cs:valueAxis>
+  <cs:wall>
+    <cs:lnRef idx="0"/>
+    <cs:fillRef idx="0"/>
+    <cs:effectRef idx="0"/>
+    <cs:fontRef idx="minor">
+      <a:schemeClr val="tx1"/>
+    </cs:fontRef>
+    <cs:spPr>
+      <a:noFill/>
+      <a:ln>
+        <a:noFill/>
+      </a:ln>
+    </cs:spPr>
+  </cs:wall>
+</cs:chartStyle>
+</file>
+
+<file path=ppt/charts/style2.xml><?xml version="1.0" encoding="utf-8"?>
+<cs:chartStyle xmlns:cs="http://schemas.microsoft.com/office/drawing/2012/chartStyle" xmlns:a="http://schemas.openxmlformats.org/drawingml/2006/main" id="227">
+  <cs:axisTitle>
+    <cs:lnRef idx="0"/>
+    <cs:fillRef idx="0"/>
+    <cs:effectRef idx="0"/>
+    <cs:fontRef idx="minor">
+      <a:schemeClr val="tx1">
+        <a:lumMod val="65000"/>
+        <a:lumOff val="35000"/>
+      </a:schemeClr>
+    </cs:fontRef>
+    <cs:defRPr sz="1330" kern="1200"/>
+  </cs:axisTitle>
+  <cs:categoryAxis>
+    <cs:lnRef idx="0"/>
+    <cs:fillRef idx="0"/>
+    <cs:effectRef idx="0"/>
+    <cs:fontRef idx="minor">
+      <a:schemeClr val="tx1">
+        <a:lumMod val="65000"/>
+        <a:lumOff val="35000"/>
+      </a:schemeClr>
+    </cs:fontRef>
+    <cs:spPr>
+      <a:ln w="9525" cap="flat" cmpd="sng" algn="ctr">
+        <a:solidFill>
+          <a:schemeClr val="tx1">
+            <a:lumMod val="15000"/>
+            <a:lumOff val="85000"/>
+          </a:schemeClr>
+        </a:solidFill>
+        <a:round/>
+      </a:ln>
+    </cs:spPr>
+    <cs:defRPr sz="1197" kern="1200"/>
+  </cs:categoryAxis>
+  <cs:chartArea mods="allowNoFillOverride allowNoLineOverride">
+    <cs:lnRef idx="0"/>
+    <cs:fillRef idx="0"/>
+    <cs:effectRef idx="0"/>
+    <cs:fontRef idx="minor">
+      <a:schemeClr val="tx1"/>
+    </cs:fontRef>
+    <cs:spPr>
+      <a:solidFill>
+        <a:schemeClr val="bg1"/>
+      </a:solidFill>
+      <a:ln w="9525" cap="flat" cmpd="sng" algn="ctr">
+        <a:solidFill>
+          <a:schemeClr val="tx1">
+            <a:lumMod val="15000"/>
+            <a:lumOff val="85000"/>
+          </a:schemeClr>
+        </a:solidFill>
+        <a:round/>
+      </a:ln>
+    </cs:spPr>
+    <cs:defRPr sz="1330" kern="1200"/>
+  </cs:chartArea>
+  <cs:dataLabel>
+    <cs:lnRef idx="0"/>
+    <cs:fillRef idx="0"/>
+    <cs:effectRef idx="0"/>
+    <cs:fontRef idx="minor">
+      <a:schemeClr val="tx1">
+        <a:lumMod val="75000"/>
+        <a:lumOff val="25000"/>
+      </a:schemeClr>
+    </cs:fontRef>
+    <cs:defRPr sz="1197" kern="1200"/>
+  </cs:dataLabel>
+  <cs:dataLabelCallout>
+    <cs:lnRef idx="0"/>
+    <cs:fillRef idx="0"/>
+    <cs:effectRef idx="0"/>
+    <cs:fontRef idx="minor">
+      <a:schemeClr val="dk1">
+        <a:lumMod val="65000"/>
+        <a:lumOff val="35000"/>
+      </a:schemeClr>
+    </cs:fontRef>
+    <cs:spPr>
+      <a:solidFill>
+        <a:schemeClr val="lt1"/>
+      </a:solidFill>
+      <a:ln>
+        <a:solidFill>
+          <a:schemeClr val="dk1">
+            <a:lumMod val="25000"/>
+            <a:lumOff val="75000"/>
+          </a:schemeClr>
+        </a:solidFill>
+      </a:ln>
+    </cs:spPr>
+    <cs:defRPr sz="1197" kern="1200"/>
+    <cs:bodyPr rot="0" spcFirstLastPara="1" vertOverflow="clip" horzOverflow="clip" vert="horz" wrap="square" lIns="36576" tIns="18288" rIns="36576" bIns="18288" anchor="ctr" anchorCtr="1">
+      <a:spAutoFit/>
+    </cs:bodyPr>
+  </cs:dataLabelCallout>
+  <cs:dataPoint>
+    <cs:lnRef idx="0"/>
+    <cs:fillRef idx="1">
+      <cs:styleClr val="auto"/>
+    </cs:fillRef>
+    <cs:effectRef idx="0"/>
+    <cs:fontRef idx="minor">
+      <a:schemeClr val="tx1"/>
+    </cs:fontRef>
+    <cs:spPr>
+      <a:solidFill>
+        <a:schemeClr val="phClr"/>
+      </a:solidFill>
+    </cs:spPr>
+  </cs:dataPoint>
+  <cs:dataPoint3D>
+    <cs:lnRef idx="0"/>
+    <cs:fillRef idx="1">
+      <cs:styleClr val="auto"/>
+    </cs:fillRef>
+    <cs:effectRef idx="0"/>
+    <cs:fontRef idx="minor">
+      <a:schemeClr val="tx1"/>
+    </cs:fontRef>
+    <cs:spPr>
+      <a:solidFill>
+        <a:schemeClr val="phClr"/>
+      </a:solidFill>
+    </cs:spPr>
+  </cs:dataPoint3D>
+  <cs:dataPointLine>
+    <cs:lnRef idx="0">
+      <cs:styleClr val="auto"/>
+    </cs:lnRef>
+    <cs:fillRef idx="1"/>
+    <cs:effectRef idx="0"/>
+    <cs:fontRef idx="minor">
+      <a:schemeClr val="tx1"/>
+    </cs:fontRef>
+    <cs:spPr>
+      <a:ln w="28575" cap="rnd">
+        <a:solidFill>
+          <a:schemeClr val="phClr"/>
+        </a:solidFill>
+        <a:round/>
+      </a:ln>
+    </cs:spPr>
+  </cs:dataPointLine>
+  <cs:dataPointMarker>
+    <cs:lnRef idx="0">
+      <cs:styleClr val="auto"/>
+    </cs:lnRef>
+    <cs:fillRef idx="1">
+      <cs:styleClr val="auto"/>
+    </cs:fillRef>
+    <cs:effectRef idx="0"/>
+    <cs:fontRef idx="minor">
+      <a:schemeClr val="tx1"/>
+    </cs:fontRef>
+    <cs:spPr>
+      <a:solidFill>
+        <a:schemeClr val="phClr"/>
+      </a:solidFill>
+      <a:ln w="9525">
+        <a:solidFill>
+          <a:schemeClr val="phClr"/>
+        </a:solidFill>
+      </a:ln>
+    </cs:spPr>
+  </cs:dataPointMarker>
+  <cs:dataPointMarkerLayout symbol="circle" size="5"/>
+  <cs:dataPointWireframe>
+    <cs:lnRef idx="0">
+      <cs:styleClr val="auto"/>
+    </cs:lnRef>
+    <cs:fillRef idx="1"/>
+    <cs:effectRef idx="0"/>
+    <cs:fontRef idx="minor">
+      <a:schemeClr val="tx1"/>
+    </cs:fontRef>
+    <cs:spPr>
+      <a:ln w="9525" cap="rnd">
+        <a:solidFill>
+          <a:schemeClr val="phClr"/>
+        </a:solidFill>
+        <a:round/>
+      </a:ln>
+    </cs:spPr>
+  </cs:dataPointWireframe>
+  <cs:dataTable>
+    <cs:lnRef idx="0"/>
+    <cs:fillRef idx="0"/>
+    <cs:effectRef idx="0"/>
+    <cs:fontRef idx="minor">
+      <a:schemeClr val="tx1">
+        <a:lumMod val="65000"/>
+        <a:lumOff val="35000"/>
+      </a:schemeClr>
+    </cs:fontRef>
+    <cs:spPr>
+      <a:noFill/>
+      <a:ln w="9525" cap="flat" cmpd="sng" algn="ctr">
+        <a:solidFill>
+          <a:schemeClr val="tx1">
+            <a:lumMod val="15000"/>
+            <a:lumOff val="85000"/>
+          </a:schemeClr>
+        </a:solidFill>
+        <a:round/>
+      </a:ln>
+    </cs:spPr>
+    <cs:defRPr sz="1197" kern="1200"/>
+  </cs:dataTable>
+  <cs:downBar>
+    <cs:lnRef idx="0"/>
+    <cs:fillRef idx="0"/>
+    <cs:effectRef idx="0"/>
+    <cs:fontRef idx="minor">
+      <a:schemeClr val="dk1"/>
+    </cs:fontRef>
+    <cs:spPr>
+      <a:solidFill>
+        <a:schemeClr val="dk1">
+          <a:lumMod val="65000"/>
+          <a:lumOff val="35000"/>
+        </a:schemeClr>
+      </a:solidFill>
+      <a:ln w="9525">
+        <a:solidFill>
+          <a:schemeClr val="tx1">
+            <a:lumMod val="65000"/>
+            <a:lumOff val="35000"/>
+          </a:schemeClr>
+        </a:solidFill>
+      </a:ln>
+    </cs:spPr>
+  </cs:downBar>
+  <cs:dropLine>
+    <cs:lnRef idx="0"/>
+    <cs:fillRef idx="0"/>
+    <cs:effectRef idx="0"/>
+    <cs:fontRef idx="minor">
+      <a:schemeClr val="tx1"/>
+    </cs:fontRef>
+    <cs:spPr>
+      <a:ln w="9525" cap="flat" cmpd="sng" algn="ctr">
+        <a:solidFill>
+          <a:schemeClr val="tx1">
+            <a:lumMod val="35000"/>
+            <a:lumOff val="65000"/>
+          </a:schemeClr>
+        </a:solidFill>
+        <a:round/>
+      </a:ln>
+    </cs:spPr>
+  </cs:dropLine>
+  <cs:errorBar>
+    <cs:lnRef idx="0"/>
+    <cs:fillRef idx="0"/>
+    <cs:effectRef idx="0"/>
+    <cs:fontRef idx="minor">
+      <a:schemeClr val="tx1"/>
+    </cs:fontRef>
+    <cs:spPr>
+      <a:ln w="9525" cap="flat" cmpd="sng" algn="ctr">
+        <a:solidFill>
+          <a:schemeClr val="tx1">
+            <a:lumMod val="65000"/>
+            <a:lumOff val="35000"/>
+          </a:schemeClr>
+        </a:solidFill>
+        <a:round/>
+      </a:ln>
+    </cs:spPr>
+  </cs:errorBar>
+  <cs:floor>
+    <cs:lnRef idx="0"/>
+    <cs:fillRef idx="0"/>
+    <cs:effectRef idx="0"/>
+    <cs:fontRef idx="minor">
+      <a:schemeClr val="tx1"/>
+    </cs:fontRef>
+    <cs:spPr>
+      <a:noFill/>
+      <a:ln>
+        <a:noFill/>
+      </a:ln>
+    </cs:spPr>
+  </cs:floor>
+  <cs:gridlineMajor>
+    <cs:lnRef idx="0"/>
+    <cs:fillRef idx="0"/>
+    <cs:effectRef idx="0"/>
+    <cs:fontRef idx="minor">
+      <a:schemeClr val="tx1"/>
+    </cs:fontRef>
+    <cs:spPr>
+      <a:ln w="9525" cap="flat" cmpd="sng" algn="ctr">
+        <a:solidFill>
+          <a:schemeClr val="tx1">
+            <a:lumMod val="15000"/>
+            <a:lumOff val="85000"/>
+          </a:schemeClr>
+        </a:solidFill>
+        <a:round/>
+      </a:ln>
+    </cs:spPr>
+  </cs:gridlineMajor>
+  <cs:gridlineMinor>
+    <cs:lnRef idx="0"/>
+    <cs:fillRef idx="0"/>
+    <cs:effectRef idx="0"/>
+    <cs:fontRef idx="minor">
+      <a:schemeClr val="tx1"/>
+    </cs:fontRef>
+    <cs:spPr>
+      <a:ln w="9525" cap="flat" cmpd="sng" algn="ctr">
+        <a:solidFill>
+          <a:schemeClr val="tx1">
+            <a:lumMod val="5000"/>
+            <a:lumOff val="95000"/>
+          </a:schemeClr>
+        </a:solidFill>
+        <a:round/>
+      </a:ln>
+    </cs:spPr>
+  </cs:gridlineMinor>
+  <cs:hiLoLine>
+    <cs:lnRef idx="0"/>
+    <cs:fillRef idx="0"/>
+    <cs:effectRef idx="0"/>
+    <cs:fontRef idx="minor">
+      <a:schemeClr val="tx1"/>
+    </cs:fontRef>
+    <cs:spPr>
+      <a:ln w="9525" cap="flat" cmpd="sng" algn="ctr">
+        <a:solidFill>
+          <a:schemeClr val="tx1">
+            <a:lumMod val="75000"/>
+            <a:lumOff val="25000"/>
+          </a:schemeClr>
+        </a:solidFill>
+        <a:round/>
+      </a:ln>
+    </cs:spPr>
+  </cs:hiLoLine>
+  <cs:leaderLine>
+    <cs:lnRef idx="0"/>
+    <cs:fillRef idx="0"/>
+    <cs:effectRef idx="0"/>
+    <cs:fontRef idx="minor">
+      <a:schemeClr val="tx1"/>
+    </cs:fontRef>
+    <cs:spPr>
+      <a:ln w="9525" cap="flat" cmpd="sng" algn="ctr">
+        <a:solidFill>
+          <a:schemeClr val="tx1">
+            <a:lumMod val="35000"/>
+            <a:lumOff val="65000"/>
+          </a:schemeClr>
+        </a:solidFill>
+        <a:round/>
+      </a:ln>
+    </cs:spPr>
+  </cs:leaderLine>
+  <cs:legend>
+    <cs:lnRef idx="0"/>
+    <cs:fillRef idx="0"/>
+    <cs:effectRef idx="0"/>
+    <cs:fontRef idx="minor">
+      <a:schemeClr val="tx1">
+        <a:lumMod val="65000"/>
+        <a:lumOff val="35000"/>
+      </a:schemeClr>
+    </cs:fontRef>
+    <cs:defRPr sz="1197" kern="1200"/>
+  </cs:legend>
+  <cs:plotArea mods="allowNoFillOverride allowNoLineOverride">
+    <cs:lnRef idx="0"/>
+    <cs:fillRef idx="0"/>
+    <cs:effectRef idx="0"/>
+    <cs:fontRef idx="minor">
+      <a:schemeClr val="tx1"/>
+    </cs:fontRef>
+  </cs:plotArea>
+  <cs:plotArea3D mods="allowNoFillOverride allowNoLineOverride">
+    <cs:lnRef idx="0"/>
+    <cs:fillRef idx="0"/>
+    <cs:effectRef idx="0"/>
+    <cs:fontRef idx="minor">
+      <a:schemeClr val="tx1"/>
+    </cs:fontRef>
+  </cs:plotArea3D>
+  <cs:seriesAxis>
+    <cs:lnRef idx="0"/>
+    <cs:fillRef idx="0"/>
+    <cs:effectRef idx="0"/>
+    <cs:fontRef idx="minor">
+      <a:schemeClr val="tx1">
+        <a:lumMod val="65000"/>
+        <a:lumOff val="35000"/>
+      </a:schemeClr>
+    </cs:fontRef>
+    <cs:defRPr sz="1197" kern="1200"/>
+  </cs:seriesAxis>
+  <cs:seriesLine>
+    <cs:lnRef idx="0"/>
+    <cs:fillRef idx="0"/>
+    <cs:effectRef idx="0"/>
+    <cs:fontRef idx="minor">
+      <a:schemeClr val="tx1"/>
+    </cs:fontRef>
+    <cs:spPr>
+      <a:ln w="9525" cap="flat" cmpd="sng" algn="ctr">
+        <a:solidFill>
+          <a:schemeClr val="tx1">
+            <a:lumMod val="35000"/>
+            <a:lumOff val="65000"/>
+          </a:schemeClr>
+        </a:solidFill>
+        <a:round/>
+      </a:ln>
+    </cs:spPr>
+  </cs:seriesLine>
+  <cs:title>
+    <cs:lnRef idx="0"/>
+    <cs:fillRef idx="0"/>
+    <cs:effectRef idx="0"/>
+    <cs:fontRef idx="minor">
+      <a:schemeClr val="tx1">
+        <a:lumMod val="65000"/>
+        <a:lumOff val="35000"/>
+      </a:schemeClr>
+    </cs:fontRef>
+    <cs:defRPr sz="1862" b="0" kern="1200" spc="0" baseline="0"/>
+  </cs:title>
+  <cs:trendline>
+    <cs:lnRef idx="0">
+      <cs:styleClr val="auto"/>
+    </cs:lnRef>
+    <cs:fillRef idx="0"/>
+    <cs:effectRef idx="0"/>
+    <cs:fontRef idx="minor">
+      <a:schemeClr val="tx1"/>
+    </cs:fontRef>
+    <cs:spPr>
+      <a:ln w="19050" cap="rnd">
+        <a:solidFill>
+          <a:schemeClr val="phClr"/>
+        </a:solidFill>
+        <a:prstDash val="sysDot"/>
+      </a:ln>
+    </cs:spPr>
+  </cs:trendline>
+  <cs:trendlineLabel>
+    <cs:lnRef idx="0"/>
+    <cs:fillRef idx="0"/>
+    <cs:effectRef idx="0"/>
+    <cs:fontRef idx="minor">
+      <a:schemeClr val="tx1">
+        <a:lumMod val="65000"/>
+        <a:lumOff val="35000"/>
+      </a:schemeClr>
+    </cs:fontRef>
+    <cs:defRPr sz="1197" kern="1200"/>
+  </cs:trendlineLabel>
+  <cs:upBar>
+    <cs:lnRef idx="0"/>
+    <cs:fillRef idx="0"/>
+    <cs:effectRef idx="0"/>
+    <cs:fontRef idx="minor">
+      <a:schemeClr val="dk1"/>
+    </cs:fontRef>
+    <cs:spPr>
+      <a:solidFill>
+        <a:schemeClr val="lt1"/>
+      </a:solidFill>
+      <a:ln w="9525">
+        <a:solidFill>
+          <a:schemeClr val="tx1">
+            <a:lumMod val="15000"/>
+            <a:lumOff val="85000"/>
+          </a:schemeClr>
+        </a:solidFill>
+      </a:ln>
+    </cs:spPr>
+  </cs:upBar>
+  <cs:valueAxis>
+    <cs:lnRef idx="0"/>
+    <cs:fillRef idx="0"/>
+    <cs:effectRef idx="0"/>
+    <cs:fontRef idx="minor">
+      <a:schemeClr val="tx1">
+        <a:lumMod val="65000"/>
+        <a:lumOff val="35000"/>
+      </a:schemeClr>
+    </cs:fontRef>
+    <cs:defRPr sz="1197" kern="1200"/>
+  </cs:valueAxis>
+  <cs:wall>
+    <cs:lnRef idx="0"/>
+    <cs:fillRef idx="0"/>
+    <cs:effectRef idx="0"/>
+    <cs:fontRef idx="minor">
+      <a:schemeClr val="tx1"/>
+    </cs:fontRef>
+    <cs:spPr>
+      <a:noFill/>
+      <a:ln>
+        <a:noFill/>
+      </a:ln>
+    </cs:spPr>
+  </cs:wall>
+</cs:chartStyle>
+</file>
+
+<file path=ppt/charts/style3.xml><?xml version="1.0" encoding="utf-8"?>
+<cs:chartStyle xmlns:cs="http://schemas.microsoft.com/office/drawing/2012/chartStyle" xmlns:a="http://schemas.openxmlformats.org/drawingml/2006/main" id="227">
+  <cs:axisTitle>
+    <cs:lnRef idx="0"/>
+    <cs:fillRef idx="0"/>
+    <cs:effectRef idx="0"/>
+    <cs:fontRef idx="minor">
+      <a:schemeClr val="tx1">
+        <a:lumMod val="65000"/>
+        <a:lumOff val="35000"/>
+      </a:schemeClr>
+    </cs:fontRef>
+    <cs:defRPr sz="1330" kern="1200"/>
+  </cs:axisTitle>
+  <cs:categoryAxis>
+    <cs:lnRef idx="0"/>
+    <cs:fillRef idx="0"/>
+    <cs:effectRef idx="0"/>
+    <cs:fontRef idx="minor">
+      <a:schemeClr val="tx1">
+        <a:lumMod val="65000"/>
+        <a:lumOff val="35000"/>
+      </a:schemeClr>
+    </cs:fontRef>
+    <cs:spPr>
+      <a:ln w="9525" cap="flat" cmpd="sng" algn="ctr">
+        <a:solidFill>
+          <a:schemeClr val="tx1">
+            <a:lumMod val="15000"/>
+            <a:lumOff val="85000"/>
+          </a:schemeClr>
+        </a:solidFill>
+        <a:round/>
+      </a:ln>
+    </cs:spPr>
+    <cs:defRPr sz="1197" kern="1200"/>
+  </cs:categoryAxis>
+  <cs:chartArea mods="allowNoFillOverride allowNoLineOverride">
+    <cs:lnRef idx="0"/>
+    <cs:fillRef idx="0"/>
+    <cs:effectRef idx="0"/>
+    <cs:fontRef idx="minor">
+      <a:schemeClr val="tx1"/>
+    </cs:fontRef>
+    <cs:spPr>
+      <a:solidFill>
+        <a:schemeClr val="bg1"/>
+      </a:solidFill>
+      <a:ln w="9525" cap="flat" cmpd="sng" algn="ctr">
+        <a:solidFill>
+          <a:schemeClr val="tx1">
+            <a:lumMod val="15000"/>
+            <a:lumOff val="85000"/>
+          </a:schemeClr>
+        </a:solidFill>
+        <a:round/>
+      </a:ln>
+    </cs:spPr>
+    <cs:defRPr sz="1330" kern="1200"/>
+  </cs:chartArea>
+  <cs:dataLabel>
+    <cs:lnRef idx="0"/>
+    <cs:fillRef idx="0"/>
+    <cs:effectRef idx="0"/>
+    <cs:fontRef idx="minor">
+      <a:schemeClr val="tx1">
+        <a:lumMod val="75000"/>
+        <a:lumOff val="25000"/>
+      </a:schemeClr>
+    </cs:fontRef>
+    <cs:defRPr sz="1197" kern="1200"/>
+  </cs:dataLabel>
+  <cs:dataLabelCallout>
+    <cs:lnRef idx="0"/>
+    <cs:fillRef idx="0"/>
+    <cs:effectRef idx="0"/>
+    <cs:fontRef idx="minor">
+      <a:schemeClr val="dk1">
+        <a:lumMod val="65000"/>
+        <a:lumOff val="35000"/>
+      </a:schemeClr>
+    </cs:fontRef>
+    <cs:spPr>
+      <a:solidFill>
+        <a:schemeClr val="lt1"/>
+      </a:solidFill>
+      <a:ln>
+        <a:solidFill>
+          <a:schemeClr val="dk1">
+            <a:lumMod val="25000"/>
+            <a:lumOff val="75000"/>
+          </a:schemeClr>
+        </a:solidFill>
+      </a:ln>
+    </cs:spPr>
+    <cs:defRPr sz="1197" kern="1200"/>
+    <cs:bodyPr rot="0" spcFirstLastPara="1" vertOverflow="clip" horzOverflow="clip" vert="horz" wrap="square" lIns="36576" tIns="18288" rIns="36576" bIns="18288" anchor="ctr" anchorCtr="1">
+      <a:spAutoFit/>
+    </cs:bodyPr>
+  </cs:dataLabelCallout>
+  <cs:dataPoint>
+    <cs:lnRef idx="0"/>
+    <cs:fillRef idx="1">
+      <cs:styleClr val="auto"/>
+    </cs:fillRef>
+    <cs:effectRef idx="0"/>
+    <cs:fontRef idx="minor">
+      <a:schemeClr val="tx1"/>
+    </cs:fontRef>
+    <cs:spPr>
+      <a:solidFill>
+        <a:schemeClr val="phClr"/>
+      </a:solidFill>
+    </cs:spPr>
+  </cs:dataPoint>
+  <cs:dataPoint3D>
+    <cs:lnRef idx="0"/>
+    <cs:fillRef idx="1">
+      <cs:styleClr val="auto"/>
+    </cs:fillRef>
+    <cs:effectRef idx="0"/>
+    <cs:fontRef idx="minor">
+      <a:schemeClr val="tx1"/>
+    </cs:fontRef>
+    <cs:spPr>
+      <a:solidFill>
+        <a:schemeClr val="phClr"/>
+      </a:solidFill>
+    </cs:spPr>
+  </cs:dataPoint3D>
+  <cs:dataPointLine>
+    <cs:lnRef idx="0">
+      <cs:styleClr val="auto"/>
+    </cs:lnRef>
+    <cs:fillRef idx="1"/>
+    <cs:effectRef idx="0"/>
+    <cs:fontRef idx="minor">
+      <a:schemeClr val="tx1"/>
+    </cs:fontRef>
+    <cs:spPr>
+      <a:ln w="28575" cap="rnd">
+        <a:solidFill>
+          <a:schemeClr val="phClr"/>
+        </a:solidFill>
+        <a:round/>
+      </a:ln>
+    </cs:spPr>
+  </cs:dataPointLine>
+  <cs:dataPointMarker>
+    <cs:lnRef idx="0">
+      <cs:styleClr val="auto"/>
+    </cs:lnRef>
+    <cs:fillRef idx="1">
+      <cs:styleClr val="auto"/>
+    </cs:fillRef>
+    <cs:effectRef idx="0"/>
+    <cs:fontRef idx="minor">
+      <a:schemeClr val="tx1"/>
+    </cs:fontRef>
+    <cs:spPr>
+      <a:solidFill>
+        <a:schemeClr val="phClr"/>
+      </a:solidFill>
+      <a:ln w="9525">
+        <a:solidFill>
+          <a:schemeClr val="phClr"/>
+        </a:solidFill>
+      </a:ln>
+    </cs:spPr>
+  </cs:dataPointMarker>
+  <cs:dataPointMarkerLayout symbol="circle" size="5"/>
+  <cs:dataPointWireframe>
+    <cs:lnRef idx="0">
+      <cs:styleClr val="auto"/>
+    </cs:lnRef>
+    <cs:fillRef idx="1"/>
+    <cs:effectRef idx="0"/>
+    <cs:fontRef idx="minor">
+      <a:schemeClr val="tx1"/>
+    </cs:fontRef>
+    <cs:spPr>
+      <a:ln w="9525" cap="rnd">
+        <a:solidFill>
+          <a:schemeClr val="phClr"/>
+        </a:solidFill>
+        <a:round/>
+      </a:ln>
+    </cs:spPr>
+  </cs:dataPointWireframe>
+  <cs:dataTable>
+    <cs:lnRef idx="0"/>
+    <cs:fillRef idx="0"/>
+    <cs:effectRef idx="0"/>
+    <cs:fontRef idx="minor">
+      <a:schemeClr val="tx1">
+        <a:lumMod val="65000"/>
+        <a:lumOff val="35000"/>
+      </a:schemeClr>
+    </cs:fontRef>
+    <cs:spPr>
+      <a:noFill/>
+      <a:ln w="9525" cap="flat" cmpd="sng" algn="ctr">
+        <a:solidFill>
+          <a:schemeClr val="tx1">
+            <a:lumMod val="15000"/>
+            <a:lumOff val="85000"/>
+          </a:schemeClr>
+        </a:solidFill>
+        <a:round/>
+      </a:ln>
+    </cs:spPr>
+    <cs:defRPr sz="1197" kern="1200"/>
+  </cs:dataTable>
+  <cs:downBar>
+    <cs:lnRef idx="0"/>
+    <cs:fillRef idx="0"/>
+    <cs:effectRef idx="0"/>
+    <cs:fontRef idx="minor">
+      <a:schemeClr val="dk1"/>
+    </cs:fontRef>
+    <cs:spPr>
+      <a:solidFill>
+        <a:schemeClr val="dk1">
+          <a:lumMod val="65000"/>
+          <a:lumOff val="35000"/>
+        </a:schemeClr>
+      </a:solidFill>
+      <a:ln w="9525">
+        <a:solidFill>
+          <a:schemeClr val="tx1">
+            <a:lumMod val="65000"/>
+            <a:lumOff val="35000"/>
+          </a:schemeClr>
+        </a:solidFill>
+      </a:ln>
+    </cs:spPr>
+  </cs:downBar>
+  <cs:dropLine>
+    <cs:lnRef idx="0"/>
+    <cs:fillRef idx="0"/>
+    <cs:effectRef idx="0"/>
+    <cs:fontRef idx="minor">
+      <a:schemeClr val="tx1"/>
+    </cs:fontRef>
+    <cs:spPr>
+      <a:ln w="9525" cap="flat" cmpd="sng" algn="ctr">
+        <a:solidFill>
+          <a:schemeClr val="tx1">
+            <a:lumMod val="35000"/>
+            <a:lumOff val="65000"/>
+          </a:schemeClr>
+        </a:solidFill>
+        <a:round/>
+      </a:ln>
+    </cs:spPr>
+  </cs:dropLine>
+  <cs:errorBar>
+    <cs:lnRef idx="0"/>
+    <cs:fillRef idx="0"/>
+    <cs:effectRef idx="0"/>
+    <cs:fontRef idx="minor">
+      <a:schemeClr val="tx1"/>
+    </cs:fontRef>
+    <cs:spPr>
+      <a:ln w="9525" cap="flat" cmpd="sng" algn="ctr">
+        <a:solidFill>
+          <a:schemeClr val="tx1">
+            <a:lumMod val="65000"/>
+            <a:lumOff val="35000"/>
+          </a:schemeClr>
+        </a:solidFill>
+        <a:round/>
+      </a:ln>
+    </cs:spPr>
+  </cs:errorBar>
+  <cs:floor>
+    <cs:lnRef idx="0"/>
+    <cs:fillRef idx="0"/>
+    <cs:effectRef idx="0"/>
+    <cs:fontRef idx="minor">
+      <a:schemeClr val="tx1"/>
+    </cs:fontRef>
+    <cs:spPr>
+      <a:noFill/>
+      <a:ln>
+        <a:noFill/>
+      </a:ln>
+    </cs:spPr>
+  </cs:floor>
+  <cs:gridlineMajor>
+    <cs:lnRef idx="0"/>
+    <cs:fillRef idx="0"/>
+    <cs:effectRef idx="0"/>
+    <cs:fontRef idx="minor">
+      <a:schemeClr val="tx1"/>
+    </cs:fontRef>
+    <cs:spPr>
+      <a:ln w="9525" cap="flat" cmpd="sng" algn="ctr">
+        <a:solidFill>
+          <a:schemeClr val="tx1">
+            <a:lumMod val="15000"/>
+            <a:lumOff val="85000"/>
+          </a:schemeClr>
+        </a:solidFill>
+        <a:round/>
+      </a:ln>
+    </cs:spPr>
+  </cs:gridlineMajor>
+  <cs:gridlineMinor>
+    <cs:lnRef idx="0"/>
+    <cs:fillRef idx="0"/>
+    <cs:effectRef idx="0"/>
+    <cs:fontRef idx="minor">
+      <a:schemeClr val="tx1"/>
+    </cs:fontRef>
+    <cs:spPr>
+      <a:ln w="9525" cap="flat" cmpd="sng" algn="ctr">
+        <a:solidFill>
+          <a:schemeClr val="tx1">
+            <a:lumMod val="5000"/>
+            <a:lumOff val="95000"/>
+          </a:schemeClr>
+        </a:solidFill>
+        <a:round/>
+      </a:ln>
+    </cs:spPr>
+  </cs:gridlineMinor>
+  <cs:hiLoLine>
+    <cs:lnRef idx="0"/>
+    <cs:fillRef idx="0"/>
+    <cs:effectRef idx="0"/>
+    <cs:fontRef idx="minor">
+      <a:schemeClr val="tx1"/>
+    </cs:fontRef>
+    <cs:spPr>
+      <a:ln w="9525" cap="flat" cmpd="sng" algn="ctr">
+        <a:solidFill>
+          <a:schemeClr val="tx1">
+            <a:lumMod val="75000"/>
+            <a:lumOff val="25000"/>
+          </a:schemeClr>
+        </a:solidFill>
+        <a:round/>
+      </a:ln>
+    </cs:spPr>
+  </cs:hiLoLine>
+  <cs:leaderLine>
+    <cs:lnRef idx="0"/>
+    <cs:fillRef idx="0"/>
+    <cs:effectRef idx="0"/>
+    <cs:fontRef idx="minor">
+      <a:schemeClr val="tx1"/>
+    </cs:fontRef>
+    <cs:spPr>
+      <a:ln w="9525" cap="flat" cmpd="sng" algn="ctr">
+        <a:solidFill>
+          <a:schemeClr val="tx1">
+            <a:lumMod val="35000"/>
+            <a:lumOff val="65000"/>
+          </a:schemeClr>
+        </a:solidFill>
+        <a:round/>
+      </a:ln>
+    </cs:spPr>
+  </cs:leaderLine>
+  <cs:legend>
+    <cs:lnRef idx="0"/>
+    <cs:fillRef idx="0"/>
+    <cs:effectRef idx="0"/>
+    <cs:fontRef idx="minor">
+      <a:schemeClr val="tx1">
+        <a:lumMod val="65000"/>
+        <a:lumOff val="35000"/>
+      </a:schemeClr>
+    </cs:fontRef>
+    <cs:defRPr sz="1197" kern="1200"/>
+  </cs:legend>
+  <cs:plotArea mods="allowNoFillOverride allowNoLineOverride">
+    <cs:lnRef idx="0"/>
+    <cs:fillRef idx="0"/>
+    <cs:effectRef idx="0"/>
+    <cs:fontRef idx="minor">
+      <a:schemeClr val="tx1"/>
+    </cs:fontRef>
+  </cs:plotArea>
+  <cs:plotArea3D mods="allowNoFillOverride allowNoLineOverride">
+    <cs:lnRef idx="0"/>
+    <cs:fillRef idx="0"/>
+    <cs:effectRef idx="0"/>
+    <cs:fontRef idx="minor">
+      <a:schemeClr val="tx1"/>
+    </cs:fontRef>
+  </cs:plotArea3D>
+  <cs:seriesAxis>
+    <cs:lnRef idx="0"/>
+    <cs:fillRef idx="0"/>
+    <cs:effectRef idx="0"/>
+    <cs:fontRef idx="minor">
+      <a:schemeClr val="tx1">
+        <a:lumMod val="65000"/>
+        <a:lumOff val="35000"/>
+      </a:schemeClr>
+    </cs:fontRef>
+    <cs:defRPr sz="1197" kern="1200"/>
+  </cs:seriesAxis>
+  <cs:seriesLine>
+    <cs:lnRef idx="0"/>
+    <cs:fillRef idx="0"/>
+    <cs:effectRef idx="0"/>
+    <cs:fontRef idx="minor">
+      <a:schemeClr val="tx1"/>
+    </cs:fontRef>
+    <cs:spPr>
+      <a:ln w="9525" cap="flat" cmpd="sng" algn="ctr">
+        <a:solidFill>
+          <a:schemeClr val="tx1">
+            <a:lumMod val="35000"/>
+            <a:lumOff val="65000"/>
+          </a:schemeClr>
+        </a:solidFill>
+        <a:round/>
+      </a:ln>
+    </cs:spPr>
+  </cs:seriesLine>
+  <cs:title>
+    <cs:lnRef idx="0"/>
+    <cs:fillRef idx="0"/>
+    <cs:effectRef idx="0"/>
+    <cs:fontRef idx="minor">
+      <a:schemeClr val="tx1">
+        <a:lumMod val="65000"/>
+        <a:lumOff val="35000"/>
+      </a:schemeClr>
+    </cs:fontRef>
+    <cs:defRPr sz="1862" b="0" kern="1200" spc="0" baseline="0"/>
+  </cs:title>
+  <cs:trendline>
+    <cs:lnRef idx="0">
+      <cs:styleClr val="auto"/>
+    </cs:lnRef>
+    <cs:fillRef idx="0"/>
+    <cs:effectRef idx="0"/>
+    <cs:fontRef idx="minor">
+      <a:schemeClr val="tx1"/>
+    </cs:fontRef>
+    <cs:spPr>
+      <a:ln w="19050" cap="rnd">
+        <a:solidFill>
+          <a:schemeClr val="phClr"/>
+        </a:solidFill>
+        <a:prstDash val="sysDot"/>
+      </a:ln>
+    </cs:spPr>
+  </cs:trendline>
+  <cs:trendlineLabel>
+    <cs:lnRef idx="0"/>
+    <cs:fillRef idx="0"/>
+    <cs:effectRef idx="0"/>
+    <cs:fontRef idx="minor">
+      <a:schemeClr val="tx1">
+        <a:lumMod val="65000"/>
+        <a:lumOff val="35000"/>
+      </a:schemeClr>
+    </cs:fontRef>
+    <cs:defRPr sz="1197" kern="1200"/>
+  </cs:trendlineLabel>
+  <cs:upBar>
+    <cs:lnRef idx="0"/>
+    <cs:fillRef idx="0"/>
+    <cs:effectRef idx="0"/>
+    <cs:fontRef idx="minor">
+      <a:schemeClr val="dk1"/>
+    </cs:fontRef>
+    <cs:spPr>
+      <a:solidFill>
+        <a:schemeClr val="lt1"/>
+      </a:solidFill>
+      <a:ln w="9525">
+        <a:solidFill>
+          <a:schemeClr val="tx1">
+            <a:lumMod val="15000"/>
+            <a:lumOff val="85000"/>
+          </a:schemeClr>
+        </a:solidFill>
+      </a:ln>
+    </cs:spPr>
+  </cs:upBar>
+  <cs:valueAxis>
+    <cs:lnRef idx="0"/>
+    <cs:fillRef idx="0"/>
+    <cs:effectRef idx="0"/>
+    <cs:fontRef idx="minor">
+      <a:schemeClr val="tx1">
+        <a:lumMod val="65000"/>
+        <a:lumOff val="35000"/>
+      </a:schemeClr>
+    </cs:fontRef>
+    <cs:defRPr sz="1197" kern="1200"/>
+  </cs:valueAxis>
+  <cs:wall>
+    <cs:lnRef idx="0"/>
+    <cs:fillRef idx="0"/>
+    <cs:effectRef idx="0"/>
+    <cs:fontRef idx="minor">
+      <a:schemeClr val="tx1"/>
+    </cs:fontRef>
+    <cs:spPr>
+      <a:noFill/>
+      <a:ln>
+        <a:noFill/>
+      </a:ln>
+    </cs:spPr>
+  </cs:wall>
+</cs:chartStyle>
+</file>
+
+<file path=ppt/charts/style4.xml><?xml version="1.0" encoding="utf-8"?>
+<cs:chartStyle xmlns:cs="http://schemas.microsoft.com/office/drawing/2012/chartStyle" xmlns:a="http://schemas.openxmlformats.org/drawingml/2006/main" id="227">
+  <cs:axisTitle>
+    <cs:lnRef idx="0"/>
+    <cs:fillRef idx="0"/>
+    <cs:effectRef idx="0"/>
+    <cs:fontRef idx="minor">
+      <a:schemeClr val="tx1">
+        <a:lumMod val="65000"/>
+        <a:lumOff val="35000"/>
+      </a:schemeClr>
+    </cs:fontRef>
+    <cs:defRPr sz="1330" kern="1200"/>
+  </cs:axisTitle>
+  <cs:categoryAxis>
+    <cs:lnRef idx="0"/>
+    <cs:fillRef idx="0"/>
+    <cs:effectRef idx="0"/>
+    <cs:fontRef idx="minor">
+      <a:schemeClr val="tx1">
+        <a:lumMod val="65000"/>
+        <a:lumOff val="35000"/>
+      </a:schemeClr>
+    </cs:fontRef>
+    <cs:spPr>
+      <a:ln w="9525" cap="flat" cmpd="sng" algn="ctr">
+        <a:solidFill>
+          <a:schemeClr val="tx1">
+            <a:lumMod val="15000"/>
+            <a:lumOff val="85000"/>
+          </a:schemeClr>
+        </a:solidFill>
+        <a:round/>
+      </a:ln>
+    </cs:spPr>
+    <cs:defRPr sz="1197" kern="1200"/>
+  </cs:categoryAxis>
+  <cs:chartArea mods="allowNoFillOverride allowNoLineOverride">
+    <cs:lnRef idx="0"/>
+    <cs:fillRef idx="0"/>
+    <cs:effectRef idx="0"/>
+    <cs:fontRef idx="minor">
+      <a:schemeClr val="tx1"/>
+    </cs:fontRef>
+    <cs:spPr>
+      <a:solidFill>
+        <a:schemeClr val="bg1"/>
+      </a:solidFill>
+      <a:ln w="9525" cap="flat" cmpd="sng" algn="ctr">
+        <a:solidFill>
+          <a:schemeClr val="tx1">
+            <a:lumMod val="15000"/>
+            <a:lumOff val="85000"/>
+          </a:schemeClr>
+        </a:solidFill>
+        <a:round/>
+      </a:ln>
+    </cs:spPr>
+    <cs:defRPr sz="1330" kern="1200"/>
+  </cs:chartArea>
+  <cs:dataLabel>
+    <cs:lnRef idx="0"/>
+    <cs:fillRef idx="0"/>
+    <cs:effectRef idx="0"/>
+    <cs:fontRef idx="minor">
+      <a:schemeClr val="tx1">
+        <a:lumMod val="75000"/>
+        <a:lumOff val="25000"/>
+      </a:schemeClr>
+    </cs:fontRef>
+    <cs:defRPr sz="1197" kern="1200"/>
+  </cs:dataLabel>
+  <cs:dataLabelCallout>
+    <cs:lnRef idx="0"/>
+    <cs:fillRef idx="0"/>
+    <cs:effectRef idx="0"/>
+    <cs:fontRef idx="minor">
+      <a:schemeClr val="dk1">
+        <a:lumMod val="65000"/>
+        <a:lumOff val="35000"/>
+      </a:schemeClr>
+    </cs:fontRef>
+    <cs:spPr>
+      <a:solidFill>
+        <a:schemeClr val="lt1"/>
+      </a:solidFill>
+      <a:ln>
+        <a:solidFill>
+          <a:schemeClr val="dk1">
+            <a:lumMod val="25000"/>
+            <a:lumOff val="75000"/>
+          </a:schemeClr>
+        </a:solidFill>
+      </a:ln>
+    </cs:spPr>
+    <cs:defRPr sz="1197" kern="1200"/>
+    <cs:bodyPr rot="0" spcFirstLastPara="1" vertOverflow="clip" horzOverflow="clip" vert="horz" wrap="square" lIns="36576" tIns="18288" rIns="36576" bIns="18288" anchor="ctr" anchorCtr="1">
+      <a:spAutoFit/>
+    </cs:bodyPr>
+  </cs:dataLabelCallout>
+  <cs:dataPoint>
+    <cs:lnRef idx="0"/>
+    <cs:fillRef idx="1">
+      <cs:styleClr val="auto"/>
+    </cs:fillRef>
+    <cs:effectRef idx="0"/>
+    <cs:fontRef idx="minor">
+      <a:schemeClr val="tx1"/>
+    </cs:fontRef>
+    <cs:spPr>
+      <a:solidFill>
+        <a:schemeClr val="phClr"/>
+      </a:solidFill>
+    </cs:spPr>
+  </cs:dataPoint>
+  <cs:dataPoint3D>
+    <cs:lnRef idx="0"/>
+    <cs:fillRef idx="1">
+      <cs:styleClr val="auto"/>
+    </cs:fillRef>
+    <cs:effectRef idx="0"/>
+    <cs:fontRef idx="minor">
+      <a:schemeClr val="tx1"/>
+    </cs:fontRef>
+    <cs:spPr>
+      <a:solidFill>
+        <a:schemeClr val="phClr"/>
+      </a:solidFill>
+    </cs:spPr>
+  </cs:dataPoint3D>
+  <cs:dataPointLine>
+    <cs:lnRef idx="0">
+      <cs:styleClr val="auto"/>
+    </cs:lnRef>
+    <cs:fillRef idx="1"/>
+    <cs:effectRef idx="0"/>
+    <cs:fontRef idx="minor">
+      <a:schemeClr val="tx1"/>
+    </cs:fontRef>
+    <cs:spPr>
+      <a:ln w="28575" cap="rnd">
+        <a:solidFill>
+          <a:schemeClr val="phClr"/>
+        </a:solidFill>
+        <a:round/>
+      </a:ln>
+    </cs:spPr>
+  </cs:dataPointLine>
+  <cs:dataPointMarker>
+    <cs:lnRef idx="0">
+      <cs:styleClr val="auto"/>
+    </cs:lnRef>
+    <cs:fillRef idx="1">
+      <cs:styleClr val="auto"/>
+    </cs:fillRef>
+    <cs:effectRef idx="0"/>
+    <cs:fontRef idx="minor">
+      <a:schemeClr val="tx1"/>
+    </cs:fontRef>
+    <cs:spPr>
+      <a:solidFill>
+        <a:schemeClr val="phClr"/>
+      </a:solidFill>
+      <a:ln w="9525">
+        <a:solidFill>
+          <a:schemeClr val="phClr"/>
+        </a:solidFill>
+      </a:ln>
+    </cs:spPr>
+  </cs:dataPointMarker>
+  <cs:dataPointMarkerLayout symbol="circle" size="5"/>
+  <cs:dataPointWireframe>
+    <cs:lnRef idx="0">
+      <cs:styleClr val="auto"/>
+    </cs:lnRef>
+    <cs:fillRef idx="1"/>
+    <cs:effectRef idx="0"/>
+    <cs:fontRef idx="minor">
+      <a:schemeClr val="tx1"/>
+    </cs:fontRef>
+    <cs:spPr>
+      <a:ln w="9525" cap="rnd">
+        <a:solidFill>
+          <a:schemeClr val="phClr"/>
+        </a:solidFill>
+        <a:round/>
+      </a:ln>
+    </cs:spPr>
+  </cs:dataPointWireframe>
+  <cs:dataTable>
+    <cs:lnRef idx="0"/>
+    <cs:fillRef idx="0"/>
+    <cs:effectRef idx="0"/>
+    <cs:fontRef idx="minor">
+      <a:schemeClr val="tx1">
+        <a:lumMod val="65000"/>
+        <a:lumOff val="35000"/>
+      </a:schemeClr>
+    </cs:fontRef>
+    <cs:spPr>
+      <a:noFill/>
+      <a:ln w="9525" cap="flat" cmpd="sng" algn="ctr">
+        <a:solidFill>
+          <a:schemeClr val="tx1">
+            <a:lumMod val="15000"/>
+            <a:lumOff val="85000"/>
+          </a:schemeClr>
+        </a:solidFill>
+        <a:round/>
+      </a:ln>
+    </cs:spPr>
+    <cs:defRPr sz="1197" kern="1200"/>
+  </cs:dataTable>
+  <cs:downBar>
+    <cs:lnRef idx="0"/>
+    <cs:fillRef idx="0"/>
+    <cs:effectRef idx="0"/>
+    <cs:fontRef idx="minor">
+      <a:schemeClr val="dk1"/>
+    </cs:fontRef>
+    <cs:spPr>
+      <a:solidFill>
+        <a:schemeClr val="dk1">
+          <a:lumMod val="65000"/>
+          <a:lumOff val="35000"/>
+        </a:schemeClr>
+      </a:solidFill>
+      <a:ln w="9525">
+        <a:solidFill>
+          <a:schemeClr val="tx1">
+            <a:lumMod val="65000"/>
+            <a:lumOff val="35000"/>
+          </a:schemeClr>
+        </a:solidFill>
+      </a:ln>
+    </cs:spPr>
+  </cs:downBar>
+  <cs:dropLine>
+    <cs:lnRef idx="0"/>
+    <cs:fillRef idx="0"/>
+    <cs:effectRef idx="0"/>
+    <cs:fontRef idx="minor">
+      <a:schemeClr val="tx1"/>
+    </cs:fontRef>
+    <cs:spPr>
+      <a:ln w="9525" cap="flat" cmpd="sng" algn="ctr">
+        <a:solidFill>
+          <a:schemeClr val="tx1">
+            <a:lumMod val="35000"/>
+            <a:lumOff val="65000"/>
+          </a:schemeClr>
+        </a:solidFill>
+        <a:round/>
+      </a:ln>
+    </cs:spPr>
+  </cs:dropLine>
+  <cs:errorBar>
+    <cs:lnRef idx="0"/>
+    <cs:fillRef idx="0"/>
+    <cs:effectRef idx="0"/>
+    <cs:fontRef idx="minor">
+      <a:schemeClr val="tx1"/>
+    </cs:fontRef>
+    <cs:spPr>
+      <a:ln w="9525" cap="flat" cmpd="sng" algn="ctr">
+        <a:solidFill>
+          <a:schemeClr val="tx1">
+            <a:lumMod val="65000"/>
+            <a:lumOff val="35000"/>
+          </a:schemeClr>
+        </a:solidFill>
+        <a:round/>
+      </a:ln>
+    </cs:spPr>
+  </cs:errorBar>
+  <cs:floor>
+    <cs:lnRef idx="0"/>
+    <cs:fillRef idx="0"/>
+    <cs:effectRef idx="0"/>
+    <cs:fontRef idx="minor">
+      <a:schemeClr val="tx1"/>
+    </cs:fontRef>
+    <cs:spPr>
+      <a:noFill/>
+      <a:ln>
+        <a:noFill/>
+      </a:ln>
+    </cs:spPr>
+  </cs:floor>
+  <cs:gridlineMajor>
+    <cs:lnRef idx="0"/>
+    <cs:fillRef idx="0"/>
+    <cs:effectRef idx="0"/>
+    <cs:fontRef idx="minor">
+      <a:schemeClr val="tx1"/>
+    </cs:fontRef>
+    <cs:spPr>
+      <a:ln w="9525" cap="flat" cmpd="sng" algn="ctr">
+        <a:solidFill>
+          <a:schemeClr val="tx1">
+            <a:lumMod val="15000"/>
+            <a:lumOff val="85000"/>
+          </a:schemeClr>
+        </a:solidFill>
+        <a:round/>
+      </a:ln>
+    </cs:spPr>
+  </cs:gridlineMajor>
+  <cs:gridlineMinor>
+    <cs:lnRef idx="0"/>
+    <cs:fillRef idx="0"/>
+    <cs:effectRef idx="0"/>
+    <cs:fontRef idx="minor">
+      <a:schemeClr val="tx1"/>
+    </cs:fontRef>
+    <cs:spPr>
+      <a:ln w="9525" cap="flat" cmpd="sng" algn="ctr">
+        <a:solidFill>
+          <a:schemeClr val="tx1">
+            <a:lumMod val="5000"/>
+            <a:lumOff val="95000"/>
+          </a:schemeClr>
+        </a:solidFill>
+        <a:round/>
+      </a:ln>
+    </cs:spPr>
+  </cs:gridlineMinor>
+  <cs:hiLoLine>
+    <cs:lnRef idx="0"/>
+    <cs:fillRef idx="0"/>
+    <cs:effectRef idx="0"/>
+    <cs:fontRef idx="minor">
+      <a:schemeClr val="tx1"/>
+    </cs:fontRef>
+    <cs:spPr>
+      <a:ln w="9525" cap="flat" cmpd="sng" algn="ctr">
+        <a:solidFill>
+          <a:schemeClr val="tx1">
+            <a:lumMod val="75000"/>
+            <a:lumOff val="25000"/>
+          </a:schemeClr>
+        </a:solidFill>
+        <a:round/>
+      </a:ln>
+    </cs:spPr>
+  </cs:hiLoLine>
+  <cs:leaderLine>
+    <cs:lnRef idx="0"/>
+    <cs:fillRef idx="0"/>
+    <cs:effectRef idx="0"/>
+    <cs:fontRef idx="minor">
+      <a:schemeClr val="tx1"/>
+    </cs:fontRef>
+    <cs:spPr>
+      <a:ln w="9525" cap="flat" cmpd="sng" algn="ctr">
+        <a:solidFill>
+          <a:schemeClr val="tx1">
+            <a:lumMod val="35000"/>
+            <a:lumOff val="65000"/>
+          </a:schemeClr>
+        </a:solidFill>
+        <a:round/>
+      </a:ln>
+    </cs:spPr>
+  </cs:leaderLine>
+  <cs:legend>
+    <cs:lnRef idx="0"/>
+    <cs:fillRef idx="0"/>
+    <cs:effectRef idx="0"/>
+    <cs:fontRef idx="minor">
+      <a:schemeClr val="tx1">
+        <a:lumMod val="65000"/>
+        <a:lumOff val="35000"/>
+      </a:schemeClr>
+    </cs:fontRef>
+    <cs:defRPr sz="1197" kern="1200"/>
+  </cs:legend>
+  <cs:plotArea mods="allowNoFillOverride allowNoLineOverride">
+    <cs:lnRef idx="0"/>
+    <cs:fillRef idx="0"/>
+    <cs:effectRef idx="0"/>
+    <cs:fontRef idx="minor">
+      <a:schemeClr val="tx1"/>
+    </cs:fontRef>
+  </cs:plotArea>
+  <cs:plotArea3D mods="allowNoFillOverride allowNoLineOverride">
+    <cs:lnRef idx="0"/>
+    <cs:fillRef idx="0"/>
+    <cs:effectRef idx="0"/>
+    <cs:fontRef idx="minor">
+      <a:schemeClr val="tx1"/>
+    </cs:fontRef>
+  </cs:plotArea3D>
+  <cs:seriesAxis>
+    <cs:lnRef idx="0"/>
+    <cs:fillRef idx="0"/>
+    <cs:effectRef idx="0"/>
+    <cs:fontRef idx="minor">
+      <a:schemeClr val="tx1">
+        <a:lumMod val="65000"/>
+        <a:lumOff val="35000"/>
+      </a:schemeClr>
+    </cs:fontRef>
+    <cs:defRPr sz="1197" kern="1200"/>
+  </cs:seriesAxis>
+  <cs:seriesLine>
+    <cs:lnRef idx="0"/>
+    <cs:fillRef idx="0"/>
+    <cs:effectRef idx="0"/>
+    <cs:fontRef idx="minor">
+      <a:schemeClr val="tx1"/>
+    </cs:fontRef>
+    <cs:spPr>
+      <a:ln w="9525" cap="flat" cmpd="sng" algn="ctr">
+        <a:solidFill>
+          <a:schemeClr val="tx1">
+            <a:lumMod val="35000"/>
+            <a:lumOff val="65000"/>
+          </a:schemeClr>
+        </a:solidFill>
+        <a:round/>
+      </a:ln>
+    </cs:spPr>
+  </cs:seriesLine>
+  <cs:title>
+    <cs:lnRef idx="0"/>
+    <cs:fillRef idx="0"/>
+    <cs:effectRef idx="0"/>
+    <cs:fontRef idx="minor">
+      <a:schemeClr val="tx1">
+        <a:lumMod val="65000"/>
+        <a:lumOff val="35000"/>
+      </a:schemeClr>
+    </cs:fontRef>
+    <cs:defRPr sz="1862" b="0" kern="1200" spc="0" baseline="0"/>
+  </cs:title>
+  <cs:trendline>
+    <cs:lnRef idx="0">
+      <cs:styleClr val="auto"/>
+    </cs:lnRef>
+    <cs:fillRef idx="0"/>
+    <cs:effectRef idx="0"/>
+    <cs:fontRef idx="minor">
+      <a:schemeClr val="tx1"/>
+    </cs:fontRef>
+    <cs:spPr>
+      <a:ln w="19050" cap="rnd">
+        <a:solidFill>
+          <a:schemeClr val="phClr"/>
+        </a:solidFill>
+        <a:prstDash val="sysDot"/>
+      </a:ln>
+    </cs:spPr>
+  </cs:trendline>
+  <cs:trendlineLabel>
+    <cs:lnRef idx="0"/>
+    <cs:fillRef idx="0"/>
+    <cs:effectRef idx="0"/>
+    <cs:fontRef idx="minor">
+      <a:schemeClr val="tx1">
+        <a:lumMod val="65000"/>
+        <a:lumOff val="35000"/>
+      </a:schemeClr>
+    </cs:fontRef>
+    <cs:defRPr sz="1197" kern="1200"/>
+  </cs:trendlineLabel>
+  <cs:upBar>
+    <cs:lnRef idx="0"/>
+    <cs:fillRef idx="0"/>
+    <cs:effectRef idx="0"/>
+    <cs:fontRef idx="minor">
+      <a:schemeClr val="dk1"/>
+    </cs:fontRef>
+    <cs:spPr>
+      <a:solidFill>
+        <a:schemeClr val="lt1"/>
+      </a:solidFill>
+      <a:ln w="9525">
+        <a:solidFill>
+          <a:schemeClr val="tx1">
+            <a:lumMod val="15000"/>
+            <a:lumOff val="85000"/>
+          </a:schemeClr>
+        </a:solidFill>
+      </a:ln>
+    </cs:spPr>
+  </cs:upBar>
+  <cs:valueAxis>
+    <cs:lnRef idx="0"/>
+    <cs:fillRef idx="0"/>
+    <cs:effectRef idx="0"/>
+    <cs:fontRef idx="minor">
+      <a:schemeClr val="tx1">
+        <a:lumMod val="65000"/>
+        <a:lumOff val="35000"/>
+      </a:schemeClr>
+    </cs:fontRef>
+    <cs:defRPr sz="1197" kern="1200"/>
+  </cs:valueAxis>
+  <cs:wall>
+    <cs:lnRef idx="0"/>
+    <cs:fillRef idx="0"/>
+    <cs:effectRef idx="0"/>
+    <cs:fontRef idx="minor">
+      <a:schemeClr val="tx1"/>
+    </cs:fontRef>
+    <cs:spPr>
+      <a:noFill/>
+      <a:ln>
+        <a:noFill/>
+      </a:ln>
+    </cs:spPr>
+  </cs:wall>
+</cs:chartStyle>
+</file>
+
+<file path=ppt/charts/style5.xml><?xml version="1.0" encoding="utf-8"?>
+<cs:chartStyle xmlns:cs="http://schemas.microsoft.com/office/drawing/2012/chartStyle" xmlns:a="http://schemas.openxmlformats.org/drawingml/2006/main" id="227">
+  <cs:axisTitle>
+    <cs:lnRef idx="0"/>
+    <cs:fillRef idx="0"/>
+    <cs:effectRef idx="0"/>
+    <cs:fontRef idx="minor">
+      <a:schemeClr val="tx1">
+        <a:lumMod val="65000"/>
+        <a:lumOff val="35000"/>
+      </a:schemeClr>
+    </cs:fontRef>
+    <cs:defRPr sz="1330" kern="1200"/>
+  </cs:axisTitle>
+  <cs:categoryAxis>
+    <cs:lnRef idx="0"/>
+    <cs:fillRef idx="0"/>
+    <cs:effectRef idx="0"/>
+    <cs:fontRef idx="minor">
+      <a:schemeClr val="tx1">
+        <a:lumMod val="65000"/>
+        <a:lumOff val="35000"/>
+      </a:schemeClr>
+    </cs:fontRef>
+    <cs:spPr>
+      <a:ln w="9525" cap="flat" cmpd="sng" algn="ctr">
+        <a:solidFill>
+          <a:schemeClr val="tx1">
+            <a:lumMod val="15000"/>
+            <a:lumOff val="85000"/>
+          </a:schemeClr>
+        </a:solidFill>
+        <a:round/>
+      </a:ln>
+    </cs:spPr>
+    <cs:defRPr sz="1197" kern="1200"/>
+  </cs:categoryAxis>
+  <cs:chartArea mods="allowNoFillOverride allowNoLineOverride">
+    <cs:lnRef idx="0"/>
+    <cs:fillRef idx="0"/>
+    <cs:effectRef idx="0"/>
+    <cs:fontRef idx="minor">
+      <a:schemeClr val="tx1"/>
+    </cs:fontRef>
+    <cs:spPr>
+      <a:solidFill>
+        <a:schemeClr val="bg1"/>
+      </a:solidFill>
+      <a:ln w="9525" cap="flat" cmpd="sng" algn="ctr">
+        <a:solidFill>
+          <a:schemeClr val="tx1">
+            <a:lumMod val="15000"/>
+            <a:lumOff val="85000"/>
+          </a:schemeClr>
+        </a:solidFill>
+        <a:round/>
+      </a:ln>
+    </cs:spPr>
+    <cs:defRPr sz="1330" kern="1200"/>
+  </cs:chartArea>
+  <cs:dataLabel>
+    <cs:lnRef idx="0"/>
+    <cs:fillRef idx="0"/>
+    <cs:effectRef idx="0"/>
+    <cs:fontRef idx="minor">
+      <a:schemeClr val="tx1">
+        <a:lumMod val="75000"/>
+        <a:lumOff val="25000"/>
+      </a:schemeClr>
+    </cs:fontRef>
+    <cs:defRPr sz="1197" kern="1200"/>
+  </cs:dataLabel>
+  <cs:dataLabelCallout>
+    <cs:lnRef idx="0"/>
+    <cs:fillRef idx="0"/>
+    <cs:effectRef idx="0"/>
+    <cs:fontRef idx="minor">
+      <a:schemeClr val="dk1">
+        <a:lumMod val="65000"/>
+        <a:lumOff val="35000"/>
+      </a:schemeClr>
+    </cs:fontRef>
+    <cs:spPr>
+      <a:solidFill>
+        <a:schemeClr val="lt1"/>
+      </a:solidFill>
+      <a:ln>
+        <a:solidFill>
+          <a:schemeClr val="dk1">
+            <a:lumMod val="25000"/>
+            <a:lumOff val="75000"/>
+          </a:schemeClr>
+        </a:solidFill>
+      </a:ln>
+    </cs:spPr>
+    <cs:defRPr sz="1197" kern="1200"/>
+    <cs:bodyPr rot="0" spcFirstLastPara="1" vertOverflow="clip" horzOverflow="clip" vert="horz" wrap="square" lIns="36576" tIns="18288" rIns="36576" bIns="18288" anchor="ctr" anchorCtr="1">
+      <a:spAutoFit/>
+    </cs:bodyPr>
+  </cs:dataLabelCallout>
+  <cs:dataPoint>
+    <cs:lnRef idx="0"/>
+    <cs:fillRef idx="1">
+      <cs:styleClr val="auto"/>
+    </cs:fillRef>
+    <cs:effectRef idx="0"/>
+    <cs:fontRef idx="minor">
+      <a:schemeClr val="tx1"/>
+    </cs:fontRef>
+    <cs:spPr>
+      <a:solidFill>
+        <a:schemeClr val="phClr"/>
+      </a:solidFill>
+    </cs:spPr>
+  </cs:dataPoint>
+  <cs:dataPoint3D>
+    <cs:lnRef idx="0"/>
+    <cs:fillRef idx="1">
+      <cs:styleClr val="auto"/>
+    </cs:fillRef>
+    <cs:effectRef idx="0"/>
+    <cs:fontRef idx="minor">
+      <a:schemeClr val="tx1"/>
+    </cs:fontRef>
+    <cs:spPr>
+      <a:solidFill>
+        <a:schemeClr val="phClr"/>
+      </a:solidFill>
+    </cs:spPr>
+  </cs:dataPoint3D>
+  <cs:dataPointLine>
+    <cs:lnRef idx="0">
+      <cs:styleClr val="auto"/>
+    </cs:lnRef>
+    <cs:fillRef idx="1"/>
+    <cs:effectRef idx="0"/>
+    <cs:fontRef idx="minor">
+      <a:schemeClr val="tx1"/>
+    </cs:fontRef>
+    <cs:spPr>
+      <a:ln w="28575" cap="rnd">
+        <a:solidFill>
+          <a:schemeClr val="phClr"/>
+        </a:solidFill>
+        <a:round/>
+      </a:ln>
+    </cs:spPr>
+  </cs:dataPointLine>
+  <cs:dataPointMarker>
+    <cs:lnRef idx="0">
+      <cs:styleClr val="auto"/>
+    </cs:lnRef>
+    <cs:fillRef idx="1">
+      <cs:styleClr val="auto"/>
+    </cs:fillRef>
+    <cs:effectRef idx="0"/>
+    <cs:fontRef idx="minor">
+      <a:schemeClr val="tx1"/>
+    </cs:fontRef>
+    <cs:spPr>
+      <a:solidFill>
+        <a:schemeClr val="phClr"/>
+      </a:solidFill>
+      <a:ln w="9525">
+        <a:solidFill>
+          <a:schemeClr val="phClr"/>
+        </a:solidFill>
+      </a:ln>
+    </cs:spPr>
+  </cs:dataPointMarker>
+  <cs:dataPointMarkerLayout symbol="circle" size="5"/>
+  <cs:dataPointWireframe>
+    <cs:lnRef idx="0">
+      <cs:styleClr val="auto"/>
+    </cs:lnRef>
+    <cs:fillRef idx="1"/>
+    <cs:effectRef idx="0"/>
+    <cs:fontRef idx="minor">
+      <a:schemeClr val="tx1"/>
+    </cs:fontRef>
+    <cs:spPr>
+      <a:ln w="9525" cap="rnd">
+        <a:solidFill>
+          <a:schemeClr val="phClr"/>
+        </a:solidFill>
+        <a:round/>
+      </a:ln>
+    </cs:spPr>
+  </cs:dataPointWireframe>
+  <cs:dataTable>
+    <cs:lnRef idx="0"/>
+    <cs:fillRef idx="0"/>
+    <cs:effectRef idx="0"/>
+    <cs:fontRef idx="minor">
+      <a:schemeClr val="tx1">
+        <a:lumMod val="65000"/>
+        <a:lumOff val="35000"/>
+      </a:schemeClr>
+    </cs:fontRef>
+    <cs:spPr>
+      <a:noFill/>
+      <a:ln w="9525" cap="flat" cmpd="sng" algn="ctr">
+        <a:solidFill>
+          <a:schemeClr val="tx1">
+            <a:lumMod val="15000"/>
+            <a:lumOff val="85000"/>
+          </a:schemeClr>
+        </a:solidFill>
+        <a:round/>
+      </a:ln>
+    </cs:spPr>
+    <cs:defRPr sz="1197" kern="1200"/>
+  </cs:dataTable>
+  <cs:downBar>
+    <cs:lnRef idx="0"/>
+    <cs:fillRef idx="0"/>
+    <cs:effectRef idx="0"/>
+    <cs:fontRef idx="minor">
+      <a:schemeClr val="dk1"/>
+    </cs:fontRef>
+    <cs:spPr>
+      <a:solidFill>
+        <a:schemeClr val="dk1">
+          <a:lumMod val="65000"/>
+          <a:lumOff val="35000"/>
+        </a:schemeClr>
+      </a:solidFill>
+      <a:ln w="9525">
+        <a:solidFill>
+          <a:schemeClr val="tx1">
+            <a:lumMod val="65000"/>
+            <a:lumOff val="35000"/>
+          </a:schemeClr>
+        </a:solidFill>
+      </a:ln>
+    </cs:spPr>
+  </cs:downBar>
+  <cs:dropLine>
+    <cs:lnRef idx="0"/>
+    <cs:fillRef idx="0"/>
+    <cs:effectRef idx="0"/>
+    <cs:fontRef idx="minor">
+      <a:schemeClr val="tx1"/>
+    </cs:fontRef>
+    <cs:spPr>
+      <a:ln w="9525" cap="flat" cmpd="sng" algn="ctr">
+        <a:solidFill>
+          <a:schemeClr val="tx1">
+            <a:lumMod val="35000"/>
+            <a:lumOff val="65000"/>
+          </a:schemeClr>
+        </a:solidFill>
+        <a:round/>
+      </a:ln>
+    </cs:spPr>
+  </cs:dropLine>
+  <cs:errorBar>
+    <cs:lnRef idx="0"/>
+    <cs:fillRef idx="0"/>
+    <cs:effectRef idx="0"/>
+    <cs:fontRef idx="minor">
+      <a:schemeClr val="tx1"/>
+    </cs:fontRef>
+    <cs:spPr>
+      <a:ln w="9525" cap="flat" cmpd="sng" algn="ctr">
+        <a:solidFill>
+          <a:schemeClr val="tx1">
+            <a:lumMod val="65000"/>
+            <a:lumOff val="35000"/>
+          </a:schemeClr>
+        </a:solidFill>
+        <a:round/>
+      </a:ln>
+    </cs:spPr>
+  </cs:errorBar>
+  <cs:floor>
+    <cs:lnRef idx="0"/>
+    <cs:fillRef idx="0"/>
+    <cs:effectRef idx="0"/>
+    <cs:fontRef idx="minor">
+      <a:schemeClr val="tx1"/>
+    </cs:fontRef>
+    <cs:spPr>
+      <a:noFill/>
+      <a:ln>
+        <a:noFill/>
+      </a:ln>
+    </cs:spPr>
+  </cs:floor>
+  <cs:gridlineMajor>
+    <cs:lnRef idx="0"/>
+    <cs:fillRef idx="0"/>
+    <cs:effectRef idx="0"/>
+    <cs:fontRef idx="minor">
+      <a:schemeClr val="tx1"/>
+    </cs:fontRef>
+    <cs:spPr>
+      <a:ln w="9525" cap="flat" cmpd="sng" algn="ctr">
+        <a:solidFill>
+          <a:schemeClr val="tx1">
+            <a:lumMod val="15000"/>
+            <a:lumOff val="85000"/>
+          </a:schemeClr>
+        </a:solidFill>
+        <a:round/>
+      </a:ln>
+    </cs:spPr>
+  </cs:gridlineMajor>
+  <cs:gridlineMinor>
+    <cs:lnRef idx="0"/>
+    <cs:fillRef idx="0"/>
+    <cs:effectRef idx="0"/>
+    <cs:fontRef idx="minor">
+      <a:schemeClr val="tx1"/>
+    </cs:fontRef>
+    <cs:spPr>
+      <a:ln w="9525" cap="flat" cmpd="sng" algn="ctr">
+        <a:solidFill>
+          <a:schemeClr val="tx1">
+            <a:lumMod val="5000"/>
+            <a:lumOff val="95000"/>
+          </a:schemeClr>
+        </a:solidFill>
+        <a:round/>
+      </a:ln>
+    </cs:spPr>
+  </cs:gridlineMinor>
+  <cs:hiLoLine>
+    <cs:lnRef idx="0"/>
+    <cs:fillRef idx="0"/>
+    <cs:effectRef idx="0"/>
+    <cs:fontRef idx="minor">
+      <a:schemeClr val="tx1"/>
+    </cs:fontRef>
+    <cs:spPr>
+      <a:ln w="9525" cap="flat" cmpd="sng" algn="ctr">
+        <a:solidFill>
+          <a:schemeClr val="tx1">
+            <a:lumMod val="75000"/>
+            <a:lumOff val="25000"/>
+          </a:schemeClr>
+        </a:solidFill>
+        <a:round/>
+      </a:ln>
+    </cs:spPr>
+  </cs:hiLoLine>
+  <cs:leaderLine>
+    <cs:lnRef idx="0"/>
+    <cs:fillRef idx="0"/>
+    <cs:effectRef idx="0"/>
+    <cs:fontRef idx="minor">
+      <a:schemeClr val="tx1"/>
+    </cs:fontRef>
+    <cs:spPr>
+      <a:ln w="9525" cap="flat" cmpd="sng" algn="ctr">
+        <a:solidFill>
+          <a:schemeClr val="tx1">
+            <a:lumMod val="35000"/>
+            <a:lumOff val="65000"/>
+          </a:schemeClr>
+        </a:solidFill>
+        <a:round/>
+      </a:ln>
+    </cs:spPr>
+  </cs:leaderLine>
+  <cs:legend>
+    <cs:lnRef idx="0"/>
+    <cs:fillRef idx="0"/>
+    <cs:effectRef idx="0"/>
+    <cs:fontRef idx="minor">
+      <a:schemeClr val="tx1">
+        <a:lumMod val="65000"/>
+        <a:lumOff val="35000"/>
+      </a:schemeClr>
+    </cs:fontRef>
+    <cs:defRPr sz="1197" kern="1200"/>
+  </cs:legend>
+  <cs:plotArea mods="allowNoFillOverride allowNoLineOverride">
+    <cs:lnRef idx="0"/>
+    <cs:fillRef idx="0"/>
+    <cs:effectRef idx="0"/>
+    <cs:fontRef idx="minor">
+      <a:schemeClr val="tx1"/>
+    </cs:fontRef>
+  </cs:plotArea>
+  <cs:plotArea3D mods="allowNoFillOverride allowNoLineOverride">
+    <cs:lnRef idx="0"/>
+    <cs:fillRef idx="0"/>
+    <cs:effectRef idx="0"/>
+    <cs:fontRef idx="minor">
+      <a:schemeClr val="tx1"/>
+    </cs:fontRef>
+  </cs:plotArea3D>
+  <cs:seriesAxis>
+    <cs:lnRef idx="0"/>
+    <cs:fillRef idx="0"/>
+    <cs:effectRef idx="0"/>
+    <cs:fontRef idx="minor">
+      <a:schemeClr val="tx1">
+        <a:lumMod val="65000"/>
+        <a:lumOff val="35000"/>
+      </a:schemeClr>
+    </cs:fontRef>
+    <cs:defRPr sz="1197" kern="1200"/>
+  </cs:seriesAxis>
+  <cs:seriesLine>
+    <cs:lnRef idx="0"/>
+    <cs:fillRef idx="0"/>
+    <cs:effectRef idx="0"/>
+    <cs:fontRef idx="minor">
+      <a:schemeClr val="tx1"/>
+    </cs:fontRef>
+    <cs:spPr>
+      <a:ln w="9525" cap="flat" cmpd="sng" algn="ctr">
+        <a:solidFill>
+          <a:schemeClr val="tx1">
+            <a:lumMod val="35000"/>
+            <a:lumOff val="65000"/>
+          </a:schemeClr>
+        </a:solidFill>
+        <a:round/>
+      </a:ln>
+    </cs:spPr>
+  </cs:seriesLine>
+  <cs:title>
+    <cs:lnRef idx="0"/>
+    <cs:fillRef idx="0"/>
+    <cs:effectRef idx="0"/>
+    <cs:fontRef idx="minor">
+      <a:schemeClr val="tx1">
+        <a:lumMod val="65000"/>
+        <a:lumOff val="35000"/>
+      </a:schemeClr>
+    </cs:fontRef>
+    <cs:defRPr sz="1862" b="0" kern="1200" spc="0" baseline="0"/>
+  </cs:title>
+  <cs:trendline>
+    <cs:lnRef idx="0">
+      <cs:styleClr val="auto"/>
+    </cs:lnRef>
+    <cs:fillRef idx="0"/>
+    <cs:effectRef idx="0"/>
+    <cs:fontRef idx="minor">
+      <a:schemeClr val="tx1"/>
+    </cs:fontRef>
+    <cs:spPr>
+      <a:ln w="19050" cap="rnd">
+        <a:solidFill>
+          <a:schemeClr val="phClr"/>
+        </a:solidFill>
+        <a:prstDash val="sysDot"/>
+      </a:ln>
+    </cs:spPr>
+  </cs:trendline>
+  <cs:trendlineLabel>
+    <cs:lnRef idx="0"/>
+    <cs:fillRef idx="0"/>
+    <cs:effectRef idx="0"/>
+    <cs:fontRef idx="minor">
+      <a:schemeClr val="tx1">
+        <a:lumMod val="65000"/>
+        <a:lumOff val="35000"/>
+      </a:schemeClr>
+    </cs:fontRef>
+    <cs:defRPr sz="1197" kern="1200"/>
+  </cs:trendlineLabel>
+  <cs:upBar>
+    <cs:lnRef idx="0"/>
+    <cs:fillRef idx="0"/>
+    <cs:effectRef idx="0"/>
+    <cs:fontRef idx="minor">
+      <a:schemeClr val="dk1"/>
+    </cs:fontRef>
+    <cs:spPr>
+      <a:solidFill>
+        <a:schemeClr val="lt1"/>
+      </a:solidFill>
+      <a:ln w="9525">
+        <a:solidFill>
+          <a:schemeClr val="tx1">
+            <a:lumMod val="15000"/>
+            <a:lumOff val="85000"/>
+          </a:schemeClr>
+        </a:solidFill>
+      </a:ln>
+    </cs:spPr>
+  </cs:upBar>
+  <cs:valueAxis>
+    <cs:lnRef idx="0"/>
+    <cs:fillRef idx="0"/>
+    <cs:effectRef idx="0"/>
+    <cs:fontRef idx="minor">
+      <a:schemeClr val="tx1">
+        <a:lumMod val="65000"/>
+        <a:lumOff val="35000"/>
+      </a:schemeClr>
+    </cs:fontRef>
+    <cs:defRPr sz="1197" kern="1200"/>
+  </cs:valueAxis>
+  <cs:wall>
+    <cs:lnRef idx="0"/>
+    <cs:fillRef idx="0"/>
+    <cs:effectRef idx="0"/>
+    <cs:fontRef idx="minor">
+      <a:schemeClr val="tx1"/>
+    </cs:fontRef>
+    <cs:spPr>
+      <a:noFill/>
+      <a:ln>
+        <a:noFill/>
+      </a:ln>
+    </cs:spPr>
+  </cs:wall>
+</cs:chartStyle>
+</file>
+
+<file path=ppt/charts/style6.xml><?xml version="1.0" encoding="utf-8"?>
+<cs:chartStyle xmlns:cs="http://schemas.microsoft.com/office/drawing/2012/chartStyle" xmlns:a="http://schemas.openxmlformats.org/drawingml/2006/main" id="227">
+  <cs:axisTitle>
+    <cs:lnRef idx="0"/>
+    <cs:fillRef idx="0"/>
+    <cs:effectRef idx="0"/>
+    <cs:fontRef idx="minor">
+      <a:schemeClr val="tx1">
+        <a:lumMod val="65000"/>
+        <a:lumOff val="35000"/>
+      </a:schemeClr>
+    </cs:fontRef>
+    <cs:defRPr sz="1330" kern="1200"/>
+  </cs:axisTitle>
+  <cs:categoryAxis>
+    <cs:lnRef idx="0"/>
+    <cs:fillRef idx="0"/>
+    <cs:effectRef idx="0"/>
+    <cs:fontRef idx="minor">
+      <a:schemeClr val="tx1">
+        <a:lumMod val="65000"/>
+        <a:lumOff val="35000"/>
+      </a:schemeClr>
+    </cs:fontRef>
+    <cs:spPr>
+      <a:ln w="9525" cap="flat" cmpd="sng" algn="ctr">
+        <a:solidFill>
+          <a:schemeClr val="tx1">
+            <a:lumMod val="15000"/>
+            <a:lumOff val="85000"/>
+          </a:schemeClr>
+        </a:solidFill>
+        <a:round/>
+      </a:ln>
+    </cs:spPr>
+    <cs:defRPr sz="1197" kern="1200"/>
+  </cs:categoryAxis>
+  <cs:chartArea mods="allowNoFillOverride allowNoLineOverride">
+    <cs:lnRef idx="0"/>
+    <cs:fillRef idx="0"/>
+    <cs:effectRef idx="0"/>
+    <cs:fontRef idx="minor">
+      <a:schemeClr val="tx1"/>
+    </cs:fontRef>
+    <cs:spPr>
+      <a:solidFill>
+        <a:schemeClr val="bg1"/>
+      </a:solidFill>
+      <a:ln w="9525" cap="flat" cmpd="sng" algn="ctr">
+        <a:solidFill>
+          <a:schemeClr val="tx1">
+            <a:lumMod val="15000"/>
+            <a:lumOff val="85000"/>
+          </a:schemeClr>
+        </a:solidFill>
+        <a:round/>
+      </a:ln>
+    </cs:spPr>
+    <cs:defRPr sz="1330" kern="1200"/>
+  </cs:chartArea>
+  <cs:dataLabel>
+    <cs:lnRef idx="0"/>
+    <cs:fillRef idx="0"/>
+    <cs:effectRef idx="0"/>
+    <cs:fontRef idx="minor">
+      <a:schemeClr val="tx1">
+        <a:lumMod val="75000"/>
+        <a:lumOff val="25000"/>
+      </a:schemeClr>
+    </cs:fontRef>
+    <cs:defRPr sz="1197" kern="1200"/>
+  </cs:dataLabel>
+  <cs:dataLabelCallout>
+    <cs:lnRef idx="0"/>
+    <cs:fillRef idx="0"/>
+    <cs:effectRef idx="0"/>
+    <cs:fontRef idx="minor">
+      <a:schemeClr val="dk1">
+        <a:lumMod val="65000"/>
+        <a:lumOff val="35000"/>
+      </a:schemeClr>
+    </cs:fontRef>
+    <cs:spPr>
+      <a:solidFill>
+        <a:schemeClr val="lt1"/>
+      </a:solidFill>
+      <a:ln>
+        <a:solidFill>
+          <a:schemeClr val="dk1">
+            <a:lumMod val="25000"/>
+            <a:lumOff val="75000"/>
+          </a:schemeClr>
+        </a:solidFill>
+      </a:ln>
+    </cs:spPr>
+    <cs:defRPr sz="1197" kern="1200"/>
+    <cs:bodyPr rot="0" spcFirstLastPara="1" vertOverflow="clip" horzOverflow="clip" vert="horz" wrap="square" lIns="36576" tIns="18288" rIns="36576" bIns="18288" anchor="ctr" anchorCtr="1">
+      <a:spAutoFit/>
+    </cs:bodyPr>
+  </cs:dataLabelCallout>
+  <cs:dataPoint>
+    <cs:lnRef idx="0"/>
+    <cs:fillRef idx="1">
+      <cs:styleClr val="auto"/>
+    </cs:fillRef>
+    <cs:effectRef idx="0"/>
+    <cs:fontRef idx="minor">
+      <a:schemeClr val="tx1"/>
+    </cs:fontRef>
+    <cs:spPr>
+      <a:solidFill>
+        <a:schemeClr val="phClr"/>
+      </a:solidFill>
+    </cs:spPr>
+  </cs:dataPoint>
+  <cs:dataPoint3D>
+    <cs:lnRef idx="0"/>
+    <cs:fillRef idx="1">
+      <cs:styleClr val="auto"/>
+    </cs:fillRef>
+    <cs:effectRef idx="0"/>
+    <cs:fontRef idx="minor">
+      <a:schemeClr val="tx1"/>
+    </cs:fontRef>
+    <cs:spPr>
+      <a:solidFill>
+        <a:schemeClr val="phClr"/>
+      </a:solidFill>
+    </cs:spPr>
+  </cs:dataPoint3D>
+  <cs:dataPointLine>
+    <cs:lnRef idx="0">
+      <cs:styleClr val="auto"/>
+    </cs:lnRef>
+    <cs:fillRef idx="1"/>
+    <cs:effectRef idx="0"/>
+    <cs:fontRef idx="minor">
+      <a:schemeClr val="tx1"/>
+    </cs:fontRef>
+    <cs:spPr>
+      <a:ln w="28575" cap="rnd">
+        <a:solidFill>
+          <a:schemeClr val="phClr"/>
+        </a:solidFill>
+        <a:round/>
+      </a:ln>
+    </cs:spPr>
+  </cs:dataPointLine>
+  <cs:dataPointMarker>
+    <cs:lnRef idx="0">
+      <cs:styleClr val="auto"/>
+    </cs:lnRef>
+    <cs:fillRef idx="1">
+      <cs:styleClr val="auto"/>
+    </cs:fillRef>
+    <cs:effectRef idx="0"/>
+    <cs:fontRef idx="minor">
+      <a:schemeClr val="tx1"/>
+    </cs:fontRef>
+    <cs:spPr>
+      <a:solidFill>
+        <a:schemeClr val="phClr"/>
+      </a:solidFill>
+      <a:ln w="9525">
+        <a:solidFill>
+          <a:schemeClr val="phClr"/>
+        </a:solidFill>
+      </a:ln>
+    </cs:spPr>
+  </cs:dataPointMarker>
+  <cs:dataPointMarkerLayout symbol="circle" size="5"/>
+  <cs:dataPointWireframe>
+    <cs:lnRef idx="0">
+      <cs:styleClr val="auto"/>
+    </cs:lnRef>
+    <cs:fillRef idx="1"/>
+    <cs:effectRef idx="0"/>
+    <cs:fontRef idx="minor">
+      <a:schemeClr val="tx1"/>
+    </cs:fontRef>
+    <cs:spPr>
+      <a:ln w="9525" cap="rnd">
+        <a:solidFill>
+          <a:schemeClr val="phClr"/>
+        </a:solidFill>
+        <a:round/>
+      </a:ln>
+    </cs:spPr>
+  </cs:dataPointWireframe>
+  <cs:dataTable>
+    <cs:lnRef idx="0"/>
+    <cs:fillRef idx="0"/>
+    <cs:effectRef idx="0"/>
+    <cs:fontRef idx="minor">
+      <a:schemeClr val="tx1">
+        <a:lumMod val="65000"/>
+        <a:lumOff val="35000"/>
+      </a:schemeClr>
+    </cs:fontRef>
+    <cs:spPr>
+      <a:noFill/>
+      <a:ln w="9525" cap="flat" cmpd="sng" algn="ctr">
+        <a:solidFill>
+          <a:schemeClr val="tx1">
+            <a:lumMod val="15000"/>
+            <a:lumOff val="85000"/>
+          </a:schemeClr>
+        </a:solidFill>
+        <a:round/>
+      </a:ln>
+    </cs:spPr>
+    <cs:defRPr sz="1197" kern="1200"/>
+  </cs:dataTable>
+  <cs:downBar>
+    <cs:lnRef idx="0"/>
+    <cs:fillRef idx="0"/>
+    <cs:effectRef idx="0"/>
+    <cs:fontRef idx="minor">
+      <a:schemeClr val="dk1"/>
+    </cs:fontRef>
+    <cs:spPr>
+      <a:solidFill>
+        <a:schemeClr val="dk1">
+          <a:lumMod val="65000"/>
+          <a:lumOff val="35000"/>
+        </a:schemeClr>
+      </a:solidFill>
+      <a:ln w="9525">
+        <a:solidFill>
+          <a:schemeClr val="tx1">
+            <a:lumMod val="65000"/>
+            <a:lumOff val="35000"/>
+          </a:schemeClr>
+        </a:solidFill>
+      </a:ln>
+    </cs:spPr>
+  </cs:downBar>
+  <cs:dropLine>
+    <cs:lnRef idx="0"/>
+    <cs:fillRef idx="0"/>
+    <cs:effectRef idx="0"/>
+    <cs:fontRef idx="minor">
+      <a:schemeClr val="tx1"/>
+    </cs:fontRef>
+    <cs:spPr>
+      <a:ln w="9525" cap="flat" cmpd="sng" algn="ctr">
+        <a:solidFill>
+          <a:schemeClr val="tx1">
+            <a:lumMod val="35000"/>
+            <a:lumOff val="65000"/>
+          </a:schemeClr>
+        </a:solidFill>
+        <a:round/>
+      </a:ln>
+    </cs:spPr>
+  </cs:dropLine>
+  <cs:errorBar>
+    <cs:lnRef idx="0"/>
+    <cs:fillRef idx="0"/>
+    <cs:effectRef idx="0"/>
+    <cs:fontRef idx="minor">
+      <a:schemeClr val="tx1"/>
+    </cs:fontRef>
+    <cs:spPr>
+      <a:ln w="9525" cap="flat" cmpd="sng" algn="ctr">
+        <a:solidFill>
+          <a:schemeClr val="tx1">
+            <a:lumMod val="65000"/>
+            <a:lumOff val="35000"/>
+          </a:schemeClr>
+        </a:solidFill>
+        <a:round/>
+      </a:ln>
+    </cs:spPr>
+  </cs:errorBar>
+  <cs:floor>
+    <cs:lnRef idx="0"/>
+    <cs:fillRef idx="0"/>
+    <cs:effectRef idx="0"/>
+    <cs:fontRef idx="minor">
+      <a:schemeClr val="tx1"/>
+    </cs:fontRef>
+    <cs:spPr>
+      <a:noFill/>
+      <a:ln>
+        <a:noFill/>
+      </a:ln>
+    </cs:spPr>
+  </cs:floor>
+  <cs:gridlineMajor>
+    <cs:lnRef idx="0"/>
+    <cs:fillRef idx="0"/>
+    <cs:effectRef idx="0"/>
+    <cs:fontRef idx="minor">
+      <a:schemeClr val="tx1"/>
+    </cs:fontRef>
+    <cs:spPr>
+      <a:ln w="9525" cap="flat" cmpd="sng" algn="ctr">
+        <a:solidFill>
+          <a:schemeClr val="tx1">
+            <a:lumMod val="15000"/>
+            <a:lumOff val="85000"/>
+          </a:schemeClr>
+        </a:solidFill>
+        <a:round/>
+      </a:ln>
+    </cs:spPr>
+  </cs:gridlineMajor>
+  <cs:gridlineMinor>
+    <cs:lnRef idx="0"/>
+    <cs:fillRef idx="0"/>
+    <cs:effectRef idx="0"/>
+    <cs:fontRef idx="minor">
+      <a:schemeClr val="tx1"/>
+    </cs:fontRef>
+    <cs:spPr>
+      <a:ln w="9525" cap="flat" cmpd="sng" algn="ctr">
+        <a:solidFill>
+          <a:schemeClr val="tx1">
+            <a:lumMod val="5000"/>
+            <a:lumOff val="95000"/>
+          </a:schemeClr>
+        </a:solidFill>
+        <a:round/>
+      </a:ln>
+    </cs:spPr>
+  </cs:gridlineMinor>
+  <cs:hiLoLine>
+    <cs:lnRef idx="0"/>
+    <cs:fillRef idx="0"/>
+    <cs:effectRef idx="0"/>
+    <cs:fontRef idx="minor">
+      <a:schemeClr val="tx1"/>
+    </cs:fontRef>
+    <cs:spPr>
+      <a:ln w="9525" cap="flat" cmpd="sng" algn="ctr">
+        <a:solidFill>
+          <a:schemeClr val="tx1">
+            <a:lumMod val="75000"/>
+            <a:lumOff val="25000"/>
+          </a:schemeClr>
+        </a:solidFill>
+        <a:round/>
+      </a:ln>
+    </cs:spPr>
+  </cs:hiLoLine>
+  <cs:leaderLine>
+    <cs:lnRef idx="0"/>
+    <cs:fillRef idx="0"/>
+    <cs:effectRef idx="0"/>
+    <cs:fontRef idx="minor">
+      <a:schemeClr val="tx1"/>
+    </cs:fontRef>
+    <cs:spPr>
+      <a:ln w="9525" cap="flat" cmpd="sng" algn="ctr">
+        <a:solidFill>
+          <a:schemeClr val="tx1">
+            <a:lumMod val="35000"/>
+            <a:lumOff val="65000"/>
+          </a:schemeClr>
+        </a:solidFill>
+        <a:round/>
+      </a:ln>
+    </cs:spPr>
+  </cs:leaderLine>
+  <cs:legend>
+    <cs:lnRef idx="0"/>
+    <cs:fillRef idx="0"/>
+    <cs:effectRef idx="0"/>
+    <cs:fontRef idx="minor">
+      <a:schemeClr val="tx1">
+        <a:lumMod val="65000"/>
+        <a:lumOff val="35000"/>
+      </a:schemeClr>
+    </cs:fontRef>
+    <cs:defRPr sz="1197" kern="1200"/>
+  </cs:legend>
+  <cs:plotArea mods="allowNoFillOverride allowNoLineOverride">
+    <cs:lnRef idx="0"/>
+    <cs:fillRef idx="0"/>
+    <cs:effectRef idx="0"/>
+    <cs:fontRef idx="minor">
+      <a:schemeClr val="tx1"/>
+    </cs:fontRef>
+  </cs:plotArea>
+  <cs:plotArea3D mods="allowNoFillOverride allowNoLineOverride">
+    <cs:lnRef idx="0"/>
+    <cs:fillRef idx="0"/>
+    <cs:effectRef idx="0"/>
+    <cs:fontRef idx="minor">
+      <a:schemeClr val="tx1"/>
+    </cs:fontRef>
+  </cs:plotArea3D>
+  <cs:seriesAxis>
+    <cs:lnRef idx="0"/>
+    <cs:fillRef idx="0"/>
+    <cs:effectRef idx="0"/>
+    <cs:fontRef idx="minor">
+      <a:schemeClr val="tx1">
+        <a:lumMod val="65000"/>
+        <a:lumOff val="35000"/>
+      </a:schemeClr>
+    </cs:fontRef>
+    <cs:defRPr sz="1197" kern="1200"/>
+  </cs:seriesAxis>
+  <cs:seriesLine>
+    <cs:lnRef idx="0"/>
+    <cs:fillRef idx="0"/>
+    <cs:effectRef idx="0"/>
+    <cs:fontRef idx="minor">
+      <a:schemeClr val="tx1"/>
+    </cs:fontRef>
+    <cs:spPr>
+      <a:ln w="9525" cap="flat" cmpd="sng" algn="ctr">
+        <a:solidFill>
+          <a:schemeClr val="tx1">
+            <a:lumMod val="35000"/>
+            <a:lumOff val="65000"/>
+          </a:schemeClr>
+        </a:solidFill>
+        <a:round/>
+      </a:ln>
+    </cs:spPr>
+  </cs:seriesLine>
+  <cs:title>
+    <cs:lnRef idx="0"/>
+    <cs:fillRef idx="0"/>
+    <cs:effectRef idx="0"/>
+    <cs:fontRef idx="minor">
+      <a:schemeClr val="tx1">
+        <a:lumMod val="65000"/>
+        <a:lumOff val="35000"/>
+      </a:schemeClr>
+    </cs:fontRef>
+    <cs:defRPr sz="1862" b="0" kern="1200" spc="0" baseline="0"/>
+  </cs:title>
+  <cs:trendline>
+    <cs:lnRef idx="0">
+      <cs:styleClr val="auto"/>
+    </cs:lnRef>
+    <cs:fillRef idx="0"/>
+    <cs:effectRef idx="0"/>
+    <cs:fontRef idx="minor">
+      <a:schemeClr val="tx1"/>
+    </cs:fontRef>
+    <cs:spPr>
+      <a:ln w="19050" cap="rnd">
+        <a:solidFill>
+          <a:schemeClr val="phClr"/>
+        </a:solidFill>
+        <a:prstDash val="sysDot"/>
+      </a:ln>
+    </cs:spPr>
+  </cs:trendline>
+  <cs:trendlineLabel>
+    <cs:lnRef idx="0"/>
+    <cs:fillRef idx="0"/>
+    <cs:effectRef idx="0"/>
+    <cs:fontRef idx="minor">
+      <a:schemeClr val="tx1">
+        <a:lumMod val="65000"/>
+        <a:lumOff val="35000"/>
+      </a:schemeClr>
+    </cs:fontRef>
+    <cs:defRPr sz="1197" kern="1200"/>
+  </cs:trendlineLabel>
+  <cs:upBar>
+    <cs:lnRef idx="0"/>
+    <cs:fillRef idx="0"/>
+    <cs:effectRef idx="0"/>
+    <cs:fontRef idx="minor">
+      <a:schemeClr val="dk1"/>
+    </cs:fontRef>
+    <cs:spPr>
+      <a:solidFill>
+        <a:schemeClr val="lt1"/>
+      </a:solidFill>
+      <a:ln w="9525">
+        <a:solidFill>
+          <a:schemeClr val="tx1">
+            <a:lumMod val="15000"/>
+            <a:lumOff val="85000"/>
+          </a:schemeClr>
+        </a:solidFill>
+      </a:ln>
+    </cs:spPr>
+  </cs:upBar>
+  <cs:valueAxis>
+    <cs:lnRef idx="0"/>
+    <cs:fillRef idx="0"/>
+    <cs:effectRef idx="0"/>
+    <cs:fontRef idx="minor">
+      <a:schemeClr val="tx1">
+        <a:lumMod val="65000"/>
+        <a:lumOff val="35000"/>
+      </a:schemeClr>
+    </cs:fontRef>
+    <cs:defRPr sz="1197" kern="1200"/>
+  </cs:valueAxis>
+  <cs:wall>
+    <cs:lnRef idx="0"/>
+    <cs:fillRef idx="0"/>
+    <cs:effectRef idx="0"/>
+    <cs:fontRef idx="minor">
+      <a:schemeClr val="tx1"/>
+    </cs:fontRef>
+    <cs:spPr>
+      <a:noFill/>
+      <a:ln>
+        <a:noFill/>
+      </a:ln>
+    </cs:spPr>
+  </cs:wall>
+</cs:chartStyle>
 </file>
 
 <file path=ppt/diagrams/colors1.xml><?xml version="1.0" encoding="utf-8"?>
@@ -13806,7 +19801,7 @@
             <p:ph idx="1"/>
             <p:extLst>
               <p:ext uri="{D42A27DB-BD31-4B8C-83A1-F6EECF244321}">
-                <p14:modId xmlns:p14="http://schemas.microsoft.com/office/powerpoint/2010/main" val="4204520424"/>
+                <p14:modId xmlns:p14="http://schemas.microsoft.com/office/powerpoint/2010/main" val="1606150016"/>
               </p:ext>
             </p:extLst>
           </p:nvPr>
@@ -13936,7 +19931,7 @@
                     <a:p>
                       <a:r>
                         <a:rPr lang="it-IT" dirty="0"/>
-                        <a:t>P(90) (s)</a:t>
+                        <a:t>P90 (s)</a:t>
                       </a:r>
                       <a:endParaRPr lang="en-GB" dirty="0"/>
                     </a:p>
@@ -13950,7 +19945,7 @@
                     <a:p>
                       <a:r>
                         <a:rPr lang="it-IT" dirty="0"/>
-                        <a:t>P(95) (s)</a:t>
+                        <a:t>P95 (s)</a:t>
                       </a:r>
                       <a:endParaRPr lang="en-GB" dirty="0"/>
                     </a:p>
@@ -13964,7 +19959,7 @@
                     <a:p>
                       <a:r>
                         <a:rPr lang="it-IT" dirty="0"/>
-                        <a:t>P(99) (s)</a:t>
+                        <a:t>P99 (s)</a:t>
                       </a:r>
                       <a:endParaRPr lang="en-GB" dirty="0"/>
                     </a:p>
@@ -13999,7 +19994,7 @@
                     <a:p>
                       <a:r>
                         <a:rPr lang="it-IT" dirty="0"/>
-                        <a:t>10,1</a:t>
+                        <a:t>9,8</a:t>
                       </a:r>
                       <a:endParaRPr lang="en-GB" dirty="0"/>
                     </a:p>
@@ -14013,7 +20008,7 @@
                     <a:p>
                       <a:r>
                         <a:rPr lang="it-IT" dirty="0"/>
-                        <a:t>1,5</a:t>
+                        <a:t>1,4</a:t>
                       </a:r>
                       <a:endParaRPr lang="en-GB" dirty="0"/>
                     </a:p>
@@ -14027,7 +20022,7 @@
                     <a:p>
                       <a:r>
                         <a:rPr lang="it-IT" dirty="0"/>
-                        <a:t>1,5</a:t>
+                        <a:t>1,4</a:t>
                       </a:r>
                       <a:endParaRPr lang="en-GB" dirty="0"/>
                     </a:p>
@@ -14041,7 +20036,7 @@
                     <a:p>
                       <a:r>
                         <a:rPr lang="it-IT" dirty="0"/>
-                        <a:t>1,8</a:t>
+                        <a:t>1,6</a:t>
                       </a:r>
                       <a:endParaRPr lang="en-GB" dirty="0"/>
                     </a:p>
@@ -14055,7 +20050,7 @@
                     <a:p>
                       <a:r>
                         <a:rPr lang="it-IT" dirty="0"/>
-                        <a:t>1,9</a:t>
+                        <a:t>1,7</a:t>
                       </a:r>
                       <a:endParaRPr lang="en-GB" dirty="0"/>
                     </a:p>
@@ -14069,7 +20064,7 @@
                     <a:p>
                       <a:r>
                         <a:rPr lang="it-IT" dirty="0"/>
-                        <a:t>2,5</a:t>
+                        <a:t>2,0</a:t>
                       </a:r>
                       <a:endParaRPr lang="en-GB" dirty="0"/>
                     </a:p>
@@ -14104,7 +20099,7 @@
                     <a:p>
                       <a:r>
                         <a:rPr lang="it-IT" dirty="0"/>
-                        <a:t>49</a:t>
+                        <a:t>50,9</a:t>
                       </a:r>
                       <a:endParaRPr lang="en-GB" dirty="0"/>
                     </a:p>
@@ -14118,7 +20113,7 @@
                     <a:p>
                       <a:r>
                         <a:rPr lang="it-IT" dirty="0"/>
-                        <a:t>1,4</a:t>
+                        <a:t>1,3</a:t>
                       </a:r>
                       <a:endParaRPr lang="en-GB" dirty="0"/>
                     </a:p>
@@ -14132,7 +20127,7 @@
                     <a:p>
                       <a:r>
                         <a:rPr lang="it-IT" dirty="0"/>
-                        <a:t>1,2</a:t>
+                        <a:t>1,3</a:t>
                       </a:r>
                       <a:endParaRPr lang="en-GB" dirty="0"/>
                     </a:p>
@@ -14146,7 +20141,7 @@
                     <a:p>
                       <a:r>
                         <a:rPr lang="it-IT" dirty="0"/>
-                        <a:t>1,7</a:t>
+                        <a:t>1,5</a:t>
                       </a:r>
                       <a:endParaRPr lang="en-GB" dirty="0"/>
                     </a:p>
@@ -14160,7 +20155,7 @@
                     <a:p>
                       <a:r>
                         <a:rPr lang="it-IT" dirty="0"/>
-                        <a:t>2,1</a:t>
+                        <a:t>1,9</a:t>
                       </a:r>
                       <a:endParaRPr lang="en-GB" dirty="0"/>
                     </a:p>
@@ -14174,7 +20169,7 @@
                     <a:p>
                       <a:r>
                         <a:rPr lang="it-IT" dirty="0"/>
-                        <a:t>3,2</a:t>
+                        <a:t>2,4</a:t>
                       </a:r>
                       <a:endParaRPr lang="en-GB" dirty="0"/>
                     </a:p>
@@ -14209,21 +20204,7 @@
                     <a:p>
                       <a:r>
                         <a:rPr lang="it-IT" dirty="0"/>
-                        <a:t>148</a:t>
-                      </a:r>
-                      <a:endParaRPr lang="en-GB" dirty="0"/>
-                    </a:p>
-                  </a:txBody>
-                  <a:tcPr/>
-                </a:tc>
-                <a:tc>
-                  <a:txBody>
-                    <a:bodyPr/>
-                    <a:lstStyle/>
-                    <a:p>
-                      <a:r>
-                        <a:rPr lang="it-IT" dirty="0"/>
-                        <a:t>1,3</a:t>
+                        <a:t>149,2</a:t>
                       </a:r>
                       <a:endParaRPr lang="en-GB" dirty="0"/>
                     </a:p>
@@ -14251,6 +20232,20 @@
                     <a:p>
                       <a:r>
                         <a:rPr lang="it-IT" dirty="0"/>
+                        <a:t>1,1</a:t>
+                      </a:r>
+                      <a:endParaRPr lang="en-GB" dirty="0"/>
+                    </a:p>
+                  </a:txBody>
+                  <a:tcPr/>
+                </a:tc>
+                <a:tc>
+                  <a:txBody>
+                    <a:bodyPr/>
+                    <a:lstStyle/>
+                    <a:p>
+                      <a:r>
+                        <a:rPr lang="it-IT" dirty="0"/>
                         <a:t>1,9</a:t>
                       </a:r>
                       <a:endParaRPr lang="en-GB" dirty="0"/>
@@ -14265,7 +20260,7 @@
                     <a:p>
                       <a:r>
                         <a:rPr lang="it-IT" dirty="0"/>
-                        <a:t>2,2</a:t>
+                        <a:t>2,0</a:t>
                       </a:r>
                       <a:endParaRPr lang="en-GB" dirty="0"/>
                     </a:p>
@@ -14279,7 +20274,7 @@
                     <a:p>
                       <a:r>
                         <a:rPr lang="it-IT" dirty="0"/>
-                        <a:t>3,1</a:t>
+                        <a:t>2,6</a:t>
                       </a:r>
                       <a:endParaRPr lang="en-GB" dirty="0"/>
                     </a:p>
@@ -14314,21 +20309,7 @@
                     <a:p>
                       <a:r>
                         <a:rPr lang="it-IT" dirty="0"/>
-                        <a:t>292,7</a:t>
-                      </a:r>
-                      <a:endParaRPr lang="en-GB" dirty="0"/>
-                    </a:p>
-                  </a:txBody>
-                  <a:tcPr/>
-                </a:tc>
-                <a:tc>
-                  <a:txBody>
-                    <a:bodyPr/>
-                    <a:lstStyle/>
-                    <a:p>
-                      <a:r>
-                        <a:rPr lang="it-IT" dirty="0"/>
-                        <a:t>1,5</a:t>
+                        <a:t>294,1</a:t>
                       </a:r>
                       <a:endParaRPr lang="en-GB" dirty="0"/>
                     </a:p>
@@ -14356,7 +20337,7 @@
                     <a:p>
                       <a:r>
                         <a:rPr lang="it-IT" dirty="0"/>
-                        <a:t>2,2</a:t>
+                        <a:t>1,1</a:t>
                       </a:r>
                       <a:endParaRPr lang="en-GB" dirty="0"/>
                     </a:p>
@@ -14370,7 +20351,7 @@
                     <a:p>
                       <a:r>
                         <a:rPr lang="it-IT" dirty="0"/>
-                        <a:t>2,6</a:t>
+                        <a:t>2,0</a:t>
                       </a:r>
                       <a:endParaRPr lang="en-GB" dirty="0"/>
                     </a:p>
@@ -14384,7 +20365,21 @@
                     <a:p>
                       <a:r>
                         <a:rPr lang="it-IT" dirty="0"/>
-                        <a:t>3,7</a:t>
+                        <a:t>2,4</a:t>
+                      </a:r>
+                      <a:endParaRPr lang="en-GB" dirty="0"/>
+                    </a:p>
+                  </a:txBody>
+                  <a:tcPr/>
+                </a:tc>
+                <a:tc>
+                  <a:txBody>
+                    <a:bodyPr/>
+                    <a:lstStyle/>
+                    <a:p>
+                      <a:r>
+                        <a:rPr lang="it-IT" dirty="0"/>
+                        <a:t>2,8</a:t>
                       </a:r>
                       <a:endParaRPr lang="en-GB" dirty="0"/>
                     </a:p>
@@ -14419,7 +20414,7 @@
                     <a:p>
                       <a:r>
                         <a:rPr lang="it-IT" dirty="0"/>
-                        <a:t>558,3</a:t>
+                        <a:t>554,3</a:t>
                       </a:r>
                       <a:endParaRPr lang="en-GB" dirty="0"/>
                     </a:p>
@@ -14447,7 +20442,21 @@
                     <a:p>
                       <a:r>
                         <a:rPr lang="it-IT" dirty="0"/>
-                        <a:t>1,5</a:t>
+                        <a:t>1,4</a:t>
+                      </a:r>
+                      <a:endParaRPr lang="en-GB" dirty="0"/>
+                    </a:p>
+                  </a:txBody>
+                  <a:tcPr/>
+                </a:tc>
+                <a:tc>
+                  <a:txBody>
+                    <a:bodyPr/>
+                    <a:lstStyle/>
+                    <a:p>
+                      <a:r>
+                        <a:rPr lang="it-IT" dirty="0"/>
+                        <a:t>2,5</a:t>
                       </a:r>
                       <a:endParaRPr lang="en-GB" dirty="0"/>
                     </a:p>
@@ -14475,21 +20484,7 @@
                     <a:p>
                       <a:r>
                         <a:rPr lang="it-IT" dirty="0"/>
-                        <a:t>2,8</a:t>
-                      </a:r>
-                      <a:endParaRPr lang="en-GB" dirty="0"/>
-                    </a:p>
-                  </a:txBody>
-                  <a:tcPr/>
-                </a:tc>
-                <a:tc>
-                  <a:txBody>
-                    <a:bodyPr/>
-                    <a:lstStyle/>
-                    <a:p>
-                      <a:r>
-                        <a:rPr lang="it-IT" dirty="0"/>
-                        <a:t>3,7</a:t>
+                        <a:t>3,1</a:t>
                       </a:r>
                       <a:endParaRPr lang="en-GB" dirty="0"/>
                     </a:p>
@@ -14524,7 +20519,7 @@
                     <a:p>
                       <a:r>
                         <a:rPr lang="it-IT" dirty="0"/>
-                        <a:t>866</a:t>
+                        <a:t>865,8</a:t>
                       </a:r>
                       <a:endParaRPr lang="en-GB" dirty="0"/>
                     </a:p>
@@ -14538,7 +20533,7 @@
                     <a:p>
                       <a:r>
                         <a:rPr lang="it-IT" dirty="0"/>
-                        <a:t>1,4</a:t>
+                        <a:t>1,3</a:t>
                       </a:r>
                       <a:endParaRPr lang="en-GB" dirty="0"/>
                     </a:p>
@@ -14552,7 +20547,21 @@
                     <a:p>
                       <a:r>
                         <a:rPr lang="it-IT" dirty="0"/>
-                        <a:t>1,2</a:t>
+                        <a:t>1,1</a:t>
+                      </a:r>
+                      <a:endParaRPr lang="en-GB" dirty="0"/>
+                    </a:p>
+                  </a:txBody>
+                  <a:tcPr/>
+                </a:tc>
+                <a:tc>
+                  <a:txBody>
+                    <a:bodyPr/>
+                    <a:lstStyle/>
+                    <a:p>
+                      <a:r>
+                        <a:rPr lang="it-IT" dirty="0"/>
+                        <a:t>1,8</a:t>
                       </a:r>
                       <a:endParaRPr lang="en-GB" dirty="0"/>
                     </a:p>
@@ -14580,21 +20589,7 @@
                     <a:p>
                       <a:r>
                         <a:rPr lang="it-IT" dirty="0"/>
-                        <a:t>2,3</a:t>
-                      </a:r>
-                      <a:endParaRPr lang="en-GB" dirty="0"/>
-                    </a:p>
-                  </a:txBody>
-                  <a:tcPr/>
-                </a:tc>
-                <a:tc>
-                  <a:txBody>
-                    <a:bodyPr/>
-                    <a:lstStyle/>
-                    <a:p>
-                      <a:r>
-                        <a:rPr lang="it-IT" dirty="0"/>
-                        <a:t>3,4</a:t>
+                        <a:t>2,4</a:t>
                       </a:r>
                       <a:endParaRPr lang="en-GB" dirty="0"/>
                     </a:p>
@@ -14692,7 +20687,7 @@
             <p:ph idx="1"/>
             <p:extLst>
               <p:ext uri="{D42A27DB-BD31-4B8C-83A1-F6EECF244321}">
-                <p14:modId xmlns:p14="http://schemas.microsoft.com/office/powerpoint/2010/main" val="1480696726"/>
+                <p14:modId xmlns:p14="http://schemas.microsoft.com/office/powerpoint/2010/main" val="2248169229"/>
               </p:ext>
             </p:extLst>
           </p:nvPr>
@@ -14822,7 +20817,7 @@
                     <a:p>
                       <a:r>
                         <a:rPr lang="it-IT" dirty="0"/>
-                        <a:t>P(90) (s)</a:t>
+                        <a:t>P90 (s)</a:t>
                       </a:r>
                       <a:endParaRPr lang="en-GB" dirty="0"/>
                     </a:p>
@@ -14836,7 +20831,7 @@
                     <a:p>
                       <a:r>
                         <a:rPr lang="it-IT" dirty="0"/>
-                        <a:t>P(95) (s)</a:t>
+                        <a:t>P95 (s)</a:t>
                       </a:r>
                       <a:endParaRPr lang="en-GB" dirty="0"/>
                     </a:p>
@@ -14850,7 +20845,7 @@
                     <a:p>
                       <a:r>
                         <a:rPr lang="it-IT" dirty="0"/>
-                        <a:t>P(99) (s)</a:t>
+                        <a:t>P99 (s)</a:t>
                       </a:r>
                       <a:endParaRPr lang="en-GB" dirty="0"/>
                     </a:p>
@@ -14885,7 +20880,7 @@
                     <a:p>
                       <a:r>
                         <a:rPr lang="it-IT" dirty="0"/>
-                        <a:t>9,9</a:t>
+                        <a:t>9,7</a:t>
                       </a:r>
                       <a:endParaRPr lang="en-GB" dirty="0"/>
                     </a:p>
@@ -14899,7 +20894,7 @@
                     <a:p>
                       <a:r>
                         <a:rPr lang="it-IT" dirty="0"/>
-                        <a:t>1,5</a:t>
+                        <a:t>1,4</a:t>
                       </a:r>
                       <a:endParaRPr lang="en-GB" dirty="0"/>
                     </a:p>
@@ -14913,7 +20908,7 @@
                     <a:p>
                       <a:r>
                         <a:rPr lang="it-IT" dirty="0"/>
-                        <a:t>1,5</a:t>
+                        <a:t>1,4</a:t>
                       </a:r>
                       <a:endParaRPr lang="en-GB" dirty="0"/>
                     </a:p>
@@ -14927,7 +20922,7 @@
                     <a:p>
                       <a:r>
                         <a:rPr lang="it-IT" dirty="0"/>
-                        <a:t>1,9</a:t>
+                        <a:t>1,6</a:t>
                       </a:r>
                       <a:endParaRPr lang="en-GB" dirty="0"/>
                     </a:p>
@@ -14941,7 +20936,7 @@
                     <a:p>
                       <a:r>
                         <a:rPr lang="it-IT" dirty="0"/>
-                        <a:t>2,1</a:t>
+                        <a:t>1,7</a:t>
                       </a:r>
                       <a:endParaRPr lang="en-GB" dirty="0"/>
                     </a:p>
@@ -14955,7 +20950,7 @@
                     <a:p>
                       <a:r>
                         <a:rPr lang="it-IT" dirty="0"/>
-                        <a:t>2,9</a:t>
+                        <a:t>2,0</a:t>
                       </a:r>
                       <a:endParaRPr lang="en-GB" dirty="0"/>
                     </a:p>
@@ -14990,7 +20985,7 @@
                     <a:p>
                       <a:r>
                         <a:rPr lang="it-IT" dirty="0"/>
-                        <a:t>49,9</a:t>
+                        <a:t>50,1</a:t>
                       </a:r>
                       <a:endParaRPr lang="en-GB" dirty="0"/>
                     </a:p>
@@ -15018,7 +21013,427 @@
                     <a:p>
                       <a:r>
                         <a:rPr lang="it-IT" dirty="0"/>
+                        <a:t>1,3</a:t>
+                      </a:r>
+                      <a:endParaRPr lang="en-GB" dirty="0"/>
+                    </a:p>
+                  </a:txBody>
+                  <a:tcPr/>
+                </a:tc>
+                <a:tc>
+                  <a:txBody>
+                    <a:bodyPr/>
+                    <a:lstStyle/>
+                    <a:p>
+                      <a:r>
+                        <a:rPr lang="it-IT" dirty="0"/>
+                        <a:t>1,5</a:t>
+                      </a:r>
+                      <a:endParaRPr lang="en-GB" dirty="0"/>
+                    </a:p>
+                  </a:txBody>
+                  <a:tcPr/>
+                </a:tc>
+                <a:tc>
+                  <a:txBody>
+                    <a:bodyPr/>
+                    <a:lstStyle/>
+                    <a:p>
+                      <a:r>
+                        <a:rPr lang="it-IT" dirty="0"/>
+                        <a:t>1,6</a:t>
+                      </a:r>
+                      <a:endParaRPr lang="en-GB" dirty="0"/>
+                    </a:p>
+                  </a:txBody>
+                  <a:tcPr/>
+                </a:tc>
+                <a:tc>
+                  <a:txBody>
+                    <a:bodyPr/>
+                    <a:lstStyle/>
+                    <a:p>
+                      <a:r>
+                        <a:rPr lang="it-IT" dirty="0"/>
+                        <a:t>2,3</a:t>
+                      </a:r>
+                      <a:endParaRPr lang="en-GB" dirty="0"/>
+                    </a:p>
+                  </a:txBody>
+                  <a:tcPr/>
+                </a:tc>
+                <a:extLst>
+                  <a:ext uri="{0D108BD9-81ED-4DB2-BD59-A6C34878D82A}">
+                    <a16:rowId xmlns:a16="http://schemas.microsoft.com/office/drawing/2014/main" val="774249562"/>
+                  </a:ext>
+                </a:extLst>
+              </a:tr>
+              <a:tr h="370840">
+                <a:tc>
+                  <a:txBody>
+                    <a:bodyPr/>
+                    <a:lstStyle/>
+                    <a:p>
+                      <a:r>
+                        <a:rPr lang="it-IT" dirty="0"/>
+                        <a:t>150</a:t>
+                      </a:r>
+                      <a:endParaRPr lang="en-GB" dirty="0"/>
+                    </a:p>
+                  </a:txBody>
+                  <a:tcPr/>
+                </a:tc>
+                <a:tc>
+                  <a:txBody>
+                    <a:bodyPr/>
+                    <a:lstStyle/>
+                    <a:p>
+                      <a:r>
+                        <a:rPr lang="it-IT" dirty="0"/>
+                        <a:t>146,6</a:t>
+                      </a:r>
+                      <a:endParaRPr lang="en-GB" dirty="0"/>
+                    </a:p>
+                  </a:txBody>
+                  <a:tcPr/>
+                </a:tc>
+                <a:tc>
+                  <a:txBody>
+                    <a:bodyPr/>
+                    <a:lstStyle/>
+                    <a:p>
+                      <a:r>
+                        <a:rPr lang="it-IT" dirty="0"/>
                         <a:t>1,2</a:t>
+                      </a:r>
+                      <a:endParaRPr lang="en-GB" dirty="0"/>
+                    </a:p>
+                  </a:txBody>
+                  <a:tcPr/>
+                </a:tc>
+                <a:tc>
+                  <a:txBody>
+                    <a:bodyPr/>
+                    <a:lstStyle/>
+                    <a:p>
+                      <a:r>
+                        <a:rPr lang="it-IT" dirty="0"/>
+                        <a:t>1,0</a:t>
+                      </a:r>
+                      <a:endParaRPr lang="en-GB" dirty="0"/>
+                    </a:p>
+                  </a:txBody>
+                  <a:tcPr/>
+                </a:tc>
+                <a:tc>
+                  <a:txBody>
+                    <a:bodyPr/>
+                    <a:lstStyle/>
+                    <a:p>
+                      <a:r>
+                        <a:rPr lang="it-IT" dirty="0"/>
+                        <a:t>1,5</a:t>
+                      </a:r>
+                      <a:endParaRPr lang="en-GB" dirty="0"/>
+                    </a:p>
+                  </a:txBody>
+                  <a:tcPr/>
+                </a:tc>
+                <a:tc>
+                  <a:txBody>
+                    <a:bodyPr/>
+                    <a:lstStyle/>
+                    <a:p>
+                      <a:r>
+                        <a:rPr lang="it-IT" dirty="0"/>
+                        <a:t>2,0</a:t>
+                      </a:r>
+                      <a:endParaRPr lang="en-GB" dirty="0"/>
+                    </a:p>
+                  </a:txBody>
+                  <a:tcPr/>
+                </a:tc>
+                <a:tc>
+                  <a:txBody>
+                    <a:bodyPr/>
+                    <a:lstStyle/>
+                    <a:p>
+                      <a:r>
+                        <a:rPr lang="it-IT" dirty="0"/>
+                        <a:t>2,5</a:t>
+                      </a:r>
+                      <a:endParaRPr lang="en-GB" dirty="0"/>
+                    </a:p>
+                  </a:txBody>
+                  <a:tcPr/>
+                </a:tc>
+                <a:extLst>
+                  <a:ext uri="{0D108BD9-81ED-4DB2-BD59-A6C34878D82A}">
+                    <a16:rowId xmlns:a16="http://schemas.microsoft.com/office/drawing/2014/main" val="3093664536"/>
+                  </a:ext>
+                </a:extLst>
+              </a:tr>
+              <a:tr h="370840">
+                <a:tc>
+                  <a:txBody>
+                    <a:bodyPr/>
+                    <a:lstStyle/>
+                    <a:p>
+                      <a:r>
+                        <a:rPr lang="it-IT" dirty="0"/>
+                        <a:t>300</a:t>
+                      </a:r>
+                      <a:endParaRPr lang="en-GB" dirty="0"/>
+                    </a:p>
+                  </a:txBody>
+                  <a:tcPr/>
+                </a:tc>
+                <a:tc>
+                  <a:txBody>
+                    <a:bodyPr/>
+                    <a:lstStyle/>
+                    <a:p>
+                      <a:r>
+                        <a:rPr lang="it-IT" dirty="0"/>
+                        <a:t>291,8</a:t>
+                      </a:r>
+                      <a:endParaRPr lang="en-GB" dirty="0"/>
+                    </a:p>
+                  </a:txBody>
+                  <a:tcPr/>
+                </a:tc>
+                <a:tc>
+                  <a:txBody>
+                    <a:bodyPr/>
+                    <a:lstStyle/>
+                    <a:p>
+                      <a:r>
+                        <a:rPr lang="it-IT" dirty="0"/>
+                        <a:t>1,3</a:t>
+                      </a:r>
+                      <a:endParaRPr lang="en-GB" dirty="0"/>
+                    </a:p>
+                  </a:txBody>
+                  <a:tcPr/>
+                </a:tc>
+                <a:tc>
+                  <a:txBody>
+                    <a:bodyPr/>
+                    <a:lstStyle/>
+                    <a:p>
+                      <a:r>
+                        <a:rPr lang="it-IT" dirty="0"/>
+                        <a:t>1,1</a:t>
+                      </a:r>
+                      <a:endParaRPr lang="en-GB" dirty="0"/>
+                    </a:p>
+                  </a:txBody>
+                  <a:tcPr/>
+                </a:tc>
+                <a:tc>
+                  <a:txBody>
+                    <a:bodyPr/>
+                    <a:lstStyle/>
+                    <a:p>
+                      <a:r>
+                        <a:rPr lang="it-IT" dirty="0"/>
+                        <a:t>2,0</a:t>
+                      </a:r>
+                      <a:endParaRPr lang="en-GB" dirty="0"/>
+                    </a:p>
+                  </a:txBody>
+                  <a:tcPr/>
+                </a:tc>
+                <a:tc>
+                  <a:txBody>
+                    <a:bodyPr/>
+                    <a:lstStyle/>
+                    <a:p>
+                      <a:r>
+                        <a:rPr lang="it-IT" dirty="0"/>
+                        <a:t>2,4</a:t>
+                      </a:r>
+                      <a:endParaRPr lang="en-GB" dirty="0"/>
+                    </a:p>
+                  </a:txBody>
+                  <a:tcPr/>
+                </a:tc>
+                <a:tc>
+                  <a:txBody>
+                    <a:bodyPr/>
+                    <a:lstStyle/>
+                    <a:p>
+                      <a:r>
+                        <a:rPr lang="it-IT" dirty="0"/>
+                        <a:t>2,9</a:t>
+                      </a:r>
+                      <a:endParaRPr lang="en-GB" dirty="0"/>
+                    </a:p>
+                  </a:txBody>
+                  <a:tcPr/>
+                </a:tc>
+                <a:extLst>
+                  <a:ext uri="{0D108BD9-81ED-4DB2-BD59-A6C34878D82A}">
+                    <a16:rowId xmlns:a16="http://schemas.microsoft.com/office/drawing/2014/main" val="369788681"/>
+                  </a:ext>
+                </a:extLst>
+              </a:tr>
+              <a:tr h="370840">
+                <a:tc>
+                  <a:txBody>
+                    <a:bodyPr/>
+                    <a:lstStyle/>
+                    <a:p>
+                      <a:r>
+                        <a:rPr lang="it-IT" dirty="0"/>
+                        <a:t>600</a:t>
+                      </a:r>
+                      <a:endParaRPr lang="en-GB" dirty="0"/>
+                    </a:p>
+                  </a:txBody>
+                  <a:tcPr/>
+                </a:tc>
+                <a:tc>
+                  <a:txBody>
+                    <a:bodyPr/>
+                    <a:lstStyle/>
+                    <a:p>
+                      <a:r>
+                        <a:rPr lang="it-IT" dirty="0"/>
+                        <a:t>557,1</a:t>
+                      </a:r>
+                      <a:endParaRPr lang="en-GB" dirty="0"/>
+                    </a:p>
+                  </a:txBody>
+                  <a:tcPr/>
+                </a:tc>
+                <a:tc>
+                  <a:txBody>
+                    <a:bodyPr/>
+                    <a:lstStyle/>
+                    <a:p>
+                      <a:r>
+                        <a:rPr lang="it-IT" dirty="0"/>
+                        <a:t>1,5</a:t>
+                      </a:r>
+                      <a:endParaRPr lang="en-GB" dirty="0"/>
+                    </a:p>
+                  </a:txBody>
+                  <a:tcPr/>
+                </a:tc>
+                <a:tc>
+                  <a:txBody>
+                    <a:bodyPr/>
+                    <a:lstStyle/>
+                    <a:p>
+                      <a:r>
+                        <a:rPr lang="it-IT" dirty="0"/>
+                        <a:t>1,4</a:t>
+                      </a:r>
+                      <a:endParaRPr lang="en-GB" dirty="0"/>
+                    </a:p>
+                  </a:txBody>
+                  <a:tcPr/>
+                </a:tc>
+                <a:tc>
+                  <a:txBody>
+                    <a:bodyPr/>
+                    <a:lstStyle/>
+                    <a:p>
+                      <a:r>
+                        <a:rPr lang="it-IT" dirty="0"/>
+                        <a:t>2,5</a:t>
+                      </a:r>
+                      <a:endParaRPr lang="en-GB" dirty="0"/>
+                    </a:p>
+                  </a:txBody>
+                  <a:tcPr/>
+                </a:tc>
+                <a:tc>
+                  <a:txBody>
+                    <a:bodyPr/>
+                    <a:lstStyle/>
+                    <a:p>
+                      <a:r>
+                        <a:rPr lang="it-IT" dirty="0"/>
+                        <a:t>2,6</a:t>
+                      </a:r>
+                      <a:endParaRPr lang="en-GB" dirty="0"/>
+                    </a:p>
+                  </a:txBody>
+                  <a:tcPr/>
+                </a:tc>
+                <a:tc>
+                  <a:txBody>
+                    <a:bodyPr/>
+                    <a:lstStyle/>
+                    <a:p>
+                      <a:r>
+                        <a:rPr lang="it-IT" dirty="0"/>
+                        <a:t>3,0</a:t>
+                      </a:r>
+                      <a:endParaRPr lang="en-GB" dirty="0"/>
+                    </a:p>
+                  </a:txBody>
+                  <a:tcPr/>
+                </a:tc>
+                <a:extLst>
+                  <a:ext uri="{0D108BD9-81ED-4DB2-BD59-A6C34878D82A}">
+                    <a16:rowId xmlns:a16="http://schemas.microsoft.com/office/drawing/2014/main" val="15991862"/>
+                  </a:ext>
+                </a:extLst>
+              </a:tr>
+              <a:tr h="370840">
+                <a:tc>
+                  <a:txBody>
+                    <a:bodyPr/>
+                    <a:lstStyle/>
+                    <a:p>
+                      <a:r>
+                        <a:rPr lang="it-IT" dirty="0"/>
+                        <a:t>1000</a:t>
+                      </a:r>
+                      <a:endParaRPr lang="en-GB" dirty="0"/>
+                    </a:p>
+                  </a:txBody>
+                  <a:tcPr/>
+                </a:tc>
+                <a:tc>
+                  <a:txBody>
+                    <a:bodyPr/>
+                    <a:lstStyle/>
+                    <a:p>
+                      <a:r>
+                        <a:rPr lang="it-IT" dirty="0"/>
+                        <a:t>868,9</a:t>
+                      </a:r>
+                      <a:endParaRPr lang="en-GB" dirty="0"/>
+                    </a:p>
+                  </a:txBody>
+                  <a:tcPr/>
+                </a:tc>
+                <a:tc>
+                  <a:txBody>
+                    <a:bodyPr/>
+                    <a:lstStyle/>
+                    <a:p>
+                      <a:r>
+                        <a:rPr lang="it-IT" dirty="0"/>
+                        <a:t>1,3</a:t>
+                      </a:r>
+                      <a:endParaRPr lang="en-GB" dirty="0"/>
+                    </a:p>
+                  </a:txBody>
+                  <a:tcPr/>
+                </a:tc>
+                <a:tc>
+                  <a:txBody>
+                    <a:bodyPr/>
+                    <a:lstStyle/>
+                    <a:p>
+                      <a:r>
+                        <a:rPr lang="it-IT" dirty="0"/>
+                        <a:t>1,1</a:t>
                       </a:r>
                       <a:endParaRPr lang="en-GB" dirty="0"/>
                     </a:p>
@@ -15060,427 +21475,7 @@
                     <a:p>
                       <a:r>
                         <a:rPr lang="it-IT" dirty="0"/>
-                        <a:t>2,9</a:t>
-                      </a:r>
-                      <a:endParaRPr lang="en-GB" dirty="0"/>
-                    </a:p>
-                  </a:txBody>
-                  <a:tcPr/>
-                </a:tc>
-                <a:extLst>
-                  <a:ext uri="{0D108BD9-81ED-4DB2-BD59-A6C34878D82A}">
-                    <a16:rowId xmlns:a16="http://schemas.microsoft.com/office/drawing/2014/main" val="774249562"/>
-                  </a:ext>
-                </a:extLst>
-              </a:tr>
-              <a:tr h="370840">
-                <a:tc>
-                  <a:txBody>
-                    <a:bodyPr/>
-                    <a:lstStyle/>
-                    <a:p>
-                      <a:r>
-                        <a:rPr lang="it-IT" dirty="0"/>
-                        <a:t>150</a:t>
-                      </a:r>
-                      <a:endParaRPr lang="en-GB" dirty="0"/>
-                    </a:p>
-                  </a:txBody>
-                  <a:tcPr/>
-                </a:tc>
-                <a:tc>
-                  <a:txBody>
-                    <a:bodyPr/>
-                    <a:lstStyle/>
-                    <a:p>
-                      <a:r>
-                        <a:rPr lang="it-IT" dirty="0"/>
-                        <a:t>148,7</a:t>
-                      </a:r>
-                      <a:endParaRPr lang="en-GB" dirty="0"/>
-                    </a:p>
-                  </a:txBody>
-                  <a:tcPr/>
-                </a:tc>
-                <a:tc>
-                  <a:txBody>
-                    <a:bodyPr/>
-                    <a:lstStyle/>
-                    <a:p>
-                      <a:r>
-                        <a:rPr lang="it-IT" dirty="0"/>
-                        <a:t>1,2</a:t>
-                      </a:r>
-                      <a:endParaRPr lang="en-GB" dirty="0"/>
-                    </a:p>
-                  </a:txBody>
-                  <a:tcPr/>
-                </a:tc>
-                <a:tc>
-                  <a:txBody>
-                    <a:bodyPr/>
-                    <a:lstStyle/>
-                    <a:p>
-                      <a:r>
-                        <a:rPr lang="it-IT" dirty="0"/>
-                        <a:t>1,1</a:t>
-                      </a:r>
-                      <a:endParaRPr lang="en-GB" dirty="0"/>
-                    </a:p>
-                  </a:txBody>
-                  <a:tcPr/>
-                </a:tc>
-                <a:tc>
-                  <a:txBody>
-                    <a:bodyPr/>
-                    <a:lstStyle/>
-                    <a:p>
-                      <a:r>
-                        <a:rPr lang="it-IT" dirty="0"/>
-                        <a:t>1,9</a:t>
-                      </a:r>
-                      <a:endParaRPr lang="en-GB" dirty="0"/>
-                    </a:p>
-                  </a:txBody>
-                  <a:tcPr/>
-                </a:tc>
-                <a:tc>
-                  <a:txBody>
-                    <a:bodyPr/>
-                    <a:lstStyle/>
-                    <a:p>
-                      <a:r>
-                        <a:rPr lang="it-IT" dirty="0"/>
-                        <a:t>2,3</a:t>
-                      </a:r>
-                      <a:endParaRPr lang="en-GB" dirty="0"/>
-                    </a:p>
-                  </a:txBody>
-                  <a:tcPr/>
-                </a:tc>
-                <a:tc>
-                  <a:txBody>
-                    <a:bodyPr/>
-                    <a:lstStyle/>
-                    <a:p>
-                      <a:r>
-                        <a:rPr lang="it-IT" dirty="0"/>
-                        <a:t>3,6</a:t>
-                      </a:r>
-                      <a:endParaRPr lang="en-GB" dirty="0"/>
-                    </a:p>
-                  </a:txBody>
-                  <a:tcPr/>
-                </a:tc>
-                <a:extLst>
-                  <a:ext uri="{0D108BD9-81ED-4DB2-BD59-A6C34878D82A}">
-                    <a16:rowId xmlns:a16="http://schemas.microsoft.com/office/drawing/2014/main" val="3093664536"/>
-                  </a:ext>
-                </a:extLst>
-              </a:tr>
-              <a:tr h="370840">
-                <a:tc>
-                  <a:txBody>
-                    <a:bodyPr/>
-                    <a:lstStyle/>
-                    <a:p>
-                      <a:r>
-                        <a:rPr lang="it-IT" dirty="0"/>
-                        <a:t>300</a:t>
-                      </a:r>
-                      <a:endParaRPr lang="en-GB" dirty="0"/>
-                    </a:p>
-                  </a:txBody>
-                  <a:tcPr/>
-                </a:tc>
-                <a:tc>
-                  <a:txBody>
-                    <a:bodyPr/>
-                    <a:lstStyle/>
-                    <a:p>
-                      <a:r>
-                        <a:rPr lang="it-IT" dirty="0"/>
-                        <a:t>292,9</a:t>
-                      </a:r>
-                      <a:endParaRPr lang="en-GB" dirty="0"/>
-                    </a:p>
-                  </a:txBody>
-                  <a:tcPr/>
-                </a:tc>
-                <a:tc>
-                  <a:txBody>
-                    <a:bodyPr/>
-                    <a:lstStyle/>
-                    <a:p>
-                      <a:r>
-                        <a:rPr lang="it-IT" dirty="0"/>
-                        <a:t>1,4</a:t>
-                      </a:r>
-                      <a:endParaRPr lang="en-GB" dirty="0"/>
-                    </a:p>
-                  </a:txBody>
-                  <a:tcPr/>
-                </a:tc>
-                <a:tc>
-                  <a:txBody>
-                    <a:bodyPr/>
-                    <a:lstStyle/>
-                    <a:p>
-                      <a:r>
-                        <a:rPr lang="it-IT" dirty="0"/>
-                        <a:t>1,2</a:t>
-                      </a:r>
-                      <a:endParaRPr lang="en-GB" dirty="0"/>
-                    </a:p>
-                  </a:txBody>
-                  <a:tcPr/>
-                </a:tc>
-                <a:tc>
-                  <a:txBody>
-                    <a:bodyPr/>
-                    <a:lstStyle/>
-                    <a:p>
-                      <a:r>
-                        <a:rPr lang="it-IT" dirty="0"/>
-                        <a:t>2,1</a:t>
-                      </a:r>
-                      <a:endParaRPr lang="en-GB" dirty="0"/>
-                    </a:p>
-                  </a:txBody>
-                  <a:tcPr/>
-                </a:tc>
-                <a:tc>
-                  <a:txBody>
-                    <a:bodyPr/>
-                    <a:lstStyle/>
-                    <a:p>
-                      <a:r>
-                        <a:rPr lang="it-IT" dirty="0"/>
                         <a:t>2,5</a:t>
-                      </a:r>
-                      <a:endParaRPr lang="en-GB" dirty="0"/>
-                    </a:p>
-                  </a:txBody>
-                  <a:tcPr/>
-                </a:tc>
-                <a:tc>
-                  <a:txBody>
-                    <a:bodyPr/>
-                    <a:lstStyle/>
-                    <a:p>
-                      <a:r>
-                        <a:rPr lang="it-IT" dirty="0"/>
-                        <a:t>3,5</a:t>
-                      </a:r>
-                      <a:endParaRPr lang="en-GB" dirty="0"/>
-                    </a:p>
-                  </a:txBody>
-                  <a:tcPr/>
-                </a:tc>
-                <a:extLst>
-                  <a:ext uri="{0D108BD9-81ED-4DB2-BD59-A6C34878D82A}">
-                    <a16:rowId xmlns:a16="http://schemas.microsoft.com/office/drawing/2014/main" val="369788681"/>
-                  </a:ext>
-                </a:extLst>
-              </a:tr>
-              <a:tr h="370840">
-                <a:tc>
-                  <a:txBody>
-                    <a:bodyPr/>
-                    <a:lstStyle/>
-                    <a:p>
-                      <a:r>
-                        <a:rPr lang="it-IT" dirty="0"/>
-                        <a:t>600</a:t>
-                      </a:r>
-                      <a:endParaRPr lang="en-GB" dirty="0"/>
-                    </a:p>
-                  </a:txBody>
-                  <a:tcPr/>
-                </a:tc>
-                <a:tc>
-                  <a:txBody>
-                    <a:bodyPr/>
-                    <a:lstStyle/>
-                    <a:p>
-                      <a:r>
-                        <a:rPr lang="it-IT" dirty="0"/>
-                        <a:t>553,6</a:t>
-                      </a:r>
-                      <a:endParaRPr lang="en-GB" dirty="0"/>
-                    </a:p>
-                  </a:txBody>
-                  <a:tcPr/>
-                </a:tc>
-                <a:tc>
-                  <a:txBody>
-                    <a:bodyPr/>
-                    <a:lstStyle/>
-                    <a:p>
-                      <a:r>
-                        <a:rPr lang="it-IT" dirty="0"/>
-                        <a:t>1,6</a:t>
-                      </a:r>
-                      <a:endParaRPr lang="en-GB" dirty="0"/>
-                    </a:p>
-                  </a:txBody>
-                  <a:tcPr/>
-                </a:tc>
-                <a:tc>
-                  <a:txBody>
-                    <a:bodyPr/>
-                    <a:lstStyle/>
-                    <a:p>
-                      <a:r>
-                        <a:rPr lang="it-IT" dirty="0"/>
-                        <a:t>1,5</a:t>
-                      </a:r>
-                      <a:endParaRPr lang="en-GB" dirty="0"/>
-                    </a:p>
-                  </a:txBody>
-                  <a:tcPr/>
-                </a:tc>
-                <a:tc>
-                  <a:txBody>
-                    <a:bodyPr/>
-                    <a:lstStyle/>
-                    <a:p>
-                      <a:r>
-                        <a:rPr lang="it-IT" dirty="0"/>
-                        <a:t>2,6</a:t>
-                      </a:r>
-                      <a:endParaRPr lang="en-GB" dirty="0"/>
-                    </a:p>
-                  </a:txBody>
-                  <a:tcPr/>
-                </a:tc>
-                <a:tc>
-                  <a:txBody>
-                    <a:bodyPr/>
-                    <a:lstStyle/>
-                    <a:p>
-                      <a:r>
-                        <a:rPr lang="it-IT" dirty="0"/>
-                        <a:t>2,8</a:t>
-                      </a:r>
-                      <a:endParaRPr lang="en-GB" dirty="0"/>
-                    </a:p>
-                  </a:txBody>
-                  <a:tcPr/>
-                </a:tc>
-                <a:tc>
-                  <a:txBody>
-                    <a:bodyPr/>
-                    <a:lstStyle/>
-                    <a:p>
-                      <a:r>
-                        <a:rPr lang="it-IT" dirty="0"/>
-                        <a:t>3,6</a:t>
-                      </a:r>
-                      <a:endParaRPr lang="en-GB" dirty="0"/>
-                    </a:p>
-                  </a:txBody>
-                  <a:tcPr/>
-                </a:tc>
-                <a:extLst>
-                  <a:ext uri="{0D108BD9-81ED-4DB2-BD59-A6C34878D82A}">
-                    <a16:rowId xmlns:a16="http://schemas.microsoft.com/office/drawing/2014/main" val="15991862"/>
-                  </a:ext>
-                </a:extLst>
-              </a:tr>
-              <a:tr h="370840">
-                <a:tc>
-                  <a:txBody>
-                    <a:bodyPr/>
-                    <a:lstStyle/>
-                    <a:p>
-                      <a:r>
-                        <a:rPr lang="it-IT" dirty="0"/>
-                        <a:t>1000</a:t>
-                      </a:r>
-                      <a:endParaRPr lang="en-GB" dirty="0"/>
-                    </a:p>
-                  </a:txBody>
-                  <a:tcPr/>
-                </a:tc>
-                <a:tc>
-                  <a:txBody>
-                    <a:bodyPr/>
-                    <a:lstStyle/>
-                    <a:p>
-                      <a:r>
-                        <a:rPr lang="it-IT" dirty="0"/>
-                        <a:t>866,8</a:t>
-                      </a:r>
-                      <a:endParaRPr lang="en-GB" dirty="0"/>
-                    </a:p>
-                  </a:txBody>
-                  <a:tcPr/>
-                </a:tc>
-                <a:tc>
-                  <a:txBody>
-                    <a:bodyPr/>
-                    <a:lstStyle/>
-                    <a:p>
-                      <a:r>
-                        <a:rPr lang="it-IT" dirty="0"/>
-                        <a:t>1,4</a:t>
-                      </a:r>
-                      <a:endParaRPr lang="en-GB" dirty="0"/>
-                    </a:p>
-                  </a:txBody>
-                  <a:tcPr/>
-                </a:tc>
-                <a:tc>
-                  <a:txBody>
-                    <a:bodyPr/>
-                    <a:lstStyle/>
-                    <a:p>
-                      <a:r>
-                        <a:rPr lang="it-IT" dirty="0"/>
-                        <a:t>1,1</a:t>
-                      </a:r>
-                      <a:endParaRPr lang="en-GB" dirty="0"/>
-                    </a:p>
-                  </a:txBody>
-                  <a:tcPr/>
-                </a:tc>
-                <a:tc>
-                  <a:txBody>
-                    <a:bodyPr/>
-                    <a:lstStyle/>
-                    <a:p>
-                      <a:r>
-                        <a:rPr lang="it-IT" dirty="0"/>
-                        <a:t>2,0</a:t>
-                      </a:r>
-                      <a:endParaRPr lang="en-GB" dirty="0"/>
-                    </a:p>
-                  </a:txBody>
-                  <a:tcPr/>
-                </a:tc>
-                <a:tc>
-                  <a:txBody>
-                    <a:bodyPr/>
-                    <a:lstStyle/>
-                    <a:p>
-                      <a:r>
-                        <a:rPr lang="it-IT" dirty="0"/>
-                        <a:t>2,3</a:t>
-                      </a:r>
-                      <a:endParaRPr lang="en-GB" dirty="0"/>
-                    </a:p>
-                  </a:txBody>
-                  <a:tcPr/>
-                </a:tc>
-                <a:tc>
-                  <a:txBody>
-                    <a:bodyPr/>
-                    <a:lstStyle/>
-                    <a:p>
-                      <a:r>
-                        <a:rPr lang="it-IT" dirty="0"/>
-                        <a:t>2,9</a:t>
                       </a:r>
                       <a:endParaRPr lang="en-GB" dirty="0"/>
                     </a:p>
@@ -15501,6 +21496,394 @@
     <p:extLst>
       <p:ext uri="{BB962C8B-B14F-4D97-AF65-F5344CB8AC3E}">
         <p14:creationId xmlns:p14="http://schemas.microsoft.com/office/powerpoint/2010/main" val="2092261046"/>
+      </p:ext>
+    </p:extLst>
+  </p:cSld>
+  <p:clrMapOvr>
+    <a:masterClrMapping/>
+  </p:clrMapOvr>
+</p:sld>
+</file>
+
+<file path=ppt/slides/slide23.xml><?xml version="1.0" encoding="utf-8"?>
+<p:sld xmlns:a="http://schemas.openxmlformats.org/drawingml/2006/main" xmlns:r="http://schemas.openxmlformats.org/officeDocument/2006/relationships" xmlns:p="http://schemas.openxmlformats.org/presentationml/2006/main">
+  <p:cSld>
+    <p:spTree>
+      <p:nvGrpSpPr>
+        <p:cNvPr id="1" name=""/>
+        <p:cNvGrpSpPr/>
+        <p:nvPr/>
+      </p:nvGrpSpPr>
+      <p:grpSpPr>
+        <a:xfrm>
+          <a:off x="0" y="0"/>
+          <a:ext cx="0" cy="0"/>
+          <a:chOff x="0" y="0"/>
+          <a:chExt cx="0" cy="0"/>
+        </a:xfrm>
+      </p:grpSpPr>
+      <p:sp>
+        <p:nvSpPr>
+          <p:cNvPr id="2" name="Title 1">
+            <a:extLst>
+              <a:ext uri="{FF2B5EF4-FFF2-40B4-BE49-F238E27FC236}">
+                <a16:creationId xmlns:a16="http://schemas.microsoft.com/office/drawing/2014/main" id="{87475EFA-89FD-D07C-7E91-301FCA0A8EA9}"/>
+              </a:ext>
+            </a:extLst>
+          </p:cNvPr>
+          <p:cNvSpPr>
+            <a:spLocks noGrp="1"/>
+          </p:cNvSpPr>
+          <p:nvPr>
+            <p:ph type="title"/>
+          </p:nvPr>
+        </p:nvSpPr>
+        <p:spPr/>
+        <p:txBody>
+          <a:bodyPr/>
+          <a:lstStyle/>
+          <a:p>
+            <a:r>
+              <a:rPr lang="it-IT" dirty="0"/>
+              <a:t>Grafici di comparazione</a:t>
+            </a:r>
+            <a:endParaRPr lang="en-GB" dirty="0"/>
+          </a:p>
+        </p:txBody>
+      </p:sp>
+      <p:graphicFrame>
+        <p:nvGraphicFramePr>
+          <p:cNvPr id="6" name="Content Placeholder 5">
+            <a:extLst>
+              <a:ext uri="{FF2B5EF4-FFF2-40B4-BE49-F238E27FC236}">
+                <a16:creationId xmlns:a16="http://schemas.microsoft.com/office/drawing/2014/main" id="{12D98DB9-2CA0-2E4E-4F33-97175D45FFCC}"/>
+              </a:ext>
+            </a:extLst>
+          </p:cNvPr>
+          <p:cNvGraphicFramePr>
+            <a:graphicFrameLocks noGrp="1"/>
+          </p:cNvGraphicFramePr>
+          <p:nvPr>
+            <p:ph idx="1"/>
+            <p:extLst>
+              <p:ext uri="{D42A27DB-BD31-4B8C-83A1-F6EECF244321}">
+                <p14:modId xmlns:p14="http://schemas.microsoft.com/office/powerpoint/2010/main" val="4020615347"/>
+              </p:ext>
+            </p:extLst>
+          </p:nvPr>
+        </p:nvGraphicFramePr>
+        <p:xfrm>
+          <a:off x="330252" y="302342"/>
+          <a:ext cx="3799297" cy="2362200"/>
+        </p:xfrm>
+        <a:graphic>
+          <a:graphicData uri="http://schemas.openxmlformats.org/drawingml/2006/chart">
+            <c:chart xmlns:c="http://schemas.openxmlformats.org/drawingml/2006/chart" xmlns:r="http://schemas.openxmlformats.org/officeDocument/2006/relationships" r:id="rId2"/>
+          </a:graphicData>
+        </a:graphic>
+      </p:graphicFrame>
+      <p:graphicFrame>
+        <p:nvGraphicFramePr>
+          <p:cNvPr id="7" name="Content Placeholder 5">
+            <a:extLst>
+              <a:ext uri="{FF2B5EF4-FFF2-40B4-BE49-F238E27FC236}">
+                <a16:creationId xmlns:a16="http://schemas.microsoft.com/office/drawing/2014/main" id="{26C7F95C-52CA-EFBC-054C-239A0B2C4161}"/>
+              </a:ext>
+            </a:extLst>
+          </p:cNvPr>
+          <p:cNvGraphicFramePr>
+            <a:graphicFrameLocks/>
+          </p:cNvGraphicFramePr>
+          <p:nvPr>
+            <p:extLst>
+              <p:ext uri="{D42A27DB-BD31-4B8C-83A1-F6EECF244321}">
+                <p14:modId xmlns:p14="http://schemas.microsoft.com/office/powerpoint/2010/main" val="2744622460"/>
+              </p:ext>
+            </p:extLst>
+          </p:nvPr>
+        </p:nvGraphicFramePr>
+        <p:xfrm>
+          <a:off x="4263156" y="302342"/>
+          <a:ext cx="3799297" cy="2362200"/>
+        </p:xfrm>
+        <a:graphic>
+          <a:graphicData uri="http://schemas.openxmlformats.org/drawingml/2006/chart">
+            <c:chart xmlns:c="http://schemas.openxmlformats.org/drawingml/2006/chart" xmlns:r="http://schemas.openxmlformats.org/officeDocument/2006/relationships" r:id="rId3"/>
+          </a:graphicData>
+        </a:graphic>
+      </p:graphicFrame>
+      <p:graphicFrame>
+        <p:nvGraphicFramePr>
+          <p:cNvPr id="8" name="Content Placeholder 5">
+            <a:extLst>
+              <a:ext uri="{FF2B5EF4-FFF2-40B4-BE49-F238E27FC236}">
+                <a16:creationId xmlns:a16="http://schemas.microsoft.com/office/drawing/2014/main" id="{B0B7AF95-F332-851C-816F-8B3DC6FDA422}"/>
+              </a:ext>
+            </a:extLst>
+          </p:cNvPr>
+          <p:cNvGraphicFramePr>
+            <a:graphicFrameLocks/>
+          </p:cNvGraphicFramePr>
+          <p:nvPr>
+            <p:extLst>
+              <p:ext uri="{D42A27DB-BD31-4B8C-83A1-F6EECF244321}">
+                <p14:modId xmlns:p14="http://schemas.microsoft.com/office/powerpoint/2010/main" val="4016814609"/>
+              </p:ext>
+            </p:extLst>
+          </p:nvPr>
+        </p:nvGraphicFramePr>
+        <p:xfrm>
+          <a:off x="8201848" y="302342"/>
+          <a:ext cx="3799297" cy="2362200"/>
+        </p:xfrm>
+        <a:graphic>
+          <a:graphicData uri="http://schemas.openxmlformats.org/drawingml/2006/chart">
+            <c:chart xmlns:c="http://schemas.openxmlformats.org/drawingml/2006/chart" xmlns:r="http://schemas.openxmlformats.org/officeDocument/2006/relationships" r:id="rId4"/>
+          </a:graphicData>
+        </a:graphic>
+      </p:graphicFrame>
+      <p:graphicFrame>
+        <p:nvGraphicFramePr>
+          <p:cNvPr id="9" name="Content Placeholder 5">
+            <a:extLst>
+              <a:ext uri="{FF2B5EF4-FFF2-40B4-BE49-F238E27FC236}">
+                <a16:creationId xmlns:a16="http://schemas.microsoft.com/office/drawing/2014/main" id="{79C34674-4775-CFA1-8EFD-A7E95041FD86}"/>
+              </a:ext>
+            </a:extLst>
+          </p:cNvPr>
+          <p:cNvGraphicFramePr>
+            <a:graphicFrameLocks/>
+          </p:cNvGraphicFramePr>
+          <p:nvPr>
+            <p:extLst>
+              <p:ext uri="{D42A27DB-BD31-4B8C-83A1-F6EECF244321}">
+                <p14:modId xmlns:p14="http://schemas.microsoft.com/office/powerpoint/2010/main" val="4178359659"/>
+              </p:ext>
+            </p:extLst>
+          </p:nvPr>
+        </p:nvGraphicFramePr>
+        <p:xfrm>
+          <a:off x="2296703" y="2563762"/>
+          <a:ext cx="3799297" cy="2362200"/>
+        </p:xfrm>
+        <a:graphic>
+          <a:graphicData uri="http://schemas.openxmlformats.org/drawingml/2006/chart">
+            <c:chart xmlns:c="http://schemas.openxmlformats.org/drawingml/2006/chart" xmlns:r="http://schemas.openxmlformats.org/officeDocument/2006/relationships" r:id="rId5"/>
+          </a:graphicData>
+        </a:graphic>
+      </p:graphicFrame>
+      <p:graphicFrame>
+        <p:nvGraphicFramePr>
+          <p:cNvPr id="10" name="Content Placeholder 5">
+            <a:extLst>
+              <a:ext uri="{FF2B5EF4-FFF2-40B4-BE49-F238E27FC236}">
+                <a16:creationId xmlns:a16="http://schemas.microsoft.com/office/drawing/2014/main" id="{B00D9C5D-4052-D940-175F-E28404173086}"/>
+              </a:ext>
+            </a:extLst>
+          </p:cNvPr>
+          <p:cNvGraphicFramePr>
+            <a:graphicFrameLocks/>
+          </p:cNvGraphicFramePr>
+          <p:nvPr>
+            <p:extLst>
+              <p:ext uri="{D42A27DB-BD31-4B8C-83A1-F6EECF244321}">
+                <p14:modId xmlns:p14="http://schemas.microsoft.com/office/powerpoint/2010/main" val="1193492889"/>
+              </p:ext>
+            </p:extLst>
+          </p:nvPr>
+        </p:nvGraphicFramePr>
+        <p:xfrm>
+          <a:off x="6472239" y="2563762"/>
+          <a:ext cx="3799297" cy="2362200"/>
+        </p:xfrm>
+        <a:graphic>
+          <a:graphicData uri="http://schemas.openxmlformats.org/drawingml/2006/chart">
+            <c:chart xmlns:c="http://schemas.openxmlformats.org/drawingml/2006/chart" xmlns:r="http://schemas.openxmlformats.org/officeDocument/2006/relationships" r:id="rId6"/>
+          </a:graphicData>
+        </a:graphic>
+      </p:graphicFrame>
+    </p:spTree>
+    <p:extLst>
+      <p:ext uri="{BB962C8B-B14F-4D97-AF65-F5344CB8AC3E}">
+        <p14:creationId xmlns:p14="http://schemas.microsoft.com/office/powerpoint/2010/main" val="664204689"/>
+      </p:ext>
+    </p:extLst>
+  </p:cSld>
+  <p:clrMapOvr>
+    <a:masterClrMapping/>
+  </p:clrMapOvr>
+</p:sld>
+</file>
+
+<file path=ppt/slides/slide24.xml><?xml version="1.0" encoding="utf-8"?>
+<p:sld xmlns:a="http://schemas.openxmlformats.org/drawingml/2006/main" xmlns:r="http://schemas.openxmlformats.org/officeDocument/2006/relationships" xmlns:p="http://schemas.openxmlformats.org/presentationml/2006/main">
+  <p:cSld>
+    <p:spTree>
+      <p:nvGrpSpPr>
+        <p:cNvPr id="1" name=""/>
+        <p:cNvGrpSpPr/>
+        <p:nvPr/>
+      </p:nvGrpSpPr>
+      <p:grpSpPr>
+        <a:xfrm>
+          <a:off x="0" y="0"/>
+          <a:ext cx="0" cy="0"/>
+          <a:chOff x="0" y="0"/>
+          <a:chExt cx="0" cy="0"/>
+        </a:xfrm>
+      </p:grpSpPr>
+      <p:sp>
+        <p:nvSpPr>
+          <p:cNvPr id="2" name="Title 1">
+            <a:extLst>
+              <a:ext uri="{FF2B5EF4-FFF2-40B4-BE49-F238E27FC236}">
+                <a16:creationId xmlns:a16="http://schemas.microsoft.com/office/drawing/2014/main" id="{D225B53B-ADEF-BAD0-1276-CC59FC3153FD}"/>
+              </a:ext>
+            </a:extLst>
+          </p:cNvPr>
+          <p:cNvSpPr>
+            <a:spLocks noGrp="1"/>
+          </p:cNvSpPr>
+          <p:nvPr>
+            <p:ph type="title"/>
+          </p:nvPr>
+        </p:nvSpPr>
+        <p:spPr/>
+        <p:txBody>
+          <a:bodyPr/>
+          <a:lstStyle/>
+          <a:p>
+            <a:r>
+              <a:rPr lang="it-IT" dirty="0"/>
+              <a:t>Degradazione </a:t>
+            </a:r>
+            <a:r>
+              <a:rPr lang="it-IT" dirty="0" err="1"/>
+              <a:t>rps</a:t>
+            </a:r>
+            <a:endParaRPr lang="en-GB" dirty="0"/>
+          </a:p>
+        </p:txBody>
+      </p:sp>
+      <p:graphicFrame>
+        <p:nvGraphicFramePr>
+          <p:cNvPr id="6" name="Content Placeholder 5">
+            <a:extLst>
+              <a:ext uri="{FF2B5EF4-FFF2-40B4-BE49-F238E27FC236}">
+                <a16:creationId xmlns:a16="http://schemas.microsoft.com/office/drawing/2014/main" id="{D17C77A7-1481-7B6F-58C3-A1803053268C}"/>
+              </a:ext>
+            </a:extLst>
+          </p:cNvPr>
+          <p:cNvGraphicFramePr>
+            <a:graphicFrameLocks noGrp="1"/>
+          </p:cNvGraphicFramePr>
+          <p:nvPr>
+            <p:ph idx="1"/>
+            <p:extLst>
+              <p:ext uri="{D42A27DB-BD31-4B8C-83A1-F6EECF244321}">
+                <p14:modId xmlns:p14="http://schemas.microsoft.com/office/powerpoint/2010/main" val="3767972232"/>
+              </p:ext>
+            </p:extLst>
+          </p:nvPr>
+        </p:nvGraphicFramePr>
+        <p:xfrm>
+          <a:off x="684213" y="685800"/>
+          <a:ext cx="8534400" cy="3614738"/>
+        </p:xfrm>
+        <a:graphic>
+          <a:graphicData uri="http://schemas.openxmlformats.org/drawingml/2006/chart">
+            <c:chart xmlns:c="http://schemas.openxmlformats.org/drawingml/2006/chart" xmlns:r="http://schemas.openxmlformats.org/officeDocument/2006/relationships" r:id="rId2"/>
+          </a:graphicData>
+        </a:graphic>
+      </p:graphicFrame>
+    </p:spTree>
+    <p:extLst>
+      <p:ext uri="{BB962C8B-B14F-4D97-AF65-F5344CB8AC3E}">
+        <p14:creationId xmlns:p14="http://schemas.microsoft.com/office/powerpoint/2010/main" val="2513706645"/>
+      </p:ext>
+    </p:extLst>
+  </p:cSld>
+  <p:clrMapOvr>
+    <a:masterClrMapping/>
+  </p:clrMapOvr>
+</p:sld>
+</file>
+
+<file path=ppt/slides/slide25.xml><?xml version="1.0" encoding="utf-8"?>
+<p:sld xmlns:a="http://schemas.openxmlformats.org/drawingml/2006/main" xmlns:r="http://schemas.openxmlformats.org/officeDocument/2006/relationships" xmlns:p="http://schemas.openxmlformats.org/presentationml/2006/main">
+  <p:cSld>
+    <p:spTree>
+      <p:nvGrpSpPr>
+        <p:cNvPr id="1" name=""/>
+        <p:cNvGrpSpPr/>
+        <p:nvPr/>
+      </p:nvGrpSpPr>
+      <p:grpSpPr>
+        <a:xfrm>
+          <a:off x="0" y="0"/>
+          <a:ext cx="0" cy="0"/>
+          <a:chOff x="0" y="0"/>
+          <a:chExt cx="0" cy="0"/>
+        </a:xfrm>
+      </p:grpSpPr>
+      <p:sp>
+        <p:nvSpPr>
+          <p:cNvPr id="2" name="Title 1">
+            <a:extLst>
+              <a:ext uri="{FF2B5EF4-FFF2-40B4-BE49-F238E27FC236}">
+                <a16:creationId xmlns:a16="http://schemas.microsoft.com/office/drawing/2014/main" id="{20334D19-9D1B-B626-55FF-AA6D2AC3317D}"/>
+              </a:ext>
+            </a:extLst>
+          </p:cNvPr>
+          <p:cNvSpPr>
+            <a:spLocks noGrp="1"/>
+          </p:cNvSpPr>
+          <p:nvPr>
+            <p:ph type="title"/>
+          </p:nvPr>
+        </p:nvSpPr>
+        <p:spPr/>
+        <p:txBody>
+          <a:bodyPr/>
+          <a:lstStyle/>
+          <a:p>
+            <a:r>
+              <a:rPr lang="it-IT"/>
+              <a:t>LOAD TEST CON BATCH SIZE DIFFERENTE</a:t>
+            </a:r>
+            <a:endParaRPr lang="en-GB"/>
+          </a:p>
+        </p:txBody>
+      </p:sp>
+      <p:sp>
+        <p:nvSpPr>
+          <p:cNvPr id="3" name="Content Placeholder 2">
+            <a:extLst>
+              <a:ext uri="{FF2B5EF4-FFF2-40B4-BE49-F238E27FC236}">
+                <a16:creationId xmlns:a16="http://schemas.microsoft.com/office/drawing/2014/main" id="{A03888BB-6501-33FE-32CC-A12AFEC8F0F3}"/>
+              </a:ext>
+            </a:extLst>
+          </p:cNvPr>
+          <p:cNvSpPr>
+            <a:spLocks noGrp="1"/>
+          </p:cNvSpPr>
+          <p:nvPr>
+            <p:ph idx="1"/>
+          </p:nvPr>
+        </p:nvSpPr>
+        <p:spPr/>
+        <p:txBody>
+          <a:bodyPr/>
+          <a:lstStyle/>
+          <a:p>
+            <a:endParaRPr lang="en-GB"/>
+          </a:p>
+        </p:txBody>
+      </p:sp>
+    </p:spTree>
+    <p:extLst>
+      <p:ext uri="{BB962C8B-B14F-4D97-AF65-F5344CB8AC3E}">
+        <p14:creationId xmlns:p14="http://schemas.microsoft.com/office/powerpoint/2010/main" val="3325261426"/>
       </p:ext>
     </p:extLst>
   </p:cSld>

--- a/Gsasrec.pptx
+++ b/Gsasrec.pptx
@@ -28,8 +28,11 @@
     <p:sldId id="276" r:id="rId22"/>
     <p:sldId id="277" r:id="rId23"/>
     <p:sldId id="278" r:id="rId24"/>
-    <p:sldId id="279" r:id="rId25"/>
-    <p:sldId id="280" r:id="rId26"/>
+    <p:sldId id="280" r:id="rId25"/>
+    <p:sldId id="283" r:id="rId26"/>
+    <p:sldId id="284" r:id="rId27"/>
+    <p:sldId id="281" r:id="rId28"/>
+    <p:sldId id="282" r:id="rId29"/>
   </p:sldIdLst>
   <p:sldSz cx="12192000" cy="6858000"/>
   <p:notesSz cx="6858000" cy="9144000"/>
@@ -170,10 +173,9 @@
               </a:defRPr>
             </a:pPr>
             <a:r>
-              <a:rPr lang="it-IT" dirty="0"/>
-              <a:t>Media</a:t>
-            </a:r>
-            <a:endParaRPr lang="en-GB" dirty="0"/>
+              <a:rPr lang="en-GB" dirty="0"/>
+              <a:t>10 RPS – 32 clients</a:t>
+            </a:r>
           </a:p>
         </c:rich>
       </c:tx>
@@ -239,55 +241,48 @@
             <c:symbol val="none"/>
           </c:marker>
           <c:cat>
-            <c:numRef>
-              <c:f>Sheet1!$A$2:$A$7</c:f>
-              <c:numCache>
-                <c:formatCode>General</c:formatCode>
-                <c:ptCount val="6"/>
+            <c:strRef>
+              <c:f>Sheet1!$A$2:$A$6</c:f>
+              <c:strCache>
+                <c:ptCount val="5"/>
                 <c:pt idx="0">
-                  <c:v>10</c:v>
+                  <c:v>Mean</c:v>
                 </c:pt>
                 <c:pt idx="1">
-                  <c:v>50</c:v>
+                  <c:v>p50</c:v>
                 </c:pt>
                 <c:pt idx="2">
-                  <c:v>150</c:v>
+                  <c:v>p90</c:v>
                 </c:pt>
                 <c:pt idx="3">
-                  <c:v>300</c:v>
+                  <c:v>p95</c:v>
                 </c:pt>
                 <c:pt idx="4">
-                  <c:v>600</c:v>
+                  <c:v>p99</c:v>
                 </c:pt>
-                <c:pt idx="5">
-                  <c:v>1000</c:v>
-                </c:pt>
-              </c:numCache>
-            </c:numRef>
+              </c:strCache>
+            </c:strRef>
           </c:cat>
           <c:val>
             <c:numRef>
-              <c:f>Sheet1!$B$2:$B$7</c:f>
+              <c:f>Sheet1!$B$2:$B$6</c:f>
               <c:numCache>
                 <c:formatCode>General</c:formatCode>
-                <c:ptCount val="6"/>
+                <c:ptCount val="5"/>
                 <c:pt idx="0">
-                  <c:v>1.4</c:v>
+                  <c:v>144.6</c:v>
                 </c:pt>
                 <c:pt idx="1">
-                  <c:v>1.3</c:v>
+                  <c:v>107.1</c:v>
                 </c:pt>
                 <c:pt idx="2">
-                  <c:v>1.2</c:v>
+                  <c:v>262.60000000000002</c:v>
                 </c:pt>
                 <c:pt idx="3">
-                  <c:v>1.3</c:v>
+                  <c:v>298.10000000000002</c:v>
                 </c:pt>
                 <c:pt idx="4">
-                  <c:v>1.6</c:v>
-                </c:pt>
-                <c:pt idx="5">
-                  <c:v>1.3</c:v>
+                  <c:v>362.6</c:v>
                 </c:pt>
               </c:numCache>
             </c:numRef>
@@ -295,7 +290,7 @@
           <c:smooth val="0"/>
           <c:extLst>
             <c:ext xmlns:c16="http://schemas.microsoft.com/office/drawing/2014/chart" uri="{C3380CC4-5D6E-409C-BE32-E72D297353CC}">
-              <c16:uniqueId val="{00000000-46C6-4863-AEA5-AB7B71DEA308}"/>
+              <c16:uniqueId val="{00000000-DC9A-42C2-86AC-3D04339C79A3}"/>
             </c:ext>
           </c:extLst>
         </c:ser>
@@ -326,55 +321,48 @@
             <c:symbol val="none"/>
           </c:marker>
           <c:cat>
-            <c:numRef>
-              <c:f>Sheet1!$A$2:$A$7</c:f>
-              <c:numCache>
-                <c:formatCode>General</c:formatCode>
-                <c:ptCount val="6"/>
+            <c:strRef>
+              <c:f>Sheet1!$A$2:$A$6</c:f>
+              <c:strCache>
+                <c:ptCount val="5"/>
                 <c:pt idx="0">
-                  <c:v>10</c:v>
+                  <c:v>Mean</c:v>
                 </c:pt>
                 <c:pt idx="1">
-                  <c:v>50</c:v>
+                  <c:v>p50</c:v>
                 </c:pt>
                 <c:pt idx="2">
-                  <c:v>150</c:v>
+                  <c:v>p90</c:v>
                 </c:pt>
                 <c:pt idx="3">
-                  <c:v>300</c:v>
+                  <c:v>p95</c:v>
                 </c:pt>
                 <c:pt idx="4">
-                  <c:v>600</c:v>
+                  <c:v>p99</c:v>
                 </c:pt>
-                <c:pt idx="5">
-                  <c:v>1000</c:v>
-                </c:pt>
-              </c:numCache>
-            </c:numRef>
+              </c:strCache>
+            </c:strRef>
           </c:cat>
           <c:val>
             <c:numRef>
-              <c:f>Sheet1!$C$2:$C$7</c:f>
+              <c:f>Sheet1!$C$2:$C$6</c:f>
               <c:numCache>
                 <c:formatCode>General</c:formatCode>
-                <c:ptCount val="6"/>
+                <c:ptCount val="5"/>
                 <c:pt idx="0">
-                  <c:v>1.4</c:v>
+                  <c:v>97.4</c:v>
                 </c:pt>
                 <c:pt idx="1">
-                  <c:v>1.3</c:v>
+                  <c:v>79.8</c:v>
                 </c:pt>
                 <c:pt idx="2">
-                  <c:v>1.2</c:v>
+                  <c:v>162</c:v>
                 </c:pt>
                 <c:pt idx="3">
-                  <c:v>1.3</c:v>
+                  <c:v>191</c:v>
                 </c:pt>
                 <c:pt idx="4">
-                  <c:v>1.5</c:v>
-                </c:pt>
-                <c:pt idx="5">
-                  <c:v>1.3</c:v>
+                  <c:v>263.5</c:v>
                 </c:pt>
               </c:numCache>
             </c:numRef>
@@ -382,7 +370,7 @@
           <c:smooth val="0"/>
           <c:extLst>
             <c:ext xmlns:c16="http://schemas.microsoft.com/office/drawing/2014/chart" uri="{C3380CC4-5D6E-409C-BE32-E72D297353CC}">
-              <c16:uniqueId val="{00000001-46C6-4863-AEA5-AB7B71DEA308}"/>
+              <c16:uniqueId val="{00000001-DC9A-42C2-86AC-3D04339C79A3}"/>
             </c:ext>
           </c:extLst>
         </c:ser>
@@ -395,11 +383,11 @@
           <c:showBubbleSize val="0"/>
         </c:dLbls>
         <c:smooth val="0"/>
-        <c:axId val="1142654127"/>
-        <c:axId val="1142671407"/>
+        <c:axId val="1194242784"/>
+        <c:axId val="1194248544"/>
       </c:lineChart>
       <c:catAx>
-        <c:axId val="1142654127"/>
+        <c:axId val="1194242784"/>
         <c:scaling>
           <c:orientation val="minMax"/>
         </c:scaling>
@@ -442,7 +430,7 @@
             <a:endParaRPr lang="en-US"/>
           </a:p>
         </c:txPr>
-        <c:crossAx val="1142671407"/>
+        <c:crossAx val="1194248544"/>
         <c:crosses val="autoZero"/>
         <c:auto val="1"/>
         <c:lblAlgn val="ctr"/>
@@ -450,7 +438,7 @@
         <c:noMultiLvlLbl val="0"/>
       </c:catAx>
       <c:valAx>
-        <c:axId val="1142671407"/>
+        <c:axId val="1194248544"/>
         <c:scaling>
           <c:orientation val="minMax"/>
         </c:scaling>
@@ -501,7 +489,7 @@
             <a:endParaRPr lang="en-US"/>
           </a:p>
         </c:txPr>
-        <c:crossAx val="1142654127"/>
+        <c:crossAx val="1194242784"/>
         <c:crosses val="autoZero"/>
         <c:crossBetween val="between"/>
       </c:valAx>
@@ -612,10 +600,9 @@
               </a:defRPr>
             </a:pPr>
             <a:r>
-              <a:rPr lang="it-IT" dirty="0"/>
-              <a:t>p50</a:t>
-            </a:r>
-            <a:endParaRPr lang="en-GB" dirty="0"/>
+              <a:rPr lang="en-GB" dirty="0"/>
+              <a:t>50 RPS – 32 clients</a:t>
+            </a:r>
           </a:p>
         </c:rich>
       </c:tx>
@@ -644,7 +631,7 @@
               <a:cs typeface="+mn-cs"/>
             </a:defRPr>
           </a:pPr>
-          <a:endParaRPr lang="en-GB"/>
+          <a:endParaRPr lang="en-US"/>
         </a:p>
       </c:txPr>
     </c:title>
@@ -681,55 +668,48 @@
             <c:symbol val="none"/>
           </c:marker>
           <c:cat>
-            <c:numRef>
-              <c:f>Sheet1!$A$2:$A$7</c:f>
-              <c:numCache>
-                <c:formatCode>General</c:formatCode>
-                <c:ptCount val="6"/>
+            <c:strRef>
+              <c:f>Sheet1!$A$2:$A$6</c:f>
+              <c:strCache>
+                <c:ptCount val="5"/>
                 <c:pt idx="0">
-                  <c:v>10</c:v>
+                  <c:v>Mean</c:v>
                 </c:pt>
                 <c:pt idx="1">
-                  <c:v>50</c:v>
+                  <c:v>p50</c:v>
                 </c:pt>
                 <c:pt idx="2">
-                  <c:v>150</c:v>
+                  <c:v>p90</c:v>
                 </c:pt>
                 <c:pt idx="3">
-                  <c:v>300</c:v>
+                  <c:v>p95</c:v>
                 </c:pt>
                 <c:pt idx="4">
-                  <c:v>600</c:v>
+                  <c:v>p99</c:v>
                 </c:pt>
-                <c:pt idx="5">
-                  <c:v>1000</c:v>
-                </c:pt>
-              </c:numCache>
-            </c:numRef>
+              </c:strCache>
+            </c:strRef>
           </c:cat>
           <c:val>
             <c:numRef>
-              <c:f>Sheet1!$B$2:$B$7</c:f>
+              <c:f>Sheet1!$B$2:$B$6</c:f>
               <c:numCache>
                 <c:formatCode>General</c:formatCode>
-                <c:ptCount val="6"/>
+                <c:ptCount val="5"/>
                 <c:pt idx="0">
-                  <c:v>1.4</c:v>
+                  <c:v>4493.5</c:v>
                 </c:pt>
                 <c:pt idx="1">
-                  <c:v>1.3</c:v>
+                  <c:v>4772.3999999999996</c:v>
                 </c:pt>
                 <c:pt idx="2">
-                  <c:v>1.1000000000000001</c:v>
+                  <c:v>4867.2</c:v>
                 </c:pt>
                 <c:pt idx="3">
-                  <c:v>1.1000000000000001</c:v>
+                  <c:v>4885</c:v>
                 </c:pt>
                 <c:pt idx="4">
-                  <c:v>1.4</c:v>
-                </c:pt>
-                <c:pt idx="5">
-                  <c:v>1.1000000000000001</c:v>
+                  <c:v>4917.5</c:v>
                 </c:pt>
               </c:numCache>
             </c:numRef>
@@ -737,7 +717,7 @@
           <c:smooth val="0"/>
           <c:extLst>
             <c:ext xmlns:c16="http://schemas.microsoft.com/office/drawing/2014/chart" uri="{C3380CC4-5D6E-409C-BE32-E72D297353CC}">
-              <c16:uniqueId val="{00000000-8F0B-45EC-AC48-BEA415DE511E}"/>
+              <c16:uniqueId val="{00000000-41F4-46D2-9E32-1BB436EA7AB6}"/>
             </c:ext>
           </c:extLst>
         </c:ser>
@@ -768,55 +748,48 @@
             <c:symbol val="none"/>
           </c:marker>
           <c:cat>
-            <c:numRef>
-              <c:f>Sheet1!$A$2:$A$7</c:f>
-              <c:numCache>
-                <c:formatCode>General</c:formatCode>
-                <c:ptCount val="6"/>
+            <c:strRef>
+              <c:f>Sheet1!$A$2:$A$6</c:f>
+              <c:strCache>
+                <c:ptCount val="5"/>
                 <c:pt idx="0">
-                  <c:v>10</c:v>
+                  <c:v>Mean</c:v>
                 </c:pt>
                 <c:pt idx="1">
-                  <c:v>50</c:v>
+                  <c:v>p50</c:v>
                 </c:pt>
                 <c:pt idx="2">
-                  <c:v>150</c:v>
+                  <c:v>p90</c:v>
                 </c:pt>
                 <c:pt idx="3">
-                  <c:v>300</c:v>
+                  <c:v>p95</c:v>
                 </c:pt>
                 <c:pt idx="4">
-                  <c:v>600</c:v>
+                  <c:v>p99</c:v>
                 </c:pt>
-                <c:pt idx="5">
-                  <c:v>1000</c:v>
-                </c:pt>
-              </c:numCache>
-            </c:numRef>
+              </c:strCache>
+            </c:strRef>
           </c:cat>
           <c:val>
             <c:numRef>
-              <c:f>Sheet1!$C$2:$C$7</c:f>
+              <c:f>Sheet1!$C$2:$C$6</c:f>
               <c:numCache>
                 <c:formatCode>General</c:formatCode>
-                <c:ptCount val="6"/>
+                <c:ptCount val="5"/>
                 <c:pt idx="0">
-                  <c:v>1.4</c:v>
+                  <c:v>4442.6000000000004</c:v>
                 </c:pt>
                 <c:pt idx="1">
-                  <c:v>1.3</c:v>
+                  <c:v>4678.3</c:v>
                 </c:pt>
                 <c:pt idx="2">
-                  <c:v>1</c:v>
+                  <c:v>4754</c:v>
                 </c:pt>
                 <c:pt idx="3">
-                  <c:v>1.1000000000000001</c:v>
+                  <c:v>4761.8999999999996</c:v>
                 </c:pt>
                 <c:pt idx="4">
-                  <c:v>1.4</c:v>
-                </c:pt>
-                <c:pt idx="5">
-                  <c:v>1.1000000000000001</c:v>
+                  <c:v>5247.1</c:v>
                 </c:pt>
               </c:numCache>
             </c:numRef>
@@ -824,7 +797,7 @@
           <c:smooth val="0"/>
           <c:extLst>
             <c:ext xmlns:c16="http://schemas.microsoft.com/office/drawing/2014/chart" uri="{C3380CC4-5D6E-409C-BE32-E72D297353CC}">
-              <c16:uniqueId val="{00000001-8F0B-45EC-AC48-BEA415DE511E}"/>
+              <c16:uniqueId val="{00000001-41F4-46D2-9E32-1BB436EA7AB6}"/>
             </c:ext>
           </c:extLst>
         </c:ser>
@@ -837,11 +810,11 @@
           <c:showBubbleSize val="0"/>
         </c:dLbls>
         <c:smooth val="0"/>
-        <c:axId val="1142654127"/>
-        <c:axId val="1142671407"/>
+        <c:axId val="1194242784"/>
+        <c:axId val="1194248544"/>
       </c:lineChart>
       <c:catAx>
-        <c:axId val="1142654127"/>
+        <c:axId val="1194242784"/>
         <c:scaling>
           <c:orientation val="minMax"/>
         </c:scaling>
@@ -884,7 +857,7 @@
             <a:endParaRPr lang="en-US"/>
           </a:p>
         </c:txPr>
-        <c:crossAx val="1142671407"/>
+        <c:crossAx val="1194248544"/>
         <c:crosses val="autoZero"/>
         <c:auto val="1"/>
         <c:lblAlgn val="ctr"/>
@@ -892,7 +865,7 @@
         <c:noMultiLvlLbl val="0"/>
       </c:catAx>
       <c:valAx>
-        <c:axId val="1142671407"/>
+        <c:axId val="1194248544"/>
         <c:scaling>
           <c:orientation val="minMax"/>
         </c:scaling>
@@ -943,7 +916,7 @@
             <a:endParaRPr lang="en-US"/>
           </a:p>
         </c:txPr>
-        <c:crossAx val="1142654127"/>
+        <c:crossAx val="1194242784"/>
         <c:crosses val="autoZero"/>
         <c:crossBetween val="between"/>
       </c:valAx>
@@ -1054,10 +1027,9 @@
               </a:defRPr>
             </a:pPr>
             <a:r>
-              <a:rPr lang="it-IT" dirty="0"/>
-              <a:t>p90</a:t>
-            </a:r>
-            <a:endParaRPr lang="en-GB" dirty="0"/>
+              <a:rPr lang="en-GB" dirty="0"/>
+              <a:t>10 RPS – 64 clients</a:t>
+            </a:r>
           </a:p>
         </c:rich>
       </c:tx>
@@ -1086,7 +1058,7 @@
               <a:cs typeface="+mn-cs"/>
             </a:defRPr>
           </a:pPr>
-          <a:endParaRPr lang="en-GB"/>
+          <a:endParaRPr lang="en-US"/>
         </a:p>
       </c:txPr>
     </c:title>
@@ -1123,55 +1095,48 @@
             <c:symbol val="none"/>
           </c:marker>
           <c:cat>
-            <c:numRef>
-              <c:f>Sheet1!$A$2:$A$7</c:f>
-              <c:numCache>
-                <c:formatCode>General</c:formatCode>
-                <c:ptCount val="6"/>
+            <c:strRef>
+              <c:f>Sheet1!$A$2:$A$6</c:f>
+              <c:strCache>
+                <c:ptCount val="5"/>
                 <c:pt idx="0">
-                  <c:v>10</c:v>
+                  <c:v>Mean</c:v>
                 </c:pt>
                 <c:pt idx="1">
-                  <c:v>50</c:v>
+                  <c:v>p50</c:v>
                 </c:pt>
                 <c:pt idx="2">
-                  <c:v>150</c:v>
+                  <c:v>p90</c:v>
                 </c:pt>
                 <c:pt idx="3">
-                  <c:v>300</c:v>
+                  <c:v>p95</c:v>
                 </c:pt>
                 <c:pt idx="4">
-                  <c:v>600</c:v>
+                  <c:v>p99</c:v>
                 </c:pt>
-                <c:pt idx="5">
-                  <c:v>1000</c:v>
-                </c:pt>
-              </c:numCache>
-            </c:numRef>
+              </c:strCache>
+            </c:strRef>
           </c:cat>
           <c:val>
             <c:numRef>
-              <c:f>Sheet1!$B$2:$B$7</c:f>
+              <c:f>Sheet1!$B$2:$B$6</c:f>
               <c:numCache>
                 <c:formatCode>General</c:formatCode>
-                <c:ptCount val="6"/>
+                <c:ptCount val="5"/>
                 <c:pt idx="0">
-                  <c:v>1.6</c:v>
+                  <c:v>118.6</c:v>
                 </c:pt>
                 <c:pt idx="1">
-                  <c:v>1.5</c:v>
+                  <c:v>85.9</c:v>
                 </c:pt>
                 <c:pt idx="2">
-                  <c:v>1.9</c:v>
+                  <c:v>231.3</c:v>
                 </c:pt>
                 <c:pt idx="3">
-                  <c:v>2</c:v>
+                  <c:v>262.8</c:v>
                 </c:pt>
                 <c:pt idx="4">
-                  <c:v>2.5</c:v>
-                </c:pt>
-                <c:pt idx="5">
-                  <c:v>1.8</c:v>
+                  <c:v>336.4</c:v>
                 </c:pt>
               </c:numCache>
             </c:numRef>
@@ -1179,7 +1144,7 @@
           <c:smooth val="0"/>
           <c:extLst>
             <c:ext xmlns:c16="http://schemas.microsoft.com/office/drawing/2014/chart" uri="{C3380CC4-5D6E-409C-BE32-E72D297353CC}">
-              <c16:uniqueId val="{00000000-8765-4F86-8417-648054571C15}"/>
+              <c16:uniqueId val="{00000000-60ED-42C5-A820-6554556EFD44}"/>
             </c:ext>
           </c:extLst>
         </c:ser>
@@ -1210,55 +1175,48 @@
             <c:symbol val="none"/>
           </c:marker>
           <c:cat>
-            <c:numRef>
-              <c:f>Sheet1!$A$2:$A$7</c:f>
-              <c:numCache>
-                <c:formatCode>General</c:formatCode>
-                <c:ptCount val="6"/>
+            <c:strRef>
+              <c:f>Sheet1!$A$2:$A$6</c:f>
+              <c:strCache>
+                <c:ptCount val="5"/>
                 <c:pt idx="0">
-                  <c:v>10</c:v>
+                  <c:v>Mean</c:v>
                 </c:pt>
                 <c:pt idx="1">
-                  <c:v>50</c:v>
+                  <c:v>p50</c:v>
                 </c:pt>
                 <c:pt idx="2">
-                  <c:v>150</c:v>
+                  <c:v>p90</c:v>
                 </c:pt>
                 <c:pt idx="3">
-                  <c:v>300</c:v>
+                  <c:v>p95</c:v>
                 </c:pt>
                 <c:pt idx="4">
-                  <c:v>600</c:v>
+                  <c:v>p99</c:v>
                 </c:pt>
-                <c:pt idx="5">
-                  <c:v>1000</c:v>
-                </c:pt>
-              </c:numCache>
-            </c:numRef>
+              </c:strCache>
+            </c:strRef>
           </c:cat>
           <c:val>
             <c:numRef>
-              <c:f>Sheet1!$C$2:$C$7</c:f>
+              <c:f>Sheet1!$C$2:$C$6</c:f>
               <c:numCache>
                 <c:formatCode>General</c:formatCode>
-                <c:ptCount val="6"/>
+                <c:ptCount val="5"/>
                 <c:pt idx="0">
-                  <c:v>1.6</c:v>
+                  <c:v>111.6</c:v>
                 </c:pt>
                 <c:pt idx="1">
-                  <c:v>1.5</c:v>
+                  <c:v>92.9</c:v>
                 </c:pt>
                 <c:pt idx="2">
-                  <c:v>1.5</c:v>
+                  <c:v>194</c:v>
                 </c:pt>
                 <c:pt idx="3">
-                  <c:v>2</c:v>
+                  <c:v>238.1</c:v>
                 </c:pt>
                 <c:pt idx="4">
-                  <c:v>2.5</c:v>
-                </c:pt>
-                <c:pt idx="5">
-                  <c:v>1.8</c:v>
+                  <c:v>318.60000000000002</c:v>
                 </c:pt>
               </c:numCache>
             </c:numRef>
@@ -1266,7 +1224,7 @@
           <c:smooth val="0"/>
           <c:extLst>
             <c:ext xmlns:c16="http://schemas.microsoft.com/office/drawing/2014/chart" uri="{C3380CC4-5D6E-409C-BE32-E72D297353CC}">
-              <c16:uniqueId val="{00000001-8765-4F86-8417-648054571C15}"/>
+              <c16:uniqueId val="{00000001-60ED-42C5-A820-6554556EFD44}"/>
             </c:ext>
           </c:extLst>
         </c:ser>
@@ -1279,11 +1237,11 @@
           <c:showBubbleSize val="0"/>
         </c:dLbls>
         <c:smooth val="0"/>
-        <c:axId val="1142654127"/>
-        <c:axId val="1142671407"/>
+        <c:axId val="1194242784"/>
+        <c:axId val="1194248544"/>
       </c:lineChart>
       <c:catAx>
-        <c:axId val="1142654127"/>
+        <c:axId val="1194242784"/>
         <c:scaling>
           <c:orientation val="minMax"/>
         </c:scaling>
@@ -1326,7 +1284,7 @@
             <a:endParaRPr lang="en-US"/>
           </a:p>
         </c:txPr>
-        <c:crossAx val="1142671407"/>
+        <c:crossAx val="1194248544"/>
         <c:crosses val="autoZero"/>
         <c:auto val="1"/>
         <c:lblAlgn val="ctr"/>
@@ -1334,7 +1292,7 @@
         <c:noMultiLvlLbl val="0"/>
       </c:catAx>
       <c:valAx>
-        <c:axId val="1142671407"/>
+        <c:axId val="1194248544"/>
         <c:scaling>
           <c:orientation val="minMax"/>
         </c:scaling>
@@ -1385,7 +1343,7 @@
             <a:endParaRPr lang="en-US"/>
           </a:p>
         </c:txPr>
-        <c:crossAx val="1142654127"/>
+        <c:crossAx val="1194242784"/>
         <c:crosses val="autoZero"/>
         <c:crossBetween val="between"/>
       </c:valAx>
@@ -1496,10 +1454,9 @@
               </a:defRPr>
             </a:pPr>
             <a:r>
-              <a:rPr lang="it-IT" dirty="0"/>
-              <a:t>p95</a:t>
-            </a:r>
-            <a:endParaRPr lang="en-GB" dirty="0"/>
+              <a:rPr lang="en-GB" dirty="0"/>
+              <a:t>50 RPS – 64 clients</a:t>
+            </a:r>
           </a:p>
         </c:rich>
       </c:tx>
@@ -1528,7 +1485,7 @@
               <a:cs typeface="+mn-cs"/>
             </a:defRPr>
           </a:pPr>
-          <a:endParaRPr lang="en-GB"/>
+          <a:endParaRPr lang="en-US"/>
         </a:p>
       </c:txPr>
     </c:title>
@@ -1565,55 +1522,48 @@
             <c:symbol val="none"/>
           </c:marker>
           <c:cat>
-            <c:numRef>
-              <c:f>Sheet1!$A$2:$A$7</c:f>
-              <c:numCache>
-                <c:formatCode>General</c:formatCode>
-                <c:ptCount val="6"/>
+            <c:strRef>
+              <c:f>Sheet1!$A$2:$A$6</c:f>
+              <c:strCache>
+                <c:ptCount val="5"/>
                 <c:pt idx="0">
-                  <c:v>10</c:v>
+                  <c:v>Mean</c:v>
                 </c:pt>
                 <c:pt idx="1">
-                  <c:v>50</c:v>
+                  <c:v>p50</c:v>
                 </c:pt>
                 <c:pt idx="2">
-                  <c:v>150</c:v>
+                  <c:v>p90</c:v>
                 </c:pt>
                 <c:pt idx="3">
-                  <c:v>300</c:v>
+                  <c:v>p95</c:v>
                 </c:pt>
                 <c:pt idx="4">
-                  <c:v>600</c:v>
+                  <c:v>p99</c:v>
                 </c:pt>
-                <c:pt idx="5">
-                  <c:v>1000</c:v>
-                </c:pt>
-              </c:numCache>
-            </c:numRef>
+              </c:strCache>
+            </c:strRef>
           </c:cat>
           <c:val>
             <c:numRef>
-              <c:f>Sheet1!$B$2:$B$7</c:f>
+              <c:f>Sheet1!$B$2:$B$6</c:f>
               <c:numCache>
                 <c:formatCode>General</c:formatCode>
-                <c:ptCount val="6"/>
+                <c:ptCount val="5"/>
                 <c:pt idx="0">
-                  <c:v>1.7</c:v>
+                  <c:v>6085.9</c:v>
                 </c:pt>
                 <c:pt idx="1">
-                  <c:v>1.9</c:v>
+                  <c:v>6557.9</c:v>
                 </c:pt>
                 <c:pt idx="2">
-                  <c:v>2</c:v>
+                  <c:v>6762.2</c:v>
                 </c:pt>
                 <c:pt idx="3">
-                  <c:v>2.4</c:v>
+                  <c:v>6815</c:v>
                 </c:pt>
                 <c:pt idx="4">
-                  <c:v>2.6</c:v>
-                </c:pt>
-                <c:pt idx="5">
-                  <c:v>2</c:v>
+                  <c:v>7059.8</c:v>
                 </c:pt>
               </c:numCache>
             </c:numRef>
@@ -1621,7 +1571,7 @@
           <c:smooth val="0"/>
           <c:extLst>
             <c:ext xmlns:c16="http://schemas.microsoft.com/office/drawing/2014/chart" uri="{C3380CC4-5D6E-409C-BE32-E72D297353CC}">
-              <c16:uniqueId val="{00000000-7ABB-4CA5-9790-7F86EC874CFA}"/>
+              <c16:uniqueId val="{00000000-9C7D-4FAF-8A31-44310C5516D0}"/>
             </c:ext>
           </c:extLst>
         </c:ser>
@@ -1652,55 +1602,48 @@
             <c:symbol val="none"/>
           </c:marker>
           <c:cat>
-            <c:numRef>
-              <c:f>Sheet1!$A$2:$A$7</c:f>
-              <c:numCache>
-                <c:formatCode>General</c:formatCode>
-                <c:ptCount val="6"/>
+            <c:strRef>
+              <c:f>Sheet1!$A$2:$A$6</c:f>
+              <c:strCache>
+                <c:ptCount val="5"/>
                 <c:pt idx="0">
-                  <c:v>10</c:v>
+                  <c:v>Mean</c:v>
                 </c:pt>
                 <c:pt idx="1">
-                  <c:v>50</c:v>
+                  <c:v>p50</c:v>
                 </c:pt>
                 <c:pt idx="2">
-                  <c:v>150</c:v>
+                  <c:v>p90</c:v>
                 </c:pt>
                 <c:pt idx="3">
-                  <c:v>300</c:v>
+                  <c:v>p95</c:v>
                 </c:pt>
                 <c:pt idx="4">
-                  <c:v>600</c:v>
+                  <c:v>p99</c:v>
                 </c:pt>
-                <c:pt idx="5">
-                  <c:v>1000</c:v>
-                </c:pt>
-              </c:numCache>
-            </c:numRef>
+              </c:strCache>
+            </c:strRef>
           </c:cat>
           <c:val>
             <c:numRef>
-              <c:f>Sheet1!$C$2:$C$7</c:f>
+              <c:f>Sheet1!$C$2:$C$6</c:f>
               <c:numCache>
                 <c:formatCode>General</c:formatCode>
-                <c:ptCount val="6"/>
+                <c:ptCount val="5"/>
                 <c:pt idx="0">
-                  <c:v>1.7</c:v>
+                  <c:v>5910.9</c:v>
                 </c:pt>
                 <c:pt idx="1">
-                  <c:v>1.6</c:v>
+                  <c:v>6363.8</c:v>
                 </c:pt>
                 <c:pt idx="2">
-                  <c:v>2</c:v>
+                  <c:v>6432</c:v>
                 </c:pt>
                 <c:pt idx="3">
-                  <c:v>2.4</c:v>
+                  <c:v>6442.4</c:v>
                 </c:pt>
                 <c:pt idx="4">
-                  <c:v>2.6</c:v>
-                </c:pt>
-                <c:pt idx="5">
-                  <c:v>2</c:v>
+                  <c:v>8558.5</c:v>
                 </c:pt>
               </c:numCache>
             </c:numRef>
@@ -1708,7 +1651,7 @@
           <c:smooth val="0"/>
           <c:extLst>
             <c:ext xmlns:c16="http://schemas.microsoft.com/office/drawing/2014/chart" uri="{C3380CC4-5D6E-409C-BE32-E72D297353CC}">
-              <c16:uniqueId val="{00000001-7ABB-4CA5-9790-7F86EC874CFA}"/>
+              <c16:uniqueId val="{00000001-9C7D-4FAF-8A31-44310C5516D0}"/>
             </c:ext>
           </c:extLst>
         </c:ser>
@@ -1721,11 +1664,11 @@
           <c:showBubbleSize val="0"/>
         </c:dLbls>
         <c:smooth val="0"/>
-        <c:axId val="1142654127"/>
-        <c:axId val="1142671407"/>
+        <c:axId val="1194242784"/>
+        <c:axId val="1194248544"/>
       </c:lineChart>
       <c:catAx>
-        <c:axId val="1142654127"/>
+        <c:axId val="1194242784"/>
         <c:scaling>
           <c:orientation val="minMax"/>
         </c:scaling>
@@ -1768,7 +1711,7 @@
             <a:endParaRPr lang="en-US"/>
           </a:p>
         </c:txPr>
-        <c:crossAx val="1142671407"/>
+        <c:crossAx val="1194248544"/>
         <c:crosses val="autoZero"/>
         <c:auto val="1"/>
         <c:lblAlgn val="ctr"/>
@@ -1776,7 +1719,7 @@
         <c:noMultiLvlLbl val="0"/>
       </c:catAx>
       <c:valAx>
-        <c:axId val="1142671407"/>
+        <c:axId val="1194248544"/>
         <c:scaling>
           <c:orientation val="minMax"/>
         </c:scaling>
@@ -1827,7 +1770,7 @@
             <a:endParaRPr lang="en-US"/>
           </a:p>
         </c:txPr>
-        <c:crossAx val="1142654127"/>
+        <c:crossAx val="1194242784"/>
         <c:crosses val="autoZero"/>
         <c:crossBetween val="between"/>
       </c:valAx>
@@ -1938,10 +1881,9 @@
               </a:defRPr>
             </a:pPr>
             <a:r>
-              <a:rPr lang="it-IT" dirty="0"/>
-              <a:t>p99</a:t>
-            </a:r>
-            <a:endParaRPr lang="en-GB" dirty="0"/>
+              <a:rPr lang="en-GB" dirty="0"/>
+              <a:t>10 RPS – 32 clients</a:t>
+            </a:r>
           </a:p>
         </c:rich>
       </c:tx>
@@ -1970,7 +1912,7 @@
               <a:cs typeface="+mn-cs"/>
             </a:defRPr>
           </a:pPr>
-          <a:endParaRPr lang="en-GB"/>
+          <a:endParaRPr lang="en-US"/>
         </a:p>
       </c:txPr>
     </c:title>
@@ -2007,55 +1949,48 @@
             <c:symbol val="none"/>
           </c:marker>
           <c:cat>
-            <c:numRef>
-              <c:f>Sheet1!$A$2:$A$7</c:f>
-              <c:numCache>
-                <c:formatCode>General</c:formatCode>
-                <c:ptCount val="6"/>
+            <c:strRef>
+              <c:f>Sheet1!$A$2:$A$6</c:f>
+              <c:strCache>
+                <c:ptCount val="5"/>
                 <c:pt idx="0">
-                  <c:v>10</c:v>
+                  <c:v>Mean</c:v>
                 </c:pt>
                 <c:pt idx="1">
-                  <c:v>50</c:v>
+                  <c:v>p50</c:v>
                 </c:pt>
                 <c:pt idx="2">
-                  <c:v>150</c:v>
+                  <c:v>p90</c:v>
                 </c:pt>
                 <c:pt idx="3">
-                  <c:v>300</c:v>
+                  <c:v>p95</c:v>
                 </c:pt>
                 <c:pt idx="4">
-                  <c:v>600</c:v>
+                  <c:v>p99</c:v>
                 </c:pt>
-                <c:pt idx="5">
-                  <c:v>1000</c:v>
-                </c:pt>
-              </c:numCache>
-            </c:numRef>
+              </c:strCache>
+            </c:strRef>
           </c:cat>
           <c:val>
             <c:numRef>
-              <c:f>Sheet1!$B$2:$B$7</c:f>
+              <c:f>Sheet1!$B$2:$B$6</c:f>
               <c:numCache>
                 <c:formatCode>General</c:formatCode>
-                <c:ptCount val="6"/>
+                <c:ptCount val="5"/>
                 <c:pt idx="0">
-                  <c:v>2</c:v>
+                  <c:v>4761.1000000000004</c:v>
                 </c:pt>
                 <c:pt idx="1">
-                  <c:v>2.4</c:v>
+                  <c:v>5497.1</c:v>
                 </c:pt>
                 <c:pt idx="2">
-                  <c:v>2.6</c:v>
+                  <c:v>6425.5</c:v>
                 </c:pt>
                 <c:pt idx="3">
-                  <c:v>2.8</c:v>
+                  <c:v>7769.6</c:v>
                 </c:pt>
                 <c:pt idx="4">
-                  <c:v>3.1</c:v>
-                </c:pt>
-                <c:pt idx="5">
-                  <c:v>2.4</c:v>
+                  <c:v>8756.7000000000007</c:v>
                 </c:pt>
               </c:numCache>
             </c:numRef>
@@ -2063,7 +1998,7 @@
           <c:smooth val="0"/>
           <c:extLst>
             <c:ext xmlns:c16="http://schemas.microsoft.com/office/drawing/2014/chart" uri="{C3380CC4-5D6E-409C-BE32-E72D297353CC}">
-              <c16:uniqueId val="{00000000-DD6B-4CD1-AD19-DAEE2883984C}"/>
+              <c16:uniqueId val="{00000000-DC9A-42C2-86AC-3D04339C79A3}"/>
             </c:ext>
           </c:extLst>
         </c:ser>
@@ -2094,55 +2029,48 @@
             <c:symbol val="none"/>
           </c:marker>
           <c:cat>
-            <c:numRef>
-              <c:f>Sheet1!$A$2:$A$7</c:f>
-              <c:numCache>
-                <c:formatCode>General</c:formatCode>
-                <c:ptCount val="6"/>
+            <c:strRef>
+              <c:f>Sheet1!$A$2:$A$6</c:f>
+              <c:strCache>
+                <c:ptCount val="5"/>
                 <c:pt idx="0">
-                  <c:v>10</c:v>
+                  <c:v>Mean</c:v>
                 </c:pt>
                 <c:pt idx="1">
-                  <c:v>50</c:v>
+                  <c:v>p50</c:v>
                 </c:pt>
                 <c:pt idx="2">
-                  <c:v>150</c:v>
+                  <c:v>p90</c:v>
                 </c:pt>
                 <c:pt idx="3">
-                  <c:v>300</c:v>
+                  <c:v>p95</c:v>
                 </c:pt>
                 <c:pt idx="4">
-                  <c:v>600</c:v>
+                  <c:v>p99</c:v>
                 </c:pt>
-                <c:pt idx="5">
-                  <c:v>1000</c:v>
-                </c:pt>
-              </c:numCache>
-            </c:numRef>
+              </c:strCache>
+            </c:strRef>
           </c:cat>
           <c:val>
             <c:numRef>
-              <c:f>Sheet1!$C$2:$C$7</c:f>
+              <c:f>Sheet1!$C$2:$C$6</c:f>
               <c:numCache>
                 <c:formatCode>General</c:formatCode>
-                <c:ptCount val="6"/>
+                <c:ptCount val="5"/>
                 <c:pt idx="0">
-                  <c:v>2</c:v>
+                  <c:v>4379.8</c:v>
                 </c:pt>
                 <c:pt idx="1">
-                  <c:v>2.2999999999999998</c:v>
+                  <c:v>4847.3999999999996</c:v>
                 </c:pt>
                 <c:pt idx="2">
-                  <c:v>2.5</c:v>
+                  <c:v>6657.7</c:v>
                 </c:pt>
                 <c:pt idx="3">
-                  <c:v>2.9</c:v>
+                  <c:v>7386.8</c:v>
                 </c:pt>
                 <c:pt idx="4">
-                  <c:v>3</c:v>
-                </c:pt>
-                <c:pt idx="5">
-                  <c:v>2.5</c:v>
+                  <c:v>7883.6</c:v>
                 </c:pt>
               </c:numCache>
             </c:numRef>
@@ -2150,7 +2078,7 @@
           <c:smooth val="0"/>
           <c:extLst>
             <c:ext xmlns:c16="http://schemas.microsoft.com/office/drawing/2014/chart" uri="{C3380CC4-5D6E-409C-BE32-E72D297353CC}">
-              <c16:uniqueId val="{00000001-DD6B-4CD1-AD19-DAEE2883984C}"/>
+              <c16:uniqueId val="{00000001-DC9A-42C2-86AC-3D04339C79A3}"/>
             </c:ext>
           </c:extLst>
         </c:ser>
@@ -2163,11 +2091,11 @@
           <c:showBubbleSize val="0"/>
         </c:dLbls>
         <c:smooth val="0"/>
-        <c:axId val="1142654127"/>
-        <c:axId val="1142671407"/>
+        <c:axId val="1194242784"/>
+        <c:axId val="1194248544"/>
       </c:lineChart>
       <c:catAx>
-        <c:axId val="1142654127"/>
+        <c:axId val="1194242784"/>
         <c:scaling>
           <c:orientation val="minMax"/>
         </c:scaling>
@@ -2210,7 +2138,7 @@
             <a:endParaRPr lang="en-US"/>
           </a:p>
         </c:txPr>
-        <c:crossAx val="1142671407"/>
+        <c:crossAx val="1194248544"/>
         <c:crosses val="autoZero"/>
         <c:auto val="1"/>
         <c:lblAlgn val="ctr"/>
@@ -2218,7 +2146,7 @@
         <c:noMultiLvlLbl val="0"/>
       </c:catAx>
       <c:valAx>
-        <c:axId val="1142671407"/>
+        <c:axId val="1194248544"/>
         <c:scaling>
           <c:orientation val="minMax"/>
         </c:scaling>
@@ -2269,7 +2197,7 @@
             <a:endParaRPr lang="en-US"/>
           </a:p>
         </c:txPr>
-        <c:crossAx val="1142654127"/>
+        <c:crossAx val="1194242784"/>
         <c:crosses val="autoZero"/>
         <c:crossBetween val="between"/>
       </c:valAx>
@@ -2381,13 +2309,8 @@
             </a:pPr>
             <a:r>
               <a:rPr lang="en-GB" dirty="0"/>
-              <a:t>RPS </a:t>
-            </a:r>
-            <a:r>
-              <a:rPr lang="en-GB" dirty="0" err="1"/>
-              <a:t>effettivi</a:t>
-            </a:r>
-            <a:endParaRPr lang="en-GB" dirty="0"/>
+              <a:t>50 RPS – 32 clients</a:t>
+            </a:r>
           </a:p>
         </c:rich>
       </c:tx>
@@ -2453,55 +2376,48 @@
             <c:symbol val="none"/>
           </c:marker>
           <c:cat>
-            <c:numRef>
-              <c:f>Sheet1!$A$2:$A$7</c:f>
-              <c:numCache>
-                <c:formatCode>General</c:formatCode>
-                <c:ptCount val="6"/>
+            <c:strRef>
+              <c:f>Sheet1!$A$2:$A$6</c:f>
+              <c:strCache>
+                <c:ptCount val="5"/>
                 <c:pt idx="0">
-                  <c:v>10</c:v>
+                  <c:v>Mean</c:v>
                 </c:pt>
                 <c:pt idx="1">
-                  <c:v>50</c:v>
+                  <c:v>p50</c:v>
                 </c:pt>
                 <c:pt idx="2">
-                  <c:v>150</c:v>
+                  <c:v>p90</c:v>
                 </c:pt>
                 <c:pt idx="3">
-                  <c:v>300</c:v>
+                  <c:v>p95</c:v>
                 </c:pt>
                 <c:pt idx="4">
-                  <c:v>600</c:v>
+                  <c:v>p99</c:v>
                 </c:pt>
-                <c:pt idx="5">
-                  <c:v>1000</c:v>
-                </c:pt>
-              </c:numCache>
-            </c:numRef>
+              </c:strCache>
+            </c:strRef>
           </c:cat>
           <c:val>
             <c:numRef>
-              <c:f>Sheet1!$B$2:$B$7</c:f>
+              <c:f>Sheet1!$B$2:$B$6</c:f>
               <c:numCache>
                 <c:formatCode>General</c:formatCode>
-                <c:ptCount val="6"/>
+                <c:ptCount val="5"/>
                 <c:pt idx="0">
-                  <c:v>0.98000000000000009</c:v>
+                  <c:v>6239.6</c:v>
                 </c:pt>
                 <c:pt idx="1">
-                  <c:v>1.018</c:v>
+                  <c:v>6469.1</c:v>
                 </c:pt>
                 <c:pt idx="2">
-                  <c:v>0.99466666666666659</c:v>
+                  <c:v>6684.9</c:v>
                 </c:pt>
                 <c:pt idx="3">
-                  <c:v>0.98033333333333339</c:v>
+                  <c:v>8073.9</c:v>
                 </c:pt>
                 <c:pt idx="4">
-                  <c:v>0.92383333333333328</c:v>
-                </c:pt>
-                <c:pt idx="5">
-                  <c:v>0.8657999999999999</c:v>
+                  <c:v>9480.7999999999993</c:v>
                 </c:pt>
               </c:numCache>
             </c:numRef>
@@ -2509,7 +2425,7 @@
           <c:smooth val="0"/>
           <c:extLst>
             <c:ext xmlns:c16="http://schemas.microsoft.com/office/drawing/2014/chart" uri="{C3380CC4-5D6E-409C-BE32-E72D297353CC}">
-              <c16:uniqueId val="{00000000-827A-4ACC-866C-B6913B47DB8D}"/>
+              <c16:uniqueId val="{00000000-41F4-46D2-9E32-1BB436EA7AB6}"/>
             </c:ext>
           </c:extLst>
         </c:ser>
@@ -2540,55 +2456,48 @@
             <c:symbol val="none"/>
           </c:marker>
           <c:cat>
-            <c:numRef>
-              <c:f>Sheet1!$A$2:$A$7</c:f>
-              <c:numCache>
-                <c:formatCode>General</c:formatCode>
-                <c:ptCount val="6"/>
+            <c:strRef>
+              <c:f>Sheet1!$A$2:$A$6</c:f>
+              <c:strCache>
+                <c:ptCount val="5"/>
                 <c:pt idx="0">
-                  <c:v>10</c:v>
+                  <c:v>Mean</c:v>
                 </c:pt>
                 <c:pt idx="1">
-                  <c:v>50</c:v>
+                  <c:v>p50</c:v>
                 </c:pt>
                 <c:pt idx="2">
-                  <c:v>150</c:v>
+                  <c:v>p90</c:v>
                 </c:pt>
                 <c:pt idx="3">
-                  <c:v>300</c:v>
+                  <c:v>p95</c:v>
                 </c:pt>
                 <c:pt idx="4">
-                  <c:v>600</c:v>
+                  <c:v>p99</c:v>
                 </c:pt>
-                <c:pt idx="5">
-                  <c:v>1000</c:v>
-                </c:pt>
-              </c:numCache>
-            </c:numRef>
+              </c:strCache>
+            </c:strRef>
           </c:cat>
           <c:val>
             <c:numRef>
-              <c:f>Sheet1!$C$2:$C$7</c:f>
+              <c:f>Sheet1!$C$2:$C$6</c:f>
               <c:numCache>
                 <c:formatCode>General</c:formatCode>
-                <c:ptCount val="6"/>
+                <c:ptCount val="5"/>
                 <c:pt idx="0">
-                  <c:v>0.97</c:v>
+                  <c:v>6106.7</c:v>
                 </c:pt>
                 <c:pt idx="1">
-                  <c:v>1.002</c:v>
+                  <c:v>6294.7</c:v>
                 </c:pt>
                 <c:pt idx="2">
-                  <c:v>0.97729999999999995</c:v>
+                  <c:v>6627.2</c:v>
                 </c:pt>
                 <c:pt idx="3">
-                  <c:v>0.97267000000000003</c:v>
+                  <c:v>8255.6</c:v>
                 </c:pt>
                 <c:pt idx="4">
-                  <c:v>0.92849999999999999</c:v>
-                </c:pt>
-                <c:pt idx="5">
-                  <c:v>0.86890000000000001</c:v>
+                  <c:v>9232.4</c:v>
                 </c:pt>
               </c:numCache>
             </c:numRef>
@@ -2596,7 +2505,7 @@
           <c:smooth val="0"/>
           <c:extLst>
             <c:ext xmlns:c16="http://schemas.microsoft.com/office/drawing/2014/chart" uri="{C3380CC4-5D6E-409C-BE32-E72D297353CC}">
-              <c16:uniqueId val="{00000001-827A-4ACC-866C-B6913B47DB8D}"/>
+              <c16:uniqueId val="{00000001-41F4-46D2-9E32-1BB436EA7AB6}"/>
             </c:ext>
           </c:extLst>
         </c:ser>
@@ -2609,11 +2518,11 @@
           <c:showBubbleSize val="0"/>
         </c:dLbls>
         <c:smooth val="0"/>
-        <c:axId val="1139414975"/>
-        <c:axId val="1139414015"/>
+        <c:axId val="1194242784"/>
+        <c:axId val="1194248544"/>
       </c:lineChart>
       <c:catAx>
-        <c:axId val="1139414975"/>
+        <c:axId val="1194242784"/>
         <c:scaling>
           <c:orientation val="minMax"/>
         </c:scaling>
@@ -2656,7 +2565,7 @@
             <a:endParaRPr lang="en-US"/>
           </a:p>
         </c:txPr>
-        <c:crossAx val="1139414015"/>
+        <c:crossAx val="1194248544"/>
         <c:crosses val="autoZero"/>
         <c:auto val="1"/>
         <c:lblAlgn val="ctr"/>
@@ -2664,7 +2573,7 @@
         <c:noMultiLvlLbl val="0"/>
       </c:catAx>
       <c:valAx>
-        <c:axId val="1139414015"/>
+        <c:axId val="1194248544"/>
         <c:scaling>
           <c:orientation val="minMax"/>
         </c:scaling>
@@ -2715,7 +2624,7 @@
             <a:endParaRPr lang="en-US"/>
           </a:p>
         </c:txPr>
-        <c:crossAx val="1139414975"/>
+        <c:crossAx val="1194242784"/>
         <c:crosses val="autoZero"/>
         <c:crossBetween val="between"/>
       </c:valAx>
@@ -2759,7 +2668,1308 @@
       </c:txPr>
     </c:legend>
     <c:plotVisOnly val="1"/>
-    <c:dispBlanksAs val="zero"/>
+    <c:dispBlanksAs val="gap"/>
+    <c:showDLblsOverMax val="0"/>
+    <c:extLst>
+      <c:ext xmlns:c16r3="http://schemas.microsoft.com/office/drawing/2017/03/chart" uri="{56B9EC1D-385E-4148-901F-78D8002777C0}">
+        <c16r3:dataDisplayOptions16>
+          <c16r3:dispNaAsBlank val="1"/>
+        </c16r3:dataDisplayOptions16>
+      </c:ext>
+    </c:extLst>
+  </c:chart>
+  <c:spPr>
+    <a:noFill/>
+    <a:ln>
+      <a:noFill/>
+    </a:ln>
+    <a:effectLst/>
+  </c:spPr>
+  <c:txPr>
+    <a:bodyPr/>
+    <a:lstStyle/>
+    <a:p>
+      <a:pPr>
+        <a:defRPr/>
+      </a:pPr>
+      <a:endParaRPr lang="en-US"/>
+    </a:p>
+  </c:txPr>
+  <c:externalData r:id="rId3">
+    <c:autoUpdate val="0"/>
+  </c:externalData>
+</c:chartSpace>
+</file>
+
+<file path=ppt/charts/chart7.xml><?xml version="1.0" encoding="utf-8"?>
+<c:chartSpace xmlns:c="http://schemas.openxmlformats.org/drawingml/2006/chart" xmlns:a="http://schemas.openxmlformats.org/drawingml/2006/main" xmlns:r="http://schemas.openxmlformats.org/officeDocument/2006/relationships" xmlns:c16r2="http://schemas.microsoft.com/office/drawing/2015/06/chart">
+  <c:date1904 val="0"/>
+  <c:lang val="en-GB"/>
+  <c:roundedCorners val="0"/>
+  <mc:AlternateContent xmlns:mc="http://schemas.openxmlformats.org/markup-compatibility/2006">
+    <mc:Choice xmlns:c14="http://schemas.microsoft.com/office/drawing/2007/8/2/chart" Requires="c14">
+      <c14:style val="102"/>
+    </mc:Choice>
+    <mc:Fallback>
+      <c:style val="2"/>
+    </mc:Fallback>
+  </mc:AlternateContent>
+  <c:chart>
+    <c:title>
+      <c:tx>
+        <c:rich>
+          <a:bodyPr rot="0" spcFirstLastPara="1" vertOverflow="ellipsis" vert="horz" wrap="square" anchor="ctr" anchorCtr="1"/>
+          <a:lstStyle/>
+          <a:p>
+            <a:pPr>
+              <a:defRPr sz="1862" b="0" i="0" u="none" strike="noStrike" kern="1200" spc="0" baseline="0">
+                <a:solidFill>
+                  <a:schemeClr val="tx1">
+                    <a:lumMod val="65000"/>
+                    <a:lumOff val="35000"/>
+                  </a:schemeClr>
+                </a:solidFill>
+                <a:latin typeface="+mn-lt"/>
+                <a:ea typeface="+mn-ea"/>
+                <a:cs typeface="+mn-cs"/>
+              </a:defRPr>
+            </a:pPr>
+            <a:r>
+              <a:rPr lang="en-GB" dirty="0"/>
+              <a:t>10 RPS – 64 clients</a:t>
+            </a:r>
+          </a:p>
+        </c:rich>
+      </c:tx>
+      <c:overlay val="0"/>
+      <c:spPr>
+        <a:noFill/>
+        <a:ln>
+          <a:noFill/>
+        </a:ln>
+        <a:effectLst/>
+      </c:spPr>
+      <c:txPr>
+        <a:bodyPr rot="0" spcFirstLastPara="1" vertOverflow="ellipsis" vert="horz" wrap="square" anchor="ctr" anchorCtr="1"/>
+        <a:lstStyle/>
+        <a:p>
+          <a:pPr>
+            <a:defRPr sz="1862" b="0" i="0" u="none" strike="noStrike" kern="1200" spc="0" baseline="0">
+              <a:solidFill>
+                <a:schemeClr val="tx1">
+                  <a:lumMod val="65000"/>
+                  <a:lumOff val="35000"/>
+                </a:schemeClr>
+              </a:solidFill>
+              <a:latin typeface="+mn-lt"/>
+              <a:ea typeface="+mn-ea"/>
+              <a:cs typeface="+mn-cs"/>
+            </a:defRPr>
+          </a:pPr>
+          <a:endParaRPr lang="en-US"/>
+        </a:p>
+      </c:txPr>
+    </c:title>
+    <c:autoTitleDeleted val="0"/>
+    <c:plotArea>
+      <c:layout/>
+      <c:lineChart>
+        <c:grouping val="standard"/>
+        <c:varyColors val="0"/>
+        <c:ser>
+          <c:idx val="0"/>
+          <c:order val="0"/>
+          <c:tx>
+            <c:strRef>
+              <c:f>Sheet1!$B$1</c:f>
+              <c:strCache>
+                <c:ptCount val="1"/>
+                <c:pt idx="0">
+                  <c:v>Python nativo</c:v>
+                </c:pt>
+              </c:strCache>
+            </c:strRef>
+          </c:tx>
+          <c:spPr>
+            <a:ln w="28575" cap="rnd">
+              <a:solidFill>
+                <a:schemeClr val="accent1"/>
+              </a:solidFill>
+              <a:round/>
+            </a:ln>
+            <a:effectLst/>
+          </c:spPr>
+          <c:marker>
+            <c:symbol val="none"/>
+          </c:marker>
+          <c:cat>
+            <c:strRef>
+              <c:f>Sheet1!$A$2:$A$6</c:f>
+              <c:strCache>
+                <c:ptCount val="5"/>
+                <c:pt idx="0">
+                  <c:v>Mean</c:v>
+                </c:pt>
+                <c:pt idx="1">
+                  <c:v>p50</c:v>
+                </c:pt>
+                <c:pt idx="2">
+                  <c:v>p90</c:v>
+                </c:pt>
+                <c:pt idx="3">
+                  <c:v>p95</c:v>
+                </c:pt>
+                <c:pt idx="4">
+                  <c:v>p99</c:v>
+                </c:pt>
+              </c:strCache>
+            </c:strRef>
+          </c:cat>
+          <c:val>
+            <c:numRef>
+              <c:f>Sheet1!$B$2:$B$6</c:f>
+              <c:numCache>
+                <c:formatCode>General</c:formatCode>
+                <c:ptCount val="5"/>
+                <c:pt idx="0">
+                  <c:v>4969.6000000000004</c:v>
+                </c:pt>
+                <c:pt idx="1">
+                  <c:v>4855.8</c:v>
+                </c:pt>
+                <c:pt idx="2">
+                  <c:v>10282.299999999999</c:v>
+                </c:pt>
+                <c:pt idx="3">
+                  <c:v>12558.8</c:v>
+                </c:pt>
+                <c:pt idx="4">
+                  <c:v>16011.5</c:v>
+                </c:pt>
+              </c:numCache>
+            </c:numRef>
+          </c:val>
+          <c:smooth val="0"/>
+          <c:extLst>
+            <c:ext xmlns:c16="http://schemas.microsoft.com/office/drawing/2014/chart" uri="{C3380CC4-5D6E-409C-BE32-E72D297353CC}">
+              <c16:uniqueId val="{00000000-60ED-42C5-A820-6554556EFD44}"/>
+            </c:ext>
+          </c:extLst>
+        </c:ser>
+        <c:ser>
+          <c:idx val="1"/>
+          <c:order val="1"/>
+          <c:tx>
+            <c:strRef>
+              <c:f>Sheet1!$C$1</c:f>
+              <c:strCache>
+                <c:ptCount val="1"/>
+                <c:pt idx="0">
+                  <c:v>Onnx</c:v>
+                </c:pt>
+              </c:strCache>
+            </c:strRef>
+          </c:tx>
+          <c:spPr>
+            <a:ln w="28575" cap="rnd">
+              <a:solidFill>
+                <a:schemeClr val="accent2"/>
+              </a:solidFill>
+              <a:round/>
+            </a:ln>
+            <a:effectLst/>
+          </c:spPr>
+          <c:marker>
+            <c:symbol val="none"/>
+          </c:marker>
+          <c:cat>
+            <c:strRef>
+              <c:f>Sheet1!$A$2:$A$6</c:f>
+              <c:strCache>
+                <c:ptCount val="5"/>
+                <c:pt idx="0">
+                  <c:v>Mean</c:v>
+                </c:pt>
+                <c:pt idx="1">
+                  <c:v>p50</c:v>
+                </c:pt>
+                <c:pt idx="2">
+                  <c:v>p90</c:v>
+                </c:pt>
+                <c:pt idx="3">
+                  <c:v>p95</c:v>
+                </c:pt>
+                <c:pt idx="4">
+                  <c:v>p99</c:v>
+                </c:pt>
+              </c:strCache>
+            </c:strRef>
+          </c:cat>
+          <c:val>
+            <c:numRef>
+              <c:f>Sheet1!$C$2:$C$6</c:f>
+              <c:numCache>
+                <c:formatCode>General</c:formatCode>
+                <c:ptCount val="5"/>
+                <c:pt idx="0">
+                  <c:v>3955.8</c:v>
+                </c:pt>
+                <c:pt idx="1">
+                  <c:v>2879.5</c:v>
+                </c:pt>
+                <c:pt idx="2">
+                  <c:v>7524</c:v>
+                </c:pt>
+                <c:pt idx="3">
+                  <c:v>10077.4</c:v>
+                </c:pt>
+                <c:pt idx="4">
+                  <c:v>14978.8</c:v>
+                </c:pt>
+              </c:numCache>
+            </c:numRef>
+          </c:val>
+          <c:smooth val="0"/>
+          <c:extLst>
+            <c:ext xmlns:c16="http://schemas.microsoft.com/office/drawing/2014/chart" uri="{C3380CC4-5D6E-409C-BE32-E72D297353CC}">
+              <c16:uniqueId val="{00000001-60ED-42C5-A820-6554556EFD44}"/>
+            </c:ext>
+          </c:extLst>
+        </c:ser>
+        <c:dLbls>
+          <c:showLegendKey val="0"/>
+          <c:showVal val="0"/>
+          <c:showCatName val="0"/>
+          <c:showSerName val="0"/>
+          <c:showPercent val="0"/>
+          <c:showBubbleSize val="0"/>
+        </c:dLbls>
+        <c:smooth val="0"/>
+        <c:axId val="1194242784"/>
+        <c:axId val="1194248544"/>
+      </c:lineChart>
+      <c:catAx>
+        <c:axId val="1194242784"/>
+        <c:scaling>
+          <c:orientation val="minMax"/>
+        </c:scaling>
+        <c:delete val="0"/>
+        <c:axPos val="b"/>
+        <c:numFmt formatCode="General" sourceLinked="1"/>
+        <c:majorTickMark val="none"/>
+        <c:minorTickMark val="none"/>
+        <c:tickLblPos val="nextTo"/>
+        <c:spPr>
+          <a:noFill/>
+          <a:ln w="9525" cap="flat" cmpd="sng" algn="ctr">
+            <a:solidFill>
+              <a:schemeClr val="tx1">
+                <a:lumMod val="15000"/>
+                <a:lumOff val="85000"/>
+              </a:schemeClr>
+            </a:solidFill>
+            <a:round/>
+          </a:ln>
+          <a:effectLst/>
+        </c:spPr>
+        <c:txPr>
+          <a:bodyPr rot="-60000000" spcFirstLastPara="1" vertOverflow="ellipsis" vert="horz" wrap="square" anchor="ctr" anchorCtr="1"/>
+          <a:lstStyle/>
+          <a:p>
+            <a:pPr>
+              <a:defRPr sz="1197" b="0" i="0" u="none" strike="noStrike" kern="1200" baseline="0">
+                <a:solidFill>
+                  <a:schemeClr val="tx1">
+                    <a:lumMod val="65000"/>
+                    <a:lumOff val="35000"/>
+                  </a:schemeClr>
+                </a:solidFill>
+                <a:latin typeface="+mn-lt"/>
+                <a:ea typeface="+mn-ea"/>
+                <a:cs typeface="+mn-cs"/>
+              </a:defRPr>
+            </a:pPr>
+            <a:endParaRPr lang="en-US"/>
+          </a:p>
+        </c:txPr>
+        <c:crossAx val="1194248544"/>
+        <c:crosses val="autoZero"/>
+        <c:auto val="1"/>
+        <c:lblAlgn val="ctr"/>
+        <c:lblOffset val="100"/>
+        <c:noMultiLvlLbl val="0"/>
+      </c:catAx>
+      <c:valAx>
+        <c:axId val="1194248544"/>
+        <c:scaling>
+          <c:orientation val="minMax"/>
+        </c:scaling>
+        <c:delete val="0"/>
+        <c:axPos val="l"/>
+        <c:majorGridlines>
+          <c:spPr>
+            <a:ln w="9525" cap="flat" cmpd="sng" algn="ctr">
+              <a:solidFill>
+                <a:schemeClr val="tx1">
+                  <a:lumMod val="15000"/>
+                  <a:lumOff val="85000"/>
+                </a:schemeClr>
+              </a:solidFill>
+              <a:round/>
+            </a:ln>
+            <a:effectLst/>
+          </c:spPr>
+        </c:majorGridlines>
+        <c:numFmt formatCode="General" sourceLinked="1"/>
+        <c:majorTickMark val="none"/>
+        <c:minorTickMark val="none"/>
+        <c:tickLblPos val="nextTo"/>
+        <c:spPr>
+          <a:noFill/>
+          <a:ln>
+            <a:noFill/>
+          </a:ln>
+          <a:effectLst/>
+        </c:spPr>
+        <c:txPr>
+          <a:bodyPr rot="-60000000" spcFirstLastPara="1" vertOverflow="ellipsis" vert="horz" wrap="square" anchor="ctr" anchorCtr="1"/>
+          <a:lstStyle/>
+          <a:p>
+            <a:pPr>
+              <a:defRPr sz="1197" b="0" i="0" u="none" strike="noStrike" kern="1200" baseline="0">
+                <a:solidFill>
+                  <a:schemeClr val="tx1">
+                    <a:lumMod val="65000"/>
+                    <a:lumOff val="35000"/>
+                  </a:schemeClr>
+                </a:solidFill>
+                <a:latin typeface="+mn-lt"/>
+                <a:ea typeface="+mn-ea"/>
+                <a:cs typeface="+mn-cs"/>
+              </a:defRPr>
+            </a:pPr>
+            <a:endParaRPr lang="en-US"/>
+          </a:p>
+        </c:txPr>
+        <c:crossAx val="1194242784"/>
+        <c:crosses val="autoZero"/>
+        <c:crossBetween val="between"/>
+      </c:valAx>
+      <c:spPr>
+        <a:noFill/>
+        <a:ln>
+          <a:noFill/>
+        </a:ln>
+        <a:effectLst/>
+      </c:spPr>
+    </c:plotArea>
+    <c:legend>
+      <c:legendPos val="b"/>
+      <c:overlay val="0"/>
+      <c:spPr>
+        <a:noFill/>
+        <a:ln>
+          <a:noFill/>
+        </a:ln>
+        <a:effectLst/>
+      </c:spPr>
+      <c:txPr>
+        <a:bodyPr rot="0" spcFirstLastPara="1" vertOverflow="ellipsis" vert="horz" wrap="square" anchor="ctr" anchorCtr="1"/>
+        <a:lstStyle/>
+        <a:p>
+          <a:pPr>
+            <a:defRPr sz="1197" b="0" i="0" u="none" strike="noStrike" kern="1200" baseline="0">
+              <a:solidFill>
+                <a:schemeClr val="tx1">
+                  <a:lumMod val="65000"/>
+                  <a:lumOff val="35000"/>
+                </a:schemeClr>
+              </a:solidFill>
+              <a:latin typeface="+mn-lt"/>
+              <a:ea typeface="+mn-ea"/>
+              <a:cs typeface="+mn-cs"/>
+            </a:defRPr>
+          </a:pPr>
+          <a:endParaRPr lang="en-US"/>
+        </a:p>
+      </c:txPr>
+    </c:legend>
+    <c:plotVisOnly val="1"/>
+    <c:dispBlanksAs val="gap"/>
+    <c:showDLblsOverMax val="0"/>
+    <c:extLst>
+      <c:ext xmlns:c16r3="http://schemas.microsoft.com/office/drawing/2017/03/chart" uri="{56B9EC1D-385E-4148-901F-78D8002777C0}">
+        <c16r3:dataDisplayOptions16>
+          <c16r3:dispNaAsBlank val="1"/>
+        </c16r3:dataDisplayOptions16>
+      </c:ext>
+    </c:extLst>
+  </c:chart>
+  <c:spPr>
+    <a:noFill/>
+    <a:ln>
+      <a:noFill/>
+    </a:ln>
+    <a:effectLst/>
+  </c:spPr>
+  <c:txPr>
+    <a:bodyPr/>
+    <a:lstStyle/>
+    <a:p>
+      <a:pPr>
+        <a:defRPr/>
+      </a:pPr>
+      <a:endParaRPr lang="en-US"/>
+    </a:p>
+  </c:txPr>
+  <c:externalData r:id="rId3">
+    <c:autoUpdate val="0"/>
+  </c:externalData>
+</c:chartSpace>
+</file>
+
+<file path=ppt/charts/chart8.xml><?xml version="1.0" encoding="utf-8"?>
+<c:chartSpace xmlns:c="http://schemas.openxmlformats.org/drawingml/2006/chart" xmlns:a="http://schemas.openxmlformats.org/drawingml/2006/main" xmlns:r="http://schemas.openxmlformats.org/officeDocument/2006/relationships" xmlns:c16r2="http://schemas.microsoft.com/office/drawing/2015/06/chart">
+  <c:date1904 val="0"/>
+  <c:lang val="en-GB"/>
+  <c:roundedCorners val="0"/>
+  <mc:AlternateContent xmlns:mc="http://schemas.openxmlformats.org/markup-compatibility/2006">
+    <mc:Choice xmlns:c14="http://schemas.microsoft.com/office/drawing/2007/8/2/chart" Requires="c14">
+      <c14:style val="102"/>
+    </mc:Choice>
+    <mc:Fallback>
+      <c:style val="2"/>
+    </mc:Fallback>
+  </mc:AlternateContent>
+  <c:chart>
+    <c:title>
+      <c:tx>
+        <c:rich>
+          <a:bodyPr rot="0" spcFirstLastPara="1" vertOverflow="ellipsis" vert="horz" wrap="square" anchor="ctr" anchorCtr="1"/>
+          <a:lstStyle/>
+          <a:p>
+            <a:pPr>
+              <a:defRPr sz="1862" b="0" i="0" u="none" strike="noStrike" kern="1200" spc="0" baseline="0">
+                <a:solidFill>
+                  <a:schemeClr val="tx1">
+                    <a:lumMod val="65000"/>
+                    <a:lumOff val="35000"/>
+                  </a:schemeClr>
+                </a:solidFill>
+                <a:latin typeface="+mn-lt"/>
+                <a:ea typeface="+mn-ea"/>
+                <a:cs typeface="+mn-cs"/>
+              </a:defRPr>
+            </a:pPr>
+            <a:r>
+              <a:rPr lang="en-GB" dirty="0"/>
+              <a:t>50 RPS – 64 clients</a:t>
+            </a:r>
+          </a:p>
+        </c:rich>
+      </c:tx>
+      <c:overlay val="0"/>
+      <c:spPr>
+        <a:noFill/>
+        <a:ln>
+          <a:noFill/>
+        </a:ln>
+        <a:effectLst/>
+      </c:spPr>
+      <c:txPr>
+        <a:bodyPr rot="0" spcFirstLastPara="1" vertOverflow="ellipsis" vert="horz" wrap="square" anchor="ctr" anchorCtr="1"/>
+        <a:lstStyle/>
+        <a:p>
+          <a:pPr>
+            <a:defRPr sz="1862" b="0" i="0" u="none" strike="noStrike" kern="1200" spc="0" baseline="0">
+              <a:solidFill>
+                <a:schemeClr val="tx1">
+                  <a:lumMod val="65000"/>
+                  <a:lumOff val="35000"/>
+                </a:schemeClr>
+              </a:solidFill>
+              <a:latin typeface="+mn-lt"/>
+              <a:ea typeface="+mn-ea"/>
+              <a:cs typeface="+mn-cs"/>
+            </a:defRPr>
+          </a:pPr>
+          <a:endParaRPr lang="en-US"/>
+        </a:p>
+      </c:txPr>
+    </c:title>
+    <c:autoTitleDeleted val="0"/>
+    <c:plotArea>
+      <c:layout/>
+      <c:lineChart>
+        <c:grouping val="standard"/>
+        <c:varyColors val="0"/>
+        <c:ser>
+          <c:idx val="0"/>
+          <c:order val="0"/>
+          <c:tx>
+            <c:strRef>
+              <c:f>Sheet1!$B$1</c:f>
+              <c:strCache>
+                <c:ptCount val="1"/>
+                <c:pt idx="0">
+                  <c:v>Python nativo</c:v>
+                </c:pt>
+              </c:strCache>
+            </c:strRef>
+          </c:tx>
+          <c:spPr>
+            <a:ln w="28575" cap="rnd">
+              <a:solidFill>
+                <a:schemeClr val="accent1"/>
+              </a:solidFill>
+              <a:round/>
+            </a:ln>
+            <a:effectLst/>
+          </c:spPr>
+          <c:marker>
+            <c:symbol val="none"/>
+          </c:marker>
+          <c:cat>
+            <c:strRef>
+              <c:f>Sheet1!$A$2:$A$6</c:f>
+              <c:strCache>
+                <c:ptCount val="5"/>
+                <c:pt idx="0">
+                  <c:v>Mean</c:v>
+                </c:pt>
+                <c:pt idx="1">
+                  <c:v>p50</c:v>
+                </c:pt>
+                <c:pt idx="2">
+                  <c:v>p90</c:v>
+                </c:pt>
+                <c:pt idx="3">
+                  <c:v>p95</c:v>
+                </c:pt>
+                <c:pt idx="4">
+                  <c:v>p99</c:v>
+                </c:pt>
+              </c:strCache>
+            </c:strRef>
+          </c:cat>
+          <c:val>
+            <c:numRef>
+              <c:f>Sheet1!$B$2:$B$6</c:f>
+              <c:numCache>
+                <c:formatCode>General</c:formatCode>
+                <c:ptCount val="5"/>
+                <c:pt idx="0">
+                  <c:v>9275.2000000000007</c:v>
+                </c:pt>
+                <c:pt idx="1">
+                  <c:v>8297.7000000000007</c:v>
+                </c:pt>
+                <c:pt idx="2">
+                  <c:v>14084</c:v>
+                </c:pt>
+                <c:pt idx="3">
+                  <c:v>19135.900000000001</c:v>
+                </c:pt>
+                <c:pt idx="4">
+                  <c:v>22981.8</c:v>
+                </c:pt>
+              </c:numCache>
+            </c:numRef>
+          </c:val>
+          <c:smooth val="0"/>
+          <c:extLst>
+            <c:ext xmlns:c16="http://schemas.microsoft.com/office/drawing/2014/chart" uri="{C3380CC4-5D6E-409C-BE32-E72D297353CC}">
+              <c16:uniqueId val="{00000000-9C7D-4FAF-8A31-44310C5516D0}"/>
+            </c:ext>
+          </c:extLst>
+        </c:ser>
+        <c:ser>
+          <c:idx val="1"/>
+          <c:order val="1"/>
+          <c:tx>
+            <c:strRef>
+              <c:f>Sheet1!$C$1</c:f>
+              <c:strCache>
+                <c:ptCount val="1"/>
+                <c:pt idx="0">
+                  <c:v>Onnx</c:v>
+                </c:pt>
+              </c:strCache>
+            </c:strRef>
+          </c:tx>
+          <c:spPr>
+            <a:ln w="28575" cap="rnd">
+              <a:solidFill>
+                <a:schemeClr val="accent2"/>
+              </a:solidFill>
+              <a:round/>
+            </a:ln>
+            <a:effectLst/>
+          </c:spPr>
+          <c:marker>
+            <c:symbol val="none"/>
+          </c:marker>
+          <c:cat>
+            <c:strRef>
+              <c:f>Sheet1!$A$2:$A$6</c:f>
+              <c:strCache>
+                <c:ptCount val="5"/>
+                <c:pt idx="0">
+                  <c:v>Mean</c:v>
+                </c:pt>
+                <c:pt idx="1">
+                  <c:v>p50</c:v>
+                </c:pt>
+                <c:pt idx="2">
+                  <c:v>p90</c:v>
+                </c:pt>
+                <c:pt idx="3">
+                  <c:v>p95</c:v>
+                </c:pt>
+                <c:pt idx="4">
+                  <c:v>p99</c:v>
+                </c:pt>
+              </c:strCache>
+            </c:strRef>
+          </c:cat>
+          <c:val>
+            <c:numRef>
+              <c:f>Sheet1!$C$2:$C$6</c:f>
+              <c:numCache>
+                <c:formatCode>General</c:formatCode>
+                <c:ptCount val="5"/>
+                <c:pt idx="0">
+                  <c:v>8963.2000000000007</c:v>
+                </c:pt>
+                <c:pt idx="1">
+                  <c:v>8356.5</c:v>
+                </c:pt>
+                <c:pt idx="2">
+                  <c:v>13454.7</c:v>
+                </c:pt>
+                <c:pt idx="3">
+                  <c:v>17848.3</c:v>
+                </c:pt>
+                <c:pt idx="4">
+                  <c:v>21365.5</c:v>
+                </c:pt>
+              </c:numCache>
+            </c:numRef>
+          </c:val>
+          <c:smooth val="0"/>
+          <c:extLst>
+            <c:ext xmlns:c16="http://schemas.microsoft.com/office/drawing/2014/chart" uri="{C3380CC4-5D6E-409C-BE32-E72D297353CC}">
+              <c16:uniqueId val="{00000001-9C7D-4FAF-8A31-44310C5516D0}"/>
+            </c:ext>
+          </c:extLst>
+        </c:ser>
+        <c:dLbls>
+          <c:showLegendKey val="0"/>
+          <c:showVal val="0"/>
+          <c:showCatName val="0"/>
+          <c:showSerName val="0"/>
+          <c:showPercent val="0"/>
+          <c:showBubbleSize val="0"/>
+        </c:dLbls>
+        <c:smooth val="0"/>
+        <c:axId val="1194242784"/>
+        <c:axId val="1194248544"/>
+      </c:lineChart>
+      <c:catAx>
+        <c:axId val="1194242784"/>
+        <c:scaling>
+          <c:orientation val="minMax"/>
+        </c:scaling>
+        <c:delete val="0"/>
+        <c:axPos val="b"/>
+        <c:numFmt formatCode="General" sourceLinked="1"/>
+        <c:majorTickMark val="none"/>
+        <c:minorTickMark val="none"/>
+        <c:tickLblPos val="nextTo"/>
+        <c:spPr>
+          <a:noFill/>
+          <a:ln w="9525" cap="flat" cmpd="sng" algn="ctr">
+            <a:solidFill>
+              <a:schemeClr val="tx1">
+                <a:lumMod val="15000"/>
+                <a:lumOff val="85000"/>
+              </a:schemeClr>
+            </a:solidFill>
+            <a:round/>
+          </a:ln>
+          <a:effectLst/>
+        </c:spPr>
+        <c:txPr>
+          <a:bodyPr rot="-60000000" spcFirstLastPara="1" vertOverflow="ellipsis" vert="horz" wrap="square" anchor="ctr" anchorCtr="1"/>
+          <a:lstStyle/>
+          <a:p>
+            <a:pPr>
+              <a:defRPr sz="1197" b="0" i="0" u="none" strike="noStrike" kern="1200" baseline="0">
+                <a:solidFill>
+                  <a:schemeClr val="tx1">
+                    <a:lumMod val="65000"/>
+                    <a:lumOff val="35000"/>
+                  </a:schemeClr>
+                </a:solidFill>
+                <a:latin typeface="+mn-lt"/>
+                <a:ea typeface="+mn-ea"/>
+                <a:cs typeface="+mn-cs"/>
+              </a:defRPr>
+            </a:pPr>
+            <a:endParaRPr lang="en-US"/>
+          </a:p>
+        </c:txPr>
+        <c:crossAx val="1194248544"/>
+        <c:crosses val="autoZero"/>
+        <c:auto val="1"/>
+        <c:lblAlgn val="ctr"/>
+        <c:lblOffset val="100"/>
+        <c:noMultiLvlLbl val="0"/>
+      </c:catAx>
+      <c:valAx>
+        <c:axId val="1194248544"/>
+        <c:scaling>
+          <c:orientation val="minMax"/>
+        </c:scaling>
+        <c:delete val="0"/>
+        <c:axPos val="l"/>
+        <c:majorGridlines>
+          <c:spPr>
+            <a:ln w="9525" cap="flat" cmpd="sng" algn="ctr">
+              <a:solidFill>
+                <a:schemeClr val="tx1">
+                  <a:lumMod val="15000"/>
+                  <a:lumOff val="85000"/>
+                </a:schemeClr>
+              </a:solidFill>
+              <a:round/>
+            </a:ln>
+            <a:effectLst/>
+          </c:spPr>
+        </c:majorGridlines>
+        <c:numFmt formatCode="General" sourceLinked="1"/>
+        <c:majorTickMark val="none"/>
+        <c:minorTickMark val="none"/>
+        <c:tickLblPos val="nextTo"/>
+        <c:spPr>
+          <a:noFill/>
+          <a:ln>
+            <a:noFill/>
+          </a:ln>
+          <a:effectLst/>
+        </c:spPr>
+        <c:txPr>
+          <a:bodyPr rot="-60000000" spcFirstLastPara="1" vertOverflow="ellipsis" vert="horz" wrap="square" anchor="ctr" anchorCtr="1"/>
+          <a:lstStyle/>
+          <a:p>
+            <a:pPr>
+              <a:defRPr sz="1197" b="0" i="0" u="none" strike="noStrike" kern="1200" baseline="0">
+                <a:solidFill>
+                  <a:schemeClr val="tx1">
+                    <a:lumMod val="65000"/>
+                    <a:lumOff val="35000"/>
+                  </a:schemeClr>
+                </a:solidFill>
+                <a:latin typeface="+mn-lt"/>
+                <a:ea typeface="+mn-ea"/>
+                <a:cs typeface="+mn-cs"/>
+              </a:defRPr>
+            </a:pPr>
+            <a:endParaRPr lang="en-US"/>
+          </a:p>
+        </c:txPr>
+        <c:crossAx val="1194242784"/>
+        <c:crosses val="autoZero"/>
+        <c:crossBetween val="between"/>
+      </c:valAx>
+      <c:spPr>
+        <a:noFill/>
+        <a:ln>
+          <a:noFill/>
+        </a:ln>
+        <a:effectLst/>
+      </c:spPr>
+    </c:plotArea>
+    <c:legend>
+      <c:legendPos val="b"/>
+      <c:overlay val="0"/>
+      <c:spPr>
+        <a:noFill/>
+        <a:ln>
+          <a:noFill/>
+        </a:ln>
+        <a:effectLst/>
+      </c:spPr>
+      <c:txPr>
+        <a:bodyPr rot="0" spcFirstLastPara="1" vertOverflow="ellipsis" vert="horz" wrap="square" anchor="ctr" anchorCtr="1"/>
+        <a:lstStyle/>
+        <a:p>
+          <a:pPr>
+            <a:defRPr sz="1197" b="0" i="0" u="none" strike="noStrike" kern="1200" baseline="0">
+              <a:solidFill>
+                <a:schemeClr val="tx1">
+                  <a:lumMod val="65000"/>
+                  <a:lumOff val="35000"/>
+                </a:schemeClr>
+              </a:solidFill>
+              <a:latin typeface="+mn-lt"/>
+              <a:ea typeface="+mn-ea"/>
+              <a:cs typeface="+mn-cs"/>
+            </a:defRPr>
+          </a:pPr>
+          <a:endParaRPr lang="en-US"/>
+        </a:p>
+      </c:txPr>
+    </c:legend>
+    <c:plotVisOnly val="1"/>
+    <c:dispBlanksAs val="gap"/>
+    <c:showDLblsOverMax val="0"/>
+    <c:extLst>
+      <c:ext xmlns:c16r3="http://schemas.microsoft.com/office/drawing/2017/03/chart" uri="{56B9EC1D-385E-4148-901F-78D8002777C0}">
+        <c16r3:dataDisplayOptions16>
+          <c16r3:dispNaAsBlank val="1"/>
+        </c16r3:dataDisplayOptions16>
+      </c:ext>
+    </c:extLst>
+  </c:chart>
+  <c:spPr>
+    <a:noFill/>
+    <a:ln>
+      <a:noFill/>
+    </a:ln>
+    <a:effectLst/>
+  </c:spPr>
+  <c:txPr>
+    <a:bodyPr/>
+    <a:lstStyle/>
+    <a:p>
+      <a:pPr>
+        <a:defRPr/>
+      </a:pPr>
+      <a:endParaRPr lang="en-US"/>
+    </a:p>
+  </c:txPr>
+  <c:externalData r:id="rId3">
+    <c:autoUpdate val="0"/>
+  </c:externalData>
+</c:chartSpace>
+</file>
+
+<file path=ppt/charts/chart9.xml><?xml version="1.0" encoding="utf-8"?>
+<c:chartSpace xmlns:c="http://schemas.openxmlformats.org/drawingml/2006/chart" xmlns:a="http://schemas.openxmlformats.org/drawingml/2006/main" xmlns:r="http://schemas.openxmlformats.org/officeDocument/2006/relationships" xmlns:c16r2="http://schemas.microsoft.com/office/drawing/2015/06/chart">
+  <c:date1904 val="0"/>
+  <c:lang val="en-GB"/>
+  <c:roundedCorners val="0"/>
+  <mc:AlternateContent xmlns:mc="http://schemas.openxmlformats.org/markup-compatibility/2006">
+    <mc:Choice xmlns:c14="http://schemas.microsoft.com/office/drawing/2007/8/2/chart" Requires="c14">
+      <c14:style val="102"/>
+    </mc:Choice>
+    <mc:Fallback>
+      <c:style val="2"/>
+    </mc:Fallback>
+  </mc:AlternateContent>
+  <c:chart>
+    <c:title>
+      <c:tx>
+        <c:rich>
+          <a:bodyPr rot="0" spcFirstLastPara="1" vertOverflow="ellipsis" vert="horz" wrap="square" anchor="ctr" anchorCtr="1"/>
+          <a:lstStyle/>
+          <a:p>
+            <a:pPr>
+              <a:defRPr sz="1862" b="0" i="0" u="none" strike="noStrike" kern="1200" spc="0" baseline="0">
+                <a:solidFill>
+                  <a:schemeClr val="tx1">
+                    <a:lumMod val="65000"/>
+                    <a:lumOff val="35000"/>
+                  </a:schemeClr>
+                </a:solidFill>
+                <a:latin typeface="+mn-lt"/>
+                <a:ea typeface="+mn-ea"/>
+                <a:cs typeface="+mn-cs"/>
+              </a:defRPr>
+            </a:pPr>
+            <a:r>
+              <a:rPr lang="en-GB" dirty="0" err="1"/>
+              <a:t>Differenze</a:t>
+            </a:r>
+            <a:r>
+              <a:rPr lang="en-GB" dirty="0"/>
+              <a:t> di </a:t>
+            </a:r>
+            <a:r>
+              <a:rPr lang="en-GB" dirty="0" err="1"/>
+              <a:t>inferenza</a:t>
+            </a:r>
+            <a:r>
+              <a:rPr lang="en-GB" dirty="0"/>
+              <a:t> a 1000 </a:t>
+            </a:r>
+            <a:r>
+              <a:rPr lang="en-GB" dirty="0" err="1"/>
+              <a:t>richieste</a:t>
+            </a:r>
+            <a:r>
+              <a:rPr lang="en-GB" dirty="0"/>
+              <a:t> </a:t>
+            </a:r>
+          </a:p>
+        </c:rich>
+      </c:tx>
+      <c:overlay val="0"/>
+      <c:spPr>
+        <a:noFill/>
+        <a:ln>
+          <a:noFill/>
+        </a:ln>
+        <a:effectLst/>
+      </c:spPr>
+      <c:txPr>
+        <a:bodyPr rot="0" spcFirstLastPara="1" vertOverflow="ellipsis" vert="horz" wrap="square" anchor="ctr" anchorCtr="1"/>
+        <a:lstStyle/>
+        <a:p>
+          <a:pPr>
+            <a:defRPr sz="1862" b="0" i="0" u="none" strike="noStrike" kern="1200" spc="0" baseline="0">
+              <a:solidFill>
+                <a:schemeClr val="tx1">
+                  <a:lumMod val="65000"/>
+                  <a:lumOff val="35000"/>
+                </a:schemeClr>
+              </a:solidFill>
+              <a:latin typeface="+mn-lt"/>
+              <a:ea typeface="+mn-ea"/>
+              <a:cs typeface="+mn-cs"/>
+            </a:defRPr>
+          </a:pPr>
+          <a:endParaRPr lang="en-US"/>
+        </a:p>
+      </c:txPr>
+    </c:title>
+    <c:autoTitleDeleted val="0"/>
+    <c:plotArea>
+      <c:layout/>
+      <c:lineChart>
+        <c:grouping val="standard"/>
+        <c:varyColors val="0"/>
+        <c:ser>
+          <c:idx val="0"/>
+          <c:order val="0"/>
+          <c:tx>
+            <c:strRef>
+              <c:f>Sheet1!$B$1</c:f>
+              <c:strCache>
+                <c:ptCount val="1"/>
+                <c:pt idx="0">
+                  <c:v>Python nativo</c:v>
+                </c:pt>
+              </c:strCache>
+            </c:strRef>
+          </c:tx>
+          <c:spPr>
+            <a:ln w="28575" cap="rnd">
+              <a:solidFill>
+                <a:schemeClr val="accent1"/>
+              </a:solidFill>
+              <a:round/>
+            </a:ln>
+            <a:effectLst/>
+          </c:spPr>
+          <c:marker>
+            <c:symbol val="none"/>
+          </c:marker>
+          <c:cat>
+            <c:strRef>
+              <c:f>Sheet1!$A$2:$A$6</c:f>
+              <c:strCache>
+                <c:ptCount val="5"/>
+                <c:pt idx="0">
+                  <c:v>Mean</c:v>
+                </c:pt>
+                <c:pt idx="1">
+                  <c:v>p50</c:v>
+                </c:pt>
+                <c:pt idx="2">
+                  <c:v>p90</c:v>
+                </c:pt>
+                <c:pt idx="3">
+                  <c:v>p95</c:v>
+                </c:pt>
+                <c:pt idx="4">
+                  <c:v>p99</c:v>
+                </c:pt>
+              </c:strCache>
+            </c:strRef>
+          </c:cat>
+          <c:val>
+            <c:numRef>
+              <c:f>Sheet1!$B$2:$B$6</c:f>
+              <c:numCache>
+                <c:formatCode>General</c:formatCode>
+                <c:ptCount val="5"/>
+                <c:pt idx="0">
+                  <c:v>2.57</c:v>
+                </c:pt>
+                <c:pt idx="1">
+                  <c:v>2.37</c:v>
+                </c:pt>
+                <c:pt idx="2">
+                  <c:v>3.3</c:v>
+                </c:pt>
+                <c:pt idx="3">
+                  <c:v>3.52</c:v>
+                </c:pt>
+                <c:pt idx="4">
+                  <c:v>4.4400000000000004</c:v>
+                </c:pt>
+              </c:numCache>
+            </c:numRef>
+          </c:val>
+          <c:smooth val="0"/>
+          <c:extLst>
+            <c:ext xmlns:c16="http://schemas.microsoft.com/office/drawing/2014/chart" uri="{C3380CC4-5D6E-409C-BE32-E72D297353CC}">
+              <c16:uniqueId val="{00000000-E212-42B8-9FE7-4B6A48D16D4D}"/>
+            </c:ext>
+          </c:extLst>
+        </c:ser>
+        <c:ser>
+          <c:idx val="1"/>
+          <c:order val="1"/>
+          <c:tx>
+            <c:strRef>
+              <c:f>Sheet1!$C$1</c:f>
+              <c:strCache>
+                <c:ptCount val="1"/>
+                <c:pt idx="0">
+                  <c:v>Onnx</c:v>
+                </c:pt>
+              </c:strCache>
+            </c:strRef>
+          </c:tx>
+          <c:spPr>
+            <a:ln w="28575" cap="rnd">
+              <a:solidFill>
+                <a:schemeClr val="accent2"/>
+              </a:solidFill>
+              <a:round/>
+            </a:ln>
+            <a:effectLst/>
+          </c:spPr>
+          <c:marker>
+            <c:symbol val="none"/>
+          </c:marker>
+          <c:cat>
+            <c:strRef>
+              <c:f>Sheet1!$A$2:$A$6</c:f>
+              <c:strCache>
+                <c:ptCount val="5"/>
+                <c:pt idx="0">
+                  <c:v>Mean</c:v>
+                </c:pt>
+                <c:pt idx="1">
+                  <c:v>p50</c:v>
+                </c:pt>
+                <c:pt idx="2">
+                  <c:v>p90</c:v>
+                </c:pt>
+                <c:pt idx="3">
+                  <c:v>p95</c:v>
+                </c:pt>
+                <c:pt idx="4">
+                  <c:v>p99</c:v>
+                </c:pt>
+              </c:strCache>
+            </c:strRef>
+          </c:cat>
+          <c:val>
+            <c:numRef>
+              <c:f>Sheet1!$C$2:$C$6</c:f>
+              <c:numCache>
+                <c:formatCode>General</c:formatCode>
+                <c:ptCount val="5"/>
+                <c:pt idx="0">
+                  <c:v>1.59</c:v>
+                </c:pt>
+                <c:pt idx="1">
+                  <c:v>1.5</c:v>
+                </c:pt>
+                <c:pt idx="2">
+                  <c:v>1.83</c:v>
+                </c:pt>
+                <c:pt idx="3">
+                  <c:v>2.17</c:v>
+                </c:pt>
+                <c:pt idx="4">
+                  <c:v>2.27</c:v>
+                </c:pt>
+              </c:numCache>
+            </c:numRef>
+          </c:val>
+          <c:smooth val="0"/>
+          <c:extLst>
+            <c:ext xmlns:c16="http://schemas.microsoft.com/office/drawing/2014/chart" uri="{C3380CC4-5D6E-409C-BE32-E72D297353CC}">
+              <c16:uniqueId val="{00000001-E212-42B8-9FE7-4B6A48D16D4D}"/>
+            </c:ext>
+          </c:extLst>
+        </c:ser>
+        <c:dLbls>
+          <c:showLegendKey val="0"/>
+          <c:showVal val="0"/>
+          <c:showCatName val="0"/>
+          <c:showSerName val="0"/>
+          <c:showPercent val="0"/>
+          <c:showBubbleSize val="0"/>
+        </c:dLbls>
+        <c:smooth val="0"/>
+        <c:axId val="1194339264"/>
+        <c:axId val="1194339744"/>
+      </c:lineChart>
+      <c:catAx>
+        <c:axId val="1194339264"/>
+        <c:scaling>
+          <c:orientation val="minMax"/>
+        </c:scaling>
+        <c:delete val="0"/>
+        <c:axPos val="b"/>
+        <c:numFmt formatCode="General" sourceLinked="1"/>
+        <c:majorTickMark val="none"/>
+        <c:minorTickMark val="none"/>
+        <c:tickLblPos val="nextTo"/>
+        <c:spPr>
+          <a:noFill/>
+          <a:ln w="9525" cap="flat" cmpd="sng" algn="ctr">
+            <a:solidFill>
+              <a:schemeClr val="tx1">
+                <a:lumMod val="15000"/>
+                <a:lumOff val="85000"/>
+              </a:schemeClr>
+            </a:solidFill>
+            <a:round/>
+          </a:ln>
+          <a:effectLst/>
+        </c:spPr>
+        <c:txPr>
+          <a:bodyPr rot="-60000000" spcFirstLastPara="1" vertOverflow="ellipsis" vert="horz" wrap="square" anchor="ctr" anchorCtr="1"/>
+          <a:lstStyle/>
+          <a:p>
+            <a:pPr>
+              <a:defRPr sz="1197" b="0" i="0" u="none" strike="noStrike" kern="1200" baseline="0">
+                <a:solidFill>
+                  <a:schemeClr val="tx1">
+                    <a:lumMod val="65000"/>
+                    <a:lumOff val="35000"/>
+                  </a:schemeClr>
+                </a:solidFill>
+                <a:latin typeface="+mn-lt"/>
+                <a:ea typeface="+mn-ea"/>
+                <a:cs typeface="+mn-cs"/>
+              </a:defRPr>
+            </a:pPr>
+            <a:endParaRPr lang="en-US"/>
+          </a:p>
+        </c:txPr>
+        <c:crossAx val="1194339744"/>
+        <c:crosses val="autoZero"/>
+        <c:auto val="1"/>
+        <c:lblAlgn val="ctr"/>
+        <c:lblOffset val="100"/>
+        <c:noMultiLvlLbl val="0"/>
+      </c:catAx>
+      <c:valAx>
+        <c:axId val="1194339744"/>
+        <c:scaling>
+          <c:orientation val="minMax"/>
+        </c:scaling>
+        <c:delete val="0"/>
+        <c:axPos val="l"/>
+        <c:majorGridlines>
+          <c:spPr>
+            <a:ln w="9525" cap="flat" cmpd="sng" algn="ctr">
+              <a:solidFill>
+                <a:schemeClr val="tx1">
+                  <a:lumMod val="15000"/>
+                  <a:lumOff val="85000"/>
+                </a:schemeClr>
+              </a:solidFill>
+              <a:round/>
+            </a:ln>
+            <a:effectLst/>
+          </c:spPr>
+        </c:majorGridlines>
+        <c:numFmt formatCode="General" sourceLinked="1"/>
+        <c:majorTickMark val="none"/>
+        <c:minorTickMark val="none"/>
+        <c:tickLblPos val="nextTo"/>
+        <c:spPr>
+          <a:noFill/>
+          <a:ln>
+            <a:noFill/>
+          </a:ln>
+          <a:effectLst/>
+        </c:spPr>
+        <c:txPr>
+          <a:bodyPr rot="-60000000" spcFirstLastPara="1" vertOverflow="ellipsis" vert="horz" wrap="square" anchor="ctr" anchorCtr="1"/>
+          <a:lstStyle/>
+          <a:p>
+            <a:pPr>
+              <a:defRPr sz="1197" b="0" i="0" u="none" strike="noStrike" kern="1200" baseline="0">
+                <a:solidFill>
+                  <a:schemeClr val="tx1">
+                    <a:lumMod val="65000"/>
+                    <a:lumOff val="35000"/>
+                  </a:schemeClr>
+                </a:solidFill>
+                <a:latin typeface="+mn-lt"/>
+                <a:ea typeface="+mn-ea"/>
+                <a:cs typeface="+mn-cs"/>
+              </a:defRPr>
+            </a:pPr>
+            <a:endParaRPr lang="en-US"/>
+          </a:p>
+        </c:txPr>
+        <c:crossAx val="1194339264"/>
+        <c:crosses val="autoZero"/>
+        <c:crossBetween val="between"/>
+      </c:valAx>
+      <c:spPr>
+        <a:noFill/>
+        <a:ln>
+          <a:noFill/>
+        </a:ln>
+        <a:effectLst/>
+      </c:spPr>
+    </c:plotArea>
+    <c:legend>
+      <c:legendPos val="b"/>
+      <c:overlay val="0"/>
+      <c:spPr>
+        <a:noFill/>
+        <a:ln>
+          <a:noFill/>
+        </a:ln>
+        <a:effectLst/>
+      </c:spPr>
+      <c:txPr>
+        <a:bodyPr rot="0" spcFirstLastPara="1" vertOverflow="ellipsis" vert="horz" wrap="square" anchor="ctr" anchorCtr="1"/>
+        <a:lstStyle/>
+        <a:p>
+          <a:pPr>
+            <a:defRPr sz="1197" b="0" i="0" u="none" strike="noStrike" kern="1200" baseline="0">
+              <a:solidFill>
+                <a:schemeClr val="tx1">
+                  <a:lumMod val="65000"/>
+                  <a:lumOff val="35000"/>
+                </a:schemeClr>
+              </a:solidFill>
+              <a:latin typeface="+mn-lt"/>
+              <a:ea typeface="+mn-ea"/>
+              <a:cs typeface="+mn-cs"/>
+            </a:defRPr>
+          </a:pPr>
+          <a:endParaRPr lang="en-US"/>
+        </a:p>
+      </c:txPr>
+    </c:legend>
+    <c:plotVisOnly val="1"/>
+    <c:dispBlanksAs val="gap"/>
     <c:showDLblsOverMax val="0"/>
     <c:extLst>
       <c:ext xmlns:c16r3="http://schemas.microsoft.com/office/drawing/2017/03/chart" uri="{56B9EC1D-385E-4148-901F-78D8002777C0}">
@@ -2993,6 +4203,126 @@
 </file>
 
 <file path=ppt/charts/colors6.xml><?xml version="1.0" encoding="utf-8"?>
+<cs:colorStyle xmlns:cs="http://schemas.microsoft.com/office/drawing/2012/chartStyle" xmlns:a="http://schemas.openxmlformats.org/drawingml/2006/main" meth="cycle" id="10">
+  <a:schemeClr val="accent1"/>
+  <a:schemeClr val="accent2"/>
+  <a:schemeClr val="accent3"/>
+  <a:schemeClr val="accent4"/>
+  <a:schemeClr val="accent5"/>
+  <a:schemeClr val="accent6"/>
+  <cs:variation/>
+  <cs:variation>
+    <a:lumMod val="60000"/>
+  </cs:variation>
+  <cs:variation>
+    <a:lumMod val="80000"/>
+    <a:lumOff val="20000"/>
+  </cs:variation>
+  <cs:variation>
+    <a:lumMod val="80000"/>
+  </cs:variation>
+  <cs:variation>
+    <a:lumMod val="60000"/>
+    <a:lumOff val="40000"/>
+  </cs:variation>
+  <cs:variation>
+    <a:lumMod val="50000"/>
+  </cs:variation>
+  <cs:variation>
+    <a:lumMod val="70000"/>
+    <a:lumOff val="30000"/>
+  </cs:variation>
+  <cs:variation>
+    <a:lumMod val="70000"/>
+  </cs:variation>
+  <cs:variation>
+    <a:lumMod val="50000"/>
+    <a:lumOff val="50000"/>
+  </cs:variation>
+</cs:colorStyle>
+</file>
+
+<file path=ppt/charts/colors7.xml><?xml version="1.0" encoding="utf-8"?>
+<cs:colorStyle xmlns:cs="http://schemas.microsoft.com/office/drawing/2012/chartStyle" xmlns:a="http://schemas.openxmlformats.org/drawingml/2006/main" meth="cycle" id="10">
+  <a:schemeClr val="accent1"/>
+  <a:schemeClr val="accent2"/>
+  <a:schemeClr val="accent3"/>
+  <a:schemeClr val="accent4"/>
+  <a:schemeClr val="accent5"/>
+  <a:schemeClr val="accent6"/>
+  <cs:variation/>
+  <cs:variation>
+    <a:lumMod val="60000"/>
+  </cs:variation>
+  <cs:variation>
+    <a:lumMod val="80000"/>
+    <a:lumOff val="20000"/>
+  </cs:variation>
+  <cs:variation>
+    <a:lumMod val="80000"/>
+  </cs:variation>
+  <cs:variation>
+    <a:lumMod val="60000"/>
+    <a:lumOff val="40000"/>
+  </cs:variation>
+  <cs:variation>
+    <a:lumMod val="50000"/>
+  </cs:variation>
+  <cs:variation>
+    <a:lumMod val="70000"/>
+    <a:lumOff val="30000"/>
+  </cs:variation>
+  <cs:variation>
+    <a:lumMod val="70000"/>
+  </cs:variation>
+  <cs:variation>
+    <a:lumMod val="50000"/>
+    <a:lumOff val="50000"/>
+  </cs:variation>
+</cs:colorStyle>
+</file>
+
+<file path=ppt/charts/colors8.xml><?xml version="1.0" encoding="utf-8"?>
+<cs:colorStyle xmlns:cs="http://schemas.microsoft.com/office/drawing/2012/chartStyle" xmlns:a="http://schemas.openxmlformats.org/drawingml/2006/main" meth="cycle" id="10">
+  <a:schemeClr val="accent1"/>
+  <a:schemeClr val="accent2"/>
+  <a:schemeClr val="accent3"/>
+  <a:schemeClr val="accent4"/>
+  <a:schemeClr val="accent5"/>
+  <a:schemeClr val="accent6"/>
+  <cs:variation/>
+  <cs:variation>
+    <a:lumMod val="60000"/>
+  </cs:variation>
+  <cs:variation>
+    <a:lumMod val="80000"/>
+    <a:lumOff val="20000"/>
+  </cs:variation>
+  <cs:variation>
+    <a:lumMod val="80000"/>
+  </cs:variation>
+  <cs:variation>
+    <a:lumMod val="60000"/>
+    <a:lumOff val="40000"/>
+  </cs:variation>
+  <cs:variation>
+    <a:lumMod val="50000"/>
+  </cs:variation>
+  <cs:variation>
+    <a:lumMod val="70000"/>
+    <a:lumOff val="30000"/>
+  </cs:variation>
+  <cs:variation>
+    <a:lumMod val="70000"/>
+  </cs:variation>
+  <cs:variation>
+    <a:lumMod val="50000"/>
+    <a:lumOff val="50000"/>
+  </cs:variation>
+</cs:colorStyle>
+</file>
+
+<file path=ppt/charts/colors9.xml><?xml version="1.0" encoding="utf-8"?>
 <cs:colorStyle xmlns:cs="http://schemas.microsoft.com/office/drawing/2012/chartStyle" xmlns:a="http://schemas.openxmlformats.org/drawingml/2006/main" meth="cycle" id="10">
   <a:schemeClr val="accent1"/>
   <a:schemeClr val="accent2"/>
@@ -5613,6 +6943,1554 @@
 </file>
 
 <file path=ppt/charts/style6.xml><?xml version="1.0" encoding="utf-8"?>
+<cs:chartStyle xmlns:cs="http://schemas.microsoft.com/office/drawing/2012/chartStyle" xmlns:a="http://schemas.openxmlformats.org/drawingml/2006/main" id="227">
+  <cs:axisTitle>
+    <cs:lnRef idx="0"/>
+    <cs:fillRef idx="0"/>
+    <cs:effectRef idx="0"/>
+    <cs:fontRef idx="minor">
+      <a:schemeClr val="tx1">
+        <a:lumMod val="65000"/>
+        <a:lumOff val="35000"/>
+      </a:schemeClr>
+    </cs:fontRef>
+    <cs:defRPr sz="1330" kern="1200"/>
+  </cs:axisTitle>
+  <cs:categoryAxis>
+    <cs:lnRef idx="0"/>
+    <cs:fillRef idx="0"/>
+    <cs:effectRef idx="0"/>
+    <cs:fontRef idx="minor">
+      <a:schemeClr val="tx1">
+        <a:lumMod val="65000"/>
+        <a:lumOff val="35000"/>
+      </a:schemeClr>
+    </cs:fontRef>
+    <cs:spPr>
+      <a:ln w="9525" cap="flat" cmpd="sng" algn="ctr">
+        <a:solidFill>
+          <a:schemeClr val="tx1">
+            <a:lumMod val="15000"/>
+            <a:lumOff val="85000"/>
+          </a:schemeClr>
+        </a:solidFill>
+        <a:round/>
+      </a:ln>
+    </cs:spPr>
+    <cs:defRPr sz="1197" kern="1200"/>
+  </cs:categoryAxis>
+  <cs:chartArea mods="allowNoFillOverride allowNoLineOverride">
+    <cs:lnRef idx="0"/>
+    <cs:fillRef idx="0"/>
+    <cs:effectRef idx="0"/>
+    <cs:fontRef idx="minor">
+      <a:schemeClr val="tx1"/>
+    </cs:fontRef>
+    <cs:spPr>
+      <a:solidFill>
+        <a:schemeClr val="bg1"/>
+      </a:solidFill>
+      <a:ln w="9525" cap="flat" cmpd="sng" algn="ctr">
+        <a:solidFill>
+          <a:schemeClr val="tx1">
+            <a:lumMod val="15000"/>
+            <a:lumOff val="85000"/>
+          </a:schemeClr>
+        </a:solidFill>
+        <a:round/>
+      </a:ln>
+    </cs:spPr>
+    <cs:defRPr sz="1330" kern="1200"/>
+  </cs:chartArea>
+  <cs:dataLabel>
+    <cs:lnRef idx="0"/>
+    <cs:fillRef idx="0"/>
+    <cs:effectRef idx="0"/>
+    <cs:fontRef idx="minor">
+      <a:schemeClr val="tx1">
+        <a:lumMod val="75000"/>
+        <a:lumOff val="25000"/>
+      </a:schemeClr>
+    </cs:fontRef>
+    <cs:defRPr sz="1197" kern="1200"/>
+  </cs:dataLabel>
+  <cs:dataLabelCallout>
+    <cs:lnRef idx="0"/>
+    <cs:fillRef idx="0"/>
+    <cs:effectRef idx="0"/>
+    <cs:fontRef idx="minor">
+      <a:schemeClr val="dk1">
+        <a:lumMod val="65000"/>
+        <a:lumOff val="35000"/>
+      </a:schemeClr>
+    </cs:fontRef>
+    <cs:spPr>
+      <a:solidFill>
+        <a:schemeClr val="lt1"/>
+      </a:solidFill>
+      <a:ln>
+        <a:solidFill>
+          <a:schemeClr val="dk1">
+            <a:lumMod val="25000"/>
+            <a:lumOff val="75000"/>
+          </a:schemeClr>
+        </a:solidFill>
+      </a:ln>
+    </cs:spPr>
+    <cs:defRPr sz="1197" kern="1200"/>
+    <cs:bodyPr rot="0" spcFirstLastPara="1" vertOverflow="clip" horzOverflow="clip" vert="horz" wrap="square" lIns="36576" tIns="18288" rIns="36576" bIns="18288" anchor="ctr" anchorCtr="1">
+      <a:spAutoFit/>
+    </cs:bodyPr>
+  </cs:dataLabelCallout>
+  <cs:dataPoint>
+    <cs:lnRef idx="0"/>
+    <cs:fillRef idx="1">
+      <cs:styleClr val="auto"/>
+    </cs:fillRef>
+    <cs:effectRef idx="0"/>
+    <cs:fontRef idx="minor">
+      <a:schemeClr val="tx1"/>
+    </cs:fontRef>
+    <cs:spPr>
+      <a:solidFill>
+        <a:schemeClr val="phClr"/>
+      </a:solidFill>
+    </cs:spPr>
+  </cs:dataPoint>
+  <cs:dataPoint3D>
+    <cs:lnRef idx="0"/>
+    <cs:fillRef idx="1">
+      <cs:styleClr val="auto"/>
+    </cs:fillRef>
+    <cs:effectRef idx="0"/>
+    <cs:fontRef idx="minor">
+      <a:schemeClr val="tx1"/>
+    </cs:fontRef>
+    <cs:spPr>
+      <a:solidFill>
+        <a:schemeClr val="phClr"/>
+      </a:solidFill>
+    </cs:spPr>
+  </cs:dataPoint3D>
+  <cs:dataPointLine>
+    <cs:lnRef idx="0">
+      <cs:styleClr val="auto"/>
+    </cs:lnRef>
+    <cs:fillRef idx="1"/>
+    <cs:effectRef idx="0"/>
+    <cs:fontRef idx="minor">
+      <a:schemeClr val="tx1"/>
+    </cs:fontRef>
+    <cs:spPr>
+      <a:ln w="28575" cap="rnd">
+        <a:solidFill>
+          <a:schemeClr val="phClr"/>
+        </a:solidFill>
+        <a:round/>
+      </a:ln>
+    </cs:spPr>
+  </cs:dataPointLine>
+  <cs:dataPointMarker>
+    <cs:lnRef idx="0">
+      <cs:styleClr val="auto"/>
+    </cs:lnRef>
+    <cs:fillRef idx="1">
+      <cs:styleClr val="auto"/>
+    </cs:fillRef>
+    <cs:effectRef idx="0"/>
+    <cs:fontRef idx="minor">
+      <a:schemeClr val="tx1"/>
+    </cs:fontRef>
+    <cs:spPr>
+      <a:solidFill>
+        <a:schemeClr val="phClr"/>
+      </a:solidFill>
+      <a:ln w="9525">
+        <a:solidFill>
+          <a:schemeClr val="phClr"/>
+        </a:solidFill>
+      </a:ln>
+    </cs:spPr>
+  </cs:dataPointMarker>
+  <cs:dataPointMarkerLayout symbol="circle" size="5"/>
+  <cs:dataPointWireframe>
+    <cs:lnRef idx="0">
+      <cs:styleClr val="auto"/>
+    </cs:lnRef>
+    <cs:fillRef idx="1"/>
+    <cs:effectRef idx="0"/>
+    <cs:fontRef idx="minor">
+      <a:schemeClr val="tx1"/>
+    </cs:fontRef>
+    <cs:spPr>
+      <a:ln w="9525" cap="rnd">
+        <a:solidFill>
+          <a:schemeClr val="phClr"/>
+        </a:solidFill>
+        <a:round/>
+      </a:ln>
+    </cs:spPr>
+  </cs:dataPointWireframe>
+  <cs:dataTable>
+    <cs:lnRef idx="0"/>
+    <cs:fillRef idx="0"/>
+    <cs:effectRef idx="0"/>
+    <cs:fontRef idx="minor">
+      <a:schemeClr val="tx1">
+        <a:lumMod val="65000"/>
+        <a:lumOff val="35000"/>
+      </a:schemeClr>
+    </cs:fontRef>
+    <cs:spPr>
+      <a:noFill/>
+      <a:ln w="9525" cap="flat" cmpd="sng" algn="ctr">
+        <a:solidFill>
+          <a:schemeClr val="tx1">
+            <a:lumMod val="15000"/>
+            <a:lumOff val="85000"/>
+          </a:schemeClr>
+        </a:solidFill>
+        <a:round/>
+      </a:ln>
+    </cs:spPr>
+    <cs:defRPr sz="1197" kern="1200"/>
+  </cs:dataTable>
+  <cs:downBar>
+    <cs:lnRef idx="0"/>
+    <cs:fillRef idx="0"/>
+    <cs:effectRef idx="0"/>
+    <cs:fontRef idx="minor">
+      <a:schemeClr val="dk1"/>
+    </cs:fontRef>
+    <cs:spPr>
+      <a:solidFill>
+        <a:schemeClr val="dk1">
+          <a:lumMod val="65000"/>
+          <a:lumOff val="35000"/>
+        </a:schemeClr>
+      </a:solidFill>
+      <a:ln w="9525">
+        <a:solidFill>
+          <a:schemeClr val="tx1">
+            <a:lumMod val="65000"/>
+            <a:lumOff val="35000"/>
+          </a:schemeClr>
+        </a:solidFill>
+      </a:ln>
+    </cs:spPr>
+  </cs:downBar>
+  <cs:dropLine>
+    <cs:lnRef idx="0"/>
+    <cs:fillRef idx="0"/>
+    <cs:effectRef idx="0"/>
+    <cs:fontRef idx="minor">
+      <a:schemeClr val="tx1"/>
+    </cs:fontRef>
+    <cs:spPr>
+      <a:ln w="9525" cap="flat" cmpd="sng" algn="ctr">
+        <a:solidFill>
+          <a:schemeClr val="tx1">
+            <a:lumMod val="35000"/>
+            <a:lumOff val="65000"/>
+          </a:schemeClr>
+        </a:solidFill>
+        <a:round/>
+      </a:ln>
+    </cs:spPr>
+  </cs:dropLine>
+  <cs:errorBar>
+    <cs:lnRef idx="0"/>
+    <cs:fillRef idx="0"/>
+    <cs:effectRef idx="0"/>
+    <cs:fontRef idx="minor">
+      <a:schemeClr val="tx1"/>
+    </cs:fontRef>
+    <cs:spPr>
+      <a:ln w="9525" cap="flat" cmpd="sng" algn="ctr">
+        <a:solidFill>
+          <a:schemeClr val="tx1">
+            <a:lumMod val="65000"/>
+            <a:lumOff val="35000"/>
+          </a:schemeClr>
+        </a:solidFill>
+        <a:round/>
+      </a:ln>
+    </cs:spPr>
+  </cs:errorBar>
+  <cs:floor>
+    <cs:lnRef idx="0"/>
+    <cs:fillRef idx="0"/>
+    <cs:effectRef idx="0"/>
+    <cs:fontRef idx="minor">
+      <a:schemeClr val="tx1"/>
+    </cs:fontRef>
+    <cs:spPr>
+      <a:noFill/>
+      <a:ln>
+        <a:noFill/>
+      </a:ln>
+    </cs:spPr>
+  </cs:floor>
+  <cs:gridlineMajor>
+    <cs:lnRef idx="0"/>
+    <cs:fillRef idx="0"/>
+    <cs:effectRef idx="0"/>
+    <cs:fontRef idx="minor">
+      <a:schemeClr val="tx1"/>
+    </cs:fontRef>
+    <cs:spPr>
+      <a:ln w="9525" cap="flat" cmpd="sng" algn="ctr">
+        <a:solidFill>
+          <a:schemeClr val="tx1">
+            <a:lumMod val="15000"/>
+            <a:lumOff val="85000"/>
+          </a:schemeClr>
+        </a:solidFill>
+        <a:round/>
+      </a:ln>
+    </cs:spPr>
+  </cs:gridlineMajor>
+  <cs:gridlineMinor>
+    <cs:lnRef idx="0"/>
+    <cs:fillRef idx="0"/>
+    <cs:effectRef idx="0"/>
+    <cs:fontRef idx="minor">
+      <a:schemeClr val="tx1"/>
+    </cs:fontRef>
+    <cs:spPr>
+      <a:ln w="9525" cap="flat" cmpd="sng" algn="ctr">
+        <a:solidFill>
+          <a:schemeClr val="tx1">
+            <a:lumMod val="5000"/>
+            <a:lumOff val="95000"/>
+          </a:schemeClr>
+        </a:solidFill>
+        <a:round/>
+      </a:ln>
+    </cs:spPr>
+  </cs:gridlineMinor>
+  <cs:hiLoLine>
+    <cs:lnRef idx="0"/>
+    <cs:fillRef idx="0"/>
+    <cs:effectRef idx="0"/>
+    <cs:fontRef idx="minor">
+      <a:schemeClr val="tx1"/>
+    </cs:fontRef>
+    <cs:spPr>
+      <a:ln w="9525" cap="flat" cmpd="sng" algn="ctr">
+        <a:solidFill>
+          <a:schemeClr val="tx1">
+            <a:lumMod val="75000"/>
+            <a:lumOff val="25000"/>
+          </a:schemeClr>
+        </a:solidFill>
+        <a:round/>
+      </a:ln>
+    </cs:spPr>
+  </cs:hiLoLine>
+  <cs:leaderLine>
+    <cs:lnRef idx="0"/>
+    <cs:fillRef idx="0"/>
+    <cs:effectRef idx="0"/>
+    <cs:fontRef idx="minor">
+      <a:schemeClr val="tx1"/>
+    </cs:fontRef>
+    <cs:spPr>
+      <a:ln w="9525" cap="flat" cmpd="sng" algn="ctr">
+        <a:solidFill>
+          <a:schemeClr val="tx1">
+            <a:lumMod val="35000"/>
+            <a:lumOff val="65000"/>
+          </a:schemeClr>
+        </a:solidFill>
+        <a:round/>
+      </a:ln>
+    </cs:spPr>
+  </cs:leaderLine>
+  <cs:legend>
+    <cs:lnRef idx="0"/>
+    <cs:fillRef idx="0"/>
+    <cs:effectRef idx="0"/>
+    <cs:fontRef idx="minor">
+      <a:schemeClr val="tx1">
+        <a:lumMod val="65000"/>
+        <a:lumOff val="35000"/>
+      </a:schemeClr>
+    </cs:fontRef>
+    <cs:defRPr sz="1197" kern="1200"/>
+  </cs:legend>
+  <cs:plotArea mods="allowNoFillOverride allowNoLineOverride">
+    <cs:lnRef idx="0"/>
+    <cs:fillRef idx="0"/>
+    <cs:effectRef idx="0"/>
+    <cs:fontRef idx="minor">
+      <a:schemeClr val="tx1"/>
+    </cs:fontRef>
+  </cs:plotArea>
+  <cs:plotArea3D mods="allowNoFillOverride allowNoLineOverride">
+    <cs:lnRef idx="0"/>
+    <cs:fillRef idx="0"/>
+    <cs:effectRef idx="0"/>
+    <cs:fontRef idx="minor">
+      <a:schemeClr val="tx1"/>
+    </cs:fontRef>
+  </cs:plotArea3D>
+  <cs:seriesAxis>
+    <cs:lnRef idx="0"/>
+    <cs:fillRef idx="0"/>
+    <cs:effectRef idx="0"/>
+    <cs:fontRef idx="minor">
+      <a:schemeClr val="tx1">
+        <a:lumMod val="65000"/>
+        <a:lumOff val="35000"/>
+      </a:schemeClr>
+    </cs:fontRef>
+    <cs:defRPr sz="1197" kern="1200"/>
+  </cs:seriesAxis>
+  <cs:seriesLine>
+    <cs:lnRef idx="0"/>
+    <cs:fillRef idx="0"/>
+    <cs:effectRef idx="0"/>
+    <cs:fontRef idx="minor">
+      <a:schemeClr val="tx1"/>
+    </cs:fontRef>
+    <cs:spPr>
+      <a:ln w="9525" cap="flat" cmpd="sng" algn="ctr">
+        <a:solidFill>
+          <a:schemeClr val="tx1">
+            <a:lumMod val="35000"/>
+            <a:lumOff val="65000"/>
+          </a:schemeClr>
+        </a:solidFill>
+        <a:round/>
+      </a:ln>
+    </cs:spPr>
+  </cs:seriesLine>
+  <cs:title>
+    <cs:lnRef idx="0"/>
+    <cs:fillRef idx="0"/>
+    <cs:effectRef idx="0"/>
+    <cs:fontRef idx="minor">
+      <a:schemeClr val="tx1">
+        <a:lumMod val="65000"/>
+        <a:lumOff val="35000"/>
+      </a:schemeClr>
+    </cs:fontRef>
+    <cs:defRPr sz="1862" b="0" kern="1200" spc="0" baseline="0"/>
+  </cs:title>
+  <cs:trendline>
+    <cs:lnRef idx="0">
+      <cs:styleClr val="auto"/>
+    </cs:lnRef>
+    <cs:fillRef idx="0"/>
+    <cs:effectRef idx="0"/>
+    <cs:fontRef idx="minor">
+      <a:schemeClr val="tx1"/>
+    </cs:fontRef>
+    <cs:spPr>
+      <a:ln w="19050" cap="rnd">
+        <a:solidFill>
+          <a:schemeClr val="phClr"/>
+        </a:solidFill>
+        <a:prstDash val="sysDot"/>
+      </a:ln>
+    </cs:spPr>
+  </cs:trendline>
+  <cs:trendlineLabel>
+    <cs:lnRef idx="0"/>
+    <cs:fillRef idx="0"/>
+    <cs:effectRef idx="0"/>
+    <cs:fontRef idx="minor">
+      <a:schemeClr val="tx1">
+        <a:lumMod val="65000"/>
+        <a:lumOff val="35000"/>
+      </a:schemeClr>
+    </cs:fontRef>
+    <cs:defRPr sz="1197" kern="1200"/>
+  </cs:trendlineLabel>
+  <cs:upBar>
+    <cs:lnRef idx="0"/>
+    <cs:fillRef idx="0"/>
+    <cs:effectRef idx="0"/>
+    <cs:fontRef idx="minor">
+      <a:schemeClr val="dk1"/>
+    </cs:fontRef>
+    <cs:spPr>
+      <a:solidFill>
+        <a:schemeClr val="lt1"/>
+      </a:solidFill>
+      <a:ln w="9525">
+        <a:solidFill>
+          <a:schemeClr val="tx1">
+            <a:lumMod val="15000"/>
+            <a:lumOff val="85000"/>
+          </a:schemeClr>
+        </a:solidFill>
+      </a:ln>
+    </cs:spPr>
+  </cs:upBar>
+  <cs:valueAxis>
+    <cs:lnRef idx="0"/>
+    <cs:fillRef idx="0"/>
+    <cs:effectRef idx="0"/>
+    <cs:fontRef idx="minor">
+      <a:schemeClr val="tx1">
+        <a:lumMod val="65000"/>
+        <a:lumOff val="35000"/>
+      </a:schemeClr>
+    </cs:fontRef>
+    <cs:defRPr sz="1197" kern="1200"/>
+  </cs:valueAxis>
+  <cs:wall>
+    <cs:lnRef idx="0"/>
+    <cs:fillRef idx="0"/>
+    <cs:effectRef idx="0"/>
+    <cs:fontRef idx="minor">
+      <a:schemeClr val="tx1"/>
+    </cs:fontRef>
+    <cs:spPr>
+      <a:noFill/>
+      <a:ln>
+        <a:noFill/>
+      </a:ln>
+    </cs:spPr>
+  </cs:wall>
+</cs:chartStyle>
+</file>
+
+<file path=ppt/charts/style7.xml><?xml version="1.0" encoding="utf-8"?>
+<cs:chartStyle xmlns:cs="http://schemas.microsoft.com/office/drawing/2012/chartStyle" xmlns:a="http://schemas.openxmlformats.org/drawingml/2006/main" id="227">
+  <cs:axisTitle>
+    <cs:lnRef idx="0"/>
+    <cs:fillRef idx="0"/>
+    <cs:effectRef idx="0"/>
+    <cs:fontRef idx="minor">
+      <a:schemeClr val="tx1">
+        <a:lumMod val="65000"/>
+        <a:lumOff val="35000"/>
+      </a:schemeClr>
+    </cs:fontRef>
+    <cs:defRPr sz="1330" kern="1200"/>
+  </cs:axisTitle>
+  <cs:categoryAxis>
+    <cs:lnRef idx="0"/>
+    <cs:fillRef idx="0"/>
+    <cs:effectRef idx="0"/>
+    <cs:fontRef idx="minor">
+      <a:schemeClr val="tx1">
+        <a:lumMod val="65000"/>
+        <a:lumOff val="35000"/>
+      </a:schemeClr>
+    </cs:fontRef>
+    <cs:spPr>
+      <a:ln w="9525" cap="flat" cmpd="sng" algn="ctr">
+        <a:solidFill>
+          <a:schemeClr val="tx1">
+            <a:lumMod val="15000"/>
+            <a:lumOff val="85000"/>
+          </a:schemeClr>
+        </a:solidFill>
+        <a:round/>
+      </a:ln>
+    </cs:spPr>
+    <cs:defRPr sz="1197" kern="1200"/>
+  </cs:categoryAxis>
+  <cs:chartArea mods="allowNoFillOverride allowNoLineOverride">
+    <cs:lnRef idx="0"/>
+    <cs:fillRef idx="0"/>
+    <cs:effectRef idx="0"/>
+    <cs:fontRef idx="minor">
+      <a:schemeClr val="tx1"/>
+    </cs:fontRef>
+    <cs:spPr>
+      <a:solidFill>
+        <a:schemeClr val="bg1"/>
+      </a:solidFill>
+      <a:ln w="9525" cap="flat" cmpd="sng" algn="ctr">
+        <a:solidFill>
+          <a:schemeClr val="tx1">
+            <a:lumMod val="15000"/>
+            <a:lumOff val="85000"/>
+          </a:schemeClr>
+        </a:solidFill>
+        <a:round/>
+      </a:ln>
+    </cs:spPr>
+    <cs:defRPr sz="1330" kern="1200"/>
+  </cs:chartArea>
+  <cs:dataLabel>
+    <cs:lnRef idx="0"/>
+    <cs:fillRef idx="0"/>
+    <cs:effectRef idx="0"/>
+    <cs:fontRef idx="minor">
+      <a:schemeClr val="tx1">
+        <a:lumMod val="75000"/>
+        <a:lumOff val="25000"/>
+      </a:schemeClr>
+    </cs:fontRef>
+    <cs:defRPr sz="1197" kern="1200"/>
+  </cs:dataLabel>
+  <cs:dataLabelCallout>
+    <cs:lnRef idx="0"/>
+    <cs:fillRef idx="0"/>
+    <cs:effectRef idx="0"/>
+    <cs:fontRef idx="minor">
+      <a:schemeClr val="dk1">
+        <a:lumMod val="65000"/>
+        <a:lumOff val="35000"/>
+      </a:schemeClr>
+    </cs:fontRef>
+    <cs:spPr>
+      <a:solidFill>
+        <a:schemeClr val="lt1"/>
+      </a:solidFill>
+      <a:ln>
+        <a:solidFill>
+          <a:schemeClr val="dk1">
+            <a:lumMod val="25000"/>
+            <a:lumOff val="75000"/>
+          </a:schemeClr>
+        </a:solidFill>
+      </a:ln>
+    </cs:spPr>
+    <cs:defRPr sz="1197" kern="1200"/>
+    <cs:bodyPr rot="0" spcFirstLastPara="1" vertOverflow="clip" horzOverflow="clip" vert="horz" wrap="square" lIns="36576" tIns="18288" rIns="36576" bIns="18288" anchor="ctr" anchorCtr="1">
+      <a:spAutoFit/>
+    </cs:bodyPr>
+  </cs:dataLabelCallout>
+  <cs:dataPoint>
+    <cs:lnRef idx="0"/>
+    <cs:fillRef idx="1">
+      <cs:styleClr val="auto"/>
+    </cs:fillRef>
+    <cs:effectRef idx="0"/>
+    <cs:fontRef idx="minor">
+      <a:schemeClr val="tx1"/>
+    </cs:fontRef>
+    <cs:spPr>
+      <a:solidFill>
+        <a:schemeClr val="phClr"/>
+      </a:solidFill>
+    </cs:spPr>
+  </cs:dataPoint>
+  <cs:dataPoint3D>
+    <cs:lnRef idx="0"/>
+    <cs:fillRef idx="1">
+      <cs:styleClr val="auto"/>
+    </cs:fillRef>
+    <cs:effectRef idx="0"/>
+    <cs:fontRef idx="minor">
+      <a:schemeClr val="tx1"/>
+    </cs:fontRef>
+    <cs:spPr>
+      <a:solidFill>
+        <a:schemeClr val="phClr"/>
+      </a:solidFill>
+    </cs:spPr>
+  </cs:dataPoint3D>
+  <cs:dataPointLine>
+    <cs:lnRef idx="0">
+      <cs:styleClr val="auto"/>
+    </cs:lnRef>
+    <cs:fillRef idx="1"/>
+    <cs:effectRef idx="0"/>
+    <cs:fontRef idx="minor">
+      <a:schemeClr val="tx1"/>
+    </cs:fontRef>
+    <cs:spPr>
+      <a:ln w="28575" cap="rnd">
+        <a:solidFill>
+          <a:schemeClr val="phClr"/>
+        </a:solidFill>
+        <a:round/>
+      </a:ln>
+    </cs:spPr>
+  </cs:dataPointLine>
+  <cs:dataPointMarker>
+    <cs:lnRef idx="0">
+      <cs:styleClr val="auto"/>
+    </cs:lnRef>
+    <cs:fillRef idx="1">
+      <cs:styleClr val="auto"/>
+    </cs:fillRef>
+    <cs:effectRef idx="0"/>
+    <cs:fontRef idx="minor">
+      <a:schemeClr val="tx1"/>
+    </cs:fontRef>
+    <cs:spPr>
+      <a:solidFill>
+        <a:schemeClr val="phClr"/>
+      </a:solidFill>
+      <a:ln w="9525">
+        <a:solidFill>
+          <a:schemeClr val="phClr"/>
+        </a:solidFill>
+      </a:ln>
+    </cs:spPr>
+  </cs:dataPointMarker>
+  <cs:dataPointMarkerLayout symbol="circle" size="5"/>
+  <cs:dataPointWireframe>
+    <cs:lnRef idx="0">
+      <cs:styleClr val="auto"/>
+    </cs:lnRef>
+    <cs:fillRef idx="1"/>
+    <cs:effectRef idx="0"/>
+    <cs:fontRef idx="minor">
+      <a:schemeClr val="tx1"/>
+    </cs:fontRef>
+    <cs:spPr>
+      <a:ln w="9525" cap="rnd">
+        <a:solidFill>
+          <a:schemeClr val="phClr"/>
+        </a:solidFill>
+        <a:round/>
+      </a:ln>
+    </cs:spPr>
+  </cs:dataPointWireframe>
+  <cs:dataTable>
+    <cs:lnRef idx="0"/>
+    <cs:fillRef idx="0"/>
+    <cs:effectRef idx="0"/>
+    <cs:fontRef idx="minor">
+      <a:schemeClr val="tx1">
+        <a:lumMod val="65000"/>
+        <a:lumOff val="35000"/>
+      </a:schemeClr>
+    </cs:fontRef>
+    <cs:spPr>
+      <a:noFill/>
+      <a:ln w="9525" cap="flat" cmpd="sng" algn="ctr">
+        <a:solidFill>
+          <a:schemeClr val="tx1">
+            <a:lumMod val="15000"/>
+            <a:lumOff val="85000"/>
+          </a:schemeClr>
+        </a:solidFill>
+        <a:round/>
+      </a:ln>
+    </cs:spPr>
+    <cs:defRPr sz="1197" kern="1200"/>
+  </cs:dataTable>
+  <cs:downBar>
+    <cs:lnRef idx="0"/>
+    <cs:fillRef idx="0"/>
+    <cs:effectRef idx="0"/>
+    <cs:fontRef idx="minor">
+      <a:schemeClr val="dk1"/>
+    </cs:fontRef>
+    <cs:spPr>
+      <a:solidFill>
+        <a:schemeClr val="dk1">
+          <a:lumMod val="65000"/>
+          <a:lumOff val="35000"/>
+        </a:schemeClr>
+      </a:solidFill>
+      <a:ln w="9525">
+        <a:solidFill>
+          <a:schemeClr val="tx1">
+            <a:lumMod val="65000"/>
+            <a:lumOff val="35000"/>
+          </a:schemeClr>
+        </a:solidFill>
+      </a:ln>
+    </cs:spPr>
+  </cs:downBar>
+  <cs:dropLine>
+    <cs:lnRef idx="0"/>
+    <cs:fillRef idx="0"/>
+    <cs:effectRef idx="0"/>
+    <cs:fontRef idx="minor">
+      <a:schemeClr val="tx1"/>
+    </cs:fontRef>
+    <cs:spPr>
+      <a:ln w="9525" cap="flat" cmpd="sng" algn="ctr">
+        <a:solidFill>
+          <a:schemeClr val="tx1">
+            <a:lumMod val="35000"/>
+            <a:lumOff val="65000"/>
+          </a:schemeClr>
+        </a:solidFill>
+        <a:round/>
+      </a:ln>
+    </cs:spPr>
+  </cs:dropLine>
+  <cs:errorBar>
+    <cs:lnRef idx="0"/>
+    <cs:fillRef idx="0"/>
+    <cs:effectRef idx="0"/>
+    <cs:fontRef idx="minor">
+      <a:schemeClr val="tx1"/>
+    </cs:fontRef>
+    <cs:spPr>
+      <a:ln w="9525" cap="flat" cmpd="sng" algn="ctr">
+        <a:solidFill>
+          <a:schemeClr val="tx1">
+            <a:lumMod val="65000"/>
+            <a:lumOff val="35000"/>
+          </a:schemeClr>
+        </a:solidFill>
+        <a:round/>
+      </a:ln>
+    </cs:spPr>
+  </cs:errorBar>
+  <cs:floor>
+    <cs:lnRef idx="0"/>
+    <cs:fillRef idx="0"/>
+    <cs:effectRef idx="0"/>
+    <cs:fontRef idx="minor">
+      <a:schemeClr val="tx1"/>
+    </cs:fontRef>
+    <cs:spPr>
+      <a:noFill/>
+      <a:ln>
+        <a:noFill/>
+      </a:ln>
+    </cs:spPr>
+  </cs:floor>
+  <cs:gridlineMajor>
+    <cs:lnRef idx="0"/>
+    <cs:fillRef idx="0"/>
+    <cs:effectRef idx="0"/>
+    <cs:fontRef idx="minor">
+      <a:schemeClr val="tx1"/>
+    </cs:fontRef>
+    <cs:spPr>
+      <a:ln w="9525" cap="flat" cmpd="sng" algn="ctr">
+        <a:solidFill>
+          <a:schemeClr val="tx1">
+            <a:lumMod val="15000"/>
+            <a:lumOff val="85000"/>
+          </a:schemeClr>
+        </a:solidFill>
+        <a:round/>
+      </a:ln>
+    </cs:spPr>
+  </cs:gridlineMajor>
+  <cs:gridlineMinor>
+    <cs:lnRef idx="0"/>
+    <cs:fillRef idx="0"/>
+    <cs:effectRef idx="0"/>
+    <cs:fontRef idx="minor">
+      <a:schemeClr val="tx1"/>
+    </cs:fontRef>
+    <cs:spPr>
+      <a:ln w="9525" cap="flat" cmpd="sng" algn="ctr">
+        <a:solidFill>
+          <a:schemeClr val="tx1">
+            <a:lumMod val="5000"/>
+            <a:lumOff val="95000"/>
+          </a:schemeClr>
+        </a:solidFill>
+        <a:round/>
+      </a:ln>
+    </cs:spPr>
+  </cs:gridlineMinor>
+  <cs:hiLoLine>
+    <cs:lnRef idx="0"/>
+    <cs:fillRef idx="0"/>
+    <cs:effectRef idx="0"/>
+    <cs:fontRef idx="minor">
+      <a:schemeClr val="tx1"/>
+    </cs:fontRef>
+    <cs:spPr>
+      <a:ln w="9525" cap="flat" cmpd="sng" algn="ctr">
+        <a:solidFill>
+          <a:schemeClr val="tx1">
+            <a:lumMod val="75000"/>
+            <a:lumOff val="25000"/>
+          </a:schemeClr>
+        </a:solidFill>
+        <a:round/>
+      </a:ln>
+    </cs:spPr>
+  </cs:hiLoLine>
+  <cs:leaderLine>
+    <cs:lnRef idx="0"/>
+    <cs:fillRef idx="0"/>
+    <cs:effectRef idx="0"/>
+    <cs:fontRef idx="minor">
+      <a:schemeClr val="tx1"/>
+    </cs:fontRef>
+    <cs:spPr>
+      <a:ln w="9525" cap="flat" cmpd="sng" algn="ctr">
+        <a:solidFill>
+          <a:schemeClr val="tx1">
+            <a:lumMod val="35000"/>
+            <a:lumOff val="65000"/>
+          </a:schemeClr>
+        </a:solidFill>
+        <a:round/>
+      </a:ln>
+    </cs:spPr>
+  </cs:leaderLine>
+  <cs:legend>
+    <cs:lnRef idx="0"/>
+    <cs:fillRef idx="0"/>
+    <cs:effectRef idx="0"/>
+    <cs:fontRef idx="minor">
+      <a:schemeClr val="tx1">
+        <a:lumMod val="65000"/>
+        <a:lumOff val="35000"/>
+      </a:schemeClr>
+    </cs:fontRef>
+    <cs:defRPr sz="1197" kern="1200"/>
+  </cs:legend>
+  <cs:plotArea mods="allowNoFillOverride allowNoLineOverride">
+    <cs:lnRef idx="0"/>
+    <cs:fillRef idx="0"/>
+    <cs:effectRef idx="0"/>
+    <cs:fontRef idx="minor">
+      <a:schemeClr val="tx1"/>
+    </cs:fontRef>
+  </cs:plotArea>
+  <cs:plotArea3D mods="allowNoFillOverride allowNoLineOverride">
+    <cs:lnRef idx="0"/>
+    <cs:fillRef idx="0"/>
+    <cs:effectRef idx="0"/>
+    <cs:fontRef idx="minor">
+      <a:schemeClr val="tx1"/>
+    </cs:fontRef>
+  </cs:plotArea3D>
+  <cs:seriesAxis>
+    <cs:lnRef idx="0"/>
+    <cs:fillRef idx="0"/>
+    <cs:effectRef idx="0"/>
+    <cs:fontRef idx="minor">
+      <a:schemeClr val="tx1">
+        <a:lumMod val="65000"/>
+        <a:lumOff val="35000"/>
+      </a:schemeClr>
+    </cs:fontRef>
+    <cs:defRPr sz="1197" kern="1200"/>
+  </cs:seriesAxis>
+  <cs:seriesLine>
+    <cs:lnRef idx="0"/>
+    <cs:fillRef idx="0"/>
+    <cs:effectRef idx="0"/>
+    <cs:fontRef idx="minor">
+      <a:schemeClr val="tx1"/>
+    </cs:fontRef>
+    <cs:spPr>
+      <a:ln w="9525" cap="flat" cmpd="sng" algn="ctr">
+        <a:solidFill>
+          <a:schemeClr val="tx1">
+            <a:lumMod val="35000"/>
+            <a:lumOff val="65000"/>
+          </a:schemeClr>
+        </a:solidFill>
+        <a:round/>
+      </a:ln>
+    </cs:spPr>
+  </cs:seriesLine>
+  <cs:title>
+    <cs:lnRef idx="0"/>
+    <cs:fillRef idx="0"/>
+    <cs:effectRef idx="0"/>
+    <cs:fontRef idx="minor">
+      <a:schemeClr val="tx1">
+        <a:lumMod val="65000"/>
+        <a:lumOff val="35000"/>
+      </a:schemeClr>
+    </cs:fontRef>
+    <cs:defRPr sz="1862" b="0" kern="1200" spc="0" baseline="0"/>
+  </cs:title>
+  <cs:trendline>
+    <cs:lnRef idx="0">
+      <cs:styleClr val="auto"/>
+    </cs:lnRef>
+    <cs:fillRef idx="0"/>
+    <cs:effectRef idx="0"/>
+    <cs:fontRef idx="minor">
+      <a:schemeClr val="tx1"/>
+    </cs:fontRef>
+    <cs:spPr>
+      <a:ln w="19050" cap="rnd">
+        <a:solidFill>
+          <a:schemeClr val="phClr"/>
+        </a:solidFill>
+        <a:prstDash val="sysDot"/>
+      </a:ln>
+    </cs:spPr>
+  </cs:trendline>
+  <cs:trendlineLabel>
+    <cs:lnRef idx="0"/>
+    <cs:fillRef idx="0"/>
+    <cs:effectRef idx="0"/>
+    <cs:fontRef idx="minor">
+      <a:schemeClr val="tx1">
+        <a:lumMod val="65000"/>
+        <a:lumOff val="35000"/>
+      </a:schemeClr>
+    </cs:fontRef>
+    <cs:defRPr sz="1197" kern="1200"/>
+  </cs:trendlineLabel>
+  <cs:upBar>
+    <cs:lnRef idx="0"/>
+    <cs:fillRef idx="0"/>
+    <cs:effectRef idx="0"/>
+    <cs:fontRef idx="minor">
+      <a:schemeClr val="dk1"/>
+    </cs:fontRef>
+    <cs:spPr>
+      <a:solidFill>
+        <a:schemeClr val="lt1"/>
+      </a:solidFill>
+      <a:ln w="9525">
+        <a:solidFill>
+          <a:schemeClr val="tx1">
+            <a:lumMod val="15000"/>
+            <a:lumOff val="85000"/>
+          </a:schemeClr>
+        </a:solidFill>
+      </a:ln>
+    </cs:spPr>
+  </cs:upBar>
+  <cs:valueAxis>
+    <cs:lnRef idx="0"/>
+    <cs:fillRef idx="0"/>
+    <cs:effectRef idx="0"/>
+    <cs:fontRef idx="minor">
+      <a:schemeClr val="tx1">
+        <a:lumMod val="65000"/>
+        <a:lumOff val="35000"/>
+      </a:schemeClr>
+    </cs:fontRef>
+    <cs:defRPr sz="1197" kern="1200"/>
+  </cs:valueAxis>
+  <cs:wall>
+    <cs:lnRef idx="0"/>
+    <cs:fillRef idx="0"/>
+    <cs:effectRef idx="0"/>
+    <cs:fontRef idx="minor">
+      <a:schemeClr val="tx1"/>
+    </cs:fontRef>
+    <cs:spPr>
+      <a:noFill/>
+      <a:ln>
+        <a:noFill/>
+      </a:ln>
+    </cs:spPr>
+  </cs:wall>
+</cs:chartStyle>
+</file>
+
+<file path=ppt/charts/style8.xml><?xml version="1.0" encoding="utf-8"?>
+<cs:chartStyle xmlns:cs="http://schemas.microsoft.com/office/drawing/2012/chartStyle" xmlns:a="http://schemas.openxmlformats.org/drawingml/2006/main" id="227">
+  <cs:axisTitle>
+    <cs:lnRef idx="0"/>
+    <cs:fillRef idx="0"/>
+    <cs:effectRef idx="0"/>
+    <cs:fontRef idx="minor">
+      <a:schemeClr val="tx1">
+        <a:lumMod val="65000"/>
+        <a:lumOff val="35000"/>
+      </a:schemeClr>
+    </cs:fontRef>
+    <cs:defRPr sz="1330" kern="1200"/>
+  </cs:axisTitle>
+  <cs:categoryAxis>
+    <cs:lnRef idx="0"/>
+    <cs:fillRef idx="0"/>
+    <cs:effectRef idx="0"/>
+    <cs:fontRef idx="minor">
+      <a:schemeClr val="tx1">
+        <a:lumMod val="65000"/>
+        <a:lumOff val="35000"/>
+      </a:schemeClr>
+    </cs:fontRef>
+    <cs:spPr>
+      <a:ln w="9525" cap="flat" cmpd="sng" algn="ctr">
+        <a:solidFill>
+          <a:schemeClr val="tx1">
+            <a:lumMod val="15000"/>
+            <a:lumOff val="85000"/>
+          </a:schemeClr>
+        </a:solidFill>
+        <a:round/>
+      </a:ln>
+    </cs:spPr>
+    <cs:defRPr sz="1197" kern="1200"/>
+  </cs:categoryAxis>
+  <cs:chartArea mods="allowNoFillOverride allowNoLineOverride">
+    <cs:lnRef idx="0"/>
+    <cs:fillRef idx="0"/>
+    <cs:effectRef idx="0"/>
+    <cs:fontRef idx="minor">
+      <a:schemeClr val="tx1"/>
+    </cs:fontRef>
+    <cs:spPr>
+      <a:solidFill>
+        <a:schemeClr val="bg1"/>
+      </a:solidFill>
+      <a:ln w="9525" cap="flat" cmpd="sng" algn="ctr">
+        <a:solidFill>
+          <a:schemeClr val="tx1">
+            <a:lumMod val="15000"/>
+            <a:lumOff val="85000"/>
+          </a:schemeClr>
+        </a:solidFill>
+        <a:round/>
+      </a:ln>
+    </cs:spPr>
+    <cs:defRPr sz="1330" kern="1200"/>
+  </cs:chartArea>
+  <cs:dataLabel>
+    <cs:lnRef idx="0"/>
+    <cs:fillRef idx="0"/>
+    <cs:effectRef idx="0"/>
+    <cs:fontRef idx="minor">
+      <a:schemeClr val="tx1">
+        <a:lumMod val="75000"/>
+        <a:lumOff val="25000"/>
+      </a:schemeClr>
+    </cs:fontRef>
+    <cs:defRPr sz="1197" kern="1200"/>
+  </cs:dataLabel>
+  <cs:dataLabelCallout>
+    <cs:lnRef idx="0"/>
+    <cs:fillRef idx="0"/>
+    <cs:effectRef idx="0"/>
+    <cs:fontRef idx="minor">
+      <a:schemeClr val="dk1">
+        <a:lumMod val="65000"/>
+        <a:lumOff val="35000"/>
+      </a:schemeClr>
+    </cs:fontRef>
+    <cs:spPr>
+      <a:solidFill>
+        <a:schemeClr val="lt1"/>
+      </a:solidFill>
+      <a:ln>
+        <a:solidFill>
+          <a:schemeClr val="dk1">
+            <a:lumMod val="25000"/>
+            <a:lumOff val="75000"/>
+          </a:schemeClr>
+        </a:solidFill>
+      </a:ln>
+    </cs:spPr>
+    <cs:defRPr sz="1197" kern="1200"/>
+    <cs:bodyPr rot="0" spcFirstLastPara="1" vertOverflow="clip" horzOverflow="clip" vert="horz" wrap="square" lIns="36576" tIns="18288" rIns="36576" bIns="18288" anchor="ctr" anchorCtr="1">
+      <a:spAutoFit/>
+    </cs:bodyPr>
+  </cs:dataLabelCallout>
+  <cs:dataPoint>
+    <cs:lnRef idx="0"/>
+    <cs:fillRef idx="1">
+      <cs:styleClr val="auto"/>
+    </cs:fillRef>
+    <cs:effectRef idx="0"/>
+    <cs:fontRef idx="minor">
+      <a:schemeClr val="tx1"/>
+    </cs:fontRef>
+    <cs:spPr>
+      <a:solidFill>
+        <a:schemeClr val="phClr"/>
+      </a:solidFill>
+    </cs:spPr>
+  </cs:dataPoint>
+  <cs:dataPoint3D>
+    <cs:lnRef idx="0"/>
+    <cs:fillRef idx="1">
+      <cs:styleClr val="auto"/>
+    </cs:fillRef>
+    <cs:effectRef idx="0"/>
+    <cs:fontRef idx="minor">
+      <a:schemeClr val="tx1"/>
+    </cs:fontRef>
+    <cs:spPr>
+      <a:solidFill>
+        <a:schemeClr val="phClr"/>
+      </a:solidFill>
+    </cs:spPr>
+  </cs:dataPoint3D>
+  <cs:dataPointLine>
+    <cs:lnRef idx="0">
+      <cs:styleClr val="auto"/>
+    </cs:lnRef>
+    <cs:fillRef idx="1"/>
+    <cs:effectRef idx="0"/>
+    <cs:fontRef idx="minor">
+      <a:schemeClr val="tx1"/>
+    </cs:fontRef>
+    <cs:spPr>
+      <a:ln w="28575" cap="rnd">
+        <a:solidFill>
+          <a:schemeClr val="phClr"/>
+        </a:solidFill>
+        <a:round/>
+      </a:ln>
+    </cs:spPr>
+  </cs:dataPointLine>
+  <cs:dataPointMarker>
+    <cs:lnRef idx="0">
+      <cs:styleClr val="auto"/>
+    </cs:lnRef>
+    <cs:fillRef idx="1">
+      <cs:styleClr val="auto"/>
+    </cs:fillRef>
+    <cs:effectRef idx="0"/>
+    <cs:fontRef idx="minor">
+      <a:schemeClr val="tx1"/>
+    </cs:fontRef>
+    <cs:spPr>
+      <a:solidFill>
+        <a:schemeClr val="phClr"/>
+      </a:solidFill>
+      <a:ln w="9525">
+        <a:solidFill>
+          <a:schemeClr val="phClr"/>
+        </a:solidFill>
+      </a:ln>
+    </cs:spPr>
+  </cs:dataPointMarker>
+  <cs:dataPointMarkerLayout symbol="circle" size="5"/>
+  <cs:dataPointWireframe>
+    <cs:lnRef idx="0">
+      <cs:styleClr val="auto"/>
+    </cs:lnRef>
+    <cs:fillRef idx="1"/>
+    <cs:effectRef idx="0"/>
+    <cs:fontRef idx="minor">
+      <a:schemeClr val="tx1"/>
+    </cs:fontRef>
+    <cs:spPr>
+      <a:ln w="9525" cap="rnd">
+        <a:solidFill>
+          <a:schemeClr val="phClr"/>
+        </a:solidFill>
+        <a:round/>
+      </a:ln>
+    </cs:spPr>
+  </cs:dataPointWireframe>
+  <cs:dataTable>
+    <cs:lnRef idx="0"/>
+    <cs:fillRef idx="0"/>
+    <cs:effectRef idx="0"/>
+    <cs:fontRef idx="minor">
+      <a:schemeClr val="tx1">
+        <a:lumMod val="65000"/>
+        <a:lumOff val="35000"/>
+      </a:schemeClr>
+    </cs:fontRef>
+    <cs:spPr>
+      <a:noFill/>
+      <a:ln w="9525" cap="flat" cmpd="sng" algn="ctr">
+        <a:solidFill>
+          <a:schemeClr val="tx1">
+            <a:lumMod val="15000"/>
+            <a:lumOff val="85000"/>
+          </a:schemeClr>
+        </a:solidFill>
+        <a:round/>
+      </a:ln>
+    </cs:spPr>
+    <cs:defRPr sz="1197" kern="1200"/>
+  </cs:dataTable>
+  <cs:downBar>
+    <cs:lnRef idx="0"/>
+    <cs:fillRef idx="0"/>
+    <cs:effectRef idx="0"/>
+    <cs:fontRef idx="minor">
+      <a:schemeClr val="dk1"/>
+    </cs:fontRef>
+    <cs:spPr>
+      <a:solidFill>
+        <a:schemeClr val="dk1">
+          <a:lumMod val="65000"/>
+          <a:lumOff val="35000"/>
+        </a:schemeClr>
+      </a:solidFill>
+      <a:ln w="9525">
+        <a:solidFill>
+          <a:schemeClr val="tx1">
+            <a:lumMod val="65000"/>
+            <a:lumOff val="35000"/>
+          </a:schemeClr>
+        </a:solidFill>
+      </a:ln>
+    </cs:spPr>
+  </cs:downBar>
+  <cs:dropLine>
+    <cs:lnRef idx="0"/>
+    <cs:fillRef idx="0"/>
+    <cs:effectRef idx="0"/>
+    <cs:fontRef idx="minor">
+      <a:schemeClr val="tx1"/>
+    </cs:fontRef>
+    <cs:spPr>
+      <a:ln w="9525" cap="flat" cmpd="sng" algn="ctr">
+        <a:solidFill>
+          <a:schemeClr val="tx1">
+            <a:lumMod val="35000"/>
+            <a:lumOff val="65000"/>
+          </a:schemeClr>
+        </a:solidFill>
+        <a:round/>
+      </a:ln>
+    </cs:spPr>
+  </cs:dropLine>
+  <cs:errorBar>
+    <cs:lnRef idx="0"/>
+    <cs:fillRef idx="0"/>
+    <cs:effectRef idx="0"/>
+    <cs:fontRef idx="minor">
+      <a:schemeClr val="tx1"/>
+    </cs:fontRef>
+    <cs:spPr>
+      <a:ln w="9525" cap="flat" cmpd="sng" algn="ctr">
+        <a:solidFill>
+          <a:schemeClr val="tx1">
+            <a:lumMod val="65000"/>
+            <a:lumOff val="35000"/>
+          </a:schemeClr>
+        </a:solidFill>
+        <a:round/>
+      </a:ln>
+    </cs:spPr>
+  </cs:errorBar>
+  <cs:floor>
+    <cs:lnRef idx="0"/>
+    <cs:fillRef idx="0"/>
+    <cs:effectRef idx="0"/>
+    <cs:fontRef idx="minor">
+      <a:schemeClr val="tx1"/>
+    </cs:fontRef>
+    <cs:spPr>
+      <a:noFill/>
+      <a:ln>
+        <a:noFill/>
+      </a:ln>
+    </cs:spPr>
+  </cs:floor>
+  <cs:gridlineMajor>
+    <cs:lnRef idx="0"/>
+    <cs:fillRef idx="0"/>
+    <cs:effectRef idx="0"/>
+    <cs:fontRef idx="minor">
+      <a:schemeClr val="tx1"/>
+    </cs:fontRef>
+    <cs:spPr>
+      <a:ln w="9525" cap="flat" cmpd="sng" algn="ctr">
+        <a:solidFill>
+          <a:schemeClr val="tx1">
+            <a:lumMod val="15000"/>
+            <a:lumOff val="85000"/>
+          </a:schemeClr>
+        </a:solidFill>
+        <a:round/>
+      </a:ln>
+    </cs:spPr>
+  </cs:gridlineMajor>
+  <cs:gridlineMinor>
+    <cs:lnRef idx="0"/>
+    <cs:fillRef idx="0"/>
+    <cs:effectRef idx="0"/>
+    <cs:fontRef idx="minor">
+      <a:schemeClr val="tx1"/>
+    </cs:fontRef>
+    <cs:spPr>
+      <a:ln w="9525" cap="flat" cmpd="sng" algn="ctr">
+        <a:solidFill>
+          <a:schemeClr val="tx1">
+            <a:lumMod val="5000"/>
+            <a:lumOff val="95000"/>
+          </a:schemeClr>
+        </a:solidFill>
+        <a:round/>
+      </a:ln>
+    </cs:spPr>
+  </cs:gridlineMinor>
+  <cs:hiLoLine>
+    <cs:lnRef idx="0"/>
+    <cs:fillRef idx="0"/>
+    <cs:effectRef idx="0"/>
+    <cs:fontRef idx="minor">
+      <a:schemeClr val="tx1"/>
+    </cs:fontRef>
+    <cs:spPr>
+      <a:ln w="9525" cap="flat" cmpd="sng" algn="ctr">
+        <a:solidFill>
+          <a:schemeClr val="tx1">
+            <a:lumMod val="75000"/>
+            <a:lumOff val="25000"/>
+          </a:schemeClr>
+        </a:solidFill>
+        <a:round/>
+      </a:ln>
+    </cs:spPr>
+  </cs:hiLoLine>
+  <cs:leaderLine>
+    <cs:lnRef idx="0"/>
+    <cs:fillRef idx="0"/>
+    <cs:effectRef idx="0"/>
+    <cs:fontRef idx="minor">
+      <a:schemeClr val="tx1"/>
+    </cs:fontRef>
+    <cs:spPr>
+      <a:ln w="9525" cap="flat" cmpd="sng" algn="ctr">
+        <a:solidFill>
+          <a:schemeClr val="tx1">
+            <a:lumMod val="35000"/>
+            <a:lumOff val="65000"/>
+          </a:schemeClr>
+        </a:solidFill>
+        <a:round/>
+      </a:ln>
+    </cs:spPr>
+  </cs:leaderLine>
+  <cs:legend>
+    <cs:lnRef idx="0"/>
+    <cs:fillRef idx="0"/>
+    <cs:effectRef idx="0"/>
+    <cs:fontRef idx="minor">
+      <a:schemeClr val="tx1">
+        <a:lumMod val="65000"/>
+        <a:lumOff val="35000"/>
+      </a:schemeClr>
+    </cs:fontRef>
+    <cs:defRPr sz="1197" kern="1200"/>
+  </cs:legend>
+  <cs:plotArea mods="allowNoFillOverride allowNoLineOverride">
+    <cs:lnRef idx="0"/>
+    <cs:fillRef idx="0"/>
+    <cs:effectRef idx="0"/>
+    <cs:fontRef idx="minor">
+      <a:schemeClr val="tx1"/>
+    </cs:fontRef>
+  </cs:plotArea>
+  <cs:plotArea3D mods="allowNoFillOverride allowNoLineOverride">
+    <cs:lnRef idx="0"/>
+    <cs:fillRef idx="0"/>
+    <cs:effectRef idx="0"/>
+    <cs:fontRef idx="minor">
+      <a:schemeClr val="tx1"/>
+    </cs:fontRef>
+  </cs:plotArea3D>
+  <cs:seriesAxis>
+    <cs:lnRef idx="0"/>
+    <cs:fillRef idx="0"/>
+    <cs:effectRef idx="0"/>
+    <cs:fontRef idx="minor">
+      <a:schemeClr val="tx1">
+        <a:lumMod val="65000"/>
+        <a:lumOff val="35000"/>
+      </a:schemeClr>
+    </cs:fontRef>
+    <cs:defRPr sz="1197" kern="1200"/>
+  </cs:seriesAxis>
+  <cs:seriesLine>
+    <cs:lnRef idx="0"/>
+    <cs:fillRef idx="0"/>
+    <cs:effectRef idx="0"/>
+    <cs:fontRef idx="minor">
+      <a:schemeClr val="tx1"/>
+    </cs:fontRef>
+    <cs:spPr>
+      <a:ln w="9525" cap="flat" cmpd="sng" algn="ctr">
+        <a:solidFill>
+          <a:schemeClr val="tx1">
+            <a:lumMod val="35000"/>
+            <a:lumOff val="65000"/>
+          </a:schemeClr>
+        </a:solidFill>
+        <a:round/>
+      </a:ln>
+    </cs:spPr>
+  </cs:seriesLine>
+  <cs:title>
+    <cs:lnRef idx="0"/>
+    <cs:fillRef idx="0"/>
+    <cs:effectRef idx="0"/>
+    <cs:fontRef idx="minor">
+      <a:schemeClr val="tx1">
+        <a:lumMod val="65000"/>
+        <a:lumOff val="35000"/>
+      </a:schemeClr>
+    </cs:fontRef>
+    <cs:defRPr sz="1862" b="0" kern="1200" spc="0" baseline="0"/>
+  </cs:title>
+  <cs:trendline>
+    <cs:lnRef idx="0">
+      <cs:styleClr val="auto"/>
+    </cs:lnRef>
+    <cs:fillRef idx="0"/>
+    <cs:effectRef idx="0"/>
+    <cs:fontRef idx="minor">
+      <a:schemeClr val="tx1"/>
+    </cs:fontRef>
+    <cs:spPr>
+      <a:ln w="19050" cap="rnd">
+        <a:solidFill>
+          <a:schemeClr val="phClr"/>
+        </a:solidFill>
+        <a:prstDash val="sysDot"/>
+      </a:ln>
+    </cs:spPr>
+  </cs:trendline>
+  <cs:trendlineLabel>
+    <cs:lnRef idx="0"/>
+    <cs:fillRef idx="0"/>
+    <cs:effectRef idx="0"/>
+    <cs:fontRef idx="minor">
+      <a:schemeClr val="tx1">
+        <a:lumMod val="65000"/>
+        <a:lumOff val="35000"/>
+      </a:schemeClr>
+    </cs:fontRef>
+    <cs:defRPr sz="1197" kern="1200"/>
+  </cs:trendlineLabel>
+  <cs:upBar>
+    <cs:lnRef idx="0"/>
+    <cs:fillRef idx="0"/>
+    <cs:effectRef idx="0"/>
+    <cs:fontRef idx="minor">
+      <a:schemeClr val="dk1"/>
+    </cs:fontRef>
+    <cs:spPr>
+      <a:solidFill>
+        <a:schemeClr val="lt1"/>
+      </a:solidFill>
+      <a:ln w="9525">
+        <a:solidFill>
+          <a:schemeClr val="tx1">
+            <a:lumMod val="15000"/>
+            <a:lumOff val="85000"/>
+          </a:schemeClr>
+        </a:solidFill>
+      </a:ln>
+    </cs:spPr>
+  </cs:upBar>
+  <cs:valueAxis>
+    <cs:lnRef idx="0"/>
+    <cs:fillRef idx="0"/>
+    <cs:effectRef idx="0"/>
+    <cs:fontRef idx="minor">
+      <a:schemeClr val="tx1">
+        <a:lumMod val="65000"/>
+        <a:lumOff val="35000"/>
+      </a:schemeClr>
+    </cs:fontRef>
+    <cs:defRPr sz="1197" kern="1200"/>
+  </cs:valueAxis>
+  <cs:wall>
+    <cs:lnRef idx="0"/>
+    <cs:fillRef idx="0"/>
+    <cs:effectRef idx="0"/>
+    <cs:fontRef idx="minor">
+      <a:schemeClr val="tx1"/>
+    </cs:fontRef>
+    <cs:spPr>
+      <a:noFill/>
+      <a:ln>
+        <a:noFill/>
+      </a:ln>
+    </cs:spPr>
+  </cs:wall>
+</cs:chartStyle>
+</file>
+
+<file path=ppt/charts/style9.xml><?xml version="1.0" encoding="utf-8"?>
 <cs:chartStyle xmlns:cs="http://schemas.microsoft.com/office/drawing/2012/chartStyle" xmlns:a="http://schemas.openxmlformats.org/drawingml/2006/main" id="227">
   <cs:axisTitle>
     <cs:lnRef idx="0"/>
@@ -12150,7 +15028,7 @@
           <a:p>
             <a:fld id="{842CECD3-3569-4D6E-AA1B-67789CA6B4B3}" type="datetimeFigureOut">
               <a:rPr lang="en-GB" smtClean="0"/>
-              <a:t>11/05/2026</a:t>
+              <a:t>15/05/2026</a:t>
             </a:fld>
             <a:endParaRPr lang="en-GB"/>
           </a:p>
@@ -12586,7 +15464,7 @@
           <a:p>
             <a:fld id="{842CECD3-3569-4D6E-AA1B-67789CA6B4B3}" type="datetimeFigureOut">
               <a:rPr lang="en-GB" smtClean="0"/>
-              <a:t>11/05/2026</a:t>
+              <a:t>15/05/2026</a:t>
             </a:fld>
             <a:endParaRPr lang="en-GB"/>
           </a:p>
@@ -12836,7 +15714,7 @@
           <a:p>
             <a:fld id="{842CECD3-3569-4D6E-AA1B-67789CA6B4B3}" type="datetimeFigureOut">
               <a:rPr lang="en-GB" smtClean="0"/>
-              <a:t>11/05/2026</a:t>
+              <a:t>15/05/2026</a:t>
             </a:fld>
             <a:endParaRPr lang="en-GB"/>
           </a:p>
@@ -13144,7 +16022,7 @@
           <a:p>
             <a:fld id="{842CECD3-3569-4D6E-AA1B-67789CA6B4B3}" type="datetimeFigureOut">
               <a:rPr lang="en-GB" smtClean="0"/>
-              <a:t>11/05/2026</a:t>
+              <a:t>15/05/2026</a:t>
             </a:fld>
             <a:endParaRPr lang="en-GB"/>
           </a:p>
@@ -13462,7 +16340,7 @@
           <a:p>
             <a:fld id="{842CECD3-3569-4D6E-AA1B-67789CA6B4B3}" type="datetimeFigureOut">
               <a:rPr lang="en-GB" smtClean="0"/>
-              <a:t>11/05/2026</a:t>
+              <a:t>15/05/2026</a:t>
             </a:fld>
             <a:endParaRPr lang="en-GB"/>
           </a:p>
@@ -13764,7 +16642,7 @@
           <a:p>
             <a:fld id="{842CECD3-3569-4D6E-AA1B-67789CA6B4B3}" type="datetimeFigureOut">
               <a:rPr lang="en-GB" smtClean="0"/>
-              <a:t>11/05/2026</a:t>
+              <a:t>15/05/2026</a:t>
             </a:fld>
             <a:endParaRPr lang="en-GB"/>
           </a:p>
@@ -14131,7 +17009,7 @@
           <a:p>
             <a:fld id="{842CECD3-3569-4D6E-AA1B-67789CA6B4B3}" type="datetimeFigureOut">
               <a:rPr lang="en-GB" smtClean="0"/>
-              <a:t>11/05/2026</a:t>
+              <a:t>15/05/2026</a:t>
             </a:fld>
             <a:endParaRPr lang="en-GB"/>
           </a:p>
@@ -14305,7 +17183,7 @@
           <a:p>
             <a:fld id="{842CECD3-3569-4D6E-AA1B-67789CA6B4B3}" type="datetimeFigureOut">
               <a:rPr lang="en-GB" smtClean="0"/>
-              <a:t>11/05/2026</a:t>
+              <a:t>15/05/2026</a:t>
             </a:fld>
             <a:endParaRPr lang="en-GB"/>
           </a:p>
@@ -14485,7 +17363,7 @@
           <a:p>
             <a:fld id="{842CECD3-3569-4D6E-AA1B-67789CA6B4B3}" type="datetimeFigureOut">
               <a:rPr lang="en-GB" smtClean="0"/>
-              <a:t>11/05/2026</a:t>
+              <a:t>15/05/2026</a:t>
             </a:fld>
             <a:endParaRPr lang="en-GB"/>
           </a:p>
@@ -14655,7 +17533,7 @@
           <a:p>
             <a:fld id="{842CECD3-3569-4D6E-AA1B-67789CA6B4B3}" type="datetimeFigureOut">
               <a:rPr lang="en-GB" smtClean="0"/>
-              <a:t>11/05/2026</a:t>
+              <a:t>15/05/2026</a:t>
             </a:fld>
             <a:endParaRPr lang="en-GB"/>
           </a:p>
@@ -14905,7 +17783,7 @@
           <a:p>
             <a:fld id="{842CECD3-3569-4D6E-AA1B-67789CA6B4B3}" type="datetimeFigureOut">
               <a:rPr lang="en-GB" smtClean="0"/>
-              <a:t>11/05/2026</a:t>
+              <a:t>15/05/2026</a:t>
             </a:fld>
             <a:endParaRPr lang="en-GB"/>
           </a:p>
@@ -15141,7 +18019,7 @@
           <a:p>
             <a:fld id="{842CECD3-3569-4D6E-AA1B-67789CA6B4B3}" type="datetimeFigureOut">
               <a:rPr lang="en-GB" smtClean="0"/>
-              <a:t>11/05/2026</a:t>
+              <a:t>15/05/2026</a:t>
             </a:fld>
             <a:endParaRPr lang="en-GB"/>
           </a:p>
@@ -15523,7 +18401,7 @@
           <a:p>
             <a:fld id="{842CECD3-3569-4D6E-AA1B-67789CA6B4B3}" type="datetimeFigureOut">
               <a:rPr lang="en-GB" smtClean="0"/>
-              <a:t>11/05/2026</a:t>
+              <a:t>15/05/2026</a:t>
             </a:fld>
             <a:endParaRPr lang="en-GB"/>
           </a:p>
@@ -15641,7 +18519,7 @@
           <a:p>
             <a:fld id="{842CECD3-3569-4D6E-AA1B-67789CA6B4B3}" type="datetimeFigureOut">
               <a:rPr lang="en-GB" smtClean="0"/>
-              <a:t>11/05/2026</a:t>
+              <a:t>15/05/2026</a:t>
             </a:fld>
             <a:endParaRPr lang="en-GB"/>
           </a:p>
@@ -15736,7 +18614,7 @@
           <a:p>
             <a:fld id="{842CECD3-3569-4D6E-AA1B-67789CA6B4B3}" type="datetimeFigureOut">
               <a:rPr lang="en-GB" smtClean="0"/>
-              <a:t>11/05/2026</a:t>
+              <a:t>15/05/2026</a:t>
             </a:fld>
             <a:endParaRPr lang="en-GB"/>
           </a:p>
@@ -15991,7 +18869,7 @@
           <a:p>
             <a:fld id="{842CECD3-3569-4D6E-AA1B-67789CA6B4B3}" type="datetimeFigureOut">
               <a:rPr lang="en-GB" smtClean="0"/>
-              <a:t>11/05/2026</a:t>
+              <a:t>15/05/2026</a:t>
             </a:fld>
             <a:endParaRPr lang="en-GB"/>
           </a:p>
@@ -16274,7 +19152,7 @@
           <a:p>
             <a:fld id="{842CECD3-3569-4D6E-AA1B-67789CA6B4B3}" type="datetimeFigureOut">
               <a:rPr lang="en-GB" smtClean="0"/>
-              <a:t>11/05/2026</a:t>
+              <a:t>15/05/2026</a:t>
             </a:fld>
             <a:endParaRPr lang="en-GB"/>
           </a:p>
@@ -16680,7 +19558,7 @@
           <a:p>
             <a:fld id="{842CECD3-3569-4D6E-AA1B-67789CA6B4B3}" type="datetimeFigureOut">
               <a:rPr lang="en-GB" smtClean="0"/>
-              <a:t>11/05/2026</a:t>
+              <a:t>15/05/2026</a:t>
             </a:fld>
             <a:endParaRPr lang="en-GB"/>
           </a:p>
@@ -19599,9 +22477,16 @@
             <p:ph idx="1"/>
           </p:nvPr>
         </p:nvSpPr>
-        <p:spPr/>
+        <p:spPr>
+          <a:xfrm>
+            <a:off x="684212" y="1492865"/>
+            <a:ext cx="8534400" cy="2862825"/>
+          </a:xfrm>
+        </p:spPr>
         <p:txBody>
-          <a:bodyPr/>
+          <a:bodyPr>
+            <a:normAutofit fontScale="92500" lnSpcReduction="10000"/>
+          </a:bodyPr>
           <a:lstStyle/>
           <a:p>
             <a:r>
@@ -19618,7 +22503,7 @@
                   <a:schemeClr val="tx1"/>
                 </a:solidFill>
               </a:rPr>
-              <a:t>: [10, 50, 150, 300, 600, 1000]</a:t>
+              <a:t>: [10, 50]</a:t>
             </a:r>
           </a:p>
           <a:p>
@@ -19654,7 +22539,25 @@
                   <a:schemeClr val="tx1"/>
                 </a:solidFill>
               </a:rPr>
-              <a:t>: 32</a:t>
+              <a:t>: 32/64</a:t>
+            </a:r>
+          </a:p>
+          <a:p>
+            <a:r>
+              <a:rPr lang="it-IT" dirty="0" err="1">
+                <a:solidFill>
+                  <a:schemeClr val="tx1"/>
+                </a:solidFill>
+              </a:rPr>
+              <a:t>batch_size</a:t>
+            </a:r>
+            <a:r>
+              <a:rPr lang="it-IT" dirty="0">
+                <a:solidFill>
+                  <a:schemeClr val="tx1"/>
+                </a:solidFill>
+              </a:rPr>
+              <a:t>: 16</a:t>
             </a:r>
           </a:p>
           <a:p>
@@ -19801,14 +22704,14 @@
             <p:ph idx="1"/>
             <p:extLst>
               <p:ext uri="{D42A27DB-BD31-4B8C-83A1-F6EECF244321}">
-                <p14:modId xmlns:p14="http://schemas.microsoft.com/office/powerpoint/2010/main" val="1606150016"/>
+                <p14:modId xmlns:p14="http://schemas.microsoft.com/office/powerpoint/2010/main" val="1780602273"/>
               </p:ext>
             </p:extLst>
           </p:nvPr>
         </p:nvGraphicFramePr>
         <p:xfrm>
           <a:off x="684211" y="685800"/>
-          <a:ext cx="9639658" cy="2865120"/>
+          <a:ext cx="9639657" cy="2672080"/>
         </p:xfrm>
         <a:graphic>
           <a:graphicData uri="http://schemas.openxmlformats.org/drawingml/2006/table">
@@ -19817,49 +22720,63 @@
                 <a:tableStyleId>{5C22544A-7EE6-4342-B048-85BDC9FD1C3A}</a:tableStyleId>
               </a:tblPr>
               <a:tblGrid>
-                <a:gridCol w="1377094">
+                <a:gridCol w="1071073">
+                  <a:extLst>
+                    <a:ext uri="{9D8B030D-6E8A-4147-A177-3AD203B41FA5}">
+                      <a16:colId xmlns:a16="http://schemas.microsoft.com/office/drawing/2014/main" val="713660421"/>
+                    </a:ext>
+                  </a:extLst>
+                </a:gridCol>
+                <a:gridCol w="1071073">
+                  <a:extLst>
+                    <a:ext uri="{9D8B030D-6E8A-4147-A177-3AD203B41FA5}">
+                      <a16:colId xmlns:a16="http://schemas.microsoft.com/office/drawing/2014/main" val="2605851528"/>
+                    </a:ext>
+                  </a:extLst>
+                </a:gridCol>
+                <a:gridCol w="1071073">
                   <a:extLst>
                     <a:ext uri="{9D8B030D-6E8A-4147-A177-3AD203B41FA5}">
                       <a16:colId xmlns:a16="http://schemas.microsoft.com/office/drawing/2014/main" val="4131664428"/>
                     </a:ext>
                   </a:extLst>
                 </a:gridCol>
-                <a:gridCol w="1377094">
+                <a:gridCol w="1071073">
                   <a:extLst>
                     <a:ext uri="{9D8B030D-6E8A-4147-A177-3AD203B41FA5}">
                       <a16:colId xmlns:a16="http://schemas.microsoft.com/office/drawing/2014/main" val="2682047389"/>
                     </a:ext>
                   </a:extLst>
                 </a:gridCol>
-                <a:gridCol w="1377094">
+                <a:gridCol w="1071073">
                   <a:extLst>
                     <a:ext uri="{9D8B030D-6E8A-4147-A177-3AD203B41FA5}">
                       <a16:colId xmlns:a16="http://schemas.microsoft.com/office/drawing/2014/main" val="560020995"/>
                     </a:ext>
                   </a:extLst>
                 </a:gridCol>
-                <a:gridCol w="1377094">
+                <a:gridCol w="1071073">
                   <a:extLst>
                     <a:ext uri="{9D8B030D-6E8A-4147-A177-3AD203B41FA5}">
                       <a16:colId xmlns:a16="http://schemas.microsoft.com/office/drawing/2014/main" val="2200272610"/>
                     </a:ext>
                   </a:extLst>
                 </a:gridCol>
-                <a:gridCol w="1377094">
+                <a:gridCol w="1071073">
                   <a:extLst>
                     <a:ext uri="{9D8B030D-6E8A-4147-A177-3AD203B41FA5}">
                       <a16:colId xmlns:a16="http://schemas.microsoft.com/office/drawing/2014/main" val="1594005505"/>
                     </a:ext>
                   </a:extLst>
                 </a:gridCol>
-                <a:gridCol w="1377094">
+                <a:gridCol w="1071073">
                   <a:extLst>
                     <a:ext uri="{9D8B030D-6E8A-4147-A177-3AD203B41FA5}">
                       <a16:colId xmlns:a16="http://schemas.microsoft.com/office/drawing/2014/main" val="748764634"/>
                     </a:ext>
                   </a:extLst>
                 </a:gridCol>
-                <a:gridCol w="1377094">
+                <a:gridCol w="1071073">
                   <a:extLst>
                     <a:ext uri="{9D8B030D-6E8A-4147-A177-3AD203B41FA5}">
                       <a16:colId xmlns:a16="http://schemas.microsoft.com/office/drawing/2014/main" val="3172487590"/>
@@ -19868,6 +22785,20 @@
                 </a:gridCol>
               </a:tblGrid>
               <a:tr h="370840">
+                <a:tc>
+                  <a:txBody>
+                    <a:bodyPr/>
+                    <a:lstStyle/>
+                    <a:p>
+                      <a:r>
+                        <a:rPr lang="it-IT" dirty="0"/>
+                        <a:t>Connessioni simultanee</a:t>
+                      </a:r>
+                      <a:endParaRPr lang="en-GB" dirty="0"/>
+                    </a:p>
+                  </a:txBody>
+                  <a:tcPr/>
+                </a:tc>
                 <a:tc>
                   <a:txBody>
                     <a:bodyPr/>
@@ -19889,7 +22820,7 @@
                     <a:p>
                       <a:r>
                         <a:rPr lang="it-IT" dirty="0"/>
-                        <a:t>RPS effettivi</a:t>
+                        <a:t>Richieste totali</a:t>
                       </a:r>
                       <a:endParaRPr lang="en-GB" dirty="0"/>
                     </a:p>
@@ -19903,7 +22834,7 @@
                     <a:p>
                       <a:r>
                         <a:rPr lang="it-IT" dirty="0"/>
-                        <a:t>Media latenze (s)</a:t>
+                        <a:t>Richieste risolte</a:t>
                       </a:r>
                       <a:endParaRPr lang="en-GB" dirty="0"/>
                     </a:p>
@@ -19917,7 +22848,15 @@
                     <a:p>
                       <a:r>
                         <a:rPr lang="it-IT" dirty="0"/>
-                        <a:t>P50 (s)</a:t>
+                        <a:t>Media latenze (</a:t>
+                      </a:r>
+                      <a:r>
+                        <a:rPr lang="it-IT" dirty="0" err="1"/>
+                        <a:t>ms</a:t>
+                      </a:r>
+                      <a:r>
+                        <a:rPr lang="it-IT" dirty="0"/>
+                        <a:t>)</a:t>
                       </a:r>
                       <a:endParaRPr lang="en-GB" dirty="0"/>
                     </a:p>
@@ -19931,7 +22870,15 @@
                     <a:p>
                       <a:r>
                         <a:rPr lang="it-IT" dirty="0"/>
-                        <a:t>P90 (s)</a:t>
+                        <a:t>P50 (</a:t>
+                      </a:r>
+                      <a:r>
+                        <a:rPr lang="it-IT" dirty="0" err="1"/>
+                        <a:t>ms</a:t>
+                      </a:r>
+                      <a:r>
+                        <a:rPr lang="it-IT" dirty="0"/>
+                        <a:t>)</a:t>
                       </a:r>
                       <a:endParaRPr lang="en-GB" dirty="0"/>
                     </a:p>
@@ -19945,7 +22892,15 @@
                     <a:p>
                       <a:r>
                         <a:rPr lang="it-IT" dirty="0"/>
-                        <a:t>P95 (s)</a:t>
+                        <a:t>P90 (</a:t>
+                      </a:r>
+                      <a:r>
+                        <a:rPr lang="it-IT" dirty="0" err="1"/>
+                        <a:t>ms</a:t>
+                      </a:r>
+                      <a:r>
+                        <a:rPr lang="it-IT" dirty="0"/>
+                        <a:t>)</a:t>
                       </a:r>
                       <a:endParaRPr lang="en-GB" dirty="0"/>
                     </a:p>
@@ -19959,7 +22914,37 @@
                     <a:p>
                       <a:r>
                         <a:rPr lang="it-IT" dirty="0"/>
-                        <a:t>P99 (s)</a:t>
+                        <a:t>P95 (</a:t>
+                      </a:r>
+                      <a:r>
+                        <a:rPr lang="it-IT" dirty="0" err="1"/>
+                        <a:t>ms</a:t>
+                      </a:r>
+                      <a:r>
+                        <a:rPr lang="it-IT" dirty="0"/>
+                        <a:t>)</a:t>
+                      </a:r>
+                      <a:endParaRPr lang="en-GB" dirty="0"/>
+                    </a:p>
+                  </a:txBody>
+                  <a:tcPr/>
+                </a:tc>
+                <a:tc>
+                  <a:txBody>
+                    <a:bodyPr/>
+                    <a:lstStyle/>
+                    <a:p>
+                      <a:r>
+                        <a:rPr lang="it-IT" dirty="0"/>
+                        <a:t>P99 (</a:t>
+                      </a:r>
+                      <a:r>
+                        <a:rPr lang="it-IT" dirty="0" err="1"/>
+                        <a:t>ms</a:t>
+                      </a:r>
+                      <a:r>
+                        <a:rPr lang="it-IT" dirty="0"/>
+                        <a:t>)</a:t>
                       </a:r>
                       <a:endParaRPr lang="en-GB" dirty="0"/>
                     </a:p>
@@ -19973,6 +22958,20 @@
                 </a:extLst>
               </a:tr>
               <a:tr h="370840">
+                <a:tc>
+                  <a:txBody>
+                    <a:bodyPr/>
+                    <a:lstStyle/>
+                    <a:p>
+                      <a:r>
+                        <a:rPr lang="it-IT" dirty="0"/>
+                        <a:t>32</a:t>
+                      </a:r>
+                      <a:endParaRPr lang="en-GB" dirty="0"/>
+                    </a:p>
+                  </a:txBody>
+                  <a:tcPr/>
+                </a:tc>
                 <a:tc>
                   <a:txBody>
                     <a:bodyPr/>
@@ -19994,7 +22993,7 @@
                     <a:p>
                       <a:r>
                         <a:rPr lang="it-IT" dirty="0"/>
-                        <a:t>9,8</a:t>
+                        <a:t>600</a:t>
                       </a:r>
                       <a:endParaRPr lang="en-GB" dirty="0"/>
                     </a:p>
@@ -20008,7 +23007,7 @@
                     <a:p>
                       <a:r>
                         <a:rPr lang="it-IT" dirty="0"/>
-                        <a:t>1,4</a:t>
+                        <a:t>600</a:t>
                       </a:r>
                       <a:endParaRPr lang="en-GB" dirty="0"/>
                     </a:p>
@@ -20022,7 +23021,7 @@
                     <a:p>
                       <a:r>
                         <a:rPr lang="it-IT" dirty="0"/>
-                        <a:t>1,4</a:t>
+                        <a:t>144,6</a:t>
                       </a:r>
                       <a:endParaRPr lang="en-GB" dirty="0"/>
                     </a:p>
@@ -20036,7 +23035,7 @@
                     <a:p>
                       <a:r>
                         <a:rPr lang="it-IT" dirty="0"/>
-                        <a:t>1,6</a:t>
+                        <a:t>107,1</a:t>
                       </a:r>
                       <a:endParaRPr lang="en-GB" dirty="0"/>
                     </a:p>
@@ -20050,7 +23049,7 @@
                     <a:p>
                       <a:r>
                         <a:rPr lang="it-IT" dirty="0"/>
-                        <a:t>1,7</a:t>
+                        <a:t>262,6</a:t>
                       </a:r>
                       <a:endParaRPr lang="en-GB" dirty="0"/>
                     </a:p>
@@ -20064,7 +23063,21 @@
                     <a:p>
                       <a:r>
                         <a:rPr lang="it-IT" dirty="0"/>
-                        <a:t>2,0</a:t>
+                        <a:t>298,1</a:t>
+                      </a:r>
+                      <a:endParaRPr lang="en-GB" dirty="0"/>
+                    </a:p>
+                  </a:txBody>
+                  <a:tcPr/>
+                </a:tc>
+                <a:tc>
+                  <a:txBody>
+                    <a:bodyPr/>
+                    <a:lstStyle/>
+                    <a:p>
+                      <a:r>
+                        <a:rPr lang="it-IT" dirty="0"/>
+                        <a:t>362,6</a:t>
                       </a:r>
                       <a:endParaRPr lang="en-GB" dirty="0"/>
                     </a:p>
@@ -20078,6 +23091,20 @@
                 </a:extLst>
               </a:tr>
               <a:tr h="370840">
+                <a:tc>
+                  <a:txBody>
+                    <a:bodyPr/>
+                    <a:lstStyle/>
+                    <a:p>
+                      <a:r>
+                        <a:rPr lang="it-IT" dirty="0"/>
+                        <a:t>32</a:t>
+                      </a:r>
+                      <a:endParaRPr lang="en-GB" dirty="0"/>
+                    </a:p>
+                  </a:txBody>
+                  <a:tcPr/>
+                </a:tc>
                 <a:tc>
                   <a:txBody>
                     <a:bodyPr/>
@@ -20099,7 +23126,7 @@
                     <a:p>
                       <a:r>
                         <a:rPr lang="it-IT" dirty="0"/>
-                        <a:t>50,9</a:t>
+                        <a:t>3000</a:t>
                       </a:r>
                       <a:endParaRPr lang="en-GB" dirty="0"/>
                     </a:p>
@@ -20113,7 +23140,7 @@
                     <a:p>
                       <a:r>
                         <a:rPr lang="it-IT" dirty="0"/>
-                        <a:t>1,3</a:t>
+                        <a:t>1083</a:t>
                       </a:r>
                       <a:endParaRPr lang="en-GB" dirty="0"/>
                     </a:p>
@@ -20127,7 +23154,7 @@
                     <a:p>
                       <a:r>
                         <a:rPr lang="it-IT" dirty="0"/>
-                        <a:t>1,3</a:t>
+                        <a:t>4493,5</a:t>
                       </a:r>
                       <a:endParaRPr lang="en-GB" dirty="0"/>
                     </a:p>
@@ -20141,7 +23168,7 @@
                     <a:p>
                       <a:r>
                         <a:rPr lang="it-IT" dirty="0"/>
-                        <a:t>1,5</a:t>
+                        <a:t>4772,4</a:t>
                       </a:r>
                       <a:endParaRPr lang="en-GB" dirty="0"/>
                     </a:p>
@@ -20155,7 +23182,7 @@
                     <a:p>
                       <a:r>
                         <a:rPr lang="it-IT" dirty="0"/>
-                        <a:t>1,9</a:t>
+                        <a:t>4867,2</a:t>
                       </a:r>
                       <a:endParaRPr lang="en-GB" dirty="0"/>
                     </a:p>
@@ -20169,7 +23196,21 @@
                     <a:p>
                       <a:r>
                         <a:rPr lang="it-IT" dirty="0"/>
-                        <a:t>2,4</a:t>
+                        <a:t>4885</a:t>
+                      </a:r>
+                      <a:endParaRPr lang="en-GB" dirty="0"/>
+                    </a:p>
+                  </a:txBody>
+                  <a:tcPr/>
+                </a:tc>
+                <a:tc>
+                  <a:txBody>
+                    <a:bodyPr/>
+                    <a:lstStyle/>
+                    <a:p>
+                      <a:r>
+                        <a:rPr lang="it-IT" dirty="0"/>
+                        <a:t>4917,5</a:t>
                       </a:r>
                       <a:endParaRPr lang="en-GB" dirty="0"/>
                     </a:p>
@@ -20190,7 +23231,7 @@
                     <a:p>
                       <a:r>
                         <a:rPr lang="it-IT" dirty="0"/>
-                        <a:t>150</a:t>
+                        <a:t>64</a:t>
                       </a:r>
                       <a:endParaRPr lang="en-GB" dirty="0"/>
                     </a:p>
@@ -20204,195 +23245,13 @@
                     <a:p>
                       <a:r>
                         <a:rPr lang="it-IT" dirty="0"/>
-                        <a:t>149,2</a:t>
+                        <a:t>10</a:t>
                       </a:r>
                       <a:endParaRPr lang="en-GB" dirty="0"/>
                     </a:p>
                   </a:txBody>
                   <a:tcPr/>
                 </a:tc>
-                <a:tc>
-                  <a:txBody>
-                    <a:bodyPr/>
-                    <a:lstStyle/>
-                    <a:p>
-                      <a:r>
-                        <a:rPr lang="it-IT" dirty="0"/>
-                        <a:t>1,2</a:t>
-                      </a:r>
-                      <a:endParaRPr lang="en-GB" dirty="0"/>
-                    </a:p>
-                  </a:txBody>
-                  <a:tcPr/>
-                </a:tc>
-                <a:tc>
-                  <a:txBody>
-                    <a:bodyPr/>
-                    <a:lstStyle/>
-                    <a:p>
-                      <a:r>
-                        <a:rPr lang="it-IT" dirty="0"/>
-                        <a:t>1,1</a:t>
-                      </a:r>
-                      <a:endParaRPr lang="en-GB" dirty="0"/>
-                    </a:p>
-                  </a:txBody>
-                  <a:tcPr/>
-                </a:tc>
-                <a:tc>
-                  <a:txBody>
-                    <a:bodyPr/>
-                    <a:lstStyle/>
-                    <a:p>
-                      <a:r>
-                        <a:rPr lang="it-IT" dirty="0"/>
-                        <a:t>1,9</a:t>
-                      </a:r>
-                      <a:endParaRPr lang="en-GB" dirty="0"/>
-                    </a:p>
-                  </a:txBody>
-                  <a:tcPr/>
-                </a:tc>
-                <a:tc>
-                  <a:txBody>
-                    <a:bodyPr/>
-                    <a:lstStyle/>
-                    <a:p>
-                      <a:r>
-                        <a:rPr lang="it-IT" dirty="0"/>
-                        <a:t>2,0</a:t>
-                      </a:r>
-                      <a:endParaRPr lang="en-GB" dirty="0"/>
-                    </a:p>
-                  </a:txBody>
-                  <a:tcPr/>
-                </a:tc>
-                <a:tc>
-                  <a:txBody>
-                    <a:bodyPr/>
-                    <a:lstStyle/>
-                    <a:p>
-                      <a:r>
-                        <a:rPr lang="it-IT" dirty="0"/>
-                        <a:t>2,6</a:t>
-                      </a:r>
-                      <a:endParaRPr lang="en-GB" dirty="0"/>
-                    </a:p>
-                  </a:txBody>
-                  <a:tcPr/>
-                </a:tc>
-                <a:extLst>
-                  <a:ext uri="{0D108BD9-81ED-4DB2-BD59-A6C34878D82A}">
-                    <a16:rowId xmlns:a16="http://schemas.microsoft.com/office/drawing/2014/main" val="3093664536"/>
-                  </a:ext>
-                </a:extLst>
-              </a:tr>
-              <a:tr h="370840">
-                <a:tc>
-                  <a:txBody>
-                    <a:bodyPr/>
-                    <a:lstStyle/>
-                    <a:p>
-                      <a:r>
-                        <a:rPr lang="it-IT" dirty="0"/>
-                        <a:t>300</a:t>
-                      </a:r>
-                      <a:endParaRPr lang="en-GB" dirty="0"/>
-                    </a:p>
-                  </a:txBody>
-                  <a:tcPr/>
-                </a:tc>
-                <a:tc>
-                  <a:txBody>
-                    <a:bodyPr/>
-                    <a:lstStyle/>
-                    <a:p>
-                      <a:r>
-                        <a:rPr lang="it-IT" dirty="0"/>
-                        <a:t>294,1</a:t>
-                      </a:r>
-                      <a:endParaRPr lang="en-GB" dirty="0"/>
-                    </a:p>
-                  </a:txBody>
-                  <a:tcPr/>
-                </a:tc>
-                <a:tc>
-                  <a:txBody>
-                    <a:bodyPr/>
-                    <a:lstStyle/>
-                    <a:p>
-                      <a:r>
-                        <a:rPr lang="it-IT" dirty="0"/>
-                        <a:t>1,3</a:t>
-                      </a:r>
-                      <a:endParaRPr lang="en-GB" dirty="0"/>
-                    </a:p>
-                  </a:txBody>
-                  <a:tcPr/>
-                </a:tc>
-                <a:tc>
-                  <a:txBody>
-                    <a:bodyPr/>
-                    <a:lstStyle/>
-                    <a:p>
-                      <a:r>
-                        <a:rPr lang="it-IT" dirty="0"/>
-                        <a:t>1,1</a:t>
-                      </a:r>
-                      <a:endParaRPr lang="en-GB" dirty="0"/>
-                    </a:p>
-                  </a:txBody>
-                  <a:tcPr/>
-                </a:tc>
-                <a:tc>
-                  <a:txBody>
-                    <a:bodyPr/>
-                    <a:lstStyle/>
-                    <a:p>
-                      <a:r>
-                        <a:rPr lang="it-IT" dirty="0"/>
-                        <a:t>2,0</a:t>
-                      </a:r>
-                      <a:endParaRPr lang="en-GB" dirty="0"/>
-                    </a:p>
-                  </a:txBody>
-                  <a:tcPr/>
-                </a:tc>
-                <a:tc>
-                  <a:txBody>
-                    <a:bodyPr/>
-                    <a:lstStyle/>
-                    <a:p>
-                      <a:r>
-                        <a:rPr lang="it-IT" dirty="0"/>
-                        <a:t>2,4</a:t>
-                      </a:r>
-                      <a:endParaRPr lang="en-GB" dirty="0"/>
-                    </a:p>
-                  </a:txBody>
-                  <a:tcPr/>
-                </a:tc>
-                <a:tc>
-                  <a:txBody>
-                    <a:bodyPr/>
-                    <a:lstStyle/>
-                    <a:p>
-                      <a:r>
-                        <a:rPr lang="it-IT" dirty="0"/>
-                        <a:t>2,8</a:t>
-                      </a:r>
-                      <a:endParaRPr lang="en-GB" dirty="0"/>
-                    </a:p>
-                  </a:txBody>
-                  <a:tcPr/>
-                </a:tc>
-                <a:extLst>
-                  <a:ext uri="{0D108BD9-81ED-4DB2-BD59-A6C34878D82A}">
-                    <a16:rowId xmlns:a16="http://schemas.microsoft.com/office/drawing/2014/main" val="369788681"/>
-                  </a:ext>
-                </a:extLst>
-              </a:tr>
-              <a:tr h="370840">
                 <a:tc>
                   <a:txBody>
                     <a:bodyPr/>
@@ -20414,7 +23273,7 @@
                     <a:p>
                       <a:r>
                         <a:rPr lang="it-IT" dirty="0"/>
-                        <a:t>554,3</a:t>
+                        <a:t>600</a:t>
                       </a:r>
                       <a:endParaRPr lang="en-GB" dirty="0"/>
                     </a:p>
@@ -20428,7 +23287,7 @@
                     <a:p>
                       <a:r>
                         <a:rPr lang="it-IT" dirty="0"/>
-                        <a:t>1,6</a:t>
+                        <a:t>118,6</a:t>
                       </a:r>
                       <a:endParaRPr lang="en-GB" dirty="0"/>
                     </a:p>
@@ -20442,7 +23301,7 @@
                     <a:p>
                       <a:r>
                         <a:rPr lang="it-IT" dirty="0"/>
-                        <a:t>1,4</a:t>
+                        <a:t>85,9</a:t>
                       </a:r>
                       <a:endParaRPr lang="en-GB" dirty="0"/>
                     </a:p>
@@ -20456,7 +23315,7 @@
                     <a:p>
                       <a:r>
                         <a:rPr lang="it-IT" dirty="0"/>
-                        <a:t>2,5</a:t>
+                        <a:t>231,3</a:t>
                       </a:r>
                       <a:endParaRPr lang="en-GB" dirty="0"/>
                     </a:p>
@@ -20470,7 +23329,7 @@
                     <a:p>
                       <a:r>
                         <a:rPr lang="it-IT" dirty="0"/>
-                        <a:t>2,6</a:t>
+                        <a:t>262,8</a:t>
                       </a:r>
                       <a:endParaRPr lang="en-GB" dirty="0"/>
                     </a:p>
@@ -20484,7 +23343,7 @@
                     <a:p>
                       <a:r>
                         <a:rPr lang="it-IT" dirty="0"/>
-                        <a:t>3,1</a:t>
+                        <a:t>336,4</a:t>
                       </a:r>
                       <a:endParaRPr lang="en-GB" dirty="0"/>
                     </a:p>
@@ -20493,7 +23352,7 @@
                 </a:tc>
                 <a:extLst>
                   <a:ext uri="{0D108BD9-81ED-4DB2-BD59-A6C34878D82A}">
-                    <a16:rowId xmlns:a16="http://schemas.microsoft.com/office/drawing/2014/main" val="15991862"/>
+                    <a16:rowId xmlns:a16="http://schemas.microsoft.com/office/drawing/2014/main" val="3558160451"/>
                   </a:ext>
                 </a:extLst>
               </a:tr>
@@ -20505,7 +23364,7 @@
                     <a:p>
                       <a:r>
                         <a:rPr lang="it-IT" dirty="0"/>
-                        <a:t>1000</a:t>
+                        <a:t>64</a:t>
                       </a:r>
                       <a:endParaRPr lang="en-GB" dirty="0"/>
                     </a:p>
@@ -20519,7 +23378,7 @@
                     <a:p>
                       <a:r>
                         <a:rPr lang="it-IT" dirty="0"/>
-                        <a:t>865,8</a:t>
+                        <a:t>50</a:t>
                       </a:r>
                       <a:endParaRPr lang="en-GB" dirty="0"/>
                     </a:p>
@@ -20533,7 +23392,7 @@
                     <a:p>
                       <a:r>
                         <a:rPr lang="it-IT" dirty="0"/>
-                        <a:t>1,3</a:t>
+                        <a:t>3000</a:t>
                       </a:r>
                       <a:endParaRPr lang="en-GB" dirty="0"/>
                     </a:p>
@@ -20547,7 +23406,7 @@
                     <a:p>
                       <a:r>
                         <a:rPr lang="it-IT" dirty="0"/>
-                        <a:t>1,1</a:t>
+                        <a:t>1120</a:t>
                       </a:r>
                       <a:endParaRPr lang="en-GB" dirty="0"/>
                     </a:p>
@@ -20561,7 +23420,7 @@
                     <a:p>
                       <a:r>
                         <a:rPr lang="it-IT" dirty="0"/>
-                        <a:t>1,8</a:t>
+                        <a:t>6085,9</a:t>
                       </a:r>
                       <a:endParaRPr lang="en-GB" dirty="0"/>
                     </a:p>
@@ -20575,7 +23434,7 @@
                     <a:p>
                       <a:r>
                         <a:rPr lang="it-IT" dirty="0"/>
-                        <a:t>2,0</a:t>
+                        <a:t>6557,9</a:t>
                       </a:r>
                       <a:endParaRPr lang="en-GB" dirty="0"/>
                     </a:p>
@@ -20589,7 +23448,35 @@
                     <a:p>
                       <a:r>
                         <a:rPr lang="it-IT" dirty="0"/>
-                        <a:t>2,4</a:t>
+                        <a:t>6762,2</a:t>
+                      </a:r>
+                      <a:endParaRPr lang="en-GB" dirty="0"/>
+                    </a:p>
+                  </a:txBody>
+                  <a:tcPr/>
+                </a:tc>
+                <a:tc>
+                  <a:txBody>
+                    <a:bodyPr/>
+                    <a:lstStyle/>
+                    <a:p>
+                      <a:r>
+                        <a:rPr lang="it-IT" dirty="0"/>
+                        <a:t>6815</a:t>
+                      </a:r>
+                      <a:endParaRPr lang="en-GB" dirty="0"/>
+                    </a:p>
+                  </a:txBody>
+                  <a:tcPr/>
+                </a:tc>
+                <a:tc>
+                  <a:txBody>
+                    <a:bodyPr/>
+                    <a:lstStyle/>
+                    <a:p>
+                      <a:r>
+                        <a:rPr lang="it-IT" dirty="0"/>
+                        <a:t>7059,8</a:t>
                       </a:r>
                       <a:endParaRPr lang="en-GB" dirty="0"/>
                     </a:p>
@@ -20598,7 +23485,7 @@
                 </a:tc>
                 <a:extLst>
                   <a:ext uri="{0D108BD9-81ED-4DB2-BD59-A6C34878D82A}">
-                    <a16:rowId xmlns:a16="http://schemas.microsoft.com/office/drawing/2014/main" val="3095448716"/>
+                    <a16:rowId xmlns:a16="http://schemas.microsoft.com/office/drawing/2014/main" val="812132949"/>
                   </a:ext>
                 </a:extLst>
               </a:tr>
@@ -20673,28 +23560,27 @@
       </p:sp>
       <p:graphicFrame>
         <p:nvGraphicFramePr>
-          <p:cNvPr id="4" name="Content Placeholder 3">
+          <p:cNvPr id="6" name="Content Placeholder 3">
             <a:extLst>
               <a:ext uri="{FF2B5EF4-FFF2-40B4-BE49-F238E27FC236}">
-                <a16:creationId xmlns:a16="http://schemas.microsoft.com/office/drawing/2014/main" id="{401D8BCD-4EE5-A96E-9908-C8D03930E924}"/>
+                <a16:creationId xmlns:a16="http://schemas.microsoft.com/office/drawing/2014/main" id="{94337BDA-DFDB-74EB-7748-562151421BE8}"/>
               </a:ext>
             </a:extLst>
           </p:cNvPr>
           <p:cNvGraphicFramePr>
-            <a:graphicFrameLocks noGrp="1"/>
+            <a:graphicFrameLocks/>
           </p:cNvGraphicFramePr>
           <p:nvPr>
-            <p:ph idx="1"/>
             <p:extLst>
               <p:ext uri="{D42A27DB-BD31-4B8C-83A1-F6EECF244321}">
-                <p14:modId xmlns:p14="http://schemas.microsoft.com/office/powerpoint/2010/main" val="2248169229"/>
+                <p14:modId xmlns:p14="http://schemas.microsoft.com/office/powerpoint/2010/main" val="4271203619"/>
               </p:ext>
             </p:extLst>
           </p:nvPr>
         </p:nvGraphicFramePr>
         <p:xfrm>
-          <a:off x="684211" y="685800"/>
-          <a:ext cx="9639658" cy="2865120"/>
+          <a:off x="684212" y="685800"/>
+          <a:ext cx="9639657" cy="2672080"/>
         </p:xfrm>
         <a:graphic>
           <a:graphicData uri="http://schemas.openxmlformats.org/drawingml/2006/table">
@@ -20703,49 +23589,63 @@
                 <a:tableStyleId>{5C22544A-7EE6-4342-B048-85BDC9FD1C3A}</a:tableStyleId>
               </a:tblPr>
               <a:tblGrid>
-                <a:gridCol w="1377094">
+                <a:gridCol w="1071073">
+                  <a:extLst>
+                    <a:ext uri="{9D8B030D-6E8A-4147-A177-3AD203B41FA5}">
+                      <a16:colId xmlns:a16="http://schemas.microsoft.com/office/drawing/2014/main" val="713660421"/>
+                    </a:ext>
+                  </a:extLst>
+                </a:gridCol>
+                <a:gridCol w="1071073">
+                  <a:extLst>
+                    <a:ext uri="{9D8B030D-6E8A-4147-A177-3AD203B41FA5}">
+                      <a16:colId xmlns:a16="http://schemas.microsoft.com/office/drawing/2014/main" val="2605851528"/>
+                    </a:ext>
+                  </a:extLst>
+                </a:gridCol>
+                <a:gridCol w="1071073">
                   <a:extLst>
                     <a:ext uri="{9D8B030D-6E8A-4147-A177-3AD203B41FA5}">
                       <a16:colId xmlns:a16="http://schemas.microsoft.com/office/drawing/2014/main" val="4131664428"/>
                     </a:ext>
                   </a:extLst>
                 </a:gridCol>
-                <a:gridCol w="1377094">
+                <a:gridCol w="1071073">
                   <a:extLst>
                     <a:ext uri="{9D8B030D-6E8A-4147-A177-3AD203B41FA5}">
                       <a16:colId xmlns:a16="http://schemas.microsoft.com/office/drawing/2014/main" val="2682047389"/>
                     </a:ext>
                   </a:extLst>
                 </a:gridCol>
-                <a:gridCol w="1377094">
+                <a:gridCol w="1071073">
                   <a:extLst>
                     <a:ext uri="{9D8B030D-6E8A-4147-A177-3AD203B41FA5}">
                       <a16:colId xmlns:a16="http://schemas.microsoft.com/office/drawing/2014/main" val="560020995"/>
                     </a:ext>
                   </a:extLst>
                 </a:gridCol>
-                <a:gridCol w="1377094">
+                <a:gridCol w="1071073">
                   <a:extLst>
                     <a:ext uri="{9D8B030D-6E8A-4147-A177-3AD203B41FA5}">
                       <a16:colId xmlns:a16="http://schemas.microsoft.com/office/drawing/2014/main" val="2200272610"/>
                     </a:ext>
                   </a:extLst>
                 </a:gridCol>
-                <a:gridCol w="1377094">
+                <a:gridCol w="1071073">
                   <a:extLst>
                     <a:ext uri="{9D8B030D-6E8A-4147-A177-3AD203B41FA5}">
                       <a16:colId xmlns:a16="http://schemas.microsoft.com/office/drawing/2014/main" val="1594005505"/>
                     </a:ext>
                   </a:extLst>
                 </a:gridCol>
-                <a:gridCol w="1377094">
+                <a:gridCol w="1071073">
                   <a:extLst>
                     <a:ext uri="{9D8B030D-6E8A-4147-A177-3AD203B41FA5}">
                       <a16:colId xmlns:a16="http://schemas.microsoft.com/office/drawing/2014/main" val="748764634"/>
                     </a:ext>
                   </a:extLst>
                 </a:gridCol>
-                <a:gridCol w="1377094">
+                <a:gridCol w="1071073">
                   <a:extLst>
                     <a:ext uri="{9D8B030D-6E8A-4147-A177-3AD203B41FA5}">
                       <a16:colId xmlns:a16="http://schemas.microsoft.com/office/drawing/2014/main" val="3172487590"/>
@@ -20754,6 +23654,20 @@
                 </a:gridCol>
               </a:tblGrid>
               <a:tr h="370840">
+                <a:tc>
+                  <a:txBody>
+                    <a:bodyPr/>
+                    <a:lstStyle/>
+                    <a:p>
+                      <a:r>
+                        <a:rPr lang="it-IT" dirty="0"/>
+                        <a:t>Connessioni simultanee</a:t>
+                      </a:r>
+                      <a:endParaRPr lang="en-GB" dirty="0"/>
+                    </a:p>
+                  </a:txBody>
+                  <a:tcPr/>
+                </a:tc>
                 <a:tc>
                   <a:txBody>
                     <a:bodyPr/>
@@ -20775,7 +23689,7 @@
                     <a:p>
                       <a:r>
                         <a:rPr lang="it-IT" dirty="0"/>
-                        <a:t>RPS effettivi</a:t>
+                        <a:t>Richieste totali</a:t>
                       </a:r>
                       <a:endParaRPr lang="en-GB" dirty="0"/>
                     </a:p>
@@ -20789,7 +23703,7 @@
                     <a:p>
                       <a:r>
                         <a:rPr lang="it-IT" dirty="0"/>
-                        <a:t>Media latenze (s)</a:t>
+                        <a:t>Richieste risolte</a:t>
                       </a:r>
                       <a:endParaRPr lang="en-GB" dirty="0"/>
                     </a:p>
@@ -20803,7 +23717,15 @@
                     <a:p>
                       <a:r>
                         <a:rPr lang="it-IT" dirty="0"/>
-                        <a:t>P50 (s)</a:t>
+                        <a:t>Media latenze (</a:t>
+                      </a:r>
+                      <a:r>
+                        <a:rPr lang="it-IT" dirty="0" err="1"/>
+                        <a:t>ms</a:t>
+                      </a:r>
+                      <a:r>
+                        <a:rPr lang="it-IT" dirty="0"/>
+                        <a:t>)</a:t>
                       </a:r>
                       <a:endParaRPr lang="en-GB" dirty="0"/>
                     </a:p>
@@ -20817,7 +23739,15 @@
                     <a:p>
                       <a:r>
                         <a:rPr lang="it-IT" dirty="0"/>
-                        <a:t>P90 (s)</a:t>
+                        <a:t>P50 (</a:t>
+                      </a:r>
+                      <a:r>
+                        <a:rPr lang="it-IT" dirty="0" err="1"/>
+                        <a:t>ms</a:t>
+                      </a:r>
+                      <a:r>
+                        <a:rPr lang="it-IT" dirty="0"/>
+                        <a:t>)</a:t>
                       </a:r>
                       <a:endParaRPr lang="en-GB" dirty="0"/>
                     </a:p>
@@ -20831,7 +23761,15 @@
                     <a:p>
                       <a:r>
                         <a:rPr lang="it-IT" dirty="0"/>
-                        <a:t>P95 (s)</a:t>
+                        <a:t>P90 (</a:t>
+                      </a:r>
+                      <a:r>
+                        <a:rPr lang="it-IT" dirty="0" err="1"/>
+                        <a:t>ms</a:t>
+                      </a:r>
+                      <a:r>
+                        <a:rPr lang="it-IT" dirty="0"/>
+                        <a:t>)</a:t>
                       </a:r>
                       <a:endParaRPr lang="en-GB" dirty="0"/>
                     </a:p>
@@ -20845,7 +23783,37 @@
                     <a:p>
                       <a:r>
                         <a:rPr lang="it-IT" dirty="0"/>
-                        <a:t>P99 (s)</a:t>
+                        <a:t>P95 (</a:t>
+                      </a:r>
+                      <a:r>
+                        <a:rPr lang="it-IT" dirty="0" err="1"/>
+                        <a:t>ms</a:t>
+                      </a:r>
+                      <a:r>
+                        <a:rPr lang="it-IT" dirty="0"/>
+                        <a:t>)</a:t>
+                      </a:r>
+                      <a:endParaRPr lang="en-GB" dirty="0"/>
+                    </a:p>
+                  </a:txBody>
+                  <a:tcPr/>
+                </a:tc>
+                <a:tc>
+                  <a:txBody>
+                    <a:bodyPr/>
+                    <a:lstStyle/>
+                    <a:p>
+                      <a:r>
+                        <a:rPr lang="it-IT" dirty="0"/>
+                        <a:t>P99 (</a:t>
+                      </a:r>
+                      <a:r>
+                        <a:rPr lang="it-IT" dirty="0" err="1"/>
+                        <a:t>ms</a:t>
+                      </a:r>
+                      <a:r>
+                        <a:rPr lang="it-IT" dirty="0"/>
+                        <a:t>)</a:t>
                       </a:r>
                       <a:endParaRPr lang="en-GB" dirty="0"/>
                     </a:p>
@@ -20859,6 +23827,20 @@
                 </a:extLst>
               </a:tr>
               <a:tr h="370840">
+                <a:tc>
+                  <a:txBody>
+                    <a:bodyPr/>
+                    <a:lstStyle/>
+                    <a:p>
+                      <a:r>
+                        <a:rPr lang="it-IT" dirty="0"/>
+                        <a:t>32</a:t>
+                      </a:r>
+                      <a:endParaRPr lang="en-GB" dirty="0"/>
+                    </a:p>
+                  </a:txBody>
+                  <a:tcPr/>
+                </a:tc>
                 <a:tc>
                   <a:txBody>
                     <a:bodyPr/>
@@ -20880,7 +23862,7 @@
                     <a:p>
                       <a:r>
                         <a:rPr lang="it-IT" dirty="0"/>
-                        <a:t>9,7</a:t>
+                        <a:t>600</a:t>
                       </a:r>
                       <a:endParaRPr lang="en-GB" dirty="0"/>
                     </a:p>
@@ -20894,7 +23876,7 @@
                     <a:p>
                       <a:r>
                         <a:rPr lang="it-IT" dirty="0"/>
-                        <a:t>1,4</a:t>
+                        <a:t>600</a:t>
                       </a:r>
                       <a:endParaRPr lang="en-GB" dirty="0"/>
                     </a:p>
@@ -20908,7 +23890,21 @@
                     <a:p>
                       <a:r>
                         <a:rPr lang="it-IT" dirty="0"/>
-                        <a:t>1,4</a:t>
+                        <a:t>97,4</a:t>
+                      </a:r>
+                      <a:endParaRPr lang="en-GB" dirty="0"/>
+                    </a:p>
+                  </a:txBody>
+                  <a:tcPr/>
+                </a:tc>
+                <a:tc>
+                  <a:txBody>
+                    <a:bodyPr/>
+                    <a:lstStyle/>
+                    <a:p>
+                      <a:r>
+                        <a:rPr lang="it-IT"/>
+                        <a:t>79,8</a:t>
                       </a:r>
                       <a:endParaRPr lang="en-GB" dirty="0"/>
                     </a:p>
@@ -20922,7 +23918,7 @@
                     <a:p>
                       <a:r>
                         <a:rPr lang="it-IT" dirty="0"/>
-                        <a:t>1,6</a:t>
+                        <a:t>162</a:t>
                       </a:r>
                       <a:endParaRPr lang="en-GB" dirty="0"/>
                     </a:p>
@@ -20936,7 +23932,7 @@
                     <a:p>
                       <a:r>
                         <a:rPr lang="it-IT" dirty="0"/>
-                        <a:t>1,7</a:t>
+                        <a:t>191</a:t>
                       </a:r>
                       <a:endParaRPr lang="en-GB" dirty="0"/>
                     </a:p>
@@ -20950,7 +23946,7 @@
                     <a:p>
                       <a:r>
                         <a:rPr lang="it-IT" dirty="0"/>
-                        <a:t>2,0</a:t>
+                        <a:t>263,5</a:t>
                       </a:r>
                       <a:endParaRPr lang="en-GB" dirty="0"/>
                     </a:p>
@@ -20964,6 +23960,20 @@
                 </a:extLst>
               </a:tr>
               <a:tr h="370840">
+                <a:tc>
+                  <a:txBody>
+                    <a:bodyPr/>
+                    <a:lstStyle/>
+                    <a:p>
+                      <a:r>
+                        <a:rPr lang="it-IT" dirty="0"/>
+                        <a:t>32</a:t>
+                      </a:r>
+                      <a:endParaRPr lang="en-GB" dirty="0"/>
+                    </a:p>
+                  </a:txBody>
+                  <a:tcPr/>
+                </a:tc>
                 <a:tc>
                   <a:txBody>
                     <a:bodyPr/>
@@ -20985,7 +23995,7 @@
                     <a:p>
                       <a:r>
                         <a:rPr lang="it-IT" dirty="0"/>
-                        <a:t>50,1</a:t>
+                        <a:t>3000</a:t>
                       </a:r>
                       <a:endParaRPr lang="en-GB" dirty="0"/>
                     </a:p>
@@ -20999,7 +24009,7 @@
                     <a:p>
                       <a:r>
                         <a:rPr lang="it-IT" dirty="0"/>
-                        <a:t>1,3</a:t>
+                        <a:t>1179</a:t>
                       </a:r>
                       <a:endParaRPr lang="en-GB" dirty="0"/>
                     </a:p>
@@ -21013,7 +24023,7 @@
                     <a:p>
                       <a:r>
                         <a:rPr lang="it-IT" dirty="0"/>
-                        <a:t>1,3</a:t>
+                        <a:t>4442,3</a:t>
                       </a:r>
                       <a:endParaRPr lang="en-GB" dirty="0"/>
                     </a:p>
@@ -21027,7 +24037,7 @@
                     <a:p>
                       <a:r>
                         <a:rPr lang="it-IT" dirty="0"/>
-                        <a:t>1,5</a:t>
+                        <a:t>4678,3</a:t>
                       </a:r>
                       <a:endParaRPr lang="en-GB" dirty="0"/>
                     </a:p>
@@ -21041,7 +24051,7 @@
                     <a:p>
                       <a:r>
                         <a:rPr lang="it-IT" dirty="0"/>
-                        <a:t>1,6</a:t>
+                        <a:t>4754</a:t>
                       </a:r>
                       <a:endParaRPr lang="en-GB" dirty="0"/>
                     </a:p>
@@ -21055,7 +24065,21 @@
                     <a:p>
                       <a:r>
                         <a:rPr lang="it-IT" dirty="0"/>
-                        <a:t>2,3</a:t>
+                        <a:t>4761,9</a:t>
+                      </a:r>
+                      <a:endParaRPr lang="en-GB" dirty="0"/>
+                    </a:p>
+                  </a:txBody>
+                  <a:tcPr/>
+                </a:tc>
+                <a:tc>
+                  <a:txBody>
+                    <a:bodyPr/>
+                    <a:lstStyle/>
+                    <a:p>
+                      <a:r>
+                        <a:rPr lang="it-IT"/>
+                        <a:t>5247,1</a:t>
                       </a:r>
                       <a:endParaRPr lang="en-GB" dirty="0"/>
                     </a:p>
@@ -21076,7 +24100,7 @@
                     <a:p>
                       <a:r>
                         <a:rPr lang="it-IT" dirty="0"/>
-                        <a:t>150</a:t>
+                        <a:t>64</a:t>
                       </a:r>
                       <a:endParaRPr lang="en-GB" dirty="0"/>
                     </a:p>
@@ -21090,195 +24114,13 @@
                     <a:p>
                       <a:r>
                         <a:rPr lang="it-IT" dirty="0"/>
-                        <a:t>146,6</a:t>
+                        <a:t>10</a:t>
                       </a:r>
                       <a:endParaRPr lang="en-GB" dirty="0"/>
                     </a:p>
                   </a:txBody>
                   <a:tcPr/>
                 </a:tc>
-                <a:tc>
-                  <a:txBody>
-                    <a:bodyPr/>
-                    <a:lstStyle/>
-                    <a:p>
-                      <a:r>
-                        <a:rPr lang="it-IT" dirty="0"/>
-                        <a:t>1,2</a:t>
-                      </a:r>
-                      <a:endParaRPr lang="en-GB" dirty="0"/>
-                    </a:p>
-                  </a:txBody>
-                  <a:tcPr/>
-                </a:tc>
-                <a:tc>
-                  <a:txBody>
-                    <a:bodyPr/>
-                    <a:lstStyle/>
-                    <a:p>
-                      <a:r>
-                        <a:rPr lang="it-IT" dirty="0"/>
-                        <a:t>1,0</a:t>
-                      </a:r>
-                      <a:endParaRPr lang="en-GB" dirty="0"/>
-                    </a:p>
-                  </a:txBody>
-                  <a:tcPr/>
-                </a:tc>
-                <a:tc>
-                  <a:txBody>
-                    <a:bodyPr/>
-                    <a:lstStyle/>
-                    <a:p>
-                      <a:r>
-                        <a:rPr lang="it-IT" dirty="0"/>
-                        <a:t>1,5</a:t>
-                      </a:r>
-                      <a:endParaRPr lang="en-GB" dirty="0"/>
-                    </a:p>
-                  </a:txBody>
-                  <a:tcPr/>
-                </a:tc>
-                <a:tc>
-                  <a:txBody>
-                    <a:bodyPr/>
-                    <a:lstStyle/>
-                    <a:p>
-                      <a:r>
-                        <a:rPr lang="it-IT" dirty="0"/>
-                        <a:t>2,0</a:t>
-                      </a:r>
-                      <a:endParaRPr lang="en-GB" dirty="0"/>
-                    </a:p>
-                  </a:txBody>
-                  <a:tcPr/>
-                </a:tc>
-                <a:tc>
-                  <a:txBody>
-                    <a:bodyPr/>
-                    <a:lstStyle/>
-                    <a:p>
-                      <a:r>
-                        <a:rPr lang="it-IT" dirty="0"/>
-                        <a:t>2,5</a:t>
-                      </a:r>
-                      <a:endParaRPr lang="en-GB" dirty="0"/>
-                    </a:p>
-                  </a:txBody>
-                  <a:tcPr/>
-                </a:tc>
-                <a:extLst>
-                  <a:ext uri="{0D108BD9-81ED-4DB2-BD59-A6C34878D82A}">
-                    <a16:rowId xmlns:a16="http://schemas.microsoft.com/office/drawing/2014/main" val="3093664536"/>
-                  </a:ext>
-                </a:extLst>
-              </a:tr>
-              <a:tr h="370840">
-                <a:tc>
-                  <a:txBody>
-                    <a:bodyPr/>
-                    <a:lstStyle/>
-                    <a:p>
-                      <a:r>
-                        <a:rPr lang="it-IT" dirty="0"/>
-                        <a:t>300</a:t>
-                      </a:r>
-                      <a:endParaRPr lang="en-GB" dirty="0"/>
-                    </a:p>
-                  </a:txBody>
-                  <a:tcPr/>
-                </a:tc>
-                <a:tc>
-                  <a:txBody>
-                    <a:bodyPr/>
-                    <a:lstStyle/>
-                    <a:p>
-                      <a:r>
-                        <a:rPr lang="it-IT" dirty="0"/>
-                        <a:t>291,8</a:t>
-                      </a:r>
-                      <a:endParaRPr lang="en-GB" dirty="0"/>
-                    </a:p>
-                  </a:txBody>
-                  <a:tcPr/>
-                </a:tc>
-                <a:tc>
-                  <a:txBody>
-                    <a:bodyPr/>
-                    <a:lstStyle/>
-                    <a:p>
-                      <a:r>
-                        <a:rPr lang="it-IT" dirty="0"/>
-                        <a:t>1,3</a:t>
-                      </a:r>
-                      <a:endParaRPr lang="en-GB" dirty="0"/>
-                    </a:p>
-                  </a:txBody>
-                  <a:tcPr/>
-                </a:tc>
-                <a:tc>
-                  <a:txBody>
-                    <a:bodyPr/>
-                    <a:lstStyle/>
-                    <a:p>
-                      <a:r>
-                        <a:rPr lang="it-IT" dirty="0"/>
-                        <a:t>1,1</a:t>
-                      </a:r>
-                      <a:endParaRPr lang="en-GB" dirty="0"/>
-                    </a:p>
-                  </a:txBody>
-                  <a:tcPr/>
-                </a:tc>
-                <a:tc>
-                  <a:txBody>
-                    <a:bodyPr/>
-                    <a:lstStyle/>
-                    <a:p>
-                      <a:r>
-                        <a:rPr lang="it-IT" dirty="0"/>
-                        <a:t>2,0</a:t>
-                      </a:r>
-                      <a:endParaRPr lang="en-GB" dirty="0"/>
-                    </a:p>
-                  </a:txBody>
-                  <a:tcPr/>
-                </a:tc>
-                <a:tc>
-                  <a:txBody>
-                    <a:bodyPr/>
-                    <a:lstStyle/>
-                    <a:p>
-                      <a:r>
-                        <a:rPr lang="it-IT" dirty="0"/>
-                        <a:t>2,4</a:t>
-                      </a:r>
-                      <a:endParaRPr lang="en-GB" dirty="0"/>
-                    </a:p>
-                  </a:txBody>
-                  <a:tcPr/>
-                </a:tc>
-                <a:tc>
-                  <a:txBody>
-                    <a:bodyPr/>
-                    <a:lstStyle/>
-                    <a:p>
-                      <a:r>
-                        <a:rPr lang="it-IT" dirty="0"/>
-                        <a:t>2,9</a:t>
-                      </a:r>
-                      <a:endParaRPr lang="en-GB" dirty="0"/>
-                    </a:p>
-                  </a:txBody>
-                  <a:tcPr/>
-                </a:tc>
-                <a:extLst>
-                  <a:ext uri="{0D108BD9-81ED-4DB2-BD59-A6C34878D82A}">
-                    <a16:rowId xmlns:a16="http://schemas.microsoft.com/office/drawing/2014/main" val="369788681"/>
-                  </a:ext>
-                </a:extLst>
-              </a:tr>
-              <a:tr h="370840">
                 <a:tc>
                   <a:txBody>
                     <a:bodyPr/>
@@ -21300,7 +24142,7 @@
                     <a:p>
                       <a:r>
                         <a:rPr lang="it-IT" dirty="0"/>
-                        <a:t>557,1</a:t>
+                        <a:t>600</a:t>
                       </a:r>
                       <a:endParaRPr lang="en-GB" dirty="0"/>
                     </a:p>
@@ -21314,7 +24156,7 @@
                     <a:p>
                       <a:r>
                         <a:rPr lang="it-IT" dirty="0"/>
-                        <a:t>1,5</a:t>
+                        <a:t>111,6</a:t>
                       </a:r>
                       <a:endParaRPr lang="en-GB" dirty="0"/>
                     </a:p>
@@ -21328,7 +24170,7 @@
                     <a:p>
                       <a:r>
                         <a:rPr lang="it-IT" dirty="0"/>
-                        <a:t>1,4</a:t>
+                        <a:t>92,9</a:t>
                       </a:r>
                       <a:endParaRPr lang="en-GB" dirty="0"/>
                     </a:p>
@@ -21342,7 +24184,7 @@
                     <a:p>
                       <a:r>
                         <a:rPr lang="it-IT" dirty="0"/>
-                        <a:t>2,5</a:t>
+                        <a:t>194</a:t>
                       </a:r>
                       <a:endParaRPr lang="en-GB" dirty="0"/>
                     </a:p>
@@ -21356,7 +24198,7 @@
                     <a:p>
                       <a:r>
                         <a:rPr lang="it-IT" dirty="0"/>
-                        <a:t>2,6</a:t>
+                        <a:t>238,1</a:t>
                       </a:r>
                       <a:endParaRPr lang="en-GB" dirty="0"/>
                     </a:p>
@@ -21370,7 +24212,7 @@
                     <a:p>
                       <a:r>
                         <a:rPr lang="it-IT" dirty="0"/>
-                        <a:t>3,0</a:t>
+                        <a:t>318,6</a:t>
                       </a:r>
                       <a:endParaRPr lang="en-GB" dirty="0"/>
                     </a:p>
@@ -21379,7 +24221,7 @@
                 </a:tc>
                 <a:extLst>
                   <a:ext uri="{0D108BD9-81ED-4DB2-BD59-A6C34878D82A}">
-                    <a16:rowId xmlns:a16="http://schemas.microsoft.com/office/drawing/2014/main" val="15991862"/>
+                    <a16:rowId xmlns:a16="http://schemas.microsoft.com/office/drawing/2014/main" val="3558160451"/>
                   </a:ext>
                 </a:extLst>
               </a:tr>
@@ -21391,7 +24233,7 @@
                     <a:p>
                       <a:r>
                         <a:rPr lang="it-IT" dirty="0"/>
-                        <a:t>1000</a:t>
+                        <a:t>64</a:t>
                       </a:r>
                       <a:endParaRPr lang="en-GB" dirty="0"/>
                     </a:p>
@@ -21405,7 +24247,7 @@
                     <a:p>
                       <a:r>
                         <a:rPr lang="it-IT" dirty="0"/>
-                        <a:t>868,9</a:t>
+                        <a:t>50</a:t>
                       </a:r>
                       <a:endParaRPr lang="en-GB" dirty="0"/>
                     </a:p>
@@ -21419,7 +24261,7 @@
                     <a:p>
                       <a:r>
                         <a:rPr lang="it-IT" dirty="0"/>
-                        <a:t>1,3</a:t>
+                        <a:t>3000</a:t>
                       </a:r>
                       <a:endParaRPr lang="en-GB" dirty="0"/>
                     </a:p>
@@ -21433,7 +24275,7 @@
                     <a:p>
                       <a:r>
                         <a:rPr lang="it-IT" dirty="0"/>
-                        <a:t>1,1</a:t>
+                        <a:t>1120</a:t>
                       </a:r>
                       <a:endParaRPr lang="en-GB" dirty="0"/>
                     </a:p>
@@ -21447,7 +24289,7 @@
                     <a:p>
                       <a:r>
                         <a:rPr lang="it-IT" dirty="0"/>
-                        <a:t>1,8</a:t>
+                        <a:t>5910,9</a:t>
                       </a:r>
                       <a:endParaRPr lang="en-GB" dirty="0"/>
                     </a:p>
@@ -21461,7 +24303,7 @@
                     <a:p>
                       <a:r>
                         <a:rPr lang="it-IT" dirty="0"/>
-                        <a:t>2,0</a:t>
+                        <a:t>6363,8</a:t>
                       </a:r>
                       <a:endParaRPr lang="en-GB" dirty="0"/>
                     </a:p>
@@ -21475,7 +24317,35 @@
                     <a:p>
                       <a:r>
                         <a:rPr lang="it-IT" dirty="0"/>
-                        <a:t>2,5</a:t>
+                        <a:t>6432</a:t>
+                      </a:r>
+                      <a:endParaRPr lang="en-GB" dirty="0"/>
+                    </a:p>
+                  </a:txBody>
+                  <a:tcPr/>
+                </a:tc>
+                <a:tc>
+                  <a:txBody>
+                    <a:bodyPr/>
+                    <a:lstStyle/>
+                    <a:p>
+                      <a:r>
+                        <a:rPr lang="it-IT" dirty="0"/>
+                        <a:t>6442,4</a:t>
+                      </a:r>
+                      <a:endParaRPr lang="en-GB" dirty="0"/>
+                    </a:p>
+                  </a:txBody>
+                  <a:tcPr/>
+                </a:tc>
+                <a:tc>
+                  <a:txBody>
+                    <a:bodyPr/>
+                    <a:lstStyle/>
+                    <a:p>
+                      <a:r>
+                        <a:rPr lang="it-IT" dirty="0"/>
+                        <a:t>8558,5</a:t>
                       </a:r>
                       <a:endParaRPr lang="en-GB" dirty="0"/>
                     </a:p>
@@ -21484,7 +24354,7 @@
                 </a:tc>
                 <a:extLst>
                   <a:ext uri="{0D108BD9-81ED-4DB2-BD59-A6C34878D82A}">
-                    <a16:rowId xmlns:a16="http://schemas.microsoft.com/office/drawing/2014/main" val="3095448716"/>
+                    <a16:rowId xmlns:a16="http://schemas.microsoft.com/office/drawing/2014/main" val="812132949"/>
                   </a:ext>
                 </a:extLst>
               </a:tr>
@@ -21538,7 +24408,12 @@
             <p:ph type="title"/>
           </p:nvPr>
         </p:nvSpPr>
-        <p:spPr/>
+        <p:spPr>
+          <a:xfrm>
+            <a:off x="684212" y="4969113"/>
+            <a:ext cx="8534400" cy="1507067"/>
+          </a:xfrm>
+        </p:spPr>
         <p:txBody>
           <a:bodyPr/>
           <a:lstStyle/>
@@ -21553,10 +24428,10 @@
       </p:sp>
       <p:graphicFrame>
         <p:nvGraphicFramePr>
-          <p:cNvPr id="6" name="Content Placeholder 5">
+          <p:cNvPr id="17" name="Content Placeholder 16">
             <a:extLst>
               <a:ext uri="{FF2B5EF4-FFF2-40B4-BE49-F238E27FC236}">
-                <a16:creationId xmlns:a16="http://schemas.microsoft.com/office/drawing/2014/main" id="{12D98DB9-2CA0-2E4E-4F33-97175D45FFCC}"/>
+                <a16:creationId xmlns:a16="http://schemas.microsoft.com/office/drawing/2014/main" id="{E81637C5-5E17-FFBB-3FC2-E1823A571A22}"/>
               </a:ext>
             </a:extLst>
           </p:cNvPr>
@@ -21567,14 +24442,14 @@
             <p:ph idx="1"/>
             <p:extLst>
               <p:ext uri="{D42A27DB-BD31-4B8C-83A1-F6EECF244321}">
-                <p14:modId xmlns:p14="http://schemas.microsoft.com/office/powerpoint/2010/main" val="4020615347"/>
+                <p14:modId xmlns:p14="http://schemas.microsoft.com/office/powerpoint/2010/main" val="432028408"/>
               </p:ext>
             </p:extLst>
           </p:nvPr>
         </p:nvGraphicFramePr>
         <p:xfrm>
-          <a:off x="330252" y="302342"/>
-          <a:ext cx="3799297" cy="2362200"/>
+          <a:off x="684212" y="243348"/>
+          <a:ext cx="4231916" cy="2519516"/>
         </p:xfrm>
         <a:graphic>
           <a:graphicData uri="http://schemas.openxmlformats.org/drawingml/2006/chart">
@@ -21584,10 +24459,10 @@
       </p:graphicFrame>
       <p:graphicFrame>
         <p:nvGraphicFramePr>
-          <p:cNvPr id="7" name="Content Placeholder 5">
+          <p:cNvPr id="18" name="Content Placeholder 16">
             <a:extLst>
               <a:ext uri="{FF2B5EF4-FFF2-40B4-BE49-F238E27FC236}">
-                <a16:creationId xmlns:a16="http://schemas.microsoft.com/office/drawing/2014/main" id="{26C7F95C-52CA-EFBC-054C-239A0B2C4161}"/>
+                <a16:creationId xmlns:a16="http://schemas.microsoft.com/office/drawing/2014/main" id="{4C21F744-4B20-130C-91D9-D578B4CF9594}"/>
               </a:ext>
             </a:extLst>
           </p:cNvPr>
@@ -21597,14 +24472,14 @@
           <p:nvPr>
             <p:extLst>
               <p:ext uri="{D42A27DB-BD31-4B8C-83A1-F6EECF244321}">
-                <p14:modId xmlns:p14="http://schemas.microsoft.com/office/powerpoint/2010/main" val="2744622460"/>
+                <p14:modId xmlns:p14="http://schemas.microsoft.com/office/powerpoint/2010/main" val="466593612"/>
               </p:ext>
             </p:extLst>
           </p:nvPr>
         </p:nvGraphicFramePr>
         <p:xfrm>
-          <a:off x="4263156" y="302342"/>
-          <a:ext cx="3799297" cy="2362200"/>
+          <a:off x="5575762" y="243348"/>
+          <a:ext cx="4231916" cy="2519516"/>
         </p:xfrm>
         <a:graphic>
           <a:graphicData uri="http://schemas.openxmlformats.org/drawingml/2006/chart">
@@ -21614,10 +24489,10 @@
       </p:graphicFrame>
       <p:graphicFrame>
         <p:nvGraphicFramePr>
-          <p:cNvPr id="8" name="Content Placeholder 5">
+          <p:cNvPr id="19" name="Content Placeholder 16">
             <a:extLst>
               <a:ext uri="{FF2B5EF4-FFF2-40B4-BE49-F238E27FC236}">
-                <a16:creationId xmlns:a16="http://schemas.microsoft.com/office/drawing/2014/main" id="{B0B7AF95-F332-851C-816F-8B3DC6FDA422}"/>
+                <a16:creationId xmlns:a16="http://schemas.microsoft.com/office/drawing/2014/main" id="{450D4C37-7453-0BCE-EE0C-E6D7664FDE2B}"/>
               </a:ext>
             </a:extLst>
           </p:cNvPr>
@@ -21627,14 +24502,14 @@
           <p:nvPr>
             <p:extLst>
               <p:ext uri="{D42A27DB-BD31-4B8C-83A1-F6EECF244321}">
-                <p14:modId xmlns:p14="http://schemas.microsoft.com/office/powerpoint/2010/main" val="4016814609"/>
+                <p14:modId xmlns:p14="http://schemas.microsoft.com/office/powerpoint/2010/main" val="1908854217"/>
               </p:ext>
             </p:extLst>
           </p:nvPr>
         </p:nvGraphicFramePr>
         <p:xfrm>
-          <a:off x="8201848" y="302342"/>
-          <a:ext cx="3799297" cy="2362200"/>
+          <a:off x="684212" y="2762864"/>
+          <a:ext cx="4231916" cy="2519516"/>
         </p:xfrm>
         <a:graphic>
           <a:graphicData uri="http://schemas.openxmlformats.org/drawingml/2006/chart">
@@ -21644,10 +24519,10 @@
       </p:graphicFrame>
       <p:graphicFrame>
         <p:nvGraphicFramePr>
-          <p:cNvPr id="9" name="Content Placeholder 5">
+          <p:cNvPr id="22" name="Content Placeholder 16">
             <a:extLst>
               <a:ext uri="{FF2B5EF4-FFF2-40B4-BE49-F238E27FC236}">
-                <a16:creationId xmlns:a16="http://schemas.microsoft.com/office/drawing/2014/main" id="{79C34674-4775-CFA1-8EFD-A7E95041FD86}"/>
+                <a16:creationId xmlns:a16="http://schemas.microsoft.com/office/drawing/2014/main" id="{088EA53E-CB2B-3673-A5C3-2D2BFCD9ECED}"/>
               </a:ext>
             </a:extLst>
           </p:cNvPr>
@@ -21657,48 +24532,18 @@
           <p:nvPr>
             <p:extLst>
               <p:ext uri="{D42A27DB-BD31-4B8C-83A1-F6EECF244321}">
-                <p14:modId xmlns:p14="http://schemas.microsoft.com/office/powerpoint/2010/main" val="4178359659"/>
+                <p14:modId xmlns:p14="http://schemas.microsoft.com/office/powerpoint/2010/main" val="3307275515"/>
               </p:ext>
             </p:extLst>
           </p:nvPr>
         </p:nvGraphicFramePr>
         <p:xfrm>
-          <a:off x="2296703" y="2563762"/>
-          <a:ext cx="3799297" cy="2362200"/>
+          <a:off x="5575762" y="2762864"/>
+          <a:ext cx="4231916" cy="2519516"/>
         </p:xfrm>
         <a:graphic>
           <a:graphicData uri="http://schemas.openxmlformats.org/drawingml/2006/chart">
             <c:chart xmlns:c="http://schemas.openxmlformats.org/drawingml/2006/chart" xmlns:r="http://schemas.openxmlformats.org/officeDocument/2006/relationships" r:id="rId5"/>
-          </a:graphicData>
-        </a:graphic>
-      </p:graphicFrame>
-      <p:graphicFrame>
-        <p:nvGraphicFramePr>
-          <p:cNvPr id="10" name="Content Placeholder 5">
-            <a:extLst>
-              <a:ext uri="{FF2B5EF4-FFF2-40B4-BE49-F238E27FC236}">
-                <a16:creationId xmlns:a16="http://schemas.microsoft.com/office/drawing/2014/main" id="{B00D9C5D-4052-D940-175F-E28404173086}"/>
-              </a:ext>
-            </a:extLst>
-          </p:cNvPr>
-          <p:cNvGraphicFramePr>
-            <a:graphicFrameLocks/>
-          </p:cNvGraphicFramePr>
-          <p:nvPr>
-            <p:extLst>
-              <p:ext uri="{D42A27DB-BD31-4B8C-83A1-F6EECF244321}">
-                <p14:modId xmlns:p14="http://schemas.microsoft.com/office/powerpoint/2010/main" val="1193492889"/>
-              </p:ext>
-            </p:extLst>
-          </p:nvPr>
-        </p:nvGraphicFramePr>
-        <p:xfrm>
-          <a:off x="6472239" y="2563762"/>
-          <a:ext cx="3799297" cy="2362200"/>
-        </p:xfrm>
-        <a:graphic>
-          <a:graphicData uri="http://schemas.openxmlformats.org/drawingml/2006/chart">
-            <c:chart xmlns:c="http://schemas.openxmlformats.org/drawingml/2006/chart" xmlns:r="http://schemas.openxmlformats.org/officeDocument/2006/relationships" r:id="rId6"/>
           </a:graphicData>
         </a:graphic>
       </p:graphicFrame>
@@ -21737,7 +24582,7 @@
           <p:cNvPr id="2" name="Title 1">
             <a:extLst>
               <a:ext uri="{FF2B5EF4-FFF2-40B4-BE49-F238E27FC236}">
-                <a16:creationId xmlns:a16="http://schemas.microsoft.com/office/drawing/2014/main" id="{D225B53B-ADEF-BAD0-1276-CC59FC3153FD}"/>
+                <a16:creationId xmlns:a16="http://schemas.microsoft.com/office/drawing/2014/main" id="{20334D19-9D1B-B626-55FF-AA6D2AC3317D}"/>
               </a:ext>
             </a:extLst>
           </p:cNvPr>
@@ -21755,11 +24600,7 @@
           <a:p>
             <a:r>
               <a:rPr lang="it-IT" dirty="0"/>
-              <a:t>Degradazione </a:t>
-            </a:r>
-            <a:r>
-              <a:rPr lang="it-IT" dirty="0" err="1"/>
-              <a:t>rps</a:t>
+              <a:t>LOAD TEST CON BATCH SIZE pari a 32 (PYTHON NATIVO)</a:t>
             </a:r>
             <a:endParaRPr lang="en-GB" dirty="0"/>
           </a:p>
@@ -21767,10 +24608,10 @@
       </p:sp>
       <p:graphicFrame>
         <p:nvGraphicFramePr>
-          <p:cNvPr id="6" name="Content Placeholder 5">
+          <p:cNvPr id="4" name="Content Placeholder 3">
             <a:extLst>
               <a:ext uri="{FF2B5EF4-FFF2-40B4-BE49-F238E27FC236}">
-                <a16:creationId xmlns:a16="http://schemas.microsoft.com/office/drawing/2014/main" id="{D17C77A7-1481-7B6F-58C3-A1803053268C}"/>
+                <a16:creationId xmlns:a16="http://schemas.microsoft.com/office/drawing/2014/main" id="{EB6520DC-C4C9-DA75-CB98-938C09A45BA4}"/>
               </a:ext>
             </a:extLst>
           </p:cNvPr>
@@ -21781,25 +24622,799 @@
             <p:ph idx="1"/>
             <p:extLst>
               <p:ext uri="{D42A27DB-BD31-4B8C-83A1-F6EECF244321}">
-                <p14:modId xmlns:p14="http://schemas.microsoft.com/office/powerpoint/2010/main" val="3767972232"/>
+                <p14:modId xmlns:p14="http://schemas.microsoft.com/office/powerpoint/2010/main" val="129223929"/>
               </p:ext>
             </p:extLst>
           </p:nvPr>
         </p:nvGraphicFramePr>
         <p:xfrm>
-          <a:off x="684213" y="685800"/>
-          <a:ext cx="8534400" cy="3614738"/>
+          <a:off x="684211" y="685800"/>
+          <a:ext cx="9639657" cy="2672080"/>
         </p:xfrm>
         <a:graphic>
-          <a:graphicData uri="http://schemas.openxmlformats.org/drawingml/2006/chart">
-            <c:chart xmlns:c="http://schemas.openxmlformats.org/drawingml/2006/chart" xmlns:r="http://schemas.openxmlformats.org/officeDocument/2006/relationships" r:id="rId2"/>
+          <a:graphicData uri="http://schemas.openxmlformats.org/drawingml/2006/table">
+            <a:tbl>
+              <a:tblPr firstRow="1" bandRow="1">
+                <a:tableStyleId>{5C22544A-7EE6-4342-B048-85BDC9FD1C3A}</a:tableStyleId>
+              </a:tblPr>
+              <a:tblGrid>
+                <a:gridCol w="1071073">
+                  <a:extLst>
+                    <a:ext uri="{9D8B030D-6E8A-4147-A177-3AD203B41FA5}">
+                      <a16:colId xmlns:a16="http://schemas.microsoft.com/office/drawing/2014/main" val="713660421"/>
+                    </a:ext>
+                  </a:extLst>
+                </a:gridCol>
+                <a:gridCol w="1071073">
+                  <a:extLst>
+                    <a:ext uri="{9D8B030D-6E8A-4147-A177-3AD203B41FA5}">
+                      <a16:colId xmlns:a16="http://schemas.microsoft.com/office/drawing/2014/main" val="2605851528"/>
+                    </a:ext>
+                  </a:extLst>
+                </a:gridCol>
+                <a:gridCol w="1071073">
+                  <a:extLst>
+                    <a:ext uri="{9D8B030D-6E8A-4147-A177-3AD203B41FA5}">
+                      <a16:colId xmlns:a16="http://schemas.microsoft.com/office/drawing/2014/main" val="4131664428"/>
+                    </a:ext>
+                  </a:extLst>
+                </a:gridCol>
+                <a:gridCol w="1071073">
+                  <a:extLst>
+                    <a:ext uri="{9D8B030D-6E8A-4147-A177-3AD203B41FA5}">
+                      <a16:colId xmlns:a16="http://schemas.microsoft.com/office/drawing/2014/main" val="2682047389"/>
+                    </a:ext>
+                  </a:extLst>
+                </a:gridCol>
+                <a:gridCol w="1071073">
+                  <a:extLst>
+                    <a:ext uri="{9D8B030D-6E8A-4147-A177-3AD203B41FA5}">
+                      <a16:colId xmlns:a16="http://schemas.microsoft.com/office/drawing/2014/main" val="560020995"/>
+                    </a:ext>
+                  </a:extLst>
+                </a:gridCol>
+                <a:gridCol w="1071073">
+                  <a:extLst>
+                    <a:ext uri="{9D8B030D-6E8A-4147-A177-3AD203B41FA5}">
+                      <a16:colId xmlns:a16="http://schemas.microsoft.com/office/drawing/2014/main" val="2200272610"/>
+                    </a:ext>
+                  </a:extLst>
+                </a:gridCol>
+                <a:gridCol w="1071073">
+                  <a:extLst>
+                    <a:ext uri="{9D8B030D-6E8A-4147-A177-3AD203B41FA5}">
+                      <a16:colId xmlns:a16="http://schemas.microsoft.com/office/drawing/2014/main" val="1594005505"/>
+                    </a:ext>
+                  </a:extLst>
+                </a:gridCol>
+                <a:gridCol w="1071073">
+                  <a:extLst>
+                    <a:ext uri="{9D8B030D-6E8A-4147-A177-3AD203B41FA5}">
+                      <a16:colId xmlns:a16="http://schemas.microsoft.com/office/drawing/2014/main" val="748764634"/>
+                    </a:ext>
+                  </a:extLst>
+                </a:gridCol>
+                <a:gridCol w="1071073">
+                  <a:extLst>
+                    <a:ext uri="{9D8B030D-6E8A-4147-A177-3AD203B41FA5}">
+                      <a16:colId xmlns:a16="http://schemas.microsoft.com/office/drawing/2014/main" val="3172487590"/>
+                    </a:ext>
+                  </a:extLst>
+                </a:gridCol>
+              </a:tblGrid>
+              <a:tr h="370840">
+                <a:tc>
+                  <a:txBody>
+                    <a:bodyPr/>
+                    <a:lstStyle/>
+                    <a:p>
+                      <a:r>
+                        <a:rPr lang="it-IT" dirty="0"/>
+                        <a:t>Connessioni simultanee</a:t>
+                      </a:r>
+                      <a:endParaRPr lang="en-GB" dirty="0"/>
+                    </a:p>
+                  </a:txBody>
+                  <a:tcPr/>
+                </a:tc>
+                <a:tc>
+                  <a:txBody>
+                    <a:bodyPr/>
+                    <a:lstStyle/>
+                    <a:p>
+                      <a:r>
+                        <a:rPr lang="it-IT" dirty="0"/>
+                        <a:t>Target RPS</a:t>
+                      </a:r>
+                      <a:endParaRPr lang="en-GB" dirty="0"/>
+                    </a:p>
+                  </a:txBody>
+                  <a:tcPr/>
+                </a:tc>
+                <a:tc>
+                  <a:txBody>
+                    <a:bodyPr/>
+                    <a:lstStyle/>
+                    <a:p>
+                      <a:r>
+                        <a:rPr lang="it-IT" dirty="0"/>
+                        <a:t>Richieste totali</a:t>
+                      </a:r>
+                      <a:endParaRPr lang="en-GB" dirty="0"/>
+                    </a:p>
+                  </a:txBody>
+                  <a:tcPr/>
+                </a:tc>
+                <a:tc>
+                  <a:txBody>
+                    <a:bodyPr/>
+                    <a:lstStyle/>
+                    <a:p>
+                      <a:r>
+                        <a:rPr lang="it-IT" dirty="0"/>
+                        <a:t>Richieste risolte</a:t>
+                      </a:r>
+                      <a:endParaRPr lang="en-GB" dirty="0"/>
+                    </a:p>
+                  </a:txBody>
+                  <a:tcPr/>
+                </a:tc>
+                <a:tc>
+                  <a:txBody>
+                    <a:bodyPr/>
+                    <a:lstStyle/>
+                    <a:p>
+                      <a:r>
+                        <a:rPr lang="it-IT" dirty="0"/>
+                        <a:t>Media latenze (</a:t>
+                      </a:r>
+                      <a:r>
+                        <a:rPr lang="it-IT" dirty="0" err="1"/>
+                        <a:t>ms</a:t>
+                      </a:r>
+                      <a:r>
+                        <a:rPr lang="it-IT" dirty="0"/>
+                        <a:t>)</a:t>
+                      </a:r>
+                      <a:endParaRPr lang="en-GB" dirty="0"/>
+                    </a:p>
+                  </a:txBody>
+                  <a:tcPr/>
+                </a:tc>
+                <a:tc>
+                  <a:txBody>
+                    <a:bodyPr/>
+                    <a:lstStyle/>
+                    <a:p>
+                      <a:r>
+                        <a:rPr lang="it-IT" dirty="0"/>
+                        <a:t>P50 (</a:t>
+                      </a:r>
+                      <a:r>
+                        <a:rPr lang="it-IT" dirty="0" err="1"/>
+                        <a:t>ms</a:t>
+                      </a:r>
+                      <a:r>
+                        <a:rPr lang="it-IT" dirty="0"/>
+                        <a:t>)</a:t>
+                      </a:r>
+                      <a:endParaRPr lang="en-GB" dirty="0"/>
+                    </a:p>
+                  </a:txBody>
+                  <a:tcPr/>
+                </a:tc>
+                <a:tc>
+                  <a:txBody>
+                    <a:bodyPr/>
+                    <a:lstStyle/>
+                    <a:p>
+                      <a:r>
+                        <a:rPr lang="it-IT" dirty="0"/>
+                        <a:t>P90 (</a:t>
+                      </a:r>
+                      <a:r>
+                        <a:rPr lang="it-IT" dirty="0" err="1"/>
+                        <a:t>ms</a:t>
+                      </a:r>
+                      <a:r>
+                        <a:rPr lang="it-IT" dirty="0"/>
+                        <a:t>)</a:t>
+                      </a:r>
+                      <a:endParaRPr lang="en-GB" dirty="0"/>
+                    </a:p>
+                  </a:txBody>
+                  <a:tcPr/>
+                </a:tc>
+                <a:tc>
+                  <a:txBody>
+                    <a:bodyPr/>
+                    <a:lstStyle/>
+                    <a:p>
+                      <a:r>
+                        <a:rPr lang="it-IT" dirty="0"/>
+                        <a:t>P95 (</a:t>
+                      </a:r>
+                      <a:r>
+                        <a:rPr lang="it-IT" dirty="0" err="1"/>
+                        <a:t>ms</a:t>
+                      </a:r>
+                      <a:r>
+                        <a:rPr lang="it-IT" dirty="0"/>
+                        <a:t>)</a:t>
+                      </a:r>
+                      <a:endParaRPr lang="en-GB" dirty="0"/>
+                    </a:p>
+                  </a:txBody>
+                  <a:tcPr/>
+                </a:tc>
+                <a:tc>
+                  <a:txBody>
+                    <a:bodyPr/>
+                    <a:lstStyle/>
+                    <a:p>
+                      <a:r>
+                        <a:rPr lang="it-IT" dirty="0"/>
+                        <a:t>P99 (</a:t>
+                      </a:r>
+                      <a:r>
+                        <a:rPr lang="it-IT" dirty="0" err="1"/>
+                        <a:t>ms</a:t>
+                      </a:r>
+                      <a:r>
+                        <a:rPr lang="it-IT" dirty="0"/>
+                        <a:t>)</a:t>
+                      </a:r>
+                      <a:endParaRPr lang="en-GB" dirty="0"/>
+                    </a:p>
+                  </a:txBody>
+                  <a:tcPr/>
+                </a:tc>
+                <a:extLst>
+                  <a:ext uri="{0D108BD9-81ED-4DB2-BD59-A6C34878D82A}">
+                    <a16:rowId xmlns:a16="http://schemas.microsoft.com/office/drawing/2014/main" val="1019616449"/>
+                  </a:ext>
+                </a:extLst>
+              </a:tr>
+              <a:tr h="370840">
+                <a:tc>
+                  <a:txBody>
+                    <a:bodyPr/>
+                    <a:lstStyle/>
+                    <a:p>
+                      <a:r>
+                        <a:rPr lang="it-IT" dirty="0"/>
+                        <a:t>32</a:t>
+                      </a:r>
+                      <a:endParaRPr lang="en-GB" dirty="0"/>
+                    </a:p>
+                  </a:txBody>
+                  <a:tcPr/>
+                </a:tc>
+                <a:tc>
+                  <a:txBody>
+                    <a:bodyPr/>
+                    <a:lstStyle/>
+                    <a:p>
+                      <a:r>
+                        <a:rPr lang="it-IT" dirty="0"/>
+                        <a:t>10</a:t>
+                      </a:r>
+                      <a:endParaRPr lang="en-GB" dirty="0"/>
+                    </a:p>
+                  </a:txBody>
+                  <a:tcPr/>
+                </a:tc>
+                <a:tc>
+                  <a:txBody>
+                    <a:bodyPr/>
+                    <a:lstStyle/>
+                    <a:p>
+                      <a:r>
+                        <a:rPr lang="it-IT" dirty="0"/>
+                        <a:t>600</a:t>
+                      </a:r>
+                      <a:endParaRPr lang="en-GB" dirty="0"/>
+                    </a:p>
+                  </a:txBody>
+                  <a:tcPr/>
+                </a:tc>
+                <a:tc>
+                  <a:txBody>
+                    <a:bodyPr/>
+                    <a:lstStyle/>
+                    <a:p>
+                      <a:r>
+                        <a:rPr lang="it-IT" dirty="0"/>
+                        <a:t>584</a:t>
+                      </a:r>
+                      <a:endParaRPr lang="en-GB" dirty="0"/>
+                    </a:p>
+                  </a:txBody>
+                  <a:tcPr/>
+                </a:tc>
+                <a:tc>
+                  <a:txBody>
+                    <a:bodyPr/>
+                    <a:lstStyle/>
+                    <a:p>
+                      <a:r>
+                        <a:rPr lang="it-IT" dirty="0"/>
+                        <a:t>4761,1</a:t>
+                      </a:r>
+                      <a:endParaRPr lang="en-GB" dirty="0"/>
+                    </a:p>
+                  </a:txBody>
+                  <a:tcPr/>
+                </a:tc>
+                <a:tc>
+                  <a:txBody>
+                    <a:bodyPr/>
+                    <a:lstStyle/>
+                    <a:p>
+                      <a:r>
+                        <a:rPr lang="it-IT" dirty="0"/>
+                        <a:t>5497,1</a:t>
+                      </a:r>
+                      <a:endParaRPr lang="en-GB" dirty="0"/>
+                    </a:p>
+                  </a:txBody>
+                  <a:tcPr/>
+                </a:tc>
+                <a:tc>
+                  <a:txBody>
+                    <a:bodyPr/>
+                    <a:lstStyle/>
+                    <a:p>
+                      <a:r>
+                        <a:rPr lang="it-IT" dirty="0"/>
+                        <a:t>6425,5</a:t>
+                      </a:r>
+                      <a:endParaRPr lang="en-GB" dirty="0"/>
+                    </a:p>
+                  </a:txBody>
+                  <a:tcPr/>
+                </a:tc>
+                <a:tc>
+                  <a:txBody>
+                    <a:bodyPr/>
+                    <a:lstStyle/>
+                    <a:p>
+                      <a:r>
+                        <a:rPr lang="it-IT" dirty="0"/>
+                        <a:t>7769,6</a:t>
+                      </a:r>
+                      <a:endParaRPr lang="en-GB" dirty="0"/>
+                    </a:p>
+                  </a:txBody>
+                  <a:tcPr/>
+                </a:tc>
+                <a:tc>
+                  <a:txBody>
+                    <a:bodyPr/>
+                    <a:lstStyle/>
+                    <a:p>
+                      <a:r>
+                        <a:rPr lang="it-IT" dirty="0"/>
+                        <a:t>8756,7</a:t>
+                      </a:r>
+                      <a:endParaRPr lang="en-GB" dirty="0"/>
+                    </a:p>
+                  </a:txBody>
+                  <a:tcPr/>
+                </a:tc>
+                <a:extLst>
+                  <a:ext uri="{0D108BD9-81ED-4DB2-BD59-A6C34878D82A}">
+                    <a16:rowId xmlns:a16="http://schemas.microsoft.com/office/drawing/2014/main" val="3033522304"/>
+                  </a:ext>
+                </a:extLst>
+              </a:tr>
+              <a:tr h="370840">
+                <a:tc>
+                  <a:txBody>
+                    <a:bodyPr/>
+                    <a:lstStyle/>
+                    <a:p>
+                      <a:r>
+                        <a:rPr lang="it-IT" dirty="0"/>
+                        <a:t>32</a:t>
+                      </a:r>
+                      <a:endParaRPr lang="en-GB" dirty="0"/>
+                    </a:p>
+                  </a:txBody>
+                  <a:tcPr/>
+                </a:tc>
+                <a:tc>
+                  <a:txBody>
+                    <a:bodyPr/>
+                    <a:lstStyle/>
+                    <a:p>
+                      <a:r>
+                        <a:rPr lang="it-IT" dirty="0"/>
+                        <a:t>50</a:t>
+                      </a:r>
+                      <a:endParaRPr lang="en-GB" dirty="0"/>
+                    </a:p>
+                  </a:txBody>
+                  <a:tcPr/>
+                </a:tc>
+                <a:tc>
+                  <a:txBody>
+                    <a:bodyPr/>
+                    <a:lstStyle/>
+                    <a:p>
+                      <a:r>
+                        <a:rPr lang="it-IT" dirty="0"/>
+                        <a:t>3000</a:t>
+                      </a:r>
+                      <a:endParaRPr lang="en-GB" dirty="0"/>
+                    </a:p>
+                  </a:txBody>
+                  <a:tcPr/>
+                </a:tc>
+                <a:tc>
+                  <a:txBody>
+                    <a:bodyPr/>
+                    <a:lstStyle/>
+                    <a:p>
+                      <a:r>
+                        <a:rPr lang="it-IT" dirty="0"/>
+                        <a:t>599</a:t>
+                      </a:r>
+                      <a:endParaRPr lang="en-GB" dirty="0"/>
+                    </a:p>
+                  </a:txBody>
+                  <a:tcPr/>
+                </a:tc>
+                <a:tc>
+                  <a:txBody>
+                    <a:bodyPr/>
+                    <a:lstStyle/>
+                    <a:p>
+                      <a:r>
+                        <a:rPr lang="it-IT" dirty="0"/>
+                        <a:t>6239,6</a:t>
+                      </a:r>
+                      <a:endParaRPr lang="en-GB" dirty="0"/>
+                    </a:p>
+                  </a:txBody>
+                  <a:tcPr/>
+                </a:tc>
+                <a:tc>
+                  <a:txBody>
+                    <a:bodyPr/>
+                    <a:lstStyle/>
+                    <a:p>
+                      <a:r>
+                        <a:rPr lang="it-IT" dirty="0"/>
+                        <a:t>6469,1</a:t>
+                      </a:r>
+                      <a:endParaRPr lang="en-GB" dirty="0"/>
+                    </a:p>
+                  </a:txBody>
+                  <a:tcPr/>
+                </a:tc>
+                <a:tc>
+                  <a:txBody>
+                    <a:bodyPr/>
+                    <a:lstStyle/>
+                    <a:p>
+                      <a:r>
+                        <a:rPr lang="it-IT" dirty="0"/>
+                        <a:t>6684,9</a:t>
+                      </a:r>
+                      <a:endParaRPr lang="en-GB" dirty="0"/>
+                    </a:p>
+                  </a:txBody>
+                  <a:tcPr/>
+                </a:tc>
+                <a:tc>
+                  <a:txBody>
+                    <a:bodyPr/>
+                    <a:lstStyle/>
+                    <a:p>
+                      <a:r>
+                        <a:rPr lang="it-IT" dirty="0"/>
+                        <a:t>8073,9</a:t>
+                      </a:r>
+                      <a:endParaRPr lang="en-GB" dirty="0"/>
+                    </a:p>
+                  </a:txBody>
+                  <a:tcPr/>
+                </a:tc>
+                <a:tc>
+                  <a:txBody>
+                    <a:bodyPr/>
+                    <a:lstStyle/>
+                    <a:p>
+                      <a:r>
+                        <a:rPr lang="it-IT" dirty="0"/>
+                        <a:t>9480,8</a:t>
+                      </a:r>
+                      <a:endParaRPr lang="en-GB" dirty="0"/>
+                    </a:p>
+                  </a:txBody>
+                  <a:tcPr/>
+                </a:tc>
+                <a:extLst>
+                  <a:ext uri="{0D108BD9-81ED-4DB2-BD59-A6C34878D82A}">
+                    <a16:rowId xmlns:a16="http://schemas.microsoft.com/office/drawing/2014/main" val="774249562"/>
+                  </a:ext>
+                </a:extLst>
+              </a:tr>
+              <a:tr h="370840">
+                <a:tc>
+                  <a:txBody>
+                    <a:bodyPr/>
+                    <a:lstStyle/>
+                    <a:p>
+                      <a:r>
+                        <a:rPr lang="it-IT" dirty="0"/>
+                        <a:t>64</a:t>
+                      </a:r>
+                      <a:endParaRPr lang="en-GB" dirty="0"/>
+                    </a:p>
+                  </a:txBody>
+                  <a:tcPr/>
+                </a:tc>
+                <a:tc>
+                  <a:txBody>
+                    <a:bodyPr/>
+                    <a:lstStyle/>
+                    <a:p>
+                      <a:r>
+                        <a:rPr lang="it-IT" dirty="0"/>
+                        <a:t>10</a:t>
+                      </a:r>
+                      <a:endParaRPr lang="en-GB" dirty="0"/>
+                    </a:p>
+                  </a:txBody>
+                  <a:tcPr/>
+                </a:tc>
+                <a:tc>
+                  <a:txBody>
+                    <a:bodyPr/>
+                    <a:lstStyle/>
+                    <a:p>
+                      <a:r>
+                        <a:rPr lang="it-IT" dirty="0"/>
+                        <a:t>600</a:t>
+                      </a:r>
+                      <a:endParaRPr lang="en-GB" dirty="0"/>
+                    </a:p>
+                  </a:txBody>
+                  <a:tcPr/>
+                </a:tc>
+                <a:tc>
+                  <a:txBody>
+                    <a:bodyPr/>
+                    <a:lstStyle/>
+                    <a:p>
+                      <a:r>
+                        <a:rPr lang="it-IT" dirty="0"/>
+                        <a:t>565</a:t>
+                      </a:r>
+                      <a:endParaRPr lang="en-GB" dirty="0"/>
+                    </a:p>
+                  </a:txBody>
+                  <a:tcPr/>
+                </a:tc>
+                <a:tc>
+                  <a:txBody>
+                    <a:bodyPr/>
+                    <a:lstStyle/>
+                    <a:p>
+                      <a:r>
+                        <a:rPr lang="it-IT" dirty="0"/>
+                        <a:t>4969,6</a:t>
+                      </a:r>
+                      <a:endParaRPr lang="en-GB" dirty="0"/>
+                    </a:p>
+                  </a:txBody>
+                  <a:tcPr/>
+                </a:tc>
+                <a:tc>
+                  <a:txBody>
+                    <a:bodyPr/>
+                    <a:lstStyle/>
+                    <a:p>
+                      <a:r>
+                        <a:rPr lang="it-IT" dirty="0"/>
+                        <a:t>4855,8</a:t>
+                      </a:r>
+                      <a:endParaRPr lang="en-GB" dirty="0"/>
+                    </a:p>
+                  </a:txBody>
+                  <a:tcPr/>
+                </a:tc>
+                <a:tc>
+                  <a:txBody>
+                    <a:bodyPr/>
+                    <a:lstStyle/>
+                    <a:p>
+                      <a:r>
+                        <a:rPr lang="it-IT" dirty="0"/>
+                        <a:t>10282,3</a:t>
+                      </a:r>
+                      <a:endParaRPr lang="en-GB" dirty="0"/>
+                    </a:p>
+                  </a:txBody>
+                  <a:tcPr/>
+                </a:tc>
+                <a:tc>
+                  <a:txBody>
+                    <a:bodyPr/>
+                    <a:lstStyle/>
+                    <a:p>
+                      <a:r>
+                        <a:rPr lang="it-IT" dirty="0"/>
+                        <a:t>12558,8</a:t>
+                      </a:r>
+                      <a:endParaRPr lang="en-GB" dirty="0"/>
+                    </a:p>
+                  </a:txBody>
+                  <a:tcPr/>
+                </a:tc>
+                <a:tc>
+                  <a:txBody>
+                    <a:bodyPr/>
+                    <a:lstStyle/>
+                    <a:p>
+                      <a:r>
+                        <a:rPr lang="it-IT" dirty="0"/>
+                        <a:t>16011,5</a:t>
+                      </a:r>
+                      <a:endParaRPr lang="en-GB" dirty="0"/>
+                    </a:p>
+                  </a:txBody>
+                  <a:tcPr/>
+                </a:tc>
+                <a:extLst>
+                  <a:ext uri="{0D108BD9-81ED-4DB2-BD59-A6C34878D82A}">
+                    <a16:rowId xmlns:a16="http://schemas.microsoft.com/office/drawing/2014/main" val="3558160451"/>
+                  </a:ext>
+                </a:extLst>
+              </a:tr>
+              <a:tr h="370840">
+                <a:tc>
+                  <a:txBody>
+                    <a:bodyPr/>
+                    <a:lstStyle/>
+                    <a:p>
+                      <a:r>
+                        <a:rPr lang="it-IT" dirty="0"/>
+                        <a:t>64</a:t>
+                      </a:r>
+                      <a:endParaRPr lang="en-GB" dirty="0"/>
+                    </a:p>
+                  </a:txBody>
+                  <a:tcPr/>
+                </a:tc>
+                <a:tc>
+                  <a:txBody>
+                    <a:bodyPr/>
+                    <a:lstStyle/>
+                    <a:p>
+                      <a:r>
+                        <a:rPr lang="it-IT" dirty="0"/>
+                        <a:t>50</a:t>
+                      </a:r>
+                      <a:endParaRPr lang="en-GB" dirty="0"/>
+                    </a:p>
+                  </a:txBody>
+                  <a:tcPr/>
+                </a:tc>
+                <a:tc>
+                  <a:txBody>
+                    <a:bodyPr/>
+                    <a:lstStyle/>
+                    <a:p>
+                      <a:r>
+                        <a:rPr lang="it-IT" dirty="0"/>
+                        <a:t>3000</a:t>
+                      </a:r>
+                      <a:endParaRPr lang="en-GB" dirty="0"/>
+                    </a:p>
+                  </a:txBody>
+                  <a:tcPr/>
+                </a:tc>
+                <a:tc>
+                  <a:txBody>
+                    <a:bodyPr/>
+                    <a:lstStyle/>
+                    <a:p>
+                      <a:r>
+                        <a:rPr lang="it-IT" dirty="0"/>
+                        <a:t>603</a:t>
+                      </a:r>
+                      <a:endParaRPr lang="en-GB" dirty="0"/>
+                    </a:p>
+                  </a:txBody>
+                  <a:tcPr/>
+                </a:tc>
+                <a:tc>
+                  <a:txBody>
+                    <a:bodyPr/>
+                    <a:lstStyle/>
+                    <a:p>
+                      <a:r>
+                        <a:rPr lang="it-IT" dirty="0"/>
+                        <a:t>9275,2</a:t>
+                      </a:r>
+                      <a:endParaRPr lang="en-GB" dirty="0"/>
+                    </a:p>
+                  </a:txBody>
+                  <a:tcPr/>
+                </a:tc>
+                <a:tc>
+                  <a:txBody>
+                    <a:bodyPr/>
+                    <a:lstStyle/>
+                    <a:p>
+                      <a:r>
+                        <a:rPr lang="it-IT" dirty="0"/>
+                        <a:t>8297,7</a:t>
+                      </a:r>
+                      <a:endParaRPr lang="en-GB" dirty="0"/>
+                    </a:p>
+                  </a:txBody>
+                  <a:tcPr/>
+                </a:tc>
+                <a:tc>
+                  <a:txBody>
+                    <a:bodyPr/>
+                    <a:lstStyle/>
+                    <a:p>
+                      <a:r>
+                        <a:rPr lang="it-IT" dirty="0"/>
+                        <a:t>14084</a:t>
+                      </a:r>
+                      <a:endParaRPr lang="en-GB" dirty="0"/>
+                    </a:p>
+                  </a:txBody>
+                  <a:tcPr/>
+                </a:tc>
+                <a:tc>
+                  <a:txBody>
+                    <a:bodyPr/>
+                    <a:lstStyle/>
+                    <a:p>
+                      <a:r>
+                        <a:rPr lang="it-IT" dirty="0"/>
+                        <a:t>19135,9</a:t>
+                      </a:r>
+                      <a:endParaRPr lang="en-GB" dirty="0"/>
+                    </a:p>
+                  </a:txBody>
+                  <a:tcPr/>
+                </a:tc>
+                <a:tc>
+                  <a:txBody>
+                    <a:bodyPr/>
+                    <a:lstStyle/>
+                    <a:p>
+                      <a:r>
+                        <a:rPr lang="it-IT" dirty="0"/>
+                        <a:t>22981,8</a:t>
+                      </a:r>
+                      <a:endParaRPr lang="en-GB" dirty="0"/>
+                    </a:p>
+                  </a:txBody>
+                  <a:tcPr/>
+                </a:tc>
+                <a:extLst>
+                  <a:ext uri="{0D108BD9-81ED-4DB2-BD59-A6C34878D82A}">
+                    <a16:rowId xmlns:a16="http://schemas.microsoft.com/office/drawing/2014/main" val="812132949"/>
+                  </a:ext>
+                </a:extLst>
+              </a:tr>
+            </a:tbl>
           </a:graphicData>
         </a:graphic>
       </p:graphicFrame>
     </p:spTree>
     <p:extLst>
       <p:ext uri="{BB962C8B-B14F-4D97-AF65-F5344CB8AC3E}">
-        <p14:creationId xmlns:p14="http://schemas.microsoft.com/office/powerpoint/2010/main" val="2513706645"/>
+        <p14:creationId xmlns:p14="http://schemas.microsoft.com/office/powerpoint/2010/main" val="3325261426"/>
       </p:ext>
     </p:extLst>
   </p:cSld>
@@ -21810,6 +25425,1067 @@
 </file>
 
 <file path=ppt/slides/slide25.xml><?xml version="1.0" encoding="utf-8"?>
+<p:sld xmlns:a="http://schemas.openxmlformats.org/drawingml/2006/main" xmlns:r="http://schemas.openxmlformats.org/officeDocument/2006/relationships" xmlns:p="http://schemas.openxmlformats.org/presentationml/2006/main">
+  <p:cSld>
+    <p:spTree>
+      <p:nvGrpSpPr>
+        <p:cNvPr id="1" name="">
+          <a:extLst>
+            <a:ext uri="{FF2B5EF4-FFF2-40B4-BE49-F238E27FC236}">
+              <a16:creationId xmlns:a16="http://schemas.microsoft.com/office/drawing/2014/main" id="{D1FAAD99-0E67-A22D-5C7C-4FF8C049A3F9}"/>
+            </a:ext>
+          </a:extLst>
+        </p:cNvPr>
+        <p:cNvGrpSpPr/>
+        <p:nvPr/>
+      </p:nvGrpSpPr>
+      <p:grpSpPr>
+        <a:xfrm>
+          <a:off x="0" y="0"/>
+          <a:ext cx="0" cy="0"/>
+          <a:chOff x="0" y="0"/>
+          <a:chExt cx="0" cy="0"/>
+        </a:xfrm>
+      </p:grpSpPr>
+      <p:sp>
+        <p:nvSpPr>
+          <p:cNvPr id="2" name="Title 1">
+            <a:extLst>
+              <a:ext uri="{FF2B5EF4-FFF2-40B4-BE49-F238E27FC236}">
+                <a16:creationId xmlns:a16="http://schemas.microsoft.com/office/drawing/2014/main" id="{A63EEEEA-AF45-63B1-3CEA-3649064D9055}"/>
+              </a:ext>
+            </a:extLst>
+          </p:cNvPr>
+          <p:cNvSpPr>
+            <a:spLocks noGrp="1"/>
+          </p:cNvSpPr>
+          <p:nvPr>
+            <p:ph type="title"/>
+          </p:nvPr>
+        </p:nvSpPr>
+        <p:spPr/>
+        <p:txBody>
+          <a:bodyPr/>
+          <a:lstStyle/>
+          <a:p>
+            <a:r>
+              <a:rPr lang="it-IT" dirty="0"/>
+              <a:t>LOAD TEST CON BATCH SIZE pari a 32 (ONNX)</a:t>
+            </a:r>
+            <a:endParaRPr lang="en-GB" dirty="0"/>
+          </a:p>
+        </p:txBody>
+      </p:sp>
+      <p:graphicFrame>
+        <p:nvGraphicFramePr>
+          <p:cNvPr id="4" name="Content Placeholder 3">
+            <a:extLst>
+              <a:ext uri="{FF2B5EF4-FFF2-40B4-BE49-F238E27FC236}">
+                <a16:creationId xmlns:a16="http://schemas.microsoft.com/office/drawing/2014/main" id="{5DEEBD52-29D3-F569-85E2-8775511194FF}"/>
+              </a:ext>
+            </a:extLst>
+          </p:cNvPr>
+          <p:cNvGraphicFramePr>
+            <a:graphicFrameLocks noGrp="1"/>
+          </p:cNvGraphicFramePr>
+          <p:nvPr>
+            <p:ph idx="1"/>
+            <p:extLst>
+              <p:ext uri="{D42A27DB-BD31-4B8C-83A1-F6EECF244321}">
+                <p14:modId xmlns:p14="http://schemas.microsoft.com/office/powerpoint/2010/main" val="222780872"/>
+              </p:ext>
+            </p:extLst>
+          </p:nvPr>
+        </p:nvGraphicFramePr>
+        <p:xfrm>
+          <a:off x="684211" y="685800"/>
+          <a:ext cx="9639657" cy="2672080"/>
+        </p:xfrm>
+        <a:graphic>
+          <a:graphicData uri="http://schemas.openxmlformats.org/drawingml/2006/table">
+            <a:tbl>
+              <a:tblPr firstRow="1" bandRow="1">
+                <a:tableStyleId>{5C22544A-7EE6-4342-B048-85BDC9FD1C3A}</a:tableStyleId>
+              </a:tblPr>
+              <a:tblGrid>
+                <a:gridCol w="1071073">
+                  <a:extLst>
+                    <a:ext uri="{9D8B030D-6E8A-4147-A177-3AD203B41FA5}">
+                      <a16:colId xmlns:a16="http://schemas.microsoft.com/office/drawing/2014/main" val="713660421"/>
+                    </a:ext>
+                  </a:extLst>
+                </a:gridCol>
+                <a:gridCol w="1071073">
+                  <a:extLst>
+                    <a:ext uri="{9D8B030D-6E8A-4147-A177-3AD203B41FA5}">
+                      <a16:colId xmlns:a16="http://schemas.microsoft.com/office/drawing/2014/main" val="2605851528"/>
+                    </a:ext>
+                  </a:extLst>
+                </a:gridCol>
+                <a:gridCol w="1071073">
+                  <a:extLst>
+                    <a:ext uri="{9D8B030D-6E8A-4147-A177-3AD203B41FA5}">
+                      <a16:colId xmlns:a16="http://schemas.microsoft.com/office/drawing/2014/main" val="4131664428"/>
+                    </a:ext>
+                  </a:extLst>
+                </a:gridCol>
+                <a:gridCol w="1071073">
+                  <a:extLst>
+                    <a:ext uri="{9D8B030D-6E8A-4147-A177-3AD203B41FA5}">
+                      <a16:colId xmlns:a16="http://schemas.microsoft.com/office/drawing/2014/main" val="2682047389"/>
+                    </a:ext>
+                  </a:extLst>
+                </a:gridCol>
+                <a:gridCol w="1071073">
+                  <a:extLst>
+                    <a:ext uri="{9D8B030D-6E8A-4147-A177-3AD203B41FA5}">
+                      <a16:colId xmlns:a16="http://schemas.microsoft.com/office/drawing/2014/main" val="560020995"/>
+                    </a:ext>
+                  </a:extLst>
+                </a:gridCol>
+                <a:gridCol w="1071073">
+                  <a:extLst>
+                    <a:ext uri="{9D8B030D-6E8A-4147-A177-3AD203B41FA5}">
+                      <a16:colId xmlns:a16="http://schemas.microsoft.com/office/drawing/2014/main" val="2200272610"/>
+                    </a:ext>
+                  </a:extLst>
+                </a:gridCol>
+                <a:gridCol w="1071073">
+                  <a:extLst>
+                    <a:ext uri="{9D8B030D-6E8A-4147-A177-3AD203B41FA5}">
+                      <a16:colId xmlns:a16="http://schemas.microsoft.com/office/drawing/2014/main" val="1594005505"/>
+                    </a:ext>
+                  </a:extLst>
+                </a:gridCol>
+                <a:gridCol w="1071073">
+                  <a:extLst>
+                    <a:ext uri="{9D8B030D-6E8A-4147-A177-3AD203B41FA5}">
+                      <a16:colId xmlns:a16="http://schemas.microsoft.com/office/drawing/2014/main" val="748764634"/>
+                    </a:ext>
+                  </a:extLst>
+                </a:gridCol>
+                <a:gridCol w="1071073">
+                  <a:extLst>
+                    <a:ext uri="{9D8B030D-6E8A-4147-A177-3AD203B41FA5}">
+                      <a16:colId xmlns:a16="http://schemas.microsoft.com/office/drawing/2014/main" val="3172487590"/>
+                    </a:ext>
+                  </a:extLst>
+                </a:gridCol>
+              </a:tblGrid>
+              <a:tr h="370840">
+                <a:tc>
+                  <a:txBody>
+                    <a:bodyPr/>
+                    <a:lstStyle/>
+                    <a:p>
+                      <a:r>
+                        <a:rPr lang="it-IT" dirty="0"/>
+                        <a:t>Connessioni simultanee</a:t>
+                      </a:r>
+                      <a:endParaRPr lang="en-GB" dirty="0"/>
+                    </a:p>
+                  </a:txBody>
+                  <a:tcPr/>
+                </a:tc>
+                <a:tc>
+                  <a:txBody>
+                    <a:bodyPr/>
+                    <a:lstStyle/>
+                    <a:p>
+                      <a:r>
+                        <a:rPr lang="it-IT" dirty="0"/>
+                        <a:t>Target RPS</a:t>
+                      </a:r>
+                      <a:endParaRPr lang="en-GB" dirty="0"/>
+                    </a:p>
+                  </a:txBody>
+                  <a:tcPr/>
+                </a:tc>
+                <a:tc>
+                  <a:txBody>
+                    <a:bodyPr/>
+                    <a:lstStyle/>
+                    <a:p>
+                      <a:r>
+                        <a:rPr lang="it-IT" dirty="0"/>
+                        <a:t>Richieste totali</a:t>
+                      </a:r>
+                      <a:endParaRPr lang="en-GB" dirty="0"/>
+                    </a:p>
+                  </a:txBody>
+                  <a:tcPr/>
+                </a:tc>
+                <a:tc>
+                  <a:txBody>
+                    <a:bodyPr/>
+                    <a:lstStyle/>
+                    <a:p>
+                      <a:r>
+                        <a:rPr lang="it-IT" dirty="0"/>
+                        <a:t>Richieste risolte</a:t>
+                      </a:r>
+                      <a:endParaRPr lang="en-GB" dirty="0"/>
+                    </a:p>
+                  </a:txBody>
+                  <a:tcPr/>
+                </a:tc>
+                <a:tc>
+                  <a:txBody>
+                    <a:bodyPr/>
+                    <a:lstStyle/>
+                    <a:p>
+                      <a:r>
+                        <a:rPr lang="it-IT" dirty="0"/>
+                        <a:t>Media latenze (</a:t>
+                      </a:r>
+                      <a:r>
+                        <a:rPr lang="it-IT" dirty="0" err="1"/>
+                        <a:t>ms</a:t>
+                      </a:r>
+                      <a:r>
+                        <a:rPr lang="it-IT" dirty="0"/>
+                        <a:t>)</a:t>
+                      </a:r>
+                      <a:endParaRPr lang="en-GB" dirty="0"/>
+                    </a:p>
+                  </a:txBody>
+                  <a:tcPr/>
+                </a:tc>
+                <a:tc>
+                  <a:txBody>
+                    <a:bodyPr/>
+                    <a:lstStyle/>
+                    <a:p>
+                      <a:r>
+                        <a:rPr lang="it-IT" dirty="0"/>
+                        <a:t>P50 (</a:t>
+                      </a:r>
+                      <a:r>
+                        <a:rPr lang="it-IT" dirty="0" err="1"/>
+                        <a:t>ms</a:t>
+                      </a:r>
+                      <a:r>
+                        <a:rPr lang="it-IT" dirty="0"/>
+                        <a:t>)</a:t>
+                      </a:r>
+                      <a:endParaRPr lang="en-GB" dirty="0"/>
+                    </a:p>
+                  </a:txBody>
+                  <a:tcPr/>
+                </a:tc>
+                <a:tc>
+                  <a:txBody>
+                    <a:bodyPr/>
+                    <a:lstStyle/>
+                    <a:p>
+                      <a:r>
+                        <a:rPr lang="it-IT" dirty="0"/>
+                        <a:t>P90 (</a:t>
+                      </a:r>
+                      <a:r>
+                        <a:rPr lang="it-IT" dirty="0" err="1"/>
+                        <a:t>ms</a:t>
+                      </a:r>
+                      <a:r>
+                        <a:rPr lang="it-IT" dirty="0"/>
+                        <a:t>)</a:t>
+                      </a:r>
+                      <a:endParaRPr lang="en-GB" dirty="0"/>
+                    </a:p>
+                  </a:txBody>
+                  <a:tcPr/>
+                </a:tc>
+                <a:tc>
+                  <a:txBody>
+                    <a:bodyPr/>
+                    <a:lstStyle/>
+                    <a:p>
+                      <a:r>
+                        <a:rPr lang="it-IT" dirty="0"/>
+                        <a:t>P95 (</a:t>
+                      </a:r>
+                      <a:r>
+                        <a:rPr lang="it-IT" dirty="0" err="1"/>
+                        <a:t>ms</a:t>
+                      </a:r>
+                      <a:r>
+                        <a:rPr lang="it-IT" dirty="0"/>
+                        <a:t>)</a:t>
+                      </a:r>
+                      <a:endParaRPr lang="en-GB" dirty="0"/>
+                    </a:p>
+                  </a:txBody>
+                  <a:tcPr/>
+                </a:tc>
+                <a:tc>
+                  <a:txBody>
+                    <a:bodyPr/>
+                    <a:lstStyle/>
+                    <a:p>
+                      <a:r>
+                        <a:rPr lang="it-IT" dirty="0"/>
+                        <a:t>P99 (</a:t>
+                      </a:r>
+                      <a:r>
+                        <a:rPr lang="it-IT" dirty="0" err="1"/>
+                        <a:t>ms</a:t>
+                      </a:r>
+                      <a:r>
+                        <a:rPr lang="it-IT" dirty="0"/>
+                        <a:t>)</a:t>
+                      </a:r>
+                      <a:endParaRPr lang="en-GB" dirty="0"/>
+                    </a:p>
+                  </a:txBody>
+                  <a:tcPr/>
+                </a:tc>
+                <a:extLst>
+                  <a:ext uri="{0D108BD9-81ED-4DB2-BD59-A6C34878D82A}">
+                    <a16:rowId xmlns:a16="http://schemas.microsoft.com/office/drawing/2014/main" val="1019616449"/>
+                  </a:ext>
+                </a:extLst>
+              </a:tr>
+              <a:tr h="370840">
+                <a:tc>
+                  <a:txBody>
+                    <a:bodyPr/>
+                    <a:lstStyle/>
+                    <a:p>
+                      <a:r>
+                        <a:rPr lang="it-IT" dirty="0"/>
+                        <a:t>32</a:t>
+                      </a:r>
+                      <a:endParaRPr lang="en-GB" dirty="0"/>
+                    </a:p>
+                  </a:txBody>
+                  <a:tcPr/>
+                </a:tc>
+                <a:tc>
+                  <a:txBody>
+                    <a:bodyPr/>
+                    <a:lstStyle/>
+                    <a:p>
+                      <a:r>
+                        <a:rPr lang="it-IT" dirty="0"/>
+                        <a:t>10</a:t>
+                      </a:r>
+                      <a:endParaRPr lang="en-GB" dirty="0"/>
+                    </a:p>
+                  </a:txBody>
+                  <a:tcPr/>
+                </a:tc>
+                <a:tc>
+                  <a:txBody>
+                    <a:bodyPr/>
+                    <a:lstStyle/>
+                    <a:p>
+                      <a:r>
+                        <a:rPr lang="it-IT" dirty="0"/>
+                        <a:t>600</a:t>
+                      </a:r>
+                      <a:endParaRPr lang="en-GB" dirty="0"/>
+                    </a:p>
+                  </a:txBody>
+                  <a:tcPr/>
+                </a:tc>
+                <a:tc>
+                  <a:txBody>
+                    <a:bodyPr/>
+                    <a:lstStyle/>
+                    <a:p>
+                      <a:r>
+                        <a:rPr lang="it-IT" dirty="0"/>
+                        <a:t>593</a:t>
+                      </a:r>
+                      <a:endParaRPr lang="en-GB" dirty="0"/>
+                    </a:p>
+                  </a:txBody>
+                  <a:tcPr/>
+                </a:tc>
+                <a:tc>
+                  <a:txBody>
+                    <a:bodyPr/>
+                    <a:lstStyle/>
+                    <a:p>
+                      <a:r>
+                        <a:rPr lang="it-IT" dirty="0"/>
+                        <a:t>4379,8</a:t>
+                      </a:r>
+                      <a:endParaRPr lang="en-GB" dirty="0"/>
+                    </a:p>
+                  </a:txBody>
+                  <a:tcPr/>
+                </a:tc>
+                <a:tc>
+                  <a:txBody>
+                    <a:bodyPr/>
+                    <a:lstStyle/>
+                    <a:p>
+                      <a:r>
+                        <a:rPr lang="it-IT" dirty="0"/>
+                        <a:t>4847,4</a:t>
+                      </a:r>
+                      <a:endParaRPr lang="en-GB" dirty="0"/>
+                    </a:p>
+                  </a:txBody>
+                  <a:tcPr/>
+                </a:tc>
+                <a:tc>
+                  <a:txBody>
+                    <a:bodyPr/>
+                    <a:lstStyle/>
+                    <a:p>
+                      <a:r>
+                        <a:rPr lang="it-IT" dirty="0"/>
+                        <a:t>6657,7</a:t>
+                      </a:r>
+                      <a:endParaRPr lang="en-GB" dirty="0"/>
+                    </a:p>
+                  </a:txBody>
+                  <a:tcPr/>
+                </a:tc>
+                <a:tc>
+                  <a:txBody>
+                    <a:bodyPr/>
+                    <a:lstStyle/>
+                    <a:p>
+                      <a:r>
+                        <a:rPr lang="it-IT" dirty="0"/>
+                        <a:t>7386,8</a:t>
+                      </a:r>
+                      <a:endParaRPr lang="en-GB" dirty="0"/>
+                    </a:p>
+                  </a:txBody>
+                  <a:tcPr/>
+                </a:tc>
+                <a:tc>
+                  <a:txBody>
+                    <a:bodyPr/>
+                    <a:lstStyle/>
+                    <a:p>
+                      <a:r>
+                        <a:rPr lang="it-IT" dirty="0"/>
+                        <a:t>7883,6</a:t>
+                      </a:r>
+                      <a:endParaRPr lang="en-GB" dirty="0"/>
+                    </a:p>
+                  </a:txBody>
+                  <a:tcPr/>
+                </a:tc>
+                <a:extLst>
+                  <a:ext uri="{0D108BD9-81ED-4DB2-BD59-A6C34878D82A}">
+                    <a16:rowId xmlns:a16="http://schemas.microsoft.com/office/drawing/2014/main" val="3033522304"/>
+                  </a:ext>
+                </a:extLst>
+              </a:tr>
+              <a:tr h="370840">
+                <a:tc>
+                  <a:txBody>
+                    <a:bodyPr/>
+                    <a:lstStyle/>
+                    <a:p>
+                      <a:r>
+                        <a:rPr lang="it-IT" dirty="0"/>
+                        <a:t>32</a:t>
+                      </a:r>
+                      <a:endParaRPr lang="en-GB" dirty="0"/>
+                    </a:p>
+                  </a:txBody>
+                  <a:tcPr/>
+                </a:tc>
+                <a:tc>
+                  <a:txBody>
+                    <a:bodyPr/>
+                    <a:lstStyle/>
+                    <a:p>
+                      <a:r>
+                        <a:rPr lang="it-IT" dirty="0"/>
+                        <a:t>50</a:t>
+                      </a:r>
+                      <a:endParaRPr lang="en-GB" dirty="0"/>
+                    </a:p>
+                  </a:txBody>
+                  <a:tcPr/>
+                </a:tc>
+                <a:tc>
+                  <a:txBody>
+                    <a:bodyPr/>
+                    <a:lstStyle/>
+                    <a:p>
+                      <a:r>
+                        <a:rPr lang="it-IT" dirty="0"/>
+                        <a:t>3000</a:t>
+                      </a:r>
+                      <a:endParaRPr lang="en-GB" dirty="0"/>
+                    </a:p>
+                  </a:txBody>
+                  <a:tcPr/>
+                </a:tc>
+                <a:tc>
+                  <a:txBody>
+                    <a:bodyPr/>
+                    <a:lstStyle/>
+                    <a:p>
+                      <a:r>
+                        <a:rPr lang="it-IT" dirty="0"/>
+                        <a:t>619</a:t>
+                      </a:r>
+                      <a:endParaRPr lang="en-GB" dirty="0"/>
+                    </a:p>
+                  </a:txBody>
+                  <a:tcPr/>
+                </a:tc>
+                <a:tc>
+                  <a:txBody>
+                    <a:bodyPr/>
+                    <a:lstStyle/>
+                    <a:p>
+                      <a:r>
+                        <a:rPr lang="it-IT" dirty="0"/>
+                        <a:t>6106,7</a:t>
+                      </a:r>
+                      <a:endParaRPr lang="en-GB" dirty="0"/>
+                    </a:p>
+                  </a:txBody>
+                  <a:tcPr/>
+                </a:tc>
+                <a:tc>
+                  <a:txBody>
+                    <a:bodyPr/>
+                    <a:lstStyle/>
+                    <a:p>
+                      <a:r>
+                        <a:rPr lang="it-IT" dirty="0"/>
+                        <a:t>6294,7</a:t>
+                      </a:r>
+                      <a:endParaRPr lang="en-GB" dirty="0"/>
+                    </a:p>
+                  </a:txBody>
+                  <a:tcPr/>
+                </a:tc>
+                <a:tc>
+                  <a:txBody>
+                    <a:bodyPr/>
+                    <a:lstStyle/>
+                    <a:p>
+                      <a:r>
+                        <a:rPr lang="it-IT" dirty="0"/>
+                        <a:t>6627,2</a:t>
+                      </a:r>
+                      <a:endParaRPr lang="en-GB" dirty="0"/>
+                    </a:p>
+                  </a:txBody>
+                  <a:tcPr/>
+                </a:tc>
+                <a:tc>
+                  <a:txBody>
+                    <a:bodyPr/>
+                    <a:lstStyle/>
+                    <a:p>
+                      <a:r>
+                        <a:rPr lang="it-IT" dirty="0"/>
+                        <a:t>8255,6</a:t>
+                      </a:r>
+                      <a:endParaRPr lang="en-GB" dirty="0"/>
+                    </a:p>
+                  </a:txBody>
+                  <a:tcPr/>
+                </a:tc>
+                <a:tc>
+                  <a:txBody>
+                    <a:bodyPr/>
+                    <a:lstStyle/>
+                    <a:p>
+                      <a:r>
+                        <a:rPr lang="it-IT" dirty="0"/>
+                        <a:t>9232,4</a:t>
+                      </a:r>
+                      <a:endParaRPr lang="en-GB" dirty="0"/>
+                    </a:p>
+                  </a:txBody>
+                  <a:tcPr/>
+                </a:tc>
+                <a:extLst>
+                  <a:ext uri="{0D108BD9-81ED-4DB2-BD59-A6C34878D82A}">
+                    <a16:rowId xmlns:a16="http://schemas.microsoft.com/office/drawing/2014/main" val="774249562"/>
+                  </a:ext>
+                </a:extLst>
+              </a:tr>
+              <a:tr h="370840">
+                <a:tc>
+                  <a:txBody>
+                    <a:bodyPr/>
+                    <a:lstStyle/>
+                    <a:p>
+                      <a:r>
+                        <a:rPr lang="it-IT" dirty="0"/>
+                        <a:t>64</a:t>
+                      </a:r>
+                      <a:endParaRPr lang="en-GB" dirty="0"/>
+                    </a:p>
+                  </a:txBody>
+                  <a:tcPr/>
+                </a:tc>
+                <a:tc>
+                  <a:txBody>
+                    <a:bodyPr/>
+                    <a:lstStyle/>
+                    <a:p>
+                      <a:r>
+                        <a:rPr lang="it-IT" dirty="0"/>
+                        <a:t>10</a:t>
+                      </a:r>
+                      <a:endParaRPr lang="en-GB" dirty="0"/>
+                    </a:p>
+                  </a:txBody>
+                  <a:tcPr/>
+                </a:tc>
+                <a:tc>
+                  <a:txBody>
+                    <a:bodyPr/>
+                    <a:lstStyle/>
+                    <a:p>
+                      <a:r>
+                        <a:rPr lang="it-IT" dirty="0"/>
+                        <a:t>600</a:t>
+                      </a:r>
+                      <a:endParaRPr lang="en-GB" dirty="0"/>
+                    </a:p>
+                  </a:txBody>
+                  <a:tcPr/>
+                </a:tc>
+                <a:tc>
+                  <a:txBody>
+                    <a:bodyPr/>
+                    <a:lstStyle/>
+                    <a:p>
+                      <a:r>
+                        <a:rPr lang="it-IT" dirty="0"/>
+                        <a:t>583</a:t>
+                      </a:r>
+                      <a:endParaRPr lang="en-GB" dirty="0"/>
+                    </a:p>
+                  </a:txBody>
+                  <a:tcPr/>
+                </a:tc>
+                <a:tc>
+                  <a:txBody>
+                    <a:bodyPr/>
+                    <a:lstStyle/>
+                    <a:p>
+                      <a:r>
+                        <a:rPr lang="it-IT" dirty="0"/>
+                        <a:t>3955,8</a:t>
+                      </a:r>
+                      <a:endParaRPr lang="en-GB" dirty="0"/>
+                    </a:p>
+                  </a:txBody>
+                  <a:tcPr/>
+                </a:tc>
+                <a:tc>
+                  <a:txBody>
+                    <a:bodyPr/>
+                    <a:lstStyle/>
+                    <a:p>
+                      <a:r>
+                        <a:rPr lang="it-IT" dirty="0"/>
+                        <a:t>2879,5</a:t>
+                      </a:r>
+                      <a:endParaRPr lang="en-GB" dirty="0"/>
+                    </a:p>
+                  </a:txBody>
+                  <a:tcPr/>
+                </a:tc>
+                <a:tc>
+                  <a:txBody>
+                    <a:bodyPr/>
+                    <a:lstStyle/>
+                    <a:p>
+                      <a:r>
+                        <a:rPr lang="it-IT" dirty="0"/>
+                        <a:t>7524</a:t>
+                      </a:r>
+                      <a:endParaRPr lang="en-GB" dirty="0"/>
+                    </a:p>
+                  </a:txBody>
+                  <a:tcPr/>
+                </a:tc>
+                <a:tc>
+                  <a:txBody>
+                    <a:bodyPr/>
+                    <a:lstStyle/>
+                    <a:p>
+                      <a:r>
+                        <a:rPr lang="it-IT" dirty="0"/>
+                        <a:t>10077,4</a:t>
+                      </a:r>
+                      <a:endParaRPr lang="en-GB" dirty="0"/>
+                    </a:p>
+                  </a:txBody>
+                  <a:tcPr/>
+                </a:tc>
+                <a:tc>
+                  <a:txBody>
+                    <a:bodyPr/>
+                    <a:lstStyle/>
+                    <a:p>
+                      <a:r>
+                        <a:rPr lang="it-IT" dirty="0"/>
+                        <a:t>14978,8</a:t>
+                      </a:r>
+                      <a:endParaRPr lang="en-GB" dirty="0"/>
+                    </a:p>
+                  </a:txBody>
+                  <a:tcPr/>
+                </a:tc>
+                <a:extLst>
+                  <a:ext uri="{0D108BD9-81ED-4DB2-BD59-A6C34878D82A}">
+                    <a16:rowId xmlns:a16="http://schemas.microsoft.com/office/drawing/2014/main" val="3558160451"/>
+                  </a:ext>
+                </a:extLst>
+              </a:tr>
+              <a:tr h="370840">
+                <a:tc>
+                  <a:txBody>
+                    <a:bodyPr/>
+                    <a:lstStyle/>
+                    <a:p>
+                      <a:r>
+                        <a:rPr lang="it-IT" dirty="0"/>
+                        <a:t>64</a:t>
+                      </a:r>
+                      <a:endParaRPr lang="en-GB" dirty="0"/>
+                    </a:p>
+                  </a:txBody>
+                  <a:tcPr/>
+                </a:tc>
+                <a:tc>
+                  <a:txBody>
+                    <a:bodyPr/>
+                    <a:lstStyle/>
+                    <a:p>
+                      <a:r>
+                        <a:rPr lang="it-IT" dirty="0"/>
+                        <a:t>50</a:t>
+                      </a:r>
+                      <a:endParaRPr lang="en-GB" dirty="0"/>
+                    </a:p>
+                  </a:txBody>
+                  <a:tcPr/>
+                </a:tc>
+                <a:tc>
+                  <a:txBody>
+                    <a:bodyPr/>
+                    <a:lstStyle/>
+                    <a:p>
+                      <a:r>
+                        <a:rPr lang="it-IT" dirty="0"/>
+                        <a:t>3000</a:t>
+                      </a:r>
+                      <a:endParaRPr lang="en-GB" dirty="0"/>
+                    </a:p>
+                  </a:txBody>
+                  <a:tcPr/>
+                </a:tc>
+                <a:tc>
+                  <a:txBody>
+                    <a:bodyPr/>
+                    <a:lstStyle/>
+                    <a:p>
+                      <a:r>
+                        <a:rPr lang="it-IT" dirty="0"/>
+                        <a:t>620</a:t>
+                      </a:r>
+                      <a:endParaRPr lang="en-GB" dirty="0"/>
+                    </a:p>
+                  </a:txBody>
+                  <a:tcPr/>
+                </a:tc>
+                <a:tc>
+                  <a:txBody>
+                    <a:bodyPr/>
+                    <a:lstStyle/>
+                    <a:p>
+                      <a:r>
+                        <a:rPr lang="it-IT" dirty="0"/>
+                        <a:t>8963,2</a:t>
+                      </a:r>
+                      <a:endParaRPr lang="en-GB" dirty="0"/>
+                    </a:p>
+                  </a:txBody>
+                  <a:tcPr/>
+                </a:tc>
+                <a:tc>
+                  <a:txBody>
+                    <a:bodyPr/>
+                    <a:lstStyle/>
+                    <a:p>
+                      <a:r>
+                        <a:rPr lang="it-IT" dirty="0"/>
+                        <a:t>8356,5</a:t>
+                      </a:r>
+                      <a:endParaRPr lang="en-GB" dirty="0"/>
+                    </a:p>
+                  </a:txBody>
+                  <a:tcPr/>
+                </a:tc>
+                <a:tc>
+                  <a:txBody>
+                    <a:bodyPr/>
+                    <a:lstStyle/>
+                    <a:p>
+                      <a:r>
+                        <a:rPr lang="it-IT" dirty="0"/>
+                        <a:t>13454,7</a:t>
+                      </a:r>
+                      <a:endParaRPr lang="en-GB" dirty="0"/>
+                    </a:p>
+                  </a:txBody>
+                  <a:tcPr/>
+                </a:tc>
+                <a:tc>
+                  <a:txBody>
+                    <a:bodyPr/>
+                    <a:lstStyle/>
+                    <a:p>
+                      <a:r>
+                        <a:rPr lang="it-IT" dirty="0"/>
+                        <a:t>17848,3</a:t>
+                      </a:r>
+                      <a:endParaRPr lang="en-GB" dirty="0"/>
+                    </a:p>
+                  </a:txBody>
+                  <a:tcPr/>
+                </a:tc>
+                <a:tc>
+                  <a:txBody>
+                    <a:bodyPr/>
+                    <a:lstStyle/>
+                    <a:p>
+                      <a:r>
+                        <a:rPr lang="it-IT" dirty="0"/>
+                        <a:t>21365,5</a:t>
+                      </a:r>
+                      <a:endParaRPr lang="en-GB" dirty="0"/>
+                    </a:p>
+                  </a:txBody>
+                  <a:tcPr/>
+                </a:tc>
+                <a:extLst>
+                  <a:ext uri="{0D108BD9-81ED-4DB2-BD59-A6C34878D82A}">
+                    <a16:rowId xmlns:a16="http://schemas.microsoft.com/office/drawing/2014/main" val="812132949"/>
+                  </a:ext>
+                </a:extLst>
+              </a:tr>
+            </a:tbl>
+          </a:graphicData>
+        </a:graphic>
+      </p:graphicFrame>
+    </p:spTree>
+    <p:extLst>
+      <p:ext uri="{BB962C8B-B14F-4D97-AF65-F5344CB8AC3E}">
+        <p14:creationId xmlns:p14="http://schemas.microsoft.com/office/powerpoint/2010/main" val="3441994837"/>
+      </p:ext>
+    </p:extLst>
+  </p:cSld>
+  <p:clrMapOvr>
+    <a:masterClrMapping/>
+  </p:clrMapOvr>
+</p:sld>
+</file>
+
+<file path=ppt/slides/slide26.xml><?xml version="1.0" encoding="utf-8"?>
+<p:sld xmlns:a="http://schemas.openxmlformats.org/drawingml/2006/main" xmlns:r="http://schemas.openxmlformats.org/officeDocument/2006/relationships" xmlns:p="http://schemas.openxmlformats.org/presentationml/2006/main">
+  <p:cSld>
+    <p:spTree>
+      <p:nvGrpSpPr>
+        <p:cNvPr id="1" name="">
+          <a:extLst>
+            <a:ext uri="{FF2B5EF4-FFF2-40B4-BE49-F238E27FC236}">
+              <a16:creationId xmlns:a16="http://schemas.microsoft.com/office/drawing/2014/main" id="{1F3D43EA-5C6E-2B5D-81ED-0847BBA7E5A1}"/>
+            </a:ext>
+          </a:extLst>
+        </p:cNvPr>
+        <p:cNvGrpSpPr/>
+        <p:nvPr/>
+      </p:nvGrpSpPr>
+      <p:grpSpPr>
+        <a:xfrm>
+          <a:off x="0" y="0"/>
+          <a:ext cx="0" cy="0"/>
+          <a:chOff x="0" y="0"/>
+          <a:chExt cx="0" cy="0"/>
+        </a:xfrm>
+      </p:grpSpPr>
+      <p:sp>
+        <p:nvSpPr>
+          <p:cNvPr id="2" name="Title 1">
+            <a:extLst>
+              <a:ext uri="{FF2B5EF4-FFF2-40B4-BE49-F238E27FC236}">
+                <a16:creationId xmlns:a16="http://schemas.microsoft.com/office/drawing/2014/main" id="{FFBE7D75-476F-89FA-8C2F-1CA9EB68037E}"/>
+              </a:ext>
+            </a:extLst>
+          </p:cNvPr>
+          <p:cNvSpPr>
+            <a:spLocks noGrp="1"/>
+          </p:cNvSpPr>
+          <p:nvPr>
+            <p:ph type="title"/>
+          </p:nvPr>
+        </p:nvSpPr>
+        <p:spPr>
+          <a:xfrm>
+            <a:off x="684212" y="4969113"/>
+            <a:ext cx="8534400" cy="1507067"/>
+          </a:xfrm>
+        </p:spPr>
+        <p:txBody>
+          <a:bodyPr/>
+          <a:lstStyle/>
+          <a:p>
+            <a:r>
+              <a:rPr lang="it-IT" dirty="0"/>
+              <a:t>Grafici di comparazione</a:t>
+            </a:r>
+            <a:endParaRPr lang="en-GB" dirty="0"/>
+          </a:p>
+        </p:txBody>
+      </p:sp>
+      <p:graphicFrame>
+        <p:nvGraphicFramePr>
+          <p:cNvPr id="17" name="Content Placeholder 16">
+            <a:extLst>
+              <a:ext uri="{FF2B5EF4-FFF2-40B4-BE49-F238E27FC236}">
+                <a16:creationId xmlns:a16="http://schemas.microsoft.com/office/drawing/2014/main" id="{82BF6C13-543E-AB26-40C1-17C48C09B94E}"/>
+              </a:ext>
+            </a:extLst>
+          </p:cNvPr>
+          <p:cNvGraphicFramePr>
+            <a:graphicFrameLocks noGrp="1"/>
+          </p:cNvGraphicFramePr>
+          <p:nvPr>
+            <p:ph idx="1"/>
+            <p:extLst>
+              <p:ext uri="{D42A27DB-BD31-4B8C-83A1-F6EECF244321}">
+                <p14:modId xmlns:p14="http://schemas.microsoft.com/office/powerpoint/2010/main" val="402351603"/>
+              </p:ext>
+            </p:extLst>
+          </p:nvPr>
+        </p:nvGraphicFramePr>
+        <p:xfrm>
+          <a:off x="684212" y="243348"/>
+          <a:ext cx="4231916" cy="2519516"/>
+        </p:xfrm>
+        <a:graphic>
+          <a:graphicData uri="http://schemas.openxmlformats.org/drawingml/2006/chart">
+            <c:chart xmlns:c="http://schemas.openxmlformats.org/drawingml/2006/chart" xmlns:r="http://schemas.openxmlformats.org/officeDocument/2006/relationships" r:id="rId2"/>
+          </a:graphicData>
+        </a:graphic>
+      </p:graphicFrame>
+      <p:graphicFrame>
+        <p:nvGraphicFramePr>
+          <p:cNvPr id="18" name="Content Placeholder 16">
+            <a:extLst>
+              <a:ext uri="{FF2B5EF4-FFF2-40B4-BE49-F238E27FC236}">
+                <a16:creationId xmlns:a16="http://schemas.microsoft.com/office/drawing/2014/main" id="{BBE59B32-9D08-9A30-1EE7-01EBEB281DBC}"/>
+              </a:ext>
+            </a:extLst>
+          </p:cNvPr>
+          <p:cNvGraphicFramePr>
+            <a:graphicFrameLocks/>
+          </p:cNvGraphicFramePr>
+          <p:nvPr>
+            <p:extLst>
+              <p:ext uri="{D42A27DB-BD31-4B8C-83A1-F6EECF244321}">
+                <p14:modId xmlns:p14="http://schemas.microsoft.com/office/powerpoint/2010/main" val="2194781042"/>
+              </p:ext>
+            </p:extLst>
+          </p:nvPr>
+        </p:nvGraphicFramePr>
+        <p:xfrm>
+          <a:off x="5575762" y="243348"/>
+          <a:ext cx="4231916" cy="2519516"/>
+        </p:xfrm>
+        <a:graphic>
+          <a:graphicData uri="http://schemas.openxmlformats.org/drawingml/2006/chart">
+            <c:chart xmlns:c="http://schemas.openxmlformats.org/drawingml/2006/chart" xmlns:r="http://schemas.openxmlformats.org/officeDocument/2006/relationships" r:id="rId3"/>
+          </a:graphicData>
+        </a:graphic>
+      </p:graphicFrame>
+      <p:graphicFrame>
+        <p:nvGraphicFramePr>
+          <p:cNvPr id="19" name="Content Placeholder 16">
+            <a:extLst>
+              <a:ext uri="{FF2B5EF4-FFF2-40B4-BE49-F238E27FC236}">
+                <a16:creationId xmlns:a16="http://schemas.microsoft.com/office/drawing/2014/main" id="{1B89A083-B5E1-9590-3E15-879009CDFDD8}"/>
+              </a:ext>
+            </a:extLst>
+          </p:cNvPr>
+          <p:cNvGraphicFramePr>
+            <a:graphicFrameLocks/>
+          </p:cNvGraphicFramePr>
+          <p:nvPr>
+            <p:extLst>
+              <p:ext uri="{D42A27DB-BD31-4B8C-83A1-F6EECF244321}">
+                <p14:modId xmlns:p14="http://schemas.microsoft.com/office/powerpoint/2010/main" val="774809670"/>
+              </p:ext>
+            </p:extLst>
+          </p:nvPr>
+        </p:nvGraphicFramePr>
+        <p:xfrm>
+          <a:off x="684212" y="2762864"/>
+          <a:ext cx="4231916" cy="2519516"/>
+        </p:xfrm>
+        <a:graphic>
+          <a:graphicData uri="http://schemas.openxmlformats.org/drawingml/2006/chart">
+            <c:chart xmlns:c="http://schemas.openxmlformats.org/drawingml/2006/chart" xmlns:r="http://schemas.openxmlformats.org/officeDocument/2006/relationships" r:id="rId4"/>
+          </a:graphicData>
+        </a:graphic>
+      </p:graphicFrame>
+      <p:graphicFrame>
+        <p:nvGraphicFramePr>
+          <p:cNvPr id="22" name="Content Placeholder 16">
+            <a:extLst>
+              <a:ext uri="{FF2B5EF4-FFF2-40B4-BE49-F238E27FC236}">
+                <a16:creationId xmlns:a16="http://schemas.microsoft.com/office/drawing/2014/main" id="{078AA1A4-0D8B-5171-2ED5-B750765C80D7}"/>
+              </a:ext>
+            </a:extLst>
+          </p:cNvPr>
+          <p:cNvGraphicFramePr>
+            <a:graphicFrameLocks/>
+          </p:cNvGraphicFramePr>
+          <p:nvPr>
+            <p:extLst>
+              <p:ext uri="{D42A27DB-BD31-4B8C-83A1-F6EECF244321}">
+                <p14:modId xmlns:p14="http://schemas.microsoft.com/office/powerpoint/2010/main" val="3157603686"/>
+              </p:ext>
+            </p:extLst>
+          </p:nvPr>
+        </p:nvGraphicFramePr>
+        <p:xfrm>
+          <a:off x="5575762" y="2762864"/>
+          <a:ext cx="4231916" cy="2519516"/>
+        </p:xfrm>
+        <a:graphic>
+          <a:graphicData uri="http://schemas.openxmlformats.org/drawingml/2006/chart">
+            <c:chart xmlns:c="http://schemas.openxmlformats.org/drawingml/2006/chart" xmlns:r="http://schemas.openxmlformats.org/officeDocument/2006/relationships" r:id="rId5"/>
+          </a:graphicData>
+        </a:graphic>
+      </p:graphicFrame>
+    </p:spTree>
+    <p:extLst>
+      <p:ext uri="{BB962C8B-B14F-4D97-AF65-F5344CB8AC3E}">
+        <p14:creationId xmlns:p14="http://schemas.microsoft.com/office/powerpoint/2010/main" val="4024456562"/>
+      </p:ext>
+    </p:extLst>
+  </p:cSld>
+  <p:clrMapOvr>
+    <a:masterClrMapping/>
+  </p:clrMapOvr>
+</p:sld>
+</file>
+
+<file path=ppt/slides/slide27.xml><?xml version="1.0" encoding="utf-8"?>
 <p:sld xmlns:a="http://schemas.openxmlformats.org/drawingml/2006/main" xmlns:r="http://schemas.openxmlformats.org/officeDocument/2006/relationships" xmlns:p="http://schemas.openxmlformats.org/presentationml/2006/main">
   <p:cSld>
     <p:spTree>
@@ -21831,7 +26507,7 @@
           <p:cNvPr id="2" name="Title 1">
             <a:extLst>
               <a:ext uri="{FF2B5EF4-FFF2-40B4-BE49-F238E27FC236}">
-                <a16:creationId xmlns:a16="http://schemas.microsoft.com/office/drawing/2014/main" id="{20334D19-9D1B-B626-55FF-AA6D2AC3317D}"/>
+                <a16:creationId xmlns:a16="http://schemas.microsoft.com/office/drawing/2014/main" id="{914A01B0-53DF-44BA-926D-4D7DFBDE5F34}"/>
               </a:ext>
             </a:extLst>
           </p:cNvPr>
@@ -21848,10 +26524,10 @@
           <a:lstStyle/>
           <a:p>
             <a:r>
-              <a:rPr lang="it-IT"/>
-              <a:t>LOAD TEST CON BATCH SIZE DIFFERENTE</a:t>
-            </a:r>
-            <a:endParaRPr lang="en-GB"/>
+              <a:rPr lang="it-IT" dirty="0"/>
+              <a:t>INFERENZA PURA PYTHON NATIVO</a:t>
+            </a:r>
+            <a:endParaRPr lang="en-GB" dirty="0"/>
           </a:p>
         </p:txBody>
       </p:sp>
@@ -21860,7 +26536,7 @@
           <p:cNvPr id="3" name="Content Placeholder 2">
             <a:extLst>
               <a:ext uri="{FF2B5EF4-FFF2-40B4-BE49-F238E27FC236}">
-                <a16:creationId xmlns:a16="http://schemas.microsoft.com/office/drawing/2014/main" id="{A03888BB-6501-33FE-32CC-A12AFEC8F0F3}"/>
+                <a16:creationId xmlns:a16="http://schemas.microsoft.com/office/drawing/2014/main" id="{B862671E-91E7-F36B-EB0D-B9A8C675A85C}"/>
               </a:ext>
             </a:extLst>
           </p:cNvPr>
@@ -21871,19 +26547,520 @@
             <p:ph idx="1"/>
           </p:nvPr>
         </p:nvSpPr>
+        <p:spPr>
+          <a:xfrm>
+            <a:off x="684212" y="685801"/>
+            <a:ext cx="8534400" cy="1507068"/>
+          </a:xfrm>
+        </p:spPr>
+        <p:txBody>
+          <a:bodyPr/>
+          <a:lstStyle/>
+          <a:p>
+            <a:pPr marL="0" indent="0">
+              <a:buNone/>
+            </a:pPr>
+            <a:r>
+              <a:rPr lang="it-IT" dirty="0">
+                <a:solidFill>
+                  <a:schemeClr val="tx1"/>
+                </a:solidFill>
+              </a:rPr>
+              <a:t>Per verificare la differenza pura di inferenza tra i modelli si è deciso di eseguire un test da 1000 richieste su 100 secondi per verificare le differenze senza considerare le latenze dovute al trasporto HTTP.</a:t>
+            </a:r>
+            <a:endParaRPr lang="en-GB" dirty="0">
+              <a:solidFill>
+                <a:schemeClr val="tx1"/>
+              </a:solidFill>
+            </a:endParaRPr>
+          </a:p>
+        </p:txBody>
+      </p:sp>
+      <p:graphicFrame>
+        <p:nvGraphicFramePr>
+          <p:cNvPr id="4" name="Table 3">
+            <a:extLst>
+              <a:ext uri="{FF2B5EF4-FFF2-40B4-BE49-F238E27FC236}">
+                <a16:creationId xmlns:a16="http://schemas.microsoft.com/office/drawing/2014/main" id="{F24502A3-229C-5325-9C51-70E5AD8590AB}"/>
+              </a:ext>
+            </a:extLst>
+          </p:cNvPr>
+          <p:cNvGraphicFramePr>
+            <a:graphicFrameLocks noGrp="1"/>
+          </p:cNvGraphicFramePr>
+          <p:nvPr>
+            <p:extLst>
+              <p:ext uri="{D42A27DB-BD31-4B8C-83A1-F6EECF244321}">
+                <p14:modId xmlns:p14="http://schemas.microsoft.com/office/powerpoint/2010/main" val="106835903"/>
+              </p:ext>
+            </p:extLst>
+          </p:nvPr>
+        </p:nvGraphicFramePr>
+        <p:xfrm>
+          <a:off x="785426" y="2174163"/>
+          <a:ext cx="8331972" cy="2450414"/>
+        </p:xfrm>
+        <a:graphic>
+          <a:graphicData uri="http://schemas.openxmlformats.org/drawingml/2006/table">
+            <a:tbl>
+              <a:tblPr firstRow="1" bandRow="1">
+                <a:tableStyleId>{5C22544A-7EE6-4342-B048-85BDC9FD1C3A}</a:tableStyleId>
+              </a:tblPr>
+              <a:tblGrid>
+                <a:gridCol w="1388662">
+                  <a:extLst>
+                    <a:ext uri="{9D8B030D-6E8A-4147-A177-3AD203B41FA5}">
+                      <a16:colId xmlns:a16="http://schemas.microsoft.com/office/drawing/2014/main" val="3618603369"/>
+                    </a:ext>
+                  </a:extLst>
+                </a:gridCol>
+                <a:gridCol w="1388662">
+                  <a:extLst>
+                    <a:ext uri="{9D8B030D-6E8A-4147-A177-3AD203B41FA5}">
+                      <a16:colId xmlns:a16="http://schemas.microsoft.com/office/drawing/2014/main" val="612592813"/>
+                    </a:ext>
+                  </a:extLst>
+                </a:gridCol>
+                <a:gridCol w="1388662">
+                  <a:extLst>
+                    <a:ext uri="{9D8B030D-6E8A-4147-A177-3AD203B41FA5}">
+                      <a16:colId xmlns:a16="http://schemas.microsoft.com/office/drawing/2014/main" val="2275740807"/>
+                    </a:ext>
+                  </a:extLst>
+                </a:gridCol>
+                <a:gridCol w="1388662">
+                  <a:extLst>
+                    <a:ext uri="{9D8B030D-6E8A-4147-A177-3AD203B41FA5}">
+                      <a16:colId xmlns:a16="http://schemas.microsoft.com/office/drawing/2014/main" val="3598941634"/>
+                    </a:ext>
+                  </a:extLst>
+                </a:gridCol>
+                <a:gridCol w="1388662">
+                  <a:extLst>
+                    <a:ext uri="{9D8B030D-6E8A-4147-A177-3AD203B41FA5}">
+                      <a16:colId xmlns:a16="http://schemas.microsoft.com/office/drawing/2014/main" val="1146333347"/>
+                    </a:ext>
+                  </a:extLst>
+                </a:gridCol>
+                <a:gridCol w="1388662">
+                  <a:extLst>
+                    <a:ext uri="{9D8B030D-6E8A-4147-A177-3AD203B41FA5}">
+                      <a16:colId xmlns:a16="http://schemas.microsoft.com/office/drawing/2014/main" val="52857491"/>
+                    </a:ext>
+                  </a:extLst>
+                </a:gridCol>
+              </a:tblGrid>
+              <a:tr h="1163785">
+                <a:tc>
+                  <a:txBody>
+                    <a:bodyPr/>
+                    <a:lstStyle/>
+                    <a:p>
+                      <a:r>
+                        <a:rPr lang="it-IT" dirty="0"/>
+                        <a:t>Modello</a:t>
+                      </a:r>
+                      <a:endParaRPr lang="en-GB" dirty="0"/>
+                    </a:p>
+                  </a:txBody>
+                  <a:tcPr/>
+                </a:tc>
+                <a:tc>
+                  <a:txBody>
+                    <a:bodyPr/>
+                    <a:lstStyle/>
+                    <a:p>
+                      <a:r>
+                        <a:rPr lang="it-IT" dirty="0"/>
+                        <a:t>Media latenze (</a:t>
+                      </a:r>
+                      <a:r>
+                        <a:rPr lang="it-IT" dirty="0" err="1"/>
+                        <a:t>ms</a:t>
+                      </a:r>
+                      <a:r>
+                        <a:rPr lang="it-IT" dirty="0"/>
+                        <a:t>)</a:t>
+                      </a:r>
+                      <a:endParaRPr lang="en-GB" dirty="0"/>
+                    </a:p>
+                  </a:txBody>
+                  <a:tcPr/>
+                </a:tc>
+                <a:tc>
+                  <a:txBody>
+                    <a:bodyPr/>
+                    <a:lstStyle/>
+                    <a:p>
+                      <a:r>
+                        <a:rPr lang="it-IT" dirty="0"/>
+                        <a:t>P50 (</a:t>
+                      </a:r>
+                      <a:r>
+                        <a:rPr lang="it-IT" dirty="0" err="1"/>
+                        <a:t>ms</a:t>
+                      </a:r>
+                      <a:r>
+                        <a:rPr lang="it-IT" dirty="0"/>
+                        <a:t>)</a:t>
+                      </a:r>
+                      <a:endParaRPr lang="en-GB" dirty="0"/>
+                    </a:p>
+                  </a:txBody>
+                  <a:tcPr/>
+                </a:tc>
+                <a:tc>
+                  <a:txBody>
+                    <a:bodyPr/>
+                    <a:lstStyle/>
+                    <a:p>
+                      <a:r>
+                        <a:rPr lang="it-IT" dirty="0"/>
+                        <a:t>P90 (</a:t>
+                      </a:r>
+                      <a:r>
+                        <a:rPr lang="it-IT" dirty="0" err="1"/>
+                        <a:t>ms</a:t>
+                      </a:r>
+                      <a:r>
+                        <a:rPr lang="it-IT" dirty="0"/>
+                        <a:t>)</a:t>
+                      </a:r>
+                      <a:endParaRPr lang="en-GB" dirty="0"/>
+                    </a:p>
+                  </a:txBody>
+                  <a:tcPr/>
+                </a:tc>
+                <a:tc>
+                  <a:txBody>
+                    <a:bodyPr/>
+                    <a:lstStyle/>
+                    <a:p>
+                      <a:r>
+                        <a:rPr lang="it-IT" dirty="0"/>
+                        <a:t>P95 (</a:t>
+                      </a:r>
+                      <a:r>
+                        <a:rPr lang="it-IT" dirty="0" err="1"/>
+                        <a:t>ms</a:t>
+                      </a:r>
+                      <a:r>
+                        <a:rPr lang="it-IT" dirty="0"/>
+                        <a:t>)</a:t>
+                      </a:r>
+                      <a:endParaRPr lang="en-GB" dirty="0"/>
+                    </a:p>
+                  </a:txBody>
+                  <a:tcPr/>
+                </a:tc>
+                <a:tc>
+                  <a:txBody>
+                    <a:bodyPr/>
+                    <a:lstStyle/>
+                    <a:p>
+                      <a:r>
+                        <a:rPr lang="it-IT" dirty="0"/>
+                        <a:t>P99 (</a:t>
+                      </a:r>
+                      <a:r>
+                        <a:rPr lang="it-IT" dirty="0" err="1"/>
+                        <a:t>ms</a:t>
+                      </a:r>
+                      <a:r>
+                        <a:rPr lang="it-IT" dirty="0"/>
+                        <a:t>)</a:t>
+                      </a:r>
+                      <a:endParaRPr lang="en-GB" dirty="0"/>
+                    </a:p>
+                  </a:txBody>
+                  <a:tcPr/>
+                </a:tc>
+                <a:extLst>
+                  <a:ext uri="{0D108BD9-81ED-4DB2-BD59-A6C34878D82A}">
+                    <a16:rowId xmlns:a16="http://schemas.microsoft.com/office/drawing/2014/main" val="63102400"/>
+                  </a:ext>
+                </a:extLst>
+              </a:tr>
+              <a:tr h="814650">
+                <a:tc>
+                  <a:txBody>
+                    <a:bodyPr/>
+                    <a:lstStyle/>
+                    <a:p>
+                      <a:r>
+                        <a:rPr lang="it-IT" dirty="0"/>
+                        <a:t>Python puro</a:t>
+                      </a:r>
+                      <a:endParaRPr lang="en-GB" dirty="0"/>
+                    </a:p>
+                  </a:txBody>
+                  <a:tcPr/>
+                </a:tc>
+                <a:tc>
+                  <a:txBody>
+                    <a:bodyPr/>
+                    <a:lstStyle/>
+                    <a:p>
+                      <a:r>
+                        <a:rPr lang="it-IT" dirty="0"/>
+                        <a:t>2,57</a:t>
+                      </a:r>
+                      <a:endParaRPr lang="en-GB" dirty="0"/>
+                    </a:p>
+                  </a:txBody>
+                  <a:tcPr/>
+                </a:tc>
+                <a:tc>
+                  <a:txBody>
+                    <a:bodyPr/>
+                    <a:lstStyle/>
+                    <a:p>
+                      <a:r>
+                        <a:rPr lang="it-IT" dirty="0"/>
+                        <a:t>2,37</a:t>
+                      </a:r>
+                      <a:endParaRPr lang="en-GB" dirty="0"/>
+                    </a:p>
+                  </a:txBody>
+                  <a:tcPr/>
+                </a:tc>
+                <a:tc>
+                  <a:txBody>
+                    <a:bodyPr/>
+                    <a:lstStyle/>
+                    <a:p>
+                      <a:r>
+                        <a:rPr lang="it-IT" dirty="0"/>
+                        <a:t>3.3</a:t>
+                      </a:r>
+                      <a:endParaRPr lang="en-GB" dirty="0"/>
+                    </a:p>
+                  </a:txBody>
+                  <a:tcPr/>
+                </a:tc>
+                <a:tc>
+                  <a:txBody>
+                    <a:bodyPr/>
+                    <a:lstStyle/>
+                    <a:p>
+                      <a:r>
+                        <a:rPr lang="it-IT" dirty="0"/>
+                        <a:t>3.52</a:t>
+                      </a:r>
+                      <a:endParaRPr lang="en-GB" dirty="0"/>
+                    </a:p>
+                  </a:txBody>
+                  <a:tcPr/>
+                </a:tc>
+                <a:tc>
+                  <a:txBody>
+                    <a:bodyPr/>
+                    <a:lstStyle/>
+                    <a:p>
+                      <a:r>
+                        <a:rPr lang="it-IT" dirty="0"/>
+                        <a:t>4.44</a:t>
+                      </a:r>
+                      <a:endParaRPr lang="en-GB" dirty="0"/>
+                    </a:p>
+                  </a:txBody>
+                  <a:tcPr/>
+                </a:tc>
+                <a:extLst>
+                  <a:ext uri="{0D108BD9-81ED-4DB2-BD59-A6C34878D82A}">
+                    <a16:rowId xmlns:a16="http://schemas.microsoft.com/office/drawing/2014/main" val="2623280670"/>
+                  </a:ext>
+                </a:extLst>
+              </a:tr>
+              <a:tr h="471979">
+                <a:tc>
+                  <a:txBody>
+                    <a:bodyPr/>
+                    <a:lstStyle/>
+                    <a:p>
+                      <a:r>
+                        <a:rPr lang="it-IT" dirty="0"/>
+                        <a:t>ONNX</a:t>
+                      </a:r>
+                      <a:endParaRPr lang="en-GB" dirty="0"/>
+                    </a:p>
+                  </a:txBody>
+                  <a:tcPr/>
+                </a:tc>
+                <a:tc>
+                  <a:txBody>
+                    <a:bodyPr/>
+                    <a:lstStyle/>
+                    <a:p>
+                      <a:r>
+                        <a:rPr lang="it-IT" dirty="0"/>
+                        <a:t>1.59</a:t>
+                      </a:r>
+                      <a:endParaRPr lang="en-GB" dirty="0"/>
+                    </a:p>
+                  </a:txBody>
+                  <a:tcPr/>
+                </a:tc>
+                <a:tc>
+                  <a:txBody>
+                    <a:bodyPr/>
+                    <a:lstStyle/>
+                    <a:p>
+                      <a:r>
+                        <a:rPr lang="it-IT" dirty="0"/>
+                        <a:t>1.50</a:t>
+                      </a:r>
+                      <a:endParaRPr lang="en-GB" dirty="0"/>
+                    </a:p>
+                  </a:txBody>
+                  <a:tcPr/>
+                </a:tc>
+                <a:tc>
+                  <a:txBody>
+                    <a:bodyPr/>
+                    <a:lstStyle/>
+                    <a:p>
+                      <a:r>
+                        <a:rPr lang="it-IT" dirty="0"/>
+                        <a:t>1.83</a:t>
+                      </a:r>
+                      <a:endParaRPr lang="en-GB" dirty="0"/>
+                    </a:p>
+                  </a:txBody>
+                  <a:tcPr/>
+                </a:tc>
+                <a:tc>
+                  <a:txBody>
+                    <a:bodyPr/>
+                    <a:lstStyle/>
+                    <a:p>
+                      <a:r>
+                        <a:rPr lang="it-IT" dirty="0"/>
+                        <a:t>2.17</a:t>
+                      </a:r>
+                      <a:endParaRPr lang="en-GB" dirty="0"/>
+                    </a:p>
+                  </a:txBody>
+                  <a:tcPr/>
+                </a:tc>
+                <a:tc>
+                  <a:txBody>
+                    <a:bodyPr/>
+                    <a:lstStyle/>
+                    <a:p>
+                      <a:r>
+                        <a:rPr lang="it-IT" dirty="0"/>
+                        <a:t>2.27</a:t>
+                      </a:r>
+                      <a:endParaRPr lang="en-GB" dirty="0"/>
+                    </a:p>
+                  </a:txBody>
+                  <a:tcPr/>
+                </a:tc>
+                <a:extLst>
+                  <a:ext uri="{0D108BD9-81ED-4DB2-BD59-A6C34878D82A}">
+                    <a16:rowId xmlns:a16="http://schemas.microsoft.com/office/drawing/2014/main" val="3659011149"/>
+                  </a:ext>
+                </a:extLst>
+              </a:tr>
+            </a:tbl>
+          </a:graphicData>
+        </a:graphic>
+      </p:graphicFrame>
+    </p:spTree>
+    <p:extLst>
+      <p:ext uri="{BB962C8B-B14F-4D97-AF65-F5344CB8AC3E}">
+        <p14:creationId xmlns:p14="http://schemas.microsoft.com/office/powerpoint/2010/main" val="281971758"/>
+      </p:ext>
+    </p:extLst>
+  </p:cSld>
+  <p:clrMapOvr>
+    <a:masterClrMapping/>
+  </p:clrMapOvr>
+</p:sld>
+</file>
+
+<file path=ppt/slides/slide28.xml><?xml version="1.0" encoding="utf-8"?>
+<p:sld xmlns:a="http://schemas.openxmlformats.org/drawingml/2006/main" xmlns:r="http://schemas.openxmlformats.org/officeDocument/2006/relationships" xmlns:p="http://schemas.openxmlformats.org/presentationml/2006/main">
+  <p:cSld>
+    <p:spTree>
+      <p:nvGrpSpPr>
+        <p:cNvPr id="1" name=""/>
+        <p:cNvGrpSpPr/>
+        <p:nvPr/>
+      </p:nvGrpSpPr>
+      <p:grpSpPr>
+        <a:xfrm>
+          <a:off x="0" y="0"/>
+          <a:ext cx="0" cy="0"/>
+          <a:chOff x="0" y="0"/>
+          <a:chExt cx="0" cy="0"/>
+        </a:xfrm>
+      </p:grpSpPr>
+      <p:sp>
+        <p:nvSpPr>
+          <p:cNvPr id="2" name="Title 1">
+            <a:extLst>
+              <a:ext uri="{FF2B5EF4-FFF2-40B4-BE49-F238E27FC236}">
+                <a16:creationId xmlns:a16="http://schemas.microsoft.com/office/drawing/2014/main" id="{EF378FDD-4DCC-6A9A-C9F1-8EFB65A7C1A6}"/>
+              </a:ext>
+            </a:extLst>
+          </p:cNvPr>
+          <p:cNvSpPr>
+            <a:spLocks noGrp="1"/>
+          </p:cNvSpPr>
+          <p:nvPr>
+            <p:ph type="title"/>
+          </p:nvPr>
+        </p:nvSpPr>
         <p:spPr/>
         <p:txBody>
           <a:bodyPr/>
           <a:lstStyle/>
           <a:p>
-            <a:endParaRPr lang="en-GB"/>
+            <a:r>
+              <a:rPr lang="it-IT" dirty="0"/>
+              <a:t>Grafico inferenza pura</a:t>
+            </a:r>
+            <a:endParaRPr lang="en-GB" dirty="0"/>
           </a:p>
         </p:txBody>
       </p:sp>
+      <p:graphicFrame>
+        <p:nvGraphicFramePr>
+          <p:cNvPr id="6" name="Content Placeholder 5">
+            <a:extLst>
+              <a:ext uri="{FF2B5EF4-FFF2-40B4-BE49-F238E27FC236}">
+                <a16:creationId xmlns:a16="http://schemas.microsoft.com/office/drawing/2014/main" id="{4863FFB1-320A-ECDC-82FA-C124D6334BB2}"/>
+              </a:ext>
+            </a:extLst>
+          </p:cNvPr>
+          <p:cNvGraphicFramePr>
+            <a:graphicFrameLocks noGrp="1"/>
+          </p:cNvGraphicFramePr>
+          <p:nvPr>
+            <p:ph idx="1"/>
+            <p:extLst>
+              <p:ext uri="{D42A27DB-BD31-4B8C-83A1-F6EECF244321}">
+                <p14:modId xmlns:p14="http://schemas.microsoft.com/office/powerpoint/2010/main" val="3847077645"/>
+              </p:ext>
+            </p:extLst>
+          </p:nvPr>
+        </p:nvGraphicFramePr>
+        <p:xfrm>
+          <a:off x="684213" y="685800"/>
+          <a:ext cx="8534400" cy="3614738"/>
+        </p:xfrm>
+        <a:graphic>
+          <a:graphicData uri="http://schemas.openxmlformats.org/drawingml/2006/chart">
+            <c:chart xmlns:c="http://schemas.openxmlformats.org/drawingml/2006/chart" xmlns:r="http://schemas.openxmlformats.org/officeDocument/2006/relationships" r:id="rId2"/>
+          </a:graphicData>
+        </a:graphic>
+      </p:graphicFrame>
     </p:spTree>
     <p:extLst>
       <p:ext uri="{BB962C8B-B14F-4D97-AF65-F5344CB8AC3E}">
-        <p14:creationId xmlns:p14="http://schemas.microsoft.com/office/powerpoint/2010/main" val="3325261426"/>
+        <p14:creationId xmlns:p14="http://schemas.microsoft.com/office/powerpoint/2010/main" val="2538175876"/>
       </p:ext>
     </p:extLst>
   </p:cSld>

--- a/Gsasrec.pptx
+++ b/Gsasrec.pptx
@@ -15028,7 +15028,7 @@
           <a:p>
             <a:fld id="{842CECD3-3569-4D6E-AA1B-67789CA6B4B3}" type="datetimeFigureOut">
               <a:rPr lang="en-GB" smtClean="0"/>
-              <a:t>15/05/2026</a:t>
+              <a:t>18/05/2026</a:t>
             </a:fld>
             <a:endParaRPr lang="en-GB"/>
           </a:p>
@@ -15464,7 +15464,7 @@
           <a:p>
             <a:fld id="{842CECD3-3569-4D6E-AA1B-67789CA6B4B3}" type="datetimeFigureOut">
               <a:rPr lang="en-GB" smtClean="0"/>
-              <a:t>15/05/2026</a:t>
+              <a:t>18/05/2026</a:t>
             </a:fld>
             <a:endParaRPr lang="en-GB"/>
           </a:p>
@@ -15714,7 +15714,7 @@
           <a:p>
             <a:fld id="{842CECD3-3569-4D6E-AA1B-67789CA6B4B3}" type="datetimeFigureOut">
               <a:rPr lang="en-GB" smtClean="0"/>
-              <a:t>15/05/2026</a:t>
+              <a:t>18/05/2026</a:t>
             </a:fld>
             <a:endParaRPr lang="en-GB"/>
           </a:p>
@@ -16022,7 +16022,7 @@
           <a:p>
             <a:fld id="{842CECD3-3569-4D6E-AA1B-67789CA6B4B3}" type="datetimeFigureOut">
               <a:rPr lang="en-GB" smtClean="0"/>
-              <a:t>15/05/2026</a:t>
+              <a:t>18/05/2026</a:t>
             </a:fld>
             <a:endParaRPr lang="en-GB"/>
           </a:p>
@@ -16340,7 +16340,7 @@
           <a:p>
             <a:fld id="{842CECD3-3569-4D6E-AA1B-67789CA6B4B3}" type="datetimeFigureOut">
               <a:rPr lang="en-GB" smtClean="0"/>
-              <a:t>15/05/2026</a:t>
+              <a:t>18/05/2026</a:t>
             </a:fld>
             <a:endParaRPr lang="en-GB"/>
           </a:p>
@@ -16642,7 +16642,7 @@
           <a:p>
             <a:fld id="{842CECD3-3569-4D6E-AA1B-67789CA6B4B3}" type="datetimeFigureOut">
               <a:rPr lang="en-GB" smtClean="0"/>
-              <a:t>15/05/2026</a:t>
+              <a:t>18/05/2026</a:t>
             </a:fld>
             <a:endParaRPr lang="en-GB"/>
           </a:p>
@@ -17009,7 +17009,7 @@
           <a:p>
             <a:fld id="{842CECD3-3569-4D6E-AA1B-67789CA6B4B3}" type="datetimeFigureOut">
               <a:rPr lang="en-GB" smtClean="0"/>
-              <a:t>15/05/2026</a:t>
+              <a:t>18/05/2026</a:t>
             </a:fld>
             <a:endParaRPr lang="en-GB"/>
           </a:p>
@@ -17183,7 +17183,7 @@
           <a:p>
             <a:fld id="{842CECD3-3569-4D6E-AA1B-67789CA6B4B3}" type="datetimeFigureOut">
               <a:rPr lang="en-GB" smtClean="0"/>
-              <a:t>15/05/2026</a:t>
+              <a:t>18/05/2026</a:t>
             </a:fld>
             <a:endParaRPr lang="en-GB"/>
           </a:p>
@@ -17363,7 +17363,7 @@
           <a:p>
             <a:fld id="{842CECD3-3569-4D6E-AA1B-67789CA6B4B3}" type="datetimeFigureOut">
               <a:rPr lang="en-GB" smtClean="0"/>
-              <a:t>15/05/2026</a:t>
+              <a:t>18/05/2026</a:t>
             </a:fld>
             <a:endParaRPr lang="en-GB"/>
           </a:p>
@@ -17533,7 +17533,7 @@
           <a:p>
             <a:fld id="{842CECD3-3569-4D6E-AA1B-67789CA6B4B3}" type="datetimeFigureOut">
               <a:rPr lang="en-GB" smtClean="0"/>
-              <a:t>15/05/2026</a:t>
+              <a:t>18/05/2026</a:t>
             </a:fld>
             <a:endParaRPr lang="en-GB"/>
           </a:p>
@@ -17783,7 +17783,7 @@
           <a:p>
             <a:fld id="{842CECD3-3569-4D6E-AA1B-67789CA6B4B3}" type="datetimeFigureOut">
               <a:rPr lang="en-GB" smtClean="0"/>
-              <a:t>15/05/2026</a:t>
+              <a:t>18/05/2026</a:t>
             </a:fld>
             <a:endParaRPr lang="en-GB"/>
           </a:p>
@@ -18019,7 +18019,7 @@
           <a:p>
             <a:fld id="{842CECD3-3569-4D6E-AA1B-67789CA6B4B3}" type="datetimeFigureOut">
               <a:rPr lang="en-GB" smtClean="0"/>
-              <a:t>15/05/2026</a:t>
+              <a:t>18/05/2026</a:t>
             </a:fld>
             <a:endParaRPr lang="en-GB"/>
           </a:p>
@@ -18401,7 +18401,7 @@
           <a:p>
             <a:fld id="{842CECD3-3569-4D6E-AA1B-67789CA6B4B3}" type="datetimeFigureOut">
               <a:rPr lang="en-GB" smtClean="0"/>
-              <a:t>15/05/2026</a:t>
+              <a:t>18/05/2026</a:t>
             </a:fld>
             <a:endParaRPr lang="en-GB"/>
           </a:p>
@@ -18519,7 +18519,7 @@
           <a:p>
             <a:fld id="{842CECD3-3569-4D6E-AA1B-67789CA6B4B3}" type="datetimeFigureOut">
               <a:rPr lang="en-GB" smtClean="0"/>
-              <a:t>15/05/2026</a:t>
+              <a:t>18/05/2026</a:t>
             </a:fld>
             <a:endParaRPr lang="en-GB"/>
           </a:p>
@@ -18614,7 +18614,7 @@
           <a:p>
             <a:fld id="{842CECD3-3569-4D6E-AA1B-67789CA6B4B3}" type="datetimeFigureOut">
               <a:rPr lang="en-GB" smtClean="0"/>
-              <a:t>15/05/2026</a:t>
+              <a:t>18/05/2026</a:t>
             </a:fld>
             <a:endParaRPr lang="en-GB"/>
           </a:p>
@@ -18869,7 +18869,7 @@
           <a:p>
             <a:fld id="{842CECD3-3569-4D6E-AA1B-67789CA6B4B3}" type="datetimeFigureOut">
               <a:rPr lang="en-GB" smtClean="0"/>
-              <a:t>15/05/2026</a:t>
+              <a:t>18/05/2026</a:t>
             </a:fld>
             <a:endParaRPr lang="en-GB"/>
           </a:p>
@@ -19152,7 +19152,7 @@
           <a:p>
             <a:fld id="{842CECD3-3569-4D6E-AA1B-67789CA6B4B3}" type="datetimeFigureOut">
               <a:rPr lang="en-GB" smtClean="0"/>
-              <a:t>15/05/2026</a:t>
+              <a:t>18/05/2026</a:t>
             </a:fld>
             <a:endParaRPr lang="en-GB"/>
           </a:p>
@@ -19558,7 +19558,7 @@
           <a:p>
             <a:fld id="{842CECD3-3569-4D6E-AA1B-67789CA6B4B3}" type="datetimeFigureOut">
               <a:rPr lang="en-GB" smtClean="0"/>
-              <a:t>15/05/2026</a:t>
+              <a:t>18/05/2026</a:t>
             </a:fld>
             <a:endParaRPr lang="en-GB"/>
           </a:p>
@@ -23573,7 +23573,7 @@
           <p:nvPr>
             <p:extLst>
               <p:ext uri="{D42A27DB-BD31-4B8C-83A1-F6EECF244321}">
-                <p14:modId xmlns:p14="http://schemas.microsoft.com/office/powerpoint/2010/main" val="4271203619"/>
+                <p14:modId xmlns:p14="http://schemas.microsoft.com/office/powerpoint/2010/main" val="2391205341"/>
               </p:ext>
             </p:extLst>
           </p:nvPr>
@@ -24275,7 +24275,7 @@
                     <a:p>
                       <a:r>
                         <a:rPr lang="it-IT" dirty="0"/>
-                        <a:t>1120</a:t>
+                        <a:t>1244</a:t>
                       </a:r>
                       <a:endParaRPr lang="en-GB" dirty="0"/>
                     </a:p>

--- a/Gsasrec.pptx
+++ b/Gsasrec.pptx
@@ -15028,7 +15028,7 @@
           <a:p>
             <a:fld id="{842CECD3-3569-4D6E-AA1B-67789CA6B4B3}" type="datetimeFigureOut">
               <a:rPr lang="en-GB" smtClean="0"/>
-              <a:t>18/05/2026</a:t>
+              <a:t>26/05/2026</a:t>
             </a:fld>
             <a:endParaRPr lang="en-GB"/>
           </a:p>
@@ -15464,7 +15464,7 @@
           <a:p>
             <a:fld id="{842CECD3-3569-4D6E-AA1B-67789CA6B4B3}" type="datetimeFigureOut">
               <a:rPr lang="en-GB" smtClean="0"/>
-              <a:t>18/05/2026</a:t>
+              <a:t>26/05/2026</a:t>
             </a:fld>
             <a:endParaRPr lang="en-GB"/>
           </a:p>
@@ -15714,7 +15714,7 @@
           <a:p>
             <a:fld id="{842CECD3-3569-4D6E-AA1B-67789CA6B4B3}" type="datetimeFigureOut">
               <a:rPr lang="en-GB" smtClean="0"/>
-              <a:t>18/05/2026</a:t>
+              <a:t>26/05/2026</a:t>
             </a:fld>
             <a:endParaRPr lang="en-GB"/>
           </a:p>
@@ -16022,7 +16022,7 @@
           <a:p>
             <a:fld id="{842CECD3-3569-4D6E-AA1B-67789CA6B4B3}" type="datetimeFigureOut">
               <a:rPr lang="en-GB" smtClean="0"/>
-              <a:t>18/05/2026</a:t>
+              <a:t>26/05/2026</a:t>
             </a:fld>
             <a:endParaRPr lang="en-GB"/>
           </a:p>
@@ -16340,7 +16340,7 @@
           <a:p>
             <a:fld id="{842CECD3-3569-4D6E-AA1B-67789CA6B4B3}" type="datetimeFigureOut">
               <a:rPr lang="en-GB" smtClean="0"/>
-              <a:t>18/05/2026</a:t>
+              <a:t>26/05/2026</a:t>
             </a:fld>
             <a:endParaRPr lang="en-GB"/>
           </a:p>
@@ -16642,7 +16642,7 @@
           <a:p>
             <a:fld id="{842CECD3-3569-4D6E-AA1B-67789CA6B4B3}" type="datetimeFigureOut">
               <a:rPr lang="en-GB" smtClean="0"/>
-              <a:t>18/05/2026</a:t>
+              <a:t>26/05/2026</a:t>
             </a:fld>
             <a:endParaRPr lang="en-GB"/>
           </a:p>
@@ -17009,7 +17009,7 @@
           <a:p>
             <a:fld id="{842CECD3-3569-4D6E-AA1B-67789CA6B4B3}" type="datetimeFigureOut">
               <a:rPr lang="en-GB" smtClean="0"/>
-              <a:t>18/05/2026</a:t>
+              <a:t>26/05/2026</a:t>
             </a:fld>
             <a:endParaRPr lang="en-GB"/>
           </a:p>
@@ -17183,7 +17183,7 @@
           <a:p>
             <a:fld id="{842CECD3-3569-4D6E-AA1B-67789CA6B4B3}" type="datetimeFigureOut">
               <a:rPr lang="en-GB" smtClean="0"/>
-              <a:t>18/05/2026</a:t>
+              <a:t>26/05/2026</a:t>
             </a:fld>
             <a:endParaRPr lang="en-GB"/>
           </a:p>
@@ -17363,7 +17363,7 @@
           <a:p>
             <a:fld id="{842CECD3-3569-4D6E-AA1B-67789CA6B4B3}" type="datetimeFigureOut">
               <a:rPr lang="en-GB" smtClean="0"/>
-              <a:t>18/05/2026</a:t>
+              <a:t>26/05/2026</a:t>
             </a:fld>
             <a:endParaRPr lang="en-GB"/>
           </a:p>
@@ -17533,7 +17533,7 @@
           <a:p>
             <a:fld id="{842CECD3-3569-4D6E-AA1B-67789CA6B4B3}" type="datetimeFigureOut">
               <a:rPr lang="en-GB" smtClean="0"/>
-              <a:t>18/05/2026</a:t>
+              <a:t>26/05/2026</a:t>
             </a:fld>
             <a:endParaRPr lang="en-GB"/>
           </a:p>
@@ -17783,7 +17783,7 @@
           <a:p>
             <a:fld id="{842CECD3-3569-4D6E-AA1B-67789CA6B4B3}" type="datetimeFigureOut">
               <a:rPr lang="en-GB" smtClean="0"/>
-              <a:t>18/05/2026</a:t>
+              <a:t>26/05/2026</a:t>
             </a:fld>
             <a:endParaRPr lang="en-GB"/>
           </a:p>
@@ -18019,7 +18019,7 @@
           <a:p>
             <a:fld id="{842CECD3-3569-4D6E-AA1B-67789CA6B4B3}" type="datetimeFigureOut">
               <a:rPr lang="en-GB" smtClean="0"/>
-              <a:t>18/05/2026</a:t>
+              <a:t>26/05/2026</a:t>
             </a:fld>
             <a:endParaRPr lang="en-GB"/>
           </a:p>
@@ -18401,7 +18401,7 @@
           <a:p>
             <a:fld id="{842CECD3-3569-4D6E-AA1B-67789CA6B4B3}" type="datetimeFigureOut">
               <a:rPr lang="en-GB" smtClean="0"/>
-              <a:t>18/05/2026</a:t>
+              <a:t>26/05/2026</a:t>
             </a:fld>
             <a:endParaRPr lang="en-GB"/>
           </a:p>
@@ -18519,7 +18519,7 @@
           <a:p>
             <a:fld id="{842CECD3-3569-4D6E-AA1B-67789CA6B4B3}" type="datetimeFigureOut">
               <a:rPr lang="en-GB" smtClean="0"/>
-              <a:t>18/05/2026</a:t>
+              <a:t>26/05/2026</a:t>
             </a:fld>
             <a:endParaRPr lang="en-GB"/>
           </a:p>
@@ -18614,7 +18614,7 @@
           <a:p>
             <a:fld id="{842CECD3-3569-4D6E-AA1B-67789CA6B4B3}" type="datetimeFigureOut">
               <a:rPr lang="en-GB" smtClean="0"/>
-              <a:t>18/05/2026</a:t>
+              <a:t>26/05/2026</a:t>
             </a:fld>
             <a:endParaRPr lang="en-GB"/>
           </a:p>
@@ -18869,7 +18869,7 @@
           <a:p>
             <a:fld id="{842CECD3-3569-4D6E-AA1B-67789CA6B4B3}" type="datetimeFigureOut">
               <a:rPr lang="en-GB" smtClean="0"/>
-              <a:t>18/05/2026</a:t>
+              <a:t>26/05/2026</a:t>
             </a:fld>
             <a:endParaRPr lang="en-GB"/>
           </a:p>
@@ -19152,7 +19152,7 @@
           <a:p>
             <a:fld id="{842CECD3-3569-4D6E-AA1B-67789CA6B4B3}" type="datetimeFigureOut">
               <a:rPr lang="en-GB" smtClean="0"/>
-              <a:t>18/05/2026</a:t>
+              <a:t>26/05/2026</a:t>
             </a:fld>
             <a:endParaRPr lang="en-GB"/>
           </a:p>
@@ -19558,7 +19558,7 @@
           <a:p>
             <a:fld id="{842CECD3-3569-4D6E-AA1B-67789CA6B4B3}" type="datetimeFigureOut">
               <a:rPr lang="en-GB" smtClean="0"/>
-              <a:t>18/05/2026</a:t>
+              <a:t>26/05/2026</a:t>
             </a:fld>
             <a:endParaRPr lang="en-GB"/>
           </a:p>

--- a/Gsasrec.pptx
+++ b/Gsasrec.pptx
@@ -15028,7 +15028,7 @@
           <a:p>
             <a:fld id="{842CECD3-3569-4D6E-AA1B-67789CA6B4B3}" type="datetimeFigureOut">
               <a:rPr lang="en-GB" smtClean="0"/>
-              <a:t>26/05/2026</a:t>
+              <a:t>27/05/2026</a:t>
             </a:fld>
             <a:endParaRPr lang="en-GB"/>
           </a:p>
@@ -15464,7 +15464,7 @@
           <a:p>
             <a:fld id="{842CECD3-3569-4D6E-AA1B-67789CA6B4B3}" type="datetimeFigureOut">
               <a:rPr lang="en-GB" smtClean="0"/>
-              <a:t>26/05/2026</a:t>
+              <a:t>27/05/2026</a:t>
             </a:fld>
             <a:endParaRPr lang="en-GB"/>
           </a:p>
@@ -15714,7 +15714,7 @@
           <a:p>
             <a:fld id="{842CECD3-3569-4D6E-AA1B-67789CA6B4B3}" type="datetimeFigureOut">
               <a:rPr lang="en-GB" smtClean="0"/>
-              <a:t>26/05/2026</a:t>
+              <a:t>27/05/2026</a:t>
             </a:fld>
             <a:endParaRPr lang="en-GB"/>
           </a:p>
@@ -16022,7 +16022,7 @@
           <a:p>
             <a:fld id="{842CECD3-3569-4D6E-AA1B-67789CA6B4B3}" type="datetimeFigureOut">
               <a:rPr lang="en-GB" smtClean="0"/>
-              <a:t>26/05/2026</a:t>
+              <a:t>27/05/2026</a:t>
             </a:fld>
             <a:endParaRPr lang="en-GB"/>
           </a:p>
@@ -16340,7 +16340,7 @@
           <a:p>
             <a:fld id="{842CECD3-3569-4D6E-AA1B-67789CA6B4B3}" type="datetimeFigureOut">
               <a:rPr lang="en-GB" smtClean="0"/>
-              <a:t>26/05/2026</a:t>
+              <a:t>27/05/2026</a:t>
             </a:fld>
             <a:endParaRPr lang="en-GB"/>
           </a:p>
@@ -16642,7 +16642,7 @@
           <a:p>
             <a:fld id="{842CECD3-3569-4D6E-AA1B-67789CA6B4B3}" type="datetimeFigureOut">
               <a:rPr lang="en-GB" smtClean="0"/>
-              <a:t>26/05/2026</a:t>
+              <a:t>27/05/2026</a:t>
             </a:fld>
             <a:endParaRPr lang="en-GB"/>
           </a:p>
@@ -17009,7 +17009,7 @@
           <a:p>
             <a:fld id="{842CECD3-3569-4D6E-AA1B-67789CA6B4B3}" type="datetimeFigureOut">
               <a:rPr lang="en-GB" smtClean="0"/>
-              <a:t>26/05/2026</a:t>
+              <a:t>27/05/2026</a:t>
             </a:fld>
             <a:endParaRPr lang="en-GB"/>
           </a:p>
@@ -17183,7 +17183,7 @@
           <a:p>
             <a:fld id="{842CECD3-3569-4D6E-AA1B-67789CA6B4B3}" type="datetimeFigureOut">
               <a:rPr lang="en-GB" smtClean="0"/>
-              <a:t>26/05/2026</a:t>
+              <a:t>27/05/2026</a:t>
             </a:fld>
             <a:endParaRPr lang="en-GB"/>
           </a:p>
@@ -17363,7 +17363,7 @@
           <a:p>
             <a:fld id="{842CECD3-3569-4D6E-AA1B-67789CA6B4B3}" type="datetimeFigureOut">
               <a:rPr lang="en-GB" smtClean="0"/>
-              <a:t>26/05/2026</a:t>
+              <a:t>27/05/2026</a:t>
             </a:fld>
             <a:endParaRPr lang="en-GB"/>
           </a:p>
@@ -17533,7 +17533,7 @@
           <a:p>
             <a:fld id="{842CECD3-3569-4D6E-AA1B-67789CA6B4B3}" type="datetimeFigureOut">
               <a:rPr lang="en-GB" smtClean="0"/>
-              <a:t>26/05/2026</a:t>
+              <a:t>27/05/2026</a:t>
             </a:fld>
             <a:endParaRPr lang="en-GB"/>
           </a:p>
@@ -17783,7 +17783,7 @@
           <a:p>
             <a:fld id="{842CECD3-3569-4D6E-AA1B-67789CA6B4B3}" type="datetimeFigureOut">
               <a:rPr lang="en-GB" smtClean="0"/>
-              <a:t>26/05/2026</a:t>
+              <a:t>27/05/2026</a:t>
             </a:fld>
             <a:endParaRPr lang="en-GB"/>
           </a:p>
@@ -18019,7 +18019,7 @@
           <a:p>
             <a:fld id="{842CECD3-3569-4D6E-AA1B-67789CA6B4B3}" type="datetimeFigureOut">
               <a:rPr lang="en-GB" smtClean="0"/>
-              <a:t>26/05/2026</a:t>
+              <a:t>27/05/2026</a:t>
             </a:fld>
             <a:endParaRPr lang="en-GB"/>
           </a:p>
@@ -18401,7 +18401,7 @@
           <a:p>
             <a:fld id="{842CECD3-3569-4D6E-AA1B-67789CA6B4B3}" type="datetimeFigureOut">
               <a:rPr lang="en-GB" smtClean="0"/>
-              <a:t>26/05/2026</a:t>
+              <a:t>27/05/2026</a:t>
             </a:fld>
             <a:endParaRPr lang="en-GB"/>
           </a:p>
@@ -18519,7 +18519,7 @@
           <a:p>
             <a:fld id="{842CECD3-3569-4D6E-AA1B-67789CA6B4B3}" type="datetimeFigureOut">
               <a:rPr lang="en-GB" smtClean="0"/>
-              <a:t>26/05/2026</a:t>
+              <a:t>27/05/2026</a:t>
             </a:fld>
             <a:endParaRPr lang="en-GB"/>
           </a:p>
@@ -18614,7 +18614,7 @@
           <a:p>
             <a:fld id="{842CECD3-3569-4D6E-AA1B-67789CA6B4B3}" type="datetimeFigureOut">
               <a:rPr lang="en-GB" smtClean="0"/>
-              <a:t>26/05/2026</a:t>
+              <a:t>27/05/2026</a:t>
             </a:fld>
             <a:endParaRPr lang="en-GB"/>
           </a:p>
@@ -18869,7 +18869,7 @@
           <a:p>
             <a:fld id="{842CECD3-3569-4D6E-AA1B-67789CA6B4B3}" type="datetimeFigureOut">
               <a:rPr lang="en-GB" smtClean="0"/>
-              <a:t>26/05/2026</a:t>
+              <a:t>27/05/2026</a:t>
             </a:fld>
             <a:endParaRPr lang="en-GB"/>
           </a:p>
@@ -19152,7 +19152,7 @@
           <a:p>
             <a:fld id="{842CECD3-3569-4D6E-AA1B-67789CA6B4B3}" type="datetimeFigureOut">
               <a:rPr lang="en-GB" smtClean="0"/>
-              <a:t>26/05/2026</a:t>
+              <a:t>27/05/2026</a:t>
             </a:fld>
             <a:endParaRPr lang="en-GB"/>
           </a:p>
@@ -19558,7 +19558,7 @@
           <a:p>
             <a:fld id="{842CECD3-3569-4D6E-AA1B-67789CA6B4B3}" type="datetimeFigureOut">
               <a:rPr lang="en-GB" smtClean="0"/>
-              <a:t>26/05/2026</a:t>
+              <a:t>27/05/2026</a:t>
             </a:fld>
             <a:endParaRPr lang="en-GB"/>
           </a:p>
